--- a/ppts_output_v3/02_企业所得税风险指引.pptx
+++ b/ppts_output_v3/02_企业所得税风险指引.pptx
@@ -4226,28 +4226,6 @@
               <a:t>企业在确认销售额时应重点核实其实际采取的销售方式和收入确认的时点。根据税法规定，针对不同的销售方式确认其销售收入实现的时间。若存在延迟确认的情况，企业及时进行调整纠正。</a:t>
             </a:r>
           </a:p>
-          <a:p>
-            <a:pPr algn="l">
-              <a:lnSpc>
-                <a:spcPts val="1820"/>
-              </a:lnSpc>
-              <a:spcBef>
-                <a:spcPts val="200"/>
-              </a:spcBef>
-              <a:spcAft>
-                <a:spcPts val="200"/>
-              </a:spcAft>
-            </a:pPr>
-            <a:r>
-              <a:rPr sz="1400" b="0">
-                <a:solidFill>
-                  <a:srgbClr val="000000"/>
-                </a:solidFill>
-                <a:latin typeface="Microsoft YaHei"/>
-              </a:rPr>
-              <a:t>50</a:t>
-            </a:r>
-          </a:p>
         </p:txBody>
       </p:sp>
     </p:spTree>
@@ -14462,28 +14440,6 @@
               <a:t>按税法规定一般企业发生与生产经营有关的手续费及佣金支出，按服务协议或合同确认的收入金额的 5%算限额，除委托个人代理外，必须转账支付，否则不得扣除，如有现金支付业务，应做纳税调整。</a:t>
             </a:r>
           </a:p>
-          <a:p>
-            <a:pPr algn="l">
-              <a:lnSpc>
-                <a:spcPts val="1820"/>
-              </a:lnSpc>
-              <a:spcBef>
-                <a:spcPts val="200"/>
-              </a:spcBef>
-              <a:spcAft>
-                <a:spcPts val="200"/>
-              </a:spcAft>
-            </a:pPr>
-            <a:r>
-              <a:rPr sz="1400" b="0">
-                <a:solidFill>
-                  <a:srgbClr val="000000"/>
-                </a:solidFill>
-                <a:latin typeface="Microsoft YaHei"/>
-              </a:rPr>
-              <a:t>84</a:t>
-            </a:r>
-          </a:p>
         </p:txBody>
       </p:sp>
     </p:spTree>
@@ -19893,28 +19849,6 @@
               <a:t>企业需要核查境外经营机构和境内企业的申报表，不得统一核算资产损失。</a:t>
             </a:r>
           </a:p>
-          <a:p>
-            <a:pPr algn="l">
-              <a:lnSpc>
-                <a:spcPts val="1820"/>
-              </a:lnSpc>
-              <a:spcBef>
-                <a:spcPts val="200"/>
-              </a:spcBef>
-              <a:spcAft>
-                <a:spcPts val="200"/>
-              </a:spcAft>
-            </a:pPr>
-            <a:r>
-              <a:rPr sz="1400" b="0">
-                <a:solidFill>
-                  <a:srgbClr val="000000"/>
-                </a:solidFill>
-                <a:latin typeface="Microsoft YaHei"/>
-              </a:rPr>
-              <a:t>102</a:t>
-            </a:r>
-          </a:p>
         </p:txBody>
       </p:sp>
     </p:spTree>
@@ -21189,28 +21123,6 @@
               <a:t>子公司在计算应纳税所得额，进行所得税税前扣除时，如果存在扣除支付给母公司管理费的情况，企业及时进行调整纠正。</a:t>
             </a:r>
           </a:p>
-          <a:p>
-            <a:pPr algn="l">
-              <a:lnSpc>
-                <a:spcPts val="1820"/>
-              </a:lnSpc>
-              <a:spcBef>
-                <a:spcPts val="200"/>
-              </a:spcBef>
-              <a:spcAft>
-                <a:spcPts val="200"/>
-              </a:spcAft>
-            </a:pPr>
-            <a:r>
-              <a:rPr sz="1400" b="0">
-                <a:solidFill>
-                  <a:srgbClr val="000000"/>
-                </a:solidFill>
-                <a:latin typeface="Microsoft YaHei"/>
-              </a:rPr>
-              <a:t>105</a:t>
-            </a:r>
-          </a:p>
         </p:txBody>
       </p:sp>
     </p:spTree>
@@ -21524,28 +21436,6 @@
               <a:t>企业应检查支付给关联方的利息支出中，是否有超过规定比例扣除的部分，对该部分超过规定比例部分，企业是否在计算税款时做税前扣除处理，如果已经发生扣除，企业应当及时进行调整纠正。</a:t>
             </a:r>
           </a:p>
-          <a:p>
-            <a:pPr algn="l">
-              <a:lnSpc>
-                <a:spcPts val="1820"/>
-              </a:lnSpc>
-              <a:spcBef>
-                <a:spcPts val="200"/>
-              </a:spcBef>
-              <a:spcAft>
-                <a:spcPts val="200"/>
-              </a:spcAft>
-            </a:pPr>
-            <a:r>
-              <a:rPr sz="1400" b="0">
-                <a:solidFill>
-                  <a:srgbClr val="000000"/>
-                </a:solidFill>
-                <a:latin typeface="Microsoft YaHei"/>
-              </a:rPr>
-              <a:t>106</a:t>
-            </a:r>
-          </a:p>
         </p:txBody>
       </p:sp>
     </p:spTree>
@@ -25385,28 +25275,6 @@
               <a:t>查看取得土地使用权时签订的协议，是否有向原居民无偿转让回迁安置房，根据回迁安置协议和交房手续，结合已做账务处理，确认是否存在少缴税款的情形。</a:t>
             </a:r>
           </a:p>
-          <a:p>
-            <a:pPr algn="l">
-              <a:lnSpc>
-                <a:spcPts val="1820"/>
-              </a:lnSpc>
-              <a:spcBef>
-                <a:spcPts val="200"/>
-              </a:spcBef>
-              <a:spcAft>
-                <a:spcPts val="200"/>
-              </a:spcAft>
-            </a:pPr>
-            <a:r>
-              <a:rPr sz="1400" b="0">
-                <a:solidFill>
-                  <a:srgbClr val="000000"/>
-                </a:solidFill>
-                <a:latin typeface="Microsoft YaHei"/>
-              </a:rPr>
-              <a:t>122</a:t>
-            </a:r>
-          </a:p>
         </p:txBody>
       </p:sp>
     </p:spTree>
@@ -33816,28 +33684,6 @@
                 <a:latin typeface="Microsoft YaHei"/>
               </a:rPr>
               <a:t>查看“固定资产清理”“营业外支出”“资产处置损益”“投资收益”等科目明细，核实是否发生资产损失以及资产损失的时间、类型、金额和会计处理。自查留存的资产损失资料是否完整，分析申报扣除的政策依据、理由是否充分，申报扣除金额是否真实准确，数据之间逻辑关系是否相符。</a:t>
-            </a:r>
-          </a:p>
-          <a:p>
-            <a:pPr algn="l">
-              <a:lnSpc>
-                <a:spcPts val="1820"/>
-              </a:lnSpc>
-              <a:spcBef>
-                <a:spcPts val="200"/>
-              </a:spcBef>
-              <a:spcAft>
-                <a:spcPts val="200"/>
-              </a:spcAft>
-            </a:pPr>
-            <a:r>
-              <a:rPr sz="1400" b="0">
-                <a:solidFill>
-                  <a:srgbClr val="000000"/>
-                </a:solidFill>
-                <a:latin typeface="Microsoft YaHei"/>
-              </a:rPr>
-              <a:t>158</a:t>
             </a:r>
           </a:p>
         </p:txBody>

--- a/ppts_output_v3/02_企业所得税风险指引.pptx
+++ b/ppts_output_v3/02_企业所得税风险指引.pptx
@@ -3487,7 +3487,7 @@
                 </a:solidFill>
                 <a:latin typeface="Microsoft YaHei"/>
               </a:rPr>
-              <a:t>依据国务院关于《中华人民共和国企业所得税法实施条例》（中华人民共和国国务院令 第 512 号）第十四条、第十五条规定：企业所得税法第六条第（一）项所称销售货物收入，是指企业销售商品、产品、原材料、包装物、低值易耗品以及其他存货取得的收入。</a:t>
+              <a:t>依据国务院关于《中华人民共和国企业所得税法实施条例》（中华人民共和国国务院令 第512号）第十四条、第十五条规定：企业所得税法第六条第（一）项所称销售货物收入，是指企业销售商品、产品、原材料、包装物、低值易耗品以及其他存货取得的收入。</a:t>
             </a:r>
           </a:p>
           <a:p>
@@ -3800,7 +3800,7 @@
                 </a:solidFill>
                 <a:latin typeface="Microsoft YaHei"/>
               </a:rPr>
-              <a:t>财政部会计司在 2018 年 9 月 7 日发布的《关于2018 年度一般企业财务报表格式有关问题的解读》（财会〔2018〕15 号）中明确指出：企业作为个人所得税的扣缴义务人，根据《中华人民共和国个人所得税法》收到的扣缴税款手续费，应作为其他与日常活动相关的项目在利润表的“其他收益”项目中填列。企业财务报表的列报项目因此发生变更的，应当按照《企业会计准则第30 号——财务报表列报》等的相关规定，对可比期间的比较数据进行调整。根据《财政部 税务总局 人民银行关于进一步加强代扣代收代征税款手续费管理的通知》（财行〔2019〕11 号）第四条第三款第四项规定：</a:t>
+              <a:t>财政部会计司在2018年9月7日发布的《关于2018年度一般企业财务报表格式有关问题的解读》（财会〔2018〕15号）中明确指出：企业作为个人所得税的扣缴义务人，根据《中华人民共和国个人所得税法》收到的扣缴税款手续费，应作为其他与日常活动相关的项目在利润表的“其他收益”项目中填列。企业财务报表的列报项目因此发生变更的，应当按照《企业会计准则第30号——财务报表列报》等的相关规定，对可比期间的比较数据进行调整。根据《财政部 税务总局 人民银行关于进一步加强代扣代收代征税款手续费管理的通知》（财行〔2019〕11号）第四条第三款第四项规定：</a:t>
             </a:r>
           </a:p>
           <a:p>
@@ -4113,29 +4113,7 @@
                 </a:solidFill>
                 <a:latin typeface="Microsoft YaHei"/>
               </a:rPr>
-              <a:t>根据《国家税务总局关于确认企业所得税收入若干问题的通知》（国税函〔2008〕875 号）中的规定：（二）符合上款收入确认条件，采取下列商品销售方式的，应按以下规定确认收入实现时间：1.销售商品采用托收承付方式的，在办妥托收手续时确认收入。2.销售商品采取预收款方式的，在发出商品时确认收入。3.销售商品需要安装和检验的，在购买方接受商品以及安装和检验完毕时确认收入。如果安装程序比较简单，可在发出商品时确认收入。</a:t>
-            </a:r>
-          </a:p>
-          <a:p>
-            <a:pPr algn="l">
-              <a:lnSpc>
-                <a:spcPts val="1820"/>
-              </a:lnSpc>
-              <a:spcBef>
-                <a:spcPts val="200"/>
-              </a:spcBef>
-              <a:spcAft>
-                <a:spcPts val="200"/>
-              </a:spcAft>
-            </a:pPr>
-            <a:r>
-              <a:rPr sz="1400" b="0">
-                <a:solidFill>
-                  <a:srgbClr val="000000"/>
-                </a:solidFill>
-                <a:latin typeface="Microsoft YaHei"/>
-              </a:rPr>
-              <a:t>4.销售商品采用支付手续费方式委托代销的，在收到代销清单时确认收入。</a:t>
+              <a:t>根据《国家税务总局关于确认企业所得税收入若干问题的通知》（国税函〔2008〕875号）中的规定：（二）符合上款收入确认条件，采取下列商品销售方式的，应按以下规定确认收入实现时间：1.销售商品采用托收承付方式的，在办妥托收手续时确认收入。2.销售商品采取预收款方式的，在发出商品时确认收入。3.销售商品需要安装和检验的，在购买方接受商品以及安装和检验完毕时确认收入。如果安装程序比较简单，可在发出商品时确认收入。4.销售商品采用支付手续费方式委托代销的，在收到代销清单时确认收入。</a:t>
             </a:r>
           </a:p>
           <a:p>
@@ -4426,7 +4404,7 @@
                 </a:solidFill>
                 <a:latin typeface="Microsoft YaHei"/>
               </a:rPr>
-              <a:t>根据国务院《中华人民共和国企业所得税法实施条例》（中华人民共和国国务院令第 512 号）第九条规定：企业应纳税所得额的计算，以权责发生制为原则，属于当期的收入和费用，不论款项是否收付，均作为当期的收入和费用；不属于当期的收入和费用，即使款项已经在当期收付，均不作为当期的收入和费用。本条例和国务院财政、税务主管部门另有规定的除外。</a:t>
+              <a:t>根据国务院《中华人民共和国企业所得税法实施条例》（中华人民共和国国务院令第512号）第九条规定：企业应纳税所得额的计算，以权责发生制为原则，属于当期的收入和费用，不论款项是否收付，均作为当期的收入和费用；不属于当期的收入和费用，即使款项已经在当期收付，均不作为当期的收入和费用。本条例和国务院财政、税务主管部门另有规定的除外。</a:t>
             </a:r>
           </a:p>
           <a:p>
@@ -4717,7 +4695,7 @@
                 </a:solidFill>
                 <a:latin typeface="Microsoft YaHei"/>
               </a:rPr>
-              <a:t>根据《国家税务总局关于企业取得财产转让等所得企业所得税处理问题的公告》（国家税务总局公告 2010 年第19 号）的规定：一、企业取得财产（包括各类资产、股权、债权等）转让收入、债务重组收入、接受捐赠收入、无法偿付的应付款收入等，不论是以货币形式、还是非货币形式体现，除另有规定外，均应一次性计入确认收入的年度计算缴纳企业所得税。</a:t>
+              <a:t>根据《国家税务总局关于企业取得财产转让等所得企业所得税处理问题的公告》（国家税务总局公告2010年第19号）的规定：一、企业取得财产（包括各类资产、股权、债权等）转让收入、债务重组收入、接受捐赠收入、无法偿付的应付款收入等，不论是以货币形式、还是非货币形式体现，除另有规定外，均应一次性计入确认收入的年度计算缴纳企业所得税。</a:t>
             </a:r>
           </a:p>
           <a:p>
@@ -5030,29 +5008,29 @@
                 </a:solidFill>
                 <a:latin typeface="Microsoft YaHei"/>
               </a:rPr>
-              <a:t>根据《财政部 国家税务总局关于企业资产损失税前扣除政策的通知》 （财税〔2009〕57 号）第四条规定：企业除贷款类债权外的应收、预付账款符合下列条件之一的，减除可收回金额后确认的无法收回的应收、预付款项，可以作为坏账损失在计算应纳税所得额时扣除：（一）债务人依法宣告破产、关闭、解散、被撤销，或者被依法注销、吊销营业执照，其清算财产不足清偿的；（二）债务人死亡，或者依法被宣告失踪、死亡，其财产或者遗产不足清偿的；（三）债务人逾期 3 年以上未清偿，且有确凿证据证明已无力清偿债务的；（四）与债务人达成债务重组协议或法院批准破产重整计划后，无法追偿的；（五）因自然灾害、战争等不可抗力导致无法收回的；（六）国务院财政、税务主管部门规定的其他条件。</a:t>
-            </a:r>
-          </a:p>
-          <a:p>
-            <a:pPr algn="l">
-              <a:lnSpc>
-                <a:spcPts val="1820"/>
-              </a:lnSpc>
-              <a:spcBef>
-                <a:spcPts val="200"/>
-              </a:spcBef>
-              <a:spcAft>
-                <a:spcPts val="200"/>
-              </a:spcAft>
-            </a:pPr>
-            <a:r>
-              <a:rPr sz="1400" b="0">
-                <a:solidFill>
-                  <a:srgbClr val="000000"/>
-                </a:solidFill>
-                <a:latin typeface="Microsoft YaHei"/>
-              </a:rPr>
-              <a:t>根据《中华人民共和国企业所得税法实施条例》（中华人民共和国国务院令第 512 号）第三十二条规定：企业已经作为损失处理的资产，在以后纳税年度又全部收回或者部分收回时，应当计入当期收入。</a:t>
+              <a:t>根据《财政部 国家税务总局关于企业资产损失税前扣除政策的通知》（财税〔2009〕57号）第四条规定：企业除贷款类债权外的应收、预付账款符合下列条件之一的，减除可收回金额后确认的无法收回的应收、预付款项，可以作为坏账损失在计算应纳税所得额时扣除：（一）债务人依法宣告破产、关闭、解散、被撤销，或者被依法注销、吊销营业执照，其清算财产不足清偿的；（二）债务人死亡，或者依法被宣告失踪、死亡，其财产或者遗产不足清偿的；（三）债务人逾期3年以上未清偿，且有确凿证据证明已无力清偿债务的；（四）与债务人达成债务重组协议或法院批准破产重整计划后，无法追偿的；（五）因自然灾害、战争等不可抗力导致无法收回的；（六）国务院财政、税务主管部门规定的其他条件。</a:t>
+            </a:r>
+          </a:p>
+          <a:p>
+            <a:pPr algn="l">
+              <a:lnSpc>
+                <a:spcPts val="1820"/>
+              </a:lnSpc>
+              <a:spcBef>
+                <a:spcPts val="200"/>
+              </a:spcBef>
+              <a:spcAft>
+                <a:spcPts val="200"/>
+              </a:spcAft>
+            </a:pPr>
+            <a:r>
+              <a:rPr sz="1400" b="0">
+                <a:solidFill>
+                  <a:srgbClr val="000000"/>
+                </a:solidFill>
+                <a:latin typeface="Microsoft YaHei"/>
+              </a:rPr>
+              <a:t>根据《中华人民共和国企业所得税法实施条例》（中华人民共和国国务院令第512号）第三十二条规定：企业已经作为损失处理的资产，在以后纳税年度又全部收回或者部分收回时，应当计入当期收入。</a:t>
             </a:r>
           </a:p>
           <a:p>
@@ -5343,7 +5321,7 @@
                 </a:solidFill>
                 <a:latin typeface="Microsoft YaHei"/>
               </a:rPr>
-              <a:t>根据《财政部 国家税务总局关于企业资产损失税前扣除政策的通知》（财税〔2009〕57 号）第十一条规定：企业在计算应纳税所得额时已经扣除的资产损失，在以后纳税年度全部或者部分收回时，其收回部分应当作为收入计入收回当期的应纳税所得额。</a:t>
+              <a:t>根据《财政部 国家税务总局关于企业资产损失税前扣除政策的通知》（财税〔2009〕57号）第十一条规定：企业在计算应纳税所得额时已经扣除的资产损失，在以后纳税年度全部或者部分收回时，其收回部分应当作为收入计入收回当期的应纳税所得额。</a:t>
             </a:r>
           </a:p>
           <a:p>
@@ -5634,7 +5612,7 @@
                 </a:solidFill>
                 <a:latin typeface="Microsoft YaHei"/>
               </a:rPr>
-              <a:t>依据国务院《中华人民共和国企业所得税法实施条例》（中华人民共和国国务院令第 512 号）第二十二条规定：企业所得税法第六条第（九）项所称其他收入，是指企业取得的除企业所得税法第六条第（一）项至第（八）项规定的收入外的其他收入，包括企业资产溢余收入、逾期未退包装物押金收入、确实无法偿付的应付款项、已作坏账损失处理后又收回的应收款项、债务重组收入、补贴收入、违约金收入、汇兑收益等。</a:t>
+              <a:t>依据国务院《中华人民共和国企业所得税法实施条例》（中华人民共和国国务院令第512号）第二十二条规定：企业所得税法第六条第（九）项所称其他收入，是指企业取得的除企业所得税法第六条第（一）项至第（八）项规定的收入外的其他收入，包括企业资产溢余收入、逾期未退包装物押金收入、确实无法偿付的应付款项、已作坏账损失处理后又收回的应收款项、债务重组收入、补贴收入、违约金收入、汇兑收益等。</a:t>
             </a:r>
           </a:p>
           <a:p>
@@ -5925,7 +5903,7 @@
                 </a:solidFill>
                 <a:latin typeface="Microsoft YaHei"/>
               </a:rPr>
-              <a:t>依据国务院《中华人民共和国企业所得税法实施条例》（中华人民共和国国务院令第 512 号）第十四条规定：企业所得税法第六条第（一）项所称销售货物收入，是指企业销售商品、产品、原材料、包装物、低值易耗品以及其他存货取得的收入。</a:t>
+              <a:t>依据国务院《中华人民共和国企业所得税法实施条例》（中华人民共和国国务院令第512号）第十四条规定：企业所得税法第六条第（一）项所称销售货物收入，是指企业销售商品、产品、原材料、包装物、低值易耗品以及其他存货取得的收入。</a:t>
             </a:r>
           </a:p>
           <a:p>
@@ -6348,7 +6326,7 @@
                 </a:solidFill>
                 <a:latin typeface="Microsoft YaHei"/>
               </a:rPr>
-              <a:t>第三条，企业的不征税收入用于支出所形成的费用，不得在计算应纳税所得额时扣除；企业的不征税收入用于支出所形成的资产，其计算的折旧、摊销不得在计算应纳税所得额时扣除。根据《关于专项用途财政性资金企业所得税处理问题的通知》（财税〔2011〕70 号）第一条规定：</a:t>
+              <a:t>第三条，企业的不征税收入用于支出所形成的费用，不得在计算应纳税所得额时扣除；企业的不征税收入用于支出所形成的资产，其计算的折旧、摊销不得在计算应纳税所得额时扣除。根据《关于专项用途财政性资金企业所得税处理问题的通知》（财税〔2011〕70号）第一条规定：</a:t>
             </a:r>
           </a:p>
           <a:p>
@@ -6480,7 +6458,7 @@
                 </a:solidFill>
                 <a:latin typeface="Microsoft YaHei"/>
               </a:rPr>
-              <a:t>企业应核实取得的各种政府财政性资金，如财政补贴、补助、补偿、等，如不符合财税〔2011〕70 号规定的三项条件的，应当按照实际取得收入的时间确认收入，不得作为不征税收入核算。</a:t>
+              <a:t>企业应核实取得的各种政府财政性资金，如财政补贴、补助、补偿、等，如不符合财税〔2011〕70号规定的三项条件的，应当按照实际取得收入的时间确认收入，不得作为不征税收入核算。</a:t>
             </a:r>
           </a:p>
         </p:txBody>
@@ -6683,7 +6661,7 @@
                 </a:solidFill>
                 <a:latin typeface="Microsoft YaHei"/>
               </a:rPr>
-              <a:t>根据《国家税务总局关于企业取得财产转让等所得企业所得税处理问题的公告》（国家税务总局公告 2010 年第19 号）第一条规定：企业取得财产（包括各类资产、股权、债权等）转让收入、债务重组收入、接受捐赠收入、无法偿付的应付款收入等，不论是以货币形式、还是非货币形式体现，除另有规定外，均应一次性计入确认收入的年度计算缴纳企业所得税。</a:t>
+              <a:t>根据《国家税务总局关于企业取得财产转让等所得企业所得税处理问题的公告》（国家税务总局公告2010年第19号）第一条规定：企业取得财产（包括各类资产、股权、债权等）转让收入、债务重组收入、接受捐赠收入、无法偿付的应付款收入等，不论是以货币形式、还是非货币形式体现，除另有规定外，均应一次性计入确认收入的年度计算缴纳企业所得税。</a:t>
             </a:r>
           </a:p>
           <a:p>
@@ -7600,7 +7578,7 @@
                 </a:solidFill>
                 <a:latin typeface="Microsoft YaHei"/>
               </a:rPr>
-              <a:t>根据《国家税务总局关于实施国家重点扶持的公共基础设施项目企业所得税优惠问题的通知》（国税发〔2009〕80 号）中的规定：六、企业同时从事不在《目录》范围的生产经营项目取得的所得，应与享受优惠的公共基础设施项目经营所得分开核算，并合理分摊企业的期间共同费用；没有单独核算的，不得享受上述企业所得税优惠。</a:t>
+              <a:t>根据《国家税务总局关于实施国家重点扶持的公共基础设施项目企业所得税优惠问题的通知》（国税发〔2009〕80号）中的规定：六、企业同时从事不在《目录》范围的生产经营项目取得的所得，应与享受优惠的公共基础设施项目经营所得分开核算，并合理分摊企业的期间共同费用；没有单独核算的，不得享受上述企业所得税优惠。</a:t>
             </a:r>
           </a:p>
           <a:p>
@@ -7847,7 +7825,7 @@
                 </a:solidFill>
                 <a:latin typeface="Microsoft YaHei"/>
               </a:rPr>
-              <a:t>财政资金超过 5 年以上仍未支出或缴回财政，在第六年应作为应税收入总额中，目前很多单位仍然挂账专项应付款中，存在企业所得税风险。</a:t>
+              <a:t>财政资金超过5年以上仍未支出或缴回财政，在第六年应作为应税收入总额中，目前很多单位仍然挂账专项应付款中，存在企业所得税风险。</a:t>
             </a:r>
           </a:p>
           <a:p>
@@ -7891,7 +7869,7 @@
                 </a:solidFill>
                 <a:latin typeface="Microsoft YaHei"/>
               </a:rPr>
-              <a:t>根据《关于专项用途财政性资金企业所得税处理问题的通知》（财税〔2011〕70 号）第三条规定：企业将符合本通知第一条规定条件的财政性资金作不征税收入处理后，在 5 年（60 个月）内未发生支出且未缴回财政部门或其他拨付资金的政府部门的部分，应计入取得该资金第六年的应税收入总额；计入应税收入总额的财政性资金发生的支出，允许在计算应纳税所得额时扣除。</a:t>
+              <a:t>根据《关于专项用途财政性资金企业所得税处理问题的通知》（财税〔2011〕70号）第三条规定：企业将符合本通知第一条规定条件的财政性资金作不征税收入处理后，在5年（60个月）内未发生支出且未缴回财政部门或其他拨付资金的政府部门的部分，应计入取得该资金第六年的应税收入总额；计入应税收入总额的财政性资金发生的支出，允许在计算应纳税所得额时扣除。</a:t>
             </a:r>
           </a:p>
           <a:p>
@@ -7935,7 +7913,7 @@
                 </a:solidFill>
                 <a:latin typeface="Microsoft YaHei"/>
               </a:rPr>
-              <a:t>已作为不征税收入处理的财政资金5 年内未发生支出且未缴回财政，又不计入应纳税所得额的，存在少缴所得税的风险。</a:t>
+              <a:t>已作为不征税收入处理的财政资金5年内未发生支出且未缴回财政，又不计入应纳税所得额的，存在少缴所得税的风险。</a:t>
             </a:r>
           </a:p>
           <a:p>
@@ -7979,7 +7957,7 @@
                 </a:solidFill>
                 <a:latin typeface="Microsoft YaHei"/>
               </a:rPr>
-              <a:t>核查其他应付款、专项应付款等科目贷方发生额，以及其相关拨付文件是否符合不征税财政性资金的相关规定。财政性资金作不征税收入处理后，在 5 年（60 个月）内未发生支出且未缴回财政部门或其他拨付资金的政府部门的部分，应计入取得该资金第六年的应税收入总额；计入应税收入总额的财政性资金发生的支出，允许在计算应纳税所得额时扣除。</a:t>
+              <a:t>核查其他应付款、专项应付款等科目贷方发生额，以及其相关拨付文件是否符合不征税财政性资金的相关规定。财政性资金作不征税收入处理后，在5年（60个月）内未发生支出且未缴回财政部门或其他拨付资金的政府部门的部分，应计入取得该资金第六年的应税收入总额；计入应税收入总额的财政性资金发生的支出，允许在计算应纳税所得额时扣除。</a:t>
             </a:r>
           </a:p>
         </p:txBody>
@@ -8182,7 +8160,7 @@
                 </a:solidFill>
                 <a:latin typeface="Microsoft YaHei"/>
               </a:rPr>
-              <a:t>依据国务院关于《中华人民共和国企业所得税法实施条例》（中华人民共和国国务院令第 512 号）第七十三条：企业使用或者销售的存货的成本计算方法，可以在先进先出法、加权平均法、个别计价法中选用一种。计价方法一经选用，不得随意变更。</a:t>
+              <a:t>依据国务院关于《中华人民共和国企业所得税法实施条例》（中华人民共和国国务院令第512号）第七十三条：企业使用或者销售的存货的成本计算方法，可以在先进先出法、加权平均法、个别计价法中选用一种。计价方法一经选用，不得随意变更。</a:t>
             </a:r>
           </a:p>
           <a:p>
@@ -8473,7 +8451,7 @@
                 </a:solidFill>
                 <a:latin typeface="Microsoft YaHei"/>
               </a:rPr>
-              <a:t>根据《国家税务总局关于企业工资薪金及职工福利费扣除问题的通知》（国税函〔2009〕3 号）的规定：二、关于工资薪金总额问题《实施条例》第四十、四十一、四十二条所称的“工资薪金总额”，是指企业按照本通知第一条规定实际发放的工资薪金总和，不包括企业的职工福利费、职工教育经费、工会经费以及养老保险费、医疗保险费、失业保险费、工伤保险费、生育保险费等社会保险费和住房公积金。属于国有性质的企业，其工资薪金，不得超过政府有关部门给予的限定数额；超过部分，不得计入企业工资薪金总额，也不得在计算企业应纳税所得额时扣除。</a:t>
+              <a:t>根据《国家税务总局关于企业工资薪金及职工福利费扣除问题的通知》（国税函〔2009〕3号）的规定：二、关于工资薪金总额问题《实施条例》第四十、四十一、四十二条所称的“工资薪金总额”，是指企业按照本通知第一条规定实际发放的工资薪金总和，不包括企业的职工福利费、职工教育经费、工会经费以及养老保险费、医疗保险费、失业保险费、工伤保险费、生育保险费等社会保险费和住房公积金。属于国有性质的企业，其工资薪金，不得超过政府有关部门给予的限定数额；超过部分，不得计入企业工资薪金总额，也不得在计算企业应纳税所得额时扣除。</a:t>
             </a:r>
           </a:p>
           <a:p>
@@ -8764,7 +8742,7 @@
                 </a:solidFill>
                 <a:latin typeface="Microsoft YaHei"/>
               </a:rPr>
-              <a:t>根据《企业会计准则第 7 号——非货币性资产交换》（财会〔2019〕8 号）第九条规定：</a:t>
+              <a:t>根据《企业会计准则第7号——非货币性资产交换》（财会〔2019〕8号）第九条规定：</a:t>
             </a:r>
           </a:p>
           <a:p>
@@ -9099,7 +9077,7 @@
                 </a:solidFill>
                 <a:latin typeface="Microsoft YaHei"/>
               </a:rPr>
-              <a:t>根据《国家税务总局关于企业工资薪金及职工福利费扣除问题的通知》（国税函〔2009〕3 号）第三条规定：关于职工福利费问题 《实施条例》第四十条规定的企业职工福利费，包括以下内容：（一）尚未实行分离办社会职能的企业，其内设福利部门所发生的设备、设施和人员费用，包括职工食堂、职工浴室、理发室、医务所、托儿所、疗养院等集体福利部门的设备、设施及维修保养费用和福利部门工作人员的工资薪金、社会保险费、住房公积金、劳务费等。（二）为职工卫生保健、生活、住房、交通等所发放的各项补贴和非货币性福利，包括企业向职工发放的因公外地就医费用、未实行医疗统筹企业职工医疗费用、职工供养直系亲属医疗补贴、供暖费补贴、职工防暑降温费、职工困难补贴、救济费、职工食堂经费补贴、职工交通补贴等。（三）按照其他规定发生的其他职工福利费，包括丧葬补助费、抚恤费、安家费、探亲假路费等。根据《中华人民共和国企业所得税法实施条例》第二十七条的规定：</a:t>
+              <a:t>根据《国家税务总局关于企业工资薪金及职工福利费扣除问题的通知》（国税函〔2009〕3号）第三条规定：关于职工福利费问题 《实施条例》第四十条规定的企业职工福利费，包括以下内容：（一）尚未实行分离办社会职能的企业，其内设福利部门所发生的设备、设施和人员费用，包括职工食堂、职工浴室、理发室、医务所、托儿所、疗养院等集体福利部门的设备、设施及维修保养费用和福利部门工作人员的工资薪金、社会保险费、住房公积金、劳务费等。（二）为职工卫生保健、生活、住房、交通等所发放的各项补贴和非货币性福利，包括企业向职工发放的因公外地就医费用、未实行医疗统筹企业职工医疗费用、职工供养直系亲属医疗补贴、供暖费补贴、职工防暑降温费、职工困难补贴、救济费、职工食堂经费补贴、职工交通补贴等。（三）按照其他规定发生的其他职工福利费，包括丧葬补助费、抚恤费、安家费、探亲假路费等。根据《中华人民共和国企业所得税法实施条例》第二十七条的规定：</a:t>
             </a:r>
           </a:p>
           <a:p>
@@ -9209,7 +9187,7 @@
                 </a:solidFill>
                 <a:latin typeface="Microsoft YaHei"/>
               </a:rPr>
-              <a:t>（国税函〔2009〕3 号）文件关于福利费的规定为正列举，不在列举范围的不能作为福利费处理。根据企业所得税规定，企业支付的离退休职工统筹外退休津贴、统筹外费用，不属于与取得收入直接相关的支出，不能在企业所得税前直接扣除。企业向离退休、遗属、内退和下岗人员（简称三类人员费用）支付各种费用不得在税前扣除，应做纳税调整。</a:t>
+              <a:t>（国税函〔2009〕3号）文件关于福利费的规定为正列举，不在列举范围的不能作为福利费处理。根据企业所得税规定，企业支付的离退休职工统筹外退休津贴、统筹外费用，不属于与取得收入直接相关的支出，不能在企业所得税前直接扣除。企业向离退休、遗属、内退和下岗人员（简称三类人员费用）支付各种费用不得在税前扣除，应做纳税调整。</a:t>
             </a:r>
           </a:p>
         </p:txBody>
@@ -9412,7 +9390,7 @@
                 </a:solidFill>
                 <a:latin typeface="Microsoft YaHei"/>
               </a:rPr>
-              <a:t>依据国务院关于《中华人民共和国企业所得税法实施条例》（中华人民共和国国务院令第 512 号）第四十五条规定：企业依照法律、行政法规有关规定提取的用于环境保护、生态恢复等方面的专项资金，准予扣除。上述专项资金提取后改变用途的，不得扣除。</a:t>
+              <a:t>依据国务院关于《中华人民共和国企业所得税法实施条例》（中华人民共和国国务院令第512号）第四十五条规定：企业依照法律、行政法规有关规定提取的用于环境保护、生态恢复等方面的专项资金，准予扣除。上述专项资金提取后改变用途的，不得扣除。</a:t>
             </a:r>
           </a:p>
           <a:p>
@@ -9703,7 +9681,7 @@
                 </a:solidFill>
                 <a:latin typeface="Microsoft YaHei"/>
               </a:rPr>
-              <a:t>根据《中华人民共和国企业所得税法实施条例》（中华人民共和国国务院令第 512 号）第四十八条规定：企业发生的合理的劳动保护支出，准予扣除。</a:t>
+              <a:t>根据《中华人民共和国企业所得税法实施条例》（中华人民共和国国务院令第512号）第四十八条规定：企业发生的合理的劳动保护支出，准予扣除。</a:t>
             </a:r>
           </a:p>
           <a:p>
@@ -9791,7 +9769,7 @@
                 </a:solidFill>
                 <a:latin typeface="Microsoft YaHei"/>
               </a:rPr>
-              <a:t>根据《劳动保护用品管理规定》（劳部发〔1996〕138 号）规定，劳动保护用品是指劳动者在劳动过程中为免遭或减轻事故伤害或职业危害所配备的防护装备，凡以劳保为名向职工发放的现金、人人有份的生活用品和非防护装备等福利和劳动报酬支出，企业应作纳税调整。</a:t>
+              <a:t>根据《劳动保护用品管理规定》（劳部发〔1996〕138号）规定，劳动保护用品是指劳动者在劳动过程中为免遭或减轻事故伤害或职业危害所配备的防护装备，凡以劳保为名向职工发放的现金、人人有份的生活用品和非防护装备等福利和劳动报酬支出，企业应作纳税调整。</a:t>
             </a:r>
           </a:p>
         </p:txBody>
@@ -9994,7 +9972,7 @@
                 </a:solidFill>
                 <a:latin typeface="Microsoft YaHei"/>
               </a:rPr>
-              <a:t>根据《财政部 国家税务总局关于非货币性资产投资企业所得税政策问题的通知》（财税〔2014〕116 号）第二条规定：企业以非货币性资产对外投资，应对非货币性资产进行评估并按评估后的公允价值扣除计税基础后的余额，计算确认非货币性资产转让所得。企业以非货币性资产对外投资，应于投资协议生效并办理股权登记手续时，确认非货币性资产转让收入的实现。</a:t>
+              <a:t>根据《财政部 国家税务总局关于非货币性资产投资企业所得税政策问题的通知》（财税〔2014〕116号）第二条规定：企业以非货币性资产对外投资，应对非货币性资产进行评估并按评估后的公允价值扣除计税基础后的余额，计算确认非货币性资产转让所得。企业以非货币性资产对外投资，应于投资协议生效并办理股权登记手续时，确认非货币性资产转让收入的实现。</a:t>
             </a:r>
           </a:p>
           <a:p>
@@ -10285,7 +10263,7 @@
                 </a:solidFill>
                 <a:latin typeface="Microsoft YaHei"/>
               </a:rPr>
-              <a:t>根据《国家税务总局关于企业向自然人借款的利息支出企业所得税税前扣除问题的通知》（国税函〔2009〕777 号）中的规定：二、企业向除第一条规定以外的内部职工或其他人员借款的利息支出，其借款情况同时符合以下条件的，其利息支出在不超过按照金融企业同期同类贷款利率计算的数额的部分，根据税法第八条和税法实施条例第二十七条规定，准予扣除。（一）企业与个人之间的借贷是真实、合法、有效的，并且不具有非法集资目的或其他违反法律、法规的行为；（二）企业与个人之间签订了借款合同。</a:t>
+              <a:t>根据《国家税务总局关于企业向自然人借款的利息支出企业所得税税前扣除问题的通知》（国税函〔2009〕777号）中的规定：二、企业向除第一条规定以外的内部职工或其他人员借款的利息支出，其借款情况同时符合以下条件的，其利息支出在不超过按照金融企业同期同类贷款利率计算的数额的部分，根据税法第八条和税法实施条例第二十七条规定，准予扣除。（一）企业与个人之间的借贷是真实、合法、有效的，并且不具有非法集资目的或其他违反法律、法规的行为；（二）企业与个人之间签订了借款合同。</a:t>
             </a:r>
           </a:p>
           <a:p>
@@ -10576,73 +10554,73 @@
                 </a:solidFill>
                 <a:latin typeface="Microsoft YaHei"/>
               </a:rPr>
-              <a:t>根据《国家税务总局关于企业所得税若干问题的公告》（国家税务总局公告 2011 年第 34 号）第一条，关于金融企业同期同类贷款利率确定问题。根据《实施条例》第三十八条规定，非金融企业向非金融企业借款的利息支出，不超过按照金融企业同期同类贷款利率计算的数额的部分，准予税前扣除。鉴于目前我国对金融企业利率要求的具体情况，企业在按照合同要求首次支付利息并进行税前扣除时，应提供“金融企业的同期同类贷款利率情况说明”，以证明其利息支出的合理性。</a:t>
-            </a:r>
-          </a:p>
-          <a:p>
-            <a:pPr algn="l">
-              <a:lnSpc>
-                <a:spcPts val="1820"/>
-              </a:lnSpc>
-              <a:spcBef>
-                <a:spcPts val="200"/>
-              </a:spcBef>
-              <a:spcAft>
-                <a:spcPts val="200"/>
-              </a:spcAft>
-            </a:pPr>
-            <a:r>
-              <a:rPr sz="1400" b="0">
-                <a:solidFill>
-                  <a:srgbClr val="000000"/>
-                </a:solidFill>
-                <a:latin typeface="Microsoft YaHei"/>
-              </a:rPr>
-              <a:t>根据《中华人民共和国企业所得税法》（中华人民共和国主席令第 63 号文件）第四十六条规定：企业从其关联方接受的债权性投资与权益性投资的比例超过规定标准而发生的利息支出，不得在计算应纳税所得额时扣除。</a:t>
-            </a:r>
-          </a:p>
-          <a:p>
-            <a:pPr algn="l">
-              <a:lnSpc>
-                <a:spcPts val="1820"/>
-              </a:lnSpc>
-              <a:spcBef>
-                <a:spcPts val="200"/>
-              </a:spcBef>
-              <a:spcAft>
-                <a:spcPts val="200"/>
-              </a:spcAft>
-            </a:pPr>
-            <a:r>
-              <a:rPr sz="1400" b="0">
-                <a:solidFill>
-                  <a:srgbClr val="000000"/>
-                </a:solidFill>
-                <a:latin typeface="Microsoft YaHei"/>
-              </a:rPr>
-              <a:t>根据《财政部 国家税务总局关于企业关联方利息支出税前扣除标准有关税收政策问题的通知》（财税〔2008〕121 号）规定：企业实际支付给关联方的利息支出，不超过债权性投资与权益性投资2∶1比例和税法及其实施条例有关规定计算的部分，准予扣除。但企业如果能够按照税法及其实施条例的有关规定，提供相关资料，并证明相关交易活动符合独立交易原则的，或者该企业的实际税负不高于境内关联方的，其实际支付给境内关联方的利息支出，在计算应纳税所得额时准予扣除。</a:t>
-            </a:r>
-          </a:p>
-          <a:p>
-            <a:pPr algn="l">
-              <a:lnSpc>
-                <a:spcPts val="1820"/>
-              </a:lnSpc>
-              <a:spcBef>
-                <a:spcPts val="200"/>
-              </a:spcBef>
-              <a:spcAft>
-                <a:spcPts val="200"/>
-              </a:spcAft>
-            </a:pPr>
-            <a:r>
-              <a:rPr sz="1400" b="0">
-                <a:solidFill>
-                  <a:srgbClr val="000000"/>
-                </a:solidFill>
-                <a:latin typeface="Microsoft YaHei"/>
-              </a:rPr>
-              <a:t>根据《国家税务总局关于企业向自然人借款的利息支出企业所得税税前扣除问题的通知》（国税函〔2009〕777 号文件）的规定：一、企业向股东或其他与企业有关联关系的自然人借款的利息支出，应根据《中华人民共和国企业所得税法》（以下简称税法）第四十六条及《财政部 国家税务总局关于企业关联方利息支出税前扣除标准有关税收政策问题的通知》（财税〔2008〕121 号）规定的条件，计算企业所得税扣除额。</a:t>
+              <a:t>根据《国家税务总局关于企业所得税若干问题的公告》（国家税务总局公告2011年第34号）第一条，关于金融企业同期同类贷款利率确定问题。根据《实施条例》第三十八条规定，非金融企业向非金融企业借款的利息支出，不超过按照金融企业同期同类贷款利率计算的数额的部分，准予税前扣除。鉴于目前我国对金融企业利率要求的具体情况，企业在按照合同要求首次支付利息并进行税前扣除时，应提供“金融企业的同期同类贷款利率情况说明”，以证明其利息支出的合理性。</a:t>
+            </a:r>
+          </a:p>
+          <a:p>
+            <a:pPr algn="l">
+              <a:lnSpc>
+                <a:spcPts val="1820"/>
+              </a:lnSpc>
+              <a:spcBef>
+                <a:spcPts val="200"/>
+              </a:spcBef>
+              <a:spcAft>
+                <a:spcPts val="200"/>
+              </a:spcAft>
+            </a:pPr>
+            <a:r>
+              <a:rPr sz="1400" b="0">
+                <a:solidFill>
+                  <a:srgbClr val="000000"/>
+                </a:solidFill>
+                <a:latin typeface="Microsoft YaHei"/>
+              </a:rPr>
+              <a:t>根据《中华人民共和国企业所得税法》（中华人民共和国主席令第63号文件）第四十六条规定：企业从其关联方接受的债权性投资与权益性投资的比例超过规定标准而发生的利息支出，不得在计算应纳税所得额时扣除。</a:t>
+            </a:r>
+          </a:p>
+          <a:p>
+            <a:pPr algn="l">
+              <a:lnSpc>
+                <a:spcPts val="1820"/>
+              </a:lnSpc>
+              <a:spcBef>
+                <a:spcPts val="200"/>
+              </a:spcBef>
+              <a:spcAft>
+                <a:spcPts val="200"/>
+              </a:spcAft>
+            </a:pPr>
+            <a:r>
+              <a:rPr sz="1400" b="0">
+                <a:solidFill>
+                  <a:srgbClr val="000000"/>
+                </a:solidFill>
+                <a:latin typeface="Microsoft YaHei"/>
+              </a:rPr>
+              <a:t>根据《财政部 国家税务总局关于企业关联方利息支出税前扣除标准有关税收政策问题的通知》（财税〔2008〕121号）规定：企业实际支付给关联方的利息支出，不超过债权性投资与权益性投资2∶1比例和税法及其实施条例有关规定计算的部分，准予扣除。但企业如果能够按照税法及其实施条例的有关规定，提供相关资料，并证明相关交易活动符合独立交易原则的，或者该企业的实际税负不高于境内关联方的，其实际支付给境内关联方的利息支出，在计算应纳税所得额时准予扣除。</a:t>
+            </a:r>
+          </a:p>
+          <a:p>
+            <a:pPr algn="l">
+              <a:lnSpc>
+                <a:spcPts val="1820"/>
+              </a:lnSpc>
+              <a:spcBef>
+                <a:spcPts val="200"/>
+              </a:spcBef>
+              <a:spcAft>
+                <a:spcPts val="200"/>
+              </a:spcAft>
+            </a:pPr>
+            <a:r>
+              <a:rPr sz="1400" b="0">
+                <a:solidFill>
+                  <a:srgbClr val="000000"/>
+                </a:solidFill>
+                <a:latin typeface="Microsoft YaHei"/>
+              </a:rPr>
+              <a:t>根据《国家税务总局关于企业向自然人借款的利息支出企业所得税税前扣除问题的通知》（国税函〔2009〕777号文件）的规定：一、企业向股东或其他与企业有关联关系的自然人借款的利息支出，应根据《中华人民共和国企业所得税法》（以下简称税法）第四十六条及《财政部 国家税务总局关于企业关联方利息支出税前扣除标准有关税收政策问题的通知》（财税〔2008〕121号）规定的条件，计算企业所得税扣除额。</a:t>
             </a:r>
           </a:p>
           <a:p>
@@ -10933,7 +10911,7 @@
                 </a:solidFill>
                 <a:latin typeface="Microsoft YaHei"/>
               </a:rPr>
-              <a:t>依据国务院关于《中华人民共和国企业所得税法实施条例》（中华人民共和国国务院令第 512 号）第三十六条规定：除企业依照国家有关规定为特殊工种职工支付的人身安全保险费和国务院财政、税务主管部门规定可以扣除的其他商业保险费外，企业为投资者或者职工支付的商业保险费，不得扣除。根据《国家税务总局关于企业所得税有关问题的公告》（国家税务总局公告 2016 年第 80 号）规定：</a:t>
+              <a:t>依据国务院关于《中华人民共和国企业所得税法实施条例》（中华人民共和国国务院令第512号）第三十六条规定：除企业依照国家有关规定为特殊工种职工支付的人身安全保险费和国务院财政、税务主管部门规定可以扣除的其他商业保险费外，企业为投资者或者职工支付的商业保险费，不得扣除。根据《国家税务总局关于企业所得税有关问题的公告》（国家税务总局公告2016年第80号）规定：</a:t>
             </a:r>
           </a:p>
           <a:p>
@@ -10977,7 +10955,7 @@
                 </a:solidFill>
                 <a:latin typeface="Microsoft YaHei"/>
               </a:rPr>
-              <a:t>根据《国家税务总局关于责任保险费企业所得税税前扣除有关问题的公告》（国家税务总局公告 2018 年第52 号）规定：企业参加雇主责任险、公众责任险等责任保险，按照规定缴纳的保险费，准予在企业所得税税前扣除。</a:t>
+              <a:t>根据《国家税务总局关于责任保险费企业所得税税前扣除有关问题的公告》（国家税务总局公告2018年第52号）规定：企业参加雇主责任险、公众责任险等责任保险，按照规定缴纳的保险费，准予在企业所得税税前扣除。</a:t>
             </a:r>
           </a:p>
           <a:p>
@@ -11647,7 +11625,7 @@
                 </a:solidFill>
                 <a:latin typeface="Microsoft YaHei"/>
               </a:rPr>
-              <a:t>根据《国家税务总局关于企业工资薪金和职工福利费等支出税前扣除问题的公告》（国家税务总局公告 2015 年第34 号）第一条规定：列入企业员工工资薪金制度、固定与工资薪金一起发放的福利性补贴，符合《国家税务总局关于企业工资薪金及职工福利费扣除问题的通知》（国税函〔2009〕3 号）第一条规定的，可作为企业发生的工资薪金支出，按规定在税前扣除。</a:t>
+              <a:t>根据《国家税务总局关于企业工资薪金和职工福利费等支出税前扣除问题的公告》（国家税务总局公告2015年第34号）第一条规定：列入企业员工工资薪金制度、固定与工资薪金一起发放的福利性补贴，符合《国家税务总局关于企业工资薪金及职工福利费扣除问题的通知》（国税函〔2009〕3号）第一条规定的，可作为企业发生的工资薪金支出，按规定在税前扣除。</a:t>
             </a:r>
           </a:p>
           <a:p>
@@ -11713,7 +11691,7 @@
                 </a:solidFill>
                 <a:latin typeface="Microsoft YaHei"/>
               </a:rPr>
-              <a:t>企业在纳税筹划时可能会虚增实际支出的工资薪金来增加企业所得税税前扣除，也有可能对实际发生的职工福利费，超过工资薪金总额 14%的部分税前列支，影响应纳税所得额，产生补缴企业所得税和滞纳金的风险，税务局在稽查职工福利费扣除时，职工福利费扣除额是否超过标准是核查重点，职工福利费超过税法规定扣除标准会对企业所得税应纳税所得额产生影响，存在补缴企业所得税并加收滞纳金和罚款的风险。</a:t>
+              <a:t>企业在纳税筹划时可能会虚增实际支出的工资薪金来增加企业所得税税前扣除，也有可能对实际发生的职工福利费，超过工资薪金总额14%的部分税前列支，影响应纳税所得额，产生补缴企业所得税和滞纳金的风险，税务局在稽查职工福利费扣除时，职工福利费扣除额是否超过标准是核查重点，职工福利费超过税法规定扣除标准会对企业所得税应纳税所得额产生影响，存在补缴企业所得税并加收滞纳金和罚款的风险。</a:t>
             </a:r>
           </a:p>
           <a:p>
@@ -11757,7 +11735,7 @@
                 </a:solidFill>
                 <a:latin typeface="Microsoft YaHei"/>
               </a:rPr>
-              <a:t>企业应该按照法律规定准确计算工资薪金支出，对于不符合工资薪金要求的福利性补贴，应作为国税函〔2009〕3 号文件第三条规定的职工福利费，按规定计算限额税前扣除。建议自查企业发生的职工福利费发生额，职工福利费税前扣除应在税法规定的比例范围内。</a:t>
+              <a:t>企业应该按照法律规定准确计算工资薪金支出，对于不符合工资薪金要求的福利性补贴，应作为国税函〔2009〕3号文件第三条规定的职工福利费，按规定计算限额税前扣除。建议自查企业发生的职工福利费发生额，职工福利费税前扣除应在税法规定的比例范围内。</a:t>
             </a:r>
           </a:p>
         </p:txBody>
@@ -11960,7 +11938,7 @@
                 </a:solidFill>
                 <a:latin typeface="Microsoft YaHei"/>
               </a:rPr>
-              <a:t>根据《中华人民共和国个人所得税法实施条例》（中华人民共和国国务院令第 707 号）第六条规定：</a:t>
+              <a:t>根据《中华人民共和国个人所得税法实施条例》（中华人民共和国国务院令第707号）第六条规定：</a:t>
             </a:r>
           </a:p>
           <a:p>
@@ -12026,29 +12004,29 @@
                 </a:solidFill>
                 <a:latin typeface="Microsoft YaHei"/>
               </a:rPr>
-              <a:t>根据《中华人民共和国企业所得税法实施条例》（中华人民共和国国务院令第 512 号） 第三十四条规定：企业发生的合理的工资、薪金支出，准予扣除。</a:t>
-            </a:r>
-          </a:p>
-          <a:p>
-            <a:pPr algn="l">
-              <a:lnSpc>
-                <a:spcPts val="1820"/>
-              </a:lnSpc>
-              <a:spcBef>
-                <a:spcPts val="200"/>
-              </a:spcBef>
-              <a:spcAft>
-                <a:spcPts val="200"/>
-              </a:spcAft>
-            </a:pPr>
-            <a:r>
-              <a:rPr sz="1400" b="0">
-                <a:solidFill>
-                  <a:srgbClr val="000000"/>
-                </a:solidFill>
-                <a:latin typeface="Microsoft YaHei"/>
-              </a:rPr>
-              <a:t>根据《国家税务总局关于企业工资薪金及职工福利费扣除问题的通知》国税函〔2009〕3 号文件规定：《实施条例》第三十四条所称的“合理工资、薪金”，是指企业按照股东大会、董事会、薪酬委员会或相关管理机构制订的工资、薪金制度规定实际发放给员工的工资、薪金。</a:t>
+              <a:t>根据《中华人民共和国企业所得税法实施条例》（中华人民共和国国务院令第512号）第三十四条规定：企业发生的合理的工资、薪金支出，准予扣除。</a:t>
+            </a:r>
+          </a:p>
+          <a:p>
+            <a:pPr algn="l">
+              <a:lnSpc>
+                <a:spcPts val="1820"/>
+              </a:lnSpc>
+              <a:spcBef>
+                <a:spcPts val="200"/>
+              </a:spcBef>
+              <a:spcAft>
+                <a:spcPts val="200"/>
+              </a:spcAft>
+            </a:pPr>
+            <a:r>
+              <a:rPr sz="1400" b="0">
+                <a:solidFill>
+                  <a:srgbClr val="000000"/>
+                </a:solidFill>
+                <a:latin typeface="Microsoft YaHei"/>
+              </a:rPr>
+              <a:t>根据《国家税务总局关于企业工资薪金及职工福利费扣除问题的通知》国税函〔2009〕3号文件规定：《实施条例》第三十四条所称的“合理工资、薪金”，是指企业按照股东大会、董事会、薪酬委员会或相关管理机构制订的工资、薪金制度规定实际发放给员工的工资、薪金。</a:t>
             </a:r>
           </a:p>
           <a:p>
@@ -12339,29 +12317,29 @@
                 </a:solidFill>
                 <a:latin typeface="Microsoft YaHei"/>
               </a:rPr>
-              <a:t>依据国务院关于《中华人民共和国企业所得税法实施条例》（中华人民共和国国务院令第 512 号）第四十二条：除国务院财政、税务主管部门另有规定外，企业发生的职工教育经费支出，不超过工资薪金总额 2.5%的部分，准予扣除；超过部分，准予在以后纳税年度结转扣除。</a:t>
-            </a:r>
-          </a:p>
-          <a:p>
-            <a:pPr algn="l">
-              <a:lnSpc>
-                <a:spcPts val="1820"/>
-              </a:lnSpc>
-              <a:spcBef>
-                <a:spcPts val="200"/>
-              </a:spcBef>
-              <a:spcAft>
-                <a:spcPts val="200"/>
-              </a:spcAft>
-            </a:pPr>
-            <a:r>
-              <a:rPr sz="1400" b="0">
-                <a:solidFill>
-                  <a:srgbClr val="000000"/>
-                </a:solidFill>
-                <a:latin typeface="Microsoft YaHei"/>
-              </a:rPr>
-              <a:t>根据《财政部 税务总局关于企业职工教育经费税前扣除政策的通知》（财税〔2018〕51 号）规定：</a:t>
+              <a:t>依据国务院关于《中华人民共和国企业所得税法实施条例》（中华人民共和国国务院令第512号）第四十二条：除国务院财政、税务主管部门另有规定外，企业发生的职工教育经费支出，不超过工资薪金总额2.5%的部分，准予扣除；超过部分，准予在以后纳税年度结转扣除。</a:t>
+            </a:r>
+          </a:p>
+          <a:p>
+            <a:pPr algn="l">
+              <a:lnSpc>
+                <a:spcPts val="1820"/>
+              </a:lnSpc>
+              <a:spcBef>
+                <a:spcPts val="200"/>
+              </a:spcBef>
+              <a:spcAft>
+                <a:spcPts val="200"/>
+              </a:spcAft>
+            </a:pPr>
+            <a:r>
+              <a:rPr sz="1400" b="0">
+                <a:solidFill>
+                  <a:srgbClr val="000000"/>
+                </a:solidFill>
+                <a:latin typeface="Microsoft YaHei"/>
+              </a:rPr>
+              <a:t>根据《财政部 税务总局关于企业职工教育经费税前扣除政策的通知》（财税〔2018〕51号）规定：</a:t>
             </a:r>
           </a:p>
           <a:p>
@@ -12405,7 +12383,7 @@
                 </a:solidFill>
                 <a:latin typeface="Microsoft YaHei"/>
               </a:rPr>
-              <a:t>根据《关于印发关于企业职工教育经费提取与使用管理的意见的通知》（财建〔2006〕317 号）规定：</a:t>
+              <a:t>根据《关于印发关于企业职工教育经费提取与使用管理的意见的通知》（财建〔2006〕317号）规定：</a:t>
             </a:r>
           </a:p>
           <a:p>
@@ -12471,7 +12449,7 @@
                 </a:solidFill>
                 <a:latin typeface="Microsoft YaHei"/>
               </a:rPr>
-              <a:t>允许职工培训费全额税前扣除的情形。一是软件和集成电路企业。《财政部国家税务总局关于进一步鼓励软件产业和集成电路产业发展企业所得税政策的通知》（财税〔2012〕27 号）第六条规定：“集成电路设计企业和符合条件软件企业的职工培训费用，应单独进行核算并按实际发生额在计算应纳税所得额时扣除。”二是航空企业。《国家税务总局关于企业所得税若干问题的公告》（国家税务总局公告 2011 年第34 号）第三条规定：“航空企业实际发生的飞行员养成费、飞行训练费、乘务训练费、空中保卫员训练费等空勤训练费用，根据《实施条例》第二十七条规定，可以作为航空企业运输成本在税前扣除。” 三是核电企业。《国家税务总局关于企业所得税应纳税所得额若干问题的公告》（国家税务总局公告 2014 年第29 号）第四条规定：“核力发电企业为培养核电厂操纵员发生的培养费用，可作为企业的发电成本在税前扣除。企业应将核电厂操纵员培养费与员工的职工教育经费严格区分，单独核算，员工实际发生的职工教育经费支出不得计入核电厂操纵员培养费直接扣除。”</a:t>
+              <a:t>允许职工培训费全额税前扣除的情形。一是软件和集成电路企业。《财政部国家税务总局关于进一步鼓励软件产业和集成电路产业发展企业所得税政策的通知》（财税〔2012〕27号）第六条规定：“集成电路设计企业和符合条件软件企业的职工培训费用，应单独进行核算并按实际发生额在计算应纳税所得额时扣除。”二是航空企业。《国家税务总局关于企业所得税若干问题的公告》（国家税务总局公告2011年第34号）第三条规定：“航空企业实际发生的飞行员养成费、飞行训练费、乘务训练费、空中保卫员训练费等空勤训练费用，根据《实施条例》第二十七条规定，可以作为航空企业运输成本在税前扣除。” 三是核电企业。《国家税务总局关于企业所得税应纳税所得额若干问题的公告》（国家税务总局公告2014年第29号）第四条规定：“核力发电企业为培养核电厂操纵员发生的培养费用，可作为企业的发电成本在税前扣除。企业应将核电厂操纵员培养费与员工的职工教育经费严格区分，单独核算，员工实际发生的职工教育经费支出不得计入核电厂操纵员培养费直接扣除。”</a:t>
             </a:r>
           </a:p>
           <a:p>
@@ -13053,95 +13031,73 @@
                 </a:solidFill>
                 <a:latin typeface="Microsoft YaHei"/>
               </a:rPr>
-              <a:t>根据《中华人民共和国企业所得税法》（主席令第63 号）第十条第六项的规定：</a:t>
-            </a:r>
-          </a:p>
-          <a:p>
-            <a:pPr algn="l">
-              <a:lnSpc>
-                <a:spcPts val="1820"/>
-              </a:lnSpc>
-              <a:spcBef>
-                <a:spcPts val="200"/>
-              </a:spcBef>
-              <a:spcAft>
-                <a:spcPts val="200"/>
-              </a:spcAft>
-            </a:pPr>
-            <a:r>
-              <a:rPr sz="1400" b="0">
-                <a:solidFill>
-                  <a:srgbClr val="000000"/>
-                </a:solidFill>
-                <a:latin typeface="Microsoft YaHei"/>
-              </a:rPr>
-              <a:t>在计算应纳税所得额时，赞助支出不得扣除。根据《中华人民共和国企业所得税法实施条例》（国务院令第512 号）第五十四条的规定：</a:t>
-            </a:r>
-          </a:p>
-          <a:p>
-            <a:pPr algn="l">
-              <a:lnSpc>
-                <a:spcPts val="1820"/>
-              </a:lnSpc>
-              <a:spcBef>
-                <a:spcPts val="200"/>
-              </a:spcBef>
-              <a:spcAft>
-                <a:spcPts val="200"/>
-              </a:spcAft>
-            </a:pPr>
-            <a:r>
-              <a:rPr sz="1400" b="0">
-                <a:solidFill>
-                  <a:srgbClr val="000000"/>
-                </a:solidFill>
-                <a:latin typeface="Microsoft YaHei"/>
-              </a:rPr>
-              <a:t>企业所得税法第十条第六项所称赞助支出，是指企业发生的与生产经营活动无关的各种非广告性质支出。根据《中华人民共和国企业所得税法实施条例》（国务院令第512 号）第四十四条的规定：</a:t>
-            </a:r>
-          </a:p>
-          <a:p>
-            <a:pPr algn="l">
-              <a:lnSpc>
-                <a:spcPts val="1820"/>
-              </a:lnSpc>
-              <a:spcBef>
-                <a:spcPts val="200"/>
-              </a:spcBef>
-              <a:spcAft>
-                <a:spcPts val="200"/>
-              </a:spcAft>
-            </a:pPr>
-            <a:r>
-              <a:rPr sz="1400" b="0">
-                <a:solidFill>
-                  <a:srgbClr val="000000"/>
-                </a:solidFill>
-                <a:latin typeface="Microsoft YaHei"/>
-              </a:rPr>
-              <a:t>企业发生的符合条件的广告费和业务宣传费支出，除国务院财政、税务主管部门另有规定外，不超过当年销售（营业）收入15%的部分，准予扣除；超过部分，准予在以后纳税年度结转扣除。根据《财政部 税务总局关于广告费和业务宣传费支出税前扣除有关事项的公告》（财政部 税务总局公告2025 年第16 号）的规定，自 2026 年 1 月 1 日起至 2027 年 12 月 31 日：1.对化妆品制造或销售、医药制造和饮料制造（不含酒类制造）企业发生的广告费和业务宣传费支出，不超过当年销售（营业）收入30%的部分，准予扣除；超过部分，准予在以后纳税年度结转扣除。</a:t>
-            </a:r>
-          </a:p>
-          <a:p>
-            <a:pPr algn="l">
-              <a:lnSpc>
-                <a:spcPts val="1820"/>
-              </a:lnSpc>
-              <a:spcBef>
-                <a:spcPts val="200"/>
-              </a:spcBef>
-              <a:spcAft>
-                <a:spcPts val="200"/>
-              </a:spcAft>
-            </a:pPr>
-            <a:r>
-              <a:rPr sz="1400" b="0">
-                <a:solidFill>
-                  <a:srgbClr val="000000"/>
-                </a:solidFill>
-                <a:latin typeface="Microsoft YaHei"/>
-              </a:rPr>
-              <a:t>2.对签订广告费和业务宣传费分摊协议（以下简称分摊协议）的关联企业，其中一方发生的不超过当年销售（营业）收入税前扣除限额比例内的广告费和业务宣传费支出可以在本企业扣除，也可以将其中的部分或全部按照分摊协议归集至另一方扣除。另一方在计算本企业广告费和业务宣传费支出企业所得税税前扣除限额时，可将按照上述办法归集至本企业的广告费和业务宣传费不计算在内。3.烟草企业的烟草广告费和业务宣传费支出，一律不得在计算应纳税所得额时扣除。</a:t>
+              <a:t>根据《中华人民共和国企业所得税法》（主席令第63号）第十条第六项的规定：</a:t>
+            </a:r>
+          </a:p>
+          <a:p>
+            <a:pPr algn="l">
+              <a:lnSpc>
+                <a:spcPts val="1820"/>
+              </a:lnSpc>
+              <a:spcBef>
+                <a:spcPts val="200"/>
+              </a:spcBef>
+              <a:spcAft>
+                <a:spcPts val="200"/>
+              </a:spcAft>
+            </a:pPr>
+            <a:r>
+              <a:rPr sz="1400" b="0">
+                <a:solidFill>
+                  <a:srgbClr val="000000"/>
+                </a:solidFill>
+                <a:latin typeface="Microsoft YaHei"/>
+              </a:rPr>
+              <a:t>在计算应纳税所得额时，赞助支出不得扣除。根据《中华人民共和国企业所得税法实施条例》（国务院令第512号）第五十四条的规定：</a:t>
+            </a:r>
+          </a:p>
+          <a:p>
+            <a:pPr algn="l">
+              <a:lnSpc>
+                <a:spcPts val="1820"/>
+              </a:lnSpc>
+              <a:spcBef>
+                <a:spcPts val="200"/>
+              </a:spcBef>
+              <a:spcAft>
+                <a:spcPts val="200"/>
+              </a:spcAft>
+            </a:pPr>
+            <a:r>
+              <a:rPr sz="1400" b="0">
+                <a:solidFill>
+                  <a:srgbClr val="000000"/>
+                </a:solidFill>
+                <a:latin typeface="Microsoft YaHei"/>
+              </a:rPr>
+              <a:t>企业所得税法第十条第六项所称赞助支出，是指企业发生的与生产经营活动无关的各种非广告性质支出。根据《中华人民共和国企业所得税法实施条例》（国务院令第512号）第四十四条的规定：</a:t>
+            </a:r>
+          </a:p>
+          <a:p>
+            <a:pPr algn="l">
+              <a:lnSpc>
+                <a:spcPts val="1820"/>
+              </a:lnSpc>
+              <a:spcBef>
+                <a:spcPts val="200"/>
+              </a:spcBef>
+              <a:spcAft>
+                <a:spcPts val="200"/>
+              </a:spcAft>
+            </a:pPr>
+            <a:r>
+              <a:rPr sz="1400" b="0">
+                <a:solidFill>
+                  <a:srgbClr val="000000"/>
+                </a:solidFill>
+                <a:latin typeface="Microsoft YaHei"/>
+              </a:rPr>
+              <a:t>企业发生的符合条件的广告费和业务宣传费支出，除国务院财政、税务主管部门另有规定外，不超过当年销售（营业）收入15%的部分，准予扣除；超过部分，准予在以后纳税年度结转扣除。根据《财政部 税务总局关于广告费和业务宣传费支出税前扣除有关事项的公告》（财政部 税务总局公告2025年第16号）的规定，自2026年1月1日起至2027年12月31日：1.对化妆品制造或销售、医药制造和饮料制造（不含酒类制造）企业发生的广告费和业务宣传费支出，不超过当年销售（营业）收入30%的部分，准予扣除；超过部分，准予在以后纳税年度结转扣除。2.对签订广告费和业务宣传费分摊协议（以下简称分摊协议）的关联企业，其中一方发生的不超过当年销售（营业）收入税前扣除限额比例内的广告费和业务宣传费支出可以在本企业扣除，也可以将其中的部分或全部按照分摊协议归集至另一方扣除。另一方在计算本企业广告费和业务宣传费支出企业所得税税前扣除限额时，可将按照上述办法归集至本企业的广告费和业务宣传费不计算在内。3.烟草企业的烟草广告费和业务宣传费支出，一律不得在计算应纳税所得额时扣除。</a:t>
             </a:r>
           </a:p>
           <a:p>
@@ -13432,7 +13388,7 @@
                 </a:solidFill>
                 <a:latin typeface="Microsoft YaHei"/>
               </a:rPr>
-              <a:t>根据《中华人民共和国企业所得税法实施条例》（中华人民共和国国务院令第 512 号）第四十三条规定：企业发生的与生产经营活动有关的业务招待费支出，按照发生额的 60%扣除，但最高不得超过当年销售（营业）收入的5‰。</a:t>
+              <a:t>根据《中华人民共和国企业所得税法实施条例》（中华人民共和国国务院令第512号）第四十三条规定：企业发生的与生产经营活动有关的业务招待费支出，按照发生额的60%扣除，但最高不得超过当年销售（营业）收入的5‰。</a:t>
             </a:r>
           </a:p>
           <a:p>
@@ -13723,29 +13679,29 @@
                 </a:solidFill>
                 <a:latin typeface="Microsoft YaHei"/>
               </a:rPr>
-              <a:t>根据《中华人民共和国企业所得税法实施条例》（中华人民共和国国务院令第 512 号）第九条规定：</a:t>
-            </a:r>
-          </a:p>
-          <a:p>
-            <a:pPr algn="l">
-              <a:lnSpc>
-                <a:spcPts val="1820"/>
-              </a:lnSpc>
-              <a:spcBef>
-                <a:spcPts val="200"/>
-              </a:spcBef>
-              <a:spcAft>
-                <a:spcPts val="200"/>
-              </a:spcAft>
-            </a:pPr>
-            <a:r>
-              <a:rPr sz="1400" b="0">
-                <a:solidFill>
-                  <a:srgbClr val="000000"/>
-                </a:solidFill>
-                <a:latin typeface="Microsoft YaHei"/>
-              </a:rPr>
-              <a:t>第九条 企业应纳税所得额的计算，以权责发生制为原则，属于当期的收入和费用，不论款项是否收付，均作为当期的收入和费用；不属于当期的收入和费用，即使款项已经在当期收付，均不作为当期的收入和费用。本条例和国务院财政、税务主管部门另有规定的除外。根据《国家税务总局关于贯彻落实企业所得税法若干税收问题的通知》（国税函〔2010〕79 号）第一条规定：根据《实施条例》第十九条的规定，企业提供固定资产、包装物或者其他有形资产的使用权取得的租金收入，应按交易合同或协议规定的承租人应付租金的日期确认收入的实现。其中，如果交易合同或协议中规定租赁期限跨年度，且租金提前一次性支付的，根据《实施条例》第九条规定的收入与费用配比原则，出租人可对上述已确认的收入，在租赁期内，分期均匀计入相关年度收入。</a:t>
+              <a:t>根据《中华人民共和国企业所得税法实施条例》（中华人民共和国国务院令第512号）第九条规定：</a:t>
+            </a:r>
+          </a:p>
+          <a:p>
+            <a:pPr algn="l">
+              <a:lnSpc>
+                <a:spcPts val="1820"/>
+              </a:lnSpc>
+              <a:spcBef>
+                <a:spcPts val="200"/>
+              </a:spcBef>
+              <a:spcAft>
+                <a:spcPts val="200"/>
+              </a:spcAft>
+            </a:pPr>
+            <a:r>
+              <a:rPr sz="1400" b="0">
+                <a:solidFill>
+                  <a:srgbClr val="000000"/>
+                </a:solidFill>
+                <a:latin typeface="Microsoft YaHei"/>
+              </a:rPr>
+              <a:t>第九条 企业应纳税所得额的计算，以权责发生制为原则，属于当期的收入和费用，不论款项是否收付，均作为当期的收入和费用；不属于当期的收入和费用，即使款项已经在当期收付，均不作为当期的收入和费用。本条例和国务院财政、税务主管部门另有规定的除外。根据《国家税务总局关于贯彻落实企业所得税法若干税收问题的通知》（国税函〔2010〕79号）第一条规定：根据《实施条例》第十九条的规定，企业提供固定资产、包装物或者其他有形资产的使用权取得的租金收入，应按交易合同或协议规定的承租人应付租金的日期确认收入的实现。其中，如果交易合同或协议中规定租赁期限跨年度，且租金提前一次性支付的，根据《实施条例》第九条规定的收入与费用配比原则，出租人可对上述已确认的收入，在租赁期内，分期均匀计入相关年度收入。</a:t>
             </a:r>
           </a:p>
           <a:p>
@@ -13992,7 +13948,7 @@
                 </a:solidFill>
                 <a:latin typeface="Microsoft YaHei"/>
               </a:rPr>
-              <a:t>企业为员工支付的补充养老保险费、补充医疗保险费，超过职工工资总额 5%的限定额的部分，仍然在计算企业应纳税所得额时扣除，影响应纳税所得额，进而影响应纳税额，产生补缴税款与缴纳滞纳金、罚款的税务风险。</a:t>
+              <a:t>企业为员工支付的补充养老保险费、补充医疗保险费，超过职工工资总额5%的限定额的部分，仍然在计算企业应纳税所得额时扣除，影响应纳税所得额，进而影响应纳税额，产生补缴税款与缴纳滞纳金、罚款的税务风险。</a:t>
             </a:r>
           </a:p>
           <a:p>
@@ -14036,7 +13992,7 @@
                 </a:solidFill>
                 <a:latin typeface="Microsoft YaHei"/>
               </a:rPr>
-              <a:t>根据《财政部 国家税务总局关于补充养老保险费、补充医疗保险费有关企业所得税政策问题的通知》（财税〔2009〕27 号）的规定：自 2008 年 1 月 1 日起，企业根据国家有关政策规定，为在本企业任职或者受雇的全体员工支付的补充养老保险费、补充医疗保险费，分别在不超过职工工资总额 5%标准内的部分，在计算应纳税所得额时准予扣除；超过的部分，不予扣除。</a:t>
+              <a:t>根据《财政部 国家税务总局关于补充养老保险费、补充医疗保险费有关企业所得税政策问题的通知》（财税〔2009〕27号）的规定：自2008年1月1日起，企业根据国家有关政策规定，为在本企业任职或者受雇的全体员工支付的补充养老保险费、补充医疗保险费，分别在不超过职工工资总额5%标准内的部分，在计算应纳税所得额时准予扣除；超过的部分，不予扣除。</a:t>
             </a:r>
           </a:p>
           <a:p>
@@ -14080,7 +14036,7 @@
                 </a:solidFill>
                 <a:latin typeface="Microsoft YaHei"/>
               </a:rPr>
-              <a:t>企业为员工支付的补充养老保险费、补充医疗保险费，超过职工工资总额 5%的税前列支，影响应纳税所得额，进而影响应纳税额，产生补缴企业所得税和滞纳金的风险。</a:t>
+              <a:t>企业为员工支付的补充养老保险费、补充医疗保险费，超过职工工资总额5%的税前列支，影响应纳税所得额，进而影响应纳税额，产生补缴企业所得税和滞纳金的风险。</a:t>
             </a:r>
           </a:p>
           <a:p>
@@ -14283,7 +14239,7 @@
                 </a:solidFill>
                 <a:latin typeface="Microsoft YaHei"/>
               </a:rPr>
-              <a:t>个别企业为了降低利润少缴所得税，存在多开佣金、手续费发票虚列费用的现象，虚列部分账内往往以现金支付方式体现。按税法规定一般企业发生与生产经营有关的手续费及佣金支出，按服务协议或合同确认的收入金额的 5%算限额，除委托个人代理外，必须转账支付，否则不得扣除。即使是正常经营业务发生的佣金手续费支出，若以现金方式支付，仍不得在税前扣除。</a:t>
+              <a:t>个别企业为了降低利润少缴所得税，存在多开佣金、手续费发票虚列费用的现象，虚列部分账内往往以现金支付方式体现。按税法规定一般企业发生与生产经营有关的手续费及佣金支出，按服务协议或合同确认的收入金额的5%算限额，除委托个人代理外，必须转账支付，否则不得扣除。即使是正常经营业务发生的佣金手续费支出，若以现金方式支付，仍不得在税前扣除。</a:t>
             </a:r>
           </a:p>
           <a:p>
@@ -14327,7 +14283,7 @@
                 </a:solidFill>
                 <a:latin typeface="Microsoft YaHei"/>
               </a:rPr>
-              <a:t>根据《财政部 国家税务总局关于企业手续费及佣金支出税前扣除政策的通知》（财税〔2009〕29 号）规定：一、企业发生与生产经营有关的手续费及佣金支出，不超过以下规定计算限额以内的部分，准予扣除；超过部分，不得扣除。2.其他企业：按与具有合法经营资格中介服务机构或个人（不含交易双方及其雇员、代理人和代表人等）所签订服务协议或合同确认的收入金额的 5%计算限额。</a:t>
+              <a:t>根据《财政部 国家税务总局关于企业手续费及佣金支出税前扣除政策的通知》（财税〔2009〕29号）规定：一、企业发生与生产经营有关的手续费及佣金支出，不超过以下规定计算限额以内的部分，准予扣除；超过部分，不得扣除。2.其他企业：按与具有合法经营资格中介服务机构或个人（不含交易双方及其雇员、代理人和代表人等）所签订服务协议或合同确认的收入金额的5%计算限额。</a:t>
             </a:r>
           </a:p>
           <a:p>
@@ -14437,7 +14393,7 @@
                 </a:solidFill>
                 <a:latin typeface="Microsoft YaHei"/>
               </a:rPr>
-              <a:t>按税法规定一般企业发生与生产经营有关的手续费及佣金支出，按服务协议或合同确认的收入金额的 5%算限额，除委托个人代理外，必须转账支付，否则不得扣除，如有现金支付业务，应做纳税调整。</a:t>
+              <a:t>按税法规定一般企业发生与生产经营有关的手续费及佣金支出，按服务协议或合同确认的收入金额的5%算限额，除委托个人代理外，必须转账支付，否则不得扣除，如有现金支付业务，应做纳税调整。</a:t>
             </a:r>
           </a:p>
         </p:txBody>
@@ -14640,7 +14596,7 @@
                 </a:solidFill>
                 <a:latin typeface="Microsoft YaHei"/>
               </a:rPr>
-              <a:t>根据《财政部 税务总局 科技部关于企业委托境外研究开发费用税前加计扣除有关政策问题的通知》（财税〔2018〕64 号）第一条规定：</a:t>
+              <a:t>根据《财政部 税务总局 科技部关于企业委托境外研究开发费用税前加计扣除有关政策问题的通知》（财税〔2018〕64号）第一条规定：</a:t>
             </a:r>
           </a:p>
           <a:p>
@@ -15019,95 +14975,29 @@
                 </a:solidFill>
                 <a:latin typeface="Microsoft YaHei"/>
               </a:rPr>
-              <a:t>根据《关于完善研究开发费用税前加计扣除政策的通知》（财税〔2015〕119 号）的规定：</a:t>
-            </a:r>
-          </a:p>
-          <a:p>
-            <a:pPr algn="l">
-              <a:lnSpc>
-                <a:spcPts val="1820"/>
-              </a:lnSpc>
-              <a:spcBef>
-                <a:spcPts val="200"/>
-              </a:spcBef>
-              <a:spcAft>
-                <a:spcPts val="200"/>
-              </a:spcAft>
-            </a:pPr>
-            <a:r>
-              <a:rPr sz="1400" b="0">
-                <a:solidFill>
-                  <a:srgbClr val="000000"/>
-                </a:solidFill>
-                <a:latin typeface="Microsoft YaHei"/>
-              </a:rPr>
-              <a:t>（二）下列活动不适用税前加计扣除政策。1.企业产品（服务）的常规性升级。2.对某项科研成果的直接应用，如直接采用公开的新工艺、材料、装置、产品、服务或知识等。</a:t>
-            </a:r>
-          </a:p>
-          <a:p>
-            <a:pPr algn="l">
-              <a:lnSpc>
-                <a:spcPts val="1820"/>
-              </a:lnSpc>
-              <a:spcBef>
-                <a:spcPts val="200"/>
-              </a:spcBef>
-              <a:spcAft>
-                <a:spcPts val="200"/>
-              </a:spcAft>
-            </a:pPr>
-            <a:r>
-              <a:rPr sz="1400" b="0">
-                <a:solidFill>
-                  <a:srgbClr val="000000"/>
-                </a:solidFill>
-                <a:latin typeface="Microsoft YaHei"/>
-              </a:rPr>
-              <a:t>3.企业在商品化后为顾客提供的技术支持活动。4.对现存产品、服务、技术、材料或工艺流程进行的重复或简单改变。</a:t>
-            </a:r>
-          </a:p>
-          <a:p>
-            <a:pPr algn="l">
-              <a:lnSpc>
-                <a:spcPts val="1820"/>
-              </a:lnSpc>
-              <a:spcBef>
-                <a:spcPts val="200"/>
-              </a:spcBef>
-              <a:spcAft>
-                <a:spcPts val="200"/>
-              </a:spcAft>
-            </a:pPr>
-            <a:r>
-              <a:rPr sz="1400" b="0">
-                <a:solidFill>
-                  <a:srgbClr val="000000"/>
-                </a:solidFill>
-                <a:latin typeface="Microsoft YaHei"/>
-              </a:rPr>
-              <a:t>5.市场调查研究、效率调查或管理研究。6.作为工业（服务）流程环节或常规的质量控制、测试分析、维修维护。</a:t>
-            </a:r>
-          </a:p>
-          <a:p>
-            <a:pPr algn="l">
-              <a:lnSpc>
-                <a:spcPts val="1820"/>
-              </a:lnSpc>
-              <a:spcBef>
-                <a:spcPts val="200"/>
-              </a:spcBef>
-              <a:spcAft>
-                <a:spcPts val="200"/>
-              </a:spcAft>
-            </a:pPr>
-            <a:r>
-              <a:rPr sz="1400" b="0">
-                <a:solidFill>
-                  <a:srgbClr val="000000"/>
-                </a:solidFill>
-                <a:latin typeface="Microsoft YaHei"/>
-              </a:rPr>
-              <a:t>7.社会科学、艺术或人文学方面的研究。第四条规定：不适合研发费加计扣除的行业有：1.烟草制造业。2.住宿和餐饮业。3.批发和零售业。4.房地产业。5.租赁和商务服务业。6.娱乐业。7.财政部和国家税务总局规定的其他行业。</a:t>
+              <a:t>根据《关于完善研究开发费用税前加计扣除政策的通知》（财税〔2015〕119号）的规定：</a:t>
+            </a:r>
+          </a:p>
+          <a:p>
+            <a:pPr algn="l">
+              <a:lnSpc>
+                <a:spcPts val="1820"/>
+              </a:lnSpc>
+              <a:spcBef>
+                <a:spcPts val="200"/>
+              </a:spcBef>
+              <a:spcAft>
+                <a:spcPts val="200"/>
+              </a:spcAft>
+            </a:pPr>
+            <a:r>
+              <a:rPr sz="1400" b="0">
+                <a:solidFill>
+                  <a:srgbClr val="000000"/>
+                </a:solidFill>
+                <a:latin typeface="Microsoft YaHei"/>
+              </a:rPr>
+              <a:t>（二）下列活动不适用税前加计扣除政策。1.企业产品（服务）的常规性升级。2.对某项科研成果的直接应用，如直接采用公开的新工艺、材料、装置、产品、服务或知识等。3.企业在商品化后为顾客提供的技术支持活动。4.对现存产品、服务、技术、材料或工艺流程进行的重复或简单改变。5.市场调查研究、效率调查或管理研究。6.作为工业（服务）流程环节或常规的质量控制、测试分析、维修维护。7.社会科学、艺术或人文学方面的研究。第四条规定：不适合研发费加计扣除的行业有：1.烟草制造业。2.住宿和餐饮业。3.批发和零售业。4.房地产业。5.租赁和商务服务业。6.娱乐业。7.财政部和国家税务总局规定的其他行业。</a:t>
             </a:r>
           </a:p>
           <a:p>
@@ -15354,29 +15244,29 @@
                 </a:solidFill>
                 <a:latin typeface="Microsoft YaHei"/>
               </a:rPr>
-              <a:t>自 2023 年 1 月 1 日起，企业研究开发形成无形资产的费用，应该计入无形资产成本，并按照无形资产成本的200%摊销；不能将形成无形资产的研究开发费用费用化计入当期损益在当期加计100%一次扣除。</a:t>
-            </a:r>
-          </a:p>
-          <a:p>
-            <a:pPr algn="l">
-              <a:lnSpc>
-                <a:spcPts val="1820"/>
-              </a:lnSpc>
-              <a:spcBef>
-                <a:spcPts val="200"/>
-              </a:spcBef>
-              <a:spcAft>
-                <a:spcPts val="200"/>
-              </a:spcAft>
-            </a:pPr>
-            <a:r>
-              <a:rPr sz="1400" b="0">
-                <a:solidFill>
-                  <a:srgbClr val="000000"/>
-                </a:solidFill>
-                <a:latin typeface="Microsoft YaHei"/>
-              </a:rPr>
-              <a:t>注：2018 年 1 月 1 日至 2022 年 12 月31 日期间，加计扣除比例为 75%，无形资产成本摊销比例为 175%；2016 年1 月1 日至2017年12月31日，加计扣除比例为50%，无形资产成本摊销比例为150%。特殊行业规定：高新技术企业在 2022 年10 月1 日至2022年12月 31 日期间允许计入当期损益加计扣除100%；制造业企业自2021年 1 月日起研发费用加计扣除比例提高至100%，无形资产成本按照200%在税前摊销。</a:t>
+              <a:t>自2023年1月1日起，企业研究开发形成无形资产的费用，应该计入无形资产成本，并按照无形资产成本的200%摊销；不能将形成无形资产的研究开发费用费用化计入当期损益在当期加计100%一次扣除。</a:t>
+            </a:r>
+          </a:p>
+          <a:p>
+            <a:pPr algn="l">
+              <a:lnSpc>
+                <a:spcPts val="1820"/>
+              </a:lnSpc>
+              <a:spcBef>
+                <a:spcPts val="200"/>
+              </a:spcBef>
+              <a:spcAft>
+                <a:spcPts val="200"/>
+              </a:spcAft>
+            </a:pPr>
+            <a:r>
+              <a:rPr sz="1400" b="0">
+                <a:solidFill>
+                  <a:srgbClr val="000000"/>
+                </a:solidFill>
+                <a:latin typeface="Microsoft YaHei"/>
+              </a:rPr>
+              <a:t>注：2018年1月1日至2022年12月31日期间，加计扣除比例为75%，无形资产成本摊销比例为175%；2016年1月1日至2017年12月31日，加计扣除比例为50%，无形资产成本摊销比例为150%。特殊行业规定：高新技术企业在2022年10月1日至2022年12月31日期间允许计入当期损益加计扣除100%；制造业企业自2021年1月日起研发费用加计扣除比例提高至100%，无形资产成本按照200%在税前摊销。</a:t>
             </a:r>
           </a:p>
           <a:p>
@@ -15420,73 +15310,51 @@
                 </a:solidFill>
                 <a:latin typeface="Microsoft YaHei"/>
               </a:rPr>
-              <a:t>《财政部 税务总局关于进一步完善研发费用税前加计扣除政策的公告》（财政部 税务总局公告 2023 年第7 号）第一条、企业开展研发活动中实际发生的研发费用，未形成无形资产计入当期损益的，在按规定据实扣除的基础上，自2023 年1月1 日起，再按照实际发生额的 100%在税前加计扣除;形成无形资产的，自 2023 年 1 月 1 日起，按照无形资产成本的200%在税前摊销。根据《财政部 税务总局 科技部关于提高研究开发费用税前加计扣除比例的通知》（财税〔2018〕99 号）规定：一、企业开展研发活动中实际发生的研发费用，未形成无形资产计入当期损益的，在按规定据实扣除的基础上，在2018 年1 月1日至 2020 年 12 月 31 日期间，再按照实际发生额的75%在税前加计扣除；形成无形资产的，在上述期间按照无形资产成本的175%在税前摊销。，根据《财政部 税务总局关于延长部分税收优惠政策执行期限的公告》（财政部 税务总局公告 2021 年第6 号）附件1，财税〔2018〕99 号文件税收优惠政策执行期限延长至2023 年12 月31 日。</a:t>
-            </a:r>
-          </a:p>
-          <a:p>
-            <a:pPr algn="l">
-              <a:lnSpc>
-                <a:spcPts val="1820"/>
-              </a:lnSpc>
-              <a:spcBef>
-                <a:spcPts val="200"/>
-              </a:spcBef>
-              <a:spcAft>
-                <a:spcPts val="200"/>
-              </a:spcAft>
-            </a:pPr>
-            <a:r>
-              <a:rPr sz="1400" b="0">
-                <a:solidFill>
-                  <a:srgbClr val="000000"/>
-                </a:solidFill>
-                <a:latin typeface="Microsoft YaHei"/>
-              </a:rPr>
-              <a:t>根据《财政部 国家税务总局 科技部关于完善研究开发费用税前加计扣除政策的通知》（财税〔2015〕119 号）第一条第一款，允许加计扣除的研发费用。企业开展研发活动中实际发生的研发费用，未形成无形资产计入当期损益的，在按规定据实扣除的基础上，按照本年度实际发生额的 50%，从本年度应纳税所得额中扣除；形成无形资产的，按照无形资产成本的 150%在税前摊销。本通知自2016年1月 1 日起执行。</a:t>
-            </a:r>
-          </a:p>
-          <a:p>
-            <a:pPr algn="l">
-              <a:lnSpc>
-                <a:spcPts val="1820"/>
-              </a:lnSpc>
-              <a:spcBef>
-                <a:spcPts val="200"/>
-              </a:spcBef>
-              <a:spcAft>
-                <a:spcPts val="200"/>
-              </a:spcAft>
-            </a:pPr>
-            <a:r>
-              <a:rPr sz="1400" b="0">
-                <a:solidFill>
-                  <a:srgbClr val="000000"/>
-                </a:solidFill>
-                <a:latin typeface="Microsoft YaHei"/>
-              </a:rPr>
-              <a:t>根据《关于加大支持科技创新税前扣除力度的公告》（财政部税务总局 科技部公告 2022 年第 28）</a:t>
-            </a:r>
-          </a:p>
-          <a:p>
-            <a:pPr algn="l">
-              <a:lnSpc>
-                <a:spcPts val="1820"/>
-              </a:lnSpc>
-              <a:spcBef>
-                <a:spcPts val="200"/>
-              </a:spcBef>
-              <a:spcAft>
-                <a:spcPts val="200"/>
-              </a:spcAft>
-            </a:pPr>
-            <a:r>
-              <a:rPr sz="1400" b="0">
-                <a:solidFill>
-                  <a:srgbClr val="000000"/>
-                </a:solidFill>
-                <a:latin typeface="Microsoft YaHei"/>
-              </a:rPr>
-              <a:t>一、高新技术企业在 2022 年 10 月1 日至2022 年12 月31日期间新购置的设备、器具，允许当年一次性全额在计算应纳税所得额时扣除，并允许在税前实行 100%加计扣除。根据《财政部 税务总局关于进一步完善研发费用税前加计扣除政策的公告》（财政部 税务总局公告 2021 年第13 号）〔全文废止，但 2021-2022 年期间适用〕一、制造业企业开展研发活动中实际发生的研发费用，未形成无形资产计入当期损益的，在按规定据实扣除的基础上，自2021年1月 1 日起，再按照实际发生额的 100%在税前加计扣除;形成无形资产的，自 2021 年 1 月 1 日起，按照无形资产成本的200%在税前摊销。</a:t>
+              <a:t>《财政部 税务总局关于进一步完善研发费用税前加计扣除政策的公告》（财政部 税务总局公告2023年第7号）第一条、企业开展研发活动中实际发生的研发费用，未形成无形资产计入当期损益的，在按规定据实扣除的基础上，自2023年1月1日起，再按照实际发生额的100%在税前加计扣除;形成无形资产的，自2023年1月1日起，按照无形资产成本的200%在税前摊销。根据《财政部 税务总局 科技部关于提高研究开发费用税前加计扣除比例的通知》（财税〔2018〕99号）规定：一、企业开展研发活动中实际发生的研发费用，未形成无形资产计入当期损益的，在按规定据实扣除的基础上，在2018年1月1日至2020年12月31日期间，再按照实际发生额的75%在税前加计扣除；形成无形资产的，在上述期间按照无形资产成本的175%在税前摊销。，根据《财政部 税务总局关于延长部分税收优惠政策执行期限的公告》（财政部 税务总局公告2021年第6号）附件1，财税〔2018〕99号文件税收优惠政策执行期限延长至2023年12月31日。</a:t>
+            </a:r>
+          </a:p>
+          <a:p>
+            <a:pPr algn="l">
+              <a:lnSpc>
+                <a:spcPts val="1820"/>
+              </a:lnSpc>
+              <a:spcBef>
+                <a:spcPts val="200"/>
+              </a:spcBef>
+              <a:spcAft>
+                <a:spcPts val="200"/>
+              </a:spcAft>
+            </a:pPr>
+            <a:r>
+              <a:rPr sz="1400" b="0">
+                <a:solidFill>
+                  <a:srgbClr val="000000"/>
+                </a:solidFill>
+                <a:latin typeface="Microsoft YaHei"/>
+              </a:rPr>
+              <a:t>根据《财政部 国家税务总局 科技部关于完善研究开发费用税前加计扣除政策的通知》（财税〔2015〕119号）第一条第一款，允许加计扣除的研发费用。企业开展研发活动中实际发生的研发费用，未形成无形资产计入当期损益的，在按规定据实扣除的基础上，按照本年度实际发生额的50%，从本年度应纳税所得额中扣除；形成无形资产的，按照无形资产成本的150%在税前摊销。本通知自2016年1月1日起执行。</a:t>
+            </a:r>
+          </a:p>
+          <a:p>
+            <a:pPr algn="l">
+              <a:lnSpc>
+                <a:spcPts val="1820"/>
+              </a:lnSpc>
+              <a:spcBef>
+                <a:spcPts val="200"/>
+              </a:spcBef>
+              <a:spcAft>
+                <a:spcPts val="200"/>
+              </a:spcAft>
+            </a:pPr>
+            <a:r>
+              <a:rPr sz="1400" b="0">
+                <a:solidFill>
+                  <a:srgbClr val="000000"/>
+                </a:solidFill>
+                <a:latin typeface="Microsoft YaHei"/>
+              </a:rPr>
+              <a:t>根据《关于加大支持科技创新税前扣除力度的公告》（财政部税务总局 科技部公告2022年第28）一、高新技术企业在2022年10月1日至2022年12月31日期间新购置的设备、器具，允许当年一次性全额在计算应纳税所得额时扣除，并允许在税前实行100%加计扣除。根据《财政部 税务总局关于进一步完善研发费用税前加计扣除政策的公告》（财政部 税务总局公告2021年第13号）〔全文废止，但2021-2022年期间适用〕一、制造业企业开展研发活动中实际发生的研发费用，未形成无形资产计入当期损益的，在按规定据实扣除的基础上，自2021年1月1日起，再按照实际发生额的100%在税前加计扣除;形成无形资产的，自2021年1月1日起，按照无形资产成本的200%在税前摊销。</a:t>
             </a:r>
           </a:p>
           <a:p>
@@ -15777,29 +15645,7 @@
                 </a:solidFill>
                 <a:latin typeface="Microsoft YaHei"/>
               </a:rPr>
-              <a:t>根据《财政部 国家税务总局、科学技术部关于完善研究开发费用税前加计扣除政策的通知》（财税〔2015〕119 号）第三条规定：1.企业应按照国家财务会计制度要求，对研发支出进行会计处理；同时，对享受加计扣除的研发费用按研发项目设置辅助账，准确归集核算当年可加计扣除的各项研发费用实际发生额。企业在一个纳税年度内进行多项研发活动的，应按照不同研发项目分别归集可加计扣除的研发费用。</a:t>
-            </a:r>
-          </a:p>
-          <a:p>
-            <a:pPr algn="l">
-              <a:lnSpc>
-                <a:spcPts val="1820"/>
-              </a:lnSpc>
-              <a:spcBef>
-                <a:spcPts val="200"/>
-              </a:spcBef>
-              <a:spcAft>
-                <a:spcPts val="200"/>
-              </a:spcAft>
-            </a:pPr>
-            <a:r>
-              <a:rPr sz="1400" b="0">
-                <a:solidFill>
-                  <a:srgbClr val="000000"/>
-                </a:solidFill>
-                <a:latin typeface="Microsoft YaHei"/>
-              </a:rPr>
-              <a:t>2.企业应对研发费用和生产经营费用分别核算，准确、合理归集各项费用支出，对划分不清的，不得实行加计扣除。</a:t>
+              <a:t>根据《财政部 国家税务总局、科学技术部关于完善研究开发费用税前加计扣除政策的通知》（财税〔2015〕119号）第三条规定：1.企业应按照国家财务会计制度要求，对研发支出进行会计处理；同时，对享受加计扣除的研发费用按研发项目设置辅助账，准确归集核算当年可加计扣除的各项研发费用实际发生额。企业在一个纳税年度内进行多项研发活动的，应按照不同研发项目分别归集可加计扣除的研发费用。2.企业应对研发费用和生产经营费用分别核算，准确、合理归集各项费用支出，对划分不清的，不得实行加计扣除。</a:t>
             </a:r>
           </a:p>
           <a:p>
@@ -16090,7 +15936,7 @@
                 </a:solidFill>
                 <a:latin typeface="Microsoft YaHei"/>
               </a:rPr>
-              <a:t>依据国务院关于《中华人民共和国企业所得税法实施条例》（中华人民共和国国务院令第 512 号）第二十八条规定：企业发生的支出应当区分收益性支出和资本性支出。收益性支出在发生当期直接扣除；资本性支出应当分期扣除或者计入有关资产成本，不得在发生当期直接扣除。企业的不征税收入用于支出所形成的费用或者财产，不得扣除或者计算对应的折旧、摊销扣除。除企业所得税法和本条例另有规定外，企业实际发生的成本、费用、税金、损失和其他支出，不得重复扣除。</a:t>
+              <a:t>依据国务院关于《中华人民共和国企业所得税法实施条例》（中华人民共和国国务院令第512号）第二十八条规定：企业发生的支出应当区分收益性支出和资本性支出。收益性支出在发生当期直接扣除；资本性支出应当分期扣除或者计入有关资产成本，不得在发生当期直接扣除。企业的不征税收入用于支出所形成的费用或者财产，不得扣除或者计算对应的折旧、摊销扣除。除企业所得税法和本条例另有规定外，企业实际发生的成本、费用、税金、损失和其他支出，不得重复扣除。</a:t>
             </a:r>
           </a:p>
           <a:p>
@@ -16381,29 +16227,29 @@
                 </a:solidFill>
                 <a:latin typeface="Microsoft YaHei"/>
               </a:rPr>
-              <a:t>根据《财政部 国家税务总局关于安置残疾人员就业有关企业所得税优惠政策问题的通知》（财税〔2009〕70 号）的规定：三、企业享受安置残疾职工工资 100%加计扣除应同时具备如下条件：</a:t>
-            </a:r>
-          </a:p>
-          <a:p>
-            <a:pPr algn="l">
-              <a:lnSpc>
-                <a:spcPts val="1820"/>
-              </a:lnSpc>
-              <a:spcBef>
-                <a:spcPts val="200"/>
-              </a:spcBef>
-              <a:spcAft>
-                <a:spcPts val="200"/>
-              </a:spcAft>
-            </a:pPr>
-            <a:r>
-              <a:rPr sz="1400" b="0">
-                <a:solidFill>
-                  <a:srgbClr val="000000"/>
-                </a:solidFill>
-                <a:latin typeface="Microsoft YaHei"/>
-              </a:rPr>
-              <a:t>（一）依法与安置的每位残疾人签订了1 年以上（含1 年）的劳动合同或服务协议，并且安置的每位残疾人在企业实际上岗工作。（二）为安置的每位残疾人按月足额缴纳了企业所在区县人民政府根据国家政策规定的基本养老保险、基本医疗保险、失业保险和工伤保险等社会保险。</a:t>
+              <a:t>根据《财政部 国家税务总局关于安置残疾人员就业有关企业所得税优惠政策问题的通知》（财税〔2009〕70号）的规定：三、企业享受安置残疾职工工资100%加计扣除应同时具备如下条件：</a:t>
+            </a:r>
+          </a:p>
+          <a:p>
+            <a:pPr algn="l">
+              <a:lnSpc>
+                <a:spcPts val="1820"/>
+              </a:lnSpc>
+              <a:spcBef>
+                <a:spcPts val="200"/>
+              </a:spcBef>
+              <a:spcAft>
+                <a:spcPts val="200"/>
+              </a:spcAft>
+            </a:pPr>
+            <a:r>
+              <a:rPr sz="1400" b="0">
+                <a:solidFill>
+                  <a:srgbClr val="000000"/>
+                </a:solidFill>
+                <a:latin typeface="Microsoft YaHei"/>
+              </a:rPr>
+              <a:t>（一）依法与安置的每位残疾人签订了1年以上（含1年）的劳动合同或服务协议，并且安置的每位残疾人在企业实际上岗工作。（二）为安置的每位残疾人按月足额缴纳了企业所在区县人民政府根据国家政策规定的基本养老保险、基本医疗保险、失业保险和工伤保险等社会保险。</a:t>
             </a:r>
           </a:p>
           <a:p>
@@ -16694,7 +16540,7 @@
                 </a:solidFill>
                 <a:latin typeface="Microsoft YaHei"/>
               </a:rPr>
-              <a:t>同时符合下列条件的固定资产的大修理支出：修理支出达到取得固定资产时的计税基础 50%以上；修理后固定资产的使用年限延长2年以上，在发生当期作为费用化支出一次性税前扣除，会减少当期应纳税所得额，产生补缴企业所得税并处罚金的风险。</a:t>
+              <a:t>同时符合下列条件的固定资产的大修理支出：修理支出达到取得固定资产时的计税基础50%以上；修理后固定资产的使用年限延长2年以上，在发生当期作为费用化支出一次性税前扣除，会减少当期应纳税所得额，产生补缴企业所得税并处罚金的风险。</a:t>
             </a:r>
           </a:p>
           <a:p>
@@ -16738,7 +16584,7 @@
                 </a:solidFill>
                 <a:latin typeface="Microsoft YaHei"/>
               </a:rPr>
-              <a:t>依据国务院关于《中华人民共和国企业所得税法实施条例》（中华人民共和国国务院令第 512 号）第六十九条：企业所得税法第十三条第（三）项所称固定资产的大修理支出，是指同时符合下列条件的支出：（一）修理支出达到取得固定资产时的计税基础 50%以上；（二）修理后固定资产的使用年限延长2年以上。企业所得税法第十三条第（三）项规定的支出，按照固定资产尚可使用年限分期摊销。</a:t>
+              <a:t>依据国务院关于《中华人民共和国企业所得税法实施条例》（中华人民共和国国务院令第512号）第六十九条：企业所得税法第十三条第（三）项所称固定资产的大修理支出，是指同时符合下列条件的支出：（一）修理支出达到取得固定资产时的计税基础50%以上；（二）修理后固定资产的使用年限延长2年以上。企业所得税法第十三条第（三）项规定的支出，按照固定资产尚可使用年限分期摊销。</a:t>
             </a:r>
           </a:p>
           <a:p>
@@ -17029,7 +16875,7 @@
                 </a:solidFill>
                 <a:latin typeface="Microsoft YaHei"/>
               </a:rPr>
-              <a:t>依据国务院关于《中华人民共和国企业所得税法实施条例》（中华人民共和国国务院令第 512 号）第七十条：企业所得税法第十三条第（四）项所称其他应当作为长期待摊费用的支出，自支出发生月份的次月起，分期摊销，摊销年限不得低于3 年。</a:t>
+              <a:t>依据国务院关于《中华人民共和国企业所得税法实施条例》（中华人民共和国国务院令第512号）第七十条：企业所得税法第十三条第（四）项所称其他应当作为长期待摊费用的支出，自支出发生月份的次月起，分期摊销，摊销年限不得低于3年。</a:t>
             </a:r>
           </a:p>
           <a:p>
@@ -17320,7 +17166,7 @@
                 </a:solidFill>
                 <a:latin typeface="Microsoft YaHei"/>
               </a:rPr>
-              <a:t>依据国务院《中华人民共和国企业所得税法实施条例》（中华人民共和国国务院令第 512 号）第十九条规定：企业所得税法第六条第（六）项所称租金收入，是指企业提供固定资产、包装物或者其他有形资产的使用权取得的收入。租金收入，按照合同约定的承租人应付租金的日期确认收入的实现。根据《国家税务总局关于贯彻落实企业所得税法若干税收问题的通知》（国税函〔2010〕79 号）规定：一、关于租金收入确认问题根据《实施条例》第十九条的规定：企业提供固定资产、包装物或者其他有形资产的使用权取得的租金收入，应按交易合同或协议规定的承租人应付租金的日期确认收入的实现。其中，如果交易合同或协议中规定租赁期限跨年度，且租金提前一次性支付的，根据《实施条例》第九条规定的收入与费用配比原则，出租人可对上述已确认的收入，在租赁期内，分期均匀计入相关年度收入。</a:t>
+              <a:t>依据国务院《中华人民共和国企业所得税法实施条例》（中华人民共和国国务院令第512号）第十九条规定：企业所得税法第六条第（六）项所称租金收入，是指企业提供固定资产、包装物或者其他有形资产的使用权取得的收入。租金收入，按照合同约定的承租人应付租金的日期确认收入的实现。根据《国家税务总局关于贯彻落实企业所得税法若干税收问题的通知》（国税函〔2010〕79号）规定：一、关于租金收入确认问题根据《实施条例》第十九条的规定：企业提供固定资产、包装物或者其他有形资产的使用权取得的租金收入，应按交易合同或协议规定的承租人应付租金的日期确认收入的实现。其中，如果交易合同或协议中规定租赁期限跨年度，且租金提前一次性支付的，根据《实施条例》第九条规定的收入与费用配比原则，出租人可对上述已确认的收入，在租赁期内，分期均匀计入相关年度收入。</a:t>
             </a:r>
           </a:p>
           <a:p>
@@ -17611,7 +17457,7 @@
                 </a:solidFill>
                 <a:latin typeface="Microsoft YaHei"/>
               </a:rPr>
-              <a:t>根据《国家税务总局关于企业维简费支出企业所得税税前扣除问题的公告》（国家税务总局公告 2013 年第67 号）第一条规定：企业实际发生的维简费支出，属于收益性支出的，可作为当期费用税前扣除；属于资本性支出的，应计入有关资产成本，并按企业所得税法规定计提折旧或摊销费用在税前扣除。</a:t>
+              <a:t>根据《国家税务总局关于企业维简费支出企业所得税税前扣除问题的公告》（国家税务总局公告2013年第67号）第一条规定：企业实际发生的维简费支出，属于收益性支出的，可作为当期费用税前扣除；属于资本性支出的，应计入有关资产成本，并按企业所得税法规定计提折旧或摊销费用在税前扣除。</a:t>
             </a:r>
           </a:p>
           <a:p>
@@ -17924,7 +17770,7 @@
                 </a:solidFill>
                 <a:latin typeface="Microsoft YaHei"/>
               </a:rPr>
-              <a:t>根据《中华人民共和国企业所得税法实施条例》（中华人民共和国国务院令第 512 号）第五十九条规定：固定资产按照直线法计算的折旧，准予扣除。企业应当自固定资产投入使用月份的次月起计算折旧；停止使用的固定资产，应当自停止使用月份的次月起停止计算折旧。企业应当根据固定资产的性质和使用情况，合理确定固定资产的预计净残值。固定资产的预计净残值一经确定，不得变更。</a:t>
+              <a:t>根据《中华人民共和国企业所得税法实施条例》（中华人民共和国国务院令第512号）第五十九条规定：固定资产按照直线法计算的折旧，准予扣除。企业应当自固定资产投入使用月份的次月起计算折旧；停止使用的固定资产，应当自停止使用月份的次月起停止计算折旧。企业应当根据固定资产的性质和使用情况，合理确定固定资产的预计净残值。固定资产的预计净残值一经确定，不得变更。</a:t>
             </a:r>
           </a:p>
           <a:p>
@@ -18215,7 +18061,7 @@
                 </a:solidFill>
                 <a:latin typeface="Microsoft YaHei"/>
               </a:rPr>
-              <a:t>根据《国家税务总局关于固定资产加速折旧税收政策有关问题的公告》（国家税务总局公告 2014 年第 64 号）第五条规定：企业的固定资产采取加速折旧方法的，可以采用双倍余额递减法或者年数总和法。加速折旧方法一经确定，一般不得变更。</a:t>
+              <a:t>根据《国家税务总局关于固定资产加速折旧税收政策有关问题的公告》（国家税务总局公告2014年第64号）第五条规定：企业的固定资产采取加速折旧方法的，可以采用双倍余额递减法或者年数总和法。加速折旧方法一经确定，一般不得变更。</a:t>
             </a:r>
           </a:p>
           <a:p>
@@ -18506,7 +18352,7 @@
                 </a:solidFill>
                 <a:latin typeface="Microsoft YaHei"/>
               </a:rPr>
-              <a:t>根据《财政部 国家税务总局关于专项用途财政性资金企业所得税处理问题的通知》（财税〔2011〕70 号）的规定：二、根据实施条例第二十八条的规定，上述不征税收入用于支出所形成的费用，不得在计算应纳税所得额时扣除；用于支出所形成的资产，其计算的折旧、摊销不得在计算应纳税所得额时扣除。</a:t>
+              <a:t>根据《财政部 国家税务总局关于专项用途财政性资金企业所得税处理问题的通知》（财税〔2011〕70号）的规定：二、根据实施条例第二十八条的规定，上述不征税收入用于支出所形成的费用，不得在计算应纳税所得额时扣除；用于支出所形成的资产，其计算的折旧、摊销不得在计算应纳税所得额时扣除。</a:t>
             </a:r>
           </a:p>
           <a:p>
@@ -18797,29 +18643,29 @@
                 </a:solidFill>
                 <a:latin typeface="Microsoft YaHei"/>
               </a:rPr>
-              <a:t>根据《国家税务总局关于发布&lt;企业资产损失所得税税前扣除管理办法&gt;的公告》（国家税务总局公告 2011 年第25 号）第四条规定：企业实际资产损失，应当在其实际发生且会计上已作损失处理的年度申报扣除；法定资产损失，应当在企业向主管税务机关提供证据资料证明该项资产已符合法定资产损失确认条件，且会计上已作损失处理的年度申报扣除。</a:t>
-            </a:r>
-          </a:p>
-          <a:p>
-            <a:pPr algn="l">
-              <a:lnSpc>
-                <a:spcPts val="1820"/>
-              </a:lnSpc>
-              <a:spcBef>
-                <a:spcPts val="200"/>
-              </a:spcBef>
-              <a:spcAft>
-                <a:spcPts val="200"/>
-              </a:spcAft>
-            </a:pPr>
-            <a:r>
-              <a:rPr sz="1400" b="0">
-                <a:solidFill>
-                  <a:srgbClr val="000000"/>
-                </a:solidFill>
-                <a:latin typeface="Microsoft YaHei"/>
-              </a:rPr>
-              <a:t>根据《国家税务总局关于企业所得税资产损失资料留存备查有关事项的公告》（国家税务总局公告 2018 年第15 号）规定：一、企业向税务机关申报扣除资产损失，仅需填报企业所得税年度纳税申报表《资产损失税前扣除及纳税调整明细表》，不再报送资产损失相关资料。相关资料由企业留存备查。三、本公告规定适用于 2017 年度及以后年度企业所得税汇算清缴。《国家税务总局关于发布〈企业资产损失所得税税前扣除管理办法〉的公告》（国家税务总局公告 2011 年第25 号）第四条、第七条、第八条、第十三条有关资产损失证据资料、会计核算资料、纳税资料等相关资料报送的内容同时废止。</a:t>
+              <a:t>根据《国家税务总局关于发布&lt;企业资产损失所得税税前扣除管理办法&gt;的公告》（国家税务总局公告2011年第25号）第四条规定：企业实际资产损失，应当在其实际发生且会计上已作损失处理的年度申报扣除；法定资产损失，应当在企业向主管税务机关提供证据资料证明该项资产已符合法定资产损失确认条件，且会计上已作损失处理的年度申报扣除。</a:t>
+            </a:r>
+          </a:p>
+          <a:p>
+            <a:pPr algn="l">
+              <a:lnSpc>
+                <a:spcPts val="1820"/>
+              </a:lnSpc>
+              <a:spcBef>
+                <a:spcPts val="200"/>
+              </a:spcBef>
+              <a:spcAft>
+                <a:spcPts val="200"/>
+              </a:spcAft>
+            </a:pPr>
+            <a:r>
+              <a:rPr sz="1400" b="0">
+                <a:solidFill>
+                  <a:srgbClr val="000000"/>
+                </a:solidFill>
+                <a:latin typeface="Microsoft YaHei"/>
+              </a:rPr>
+              <a:t>根据《国家税务总局关于企业所得税资产损失资料留存备查有关事项的公告》（国家税务总局公告2018年第15号）规定：一、企业向税务机关申报扣除资产损失，仅需填报企业所得税年度纳税申报表《资产损失税前扣除及纳税调整明细表》，不再报送资产损失相关资料。相关资料由企业留存备查。三、本公告规定适用于2017年度及以后年度企业所得税汇算清缴。《国家税务总局关于发布〈企业资产损失所得税税前扣除管理办法〉的公告》（国家税务总局公告2011年第25号）第四条、第七条、第八条、第十三条有关资产损失证据资料、会计核算资料、纳税资料等相关资料报送的内容同时废止。</a:t>
             </a:r>
           </a:p>
           <a:p>
@@ -19110,7 +18956,7 @@
                 </a:solidFill>
                 <a:latin typeface="Microsoft YaHei"/>
               </a:rPr>
-              <a:t>根据《财政部 国家税务总局关于企业资产损失税前扣除政策的通知》（财税〔2009〕57 号）第六条规定：企业的股权投资符合下列条件之一的，减除可收回金额后确认的无法收回的股权投资，可以作为股权投资损失在计算应纳税所得额时扣除：</a:t>
+              <a:t>根据《财政部 国家税务总局关于企业资产损失税前扣除政策的通知》（财税〔2009〕57号）第六条规定：企业的股权投资符合下列条件之一的，减除可收回金额后确认的无法收回的股权投资，可以作为股权投资损失在计算应纳税所得额时扣除：</a:t>
             </a:r>
           </a:p>
           <a:p>
@@ -19154,7 +19000,7 @@
                 </a:solidFill>
                 <a:latin typeface="Microsoft YaHei"/>
               </a:rPr>
-              <a:t>（二）被投资方财务状况严重恶化，累计发生巨额亏损，已连续停止经营 3 年以上，且无重新恢复经营改组计划的；（三）对被投资方不具有控制权，投资期限届满或者投资期限已超过 10 年，且被投资单位因连续 3 年经营亏损导致资不抵债的；（四）被投资方财务状况严重恶化，累计发生巨额亏损，已完成清算或清算期超过 3 年以上的；</a:t>
+              <a:t>（二）被投资方财务状况严重恶化，累计发生巨额亏损，已连续停止经营3年以上，且无重新恢复经营改组计划的；（三）对被投资方不具有控制权，投资期限届满或者投资期限已超过10年，且被投资单位因连续3年经营亏损导致资不抵债的；（四）被投资方财务状况严重恶化，累计发生巨额亏损，已完成清算或清算期超过3年以上的；</a:t>
             </a:r>
           </a:p>
           <a:p>
@@ -19467,7 +19313,7 @@
                 </a:solidFill>
                 <a:latin typeface="Microsoft YaHei"/>
               </a:rPr>
-              <a:t>根据《国家税务总局关于企业股权投资损失所得税处理问题的公告》（国家税务总局公告 2010 年第 6 号）的规定：企业对外进行权益性（以下简称“股权”）投资所发生的损失，在经确认的损失发生年度，作为企业损失在计算企业应纳税所得额时一次性扣除。</a:t>
+              <a:t>根据《国家税务总局关于企业股权投资损失所得税处理问题的公告》（国家税务总局公告2010年第6号）的规定：企业对外进行权益性（以下简称“股权”）投资所发生的损失，在经确认的损失发生年度，作为企业损失在计算企业应纳税所得额时一次性扣除。</a:t>
             </a:r>
           </a:p>
           <a:p>
@@ -19758,7 +19604,7 @@
                 </a:solidFill>
                 <a:latin typeface="Microsoft YaHei"/>
               </a:rPr>
-              <a:t>根据《财政部 国家税务总局关于企业资产损失税前扣除政策的通知》（财税〔2009〕57 号）第十二条规定：企业境内、境外营业机构发生的资产损失应分开核算，对境外营业机构由于发生资产损失而产生的亏损，不得在计算境内应纳税所得额时扣除。</a:t>
+              <a:t>根据《财政部 国家税务总局关于企业资产损失税前扣除政策的通知》（财税〔2009〕57号）第十二条规定：企业境内、境外营业机构发生的资产损失应分开核算，对境外营业机构由于发生资产损失而产生的亏损，不得在计算境内应纳税所得额时扣除。</a:t>
             </a:r>
           </a:p>
           <a:p>
@@ -20049,7 +19895,7 @@
                 </a:solidFill>
                 <a:latin typeface="Microsoft YaHei"/>
               </a:rPr>
-              <a:t>企业在确认股权投资无法收回时需按规定进行扣除，若未减除可收回（财税〔2009〕57 号）第四条规定：企业除贷款类债权外的应收、预付账款符合下列条件之一的，减除可收回金额后确认的无法收回的应收、预付款项，可以作为坏账损失在计算应纳税所得额时扣除：</a:t>
+              <a:t>企业在确认股权投资无法收回时需按规定进行扣除，若未减除可收回（财税〔2009〕57号）第四条规定：企业除贷款类债权外的应收、预付账款符合下列条件之一的，减除可收回金额后确认的无法收回的应收、预付款项，可以作为坏账损失在计算应纳税所得额时扣除：</a:t>
             </a:r>
           </a:p>
           <a:p>
@@ -20093,7 +19939,7 @@
                 </a:solidFill>
                 <a:latin typeface="Microsoft YaHei"/>
               </a:rPr>
-              <a:t>（三）债务人逾期 3 年以上未清偿，且有确凿证据证明已无力清偿债务的；</a:t>
+              <a:t>（三）债务人逾期3年以上未清偿，且有确凿证据证明已无力清偿债务的；</a:t>
             </a:r>
           </a:p>
           <a:p>
@@ -20428,7 +20274,7 @@
                 </a:solidFill>
                 <a:latin typeface="Microsoft YaHei"/>
               </a:rPr>
-              <a:t>根据《国家税务总局关于母子公司间提供服务支付费用有关企业所得税处理问题的通知》（国税发〔2008〕86 号）中的规定：一、母公司为其子公司（以下简称子公司）提供各种服务而发生的费用，应按照独立企业之间公平交易原则确定服务的价格，作为企业正常的劳务费用进行税务处理。</a:t>
+              <a:t>根据《国家税务总局关于母子公司间提供服务支付费用有关企业所得税处理问题的通知》（国税发〔2008〕86号）中的规定：一、母公司为其子公司（以下简称子公司）提供各种服务而发生的费用，应按照独立企业之间公平交易原则确定服务的价格，作为企业正常的劳务费用进行税务处理。</a:t>
             </a:r>
           </a:p>
           <a:p>
@@ -20741,7 +20587,7 @@
                 </a:solidFill>
                 <a:latin typeface="Microsoft YaHei"/>
               </a:rPr>
-              <a:t>根据《国家税务总局关于贯彻落实企业所得税法若干税收问题的通知》（国税函〔2010〕79 号）的规定：三、关于股权转让所得确认和计算问题企业转让股权收入，应于转让协议生效且完成股权变更手续时，确认收入的实现。转让股权收入扣除为取得该股权所发生的成本后，为股权转让所得。企业在计算股权转让所得时，不得扣除被投资企业未分配利润等股东留存收益中按该项股权所可能分配的金额。</a:t>
+              <a:t>根据《国家税务总局关于贯彻落实企业所得税法若干税收问题的通知》（国税函〔2010〕79号）的规定：三、关于股权转让所得确认和计算问题企业转让股权收入，应于转让协议生效且完成股权变更手续时，确认收入的实现。转让股权收入扣除为取得该股权所发生的成本后，为股权转让所得。企业在计算股权转让所得时，不得扣除被投资企业未分配利润等股东留存收益中按该项股权所可能分配的金额。</a:t>
             </a:r>
           </a:p>
           <a:p>
@@ -21032,7 +20878,7 @@
                 </a:solidFill>
                 <a:latin typeface="Microsoft YaHei"/>
               </a:rPr>
-              <a:t>根据《国家税务总局关于母子公司间提供服务支付费用有关企业所得税处理问题的通知》（国税发〔2008〕86 号）中的规定：四、母公司以管理费形式向子公司提取费用，子公司因此支付给母公司的管理费，不得在税前扣除。</a:t>
+              <a:t>根据《国家税务总局关于母子公司间提供服务支付费用有关企业所得税处理问题的通知》（国税发〔2008〕86号）中的规定：四、母公司以管理费形式向子公司提取费用，子公司因此支付给母公司的管理费，不得在税前扣除。</a:t>
             </a:r>
           </a:p>
           <a:p>
@@ -21323,29 +21169,29 @@
                 </a:solidFill>
                 <a:latin typeface="Microsoft YaHei"/>
               </a:rPr>
-              <a:t>根据《财政部 国家税务总局关于企业关联方利息支出税前扣除标准有关税收政策问题的通知》（财税〔2008〕121 号）的规定：一、在计算应纳税所得额时，企业实际支付给关联方的利息支出，不超过以下规定比例和税法及其实施条例有关规定计算的部分，准予扣除，超过的部分不得在发生当期和以后年度扣除。企业实际支付给关联方的利息支出，除符合本通知第二条规定外，其接受关联方债权性投资与其权益性投资比例为：（一）金融企业，为 5：1；</a:t>
-            </a:r>
-          </a:p>
-          <a:p>
-            <a:pPr algn="l">
-              <a:lnSpc>
-                <a:spcPts val="1820"/>
-              </a:lnSpc>
-              <a:spcBef>
-                <a:spcPts val="200"/>
-              </a:spcBef>
-              <a:spcAft>
-                <a:spcPts val="200"/>
-              </a:spcAft>
-            </a:pPr>
-            <a:r>
-              <a:rPr sz="1400" b="0">
-                <a:solidFill>
-                  <a:srgbClr val="000000"/>
-                </a:solidFill>
-                <a:latin typeface="Microsoft YaHei"/>
-              </a:rPr>
-              <a:t>（二）其他企业，为 2：1。</a:t>
+              <a:t>根据《财政部 国家税务总局关于企业关联方利息支出税前扣除标准有关税收政策问题的通知》（财税〔2008〕121号）的规定：一、在计算应纳税所得额时，企业实际支付给关联方的利息支出，不超过以下规定比例和税法及其实施条例有关规定计算的部分，准予扣除，超过的部分不得在发生当期和以后年度扣除。企业实际支付给关联方的利息支出，除符合本通知第二条规定外，其接受关联方债权性投资与其权益性投资比例为：（一）金融企业，为5：1；</a:t>
+            </a:r>
+          </a:p>
+          <a:p>
+            <a:pPr algn="l">
+              <a:lnSpc>
+                <a:spcPts val="1820"/>
+              </a:lnSpc>
+              <a:spcBef>
+                <a:spcPts val="200"/>
+              </a:spcBef>
+              <a:spcAft>
+                <a:spcPts val="200"/>
+              </a:spcAft>
+            </a:pPr>
+            <a:r>
+              <a:rPr sz="1400" b="0">
+                <a:solidFill>
+                  <a:srgbClr val="000000"/>
+                </a:solidFill>
+                <a:latin typeface="Microsoft YaHei"/>
+              </a:rPr>
+              <a:t>（二）其他企业，为2：1。</a:t>
             </a:r>
           </a:p>
           <a:p>
@@ -21636,7 +21482,7 @@
                 </a:solidFill>
                 <a:latin typeface="Microsoft YaHei"/>
               </a:rPr>
-              <a:t>根据《中华人民共和国企业所得税法实施条例》（中华人民共和国国务院令第 512 号）第一百零二条规定：企业同时从事适用不同企业所得税待遇的项目的，其优惠项目应当单独计算所得，并合理分摊企业的期间费用。</a:t>
+              <a:t>根据《中华人民共和国企业所得税法实施条例》（中华人民共和国国务院令第512号）第一百零二条规定：企业同时从事适用不同企业所得税待遇的项目的，其优惠项目应当单独计算所得，并合理分摊企业的期间费用。</a:t>
             </a:r>
           </a:p>
           <a:p>
@@ -21883,7 +21729,7 @@
                 </a:solidFill>
                 <a:latin typeface="Microsoft YaHei"/>
               </a:rPr>
-              <a:t>企业购置并实际使用的环境保护、节能节水、安全生产等专用设备在 5 年内转让、出租的，错误享受专用设备的投资额的10%的税额抵免政策，会减少当期应纳税所得额，产生补缴企业所得税的税务风险。</a:t>
+              <a:t>企业购置并实际使用的环境保护、节能节水、安全生产等专用设备在5年内转让、出租的，错误享受专用设备的投资额的10%的税额抵免政策，会减少当期应纳税所得额，产生补缴企业所得税的税务风险。</a:t>
             </a:r>
           </a:p>
           <a:p>
@@ -21927,7 +21773,7 @@
                 </a:solidFill>
                 <a:latin typeface="Microsoft YaHei"/>
               </a:rPr>
-              <a:t>根据《中华人民共和国企业所得税法实施条例》（中华人民共和国国务院令第 512 号）第一百条规定：企业所得税法第三十四条所称税额抵免，是指企业购置并实际使用《环境保护专用设备企业所得税优惠目录》、《节能节水专用设备企业所得税优惠目录》和《安全生产专用设备企业所得税优惠目录》规定的环境保护、节能节水、安全生产等专用设备的，该专用设备的投资额的 10%可以从企业当年的应纳税额中抵免；当年不足抵免的，可以在以后 5 个纳税年度结转抵免。享受前款规定的企业所得税优惠的企业，应当实际购置并自身实际投入使用前款规定的专用设备；企业购置上述专用设备在 5 年内转让、出租的，应当停止享受企业所得税优惠，并补缴已经抵免的企业所得税税款。</a:t>
+              <a:t>根据《中华人民共和国企业所得税法实施条例》（中华人民共和国国务院令第512号）第一百条规定：企业所得税法第三十四条所称税额抵免，是指企业购置并实际使用《环境保护专用设备企业所得税优惠目录》、《节能节水专用设备企业所得税优惠目录》和《安全生产专用设备企业所得税优惠目录》规定的环境保护、节能节水、安全生产等专用设备的，该专用设备的投资额的10%可以从企业当年的应纳税额中抵免；当年不足抵免的，可以在以后5个纳税年度结转抵免。享受前款规定的企业所得税优惠的企业，应当实际购置并自身实际投入使用前款规定的专用设备；企业购置上述专用设备在5年内转让、出租的，应当停止享受企业所得税优惠，并补缴已经抵免的企业所得税税款。</a:t>
             </a:r>
           </a:p>
           <a:p>
@@ -21971,7 +21817,7 @@
                 </a:solidFill>
                 <a:latin typeface="Microsoft YaHei"/>
               </a:rPr>
-              <a:t>企业购置并实际使用的环境保护、节能节水、安全生产等专用设备在 5 年内转让、出租，应当停止享受企业所得税优惠，企业如错误享受专用设备的投资额的 10%的税额抵免政策，导致少缴企业所得税，产生补缴税款并处罚金的风险。</a:t>
+              <a:t>企业购置并实际使用的环境保护、节能节水、安全生产等专用设备在5年内转让、出租，应当停止享受企业所得税优惠，企业如错误享受专用设备的投资额的10%的税额抵免政策，导致少缴企业所得税，产生补缴税款并处罚金的风险。</a:t>
             </a:r>
           </a:p>
           <a:p>
@@ -22015,7 +21861,7 @@
                 </a:solidFill>
                 <a:latin typeface="Microsoft YaHei"/>
               </a:rPr>
-              <a:t>企业自查是否存在购置并实际使用的环境保护、节能节水、安全生产等专用设备在 5 年内转让、出租的，错误享受税额抵免政策的情况，若存在，立即停止享受企业所得税优惠，并补缴已经抵免的企业所得税税款。</a:t>
+              <a:t>企业自查是否存在购置并实际使用的环境保护、节能节水、安全生产等专用设备在5年内转让、出租的，错误享受税额抵免政策的情况，若存在，立即停止享受企业所得税优惠，并补缴已经抵免的企业所得税税款。</a:t>
             </a:r>
           </a:p>
         </p:txBody>
@@ -22284,7 +22130,7 @@
                 </a:solidFill>
                 <a:latin typeface="Microsoft YaHei"/>
               </a:rPr>
-              <a:t>根据《国家税务总局关于落实小型微利企业所得税优惠政策征管问题的公告》（国家税务总局公告 2023 年第6 号）第七条的规定，小型微利企业所得税统一实行按季度预缴。</a:t>
+              <a:t>根据《国家税务总局关于落实小型微利企业所得税优惠政策征管问题的公告》（国家税务总局公告2023年第6号）第七条的规定，小型微利企业所得税统一实行按季度预缴。</a:t>
             </a:r>
           </a:p>
           <a:p>
@@ -22822,7 +22668,7 @@
                 </a:solidFill>
                 <a:latin typeface="Microsoft YaHei"/>
               </a:rPr>
-              <a:t>连续 12 个月以上持有居民企业公开发行并上市流通的股票期间取得投资收益按照税法规定享受免税。存在未达持有时间标准，一律视同符合条件的居民企业之间的权益性投资收益享受免税优惠，造成少缴纳企业所得税的风险。</a:t>
+              <a:t>连续12个月以上持有居民企业公开发行并上市流通的股票期间取得投资收益按照税法规定享受免税。存在未达持有时间标准，一律视同符合条件的居民企业之间的权益性投资收益享受免税优惠，造成少缴纳企业所得税的风险。</a:t>
             </a:r>
           </a:p>
           <a:p>
@@ -22866,7 +22712,7 @@
                 </a:solidFill>
                 <a:latin typeface="Microsoft YaHei"/>
               </a:rPr>
-              <a:t>根据《中华人民共和国企业所得税法》第二十六条第二项的规定：（二）符合条件的居民企业之间的股息、红利等权益性投资收益；根据《中华人民共和国企业所得税法实施条例》第八十三条的规定：企业所得税法第二十六条第（二）项所称符合条件的居民企业之间的股息、红利等权益性投资收益，是指居民企业直接投资于其他居民企业取得的投资收益。企业所得税法第二十六条第（二）项和第（三）项所称股息、红利等权益性投资收益，不包括连续持有居民企业公开发行并上市流通的股票不足 12 个月取得的投资收益。</a:t>
+              <a:t>根据《中华人民共和国企业所得税法》第二十六条第二项的规定：（二）符合条件的居民企业之间的股息、红利等权益性投资收益；根据《中华人民共和国企业所得税法实施条例》第八十三条的规定：企业所得税法第二十六条第（二）项所称符合条件的居民企业之间的股息、红利等权益性投资收益，是指居民企业直接投资于其他居民企业取得的投资收益。企业所得税法第二十六条第（二）项和第（三）项所称股息、红利等权益性投资收益，不包括连续持有居民企业公开发行并上市流通的股票不足12个月取得的投资收益。</a:t>
             </a:r>
           </a:p>
           <a:p>
@@ -23223,7 +23069,7 @@
                 </a:solidFill>
                 <a:latin typeface="Microsoft YaHei"/>
               </a:rPr>
-              <a:t>第二十八条 第二款 企业的不征税收入用于支出所形成的费用或者财产，不得扣除或者计算对应的折旧、摊销扣除。根据《财政部国家税务总局关于财政性资金行政事业性收费政府性基金有关企业所得税政策问题的通知》（财税〔2008〕151 号）第三条的规定：企业的不征税收入用于支出所形成的费用，不得在计算应纳税所得额时扣除；企业的不征税收入用于支出所形成的资产，其计算的折旧、摊销不得在计算应纳税所得额时扣除。根据《国家税务总局关于研发费用税前加计扣除归集范围有关问题的公告》（国家税务总局公告 2017 年第40 号）第七条第一项的规定：企业取得的政府补助，会计处理时采用直接冲减研发费用方法且税务处理时未将其确认为应税收入的，应按冲减后的余额计算加计扣除金额。</a:t>
+              <a:t>第二十八条 第二款 企业的不征税收入用于支出所形成的费用或者财产，不得扣除或者计算对应的折旧、摊销扣除。根据《财政部国家税务总局关于财政性资金行政事业性收费政府性基金有关企业所得税政策问题的通知》（财税〔2008〕151号）第三条的规定：企业的不征税收入用于支出所形成的费用，不得在计算应纳税所得额时扣除；企业的不征税收入用于支出所形成的资产，其计算的折旧、摊销不得在计算应纳税所得额时扣除。根据《国家税务总局关于研发费用税前加计扣除归集范围有关问题的公告》（国家税务总局公告2017年第40号）第七条第一项的规定：企业取得的政府补助，会计处理时采用直接冲减研发费用方法且税务处理时未将其确认为应税收入的，应按冲减后的余额计算加计扣除金额。</a:t>
             </a:r>
           </a:p>
           <a:p>
@@ -23470,7 +23316,7 @@
                 </a:solidFill>
                 <a:latin typeface="Microsoft YaHei"/>
               </a:rPr>
-              <a:t>购置并实际投入使用、已开始享受税收优惠的环境保护、节能节水、安全生产专用设备，从购置之日起 5 个纳税年度内转让、出租的，应在该专用设备停止使用当月停止享受企业所得税优惠，并补缴已经抵免的企业所得税税款。存在未在该专用设备停止使用当月停止享受企业所得税优惠，补缴已经抵免的企业所得税税款的风险。</a:t>
+              <a:t>购置并实际投入使用、已开始享受税收优惠的环境保护、节能节水、安全生产专用设备，从购置之日起5个纳税年度内转让、出租的，应在该专用设备停止使用当月停止享受企业所得税优惠，并补缴已经抵免的企业所得税税款。存在未在该专用设备停止使用当月停止享受企业所得税优惠，补缴已经抵免的企业所得税税款的风险。</a:t>
             </a:r>
           </a:p>
           <a:p>
@@ -23536,51 +23382,51 @@
                 </a:solidFill>
                 <a:latin typeface="Microsoft YaHei"/>
               </a:rPr>
-              <a:t>根据《中华人民共和国企业所得税法实施条例》第一百条规定：企业所得税法第三十四条所称税额抵免，是指企业购置并实际使用《环境保护专用设备企业所得税优惠目录》、《节能节水专用设备企业所得税优惠目录》和《安全生产专用设备企业所得税优惠目录》规定的环境保护、节能节水、安全生产等专用设备的，该专用设备的投资额的 10%可以从企业当年的应纳税额中抵免;当年不足抵免的，可以在以后 5 个纳税年度结转抵免。</a:t>
-            </a:r>
-          </a:p>
-          <a:p>
-            <a:pPr algn="l">
-              <a:lnSpc>
-                <a:spcPts val="1820"/>
-              </a:lnSpc>
-              <a:spcBef>
-                <a:spcPts val="200"/>
-              </a:spcBef>
-              <a:spcAft>
-                <a:spcPts val="200"/>
-              </a:spcAft>
-            </a:pPr>
-            <a:r>
-              <a:rPr sz="1400" b="0">
-                <a:solidFill>
-                  <a:srgbClr val="000000"/>
-                </a:solidFill>
-                <a:latin typeface="Microsoft YaHei"/>
-              </a:rPr>
-              <a:t>享受前款规定的企业所得税优惠的企业，应当实际购置并自身实际投入使用前款规定的专用设备;企业购置上述专用设备在5 年内转让、出租的，应当停止享受企业所得税优惠，并补缴已经抵免的企业所得税税款。</a:t>
-            </a:r>
-          </a:p>
-          <a:p>
-            <a:pPr algn="l">
-              <a:lnSpc>
-                <a:spcPts val="1820"/>
-              </a:lnSpc>
-              <a:spcBef>
-                <a:spcPts val="200"/>
-              </a:spcBef>
-              <a:spcAft>
-                <a:spcPts val="200"/>
-              </a:spcAft>
-            </a:pPr>
-            <a:r>
-              <a:rPr sz="1400" b="0">
-                <a:solidFill>
-                  <a:srgbClr val="000000"/>
-                </a:solidFill>
-                <a:latin typeface="Microsoft YaHei"/>
-              </a:rPr>
-              <a:t>根据《关于执行环境保护专用设备企业所得税优惠目录节能节水专用设备企业所得税优惠目录和安全生产专用设备企业所得税优惠目录有关问题的通知》（财税〔2008〕48 号）第五条的规定：企业购置并实际投入适用、已开始享受税收优惠的专用设备，如从购置之日起 5 个纳税年度内转让、出租的，应在该专用设备停止使用当月停止享受企业所得税优惠，并补缴已经抵免的企业所得税税款。转让的受让方可以按照该专用设备投资额的 10％抵免当年企业所得税应纳税额；当年应纳税额不足抵免的，可以在以后5 个纳税年度结转抵免。</a:t>
+              <a:t>根据《中华人民共和国企业所得税法实施条例》第一百条规定：企业所得税法第三十四条所称税额抵免，是指企业购置并实际使用《环境保护专用设备企业所得税优惠目录》、《节能节水专用设备企业所得税优惠目录》和《安全生产专用设备企业所得税优惠目录》规定的环境保护、节能节水、安全生产等专用设备的，该专用设备的投资额的10%可以从企业当年的应纳税额中抵免;当年不足抵免的，可以在以后5个纳税年度结转抵免。</a:t>
+            </a:r>
+          </a:p>
+          <a:p>
+            <a:pPr algn="l">
+              <a:lnSpc>
+                <a:spcPts val="1820"/>
+              </a:lnSpc>
+              <a:spcBef>
+                <a:spcPts val="200"/>
+              </a:spcBef>
+              <a:spcAft>
+                <a:spcPts val="200"/>
+              </a:spcAft>
+            </a:pPr>
+            <a:r>
+              <a:rPr sz="1400" b="0">
+                <a:solidFill>
+                  <a:srgbClr val="000000"/>
+                </a:solidFill>
+                <a:latin typeface="Microsoft YaHei"/>
+              </a:rPr>
+              <a:t>享受前款规定的企业所得税优惠的企业，应当实际购置并自身实际投入使用前款规定的专用设备;企业购置上述专用设备在5年内转让、出租的，应当停止享受企业所得税优惠，并补缴已经抵免的企业所得税税款。</a:t>
+            </a:r>
+          </a:p>
+          <a:p>
+            <a:pPr algn="l">
+              <a:lnSpc>
+                <a:spcPts val="1820"/>
+              </a:lnSpc>
+              <a:spcBef>
+                <a:spcPts val="200"/>
+              </a:spcBef>
+              <a:spcAft>
+                <a:spcPts val="200"/>
+              </a:spcAft>
+            </a:pPr>
+            <a:r>
+              <a:rPr sz="1400" b="0">
+                <a:solidFill>
+                  <a:srgbClr val="000000"/>
+                </a:solidFill>
+                <a:latin typeface="Microsoft YaHei"/>
+              </a:rPr>
+              <a:t>根据《关于执行环境保护专用设备企业所得税优惠目录节能节水专用设备企业所得税优惠目录和安全生产专用设备企业所得税优惠目录有关问题的通知》（财税〔2008〕48号）第五条的规定：企业购置并实际投入适用、已开始享受税收优惠的专用设备，如从购置之日起5个纳税年度内转让、出租的，应在该专用设备停止使用当月停止享受企业所得税优惠，并补缴已经抵免的企业所得税税款。转让的受让方可以按照该专用设备投资额的10％抵免当年企业所得税应纳税额；当年应纳税额不足抵免的，可以在以后5个纳税年度结转抵免。</a:t>
             </a:r>
           </a:p>
           <a:p>
@@ -23668,7 +23514,7 @@
                 </a:solidFill>
                 <a:latin typeface="Microsoft YaHei"/>
               </a:rPr>
-              <a:t>查看“固定资产”“固定资产清理”“其他业务收入”“营业外收入”等科目明细及固定资产卡片，核实是否有在购置5 年内将专用设备转让、出租的情况；查看专用设备购置的合同、清单、发票、《税额抵免优惠明细表》等材料，核实享受税收抵免的环境保护、节能节水、安全生产专用设备的明细，在购置 5 年内转让、出租的，是否已停止享受优惠并补缴已抵免企业所得税税款。</a:t>
+              <a:t>查看“固定资产”“固定资产清理”“其他业务收入”“营业外收入”等科目明细及固定资产卡片，核实是否有在购置5年内将专用设备转让、出租的情况；查看专用设备购置的合同、清单、发票、《税额抵免优惠明细表》等材料，核实享受税收抵免的环境保护、节能节水、安全生产专用设备的明细，在购置5年内转让、出租的，是否已停止享受优惠并补缴已抵免企业所得税税款。</a:t>
             </a:r>
           </a:p>
         </p:txBody>
@@ -23871,7 +23717,7 @@
                 </a:solidFill>
                 <a:latin typeface="Microsoft YaHei"/>
               </a:rPr>
-              <a:t>根据《国家税务总局关于印发&lt;房地产开发经营业务企业所得税处理办法&gt;的通知》（国税发〔2009〕31 号）的规定：第三条 企业房地产开发经营业务包括土地的开发，建造、销售住宅、商业用房以及其他建筑物、附着物、配套设施等开发产品。除土地开发之外，其他开发产品符合下列条件之一的，应视为已经完工：（一）开发产品竣工证明材料已报房地产管理部门备案。（二）开发产品已开始投入使用。（三）开发产品已取得了初始产权证明。第五条 开发产品销售收入的范围为销售开发产品过程中取得的全部价款，包括现金、现金等价物及其他经济利益。企业代有关部门、单位和企业收取的各种基金、费用和附加等，凡纳入开发产品价内或由企业开具发票的，应按规定全部确认为销售收入；未纳入开发产品价内并由企业之外的其他收取部门、单位开具发票的，可作为代收代缴款项进行管理。</a:t>
+              <a:t>根据《国家税务总局关于印发&lt;房地产开发经营业务企业所得税处理办法&gt;的通知》（国税发〔2009〕31号）的规定：第三条 企业房地产开发经营业务包括土地的开发，建造、销售住宅、商业用房以及其他建筑物、附着物、配套设施等开发产品。除土地开发之外，其他开发产品符合下列条件之一的，应视为已经完工：（一）开发产品竣工证明材料已报房地产管理部门备案。（二）开发产品已开始投入使用。（三）开发产品已取得了初始产权证明。第五条 开发产品销售收入的范围为销售开发产品过程中取得的全部价款，包括现金、现金等价物及其他经济利益。企业代有关部门、单位和企业收取的各种基金、费用和附加等，凡纳入开发产品价内或由企业开具发票的，应按规定全部确认为销售收入；未纳入开发产品价内并由企业之外的其他收取部门、单位开具发票的，可作为代收代缴款项进行管理。</a:t>
             </a:r>
           </a:p>
           <a:p>
@@ -23937,95 +23783,29 @@
                 </a:solidFill>
                 <a:latin typeface="Microsoft YaHei"/>
               </a:rPr>
-              <a:t>（三）采取银行按揭方式销售开发产品的，应按销售合同或协议约定的价款确定收入额，其首付款应于实际收到日确认收入的实现，余款在银行按揭贷款办理转账之日确认收入的实现。（四）采取委托方式销售开发产品的，应按以下原则确认收入的实现：</a:t>
-            </a:r>
-          </a:p>
-          <a:p>
-            <a:pPr algn="l">
-              <a:lnSpc>
-                <a:spcPts val="1820"/>
-              </a:lnSpc>
-              <a:spcBef>
-                <a:spcPts val="200"/>
-              </a:spcBef>
-              <a:spcAft>
-                <a:spcPts val="200"/>
-              </a:spcAft>
-            </a:pPr>
-            <a:r>
-              <a:rPr sz="1400" b="0">
-                <a:solidFill>
-                  <a:srgbClr val="000000"/>
-                </a:solidFill>
-                <a:latin typeface="Microsoft YaHei"/>
-              </a:rPr>
-              <a:t>1.采取支付手续费方式委托销售开发产品的，应按销售合同或协议中约定的价款于收到受托方已销开发产品清单之日确认收入的实现。</a:t>
-            </a:r>
-          </a:p>
-          <a:p>
-            <a:pPr algn="l">
-              <a:lnSpc>
-                <a:spcPts val="1820"/>
-              </a:lnSpc>
-              <a:spcBef>
-                <a:spcPts val="200"/>
-              </a:spcBef>
-              <a:spcAft>
-                <a:spcPts val="200"/>
-              </a:spcAft>
-            </a:pPr>
-            <a:r>
-              <a:rPr sz="1400" b="0">
-                <a:solidFill>
-                  <a:srgbClr val="000000"/>
-                </a:solidFill>
-                <a:latin typeface="Microsoft YaHei"/>
-              </a:rPr>
-              <a:t>2.采取视同买断方式委托销售开发产品的，属于企业与购买方签订销售合同或协议，或企业、受托方、购买方三方共同签订销售合同或协议的，如果销售合同或协议中约定的价格高于买断价格，则应按销售合同或协议中约定的价格计算的价款于收到受托方已销开发产品清单之日确认收入的实现；如果属于前两种情况中销售合同或协议中约定的价格低于买断价格，以及属于受托方与购买方签订销售合同或协议的，则应按买断价格计算的价款于收到受托方已销开发产品清单之日确认收入的实现。</a:t>
-            </a:r>
-          </a:p>
-          <a:p>
-            <a:pPr algn="l">
-              <a:lnSpc>
-                <a:spcPts val="1820"/>
-              </a:lnSpc>
-              <a:spcBef>
-                <a:spcPts val="200"/>
-              </a:spcBef>
-              <a:spcAft>
-                <a:spcPts val="200"/>
-              </a:spcAft>
-            </a:pPr>
-            <a:r>
-              <a:rPr sz="1400" b="0">
-                <a:solidFill>
-                  <a:srgbClr val="000000"/>
-                </a:solidFill>
-                <a:latin typeface="Microsoft YaHei"/>
-              </a:rPr>
-              <a:t>3.采取基价（保底价）并实行超基价双方分成方式委托销售开发产品的，属于由企业与购买方签订销售合同或协议，或企业、受托方、购买方三方共同签订销售合同或协议的，如果销售合同或协议中约定的价格高于基价，则应按销售合同或协议中约定的价格计算的价款于收到受托方已销开发产品清单之日确认收入的实现，企业按规定支付受托方的分成额，不得直接从销售收入中减除；如果销售合同或协议约定的价格低于基价的，则应按基价计算的价款于收到受托方已销开发产品清单之日确认收入的实现。属于由受托方与购买方直接签订销售合同的，则应按基价加上按规定取得的分成额于收到受托方已销开发产品清单之日确认收入的实现。</a:t>
-            </a:r>
-          </a:p>
-          <a:p>
-            <a:pPr algn="l">
-              <a:lnSpc>
-                <a:spcPts val="1820"/>
-              </a:lnSpc>
-              <a:spcBef>
-                <a:spcPts val="200"/>
-              </a:spcBef>
-              <a:spcAft>
-                <a:spcPts val="200"/>
-              </a:spcAft>
-            </a:pPr>
-            <a:r>
-              <a:rPr sz="1400" b="0">
-                <a:solidFill>
-                  <a:srgbClr val="000000"/>
-                </a:solidFill>
-                <a:latin typeface="Microsoft YaHei"/>
-              </a:rPr>
-              <a:t>4.采取包销方式委托销售开发产品的，包销期内可根据包销合同的有关约定，参照上述 1 至 3 项规定确认收入的实现；包销期满后尚未出售的开发产品，企业应根据包销合同或协议约定的价款和付款方式确认收入的实现。</a:t>
+              <a:t>（三）采取银行按揭方式销售开发产品的，应按销售合同或协议约定的价款确定收入额，其首付款应于实际收到日确认收入的实现，余款在银行按揭贷款办理转账之日确认收入的实现。（四）采取委托方式销售开发产品的，应按以下原则确认收入的实现：1.采取支付手续费方式委托销售开发产品的，应按销售合同或协议中约定的价款于收到受托方已销开发产品清单之日确认收入的实现。2.采取视同买断方式委托销售开发产品的，属于企业与购买方签订销售合同或协议，或企业、受托方、购买方三方共同签订销售合同或协议的，如果销售合同或协议中约定的价格高于买断价格，则应按销售合同或协议中约定的价格计算的价款于收到受托方已销开发产品清单之日确认收入的实现；如果属于前两种情况中销售合同或协议中约定的价格低于买断价格，以及属于受托方与购买方签订销售合同或协议的，则应按买断价格计算的价款于收到受托方已销开发产品清单之日确认收入的实现。3.采取基价（保底价）</a:t>
+            </a:r>
+          </a:p>
+          <a:p>
+            <a:pPr algn="l">
+              <a:lnSpc>
+                <a:spcPts val="1820"/>
+              </a:lnSpc>
+              <a:spcBef>
+                <a:spcPts val="200"/>
+              </a:spcBef>
+              <a:spcAft>
+                <a:spcPts val="200"/>
+              </a:spcAft>
+            </a:pPr>
+            <a:r>
+              <a:rPr sz="1400" b="0">
+                <a:solidFill>
+                  <a:srgbClr val="000000"/>
+                </a:solidFill>
+                <a:latin typeface="Microsoft YaHei"/>
+              </a:rPr>
+              <a:t>并实行超基价双方分成方式委托销售开发产品的，属于由企业与购买方签订销售合同或协议，或企业、受托方、购买方三方共同签订销售合同或协议的，如果销售合同或协议中约定的价格高于基价，则应按销售合同或协议中约定的价格计算的价款于收到受托方已销开发产品清单之日确认收入的实现，企业按规定支付受托方的分成额，不得直接从销售收入中减除；如果销售合同或协议约定的价格低于基价的，则应按基价计算的价款于收到受托方已销开发产品清单之日确认收入的实现。属于由受托方与购买方直接签订销售合同的，则应按基价加上按规定取得的分成额于收到受托方已销开发产品清单之日确认收入的实现。4.采取包销方式委托销售开发产品的，包销期内可根据包销合同的有关约定，参照上述1至3项规定确认收入的实现；包销期满后尚未出售的开发产品，企业应根据包销合同或协议约定的价款和付款方式确认收入的实现。</a:t>
             </a:r>
           </a:p>
           <a:p>
@@ -24091,29 +23871,29 @@
                 </a:solidFill>
                 <a:latin typeface="Microsoft YaHei"/>
               </a:rPr>
-              <a:t>（二）由主管税务机关参照当地同类开发产品市场公允价值确定；（三）按开发产品的成本利润率确定。开发产品的成本利润率不得低于 15%，具体比例由主管税务机关确定。第八条 企业销售未完工开发产品的计税毛利率由各省、自治、直辖市税务局按下列规定进行确定：</a:t>
-            </a:r>
-          </a:p>
-          <a:p>
-            <a:pPr algn="l">
-              <a:lnSpc>
-                <a:spcPts val="1820"/>
-              </a:lnSpc>
-              <a:spcBef>
-                <a:spcPts val="200"/>
-              </a:spcBef>
-              <a:spcAft>
-                <a:spcPts val="200"/>
-              </a:spcAft>
-            </a:pPr>
-            <a:r>
-              <a:rPr sz="1400" b="0">
-                <a:solidFill>
-                  <a:srgbClr val="000000"/>
-                </a:solidFill>
-                <a:latin typeface="Microsoft YaHei"/>
-              </a:rPr>
-              <a:t>（一）开发项目位于省、自治区、直辖市和计划单列市人民政府所在地城市城区和郊区的，不得低于 15％。（二）开发项目位于地及地级市城区及郊区的，不得低于10%。（三）开发项目位于其他地区的，不得低于5％。（四）属于经济适用房、限价房和危改房的，不得低于3%。第九条 企业销售未完工开发产品取得的收入，应先按预计计税毛利率分季(或月)计算出预计毛利额，计入当期应纳税所得额。开发产品完工后，企业应及时结算其计税成本并计算此前销售收入的实际毛利额，同时将其实际毛利额与其对应的预计毛利额之间的差额，计入当年度企业本项目与其他项目合并计算的应纳税所得额。在年度纳税申报时，企业须出具对该项开发产品实际毛利额与预计毛利额之间差异调整情况的报告以及税务机关需要的其他相关资料。</a:t>
+              <a:t>（二）由主管税务机关参照当地同类开发产品市场公允价值确定；（三）按开发产品的成本利润率确定。开发产品的成本利润率不得低于15%，具体比例由主管税务机关确定。第八条 企业销售未完工开发产品的计税毛利率由各省、自治、直辖市税务局按下列规定进行确定：</a:t>
+            </a:r>
+          </a:p>
+          <a:p>
+            <a:pPr algn="l">
+              <a:lnSpc>
+                <a:spcPts val="1820"/>
+              </a:lnSpc>
+              <a:spcBef>
+                <a:spcPts val="200"/>
+              </a:spcBef>
+              <a:spcAft>
+                <a:spcPts val="200"/>
+              </a:spcAft>
+            </a:pPr>
+            <a:r>
+              <a:rPr sz="1400" b="0">
+                <a:solidFill>
+                  <a:srgbClr val="000000"/>
+                </a:solidFill>
+                <a:latin typeface="Microsoft YaHei"/>
+              </a:rPr>
+              <a:t>（一）开发项目位于省、自治区、直辖市和计划单列市人民政府所在地城市城区和郊区的，不得低于15％。（二）开发项目位于地及地级市城区及郊区的，不得低于10%。（三）开发项目位于其他地区的，不得低于5％。（四）属于经济适用房、限价房和危改房的，不得低于3%。第九条 企业销售未完工开发产品取得的收入，应先按预计计税毛利率分季(或月)计算出预计毛利额，计入当期应纳税所得额。开发产品完工后，企业应及时结算其计税成本并计算此前销售收入的实际毛利额，同时将其实际毛利额与其对应的预计毛利额之间的差额，计入当年度企业本项目与其他项目合并计算的应纳税所得额。在年度纳税申报时，企业须出具对该项开发产品实际毛利额与预计毛利额之间差异调整情况的报告以及税务机关需要的其他相关资料。</a:t>
             </a:r>
           </a:p>
           <a:p>
@@ -24426,7 +24206,7 @@
                 </a:solidFill>
                 <a:latin typeface="Microsoft YaHei"/>
               </a:rPr>
-              <a:t>根据《国家税务总局关于企业所得税有关问题的公告》（国家税务总局公告 2016 年第 80 号）第二条规定：企业发生《国家税务总局关于企业处置资产所得税处理问题的通知》（国税函〔2008〕828 号）第二条规定情形的，除另有规定外，应按照被移送资产的公允价值确定销售收入。</a:t>
+              <a:t>根据《国家税务总局关于企业所得税有关问题的公告》（国家税务总局公告2016年第80号）第二条规定：企业发生《国家税务总局关于企业处置资产所得税处理问题的通知》（国税函〔2008〕828号）第二条规定情形的，除另有规定外，应按照被移送资产的公允价值确定销售收入。</a:t>
             </a:r>
           </a:p>
           <a:p>
@@ -24739,7 +24519,7 @@
                 </a:solidFill>
                 <a:latin typeface="Microsoft YaHei"/>
               </a:rPr>
-              <a:t>国家对重点扶持和鼓励发展的产业和项目，给予企业所得税优惠。根据《国家税务总局关于印发&lt;房地产开发经营业务企业所得税处理办法&gt;的通知》（国税发〔2009〕31 号）的规定：第七条 企业将开发产品用于捐赠、赞助、职工福利、奖励、对外投资、分配给股东或投资人、抵偿债务、换取其他企事业单位和个人的非货币性资产等行为，应视同销售，于开发产品所有权或使用权转移，或于实际取得利益权利时确认收入（或利润）的实现。确认收入（或利润）的方法和顺序为：</a:t>
+              <a:t>国家对重点扶持和鼓励发展的产业和项目，给予企业所得税优惠。根据《国家税务总局关于印发&lt;房地产开发经营业务企业所得税处理办法&gt;的通知》（国税发〔2009〕31号）的规定：第七条 企业将开发产品用于捐赠、赞助、职工福利、奖励、对外投资、分配给股东或投资人、抵偿债务、换取其他企事业单位和个人的非货币性资产等行为，应视同销售，于开发产品所有权或使用权转移，或于实际取得利益权利时确认收入（或利润）的实现。确认收入（或利润）的方法和顺序为：</a:t>
             </a:r>
           </a:p>
           <a:p>
@@ -24783,7 +24563,7 @@
                 </a:solidFill>
                 <a:latin typeface="Microsoft YaHei"/>
               </a:rPr>
-              <a:t>（二）由主管税务机关参照当地同类开发产品市场公允价值确定；（三）按开发产品的成本利润率确定。开发产品的成本利润率不得低于 15%，具体比例由主管税务机关确定。</a:t>
+              <a:t>（二）由主管税务机关参照当地同类开发产品市场公允价值确定；（三）按开发产品的成本利润率确定。开发产品的成本利润率不得低于15%，具体比例由主管税务机关确定。</a:t>
             </a:r>
           </a:p>
           <a:p>
@@ -25140,7 +24920,7 @@
                 </a:solidFill>
                 <a:latin typeface="Microsoft YaHei"/>
               </a:rPr>
-              <a:t>根据《国家税务总局关于印发&lt;房地产开发经营业务企业所得税处理办法&gt;的通知》（国税发〔2009〕31 号）第七条的规定：企业将开发产品用于捐赠、赞助、职工福利、奖励、对外投资、分配给股东或投资人、抵偿债务、换取其他企事业单位和个人的非货币性资产等行为，应视同销售，于开发产品所有权或使用权转移，或于实际取得利益权利时确认收入（或利润）的实现。确认收入（或利润）的方法和顺序为：</a:t>
+              <a:t>根据《国家税务总局关于印发&lt;房地产开发经营业务企业所得税处理办法&gt;的通知》（国税发〔2009〕31号）第七条的规定：企业将开发产品用于捐赠、赞助、职工福利、奖励、对外投资、分配给股东或投资人、抵偿债务、换取其他企事业单位和个人的非货币性资产等行为，应视同销售，于开发产品所有权或使用权转移，或于实际取得利益权利时确认收入（或利润）的实现。确认收入（或利润）的方法和顺序为：</a:t>
             </a:r>
           </a:p>
           <a:p>
@@ -25184,7 +24964,7 @@
                 </a:solidFill>
                 <a:latin typeface="Microsoft YaHei"/>
               </a:rPr>
-              <a:t>（二）由主管税务机关参照当地同类开发产品市场公允价值确定；（三）按开发产品的成本利润率确定。开发产品的成本利润率不得低于 15%，具体比例由主管税务机关确定。</a:t>
+              <a:t>（二）由主管税务机关参照当地同类开发产品市场公允价值确定；（三）按开发产品的成本利润率确定。开发产品的成本利润率不得低于15%，具体比例由主管税务机关确定。</a:t>
             </a:r>
           </a:p>
           <a:p>
@@ -26030,29 +25810,29 @@
                 </a:solidFill>
                 <a:latin typeface="Microsoft YaHei"/>
               </a:rPr>
-              <a:t>企业实际发生的与取得收入有关的、合理的支出，包括成本、费用、税金、损失和其他支出，准予在计算应纳税所得额时扣除。根据《国家税务总局关于印发&lt;房地产开发经营业务企业所得税处理办法&gt;的通知》（国税发〔2009〕31 号）第三十二条的规定：第三十二条 除以下几项预提（应付）费用外，计税成本均应为实际发生的成本。</a:t>
-            </a:r>
-          </a:p>
-          <a:p>
-            <a:pPr algn="l">
-              <a:lnSpc>
-                <a:spcPts val="1820"/>
-              </a:lnSpc>
-              <a:spcBef>
-                <a:spcPts val="200"/>
-              </a:spcBef>
-              <a:spcAft>
-                <a:spcPts val="200"/>
-              </a:spcAft>
-            </a:pPr>
-            <a:r>
-              <a:rPr sz="1400" b="0">
-                <a:solidFill>
-                  <a:srgbClr val="000000"/>
-                </a:solidFill>
-                <a:latin typeface="Microsoft YaHei"/>
-              </a:rPr>
-              <a:t>（一）出包工程未最终办理结算而未取得全额发票的，在证明资料充分的前提下，其发票不足金额可以预提，但最高不得超过合同总金额的 10％。</a:t>
+              <a:t>企业实际发生的与取得收入有关的、合理的支出，包括成本、费用、税金、损失和其他支出，准予在计算应纳税所得额时扣除。根据《国家税务总局关于印发&lt;房地产开发经营业务企业所得税处理办法&gt;的通知》（国税发〔2009〕31号）第三十二条的规定：第三十二条 除以下几项预提（应付）费用外，计税成本均应为实际发生的成本。</a:t>
+            </a:r>
+          </a:p>
+          <a:p>
+            <a:pPr algn="l">
+              <a:lnSpc>
+                <a:spcPts val="1820"/>
+              </a:lnSpc>
+              <a:spcBef>
+                <a:spcPts val="200"/>
+              </a:spcBef>
+              <a:spcAft>
+                <a:spcPts val="200"/>
+              </a:spcAft>
+            </a:pPr>
+            <a:r>
+              <a:rPr sz="1400" b="0">
+                <a:solidFill>
+                  <a:srgbClr val="000000"/>
+                </a:solidFill>
+                <a:latin typeface="Microsoft YaHei"/>
+              </a:rPr>
+              <a:t>（一）出包工程未最终办理结算而未取得全额发票的，在证明资料充分的前提下，其发票不足金额可以预提，但最高不得超过合同总金额的10％。</a:t>
             </a:r>
           </a:p>
           <a:p>
@@ -26343,7 +26123,7 @@
                 </a:solidFill>
                 <a:latin typeface="Microsoft YaHei"/>
               </a:rPr>
-              <a:t>根据税法相关规定，金融企业涉农贷款和中小企业贷款损失准备金的税前扣除政策，凡按照《财政部税务总局关于金融企业涉农贷款和中小企业贷款损失准备金税前扣除有关政策的公告》（财政部税务总局公告 2019 年第 85 号）的规定执行的，不再适用《财政部国家税务总局关于金融企业贷款损失准备金企业所得税税前扣除有关政策的公告》（财政部税务总局公告 2019 年第86 号）第一条至第四条的规定。存在针对涉农贷款和中小企业贷款按照“关注类、次级类、可疑类、损失类”各自对应计提比例计提准予税前扣除贷款损失准备，同时对“正常类”比照一般贷款按照 1%计提贷款损失准备金并税前扣除，少缴纳企业所得税的风险。</a:t>
+              <a:t>根据税法相关规定，金融企业涉农贷款和中小企业贷款损失准备金的税前扣除政策，凡按照《财政部税务总局关于金融企业涉农贷款和中小企业贷款损失准备金税前扣除有关政策的公告》（财政部税务总局公告2019年第85号）的规定执行的，不再适用《财政部国家税务总局关于金融企业贷款损失准备金企业所得税税前扣除有关政策的公告》（财政部税务总局公告2019年第86号）第一条至第四条的规定。存在针对涉农贷款和中小企业贷款按照“关注类、次级类、可疑类、损失类”各自对应计提比例计提准予税前扣除贷款损失准备，同时对“正常类”比照一般贷款按照1%计提贷款损失准备金并税前扣除，少缴纳企业所得税的风险。</a:t>
             </a:r>
           </a:p>
           <a:p>
@@ -26387,51 +26167,51 @@
                 </a:solidFill>
                 <a:latin typeface="Microsoft YaHei"/>
               </a:rPr>
-              <a:t>根据《财政部税务总局关于金融企业涉农贷款和中小企业贷款损失准备金税前扣除有关政策的公告》（财政部税务总局公告2019年第 85 号）的规定：</a:t>
-            </a:r>
-          </a:p>
-          <a:p>
-            <a:pPr algn="l">
-              <a:lnSpc>
-                <a:spcPts val="1820"/>
-              </a:lnSpc>
-              <a:spcBef>
-                <a:spcPts val="200"/>
-              </a:spcBef>
-              <a:spcAft>
-                <a:spcPts val="200"/>
-              </a:spcAft>
-            </a:pPr>
-            <a:r>
-              <a:rPr sz="1400" b="0">
-                <a:solidFill>
-                  <a:srgbClr val="000000"/>
-                </a:solidFill>
-                <a:latin typeface="Microsoft YaHei"/>
-              </a:rPr>
-              <a:t>一、金融企业根据《贷款风险分类指引》（银监发〔2007〕54号），对其涉农贷款和中小企业贷款进行风险分类后，按照以下比例计提的贷款损失准备金，准予在计算应纳税所得额时扣除：（一）关注类贷款，计提比例为 2%；（二）次级类贷款，计提比例为 25%；</a:t>
-            </a:r>
-          </a:p>
-          <a:p>
-            <a:pPr algn="l">
-              <a:lnSpc>
-                <a:spcPts val="1820"/>
-              </a:lnSpc>
-              <a:spcBef>
-                <a:spcPts val="200"/>
-              </a:spcBef>
-              <a:spcAft>
-                <a:spcPts val="200"/>
-              </a:spcAft>
-            </a:pPr>
-            <a:r>
-              <a:rPr sz="1400" b="0">
-                <a:solidFill>
-                  <a:srgbClr val="000000"/>
-                </a:solidFill>
-                <a:latin typeface="Microsoft YaHei"/>
-              </a:rPr>
-              <a:t>（三）可疑类贷款，计提比例为 50%；（四）损失类贷款，计提比例为 100%。二、本公告所称涉农贷款，是指《涉农贷款专项统计制度》（银发〔2007〕246 号）统计的以下贷款：</a:t>
+              <a:t>根据《财政部税务总局关于金融企业涉农贷款和中小企业贷款损失准备金税前扣除有关政策的公告》（财政部税务总局公告2019年第85号）的规定：</a:t>
+            </a:r>
+          </a:p>
+          <a:p>
+            <a:pPr algn="l">
+              <a:lnSpc>
+                <a:spcPts val="1820"/>
+              </a:lnSpc>
+              <a:spcBef>
+                <a:spcPts val="200"/>
+              </a:spcBef>
+              <a:spcAft>
+                <a:spcPts val="200"/>
+              </a:spcAft>
+            </a:pPr>
+            <a:r>
+              <a:rPr sz="1400" b="0">
+                <a:solidFill>
+                  <a:srgbClr val="000000"/>
+                </a:solidFill>
+                <a:latin typeface="Microsoft YaHei"/>
+              </a:rPr>
+              <a:t>一、金融企业根据《贷款风险分类指引》（银监发〔2007〕54号），对其涉农贷款和中小企业贷款进行风险分类后，按照以下比例计提的贷款损失准备金，准予在计算应纳税所得额时扣除：（一）关注类贷款，计提比例为2%；（二）次级类贷款，计提比例为25%；</a:t>
+            </a:r>
+          </a:p>
+          <a:p>
+            <a:pPr algn="l">
+              <a:lnSpc>
+                <a:spcPts val="1820"/>
+              </a:lnSpc>
+              <a:spcBef>
+                <a:spcPts val="200"/>
+              </a:spcBef>
+              <a:spcAft>
+                <a:spcPts val="200"/>
+              </a:spcAft>
+            </a:pPr>
+            <a:r>
+              <a:rPr sz="1400" b="0">
+                <a:solidFill>
+                  <a:srgbClr val="000000"/>
+                </a:solidFill>
+                <a:latin typeface="Microsoft YaHei"/>
+              </a:rPr>
+              <a:t>（三）可疑类贷款，计提比例为50%；（四）损失类贷款，计提比例为100%。二、本公告所称涉农贷款，是指《涉农贷款专项统计制度》（银发〔2007〕246号）统计的以下贷款：</a:t>
             </a:r>
           </a:p>
           <a:p>
@@ -26497,7 +26277,7 @@
                 </a:solidFill>
                 <a:latin typeface="Microsoft YaHei"/>
               </a:rPr>
-              <a:t>本条所称农村企业及各类组织贷款，是指金融企业发放给注册地位于农村区域的企业及各类组织的所有贷款。农村区域，是指除地级及以上城市的城市行政区及其市辖建制镇之外的区域。三、本公告所称中小企业贷款，是指金融企业对年销售额和资产总额均不超过 2 亿元的企业的贷款。</a:t>
+              <a:t>本条所称农村企业及各类组织贷款，是指金融企业发放给注册地位于农村区域的企业及各类组织的所有贷款。农村区域，是指除地级及以上城市的城市行政区及其市辖建制镇之外的区域。三、本公告所称中小企业贷款，是指金融企业对年销售额和资产总额均不超过2亿元的企业的贷款。</a:t>
             </a:r>
           </a:p>
           <a:p>
@@ -26541,7 +26321,7 @@
                 </a:solidFill>
                 <a:latin typeface="Microsoft YaHei"/>
               </a:rPr>
-              <a:t>根据《财政部国家税务总局关于金融企业贷款损失准备金企业所得税税前扣除有关政策的公告》（财政部税务总局公告2019 年第86号）的规定：</a:t>
+              <a:t>根据《财政部国家税务总局关于金融企业贷款损失准备金企业所得税税前扣除有关政策的公告》（财政部税务总局公告2019年第86号）的规定：</a:t>
             </a:r>
           </a:p>
           <a:p>
@@ -26629,7 +26409,7 @@
                 </a:solidFill>
                 <a:latin typeface="Microsoft YaHei"/>
               </a:rPr>
-              <a:t>五、金融企业涉农贷款和中小企业贷款损失准备金的税前扣除政策，凡按照《财政部 税务总局关于金融企业涉农贷款和中小企业贷款损失准备金税前扣除有关政策的公告》（财政部税务总局公告2019年第 85 号）的规定执行的，不再适用本公告第一条至第四条的规定。根据《财政部税务总局关于延长部分税收优惠政策执行期限的公告》（财政部税务总局公告 2021 年第 6 号）的规定：四、《财政部 国家税务总局关于保险公司准备金支出企业所得税税前扣除有关政策问题的通知》（财税〔2016〕114 号）等6个文件规定的准备金企业所得税税前扣除政策到期后继续执行，详见附件2。</a:t>
+              <a:t>五、金融企业涉农贷款和中小企业贷款损失准备金的税前扣除政策，凡按照《财政部 税务总局关于金融企业涉农贷款和中小企业贷款损失准备金税前扣除有关政策的公告》（财政部税务总局公告2019年第85号）的规定执行的，不再适用本公告第一条至第四条的规定。根据《财政部税务总局关于延长部分税收优惠政策执行期限的公告》（财政部税务总局公告2021年第6号）的规定：四、《财政部 国家税务总局关于保险公司准备金支出企业所得税税前扣除有关政策问题的通知》（财税〔2016〕114号）等6个文件规定的准备金企业所得税税前扣除政策到期后继续执行，详见附件2。</a:t>
             </a:r>
           </a:p>
           <a:p>
@@ -26986,29 +26766,29 @@
                 </a:solidFill>
                 <a:latin typeface="Microsoft YaHei"/>
               </a:rPr>
-              <a:t>根据《财政部国家税务总局关于专项用途财政性资金企业所得税处理问题的通知》（财税〔2011〕70 号）的规定：企业从县级以上各级人民政府财政部门及其他部门取得的应计入收入总额的财政性资金，凡同时符合以下条件的，可以作为不征税收入，在计算应纳税所得额时从收入总额中减除：（一）企业能够提供规定资金专项用途的资金拨付文件；（二）财政部门或其他拨付资金的政府部门对该资金有专门的资金管理办法或具体管理要求；</a:t>
-            </a:r>
-          </a:p>
-          <a:p>
-            <a:pPr algn="l">
-              <a:lnSpc>
-                <a:spcPts val="1820"/>
-              </a:lnSpc>
-              <a:spcBef>
-                <a:spcPts val="200"/>
-              </a:spcBef>
-              <a:spcAft>
-                <a:spcPts val="200"/>
-              </a:spcAft>
-            </a:pPr>
-            <a:r>
-              <a:rPr sz="1400" b="0">
-                <a:solidFill>
-                  <a:srgbClr val="000000"/>
-                </a:solidFill>
-                <a:latin typeface="Microsoft YaHei"/>
-              </a:rPr>
-              <a:t>（三）企业对该资金以及以该资金发生的支出单独进行核算。二、根据实施条例第二十八条的规定，上述不征税收入用于支出所形成的费用，不得在计算应纳税所得额时扣除；用于支出所形成的资产，其计算的折旧、摊销不得在计算应纳税所得额时扣除。三、企业将符合本通知第一条规定条件的财政性资金作不征税收入处理后，在 5 年（60 个月）内未发生支出且未缴回财政部门或其他拨付资金的政府部门的部分，应计入取得该资金第六年的应税收入总额；计入应税收入总额的财政性资金发生的支出，允许在计算应纳税所得额时扣除。</a:t>
+              <a:t>根据《财政部国家税务总局关于专项用途财政性资金企业所得税处理问题的通知》（财税〔2011〕70号）的规定：企业从县级以上各级人民政府财政部门及其他部门取得的应计入收入总额的财政性资金，凡同时符合以下条件的，可以作为不征税收入，在计算应纳税所得额时从收入总额中减除：（一）企业能够提供规定资金专项用途的资金拨付文件；（二）财政部门或其他拨付资金的政府部门对该资金有专门的资金管理办法或具体管理要求；</a:t>
+            </a:r>
+          </a:p>
+          <a:p>
+            <a:pPr algn="l">
+              <a:lnSpc>
+                <a:spcPts val="1820"/>
+              </a:lnSpc>
+              <a:spcBef>
+                <a:spcPts val="200"/>
+              </a:spcBef>
+              <a:spcAft>
+                <a:spcPts val="200"/>
+              </a:spcAft>
+            </a:pPr>
+            <a:r>
+              <a:rPr sz="1400" b="0">
+                <a:solidFill>
+                  <a:srgbClr val="000000"/>
+                </a:solidFill>
+                <a:latin typeface="Microsoft YaHei"/>
+              </a:rPr>
+              <a:t>（三）企业对该资金以及以该资金发生的支出单独进行核算。二、根据实施条例第二十八条的规定，上述不征税收入用于支出所形成的费用，不得在计算应纳税所得额时扣除；用于支出所形成的资产，其计算的折旧、摊销不得在计算应纳税所得额时扣除。三、企业将符合本通知第一条规定条件的财政性资金作不征税收入处理后，在5年（60个月）内未发生支出且未缴回财政部门或其他拨付资金的政府部门的部分，应计入取得该资金第六年的应税收入总额；计入应税收入总额的财政性资金发生的支出，允许在计算应纳税所得额时扣除。</a:t>
             </a:r>
           </a:p>
           <a:p>
@@ -29052,7 +28832,7 @@
                 </a:solidFill>
                 <a:latin typeface="Microsoft YaHei"/>
               </a:rPr>
-              <a:t>根据《财政部国家税务总局关于合伙企业合伙人所得税问题的通知》财税〔2008〕159 号的规定：</a:t>
+              <a:t>根据《财政部国家税务总局关于合伙企业合伙人所得税问题的通知》财税〔2008〕159号的规定：</a:t>
             </a:r>
           </a:p>
           <a:p>
@@ -29118,7 +28898,7 @@
                 </a:solidFill>
                 <a:latin typeface="Microsoft YaHei"/>
               </a:rPr>
-              <a:t>三、合伙企业生产经营所得和其他所得采取“先分后税”的原则。具体应纳税所得额的计算按照《关于个人独资企业和合伙企业投资者征收个人所得税的规定》（财税[2000]91 号）及《财政部国家税务总局关于调整个体工商户个人独资企业和合伙企业个人所得税税前扣除标准有关问题的通知》（财税[2008]65 号）的有关规定执行。前款所称生产经营所得和其他所得，包括合伙企业分配给所有合伙人的所得和企业当年留存的所得（利润）。四、合伙企业的合伙人按照下列原则确定应纳税所得额（一）合伙企业的合伙人以合伙企业的生产经营所得和其他所得，按照合伙协议约定的分配比例确定应纳税所得额。（二）合伙协议未约定或者约定不明确的，以全部生产经营所得和其他所得，按照合伙人协商决定的分配比例确定应纳税所得额。（三）协商不成的，以全部生产经营所得和其他所得，按照合伙人实缴出资比例确定应纳税所得额。</a:t>
+              <a:t>三、合伙企业生产经营所得和其他所得采取“先分后税”的原则。具体应纳税所得额的计算按照《关于个人独资企业和合伙企业投资者征收个人所得税的规定》（财税[2000]91号）及《财政部国家税务总局关于调整个体工商户个人独资企业和合伙企业个人所得税税前扣除标准有关问题的通知》（财税[2008]65号）的有关规定执行。前款所称生产经营所得和其他所得，包括合伙企业分配给所有合伙人的所得和企业当年留存的所得（利润）。四、合伙企业的合伙人按照下列原则确定应纳税所得额（一）合伙企业的合伙人以合伙企业的生产经营所得和其他所得，按照合伙协议约定的分配比例确定应纳税所得额。（二）合伙协议未约定或者约定不明确的，以全部生产经营所得和其他所得，按照合伙人协商决定的分配比例确定应纳税所得额。（三）协商不成的，以全部生产经营所得和其他所得，按照合伙人实缴出资比例确定应纳税所得额。</a:t>
             </a:r>
           </a:p>
           <a:p>
@@ -29431,7 +29211,7 @@
                 </a:solidFill>
                 <a:latin typeface="Microsoft YaHei"/>
               </a:rPr>
-              <a:t>依据国务院关于《中华人民共和国企业所得税法实施条例》（中华人民共和国国务院令第 512 号）第二十五条规定：企业发生非货币性资产交换，以及将货物、财产、劳务用于捐赠、偿债、赞助、集资、广告、样品、职工福利或者利润分配等用途的，应当视同销售货物、转让财产或者提供劳务，但国务院财政、税务主管部门另有规定的除外。</a:t>
+              <a:t>依据国务院关于《中华人民共和国企业所得税法实施条例》（中华人民共和国国务院令第512号）第二十五条规定：企业发生非货币性资产交换，以及将货物、财产、劳务用于捐赠、偿债、赞助、集资、广告、样品、职工福利或者利润分配等用途的，应当视同销售货物、转让财产或者提供劳务，但国务院财政、税务主管部门另有规定的除外。</a:t>
             </a:r>
           </a:p>
           <a:p>
@@ -30700,7 +30480,7 @@
                 </a:solidFill>
                 <a:latin typeface="Microsoft YaHei"/>
               </a:rPr>
-              <a:t>受托加工制造大型机械设备、船舶、飞机，以及从事建筑、安装、装配工程业务或者提供其他劳务等，持续时间超过12 个月的，可能存在未按照纳税年度内完工进度或者完成的工作量确认收入的情况。</a:t>
+              <a:t>受托加工制造大型机械设备、船舶、飞机，以及从事建筑、安装、装配工程业务或者提供其他劳务等，持续时间超过12个月的，可能存在未按照纳税年度内完工进度或者完成的工作量确认收入的情况。</a:t>
             </a:r>
           </a:p>
           <a:p>
@@ -31661,7 +31441,7 @@
                 </a:solidFill>
                 <a:latin typeface="Microsoft YaHei"/>
               </a:rPr>
-              <a:t>根据《中华人民共和国企业所得税法》第八条的规定：企业实际发生的与取得收入有关的、合理的支出，包括成本、费用、税金、损失和其他支出，准予在计算应纳税所得额时扣除。根据《国家税务总局关于企业工资薪金和职工福利费等支出税前扣除问题的公告》（国家税务总局公告 2015 年第34 号）第二条的规定：</a:t>
+              <a:t>根据《中华人民共和国企业所得税法》第八条的规定：企业实际发生的与取得收入有关的、合理的支出，包括成本、费用、税金、损失和其他支出，准予在计算应纳税所得额时扣除。根据《国家税务总局关于企业工资薪金和职工福利费等支出税前扣除问题的公告》（国家税务总局公告2015年第34号）第二条的规定：</a:t>
             </a:r>
           </a:p>
           <a:p>
@@ -32979,7 +32759,7 @@
                 </a:solidFill>
                 <a:latin typeface="Microsoft YaHei"/>
               </a:rPr>
-              <a:t>2017 年度及以后申报扣除资产损失，仅需填报企业所得税年度纳税申报表《资产损失税前扣除及纳税调整明细表》，不再报送资产损失相关资料，相关资料由企业留存备查。可能存在留存资料不完整、不规范，不符合税前扣除条件的风险。</a:t>
+              <a:t>2017年度及以后申报扣除资产损失，仅需填报企业所得税年度纳税申报表《资产损失税前扣除及纳税调整明细表》，不再报送资产损失相关资料，相关资料由企业留存备查。可能存在留存资料不完整、不规范，不符合税前扣除条件的风险。</a:t>
             </a:r>
           </a:p>
           <a:p>
@@ -33045,7 +32825,7 @@
                 </a:solidFill>
                 <a:latin typeface="Microsoft YaHei"/>
               </a:rPr>
-              <a:t>企业的各项资产，包括固定资产、生物资产、无形资产、长期待摊费用、投资资产、存货等，以历史成本为计税基础。前款所称历史成本，是指企业取得该项资产时实际发生的支出。企业持有各项资产期间资产增值或者减值，除国务院财政、税务主管部门规定可以确认损益外，不得调整该资产的计税基础。根据《财政部国家税务总局关于企业资产损失税前扣除政策的通知》（财税〔2009〕57 号）的规定：</a:t>
+              <a:t>企业的各项资产，包括固定资产、生物资产、无形资产、长期待摊费用、投资资产、存货等，以历史成本为计税基础。前款所称历史成本，是指企业取得该项资产时实际发生的支出。企业持有各项资产期间资产增值或者减值，除国务院财政、税务主管部门规定可以确认损益外，不得调整该资产的计税基础。根据《财政部国家税务总局关于企业资产损失税前扣除政策的通知》（财税〔2009〕57号）的规定：</a:t>
             </a:r>
           </a:p>
           <a:p>
@@ -33133,7 +32913,7 @@
                 </a:solidFill>
                 <a:latin typeface="Microsoft YaHei"/>
               </a:rPr>
-              <a:t>（三）债务人逾期 3 年以上未清偿，且有确凿证据证明已无力清偿债务的；</a:t>
+              <a:t>（三）债务人逾期3年以上未清偿，且有确凿证据证明已无力清偿债务的；</a:t>
             </a:r>
           </a:p>
           <a:p>
@@ -33331,7 +33111,7 @@
                 </a:solidFill>
                 <a:latin typeface="Microsoft YaHei"/>
               </a:rPr>
-              <a:t>（二）被投资方财务状况严重恶化，累计发生巨额亏损，已连续停止经营 3 年以上，且无重新恢复经营改组计划的；（三）对被投资方不具有控制权，投资期限届满或者投资期限已超过 10 年，且被投资单位因连续 3 年经营亏损导致资不抵债的；（四）被投资方财务状况严重恶化，累计发生巨额亏损，已完成清算或清算期超过 3 年以上的；</a:t>
+              <a:t>（二）被投资方财务状况严重恶化，累计发生巨额亏损，已连续停止经营3年以上，且无重新恢复经营改组计划的；（三）对被投资方不具有控制权，投资期限届满或者投资期限已超过10年，且被投资单位因连续3年经营亏损导致资不抵债的；（四）被投资方财务状况严重恶化，累计发生巨额亏损，已完成清算或清算期超过3年以上的；</a:t>
             </a:r>
           </a:p>
           <a:p>
@@ -33463,7 +33243,7 @@
                 </a:solidFill>
                 <a:latin typeface="Microsoft YaHei"/>
               </a:rPr>
-              <a:t>根据《国家税务总局关于发布&lt;企业资产损失所得税税前扣除管理办法&gt;的公告》（国家税务总局公告 2011 第25 号）的规定：第五条 企业发生的资产损失，应按规定的程序和要求向主管税务机关申报后方能在税前扣除。未经申报的损失，不得在税前扣除。第六条 企业以前年度发生的资产损失未能在当年税前扣除的，可以按照本办法的规定，向税务机关说明并进行专项申报扣除。其中，属于实际资产损失，准予追补至该项损失发生年度扣除，其追补确认期限一般不得超过五年，但因计划经济体制转轨过程中遗留的资产损失、企业重组上市过程中因权属不清出现争议而未能及时扣除的资产损失、因承担国家政策性任务而形成的资产损失以及政策定性不明确而形成资产损失等特殊原因形成的资产损失，其追补确认期限经国家税务总局批准后可适当延长。属于法定资产损失，应在申报年度扣除。企业因以前年度实际资产损失未在税前扣除而多缴的企业所得税税款，可在追补确认年度企业所得税应纳税款中予以抵扣，不足抵扣的，向以后年度递延抵扣。</a:t>
+              <a:t>根据《国家税务总局关于发布&lt;企业资产损失所得税税前扣除管理办法&gt;的公告》（国家税务总局公告2011第25号）的规定：第五条 企业发生的资产损失，应按规定的程序和要求向主管税务机关申报后方能在税前扣除。未经申报的损失，不得在税前扣除。第六条 企业以前年度发生的资产损失未能在当年税前扣除的，可以按照本办法的规定，向税务机关说明并进行专项申报扣除。其中，属于实际资产损失，准予追补至该项损失发生年度扣除，其追补确认期限一般不得超过五年，但因计划经济体制转轨过程中遗留的资产损失、企业重组上市过程中因权属不清出现争议而未能及时扣除的资产损失、因承担国家政策性任务而形成的资产损失以及政策定性不明确而形成资产损失等特殊原因形成的资产损失，其追补确认期限经国家税务总局批准后可适当延长。属于法定资产损失，应在申报年度扣除。企业因以前年度实际资产损失未在税前扣除而多缴的企业所得税税款，可在追补确认年度企业所得税应纳税款中予以抵扣，不足抵扣的，向以后年度递延抵扣。</a:t>
             </a:r>
           </a:p>
           <a:p>
@@ -33573,29 +33353,29 @@
                 </a:solidFill>
                 <a:latin typeface="Microsoft YaHei"/>
               </a:rPr>
-              <a:t>根据《国家税务总局关于企业所得税资产损失资料留存备查有关事项的公告》（国家税务总局公告 2018 年第15 号）的规定：企业所得税资产损失资料留存备查有关事项公告如下：一、企业向税务机关申报扣除资产损失，仅需填报企业所得税年度纳税申报表《资产损失税前扣除及纳税调整明细表》，不再报送资产损失相关资料。相关资料由企业留存备查。二、企业应当完整保存资产损失相关资料，保证资料的真实性、合法性。</a:t>
-            </a:r>
-          </a:p>
-          <a:p>
-            <a:pPr algn="l">
-              <a:lnSpc>
-                <a:spcPts val="1820"/>
-              </a:lnSpc>
-              <a:spcBef>
-                <a:spcPts val="200"/>
-              </a:spcBef>
-              <a:spcAft>
-                <a:spcPts val="200"/>
-              </a:spcAft>
-            </a:pPr>
-            <a:r>
-              <a:rPr sz="1400" b="0">
-                <a:solidFill>
-                  <a:srgbClr val="000000"/>
-                </a:solidFill>
-                <a:latin typeface="Microsoft YaHei"/>
-              </a:rPr>
-              <a:t>三、本公告规定适用于 2017 年度及以后年度企业所得税汇算清缴。《国家税务总局关于发布〈企业资产损失所得税税前扣除管理办法〉的公告》（国家税务总局公告 2011 年第25 号）第四条、第七条、第八条、第十三条有关资产损失证据资料、会计核算资料、纳税资料等相关资料报送的内容同时废止。</a:t>
+              <a:t>根据《国家税务总局关于企业所得税资产损失资料留存备查有关事项的公告》（国家税务总局公告2018年第15号）的规定：企业所得税资产损失资料留存备查有关事项公告如下：一、企业向税务机关申报扣除资产损失，仅需填报企业所得税年度纳税申报表《资产损失税前扣除及纳税调整明细表》，不再报送资产损失相关资料。相关资料由企业留存备查。二、企业应当完整保存资产损失相关资料，保证资料的真实性、合法性。</a:t>
+            </a:r>
+          </a:p>
+          <a:p>
+            <a:pPr algn="l">
+              <a:lnSpc>
+                <a:spcPts val="1820"/>
+              </a:lnSpc>
+              <a:spcBef>
+                <a:spcPts val="200"/>
+              </a:spcBef>
+              <a:spcAft>
+                <a:spcPts val="200"/>
+              </a:spcAft>
+            </a:pPr>
+            <a:r>
+              <a:rPr sz="1400" b="0">
+                <a:solidFill>
+                  <a:srgbClr val="000000"/>
+                </a:solidFill>
+                <a:latin typeface="Microsoft YaHei"/>
+              </a:rPr>
+              <a:t>三、本公告规定适用于2017年度及以后年度企业所得税汇算清缴。《国家税务总局关于发布〈企业资产损失所得税税前扣除管理办法〉的公告》（国家税务总局公告2011年第25号）第四条、第七条、第八条、第十三条有关资产损失证据资料、会计核算资料、纳税资料等相关资料报送的内容同时废止。</a:t>
             </a:r>
           </a:p>
           <a:p>
@@ -33886,51 +33666,51 @@
                 </a:solidFill>
                 <a:latin typeface="Microsoft YaHei"/>
               </a:rPr>
-              <a:t>根据《企业政策性搬迁所得税管理办法》（国家税务总局公告2012 年第 40 号）第五章应税所得第十六条规定，企业的搬迁收入，扣除搬迁支出后的余额，为企业的搬迁所得。企业应在搬迁完成年度，将搬迁所得计入当年度企业应纳税所得额计算纳税。第十七条规定，下列情形之一的，为搬迁完成年度，企业应进行搬迁清算，计算搬迁所得：</a:t>
-            </a:r>
-          </a:p>
-          <a:p>
-            <a:pPr algn="l">
-              <a:lnSpc>
-                <a:spcPts val="1820"/>
-              </a:lnSpc>
-              <a:spcBef>
-                <a:spcPts val="200"/>
-              </a:spcBef>
-              <a:spcAft>
-                <a:spcPts val="200"/>
-              </a:spcAft>
-            </a:pPr>
-            <a:r>
-              <a:rPr sz="1400" b="0">
-                <a:solidFill>
-                  <a:srgbClr val="000000"/>
-                </a:solidFill>
-                <a:latin typeface="Microsoft YaHei"/>
-              </a:rPr>
-              <a:t>（一）从搬迁开始，5 年内（包括搬迁当年度）任何一年完成搬迁的。</a:t>
-            </a:r>
-          </a:p>
-          <a:p>
-            <a:pPr algn="l">
-              <a:lnSpc>
-                <a:spcPts val="1820"/>
-              </a:lnSpc>
-              <a:spcBef>
-                <a:spcPts val="200"/>
-              </a:spcBef>
-              <a:spcAft>
-                <a:spcPts val="200"/>
-              </a:spcAft>
-            </a:pPr>
-            <a:r>
-              <a:rPr sz="1400" b="0">
-                <a:solidFill>
-                  <a:srgbClr val="000000"/>
-                </a:solidFill>
-                <a:latin typeface="Microsoft YaHei"/>
-              </a:rPr>
-              <a:t>（二）从搬迁开始，搬迁时间满 5 年（包括搬迁当年度）的年度。</a:t>
+              <a:t>根据《企业政策性搬迁所得税管理办法》（国家税务总局公告2012年第40号）第五章应税所得第十六条规定，企业的搬迁收入，扣除搬迁支出后的余额，为企业的搬迁所得。企业应在搬迁完成年度，将搬迁所得计入当年度企业应纳税所得额计算纳税。第十七条规定，下列情形之一的，为搬迁完成年度，企业应进行搬迁清算，计算搬迁所得：</a:t>
+            </a:r>
+          </a:p>
+          <a:p>
+            <a:pPr algn="l">
+              <a:lnSpc>
+                <a:spcPts val="1820"/>
+              </a:lnSpc>
+              <a:spcBef>
+                <a:spcPts val="200"/>
+              </a:spcBef>
+              <a:spcAft>
+                <a:spcPts val="200"/>
+              </a:spcAft>
+            </a:pPr>
+            <a:r>
+              <a:rPr sz="1400" b="0">
+                <a:solidFill>
+                  <a:srgbClr val="000000"/>
+                </a:solidFill>
+                <a:latin typeface="Microsoft YaHei"/>
+              </a:rPr>
+              <a:t>（一）从搬迁开始，5年内（包括搬迁当年度）任何一年完成搬迁的。</a:t>
+            </a:r>
+          </a:p>
+          <a:p>
+            <a:pPr algn="l">
+              <a:lnSpc>
+                <a:spcPts val="1820"/>
+              </a:lnSpc>
+              <a:spcBef>
+                <a:spcPts val="200"/>
+              </a:spcBef>
+              <a:spcAft>
+                <a:spcPts val="200"/>
+              </a:spcAft>
+            </a:pPr>
+            <a:r>
+              <a:rPr sz="1400" b="0">
+                <a:solidFill>
+                  <a:srgbClr val="000000"/>
+                </a:solidFill>
+                <a:latin typeface="Microsoft YaHei"/>
+              </a:rPr>
+              <a:t>（二）从搬迁开始，搬迁时间满5年（包括搬迁当年度）的年度。</a:t>
             </a:r>
           </a:p>
           <a:p>

--- a/ppts_output_v3/02_企业所得税风险指引.pptx
+++ b/ppts_output_v3/02_企业所得税风险指引.pptx
@@ -3379,11 +3379,10 @@
             <a:spAutoFit/>
           </a:bodyPr>
           <a:lstStyle/>
-          <a:p/>
-          <a:p>
-            <a:pPr algn="l">
-              <a:lnSpc>
-                <a:spcPts val="2080"/>
+          <a:p>
+            <a:pPr algn="l">
+              <a:lnSpc>
+                <a:spcPct val="125000"/>
               </a:lnSpc>
               <a:spcBef>
                 <a:spcPts val="0"/>
@@ -3405,7 +3404,7 @@
           <a:p>
             <a:pPr algn="l">
               <a:lnSpc>
-                <a:spcPts val="2080"/>
+                <a:spcPct val="125000"/>
               </a:lnSpc>
               <a:spcBef>
                 <a:spcPts val="800"/>
@@ -3427,7 +3426,7 @@
           <a:p>
             <a:pPr algn="l">
               <a:lnSpc>
-                <a:spcPts val="1820"/>
+                <a:spcPct val="125000"/>
               </a:lnSpc>
               <a:spcBef>
                 <a:spcPts val="200"/>
@@ -3449,7 +3448,7 @@
           <a:p>
             <a:pPr algn="l">
               <a:lnSpc>
-                <a:spcPts val="2080"/>
+                <a:spcPct val="125000"/>
               </a:lnSpc>
               <a:spcBef>
                 <a:spcPts val="800"/>
@@ -3471,7 +3470,7 @@
           <a:p>
             <a:pPr algn="l">
               <a:lnSpc>
-                <a:spcPts val="1820"/>
+                <a:spcPct val="125000"/>
               </a:lnSpc>
               <a:spcBef>
                 <a:spcPts val="200"/>
@@ -3493,7 +3492,7 @@
           <a:p>
             <a:pPr algn="l">
               <a:lnSpc>
-                <a:spcPts val="1820"/>
+                <a:spcPct val="125000"/>
               </a:lnSpc>
               <a:spcBef>
                 <a:spcPts val="200"/>
@@ -3515,7 +3514,7 @@
           <a:p>
             <a:pPr algn="l">
               <a:lnSpc>
-                <a:spcPts val="2080"/>
+                <a:spcPct val="125000"/>
               </a:lnSpc>
               <a:spcBef>
                 <a:spcPts val="800"/>
@@ -3537,7 +3536,7 @@
           <a:p>
             <a:pPr algn="l">
               <a:lnSpc>
-                <a:spcPts val="1820"/>
+                <a:spcPct val="125000"/>
               </a:lnSpc>
               <a:spcBef>
                 <a:spcPts val="200"/>
@@ -3559,7 +3558,7 @@
           <a:p>
             <a:pPr algn="l">
               <a:lnSpc>
-                <a:spcPts val="2080"/>
+                <a:spcPct val="125000"/>
               </a:lnSpc>
               <a:spcBef>
                 <a:spcPts val="800"/>
@@ -3581,7 +3580,7 @@
           <a:p>
             <a:pPr algn="l">
               <a:lnSpc>
-                <a:spcPts val="1820"/>
+                <a:spcPct val="125000"/>
               </a:lnSpc>
               <a:spcBef>
                 <a:spcPts val="200"/>
@@ -3692,11 +3691,10 @@
             <a:spAutoFit/>
           </a:bodyPr>
           <a:lstStyle/>
-          <a:p/>
-          <a:p>
-            <a:pPr algn="l">
-              <a:lnSpc>
-                <a:spcPts val="2080"/>
+          <a:p>
+            <a:pPr algn="l">
+              <a:lnSpc>
+                <a:spcPct val="125000"/>
               </a:lnSpc>
               <a:spcBef>
                 <a:spcPts val="0"/>
@@ -3718,7 +3716,7 @@
           <a:p>
             <a:pPr algn="l">
               <a:lnSpc>
-                <a:spcPts val="2080"/>
+                <a:spcPct val="125000"/>
               </a:lnSpc>
               <a:spcBef>
                 <a:spcPts val="800"/>
@@ -3740,7 +3738,7 @@
           <a:p>
             <a:pPr algn="l">
               <a:lnSpc>
-                <a:spcPts val="1820"/>
+                <a:spcPct val="125000"/>
               </a:lnSpc>
               <a:spcBef>
                 <a:spcPts val="200"/>
@@ -3762,7 +3760,7 @@
           <a:p>
             <a:pPr algn="l">
               <a:lnSpc>
-                <a:spcPts val="2080"/>
+                <a:spcPct val="125000"/>
               </a:lnSpc>
               <a:spcBef>
                 <a:spcPts val="800"/>
@@ -3784,7 +3782,7 @@
           <a:p>
             <a:pPr algn="l">
               <a:lnSpc>
-                <a:spcPts val="1820"/>
+                <a:spcPct val="125000"/>
               </a:lnSpc>
               <a:spcBef>
                 <a:spcPts val="200"/>
@@ -3806,7 +3804,7 @@
           <a:p>
             <a:pPr algn="l">
               <a:lnSpc>
-                <a:spcPts val="1820"/>
+                <a:spcPct val="125000"/>
               </a:lnSpc>
               <a:spcBef>
                 <a:spcPts val="200"/>
@@ -3828,7 +3826,7 @@
           <a:p>
             <a:pPr algn="l">
               <a:lnSpc>
-                <a:spcPts val="2080"/>
+                <a:spcPct val="125000"/>
               </a:lnSpc>
               <a:spcBef>
                 <a:spcPts val="800"/>
@@ -3850,7 +3848,7 @@
           <a:p>
             <a:pPr algn="l">
               <a:lnSpc>
-                <a:spcPts val="1820"/>
+                <a:spcPct val="125000"/>
               </a:lnSpc>
               <a:spcBef>
                 <a:spcPts val="200"/>
@@ -3872,7 +3870,7 @@
           <a:p>
             <a:pPr algn="l">
               <a:lnSpc>
-                <a:spcPts val="2080"/>
+                <a:spcPct val="125000"/>
               </a:lnSpc>
               <a:spcBef>
                 <a:spcPts val="800"/>
@@ -3894,7 +3892,7 @@
           <a:p>
             <a:pPr algn="l">
               <a:lnSpc>
-                <a:spcPts val="1820"/>
+                <a:spcPct val="125000"/>
               </a:lnSpc>
               <a:spcBef>
                 <a:spcPts val="200"/>
@@ -4005,11 +4003,10 @@
             <a:spAutoFit/>
           </a:bodyPr>
           <a:lstStyle/>
-          <a:p/>
-          <a:p>
-            <a:pPr algn="l">
-              <a:lnSpc>
-                <a:spcPts val="2080"/>
+          <a:p>
+            <a:pPr algn="l">
+              <a:lnSpc>
+                <a:spcPct val="125000"/>
               </a:lnSpc>
               <a:spcBef>
                 <a:spcPts val="0"/>
@@ -4031,7 +4028,7 @@
           <a:p>
             <a:pPr algn="l">
               <a:lnSpc>
-                <a:spcPts val="2080"/>
+                <a:spcPct val="125000"/>
               </a:lnSpc>
               <a:spcBef>
                 <a:spcPts val="800"/>
@@ -4053,7 +4050,7 @@
           <a:p>
             <a:pPr algn="l">
               <a:lnSpc>
-                <a:spcPts val="1820"/>
+                <a:spcPct val="125000"/>
               </a:lnSpc>
               <a:spcBef>
                 <a:spcPts val="200"/>
@@ -4075,7 +4072,7 @@
           <a:p>
             <a:pPr algn="l">
               <a:lnSpc>
-                <a:spcPts val="2080"/>
+                <a:spcPct val="125000"/>
               </a:lnSpc>
               <a:spcBef>
                 <a:spcPts val="800"/>
@@ -4097,7 +4094,7 @@
           <a:p>
             <a:pPr algn="l">
               <a:lnSpc>
-                <a:spcPts val="1820"/>
+                <a:spcPct val="125000"/>
               </a:lnSpc>
               <a:spcBef>
                 <a:spcPts val="200"/>
@@ -4119,7 +4116,7 @@
           <a:p>
             <a:pPr algn="l">
               <a:lnSpc>
-                <a:spcPts val="2080"/>
+                <a:spcPct val="125000"/>
               </a:lnSpc>
               <a:spcBef>
                 <a:spcPts val="800"/>
@@ -4141,7 +4138,7 @@
           <a:p>
             <a:pPr algn="l">
               <a:lnSpc>
-                <a:spcPts val="1820"/>
+                <a:spcPct val="125000"/>
               </a:lnSpc>
               <a:spcBef>
                 <a:spcPts val="200"/>
@@ -4163,7 +4160,7 @@
           <a:p>
             <a:pPr algn="l">
               <a:lnSpc>
-                <a:spcPts val="2080"/>
+                <a:spcPct val="125000"/>
               </a:lnSpc>
               <a:spcBef>
                 <a:spcPts val="800"/>
@@ -4185,7 +4182,7 @@
           <a:p>
             <a:pPr algn="l">
               <a:lnSpc>
-                <a:spcPts val="1820"/>
+                <a:spcPct val="125000"/>
               </a:lnSpc>
               <a:spcBef>
                 <a:spcPts val="200"/>
@@ -4296,11 +4293,10 @@
             <a:spAutoFit/>
           </a:bodyPr>
           <a:lstStyle/>
-          <a:p/>
-          <a:p>
-            <a:pPr algn="l">
-              <a:lnSpc>
-                <a:spcPts val="2080"/>
+          <a:p>
+            <a:pPr algn="l">
+              <a:lnSpc>
+                <a:spcPct val="125000"/>
               </a:lnSpc>
               <a:spcBef>
                 <a:spcPts val="0"/>
@@ -4322,7 +4318,7 @@
           <a:p>
             <a:pPr algn="l">
               <a:lnSpc>
-                <a:spcPts val="2080"/>
+                <a:spcPct val="125000"/>
               </a:lnSpc>
               <a:spcBef>
                 <a:spcPts val="800"/>
@@ -4344,7 +4340,7 @@
           <a:p>
             <a:pPr algn="l">
               <a:lnSpc>
-                <a:spcPts val="1820"/>
+                <a:spcPct val="125000"/>
               </a:lnSpc>
               <a:spcBef>
                 <a:spcPts val="200"/>
@@ -4366,7 +4362,7 @@
           <a:p>
             <a:pPr algn="l">
               <a:lnSpc>
-                <a:spcPts val="2080"/>
+                <a:spcPct val="125000"/>
               </a:lnSpc>
               <a:spcBef>
                 <a:spcPts val="800"/>
@@ -4388,7 +4384,7 @@
           <a:p>
             <a:pPr algn="l">
               <a:lnSpc>
-                <a:spcPts val="1820"/>
+                <a:spcPct val="125000"/>
               </a:lnSpc>
               <a:spcBef>
                 <a:spcPts val="200"/>
@@ -4410,7 +4406,7 @@
           <a:p>
             <a:pPr algn="l">
               <a:lnSpc>
-                <a:spcPts val="2080"/>
+                <a:spcPct val="125000"/>
               </a:lnSpc>
               <a:spcBef>
                 <a:spcPts val="800"/>
@@ -4432,7 +4428,7 @@
           <a:p>
             <a:pPr algn="l">
               <a:lnSpc>
-                <a:spcPts val="1820"/>
+                <a:spcPct val="125000"/>
               </a:lnSpc>
               <a:spcBef>
                 <a:spcPts val="200"/>
@@ -4454,7 +4450,7 @@
           <a:p>
             <a:pPr algn="l">
               <a:lnSpc>
-                <a:spcPts val="2080"/>
+                <a:spcPct val="125000"/>
               </a:lnSpc>
               <a:spcBef>
                 <a:spcPts val="800"/>
@@ -4476,7 +4472,7 @@
           <a:p>
             <a:pPr algn="l">
               <a:lnSpc>
-                <a:spcPts val="1820"/>
+                <a:spcPct val="125000"/>
               </a:lnSpc>
               <a:spcBef>
                 <a:spcPts val="200"/>
@@ -4587,11 +4583,10 @@
             <a:spAutoFit/>
           </a:bodyPr>
           <a:lstStyle/>
-          <a:p/>
-          <a:p>
-            <a:pPr algn="l">
-              <a:lnSpc>
-                <a:spcPts val="2080"/>
+          <a:p>
+            <a:pPr algn="l">
+              <a:lnSpc>
+                <a:spcPct val="125000"/>
               </a:lnSpc>
               <a:spcBef>
                 <a:spcPts val="0"/>
@@ -4613,7 +4608,7 @@
           <a:p>
             <a:pPr algn="l">
               <a:lnSpc>
-                <a:spcPts val="2080"/>
+                <a:spcPct val="125000"/>
               </a:lnSpc>
               <a:spcBef>
                 <a:spcPts val="800"/>
@@ -4635,7 +4630,7 @@
           <a:p>
             <a:pPr algn="l">
               <a:lnSpc>
-                <a:spcPts val="1820"/>
+                <a:spcPct val="125000"/>
               </a:lnSpc>
               <a:spcBef>
                 <a:spcPts val="200"/>
@@ -4657,7 +4652,7 @@
           <a:p>
             <a:pPr algn="l">
               <a:lnSpc>
-                <a:spcPts val="2080"/>
+                <a:spcPct val="125000"/>
               </a:lnSpc>
               <a:spcBef>
                 <a:spcPts val="800"/>
@@ -4679,7 +4674,7 @@
           <a:p>
             <a:pPr algn="l">
               <a:lnSpc>
-                <a:spcPts val="1820"/>
+                <a:spcPct val="125000"/>
               </a:lnSpc>
               <a:spcBef>
                 <a:spcPts val="200"/>
@@ -4701,7 +4696,7 @@
           <a:p>
             <a:pPr algn="l">
               <a:lnSpc>
-                <a:spcPts val="2080"/>
+                <a:spcPct val="125000"/>
               </a:lnSpc>
               <a:spcBef>
                 <a:spcPts val="800"/>
@@ -4723,7 +4718,7 @@
           <a:p>
             <a:pPr algn="l">
               <a:lnSpc>
-                <a:spcPts val="1820"/>
+                <a:spcPct val="125000"/>
               </a:lnSpc>
               <a:spcBef>
                 <a:spcPts val="200"/>
@@ -4745,7 +4740,7 @@
           <a:p>
             <a:pPr algn="l">
               <a:lnSpc>
-                <a:spcPts val="2080"/>
+                <a:spcPct val="125000"/>
               </a:lnSpc>
               <a:spcBef>
                 <a:spcPts val="800"/>
@@ -4767,7 +4762,7 @@
           <a:p>
             <a:pPr algn="l">
               <a:lnSpc>
-                <a:spcPts val="1820"/>
+                <a:spcPct val="125000"/>
               </a:lnSpc>
               <a:spcBef>
                 <a:spcPts val="200"/>
@@ -4789,7 +4784,7 @@
           <a:p>
             <a:pPr algn="l">
               <a:lnSpc>
-                <a:spcPts val="1820"/>
+                <a:spcPct val="125000"/>
               </a:lnSpc>
               <a:spcBef>
                 <a:spcPts val="200"/>
@@ -4900,11 +4895,10 @@
             <a:spAutoFit/>
           </a:bodyPr>
           <a:lstStyle/>
-          <a:p/>
-          <a:p>
-            <a:pPr algn="l">
-              <a:lnSpc>
-                <a:spcPts val="2080"/>
+          <a:p>
+            <a:pPr algn="l">
+              <a:lnSpc>
+                <a:spcPct val="125000"/>
               </a:lnSpc>
               <a:spcBef>
                 <a:spcPts val="0"/>
@@ -4926,7 +4920,7 @@
           <a:p>
             <a:pPr algn="l">
               <a:lnSpc>
-                <a:spcPts val="2080"/>
+                <a:spcPct val="125000"/>
               </a:lnSpc>
               <a:spcBef>
                 <a:spcPts val="800"/>
@@ -4948,7 +4942,7 @@
           <a:p>
             <a:pPr algn="l">
               <a:lnSpc>
-                <a:spcPts val="1820"/>
+                <a:spcPct val="125000"/>
               </a:lnSpc>
               <a:spcBef>
                 <a:spcPts val="200"/>
@@ -4970,7 +4964,7 @@
           <a:p>
             <a:pPr algn="l">
               <a:lnSpc>
-                <a:spcPts val="2080"/>
+                <a:spcPct val="125000"/>
               </a:lnSpc>
               <a:spcBef>
                 <a:spcPts val="800"/>
@@ -4992,7 +4986,7 @@
           <a:p>
             <a:pPr algn="l">
               <a:lnSpc>
-                <a:spcPts val="1820"/>
+                <a:spcPct val="125000"/>
               </a:lnSpc>
               <a:spcBef>
                 <a:spcPts val="200"/>
@@ -5014,7 +5008,7 @@
           <a:p>
             <a:pPr algn="l">
               <a:lnSpc>
-                <a:spcPts val="1820"/>
+                <a:spcPct val="125000"/>
               </a:lnSpc>
               <a:spcBef>
                 <a:spcPts val="200"/>
@@ -5036,7 +5030,7 @@
           <a:p>
             <a:pPr algn="l">
               <a:lnSpc>
-                <a:spcPts val="2080"/>
+                <a:spcPct val="125000"/>
               </a:lnSpc>
               <a:spcBef>
                 <a:spcPts val="800"/>
@@ -5058,7 +5052,7 @@
           <a:p>
             <a:pPr algn="l">
               <a:lnSpc>
-                <a:spcPts val="1820"/>
+                <a:spcPct val="125000"/>
               </a:lnSpc>
               <a:spcBef>
                 <a:spcPts val="200"/>
@@ -5080,7 +5074,7 @@
           <a:p>
             <a:pPr algn="l">
               <a:lnSpc>
-                <a:spcPts val="2080"/>
+                <a:spcPct val="125000"/>
               </a:lnSpc>
               <a:spcBef>
                 <a:spcPts val="800"/>
@@ -5102,7 +5096,7 @@
           <a:p>
             <a:pPr algn="l">
               <a:lnSpc>
-                <a:spcPts val="1820"/>
+                <a:spcPct val="125000"/>
               </a:lnSpc>
               <a:spcBef>
                 <a:spcPts val="200"/>
@@ -5213,11 +5207,10 @@
             <a:spAutoFit/>
           </a:bodyPr>
           <a:lstStyle/>
-          <a:p/>
-          <a:p>
-            <a:pPr algn="l">
-              <a:lnSpc>
-                <a:spcPts val="2080"/>
+          <a:p>
+            <a:pPr algn="l">
+              <a:lnSpc>
+                <a:spcPct val="125000"/>
               </a:lnSpc>
               <a:spcBef>
                 <a:spcPts val="0"/>
@@ -5239,7 +5232,7 @@
           <a:p>
             <a:pPr algn="l">
               <a:lnSpc>
-                <a:spcPts val="2080"/>
+                <a:spcPct val="125000"/>
               </a:lnSpc>
               <a:spcBef>
                 <a:spcPts val="800"/>
@@ -5261,7 +5254,7 @@
           <a:p>
             <a:pPr algn="l">
               <a:lnSpc>
-                <a:spcPts val="1820"/>
+                <a:spcPct val="125000"/>
               </a:lnSpc>
               <a:spcBef>
                 <a:spcPts val="200"/>
@@ -5283,7 +5276,7 @@
           <a:p>
             <a:pPr algn="l">
               <a:lnSpc>
-                <a:spcPts val="2080"/>
+                <a:spcPct val="125000"/>
               </a:lnSpc>
               <a:spcBef>
                 <a:spcPts val="800"/>
@@ -5305,7 +5298,7 @@
           <a:p>
             <a:pPr algn="l">
               <a:lnSpc>
-                <a:spcPts val="1820"/>
+                <a:spcPct val="125000"/>
               </a:lnSpc>
               <a:spcBef>
                 <a:spcPts val="200"/>
@@ -5327,7 +5320,7 @@
           <a:p>
             <a:pPr algn="l">
               <a:lnSpc>
-                <a:spcPts val="2080"/>
+                <a:spcPct val="125000"/>
               </a:lnSpc>
               <a:spcBef>
                 <a:spcPts val="800"/>
@@ -5349,7 +5342,7 @@
           <a:p>
             <a:pPr algn="l">
               <a:lnSpc>
-                <a:spcPts val="1820"/>
+                <a:spcPct val="125000"/>
               </a:lnSpc>
               <a:spcBef>
                 <a:spcPts val="200"/>
@@ -5371,7 +5364,7 @@
           <a:p>
             <a:pPr algn="l">
               <a:lnSpc>
-                <a:spcPts val="2080"/>
+                <a:spcPct val="125000"/>
               </a:lnSpc>
               <a:spcBef>
                 <a:spcPts val="800"/>
@@ -5393,7 +5386,7 @@
           <a:p>
             <a:pPr algn="l">
               <a:lnSpc>
-                <a:spcPts val="1820"/>
+                <a:spcPct val="125000"/>
               </a:lnSpc>
               <a:spcBef>
                 <a:spcPts val="200"/>
@@ -5504,11 +5497,10 @@
             <a:spAutoFit/>
           </a:bodyPr>
           <a:lstStyle/>
-          <a:p/>
-          <a:p>
-            <a:pPr algn="l">
-              <a:lnSpc>
-                <a:spcPts val="2080"/>
+          <a:p>
+            <a:pPr algn="l">
+              <a:lnSpc>
+                <a:spcPct val="125000"/>
               </a:lnSpc>
               <a:spcBef>
                 <a:spcPts val="0"/>
@@ -5530,7 +5522,7 @@
           <a:p>
             <a:pPr algn="l">
               <a:lnSpc>
-                <a:spcPts val="2080"/>
+                <a:spcPct val="125000"/>
               </a:lnSpc>
               <a:spcBef>
                 <a:spcPts val="800"/>
@@ -5552,7 +5544,7 @@
           <a:p>
             <a:pPr algn="l">
               <a:lnSpc>
-                <a:spcPts val="1820"/>
+                <a:spcPct val="125000"/>
               </a:lnSpc>
               <a:spcBef>
                 <a:spcPts val="200"/>
@@ -5574,7 +5566,7 @@
           <a:p>
             <a:pPr algn="l">
               <a:lnSpc>
-                <a:spcPts val="2080"/>
+                <a:spcPct val="125000"/>
               </a:lnSpc>
               <a:spcBef>
                 <a:spcPts val="800"/>
@@ -5596,7 +5588,7 @@
           <a:p>
             <a:pPr algn="l">
               <a:lnSpc>
-                <a:spcPts val="1820"/>
+                <a:spcPct val="125000"/>
               </a:lnSpc>
               <a:spcBef>
                 <a:spcPts val="200"/>
@@ -5618,7 +5610,7 @@
           <a:p>
             <a:pPr algn="l">
               <a:lnSpc>
-                <a:spcPts val="2080"/>
+                <a:spcPct val="125000"/>
               </a:lnSpc>
               <a:spcBef>
                 <a:spcPts val="800"/>
@@ -5640,7 +5632,7 @@
           <a:p>
             <a:pPr algn="l">
               <a:lnSpc>
-                <a:spcPts val="1820"/>
+                <a:spcPct val="125000"/>
               </a:lnSpc>
               <a:spcBef>
                 <a:spcPts val="200"/>
@@ -5662,7 +5654,7 @@
           <a:p>
             <a:pPr algn="l">
               <a:lnSpc>
-                <a:spcPts val="2080"/>
+                <a:spcPct val="125000"/>
               </a:lnSpc>
               <a:spcBef>
                 <a:spcPts val="800"/>
@@ -5684,7 +5676,7 @@
           <a:p>
             <a:pPr algn="l">
               <a:lnSpc>
-                <a:spcPts val="1820"/>
+                <a:spcPct val="125000"/>
               </a:lnSpc>
               <a:spcBef>
                 <a:spcPts val="200"/>
@@ -5795,11 +5787,10 @@
             <a:spAutoFit/>
           </a:bodyPr>
           <a:lstStyle/>
-          <a:p/>
-          <a:p>
-            <a:pPr algn="l">
-              <a:lnSpc>
-                <a:spcPts val="2080"/>
+          <a:p>
+            <a:pPr algn="l">
+              <a:lnSpc>
+                <a:spcPct val="125000"/>
               </a:lnSpc>
               <a:spcBef>
                 <a:spcPts val="0"/>
@@ -5821,7 +5812,7 @@
           <a:p>
             <a:pPr algn="l">
               <a:lnSpc>
-                <a:spcPts val="2080"/>
+                <a:spcPct val="125000"/>
               </a:lnSpc>
               <a:spcBef>
                 <a:spcPts val="800"/>
@@ -5843,7 +5834,7 @@
           <a:p>
             <a:pPr algn="l">
               <a:lnSpc>
-                <a:spcPts val="1820"/>
+                <a:spcPct val="125000"/>
               </a:lnSpc>
               <a:spcBef>
                 <a:spcPts val="200"/>
@@ -5865,7 +5856,7 @@
           <a:p>
             <a:pPr algn="l">
               <a:lnSpc>
-                <a:spcPts val="2080"/>
+                <a:spcPct val="125000"/>
               </a:lnSpc>
               <a:spcBef>
                 <a:spcPts val="800"/>
@@ -5887,7 +5878,7 @@
           <a:p>
             <a:pPr algn="l">
               <a:lnSpc>
-                <a:spcPts val="1820"/>
+                <a:spcPct val="125000"/>
               </a:lnSpc>
               <a:spcBef>
                 <a:spcPts val="200"/>
@@ -5909,7 +5900,7 @@
           <a:p>
             <a:pPr algn="l">
               <a:lnSpc>
-                <a:spcPts val="2080"/>
+                <a:spcPct val="125000"/>
               </a:lnSpc>
               <a:spcBef>
                 <a:spcPts val="800"/>
@@ -5931,7 +5922,7 @@
           <a:p>
             <a:pPr algn="l">
               <a:lnSpc>
-                <a:spcPts val="1820"/>
+                <a:spcPct val="125000"/>
               </a:lnSpc>
               <a:spcBef>
                 <a:spcPts val="200"/>
@@ -5953,7 +5944,7 @@
           <a:p>
             <a:pPr algn="l">
               <a:lnSpc>
-                <a:spcPts val="2080"/>
+                <a:spcPct val="125000"/>
               </a:lnSpc>
               <a:spcBef>
                 <a:spcPts val="800"/>
@@ -5975,7 +5966,7 @@
           <a:p>
             <a:pPr algn="l">
               <a:lnSpc>
-                <a:spcPts val="1820"/>
+                <a:spcPct val="125000"/>
               </a:lnSpc>
               <a:spcBef>
                 <a:spcPts val="200"/>
@@ -6086,11 +6077,10 @@
             <a:spAutoFit/>
           </a:bodyPr>
           <a:lstStyle/>
-          <a:p/>
-          <a:p>
-            <a:pPr algn="l">
-              <a:lnSpc>
-                <a:spcPts val="2080"/>
+          <a:p>
+            <a:pPr algn="l">
+              <a:lnSpc>
+                <a:spcPct val="125000"/>
               </a:lnSpc>
               <a:spcBef>
                 <a:spcPts val="0"/>
@@ -6112,7 +6102,7 @@
           <a:p>
             <a:pPr algn="l">
               <a:lnSpc>
-                <a:spcPts val="2080"/>
+                <a:spcPct val="125000"/>
               </a:lnSpc>
               <a:spcBef>
                 <a:spcPts val="800"/>
@@ -6134,7 +6124,7 @@
           <a:p>
             <a:pPr algn="l">
               <a:lnSpc>
-                <a:spcPts val="1820"/>
+                <a:spcPct val="125000"/>
               </a:lnSpc>
               <a:spcBef>
                 <a:spcPts val="200"/>
@@ -6156,7 +6146,7 @@
           <a:p>
             <a:pPr algn="l">
               <a:lnSpc>
-                <a:spcPts val="2080"/>
+                <a:spcPct val="125000"/>
               </a:lnSpc>
               <a:spcBef>
                 <a:spcPts val="800"/>
@@ -6178,7 +6168,7 @@
           <a:p>
             <a:pPr algn="l">
               <a:lnSpc>
-                <a:spcPts val="1820"/>
+                <a:spcPct val="125000"/>
               </a:lnSpc>
               <a:spcBef>
                 <a:spcPts val="200"/>
@@ -6200,7 +6190,7 @@
           <a:p>
             <a:pPr algn="l">
               <a:lnSpc>
-                <a:spcPts val="1820"/>
+                <a:spcPct val="125000"/>
               </a:lnSpc>
               <a:spcBef>
                 <a:spcPts val="200"/>
@@ -6222,7 +6212,7 @@
           <a:p>
             <a:pPr algn="l">
               <a:lnSpc>
-                <a:spcPts val="1820"/>
+                <a:spcPct val="125000"/>
               </a:lnSpc>
               <a:spcBef>
                 <a:spcPts val="200"/>
@@ -6244,7 +6234,7 @@
           <a:p>
             <a:pPr algn="l">
               <a:lnSpc>
-                <a:spcPts val="1820"/>
+                <a:spcPct val="125000"/>
               </a:lnSpc>
               <a:spcBef>
                 <a:spcPts val="200"/>
@@ -6266,7 +6256,7 @@
           <a:p>
             <a:pPr algn="l">
               <a:lnSpc>
-                <a:spcPts val="1820"/>
+                <a:spcPct val="125000"/>
               </a:lnSpc>
               <a:spcBef>
                 <a:spcPts val="200"/>
@@ -6288,7 +6278,7 @@
           <a:p>
             <a:pPr algn="l">
               <a:lnSpc>
-                <a:spcPts val="1820"/>
+                <a:spcPct val="125000"/>
               </a:lnSpc>
               <a:spcBef>
                 <a:spcPts val="200"/>
@@ -6310,7 +6300,7 @@
           <a:p>
             <a:pPr algn="l">
               <a:lnSpc>
-                <a:spcPts val="1820"/>
+                <a:spcPct val="125000"/>
               </a:lnSpc>
               <a:spcBef>
                 <a:spcPts val="200"/>
@@ -6332,7 +6322,7 @@
           <a:p>
             <a:pPr algn="l">
               <a:lnSpc>
-                <a:spcPts val="1820"/>
+                <a:spcPct val="125000"/>
               </a:lnSpc>
               <a:spcBef>
                 <a:spcPts val="200"/>
@@ -6354,7 +6344,7 @@
           <a:p>
             <a:pPr algn="l">
               <a:lnSpc>
-                <a:spcPts val="1820"/>
+                <a:spcPct val="125000"/>
               </a:lnSpc>
               <a:spcBef>
                 <a:spcPts val="200"/>
@@ -6376,7 +6366,7 @@
           <a:p>
             <a:pPr algn="l">
               <a:lnSpc>
-                <a:spcPts val="2080"/>
+                <a:spcPct val="125000"/>
               </a:lnSpc>
               <a:spcBef>
                 <a:spcPts val="800"/>
@@ -6398,7 +6388,7 @@
           <a:p>
             <a:pPr algn="l">
               <a:lnSpc>
-                <a:spcPts val="1820"/>
+                <a:spcPct val="125000"/>
               </a:lnSpc>
               <a:spcBef>
                 <a:spcPts val="200"/>
@@ -6420,7 +6410,7 @@
           <a:p>
             <a:pPr algn="l">
               <a:lnSpc>
-                <a:spcPts val="2080"/>
+                <a:spcPct val="125000"/>
               </a:lnSpc>
               <a:spcBef>
                 <a:spcPts val="800"/>
@@ -6442,7 +6432,7 @@
           <a:p>
             <a:pPr algn="l">
               <a:lnSpc>
-                <a:spcPts val="1820"/>
+                <a:spcPct val="125000"/>
               </a:lnSpc>
               <a:spcBef>
                 <a:spcPts val="200"/>
@@ -6553,11 +6543,10 @@
             <a:spAutoFit/>
           </a:bodyPr>
           <a:lstStyle/>
-          <a:p/>
-          <a:p>
-            <a:pPr algn="l">
-              <a:lnSpc>
-                <a:spcPts val="2080"/>
+          <a:p>
+            <a:pPr algn="l">
+              <a:lnSpc>
+                <a:spcPct val="125000"/>
               </a:lnSpc>
               <a:spcBef>
                 <a:spcPts val="0"/>
@@ -6579,7 +6568,7 @@
           <a:p>
             <a:pPr algn="l">
               <a:lnSpc>
-                <a:spcPts val="2080"/>
+                <a:spcPct val="125000"/>
               </a:lnSpc>
               <a:spcBef>
                 <a:spcPts val="800"/>
@@ -6601,7 +6590,7 @@
           <a:p>
             <a:pPr algn="l">
               <a:lnSpc>
-                <a:spcPts val="1820"/>
+                <a:spcPct val="125000"/>
               </a:lnSpc>
               <a:spcBef>
                 <a:spcPts val="200"/>
@@ -6623,7 +6612,7 @@
           <a:p>
             <a:pPr algn="l">
               <a:lnSpc>
-                <a:spcPts val="2080"/>
+                <a:spcPct val="125000"/>
               </a:lnSpc>
               <a:spcBef>
                 <a:spcPts val="800"/>
@@ -6645,7 +6634,7 @@
           <a:p>
             <a:pPr algn="l">
               <a:lnSpc>
-                <a:spcPts val="1820"/>
+                <a:spcPct val="125000"/>
               </a:lnSpc>
               <a:spcBef>
                 <a:spcPts val="200"/>
@@ -6667,7 +6656,7 @@
           <a:p>
             <a:pPr algn="l">
               <a:lnSpc>
-                <a:spcPts val="2080"/>
+                <a:spcPct val="125000"/>
               </a:lnSpc>
               <a:spcBef>
                 <a:spcPts val="800"/>
@@ -6689,7 +6678,7 @@
           <a:p>
             <a:pPr algn="l">
               <a:lnSpc>
-                <a:spcPts val="1820"/>
+                <a:spcPct val="125000"/>
               </a:lnSpc>
               <a:spcBef>
                 <a:spcPts val="200"/>
@@ -6711,7 +6700,7 @@
           <a:p>
             <a:pPr algn="l">
               <a:lnSpc>
-                <a:spcPts val="2080"/>
+                <a:spcPct val="125000"/>
               </a:lnSpc>
               <a:spcBef>
                 <a:spcPts val="800"/>
@@ -6733,7 +6722,7 @@
           <a:p>
             <a:pPr algn="l">
               <a:lnSpc>
-                <a:spcPts val="1820"/>
+                <a:spcPct val="125000"/>
               </a:lnSpc>
               <a:spcBef>
                 <a:spcPts val="200"/>
@@ -6844,11 +6833,10 @@
             <a:spAutoFit/>
           </a:bodyPr>
           <a:lstStyle/>
-          <a:p/>
-          <a:p>
-            <a:pPr algn="l">
-              <a:lnSpc>
-                <a:spcPts val="2080"/>
+          <a:p>
+            <a:pPr algn="l">
+              <a:lnSpc>
+                <a:spcPct val="125000"/>
               </a:lnSpc>
               <a:spcBef>
                 <a:spcPts val="0"/>
@@ -6870,7 +6858,7 @@
           <a:p>
             <a:pPr algn="l">
               <a:lnSpc>
-                <a:spcPts val="2080"/>
+                <a:spcPct val="125000"/>
               </a:lnSpc>
               <a:spcBef>
                 <a:spcPts val="800"/>
@@ -6892,7 +6880,7 @@
           <a:p>
             <a:pPr algn="l">
               <a:lnSpc>
-                <a:spcPts val="1820"/>
+                <a:spcPct val="125000"/>
               </a:lnSpc>
               <a:spcBef>
                 <a:spcPts val="200"/>
@@ -6914,7 +6902,7 @@
           <a:p>
             <a:pPr algn="l">
               <a:lnSpc>
-                <a:spcPts val="2080"/>
+                <a:spcPct val="125000"/>
               </a:lnSpc>
               <a:spcBef>
                 <a:spcPts val="800"/>
@@ -6936,7 +6924,7 @@
           <a:p>
             <a:pPr algn="l">
               <a:lnSpc>
-                <a:spcPts val="1820"/>
+                <a:spcPct val="125000"/>
               </a:lnSpc>
               <a:spcBef>
                 <a:spcPts val="200"/>
@@ -6958,7 +6946,7 @@
           <a:p>
             <a:pPr algn="l">
               <a:lnSpc>
-                <a:spcPts val="1820"/>
+                <a:spcPct val="125000"/>
               </a:lnSpc>
               <a:spcBef>
                 <a:spcPts val="200"/>
@@ -6980,7 +6968,7 @@
           <a:p>
             <a:pPr algn="l">
               <a:lnSpc>
-                <a:spcPts val="2080"/>
+                <a:spcPct val="125000"/>
               </a:lnSpc>
               <a:spcBef>
                 <a:spcPts val="800"/>
@@ -7002,7 +6990,7 @@
           <a:p>
             <a:pPr algn="l">
               <a:lnSpc>
-                <a:spcPts val="1820"/>
+                <a:spcPct val="125000"/>
               </a:lnSpc>
               <a:spcBef>
                 <a:spcPts val="200"/>
@@ -7024,7 +7012,7 @@
           <a:p>
             <a:pPr algn="l">
               <a:lnSpc>
-                <a:spcPts val="2080"/>
+                <a:spcPct val="125000"/>
               </a:lnSpc>
               <a:spcBef>
                 <a:spcPts val="800"/>
@@ -7046,7 +7034,7 @@
           <a:p>
             <a:pPr algn="l">
               <a:lnSpc>
-                <a:spcPts val="1820"/>
+                <a:spcPct val="125000"/>
               </a:lnSpc>
               <a:spcBef>
                 <a:spcPts val="200"/>
@@ -7157,11 +7145,10 @@
             <a:spAutoFit/>
           </a:bodyPr>
           <a:lstStyle/>
-          <a:p/>
-          <a:p>
-            <a:pPr algn="l">
-              <a:lnSpc>
-                <a:spcPts val="2080"/>
+          <a:p>
+            <a:pPr algn="l">
+              <a:lnSpc>
+                <a:spcPct val="125000"/>
               </a:lnSpc>
               <a:spcBef>
                 <a:spcPts val="0"/>
@@ -7183,7 +7170,7 @@
           <a:p>
             <a:pPr algn="l">
               <a:lnSpc>
-                <a:spcPts val="2080"/>
+                <a:spcPct val="125000"/>
               </a:lnSpc>
               <a:spcBef>
                 <a:spcPts val="800"/>
@@ -7205,7 +7192,7 @@
           <a:p>
             <a:pPr algn="l">
               <a:lnSpc>
-                <a:spcPts val="1820"/>
+                <a:spcPct val="125000"/>
               </a:lnSpc>
               <a:spcBef>
                 <a:spcPts val="200"/>
@@ -7227,7 +7214,7 @@
           <a:p>
             <a:pPr algn="l">
               <a:lnSpc>
-                <a:spcPts val="2080"/>
+                <a:spcPct val="125000"/>
               </a:lnSpc>
               <a:spcBef>
                 <a:spcPts val="800"/>
@@ -7249,7 +7236,7 @@
           <a:p>
             <a:pPr algn="l">
               <a:lnSpc>
-                <a:spcPts val="1820"/>
+                <a:spcPct val="125000"/>
               </a:lnSpc>
               <a:spcBef>
                 <a:spcPts val="200"/>
@@ -7271,7 +7258,7 @@
           <a:p>
             <a:pPr algn="l">
               <a:lnSpc>
-                <a:spcPts val="1820"/>
+                <a:spcPct val="125000"/>
               </a:lnSpc>
               <a:spcBef>
                 <a:spcPts val="200"/>
@@ -7293,7 +7280,7 @@
           <a:p>
             <a:pPr algn="l">
               <a:lnSpc>
-                <a:spcPts val="2080"/>
+                <a:spcPct val="125000"/>
               </a:lnSpc>
               <a:spcBef>
                 <a:spcPts val="800"/>
@@ -7315,7 +7302,7 @@
           <a:p>
             <a:pPr algn="l">
               <a:lnSpc>
-                <a:spcPts val="1820"/>
+                <a:spcPct val="125000"/>
               </a:lnSpc>
               <a:spcBef>
                 <a:spcPts val="200"/>
@@ -7337,7 +7324,7 @@
           <a:p>
             <a:pPr algn="l">
               <a:lnSpc>
-                <a:spcPts val="2080"/>
+                <a:spcPct val="125000"/>
               </a:lnSpc>
               <a:spcBef>
                 <a:spcPts val="800"/>
@@ -7359,7 +7346,7 @@
           <a:p>
             <a:pPr algn="l">
               <a:lnSpc>
-                <a:spcPts val="1820"/>
+                <a:spcPct val="125000"/>
               </a:lnSpc>
               <a:spcBef>
                 <a:spcPts val="200"/>
@@ -7470,11 +7457,10 @@
             <a:spAutoFit/>
           </a:bodyPr>
           <a:lstStyle/>
-          <a:p/>
-          <a:p>
-            <a:pPr algn="l">
-              <a:lnSpc>
-                <a:spcPts val="2080"/>
+          <a:p>
+            <a:pPr algn="l">
+              <a:lnSpc>
+                <a:spcPct val="125000"/>
               </a:lnSpc>
               <a:spcBef>
                 <a:spcPts val="0"/>
@@ -7496,7 +7482,7 @@
           <a:p>
             <a:pPr algn="l">
               <a:lnSpc>
-                <a:spcPts val="2080"/>
+                <a:spcPct val="125000"/>
               </a:lnSpc>
               <a:spcBef>
                 <a:spcPts val="800"/>
@@ -7518,7 +7504,7 @@
           <a:p>
             <a:pPr algn="l">
               <a:lnSpc>
-                <a:spcPts val="1820"/>
+                <a:spcPct val="125000"/>
               </a:lnSpc>
               <a:spcBef>
                 <a:spcPts val="200"/>
@@ -7540,7 +7526,7 @@
           <a:p>
             <a:pPr algn="l">
               <a:lnSpc>
-                <a:spcPts val="2080"/>
+                <a:spcPct val="125000"/>
               </a:lnSpc>
               <a:spcBef>
                 <a:spcPts val="800"/>
@@ -7562,7 +7548,7 @@
           <a:p>
             <a:pPr algn="l">
               <a:lnSpc>
-                <a:spcPts val="1820"/>
+                <a:spcPct val="125000"/>
               </a:lnSpc>
               <a:spcBef>
                 <a:spcPts val="200"/>
@@ -7584,7 +7570,7 @@
           <a:p>
             <a:pPr algn="l">
               <a:lnSpc>
-                <a:spcPts val="2080"/>
+                <a:spcPct val="125000"/>
               </a:lnSpc>
               <a:spcBef>
                 <a:spcPts val="800"/>
@@ -7606,7 +7592,7 @@
           <a:p>
             <a:pPr algn="l">
               <a:lnSpc>
-                <a:spcPts val="1820"/>
+                <a:spcPct val="125000"/>
               </a:lnSpc>
               <a:spcBef>
                 <a:spcPts val="200"/>
@@ -7628,7 +7614,7 @@
           <a:p>
             <a:pPr algn="l">
               <a:lnSpc>
-                <a:spcPts val="2080"/>
+                <a:spcPct val="125000"/>
               </a:lnSpc>
               <a:spcBef>
                 <a:spcPts val="800"/>
@@ -7650,7 +7636,7 @@
           <a:p>
             <a:pPr algn="l">
               <a:lnSpc>
-                <a:spcPts val="1820"/>
+                <a:spcPct val="125000"/>
               </a:lnSpc>
               <a:spcBef>
                 <a:spcPts val="200"/>
@@ -7761,11 +7747,10 @@
             <a:spAutoFit/>
           </a:bodyPr>
           <a:lstStyle/>
-          <a:p/>
-          <a:p>
-            <a:pPr algn="l">
-              <a:lnSpc>
-                <a:spcPts val="2080"/>
+          <a:p>
+            <a:pPr algn="l">
+              <a:lnSpc>
+                <a:spcPct val="125000"/>
               </a:lnSpc>
               <a:spcBef>
                 <a:spcPts val="0"/>
@@ -7787,7 +7772,7 @@
           <a:p>
             <a:pPr algn="l">
               <a:lnSpc>
-                <a:spcPts val="2080"/>
+                <a:spcPct val="125000"/>
               </a:lnSpc>
               <a:spcBef>
                 <a:spcPts val="800"/>
@@ -7809,7 +7794,7 @@
           <a:p>
             <a:pPr algn="l">
               <a:lnSpc>
-                <a:spcPts val="1820"/>
+                <a:spcPct val="125000"/>
               </a:lnSpc>
               <a:spcBef>
                 <a:spcPts val="200"/>
@@ -7831,7 +7816,7 @@
           <a:p>
             <a:pPr algn="l">
               <a:lnSpc>
-                <a:spcPts val="2080"/>
+                <a:spcPct val="125000"/>
               </a:lnSpc>
               <a:spcBef>
                 <a:spcPts val="800"/>
@@ -7853,7 +7838,7 @@
           <a:p>
             <a:pPr algn="l">
               <a:lnSpc>
-                <a:spcPts val="1820"/>
+                <a:spcPct val="125000"/>
               </a:lnSpc>
               <a:spcBef>
                 <a:spcPts val="200"/>
@@ -7875,7 +7860,7 @@
           <a:p>
             <a:pPr algn="l">
               <a:lnSpc>
-                <a:spcPts val="2080"/>
+                <a:spcPct val="125000"/>
               </a:lnSpc>
               <a:spcBef>
                 <a:spcPts val="800"/>
@@ -7897,7 +7882,7 @@
           <a:p>
             <a:pPr algn="l">
               <a:lnSpc>
-                <a:spcPts val="1820"/>
+                <a:spcPct val="125000"/>
               </a:lnSpc>
               <a:spcBef>
                 <a:spcPts val="200"/>
@@ -7919,7 +7904,7 @@
           <a:p>
             <a:pPr algn="l">
               <a:lnSpc>
-                <a:spcPts val="2080"/>
+                <a:spcPct val="125000"/>
               </a:lnSpc>
               <a:spcBef>
                 <a:spcPts val="800"/>
@@ -7941,7 +7926,7 @@
           <a:p>
             <a:pPr algn="l">
               <a:lnSpc>
-                <a:spcPts val="1820"/>
+                <a:spcPct val="125000"/>
               </a:lnSpc>
               <a:spcBef>
                 <a:spcPts val="200"/>
@@ -8052,11 +8037,10 @@
             <a:spAutoFit/>
           </a:bodyPr>
           <a:lstStyle/>
-          <a:p/>
-          <a:p>
-            <a:pPr algn="l">
-              <a:lnSpc>
-                <a:spcPts val="2080"/>
+          <a:p>
+            <a:pPr algn="l">
+              <a:lnSpc>
+                <a:spcPct val="125000"/>
               </a:lnSpc>
               <a:spcBef>
                 <a:spcPts val="0"/>
@@ -8078,7 +8062,7 @@
           <a:p>
             <a:pPr algn="l">
               <a:lnSpc>
-                <a:spcPts val="2080"/>
+                <a:spcPct val="125000"/>
               </a:lnSpc>
               <a:spcBef>
                 <a:spcPts val="800"/>
@@ -8100,7 +8084,7 @@
           <a:p>
             <a:pPr algn="l">
               <a:lnSpc>
-                <a:spcPts val="1820"/>
+                <a:spcPct val="125000"/>
               </a:lnSpc>
               <a:spcBef>
                 <a:spcPts val="200"/>
@@ -8122,7 +8106,7 @@
           <a:p>
             <a:pPr algn="l">
               <a:lnSpc>
-                <a:spcPts val="2080"/>
+                <a:spcPct val="125000"/>
               </a:lnSpc>
               <a:spcBef>
                 <a:spcPts val="800"/>
@@ -8144,7 +8128,7 @@
           <a:p>
             <a:pPr algn="l">
               <a:lnSpc>
-                <a:spcPts val="1820"/>
+                <a:spcPct val="125000"/>
               </a:lnSpc>
               <a:spcBef>
                 <a:spcPts val="200"/>
@@ -8166,7 +8150,7 @@
           <a:p>
             <a:pPr algn="l">
               <a:lnSpc>
-                <a:spcPts val="2080"/>
+                <a:spcPct val="125000"/>
               </a:lnSpc>
               <a:spcBef>
                 <a:spcPts val="800"/>
@@ -8188,7 +8172,7 @@
           <a:p>
             <a:pPr algn="l">
               <a:lnSpc>
-                <a:spcPts val="1820"/>
+                <a:spcPct val="125000"/>
               </a:lnSpc>
               <a:spcBef>
                 <a:spcPts val="200"/>
@@ -8210,7 +8194,7 @@
           <a:p>
             <a:pPr algn="l">
               <a:lnSpc>
-                <a:spcPts val="2080"/>
+                <a:spcPct val="125000"/>
               </a:lnSpc>
               <a:spcBef>
                 <a:spcPts val="800"/>
@@ -8232,7 +8216,7 @@
           <a:p>
             <a:pPr algn="l">
               <a:lnSpc>
-                <a:spcPts val="1820"/>
+                <a:spcPct val="125000"/>
               </a:lnSpc>
               <a:spcBef>
                 <a:spcPts val="200"/>
@@ -8343,11 +8327,10 @@
             <a:spAutoFit/>
           </a:bodyPr>
           <a:lstStyle/>
-          <a:p/>
-          <a:p>
-            <a:pPr algn="l">
-              <a:lnSpc>
-                <a:spcPts val="2080"/>
+          <a:p>
+            <a:pPr algn="l">
+              <a:lnSpc>
+                <a:spcPct val="125000"/>
               </a:lnSpc>
               <a:spcBef>
                 <a:spcPts val="0"/>
@@ -8369,7 +8352,7 @@
           <a:p>
             <a:pPr algn="l">
               <a:lnSpc>
-                <a:spcPts val="2080"/>
+                <a:spcPct val="125000"/>
               </a:lnSpc>
               <a:spcBef>
                 <a:spcPts val="800"/>
@@ -8391,7 +8374,7 @@
           <a:p>
             <a:pPr algn="l">
               <a:lnSpc>
-                <a:spcPts val="1820"/>
+                <a:spcPct val="125000"/>
               </a:lnSpc>
               <a:spcBef>
                 <a:spcPts val="200"/>
@@ -8413,7 +8396,7 @@
           <a:p>
             <a:pPr algn="l">
               <a:lnSpc>
-                <a:spcPts val="2080"/>
+                <a:spcPct val="125000"/>
               </a:lnSpc>
               <a:spcBef>
                 <a:spcPts val="800"/>
@@ -8435,7 +8418,7 @@
           <a:p>
             <a:pPr algn="l">
               <a:lnSpc>
-                <a:spcPts val="1820"/>
+                <a:spcPct val="125000"/>
               </a:lnSpc>
               <a:spcBef>
                 <a:spcPts val="200"/>
@@ -8457,7 +8440,7 @@
           <a:p>
             <a:pPr algn="l">
               <a:lnSpc>
-                <a:spcPts val="2080"/>
+                <a:spcPct val="125000"/>
               </a:lnSpc>
               <a:spcBef>
                 <a:spcPts val="800"/>
@@ -8479,7 +8462,7 @@
           <a:p>
             <a:pPr algn="l">
               <a:lnSpc>
-                <a:spcPts val="1820"/>
+                <a:spcPct val="125000"/>
               </a:lnSpc>
               <a:spcBef>
                 <a:spcPts val="200"/>
@@ -8501,7 +8484,7 @@
           <a:p>
             <a:pPr algn="l">
               <a:lnSpc>
-                <a:spcPts val="2080"/>
+                <a:spcPct val="125000"/>
               </a:lnSpc>
               <a:spcBef>
                 <a:spcPts val="800"/>
@@ -8523,7 +8506,7 @@
           <a:p>
             <a:pPr algn="l">
               <a:lnSpc>
-                <a:spcPts val="1820"/>
+                <a:spcPct val="125000"/>
               </a:lnSpc>
               <a:spcBef>
                 <a:spcPts val="200"/>
@@ -8634,11 +8617,10 @@
             <a:spAutoFit/>
           </a:bodyPr>
           <a:lstStyle/>
-          <a:p/>
-          <a:p>
-            <a:pPr algn="l">
-              <a:lnSpc>
-                <a:spcPts val="2080"/>
+          <a:p>
+            <a:pPr algn="l">
+              <a:lnSpc>
+                <a:spcPct val="125000"/>
               </a:lnSpc>
               <a:spcBef>
                 <a:spcPts val="0"/>
@@ -8660,7 +8642,7 @@
           <a:p>
             <a:pPr algn="l">
               <a:lnSpc>
-                <a:spcPts val="2080"/>
+                <a:spcPct val="125000"/>
               </a:lnSpc>
               <a:spcBef>
                 <a:spcPts val="800"/>
@@ -8682,7 +8664,7 @@
           <a:p>
             <a:pPr algn="l">
               <a:lnSpc>
-                <a:spcPts val="1820"/>
+                <a:spcPct val="125000"/>
               </a:lnSpc>
               <a:spcBef>
                 <a:spcPts val="200"/>
@@ -8704,7 +8686,7 @@
           <a:p>
             <a:pPr algn="l">
               <a:lnSpc>
-                <a:spcPts val="2080"/>
+                <a:spcPct val="125000"/>
               </a:lnSpc>
               <a:spcBef>
                 <a:spcPts val="800"/>
@@ -8726,7 +8708,7 @@
           <a:p>
             <a:pPr algn="l">
               <a:lnSpc>
-                <a:spcPts val="1820"/>
+                <a:spcPct val="125000"/>
               </a:lnSpc>
               <a:spcBef>
                 <a:spcPts val="200"/>
@@ -8748,7 +8730,7 @@
           <a:p>
             <a:pPr algn="l">
               <a:lnSpc>
-                <a:spcPts val="1820"/>
+                <a:spcPct val="125000"/>
               </a:lnSpc>
               <a:spcBef>
                 <a:spcPts val="200"/>
@@ -8770,7 +8752,7 @@
           <a:p>
             <a:pPr algn="l">
               <a:lnSpc>
-                <a:spcPts val="1820"/>
+                <a:spcPct val="125000"/>
               </a:lnSpc>
               <a:spcBef>
                 <a:spcPts val="200"/>
@@ -8792,7 +8774,7 @@
           <a:p>
             <a:pPr algn="l">
               <a:lnSpc>
-                <a:spcPts val="2080"/>
+                <a:spcPct val="125000"/>
               </a:lnSpc>
               <a:spcBef>
                 <a:spcPts val="800"/>
@@ -8814,7 +8796,7 @@
           <a:p>
             <a:pPr algn="l">
               <a:lnSpc>
-                <a:spcPts val="1820"/>
+                <a:spcPct val="125000"/>
               </a:lnSpc>
               <a:spcBef>
                 <a:spcPts val="200"/>
@@ -8836,7 +8818,7 @@
           <a:p>
             <a:pPr algn="l">
               <a:lnSpc>
-                <a:spcPts val="2080"/>
+                <a:spcPct val="125000"/>
               </a:lnSpc>
               <a:spcBef>
                 <a:spcPts val="800"/>
@@ -8858,7 +8840,7 @@
           <a:p>
             <a:pPr algn="l">
               <a:lnSpc>
-                <a:spcPts val="1820"/>
+                <a:spcPct val="125000"/>
               </a:lnSpc>
               <a:spcBef>
                 <a:spcPts val="200"/>
@@ -8969,11 +8951,10 @@
             <a:spAutoFit/>
           </a:bodyPr>
           <a:lstStyle/>
-          <a:p/>
-          <a:p>
-            <a:pPr algn="l">
-              <a:lnSpc>
-                <a:spcPts val="2080"/>
+          <a:p>
+            <a:pPr algn="l">
+              <a:lnSpc>
+                <a:spcPct val="125000"/>
               </a:lnSpc>
               <a:spcBef>
                 <a:spcPts val="0"/>
@@ -8995,7 +8976,7 @@
           <a:p>
             <a:pPr algn="l">
               <a:lnSpc>
-                <a:spcPts val="2080"/>
+                <a:spcPct val="125000"/>
               </a:lnSpc>
               <a:spcBef>
                 <a:spcPts val="800"/>
@@ -9017,7 +8998,7 @@
           <a:p>
             <a:pPr algn="l">
               <a:lnSpc>
-                <a:spcPts val="1820"/>
+                <a:spcPct val="125000"/>
               </a:lnSpc>
               <a:spcBef>
                 <a:spcPts val="200"/>
@@ -9039,7 +9020,7 @@
           <a:p>
             <a:pPr algn="l">
               <a:lnSpc>
-                <a:spcPts val="2080"/>
+                <a:spcPct val="125000"/>
               </a:lnSpc>
               <a:spcBef>
                 <a:spcPts val="800"/>
@@ -9061,7 +9042,7 @@
           <a:p>
             <a:pPr algn="l">
               <a:lnSpc>
-                <a:spcPts val="1820"/>
+                <a:spcPct val="125000"/>
               </a:lnSpc>
               <a:spcBef>
                 <a:spcPts val="200"/>
@@ -9083,7 +9064,7 @@
           <a:p>
             <a:pPr algn="l">
               <a:lnSpc>
-                <a:spcPts val="1820"/>
+                <a:spcPct val="125000"/>
               </a:lnSpc>
               <a:spcBef>
                 <a:spcPts val="200"/>
@@ -9105,7 +9086,7 @@
           <a:p>
             <a:pPr algn="l">
               <a:lnSpc>
-                <a:spcPts val="2080"/>
+                <a:spcPct val="125000"/>
               </a:lnSpc>
               <a:spcBef>
                 <a:spcPts val="800"/>
@@ -9127,7 +9108,7 @@
           <a:p>
             <a:pPr algn="l">
               <a:lnSpc>
-                <a:spcPts val="1820"/>
+                <a:spcPct val="125000"/>
               </a:lnSpc>
               <a:spcBef>
                 <a:spcPts val="200"/>
@@ -9149,7 +9130,7 @@
           <a:p>
             <a:pPr algn="l">
               <a:lnSpc>
-                <a:spcPts val="2080"/>
+                <a:spcPct val="125000"/>
               </a:lnSpc>
               <a:spcBef>
                 <a:spcPts val="800"/>
@@ -9171,7 +9152,7 @@
           <a:p>
             <a:pPr algn="l">
               <a:lnSpc>
-                <a:spcPts val="1820"/>
+                <a:spcPct val="125000"/>
               </a:lnSpc>
               <a:spcBef>
                 <a:spcPts val="200"/>
@@ -9282,11 +9263,10 @@
             <a:spAutoFit/>
           </a:bodyPr>
           <a:lstStyle/>
-          <a:p/>
-          <a:p>
-            <a:pPr algn="l">
-              <a:lnSpc>
-                <a:spcPts val="2080"/>
+          <a:p>
+            <a:pPr algn="l">
+              <a:lnSpc>
+                <a:spcPct val="125000"/>
               </a:lnSpc>
               <a:spcBef>
                 <a:spcPts val="0"/>
@@ -9308,7 +9288,7 @@
           <a:p>
             <a:pPr algn="l">
               <a:lnSpc>
-                <a:spcPts val="2080"/>
+                <a:spcPct val="125000"/>
               </a:lnSpc>
               <a:spcBef>
                 <a:spcPts val="800"/>
@@ -9330,7 +9310,7 @@
           <a:p>
             <a:pPr algn="l">
               <a:lnSpc>
-                <a:spcPts val="1820"/>
+                <a:spcPct val="125000"/>
               </a:lnSpc>
               <a:spcBef>
                 <a:spcPts val="200"/>
@@ -9352,7 +9332,7 @@
           <a:p>
             <a:pPr algn="l">
               <a:lnSpc>
-                <a:spcPts val="2080"/>
+                <a:spcPct val="125000"/>
               </a:lnSpc>
               <a:spcBef>
                 <a:spcPts val="800"/>
@@ -9374,7 +9354,7 @@
           <a:p>
             <a:pPr algn="l">
               <a:lnSpc>
-                <a:spcPts val="1820"/>
+                <a:spcPct val="125000"/>
               </a:lnSpc>
               <a:spcBef>
                 <a:spcPts val="200"/>
@@ -9396,7 +9376,7 @@
           <a:p>
             <a:pPr algn="l">
               <a:lnSpc>
-                <a:spcPts val="2080"/>
+                <a:spcPct val="125000"/>
               </a:lnSpc>
               <a:spcBef>
                 <a:spcPts val="800"/>
@@ -9418,7 +9398,7 @@
           <a:p>
             <a:pPr algn="l">
               <a:lnSpc>
-                <a:spcPts val="1820"/>
+                <a:spcPct val="125000"/>
               </a:lnSpc>
               <a:spcBef>
                 <a:spcPts val="200"/>
@@ -9440,7 +9420,7 @@
           <a:p>
             <a:pPr algn="l">
               <a:lnSpc>
-                <a:spcPts val="2080"/>
+                <a:spcPct val="125000"/>
               </a:lnSpc>
               <a:spcBef>
                 <a:spcPts val="800"/>
@@ -9462,7 +9442,7 @@
           <a:p>
             <a:pPr algn="l">
               <a:lnSpc>
-                <a:spcPts val="1820"/>
+                <a:spcPct val="125000"/>
               </a:lnSpc>
               <a:spcBef>
                 <a:spcPts val="200"/>
@@ -9573,11 +9553,10 @@
             <a:spAutoFit/>
           </a:bodyPr>
           <a:lstStyle/>
-          <a:p/>
-          <a:p>
-            <a:pPr algn="l">
-              <a:lnSpc>
-                <a:spcPts val="2080"/>
+          <a:p>
+            <a:pPr algn="l">
+              <a:lnSpc>
+                <a:spcPct val="125000"/>
               </a:lnSpc>
               <a:spcBef>
                 <a:spcPts val="0"/>
@@ -9599,7 +9578,7 @@
           <a:p>
             <a:pPr algn="l">
               <a:lnSpc>
-                <a:spcPts val="2080"/>
+                <a:spcPct val="125000"/>
               </a:lnSpc>
               <a:spcBef>
                 <a:spcPts val="800"/>
@@ -9621,7 +9600,7 @@
           <a:p>
             <a:pPr algn="l">
               <a:lnSpc>
-                <a:spcPts val="1820"/>
+                <a:spcPct val="125000"/>
               </a:lnSpc>
               <a:spcBef>
                 <a:spcPts val="200"/>
@@ -9643,7 +9622,7 @@
           <a:p>
             <a:pPr algn="l">
               <a:lnSpc>
-                <a:spcPts val="2080"/>
+                <a:spcPct val="125000"/>
               </a:lnSpc>
               <a:spcBef>
                 <a:spcPts val="800"/>
@@ -9665,7 +9644,7 @@
           <a:p>
             <a:pPr algn="l">
               <a:lnSpc>
-                <a:spcPts val="1820"/>
+                <a:spcPct val="125000"/>
               </a:lnSpc>
               <a:spcBef>
                 <a:spcPts val="200"/>
@@ -9687,7 +9666,7 @@
           <a:p>
             <a:pPr algn="l">
               <a:lnSpc>
-                <a:spcPts val="2080"/>
+                <a:spcPct val="125000"/>
               </a:lnSpc>
               <a:spcBef>
                 <a:spcPts val="800"/>
@@ -9709,7 +9688,7 @@
           <a:p>
             <a:pPr algn="l">
               <a:lnSpc>
-                <a:spcPts val="1820"/>
+                <a:spcPct val="125000"/>
               </a:lnSpc>
               <a:spcBef>
                 <a:spcPts val="200"/>
@@ -9731,7 +9710,7 @@
           <a:p>
             <a:pPr algn="l">
               <a:lnSpc>
-                <a:spcPts val="2080"/>
+                <a:spcPct val="125000"/>
               </a:lnSpc>
               <a:spcBef>
                 <a:spcPts val="800"/>
@@ -9753,7 +9732,7 @@
           <a:p>
             <a:pPr algn="l">
               <a:lnSpc>
-                <a:spcPts val="1820"/>
+                <a:spcPct val="125000"/>
               </a:lnSpc>
               <a:spcBef>
                 <a:spcPts val="200"/>
@@ -9864,11 +9843,10 @@
             <a:spAutoFit/>
           </a:bodyPr>
           <a:lstStyle/>
-          <a:p/>
-          <a:p>
-            <a:pPr algn="l">
-              <a:lnSpc>
-                <a:spcPts val="2080"/>
+          <a:p>
+            <a:pPr algn="l">
+              <a:lnSpc>
+                <a:spcPct val="125000"/>
               </a:lnSpc>
               <a:spcBef>
                 <a:spcPts val="0"/>
@@ -9890,7 +9868,7 @@
           <a:p>
             <a:pPr algn="l">
               <a:lnSpc>
-                <a:spcPts val="2080"/>
+                <a:spcPct val="125000"/>
               </a:lnSpc>
               <a:spcBef>
                 <a:spcPts val="800"/>
@@ -9912,7 +9890,7 @@
           <a:p>
             <a:pPr algn="l">
               <a:lnSpc>
-                <a:spcPts val="1820"/>
+                <a:spcPct val="125000"/>
               </a:lnSpc>
               <a:spcBef>
                 <a:spcPts val="200"/>
@@ -9934,7 +9912,7 @@
           <a:p>
             <a:pPr algn="l">
               <a:lnSpc>
-                <a:spcPts val="2080"/>
+                <a:spcPct val="125000"/>
               </a:lnSpc>
               <a:spcBef>
                 <a:spcPts val="800"/>
@@ -9956,7 +9934,7 @@
           <a:p>
             <a:pPr algn="l">
               <a:lnSpc>
-                <a:spcPts val="1820"/>
+                <a:spcPct val="125000"/>
               </a:lnSpc>
               <a:spcBef>
                 <a:spcPts val="200"/>
@@ -9978,7 +9956,7 @@
           <a:p>
             <a:pPr algn="l">
               <a:lnSpc>
-                <a:spcPts val="2080"/>
+                <a:spcPct val="125000"/>
               </a:lnSpc>
               <a:spcBef>
                 <a:spcPts val="800"/>
@@ -10000,7 +9978,7 @@
           <a:p>
             <a:pPr algn="l">
               <a:lnSpc>
-                <a:spcPts val="1820"/>
+                <a:spcPct val="125000"/>
               </a:lnSpc>
               <a:spcBef>
                 <a:spcPts val="200"/>
@@ -10022,7 +10000,7 @@
           <a:p>
             <a:pPr algn="l">
               <a:lnSpc>
-                <a:spcPts val="2080"/>
+                <a:spcPct val="125000"/>
               </a:lnSpc>
               <a:spcBef>
                 <a:spcPts val="800"/>
@@ -10044,7 +10022,7 @@
           <a:p>
             <a:pPr algn="l">
               <a:lnSpc>
-                <a:spcPts val="1820"/>
+                <a:spcPct val="125000"/>
               </a:lnSpc>
               <a:spcBef>
                 <a:spcPts val="200"/>
@@ -10155,11 +10133,10 @@
             <a:spAutoFit/>
           </a:bodyPr>
           <a:lstStyle/>
-          <a:p/>
-          <a:p>
-            <a:pPr algn="l">
-              <a:lnSpc>
-                <a:spcPts val="2080"/>
+          <a:p>
+            <a:pPr algn="l">
+              <a:lnSpc>
+                <a:spcPct val="125000"/>
               </a:lnSpc>
               <a:spcBef>
                 <a:spcPts val="0"/>
@@ -10181,7 +10158,7 @@
           <a:p>
             <a:pPr algn="l">
               <a:lnSpc>
-                <a:spcPts val="2080"/>
+                <a:spcPct val="125000"/>
               </a:lnSpc>
               <a:spcBef>
                 <a:spcPts val="800"/>
@@ -10203,7 +10180,7 @@
           <a:p>
             <a:pPr algn="l">
               <a:lnSpc>
-                <a:spcPts val="1820"/>
+                <a:spcPct val="125000"/>
               </a:lnSpc>
               <a:spcBef>
                 <a:spcPts val="200"/>
@@ -10225,7 +10202,7 @@
           <a:p>
             <a:pPr algn="l">
               <a:lnSpc>
-                <a:spcPts val="2080"/>
+                <a:spcPct val="125000"/>
               </a:lnSpc>
               <a:spcBef>
                 <a:spcPts val="800"/>
@@ -10247,7 +10224,7 @@
           <a:p>
             <a:pPr algn="l">
               <a:lnSpc>
-                <a:spcPts val="1820"/>
+                <a:spcPct val="125000"/>
               </a:lnSpc>
               <a:spcBef>
                 <a:spcPts val="200"/>
@@ -10269,7 +10246,7 @@
           <a:p>
             <a:pPr algn="l">
               <a:lnSpc>
-                <a:spcPts val="2080"/>
+                <a:spcPct val="125000"/>
               </a:lnSpc>
               <a:spcBef>
                 <a:spcPts val="800"/>
@@ -10291,7 +10268,7 @@
           <a:p>
             <a:pPr algn="l">
               <a:lnSpc>
-                <a:spcPts val="1820"/>
+                <a:spcPct val="125000"/>
               </a:lnSpc>
               <a:spcBef>
                 <a:spcPts val="200"/>
@@ -10313,7 +10290,7 @@
           <a:p>
             <a:pPr algn="l">
               <a:lnSpc>
-                <a:spcPts val="2080"/>
+                <a:spcPct val="125000"/>
               </a:lnSpc>
               <a:spcBef>
                 <a:spcPts val="800"/>
@@ -10335,7 +10312,7 @@
           <a:p>
             <a:pPr algn="l">
               <a:lnSpc>
-                <a:spcPts val="1820"/>
+                <a:spcPct val="125000"/>
               </a:lnSpc>
               <a:spcBef>
                 <a:spcPts val="200"/>
@@ -10446,11 +10423,10 @@
             <a:spAutoFit/>
           </a:bodyPr>
           <a:lstStyle/>
-          <a:p/>
-          <a:p>
-            <a:pPr algn="l">
-              <a:lnSpc>
-                <a:spcPts val="2080"/>
+          <a:p>
+            <a:pPr algn="l">
+              <a:lnSpc>
+                <a:spcPct val="125000"/>
               </a:lnSpc>
               <a:spcBef>
                 <a:spcPts val="0"/>
@@ -10472,7 +10448,7 @@
           <a:p>
             <a:pPr algn="l">
               <a:lnSpc>
-                <a:spcPts val="2080"/>
+                <a:spcPct val="125000"/>
               </a:lnSpc>
               <a:spcBef>
                 <a:spcPts val="800"/>
@@ -10494,7 +10470,7 @@
           <a:p>
             <a:pPr algn="l">
               <a:lnSpc>
-                <a:spcPts val="1820"/>
+                <a:spcPct val="125000"/>
               </a:lnSpc>
               <a:spcBef>
                 <a:spcPts val="200"/>
@@ -10516,7 +10492,7 @@
           <a:p>
             <a:pPr algn="l">
               <a:lnSpc>
-                <a:spcPts val="2080"/>
+                <a:spcPct val="125000"/>
               </a:lnSpc>
               <a:spcBef>
                 <a:spcPts val="800"/>
@@ -10538,7 +10514,7 @@
           <a:p>
             <a:pPr algn="l">
               <a:lnSpc>
-                <a:spcPts val="1820"/>
+                <a:spcPct val="125000"/>
               </a:lnSpc>
               <a:spcBef>
                 <a:spcPts val="200"/>
@@ -10560,7 +10536,7 @@
           <a:p>
             <a:pPr algn="l">
               <a:lnSpc>
-                <a:spcPts val="1820"/>
+                <a:spcPct val="125000"/>
               </a:lnSpc>
               <a:spcBef>
                 <a:spcPts val="200"/>
@@ -10582,7 +10558,7 @@
           <a:p>
             <a:pPr algn="l">
               <a:lnSpc>
-                <a:spcPts val="1820"/>
+                <a:spcPct val="125000"/>
               </a:lnSpc>
               <a:spcBef>
                 <a:spcPts val="200"/>
@@ -10604,7 +10580,7 @@
           <a:p>
             <a:pPr algn="l">
               <a:lnSpc>
-                <a:spcPts val="1820"/>
+                <a:spcPct val="125000"/>
               </a:lnSpc>
               <a:spcBef>
                 <a:spcPts val="200"/>
@@ -10626,7 +10602,7 @@
           <a:p>
             <a:pPr algn="l">
               <a:lnSpc>
-                <a:spcPts val="2080"/>
+                <a:spcPct val="125000"/>
               </a:lnSpc>
               <a:spcBef>
                 <a:spcPts val="800"/>
@@ -10648,7 +10624,7 @@
           <a:p>
             <a:pPr algn="l">
               <a:lnSpc>
-                <a:spcPts val="1820"/>
+                <a:spcPct val="125000"/>
               </a:lnSpc>
               <a:spcBef>
                 <a:spcPts val="200"/>
@@ -10670,7 +10646,7 @@
           <a:p>
             <a:pPr algn="l">
               <a:lnSpc>
-                <a:spcPts val="2080"/>
+                <a:spcPct val="125000"/>
               </a:lnSpc>
               <a:spcBef>
                 <a:spcPts val="800"/>
@@ -10692,7 +10668,7 @@
           <a:p>
             <a:pPr algn="l">
               <a:lnSpc>
-                <a:spcPts val="1820"/>
+                <a:spcPct val="125000"/>
               </a:lnSpc>
               <a:spcBef>
                 <a:spcPts val="200"/>
@@ -10803,11 +10779,10 @@
             <a:spAutoFit/>
           </a:bodyPr>
           <a:lstStyle/>
-          <a:p/>
-          <a:p>
-            <a:pPr algn="l">
-              <a:lnSpc>
-                <a:spcPts val="2080"/>
+          <a:p>
+            <a:pPr algn="l">
+              <a:lnSpc>
+                <a:spcPct val="125000"/>
               </a:lnSpc>
               <a:spcBef>
                 <a:spcPts val="0"/>
@@ -10829,7 +10804,7 @@
           <a:p>
             <a:pPr algn="l">
               <a:lnSpc>
-                <a:spcPts val="2080"/>
+                <a:spcPct val="125000"/>
               </a:lnSpc>
               <a:spcBef>
                 <a:spcPts val="800"/>
@@ -10851,7 +10826,7 @@
           <a:p>
             <a:pPr algn="l">
               <a:lnSpc>
-                <a:spcPts val="1820"/>
+                <a:spcPct val="125000"/>
               </a:lnSpc>
               <a:spcBef>
                 <a:spcPts val="200"/>
@@ -10873,7 +10848,7 @@
           <a:p>
             <a:pPr algn="l">
               <a:lnSpc>
-                <a:spcPts val="2080"/>
+                <a:spcPct val="125000"/>
               </a:lnSpc>
               <a:spcBef>
                 <a:spcPts val="800"/>
@@ -10895,7 +10870,7 @@
           <a:p>
             <a:pPr algn="l">
               <a:lnSpc>
-                <a:spcPts val="1820"/>
+                <a:spcPct val="125000"/>
               </a:lnSpc>
               <a:spcBef>
                 <a:spcPts val="200"/>
@@ -10917,7 +10892,7 @@
           <a:p>
             <a:pPr algn="l">
               <a:lnSpc>
-                <a:spcPts val="1820"/>
+                <a:spcPct val="125000"/>
               </a:lnSpc>
               <a:spcBef>
                 <a:spcPts val="200"/>
@@ -10939,7 +10914,7 @@
           <a:p>
             <a:pPr algn="l">
               <a:lnSpc>
-                <a:spcPts val="1820"/>
+                <a:spcPct val="125000"/>
               </a:lnSpc>
               <a:spcBef>
                 <a:spcPts val="200"/>
@@ -10961,7 +10936,7 @@
           <a:p>
             <a:pPr algn="l">
               <a:lnSpc>
-                <a:spcPts val="2080"/>
+                <a:spcPct val="125000"/>
               </a:lnSpc>
               <a:spcBef>
                 <a:spcPts val="800"/>
@@ -10983,7 +10958,7 @@
           <a:p>
             <a:pPr algn="l">
               <a:lnSpc>
-                <a:spcPts val="1820"/>
+                <a:spcPct val="125000"/>
               </a:lnSpc>
               <a:spcBef>
                 <a:spcPts val="200"/>
@@ -11005,7 +10980,7 @@
           <a:p>
             <a:pPr algn="l">
               <a:lnSpc>
-                <a:spcPts val="2080"/>
+                <a:spcPct val="125000"/>
               </a:lnSpc>
               <a:spcBef>
                 <a:spcPts val="800"/>
@@ -11027,7 +11002,7 @@
           <a:p>
             <a:pPr algn="l">
               <a:lnSpc>
-                <a:spcPts val="1820"/>
+                <a:spcPct val="125000"/>
               </a:lnSpc>
               <a:spcBef>
                 <a:spcPts val="200"/>
@@ -11138,11 +11113,10 @@
             <a:spAutoFit/>
           </a:bodyPr>
           <a:lstStyle/>
-          <a:p/>
-          <a:p>
-            <a:pPr algn="l">
-              <a:lnSpc>
-                <a:spcPts val="2080"/>
+          <a:p>
+            <a:pPr algn="l">
+              <a:lnSpc>
+                <a:spcPct val="125000"/>
               </a:lnSpc>
               <a:spcBef>
                 <a:spcPts val="0"/>
@@ -11164,7 +11138,7 @@
           <a:p>
             <a:pPr algn="l">
               <a:lnSpc>
-                <a:spcPts val="2080"/>
+                <a:spcPct val="125000"/>
               </a:lnSpc>
               <a:spcBef>
                 <a:spcPts val="800"/>
@@ -11186,7 +11160,7 @@
           <a:p>
             <a:pPr algn="l">
               <a:lnSpc>
-                <a:spcPts val="1820"/>
+                <a:spcPct val="125000"/>
               </a:lnSpc>
               <a:spcBef>
                 <a:spcPts val="200"/>
@@ -11208,7 +11182,7 @@
           <a:p>
             <a:pPr algn="l">
               <a:lnSpc>
-                <a:spcPts val="2080"/>
+                <a:spcPct val="125000"/>
               </a:lnSpc>
               <a:spcBef>
                 <a:spcPts val="800"/>
@@ -11230,7 +11204,7 @@
           <a:p>
             <a:pPr algn="l">
               <a:lnSpc>
-                <a:spcPts val="1820"/>
+                <a:spcPct val="125000"/>
               </a:lnSpc>
               <a:spcBef>
                 <a:spcPts val="200"/>
@@ -11252,7 +11226,7 @@
           <a:p>
             <a:pPr algn="l">
               <a:lnSpc>
-                <a:spcPts val="1820"/>
+                <a:spcPct val="125000"/>
               </a:lnSpc>
               <a:spcBef>
                 <a:spcPts val="200"/>
@@ -11274,7 +11248,7 @@
           <a:p>
             <a:pPr algn="l">
               <a:lnSpc>
-                <a:spcPts val="1820"/>
+                <a:spcPct val="125000"/>
               </a:lnSpc>
               <a:spcBef>
                 <a:spcPts val="200"/>
@@ -11296,7 +11270,7 @@
           <a:p>
             <a:pPr algn="l">
               <a:lnSpc>
-                <a:spcPts val="1820"/>
+                <a:spcPct val="125000"/>
               </a:lnSpc>
               <a:spcBef>
                 <a:spcPts val="200"/>
@@ -11318,7 +11292,7 @@
           <a:p>
             <a:pPr algn="l">
               <a:lnSpc>
-                <a:spcPts val="1820"/>
+                <a:spcPct val="125000"/>
               </a:lnSpc>
               <a:spcBef>
                 <a:spcPts val="200"/>
@@ -11340,7 +11314,7 @@
           <a:p>
             <a:pPr algn="l">
               <a:lnSpc>
-                <a:spcPts val="2080"/>
+                <a:spcPct val="125000"/>
               </a:lnSpc>
               <a:spcBef>
                 <a:spcPts val="800"/>
@@ -11362,7 +11336,7 @@
           <a:p>
             <a:pPr algn="l">
               <a:lnSpc>
-                <a:spcPts val="1820"/>
+                <a:spcPct val="125000"/>
               </a:lnSpc>
               <a:spcBef>
                 <a:spcPts val="200"/>
@@ -11384,7 +11358,7 @@
           <a:p>
             <a:pPr algn="l">
               <a:lnSpc>
-                <a:spcPts val="2080"/>
+                <a:spcPct val="125000"/>
               </a:lnSpc>
               <a:spcBef>
                 <a:spcPts val="800"/>
@@ -11406,7 +11380,7 @@
           <a:p>
             <a:pPr algn="l">
               <a:lnSpc>
-                <a:spcPts val="1820"/>
+                <a:spcPct val="125000"/>
               </a:lnSpc>
               <a:spcBef>
                 <a:spcPts val="200"/>
@@ -11517,11 +11491,10 @@
             <a:spAutoFit/>
           </a:bodyPr>
           <a:lstStyle/>
-          <a:p/>
-          <a:p>
-            <a:pPr algn="l">
-              <a:lnSpc>
-                <a:spcPts val="2080"/>
+          <a:p>
+            <a:pPr algn="l">
+              <a:lnSpc>
+                <a:spcPct val="125000"/>
               </a:lnSpc>
               <a:spcBef>
                 <a:spcPts val="0"/>
@@ -11543,7 +11516,7 @@
           <a:p>
             <a:pPr algn="l">
               <a:lnSpc>
-                <a:spcPts val="2080"/>
+                <a:spcPct val="125000"/>
               </a:lnSpc>
               <a:spcBef>
                 <a:spcPts val="800"/>
@@ -11565,7 +11538,7 @@
           <a:p>
             <a:pPr algn="l">
               <a:lnSpc>
-                <a:spcPts val="1820"/>
+                <a:spcPct val="125000"/>
               </a:lnSpc>
               <a:spcBef>
                 <a:spcPts val="200"/>
@@ -11587,7 +11560,7 @@
           <a:p>
             <a:pPr algn="l">
               <a:lnSpc>
-                <a:spcPts val="2080"/>
+                <a:spcPct val="125000"/>
               </a:lnSpc>
               <a:spcBef>
                 <a:spcPts val="800"/>
@@ -11609,7 +11582,7 @@
           <a:p>
             <a:pPr algn="l">
               <a:lnSpc>
-                <a:spcPts val="1820"/>
+                <a:spcPct val="125000"/>
               </a:lnSpc>
               <a:spcBef>
                 <a:spcPts val="200"/>
@@ -11631,7 +11604,7 @@
           <a:p>
             <a:pPr algn="l">
               <a:lnSpc>
-                <a:spcPts val="1820"/>
+                <a:spcPct val="125000"/>
               </a:lnSpc>
               <a:spcBef>
                 <a:spcPts val="200"/>
@@ -11653,7 +11626,7 @@
           <a:p>
             <a:pPr algn="l">
               <a:lnSpc>
-                <a:spcPts val="2080"/>
+                <a:spcPct val="125000"/>
               </a:lnSpc>
               <a:spcBef>
                 <a:spcPts val="800"/>
@@ -11675,7 +11648,7 @@
           <a:p>
             <a:pPr algn="l">
               <a:lnSpc>
-                <a:spcPts val="1820"/>
+                <a:spcPct val="125000"/>
               </a:lnSpc>
               <a:spcBef>
                 <a:spcPts val="200"/>
@@ -11697,7 +11670,7 @@
           <a:p>
             <a:pPr algn="l">
               <a:lnSpc>
-                <a:spcPts val="2080"/>
+                <a:spcPct val="125000"/>
               </a:lnSpc>
               <a:spcBef>
                 <a:spcPts val="800"/>
@@ -11719,7 +11692,7 @@
           <a:p>
             <a:pPr algn="l">
               <a:lnSpc>
-                <a:spcPts val="1820"/>
+                <a:spcPct val="125000"/>
               </a:lnSpc>
               <a:spcBef>
                 <a:spcPts val="200"/>
@@ -11830,11 +11803,10 @@
             <a:spAutoFit/>
           </a:bodyPr>
           <a:lstStyle/>
-          <a:p/>
-          <a:p>
-            <a:pPr algn="l">
-              <a:lnSpc>
-                <a:spcPts val="2080"/>
+          <a:p>
+            <a:pPr algn="l">
+              <a:lnSpc>
+                <a:spcPct val="125000"/>
               </a:lnSpc>
               <a:spcBef>
                 <a:spcPts val="0"/>
@@ -11856,7 +11828,7 @@
           <a:p>
             <a:pPr algn="l">
               <a:lnSpc>
-                <a:spcPts val="2080"/>
+                <a:spcPct val="125000"/>
               </a:lnSpc>
               <a:spcBef>
                 <a:spcPts val="800"/>
@@ -11878,7 +11850,7 @@
           <a:p>
             <a:pPr algn="l">
               <a:lnSpc>
-                <a:spcPts val="1820"/>
+                <a:spcPct val="125000"/>
               </a:lnSpc>
               <a:spcBef>
                 <a:spcPts val="200"/>
@@ -11900,7 +11872,7 @@
           <a:p>
             <a:pPr algn="l">
               <a:lnSpc>
-                <a:spcPts val="2080"/>
+                <a:spcPct val="125000"/>
               </a:lnSpc>
               <a:spcBef>
                 <a:spcPts val="800"/>
@@ -11922,7 +11894,7 @@
           <a:p>
             <a:pPr algn="l">
               <a:lnSpc>
-                <a:spcPts val="1820"/>
+                <a:spcPct val="125000"/>
               </a:lnSpc>
               <a:spcBef>
                 <a:spcPts val="200"/>
@@ -11944,7 +11916,7 @@
           <a:p>
             <a:pPr algn="l">
               <a:lnSpc>
-                <a:spcPts val="1820"/>
+                <a:spcPct val="125000"/>
               </a:lnSpc>
               <a:spcBef>
                 <a:spcPts val="200"/>
@@ -11966,7 +11938,7 @@
           <a:p>
             <a:pPr algn="l">
               <a:lnSpc>
-                <a:spcPts val="1820"/>
+                <a:spcPct val="125000"/>
               </a:lnSpc>
               <a:spcBef>
                 <a:spcPts val="200"/>
@@ -11988,7 +11960,7 @@
           <a:p>
             <a:pPr algn="l">
               <a:lnSpc>
-                <a:spcPts val="1820"/>
+                <a:spcPct val="125000"/>
               </a:lnSpc>
               <a:spcBef>
                 <a:spcPts val="200"/>
@@ -12010,7 +11982,7 @@
           <a:p>
             <a:pPr algn="l">
               <a:lnSpc>
-                <a:spcPts val="1820"/>
+                <a:spcPct val="125000"/>
               </a:lnSpc>
               <a:spcBef>
                 <a:spcPts val="200"/>
@@ -12032,7 +12004,7 @@
           <a:p>
             <a:pPr algn="l">
               <a:lnSpc>
-                <a:spcPts val="2080"/>
+                <a:spcPct val="125000"/>
               </a:lnSpc>
               <a:spcBef>
                 <a:spcPts val="800"/>
@@ -12054,7 +12026,7 @@
           <a:p>
             <a:pPr algn="l">
               <a:lnSpc>
-                <a:spcPts val="1820"/>
+                <a:spcPct val="125000"/>
               </a:lnSpc>
               <a:spcBef>
                 <a:spcPts val="200"/>
@@ -12076,7 +12048,7 @@
           <a:p>
             <a:pPr algn="l">
               <a:lnSpc>
-                <a:spcPts val="2080"/>
+                <a:spcPct val="125000"/>
               </a:lnSpc>
               <a:spcBef>
                 <a:spcPts val="800"/>
@@ -12098,7 +12070,7 @@
           <a:p>
             <a:pPr algn="l">
               <a:lnSpc>
-                <a:spcPts val="1820"/>
+                <a:spcPct val="125000"/>
               </a:lnSpc>
               <a:spcBef>
                 <a:spcPts val="200"/>
@@ -12209,11 +12181,10 @@
             <a:spAutoFit/>
           </a:bodyPr>
           <a:lstStyle/>
-          <a:p/>
-          <a:p>
-            <a:pPr algn="l">
-              <a:lnSpc>
-                <a:spcPts val="2080"/>
+          <a:p>
+            <a:pPr algn="l">
+              <a:lnSpc>
+                <a:spcPct val="125000"/>
               </a:lnSpc>
               <a:spcBef>
                 <a:spcPts val="0"/>
@@ -12235,7 +12206,7 @@
           <a:p>
             <a:pPr algn="l">
               <a:lnSpc>
-                <a:spcPts val="2080"/>
+                <a:spcPct val="125000"/>
               </a:lnSpc>
               <a:spcBef>
                 <a:spcPts val="800"/>
@@ -12257,7 +12228,7 @@
           <a:p>
             <a:pPr algn="l">
               <a:lnSpc>
-                <a:spcPts val="1820"/>
+                <a:spcPct val="125000"/>
               </a:lnSpc>
               <a:spcBef>
                 <a:spcPts val="200"/>
@@ -12279,7 +12250,7 @@
           <a:p>
             <a:pPr algn="l">
               <a:lnSpc>
-                <a:spcPts val="2080"/>
+                <a:spcPct val="125000"/>
               </a:lnSpc>
               <a:spcBef>
                 <a:spcPts val="800"/>
@@ -12301,7 +12272,7 @@
           <a:p>
             <a:pPr algn="l">
               <a:lnSpc>
-                <a:spcPts val="1820"/>
+                <a:spcPct val="125000"/>
               </a:lnSpc>
               <a:spcBef>
                 <a:spcPts val="200"/>
@@ -12323,7 +12294,7 @@
           <a:p>
             <a:pPr algn="l">
               <a:lnSpc>
-                <a:spcPts val="1820"/>
+                <a:spcPct val="125000"/>
               </a:lnSpc>
               <a:spcBef>
                 <a:spcPts val="200"/>
@@ -12345,7 +12316,7 @@
           <a:p>
             <a:pPr algn="l">
               <a:lnSpc>
-                <a:spcPts val="1820"/>
+                <a:spcPct val="125000"/>
               </a:lnSpc>
               <a:spcBef>
                 <a:spcPts val="200"/>
@@ -12367,7 +12338,7 @@
           <a:p>
             <a:pPr algn="l">
               <a:lnSpc>
-                <a:spcPts val="1820"/>
+                <a:spcPct val="125000"/>
               </a:lnSpc>
               <a:spcBef>
                 <a:spcPts val="200"/>
@@ -12389,7 +12360,7 @@
           <a:p>
             <a:pPr algn="l">
               <a:lnSpc>
-                <a:spcPts val="1820"/>
+                <a:spcPct val="125000"/>
               </a:lnSpc>
               <a:spcBef>
                 <a:spcPts val="200"/>
@@ -12411,7 +12382,7 @@
           <a:p>
             <a:pPr algn="l">
               <a:lnSpc>
-                <a:spcPts val="1820"/>
+                <a:spcPct val="125000"/>
               </a:lnSpc>
               <a:spcBef>
                 <a:spcPts val="200"/>
@@ -12433,7 +12404,7 @@
           <a:p>
             <a:pPr algn="l">
               <a:lnSpc>
-                <a:spcPts val="1820"/>
+                <a:spcPct val="125000"/>
               </a:lnSpc>
               <a:spcBef>
                 <a:spcPts val="200"/>
@@ -12455,7 +12426,7 @@
           <a:p>
             <a:pPr algn="l">
               <a:lnSpc>
-                <a:spcPts val="2080"/>
+                <a:spcPct val="125000"/>
               </a:lnSpc>
               <a:spcBef>
                 <a:spcPts val="800"/>
@@ -12477,7 +12448,7 @@
           <a:p>
             <a:pPr algn="l">
               <a:lnSpc>
-                <a:spcPts val="1820"/>
+                <a:spcPct val="125000"/>
               </a:lnSpc>
               <a:spcBef>
                 <a:spcPts val="200"/>
@@ -12499,7 +12470,7 @@
           <a:p>
             <a:pPr algn="l">
               <a:lnSpc>
-                <a:spcPts val="2080"/>
+                <a:spcPct val="125000"/>
               </a:lnSpc>
               <a:spcBef>
                 <a:spcPts val="800"/>
@@ -12521,7 +12492,7 @@
           <a:p>
             <a:pPr algn="l">
               <a:lnSpc>
-                <a:spcPts val="1820"/>
+                <a:spcPct val="125000"/>
               </a:lnSpc>
               <a:spcBef>
                 <a:spcPts val="200"/>
@@ -12632,11 +12603,10 @@
             <a:spAutoFit/>
           </a:bodyPr>
           <a:lstStyle/>
-          <a:p/>
-          <a:p>
-            <a:pPr algn="l">
-              <a:lnSpc>
-                <a:spcPts val="2080"/>
+          <a:p>
+            <a:pPr algn="l">
+              <a:lnSpc>
+                <a:spcPct val="125000"/>
               </a:lnSpc>
               <a:spcBef>
                 <a:spcPts val="0"/>
@@ -12658,7 +12628,7 @@
           <a:p>
             <a:pPr algn="l">
               <a:lnSpc>
-                <a:spcPts val="2080"/>
+                <a:spcPct val="125000"/>
               </a:lnSpc>
               <a:spcBef>
                 <a:spcPts val="800"/>
@@ -12680,7 +12650,7 @@
           <a:p>
             <a:pPr algn="l">
               <a:lnSpc>
-                <a:spcPts val="1820"/>
+                <a:spcPct val="125000"/>
               </a:lnSpc>
               <a:spcBef>
                 <a:spcPts val="200"/>
@@ -12702,7 +12672,7 @@
           <a:p>
             <a:pPr algn="l">
               <a:lnSpc>
-                <a:spcPts val="2080"/>
+                <a:spcPct val="125000"/>
               </a:lnSpc>
               <a:spcBef>
                 <a:spcPts val="800"/>
@@ -12724,7 +12694,7 @@
           <a:p>
             <a:pPr algn="l">
               <a:lnSpc>
-                <a:spcPts val="1820"/>
+                <a:spcPct val="125000"/>
               </a:lnSpc>
               <a:spcBef>
                 <a:spcPts val="200"/>
@@ -12746,7 +12716,7 @@
           <a:p>
             <a:pPr algn="l">
               <a:lnSpc>
-                <a:spcPts val="2080"/>
+                <a:spcPct val="125000"/>
               </a:lnSpc>
               <a:spcBef>
                 <a:spcPts val="800"/>
@@ -12768,7 +12738,7 @@
           <a:p>
             <a:pPr algn="l">
               <a:lnSpc>
-                <a:spcPts val="1820"/>
+                <a:spcPct val="125000"/>
               </a:lnSpc>
               <a:spcBef>
                 <a:spcPts val="200"/>
@@ -12790,7 +12760,7 @@
           <a:p>
             <a:pPr algn="l">
               <a:lnSpc>
-                <a:spcPts val="2080"/>
+                <a:spcPct val="125000"/>
               </a:lnSpc>
               <a:spcBef>
                 <a:spcPts val="800"/>
@@ -12812,7 +12782,7 @@
           <a:p>
             <a:pPr algn="l">
               <a:lnSpc>
-                <a:spcPts val="1820"/>
+                <a:spcPct val="125000"/>
               </a:lnSpc>
               <a:spcBef>
                 <a:spcPts val="200"/>
@@ -12923,11 +12893,10 @@
             <a:spAutoFit/>
           </a:bodyPr>
           <a:lstStyle/>
-          <a:p/>
-          <a:p>
-            <a:pPr algn="l">
-              <a:lnSpc>
-                <a:spcPts val="2080"/>
+          <a:p>
+            <a:pPr algn="l">
+              <a:lnSpc>
+                <a:spcPct val="125000"/>
               </a:lnSpc>
               <a:spcBef>
                 <a:spcPts val="0"/>
@@ -12949,7 +12918,7 @@
           <a:p>
             <a:pPr algn="l">
               <a:lnSpc>
-                <a:spcPts val="2080"/>
+                <a:spcPct val="125000"/>
               </a:lnSpc>
               <a:spcBef>
                 <a:spcPts val="800"/>
@@ -12971,7 +12940,7 @@
           <a:p>
             <a:pPr algn="l">
               <a:lnSpc>
-                <a:spcPts val="1820"/>
+                <a:spcPct val="125000"/>
               </a:lnSpc>
               <a:spcBef>
                 <a:spcPts val="200"/>
@@ -12993,7 +12962,7 @@
           <a:p>
             <a:pPr algn="l">
               <a:lnSpc>
-                <a:spcPts val="2080"/>
+                <a:spcPct val="125000"/>
               </a:lnSpc>
               <a:spcBef>
                 <a:spcPts val="800"/>
@@ -13015,7 +12984,7 @@
           <a:p>
             <a:pPr algn="l">
               <a:lnSpc>
-                <a:spcPts val="1820"/>
+                <a:spcPct val="125000"/>
               </a:lnSpc>
               <a:spcBef>
                 <a:spcPts val="200"/>
@@ -13037,7 +13006,7 @@
           <a:p>
             <a:pPr algn="l">
               <a:lnSpc>
-                <a:spcPts val="1820"/>
+                <a:spcPct val="125000"/>
               </a:lnSpc>
               <a:spcBef>
                 <a:spcPts val="200"/>
@@ -13059,7 +13028,7 @@
           <a:p>
             <a:pPr algn="l">
               <a:lnSpc>
-                <a:spcPts val="1820"/>
+                <a:spcPct val="125000"/>
               </a:lnSpc>
               <a:spcBef>
                 <a:spcPts val="200"/>
@@ -13081,7 +13050,7 @@
           <a:p>
             <a:pPr algn="l">
               <a:lnSpc>
-                <a:spcPts val="1820"/>
+                <a:spcPct val="125000"/>
               </a:lnSpc>
               <a:spcBef>
                 <a:spcPts val="200"/>
@@ -13103,7 +13072,7 @@
           <a:p>
             <a:pPr algn="l">
               <a:lnSpc>
-                <a:spcPts val="2080"/>
+                <a:spcPct val="125000"/>
               </a:lnSpc>
               <a:spcBef>
                 <a:spcPts val="800"/>
@@ -13125,7 +13094,7 @@
           <a:p>
             <a:pPr algn="l">
               <a:lnSpc>
-                <a:spcPts val="1820"/>
+                <a:spcPct val="125000"/>
               </a:lnSpc>
               <a:spcBef>
                 <a:spcPts val="200"/>
@@ -13147,7 +13116,7 @@
           <a:p>
             <a:pPr algn="l">
               <a:lnSpc>
-                <a:spcPts val="2080"/>
+                <a:spcPct val="125000"/>
               </a:lnSpc>
               <a:spcBef>
                 <a:spcPts val="800"/>
@@ -13169,7 +13138,7 @@
           <a:p>
             <a:pPr algn="l">
               <a:lnSpc>
-                <a:spcPts val="1820"/>
+                <a:spcPct val="125000"/>
               </a:lnSpc>
               <a:spcBef>
                 <a:spcPts val="200"/>
@@ -13280,11 +13249,10 @@
             <a:spAutoFit/>
           </a:bodyPr>
           <a:lstStyle/>
-          <a:p/>
-          <a:p>
-            <a:pPr algn="l">
-              <a:lnSpc>
-                <a:spcPts val="2080"/>
+          <a:p>
+            <a:pPr algn="l">
+              <a:lnSpc>
+                <a:spcPct val="125000"/>
               </a:lnSpc>
               <a:spcBef>
                 <a:spcPts val="0"/>
@@ -13306,7 +13274,7 @@
           <a:p>
             <a:pPr algn="l">
               <a:lnSpc>
-                <a:spcPts val="2080"/>
+                <a:spcPct val="125000"/>
               </a:lnSpc>
               <a:spcBef>
                 <a:spcPts val="800"/>
@@ -13328,7 +13296,7 @@
           <a:p>
             <a:pPr algn="l">
               <a:lnSpc>
-                <a:spcPts val="1820"/>
+                <a:spcPct val="125000"/>
               </a:lnSpc>
               <a:spcBef>
                 <a:spcPts val="200"/>
@@ -13350,7 +13318,7 @@
           <a:p>
             <a:pPr algn="l">
               <a:lnSpc>
-                <a:spcPts val="2080"/>
+                <a:spcPct val="125000"/>
               </a:lnSpc>
               <a:spcBef>
                 <a:spcPts val="800"/>
@@ -13372,7 +13340,7 @@
           <a:p>
             <a:pPr algn="l">
               <a:lnSpc>
-                <a:spcPts val="1820"/>
+                <a:spcPct val="125000"/>
               </a:lnSpc>
               <a:spcBef>
                 <a:spcPts val="200"/>
@@ -13394,7 +13362,7 @@
           <a:p>
             <a:pPr algn="l">
               <a:lnSpc>
-                <a:spcPts val="2080"/>
+                <a:spcPct val="125000"/>
               </a:lnSpc>
               <a:spcBef>
                 <a:spcPts val="800"/>
@@ -13416,7 +13384,7 @@
           <a:p>
             <a:pPr algn="l">
               <a:lnSpc>
-                <a:spcPts val="1820"/>
+                <a:spcPct val="125000"/>
               </a:lnSpc>
               <a:spcBef>
                 <a:spcPts val="200"/>
@@ -13438,7 +13406,7 @@
           <a:p>
             <a:pPr algn="l">
               <a:lnSpc>
-                <a:spcPts val="2080"/>
+                <a:spcPct val="125000"/>
               </a:lnSpc>
               <a:spcBef>
                 <a:spcPts val="800"/>
@@ -13460,7 +13428,7 @@
           <a:p>
             <a:pPr algn="l">
               <a:lnSpc>
-                <a:spcPts val="1820"/>
+                <a:spcPct val="125000"/>
               </a:lnSpc>
               <a:spcBef>
                 <a:spcPts val="200"/>
@@ -13571,11 +13539,10 @@
             <a:spAutoFit/>
           </a:bodyPr>
           <a:lstStyle/>
-          <a:p/>
-          <a:p>
-            <a:pPr algn="l">
-              <a:lnSpc>
-                <a:spcPts val="2080"/>
+          <a:p>
+            <a:pPr algn="l">
+              <a:lnSpc>
+                <a:spcPct val="125000"/>
               </a:lnSpc>
               <a:spcBef>
                 <a:spcPts val="0"/>
@@ -13597,7 +13564,7 @@
           <a:p>
             <a:pPr algn="l">
               <a:lnSpc>
-                <a:spcPts val="2080"/>
+                <a:spcPct val="125000"/>
               </a:lnSpc>
               <a:spcBef>
                 <a:spcPts val="800"/>
@@ -13619,7 +13586,7 @@
           <a:p>
             <a:pPr algn="l">
               <a:lnSpc>
-                <a:spcPts val="1820"/>
+                <a:spcPct val="125000"/>
               </a:lnSpc>
               <a:spcBef>
                 <a:spcPts val="200"/>
@@ -13641,7 +13608,7 @@
           <a:p>
             <a:pPr algn="l">
               <a:lnSpc>
-                <a:spcPts val="2080"/>
+                <a:spcPct val="125000"/>
               </a:lnSpc>
               <a:spcBef>
                 <a:spcPts val="800"/>
@@ -13663,7 +13630,7 @@
           <a:p>
             <a:pPr algn="l">
               <a:lnSpc>
-                <a:spcPts val="1820"/>
+                <a:spcPct val="125000"/>
               </a:lnSpc>
               <a:spcBef>
                 <a:spcPts val="200"/>
@@ -13685,7 +13652,7 @@
           <a:p>
             <a:pPr algn="l">
               <a:lnSpc>
-                <a:spcPts val="1820"/>
+                <a:spcPct val="125000"/>
               </a:lnSpc>
               <a:spcBef>
                 <a:spcPts val="200"/>
@@ -13707,7 +13674,7 @@
           <a:p>
             <a:pPr algn="l">
               <a:lnSpc>
-                <a:spcPts val="2080"/>
+                <a:spcPct val="125000"/>
               </a:lnSpc>
               <a:spcBef>
                 <a:spcPts val="800"/>
@@ -13729,7 +13696,7 @@
           <a:p>
             <a:pPr algn="l">
               <a:lnSpc>
-                <a:spcPts val="1820"/>
+                <a:spcPct val="125000"/>
               </a:lnSpc>
               <a:spcBef>
                 <a:spcPts val="200"/>
@@ -13751,7 +13718,7 @@
           <a:p>
             <a:pPr algn="l">
               <a:lnSpc>
-                <a:spcPts val="2080"/>
+                <a:spcPct val="125000"/>
               </a:lnSpc>
               <a:spcBef>
                 <a:spcPts val="800"/>
@@ -13773,7 +13740,7 @@
           <a:p>
             <a:pPr algn="l">
               <a:lnSpc>
-                <a:spcPts val="1820"/>
+                <a:spcPct val="125000"/>
               </a:lnSpc>
               <a:spcBef>
                 <a:spcPts val="200"/>
@@ -13884,11 +13851,10 @@
             <a:spAutoFit/>
           </a:bodyPr>
           <a:lstStyle/>
-          <a:p/>
-          <a:p>
-            <a:pPr algn="l">
-              <a:lnSpc>
-                <a:spcPts val="2080"/>
+          <a:p>
+            <a:pPr algn="l">
+              <a:lnSpc>
+                <a:spcPct val="125000"/>
               </a:lnSpc>
               <a:spcBef>
                 <a:spcPts val="0"/>
@@ -13910,7 +13876,7 @@
           <a:p>
             <a:pPr algn="l">
               <a:lnSpc>
-                <a:spcPts val="2080"/>
+                <a:spcPct val="125000"/>
               </a:lnSpc>
               <a:spcBef>
                 <a:spcPts val="800"/>
@@ -13932,7 +13898,7 @@
           <a:p>
             <a:pPr algn="l">
               <a:lnSpc>
-                <a:spcPts val="1820"/>
+                <a:spcPct val="125000"/>
               </a:lnSpc>
               <a:spcBef>
                 <a:spcPts val="200"/>
@@ -13954,7 +13920,7 @@
           <a:p>
             <a:pPr algn="l">
               <a:lnSpc>
-                <a:spcPts val="2080"/>
+                <a:spcPct val="125000"/>
               </a:lnSpc>
               <a:spcBef>
                 <a:spcPts val="800"/>
@@ -13976,7 +13942,7 @@
           <a:p>
             <a:pPr algn="l">
               <a:lnSpc>
-                <a:spcPts val="1820"/>
+                <a:spcPct val="125000"/>
               </a:lnSpc>
               <a:spcBef>
                 <a:spcPts val="200"/>
@@ -13998,7 +13964,7 @@
           <a:p>
             <a:pPr algn="l">
               <a:lnSpc>
-                <a:spcPts val="2080"/>
+                <a:spcPct val="125000"/>
               </a:lnSpc>
               <a:spcBef>
                 <a:spcPts val="800"/>
@@ -14020,7 +13986,7 @@
           <a:p>
             <a:pPr algn="l">
               <a:lnSpc>
-                <a:spcPts val="1820"/>
+                <a:spcPct val="125000"/>
               </a:lnSpc>
               <a:spcBef>
                 <a:spcPts val="200"/>
@@ -14042,7 +14008,7 @@
           <a:p>
             <a:pPr algn="l">
               <a:lnSpc>
-                <a:spcPts val="2080"/>
+                <a:spcPct val="125000"/>
               </a:lnSpc>
               <a:spcBef>
                 <a:spcPts val="800"/>
@@ -14064,7 +14030,7 @@
           <a:p>
             <a:pPr algn="l">
               <a:lnSpc>
-                <a:spcPts val="1820"/>
+                <a:spcPct val="125000"/>
               </a:lnSpc>
               <a:spcBef>
                 <a:spcPts val="200"/>
@@ -14175,11 +14141,10 @@
             <a:spAutoFit/>
           </a:bodyPr>
           <a:lstStyle/>
-          <a:p/>
-          <a:p>
-            <a:pPr algn="l">
-              <a:lnSpc>
-                <a:spcPts val="2080"/>
+          <a:p>
+            <a:pPr algn="l">
+              <a:lnSpc>
+                <a:spcPct val="125000"/>
               </a:lnSpc>
               <a:spcBef>
                 <a:spcPts val="0"/>
@@ -14201,7 +14166,7 @@
           <a:p>
             <a:pPr algn="l">
               <a:lnSpc>
-                <a:spcPts val="2080"/>
+                <a:spcPct val="125000"/>
               </a:lnSpc>
               <a:spcBef>
                 <a:spcPts val="800"/>
@@ -14223,7 +14188,7 @@
           <a:p>
             <a:pPr algn="l">
               <a:lnSpc>
-                <a:spcPts val="1820"/>
+                <a:spcPct val="125000"/>
               </a:lnSpc>
               <a:spcBef>
                 <a:spcPts val="200"/>
@@ -14245,7 +14210,7 @@
           <a:p>
             <a:pPr algn="l">
               <a:lnSpc>
-                <a:spcPts val="2080"/>
+                <a:spcPct val="125000"/>
               </a:lnSpc>
               <a:spcBef>
                 <a:spcPts val="800"/>
@@ -14267,7 +14232,7 @@
           <a:p>
             <a:pPr algn="l">
               <a:lnSpc>
-                <a:spcPts val="1820"/>
+                <a:spcPct val="125000"/>
               </a:lnSpc>
               <a:spcBef>
                 <a:spcPts val="200"/>
@@ -14289,7 +14254,7 @@
           <a:p>
             <a:pPr algn="l">
               <a:lnSpc>
-                <a:spcPts val="1820"/>
+                <a:spcPct val="125000"/>
               </a:lnSpc>
               <a:spcBef>
                 <a:spcPts val="200"/>
@@ -14311,7 +14276,7 @@
           <a:p>
             <a:pPr algn="l">
               <a:lnSpc>
-                <a:spcPts val="2080"/>
+                <a:spcPct val="125000"/>
               </a:lnSpc>
               <a:spcBef>
                 <a:spcPts val="800"/>
@@ -14333,7 +14298,7 @@
           <a:p>
             <a:pPr algn="l">
               <a:lnSpc>
-                <a:spcPts val="1820"/>
+                <a:spcPct val="125000"/>
               </a:lnSpc>
               <a:spcBef>
                 <a:spcPts val="200"/>
@@ -14355,7 +14320,7 @@
           <a:p>
             <a:pPr algn="l">
               <a:lnSpc>
-                <a:spcPts val="2080"/>
+                <a:spcPct val="125000"/>
               </a:lnSpc>
               <a:spcBef>
                 <a:spcPts val="800"/>
@@ -14377,7 +14342,7 @@
           <a:p>
             <a:pPr algn="l">
               <a:lnSpc>
-                <a:spcPts val="1820"/>
+                <a:spcPct val="125000"/>
               </a:lnSpc>
               <a:spcBef>
                 <a:spcPts val="200"/>
@@ -14488,11 +14453,10 @@
             <a:spAutoFit/>
           </a:bodyPr>
           <a:lstStyle/>
-          <a:p/>
-          <a:p>
-            <a:pPr algn="l">
-              <a:lnSpc>
-                <a:spcPts val="2080"/>
+          <a:p>
+            <a:pPr algn="l">
+              <a:lnSpc>
+                <a:spcPct val="125000"/>
               </a:lnSpc>
               <a:spcBef>
                 <a:spcPts val="0"/>
@@ -14514,7 +14478,7 @@
           <a:p>
             <a:pPr algn="l">
               <a:lnSpc>
-                <a:spcPts val="2080"/>
+                <a:spcPct val="125000"/>
               </a:lnSpc>
               <a:spcBef>
                 <a:spcPts val="800"/>
@@ -14536,7 +14500,7 @@
           <a:p>
             <a:pPr algn="l">
               <a:lnSpc>
-                <a:spcPts val="1820"/>
+                <a:spcPct val="125000"/>
               </a:lnSpc>
               <a:spcBef>
                 <a:spcPts val="200"/>
@@ -14558,7 +14522,7 @@
           <a:p>
             <a:pPr algn="l">
               <a:lnSpc>
-                <a:spcPts val="2080"/>
+                <a:spcPct val="125000"/>
               </a:lnSpc>
               <a:spcBef>
                 <a:spcPts val="800"/>
@@ -14580,7 +14544,7 @@
           <a:p>
             <a:pPr algn="l">
               <a:lnSpc>
-                <a:spcPts val="1820"/>
+                <a:spcPct val="125000"/>
               </a:lnSpc>
               <a:spcBef>
                 <a:spcPts val="200"/>
@@ -14602,7 +14566,7 @@
           <a:p>
             <a:pPr algn="l">
               <a:lnSpc>
-                <a:spcPts val="1820"/>
+                <a:spcPct val="125000"/>
               </a:lnSpc>
               <a:spcBef>
                 <a:spcPts val="200"/>
@@ -14624,7 +14588,7 @@
           <a:p>
             <a:pPr algn="l">
               <a:lnSpc>
-                <a:spcPts val="1820"/>
+                <a:spcPct val="125000"/>
               </a:lnSpc>
               <a:spcBef>
                 <a:spcPts val="200"/>
@@ -14646,7 +14610,7 @@
           <a:p>
             <a:pPr algn="l">
               <a:lnSpc>
-                <a:spcPts val="2080"/>
+                <a:spcPct val="125000"/>
               </a:lnSpc>
               <a:spcBef>
                 <a:spcPts val="800"/>
@@ -14668,7 +14632,7 @@
           <a:p>
             <a:pPr algn="l">
               <a:lnSpc>
-                <a:spcPts val="1820"/>
+                <a:spcPct val="125000"/>
               </a:lnSpc>
               <a:spcBef>
                 <a:spcPts val="200"/>
@@ -14690,7 +14654,7 @@
           <a:p>
             <a:pPr algn="l">
               <a:lnSpc>
-                <a:spcPts val="2080"/>
+                <a:spcPct val="125000"/>
               </a:lnSpc>
               <a:spcBef>
                 <a:spcPts val="800"/>
@@ -14712,7 +14676,7 @@
           <a:p>
             <a:pPr algn="l">
               <a:lnSpc>
-                <a:spcPts val="1820"/>
+                <a:spcPct val="125000"/>
               </a:lnSpc>
               <a:spcBef>
                 <a:spcPts val="200"/>
@@ -14823,11 +14787,10 @@
             <a:spAutoFit/>
           </a:bodyPr>
           <a:lstStyle/>
-          <a:p/>
-          <a:p>
-            <a:pPr algn="l">
-              <a:lnSpc>
-                <a:spcPts val="2080"/>
+          <a:p>
+            <a:pPr algn="l">
+              <a:lnSpc>
+                <a:spcPct val="125000"/>
               </a:lnSpc>
               <a:spcBef>
                 <a:spcPts val="0"/>
@@ -14849,7 +14812,7 @@
           <a:p>
             <a:pPr algn="l">
               <a:lnSpc>
-                <a:spcPts val="2080"/>
+                <a:spcPct val="125000"/>
               </a:lnSpc>
               <a:spcBef>
                 <a:spcPts val="800"/>
@@ -14871,7 +14834,7 @@
           <a:p>
             <a:pPr algn="l">
               <a:lnSpc>
-                <a:spcPts val="1820"/>
+                <a:spcPct val="125000"/>
               </a:lnSpc>
               <a:spcBef>
                 <a:spcPts val="200"/>
@@ -14893,7 +14856,7 @@
           <a:p>
             <a:pPr algn="l">
               <a:lnSpc>
-                <a:spcPts val="2080"/>
+                <a:spcPct val="125000"/>
               </a:lnSpc>
               <a:spcBef>
                 <a:spcPts val="800"/>
@@ -14915,7 +14878,7 @@
           <a:p>
             <a:pPr algn="l">
               <a:lnSpc>
-                <a:spcPts val="1820"/>
+                <a:spcPct val="125000"/>
               </a:lnSpc>
               <a:spcBef>
                 <a:spcPts val="200"/>
@@ -14937,7 +14900,7 @@
           <a:p>
             <a:pPr algn="l">
               <a:lnSpc>
-                <a:spcPts val="1820"/>
+                <a:spcPct val="125000"/>
               </a:lnSpc>
               <a:spcBef>
                 <a:spcPts val="200"/>
@@ -14959,7 +14922,7 @@
           <a:p>
             <a:pPr algn="l">
               <a:lnSpc>
-                <a:spcPts val="1820"/>
+                <a:spcPct val="125000"/>
               </a:lnSpc>
               <a:spcBef>
                 <a:spcPts val="200"/>
@@ -14981,7 +14944,7 @@
           <a:p>
             <a:pPr algn="l">
               <a:lnSpc>
-                <a:spcPts val="1820"/>
+                <a:spcPct val="125000"/>
               </a:lnSpc>
               <a:spcBef>
                 <a:spcPts val="200"/>
@@ -15003,7 +14966,7 @@
           <a:p>
             <a:pPr algn="l">
               <a:lnSpc>
-                <a:spcPts val="2080"/>
+                <a:spcPct val="125000"/>
               </a:lnSpc>
               <a:spcBef>
                 <a:spcPts val="800"/>
@@ -15025,7 +14988,7 @@
           <a:p>
             <a:pPr algn="l">
               <a:lnSpc>
-                <a:spcPts val="1820"/>
+                <a:spcPct val="125000"/>
               </a:lnSpc>
               <a:spcBef>
                 <a:spcPts val="200"/>
@@ -15047,7 +15010,7 @@
           <a:p>
             <a:pPr algn="l">
               <a:lnSpc>
-                <a:spcPts val="2080"/>
+                <a:spcPct val="125000"/>
               </a:lnSpc>
               <a:spcBef>
                 <a:spcPts val="800"/>
@@ -15069,7 +15032,7 @@
           <a:p>
             <a:pPr algn="l">
               <a:lnSpc>
-                <a:spcPts val="1820"/>
+                <a:spcPct val="125000"/>
               </a:lnSpc>
               <a:spcBef>
                 <a:spcPts val="200"/>
@@ -15180,11 +15143,10 @@
             <a:spAutoFit/>
           </a:bodyPr>
           <a:lstStyle/>
-          <a:p/>
-          <a:p>
-            <a:pPr algn="l">
-              <a:lnSpc>
-                <a:spcPts val="2080"/>
+          <a:p>
+            <a:pPr algn="l">
+              <a:lnSpc>
+                <a:spcPct val="125000"/>
               </a:lnSpc>
               <a:spcBef>
                 <a:spcPts val="0"/>
@@ -15206,7 +15168,7 @@
           <a:p>
             <a:pPr algn="l">
               <a:lnSpc>
-                <a:spcPts val="2080"/>
+                <a:spcPct val="125000"/>
               </a:lnSpc>
               <a:spcBef>
                 <a:spcPts val="800"/>
@@ -15228,7 +15190,7 @@
           <a:p>
             <a:pPr algn="l">
               <a:lnSpc>
-                <a:spcPts val="1820"/>
+                <a:spcPct val="125000"/>
               </a:lnSpc>
               <a:spcBef>
                 <a:spcPts val="200"/>
@@ -15250,7 +15212,7 @@
           <a:p>
             <a:pPr algn="l">
               <a:lnSpc>
-                <a:spcPts val="1820"/>
+                <a:spcPct val="125000"/>
               </a:lnSpc>
               <a:spcBef>
                 <a:spcPts val="200"/>
@@ -15272,7 +15234,7 @@
           <a:p>
             <a:pPr algn="l">
               <a:lnSpc>
-                <a:spcPts val="2080"/>
+                <a:spcPct val="125000"/>
               </a:lnSpc>
               <a:spcBef>
                 <a:spcPts val="800"/>
@@ -15294,7 +15256,7 @@
           <a:p>
             <a:pPr algn="l">
               <a:lnSpc>
-                <a:spcPts val="1820"/>
+                <a:spcPct val="125000"/>
               </a:lnSpc>
               <a:spcBef>
                 <a:spcPts val="200"/>
@@ -15316,7 +15278,7 @@
           <a:p>
             <a:pPr algn="l">
               <a:lnSpc>
-                <a:spcPts val="1820"/>
+                <a:spcPct val="125000"/>
               </a:lnSpc>
               <a:spcBef>
                 <a:spcPts val="200"/>
@@ -15338,7 +15300,7 @@
           <a:p>
             <a:pPr algn="l">
               <a:lnSpc>
-                <a:spcPts val="1820"/>
+                <a:spcPct val="125000"/>
               </a:lnSpc>
               <a:spcBef>
                 <a:spcPts val="200"/>
@@ -15360,7 +15322,7 @@
           <a:p>
             <a:pPr algn="l">
               <a:lnSpc>
-                <a:spcPts val="2080"/>
+                <a:spcPct val="125000"/>
               </a:lnSpc>
               <a:spcBef>
                 <a:spcPts val="800"/>
@@ -15382,7 +15344,7 @@
           <a:p>
             <a:pPr algn="l">
               <a:lnSpc>
-                <a:spcPts val="1820"/>
+                <a:spcPct val="125000"/>
               </a:lnSpc>
               <a:spcBef>
                 <a:spcPts val="200"/>
@@ -15404,7 +15366,7 @@
           <a:p>
             <a:pPr algn="l">
               <a:lnSpc>
-                <a:spcPts val="2080"/>
+                <a:spcPct val="125000"/>
               </a:lnSpc>
               <a:spcBef>
                 <a:spcPts val="800"/>
@@ -15426,7 +15388,7 @@
           <a:p>
             <a:pPr algn="l">
               <a:lnSpc>
-                <a:spcPts val="1820"/>
+                <a:spcPct val="125000"/>
               </a:lnSpc>
               <a:spcBef>
                 <a:spcPts val="200"/>
@@ -15537,11 +15499,10 @@
             <a:spAutoFit/>
           </a:bodyPr>
           <a:lstStyle/>
-          <a:p/>
-          <a:p>
-            <a:pPr algn="l">
-              <a:lnSpc>
-                <a:spcPts val="2080"/>
+          <a:p>
+            <a:pPr algn="l">
+              <a:lnSpc>
+                <a:spcPct val="125000"/>
               </a:lnSpc>
               <a:spcBef>
                 <a:spcPts val="0"/>
@@ -15563,7 +15524,7 @@
           <a:p>
             <a:pPr algn="l">
               <a:lnSpc>
-                <a:spcPts val="2080"/>
+                <a:spcPct val="125000"/>
               </a:lnSpc>
               <a:spcBef>
                 <a:spcPts val="800"/>
@@ -15585,7 +15546,7 @@
           <a:p>
             <a:pPr algn="l">
               <a:lnSpc>
-                <a:spcPts val="1820"/>
+                <a:spcPct val="125000"/>
               </a:lnSpc>
               <a:spcBef>
                 <a:spcPts val="200"/>
@@ -15607,7 +15568,7 @@
           <a:p>
             <a:pPr algn="l">
               <a:lnSpc>
-                <a:spcPts val="2080"/>
+                <a:spcPct val="125000"/>
               </a:lnSpc>
               <a:spcBef>
                 <a:spcPts val="800"/>
@@ -15629,7 +15590,7 @@
           <a:p>
             <a:pPr algn="l">
               <a:lnSpc>
-                <a:spcPts val="1820"/>
+                <a:spcPct val="125000"/>
               </a:lnSpc>
               <a:spcBef>
                 <a:spcPts val="200"/>
@@ -15651,7 +15612,7 @@
           <a:p>
             <a:pPr algn="l">
               <a:lnSpc>
-                <a:spcPts val="2080"/>
+                <a:spcPct val="125000"/>
               </a:lnSpc>
               <a:spcBef>
                 <a:spcPts val="800"/>
@@ -15673,7 +15634,7 @@
           <a:p>
             <a:pPr algn="l">
               <a:lnSpc>
-                <a:spcPts val="1820"/>
+                <a:spcPct val="125000"/>
               </a:lnSpc>
               <a:spcBef>
                 <a:spcPts val="200"/>
@@ -15695,7 +15656,7 @@
           <a:p>
             <a:pPr algn="l">
               <a:lnSpc>
-                <a:spcPts val="2080"/>
+                <a:spcPct val="125000"/>
               </a:lnSpc>
               <a:spcBef>
                 <a:spcPts val="800"/>
@@ -15717,7 +15678,7 @@
           <a:p>
             <a:pPr algn="l">
               <a:lnSpc>
-                <a:spcPts val="1820"/>
+                <a:spcPct val="125000"/>
               </a:lnSpc>
               <a:spcBef>
                 <a:spcPts val="200"/>
@@ -15828,11 +15789,10 @@
             <a:spAutoFit/>
           </a:bodyPr>
           <a:lstStyle/>
-          <a:p/>
-          <a:p>
-            <a:pPr algn="l">
-              <a:lnSpc>
-                <a:spcPts val="2080"/>
+          <a:p>
+            <a:pPr algn="l">
+              <a:lnSpc>
+                <a:spcPct val="125000"/>
               </a:lnSpc>
               <a:spcBef>
                 <a:spcPts val="0"/>
@@ -15854,7 +15814,7 @@
           <a:p>
             <a:pPr algn="l">
               <a:lnSpc>
-                <a:spcPts val="2080"/>
+                <a:spcPct val="125000"/>
               </a:lnSpc>
               <a:spcBef>
                 <a:spcPts val="800"/>
@@ -15876,7 +15836,7 @@
           <a:p>
             <a:pPr algn="l">
               <a:lnSpc>
-                <a:spcPts val="1820"/>
+                <a:spcPct val="125000"/>
               </a:lnSpc>
               <a:spcBef>
                 <a:spcPts val="200"/>
@@ -15898,7 +15858,7 @@
           <a:p>
             <a:pPr algn="l">
               <a:lnSpc>
-                <a:spcPts val="2080"/>
+                <a:spcPct val="125000"/>
               </a:lnSpc>
               <a:spcBef>
                 <a:spcPts val="800"/>
@@ -15920,7 +15880,7 @@
           <a:p>
             <a:pPr algn="l">
               <a:lnSpc>
-                <a:spcPts val="1820"/>
+                <a:spcPct val="125000"/>
               </a:lnSpc>
               <a:spcBef>
                 <a:spcPts val="200"/>
@@ -15942,7 +15902,7 @@
           <a:p>
             <a:pPr algn="l">
               <a:lnSpc>
-                <a:spcPts val="2080"/>
+                <a:spcPct val="125000"/>
               </a:lnSpc>
               <a:spcBef>
                 <a:spcPts val="800"/>
@@ -15964,7 +15924,7 @@
           <a:p>
             <a:pPr algn="l">
               <a:lnSpc>
-                <a:spcPts val="1820"/>
+                <a:spcPct val="125000"/>
               </a:lnSpc>
               <a:spcBef>
                 <a:spcPts val="200"/>
@@ -15986,7 +15946,7 @@
           <a:p>
             <a:pPr algn="l">
               <a:lnSpc>
-                <a:spcPts val="2080"/>
+                <a:spcPct val="125000"/>
               </a:lnSpc>
               <a:spcBef>
                 <a:spcPts val="800"/>
@@ -16008,7 +15968,7 @@
           <a:p>
             <a:pPr algn="l">
               <a:lnSpc>
-                <a:spcPts val="1820"/>
+                <a:spcPct val="125000"/>
               </a:lnSpc>
               <a:spcBef>
                 <a:spcPts val="200"/>
@@ -16119,11 +16079,10 @@
             <a:spAutoFit/>
           </a:bodyPr>
           <a:lstStyle/>
-          <a:p/>
-          <a:p>
-            <a:pPr algn="l">
-              <a:lnSpc>
-                <a:spcPts val="2080"/>
+          <a:p>
+            <a:pPr algn="l">
+              <a:lnSpc>
+                <a:spcPct val="125000"/>
               </a:lnSpc>
               <a:spcBef>
                 <a:spcPts val="0"/>
@@ -16145,7 +16104,7 @@
           <a:p>
             <a:pPr algn="l">
               <a:lnSpc>
-                <a:spcPts val="2080"/>
+                <a:spcPct val="125000"/>
               </a:lnSpc>
               <a:spcBef>
                 <a:spcPts val="800"/>
@@ -16167,7 +16126,7 @@
           <a:p>
             <a:pPr algn="l">
               <a:lnSpc>
-                <a:spcPts val="1820"/>
+                <a:spcPct val="125000"/>
               </a:lnSpc>
               <a:spcBef>
                 <a:spcPts val="200"/>
@@ -16189,7 +16148,7 @@
           <a:p>
             <a:pPr algn="l">
               <a:lnSpc>
-                <a:spcPts val="2080"/>
+                <a:spcPct val="125000"/>
               </a:lnSpc>
               <a:spcBef>
                 <a:spcPts val="800"/>
@@ -16211,7 +16170,7 @@
           <a:p>
             <a:pPr algn="l">
               <a:lnSpc>
-                <a:spcPts val="1820"/>
+                <a:spcPct val="125000"/>
               </a:lnSpc>
               <a:spcBef>
                 <a:spcPts val="200"/>
@@ -16233,7 +16192,7 @@
           <a:p>
             <a:pPr algn="l">
               <a:lnSpc>
-                <a:spcPts val="1820"/>
+                <a:spcPct val="125000"/>
               </a:lnSpc>
               <a:spcBef>
                 <a:spcPts val="200"/>
@@ -16255,7 +16214,7 @@
           <a:p>
             <a:pPr algn="l">
               <a:lnSpc>
-                <a:spcPts val="1820"/>
+                <a:spcPct val="125000"/>
               </a:lnSpc>
               <a:spcBef>
                 <a:spcPts val="200"/>
@@ -16277,7 +16236,7 @@
           <a:p>
             <a:pPr algn="l">
               <a:lnSpc>
-                <a:spcPts val="1820"/>
+                <a:spcPct val="125000"/>
               </a:lnSpc>
               <a:spcBef>
                 <a:spcPts val="200"/>
@@ -16299,7 +16258,7 @@
           <a:p>
             <a:pPr algn="l">
               <a:lnSpc>
-                <a:spcPts val="2080"/>
+                <a:spcPct val="125000"/>
               </a:lnSpc>
               <a:spcBef>
                 <a:spcPts val="800"/>
@@ -16321,7 +16280,7 @@
           <a:p>
             <a:pPr algn="l">
               <a:lnSpc>
-                <a:spcPts val="1820"/>
+                <a:spcPct val="125000"/>
               </a:lnSpc>
               <a:spcBef>
                 <a:spcPts val="200"/>
@@ -16343,7 +16302,7 @@
           <a:p>
             <a:pPr algn="l">
               <a:lnSpc>
-                <a:spcPts val="2080"/>
+                <a:spcPct val="125000"/>
               </a:lnSpc>
               <a:spcBef>
                 <a:spcPts val="800"/>
@@ -16365,7 +16324,7 @@
           <a:p>
             <a:pPr algn="l">
               <a:lnSpc>
-                <a:spcPts val="1820"/>
+                <a:spcPct val="125000"/>
               </a:lnSpc>
               <a:spcBef>
                 <a:spcPts val="200"/>
@@ -16476,11 +16435,10 @@
             <a:spAutoFit/>
           </a:bodyPr>
           <a:lstStyle/>
-          <a:p/>
-          <a:p>
-            <a:pPr algn="l">
-              <a:lnSpc>
-                <a:spcPts val="2080"/>
+          <a:p>
+            <a:pPr algn="l">
+              <a:lnSpc>
+                <a:spcPct val="125000"/>
               </a:lnSpc>
               <a:spcBef>
                 <a:spcPts val="0"/>
@@ -16502,7 +16460,7 @@
           <a:p>
             <a:pPr algn="l">
               <a:lnSpc>
-                <a:spcPts val="2080"/>
+                <a:spcPct val="125000"/>
               </a:lnSpc>
               <a:spcBef>
                 <a:spcPts val="800"/>
@@ -16524,7 +16482,7 @@
           <a:p>
             <a:pPr algn="l">
               <a:lnSpc>
-                <a:spcPts val="1820"/>
+                <a:spcPct val="125000"/>
               </a:lnSpc>
               <a:spcBef>
                 <a:spcPts val="200"/>
@@ -16546,7 +16504,7 @@
           <a:p>
             <a:pPr algn="l">
               <a:lnSpc>
-                <a:spcPts val="2080"/>
+                <a:spcPct val="125000"/>
               </a:lnSpc>
               <a:spcBef>
                 <a:spcPts val="800"/>
@@ -16568,7 +16526,7 @@
           <a:p>
             <a:pPr algn="l">
               <a:lnSpc>
-                <a:spcPts val="1820"/>
+                <a:spcPct val="125000"/>
               </a:lnSpc>
               <a:spcBef>
                 <a:spcPts val="200"/>
@@ -16590,7 +16548,7 @@
           <a:p>
             <a:pPr algn="l">
               <a:lnSpc>
-                <a:spcPts val="2080"/>
+                <a:spcPct val="125000"/>
               </a:lnSpc>
               <a:spcBef>
                 <a:spcPts val="800"/>
@@ -16612,7 +16570,7 @@
           <a:p>
             <a:pPr algn="l">
               <a:lnSpc>
-                <a:spcPts val="1820"/>
+                <a:spcPct val="125000"/>
               </a:lnSpc>
               <a:spcBef>
                 <a:spcPts val="200"/>
@@ -16634,7 +16592,7 @@
           <a:p>
             <a:pPr algn="l">
               <a:lnSpc>
-                <a:spcPts val="2080"/>
+                <a:spcPct val="125000"/>
               </a:lnSpc>
               <a:spcBef>
                 <a:spcPts val="800"/>
@@ -16656,7 +16614,7 @@
           <a:p>
             <a:pPr algn="l">
               <a:lnSpc>
-                <a:spcPts val="1820"/>
+                <a:spcPct val="125000"/>
               </a:lnSpc>
               <a:spcBef>
                 <a:spcPts val="200"/>
@@ -16767,11 +16725,10 @@
             <a:spAutoFit/>
           </a:bodyPr>
           <a:lstStyle/>
-          <a:p/>
-          <a:p>
-            <a:pPr algn="l">
-              <a:lnSpc>
-                <a:spcPts val="2080"/>
+          <a:p>
+            <a:pPr algn="l">
+              <a:lnSpc>
+                <a:spcPct val="125000"/>
               </a:lnSpc>
               <a:spcBef>
                 <a:spcPts val="0"/>
@@ -16793,7 +16750,7 @@
           <a:p>
             <a:pPr algn="l">
               <a:lnSpc>
-                <a:spcPts val="2080"/>
+                <a:spcPct val="125000"/>
               </a:lnSpc>
               <a:spcBef>
                 <a:spcPts val="800"/>
@@ -16815,7 +16772,7 @@
           <a:p>
             <a:pPr algn="l">
               <a:lnSpc>
-                <a:spcPts val="1820"/>
+                <a:spcPct val="125000"/>
               </a:lnSpc>
               <a:spcBef>
                 <a:spcPts val="200"/>
@@ -16837,7 +16794,7 @@
           <a:p>
             <a:pPr algn="l">
               <a:lnSpc>
-                <a:spcPts val="2080"/>
+                <a:spcPct val="125000"/>
               </a:lnSpc>
               <a:spcBef>
                 <a:spcPts val="800"/>
@@ -16859,7 +16816,7 @@
           <a:p>
             <a:pPr algn="l">
               <a:lnSpc>
-                <a:spcPts val="1820"/>
+                <a:spcPct val="125000"/>
               </a:lnSpc>
               <a:spcBef>
                 <a:spcPts val="200"/>
@@ -16881,7 +16838,7 @@
           <a:p>
             <a:pPr algn="l">
               <a:lnSpc>
-                <a:spcPts val="2080"/>
+                <a:spcPct val="125000"/>
               </a:lnSpc>
               <a:spcBef>
                 <a:spcPts val="800"/>
@@ -16903,7 +16860,7 @@
           <a:p>
             <a:pPr algn="l">
               <a:lnSpc>
-                <a:spcPts val="1820"/>
+                <a:spcPct val="125000"/>
               </a:lnSpc>
               <a:spcBef>
                 <a:spcPts val="200"/>
@@ -16925,7 +16882,7 @@
           <a:p>
             <a:pPr algn="l">
               <a:lnSpc>
-                <a:spcPts val="2080"/>
+                <a:spcPct val="125000"/>
               </a:lnSpc>
               <a:spcBef>
                 <a:spcPts val="800"/>
@@ -16947,7 +16904,7 @@
           <a:p>
             <a:pPr algn="l">
               <a:lnSpc>
-                <a:spcPts val="1820"/>
+                <a:spcPct val="125000"/>
               </a:lnSpc>
               <a:spcBef>
                 <a:spcPts val="200"/>
@@ -17058,11 +17015,10 @@
             <a:spAutoFit/>
           </a:bodyPr>
           <a:lstStyle/>
-          <a:p/>
-          <a:p>
-            <a:pPr algn="l">
-              <a:lnSpc>
-                <a:spcPts val="2080"/>
+          <a:p>
+            <a:pPr algn="l">
+              <a:lnSpc>
+                <a:spcPct val="125000"/>
               </a:lnSpc>
               <a:spcBef>
                 <a:spcPts val="0"/>
@@ -17084,7 +17040,7 @@
           <a:p>
             <a:pPr algn="l">
               <a:lnSpc>
-                <a:spcPts val="2080"/>
+                <a:spcPct val="125000"/>
               </a:lnSpc>
               <a:spcBef>
                 <a:spcPts val="800"/>
@@ -17106,7 +17062,7 @@
           <a:p>
             <a:pPr algn="l">
               <a:lnSpc>
-                <a:spcPts val="1820"/>
+                <a:spcPct val="125000"/>
               </a:lnSpc>
               <a:spcBef>
                 <a:spcPts val="200"/>
@@ -17128,7 +17084,7 @@
           <a:p>
             <a:pPr algn="l">
               <a:lnSpc>
-                <a:spcPts val="2080"/>
+                <a:spcPct val="125000"/>
               </a:lnSpc>
               <a:spcBef>
                 <a:spcPts val="800"/>
@@ -17150,7 +17106,7 @@
           <a:p>
             <a:pPr algn="l">
               <a:lnSpc>
-                <a:spcPts val="1820"/>
+                <a:spcPct val="125000"/>
               </a:lnSpc>
               <a:spcBef>
                 <a:spcPts val="200"/>
@@ -17172,7 +17128,7 @@
           <a:p>
             <a:pPr algn="l">
               <a:lnSpc>
-                <a:spcPts val="2080"/>
+                <a:spcPct val="125000"/>
               </a:lnSpc>
               <a:spcBef>
                 <a:spcPts val="800"/>
@@ -17194,7 +17150,7 @@
           <a:p>
             <a:pPr algn="l">
               <a:lnSpc>
-                <a:spcPts val="1820"/>
+                <a:spcPct val="125000"/>
               </a:lnSpc>
               <a:spcBef>
                 <a:spcPts val="200"/>
@@ -17216,7 +17172,7 @@
           <a:p>
             <a:pPr algn="l">
               <a:lnSpc>
-                <a:spcPts val="2080"/>
+                <a:spcPct val="125000"/>
               </a:lnSpc>
               <a:spcBef>
                 <a:spcPts val="800"/>
@@ -17238,7 +17194,7 @@
           <a:p>
             <a:pPr algn="l">
               <a:lnSpc>
-                <a:spcPts val="1820"/>
+                <a:spcPct val="125000"/>
               </a:lnSpc>
               <a:spcBef>
                 <a:spcPts val="200"/>
@@ -17349,11 +17305,10 @@
             <a:spAutoFit/>
           </a:bodyPr>
           <a:lstStyle/>
-          <a:p/>
-          <a:p>
-            <a:pPr algn="l">
-              <a:lnSpc>
-                <a:spcPts val="2080"/>
+          <a:p>
+            <a:pPr algn="l">
+              <a:lnSpc>
+                <a:spcPct val="125000"/>
               </a:lnSpc>
               <a:spcBef>
                 <a:spcPts val="0"/>
@@ -17375,7 +17330,7 @@
           <a:p>
             <a:pPr algn="l">
               <a:lnSpc>
-                <a:spcPts val="2080"/>
+                <a:spcPct val="125000"/>
               </a:lnSpc>
               <a:spcBef>
                 <a:spcPts val="800"/>
@@ -17397,7 +17352,7 @@
           <a:p>
             <a:pPr algn="l">
               <a:lnSpc>
-                <a:spcPts val="1820"/>
+                <a:spcPct val="125000"/>
               </a:lnSpc>
               <a:spcBef>
                 <a:spcPts val="200"/>
@@ -17419,7 +17374,7 @@
           <a:p>
             <a:pPr algn="l">
               <a:lnSpc>
-                <a:spcPts val="2080"/>
+                <a:spcPct val="125000"/>
               </a:lnSpc>
               <a:spcBef>
                 <a:spcPts val="800"/>
@@ -17441,7 +17396,7 @@
           <a:p>
             <a:pPr algn="l">
               <a:lnSpc>
-                <a:spcPts val="1820"/>
+                <a:spcPct val="125000"/>
               </a:lnSpc>
               <a:spcBef>
                 <a:spcPts val="200"/>
@@ -17463,7 +17418,7 @@
           <a:p>
             <a:pPr algn="l">
               <a:lnSpc>
-                <a:spcPts val="1820"/>
+                <a:spcPct val="125000"/>
               </a:lnSpc>
               <a:spcBef>
                 <a:spcPts val="200"/>
@@ -17485,7 +17440,7 @@
           <a:p>
             <a:pPr algn="l">
               <a:lnSpc>
-                <a:spcPts val="2080"/>
+                <a:spcPct val="125000"/>
               </a:lnSpc>
               <a:spcBef>
                 <a:spcPts val="800"/>
@@ -17507,7 +17462,7 @@
           <a:p>
             <a:pPr algn="l">
               <a:lnSpc>
-                <a:spcPts val="1820"/>
+                <a:spcPct val="125000"/>
               </a:lnSpc>
               <a:spcBef>
                 <a:spcPts val="200"/>
@@ -17529,7 +17484,7 @@
           <a:p>
             <a:pPr algn="l">
               <a:lnSpc>
-                <a:spcPts val="2080"/>
+                <a:spcPct val="125000"/>
               </a:lnSpc>
               <a:spcBef>
                 <a:spcPts val="800"/>
@@ -17551,7 +17506,7 @@
           <a:p>
             <a:pPr algn="l">
               <a:lnSpc>
-                <a:spcPts val="1820"/>
+                <a:spcPct val="125000"/>
               </a:lnSpc>
               <a:spcBef>
                 <a:spcPts val="200"/>
@@ -17662,11 +17617,10 @@
             <a:spAutoFit/>
           </a:bodyPr>
           <a:lstStyle/>
-          <a:p/>
-          <a:p>
-            <a:pPr algn="l">
-              <a:lnSpc>
-                <a:spcPts val="2080"/>
+          <a:p>
+            <a:pPr algn="l">
+              <a:lnSpc>
+                <a:spcPct val="125000"/>
               </a:lnSpc>
               <a:spcBef>
                 <a:spcPts val="0"/>
@@ -17688,7 +17642,7 @@
           <a:p>
             <a:pPr algn="l">
               <a:lnSpc>
-                <a:spcPts val="2080"/>
+                <a:spcPct val="125000"/>
               </a:lnSpc>
               <a:spcBef>
                 <a:spcPts val="800"/>
@@ -17710,7 +17664,7 @@
           <a:p>
             <a:pPr algn="l">
               <a:lnSpc>
-                <a:spcPts val="1820"/>
+                <a:spcPct val="125000"/>
               </a:lnSpc>
               <a:spcBef>
                 <a:spcPts val="200"/>
@@ -17732,7 +17686,7 @@
           <a:p>
             <a:pPr algn="l">
               <a:lnSpc>
-                <a:spcPts val="2080"/>
+                <a:spcPct val="125000"/>
               </a:lnSpc>
               <a:spcBef>
                 <a:spcPts val="800"/>
@@ -17754,7 +17708,7 @@
           <a:p>
             <a:pPr algn="l">
               <a:lnSpc>
-                <a:spcPts val="1820"/>
+                <a:spcPct val="125000"/>
               </a:lnSpc>
               <a:spcBef>
                 <a:spcPts val="200"/>
@@ -17776,7 +17730,7 @@
           <a:p>
             <a:pPr algn="l">
               <a:lnSpc>
-                <a:spcPts val="2080"/>
+                <a:spcPct val="125000"/>
               </a:lnSpc>
               <a:spcBef>
                 <a:spcPts val="800"/>
@@ -17798,7 +17752,7 @@
           <a:p>
             <a:pPr algn="l">
               <a:lnSpc>
-                <a:spcPts val="1820"/>
+                <a:spcPct val="125000"/>
               </a:lnSpc>
               <a:spcBef>
                 <a:spcPts val="200"/>
@@ -17820,7 +17774,7 @@
           <a:p>
             <a:pPr algn="l">
               <a:lnSpc>
-                <a:spcPts val="2080"/>
+                <a:spcPct val="125000"/>
               </a:lnSpc>
               <a:spcBef>
                 <a:spcPts val="800"/>
@@ -17842,7 +17796,7 @@
           <a:p>
             <a:pPr algn="l">
               <a:lnSpc>
-                <a:spcPts val="1820"/>
+                <a:spcPct val="125000"/>
               </a:lnSpc>
               <a:spcBef>
                 <a:spcPts val="200"/>
@@ -17953,11 +17907,10 @@
             <a:spAutoFit/>
           </a:bodyPr>
           <a:lstStyle/>
-          <a:p/>
-          <a:p>
-            <a:pPr algn="l">
-              <a:lnSpc>
-                <a:spcPts val="2080"/>
+          <a:p>
+            <a:pPr algn="l">
+              <a:lnSpc>
+                <a:spcPct val="125000"/>
               </a:lnSpc>
               <a:spcBef>
                 <a:spcPts val="0"/>
@@ -17979,7 +17932,7 @@
           <a:p>
             <a:pPr algn="l">
               <a:lnSpc>
-                <a:spcPts val="2080"/>
+                <a:spcPct val="125000"/>
               </a:lnSpc>
               <a:spcBef>
                 <a:spcPts val="800"/>
@@ -18001,7 +17954,7 @@
           <a:p>
             <a:pPr algn="l">
               <a:lnSpc>
-                <a:spcPts val="1820"/>
+                <a:spcPct val="125000"/>
               </a:lnSpc>
               <a:spcBef>
                 <a:spcPts val="200"/>
@@ -18023,7 +17976,7 @@
           <a:p>
             <a:pPr algn="l">
               <a:lnSpc>
-                <a:spcPts val="2080"/>
+                <a:spcPct val="125000"/>
               </a:lnSpc>
               <a:spcBef>
                 <a:spcPts val="800"/>
@@ -18045,7 +17998,7 @@
           <a:p>
             <a:pPr algn="l">
               <a:lnSpc>
-                <a:spcPts val="1820"/>
+                <a:spcPct val="125000"/>
               </a:lnSpc>
               <a:spcBef>
                 <a:spcPts val="200"/>
@@ -18067,7 +18020,7 @@
           <a:p>
             <a:pPr algn="l">
               <a:lnSpc>
-                <a:spcPts val="2080"/>
+                <a:spcPct val="125000"/>
               </a:lnSpc>
               <a:spcBef>
                 <a:spcPts val="800"/>
@@ -18089,7 +18042,7 @@
           <a:p>
             <a:pPr algn="l">
               <a:lnSpc>
-                <a:spcPts val="1820"/>
+                <a:spcPct val="125000"/>
               </a:lnSpc>
               <a:spcBef>
                 <a:spcPts val="200"/>
@@ -18111,7 +18064,7 @@
           <a:p>
             <a:pPr algn="l">
               <a:lnSpc>
-                <a:spcPts val="2080"/>
+                <a:spcPct val="125000"/>
               </a:lnSpc>
               <a:spcBef>
                 <a:spcPts val="800"/>
@@ -18133,7 +18086,7 @@
           <a:p>
             <a:pPr algn="l">
               <a:lnSpc>
-                <a:spcPts val="1820"/>
+                <a:spcPct val="125000"/>
               </a:lnSpc>
               <a:spcBef>
                 <a:spcPts val="200"/>
@@ -18244,11 +18197,10 @@
             <a:spAutoFit/>
           </a:bodyPr>
           <a:lstStyle/>
-          <a:p/>
-          <a:p>
-            <a:pPr algn="l">
-              <a:lnSpc>
-                <a:spcPts val="2080"/>
+          <a:p>
+            <a:pPr algn="l">
+              <a:lnSpc>
+                <a:spcPct val="125000"/>
               </a:lnSpc>
               <a:spcBef>
                 <a:spcPts val="0"/>
@@ -18270,7 +18222,7 @@
           <a:p>
             <a:pPr algn="l">
               <a:lnSpc>
-                <a:spcPts val="2080"/>
+                <a:spcPct val="125000"/>
               </a:lnSpc>
               <a:spcBef>
                 <a:spcPts val="800"/>
@@ -18292,7 +18244,7 @@
           <a:p>
             <a:pPr algn="l">
               <a:lnSpc>
-                <a:spcPts val="1820"/>
+                <a:spcPct val="125000"/>
               </a:lnSpc>
               <a:spcBef>
                 <a:spcPts val="200"/>
@@ -18314,7 +18266,7 @@
           <a:p>
             <a:pPr algn="l">
               <a:lnSpc>
-                <a:spcPts val="2080"/>
+                <a:spcPct val="125000"/>
               </a:lnSpc>
               <a:spcBef>
                 <a:spcPts val="800"/>
@@ -18336,7 +18288,7 @@
           <a:p>
             <a:pPr algn="l">
               <a:lnSpc>
-                <a:spcPts val="1820"/>
+                <a:spcPct val="125000"/>
               </a:lnSpc>
               <a:spcBef>
                 <a:spcPts val="200"/>
@@ -18358,7 +18310,7 @@
           <a:p>
             <a:pPr algn="l">
               <a:lnSpc>
-                <a:spcPts val="2080"/>
+                <a:spcPct val="125000"/>
               </a:lnSpc>
               <a:spcBef>
                 <a:spcPts val="800"/>
@@ -18380,7 +18332,7 @@
           <a:p>
             <a:pPr algn="l">
               <a:lnSpc>
-                <a:spcPts val="1820"/>
+                <a:spcPct val="125000"/>
               </a:lnSpc>
               <a:spcBef>
                 <a:spcPts val="200"/>
@@ -18402,7 +18354,7 @@
           <a:p>
             <a:pPr algn="l">
               <a:lnSpc>
-                <a:spcPts val="2080"/>
+                <a:spcPct val="125000"/>
               </a:lnSpc>
               <a:spcBef>
                 <a:spcPts val="800"/>
@@ -18424,7 +18376,7 @@
           <a:p>
             <a:pPr algn="l">
               <a:lnSpc>
-                <a:spcPts val="1820"/>
+                <a:spcPct val="125000"/>
               </a:lnSpc>
               <a:spcBef>
                 <a:spcPts val="200"/>
@@ -18535,11 +18487,10 @@
             <a:spAutoFit/>
           </a:bodyPr>
           <a:lstStyle/>
-          <a:p/>
-          <a:p>
-            <a:pPr algn="l">
-              <a:lnSpc>
-                <a:spcPts val="2080"/>
+          <a:p>
+            <a:pPr algn="l">
+              <a:lnSpc>
+                <a:spcPct val="125000"/>
               </a:lnSpc>
               <a:spcBef>
                 <a:spcPts val="0"/>
@@ -18561,7 +18512,7 @@
           <a:p>
             <a:pPr algn="l">
               <a:lnSpc>
-                <a:spcPts val="2080"/>
+                <a:spcPct val="125000"/>
               </a:lnSpc>
               <a:spcBef>
                 <a:spcPts val="800"/>
@@ -18583,7 +18534,7 @@
           <a:p>
             <a:pPr algn="l">
               <a:lnSpc>
-                <a:spcPts val="1820"/>
+                <a:spcPct val="125000"/>
               </a:lnSpc>
               <a:spcBef>
                 <a:spcPts val="200"/>
@@ -18605,7 +18556,7 @@
           <a:p>
             <a:pPr algn="l">
               <a:lnSpc>
-                <a:spcPts val="2080"/>
+                <a:spcPct val="125000"/>
               </a:lnSpc>
               <a:spcBef>
                 <a:spcPts val="800"/>
@@ -18627,7 +18578,7 @@
           <a:p>
             <a:pPr algn="l">
               <a:lnSpc>
-                <a:spcPts val="1820"/>
+                <a:spcPct val="125000"/>
               </a:lnSpc>
               <a:spcBef>
                 <a:spcPts val="200"/>
@@ -18649,7 +18600,7 @@
           <a:p>
             <a:pPr algn="l">
               <a:lnSpc>
-                <a:spcPts val="1820"/>
+                <a:spcPct val="125000"/>
               </a:lnSpc>
               <a:spcBef>
                 <a:spcPts val="200"/>
@@ -18671,7 +18622,7 @@
           <a:p>
             <a:pPr algn="l">
               <a:lnSpc>
-                <a:spcPts val="2080"/>
+                <a:spcPct val="125000"/>
               </a:lnSpc>
               <a:spcBef>
                 <a:spcPts val="800"/>
@@ -18693,7 +18644,7 @@
           <a:p>
             <a:pPr algn="l">
               <a:lnSpc>
-                <a:spcPts val="1820"/>
+                <a:spcPct val="125000"/>
               </a:lnSpc>
               <a:spcBef>
                 <a:spcPts val="200"/>
@@ -18715,7 +18666,7 @@
           <a:p>
             <a:pPr algn="l">
               <a:lnSpc>
-                <a:spcPts val="2080"/>
+                <a:spcPct val="125000"/>
               </a:lnSpc>
               <a:spcBef>
                 <a:spcPts val="800"/>
@@ -18737,7 +18688,7 @@
           <a:p>
             <a:pPr algn="l">
               <a:lnSpc>
-                <a:spcPts val="1820"/>
+                <a:spcPct val="125000"/>
               </a:lnSpc>
               <a:spcBef>
                 <a:spcPts val="200"/>
@@ -18848,11 +18799,10 @@
             <a:spAutoFit/>
           </a:bodyPr>
           <a:lstStyle/>
-          <a:p/>
-          <a:p>
-            <a:pPr algn="l">
-              <a:lnSpc>
-                <a:spcPts val="2080"/>
+          <a:p>
+            <a:pPr algn="l">
+              <a:lnSpc>
+                <a:spcPct val="125000"/>
               </a:lnSpc>
               <a:spcBef>
                 <a:spcPts val="0"/>
@@ -18874,7 +18824,7 @@
           <a:p>
             <a:pPr algn="l">
               <a:lnSpc>
-                <a:spcPts val="2080"/>
+                <a:spcPct val="125000"/>
               </a:lnSpc>
               <a:spcBef>
                 <a:spcPts val="800"/>
@@ -18896,7 +18846,7 @@
           <a:p>
             <a:pPr algn="l">
               <a:lnSpc>
-                <a:spcPts val="1820"/>
+                <a:spcPct val="125000"/>
               </a:lnSpc>
               <a:spcBef>
                 <a:spcPts val="200"/>
@@ -18918,7 +18868,7 @@
           <a:p>
             <a:pPr algn="l">
               <a:lnSpc>
-                <a:spcPts val="2080"/>
+                <a:spcPct val="125000"/>
               </a:lnSpc>
               <a:spcBef>
                 <a:spcPts val="800"/>
@@ -18940,7 +18890,7 @@
           <a:p>
             <a:pPr algn="l">
               <a:lnSpc>
-                <a:spcPts val="1820"/>
+                <a:spcPct val="125000"/>
               </a:lnSpc>
               <a:spcBef>
                 <a:spcPts val="200"/>
@@ -18962,7 +18912,7 @@
           <a:p>
             <a:pPr algn="l">
               <a:lnSpc>
-                <a:spcPts val="1820"/>
+                <a:spcPct val="125000"/>
               </a:lnSpc>
               <a:spcBef>
                 <a:spcPts val="200"/>
@@ -18984,7 +18934,7 @@
           <a:p>
             <a:pPr algn="l">
               <a:lnSpc>
-                <a:spcPts val="1820"/>
+                <a:spcPct val="125000"/>
               </a:lnSpc>
               <a:spcBef>
                 <a:spcPts val="200"/>
@@ -19006,7 +18956,7 @@
           <a:p>
             <a:pPr algn="l">
               <a:lnSpc>
-                <a:spcPts val="1820"/>
+                <a:spcPct val="125000"/>
               </a:lnSpc>
               <a:spcBef>
                 <a:spcPts val="200"/>
@@ -19028,7 +18978,7 @@
           <a:p>
             <a:pPr algn="l">
               <a:lnSpc>
-                <a:spcPts val="2080"/>
+                <a:spcPct val="125000"/>
               </a:lnSpc>
               <a:spcBef>
                 <a:spcPts val="800"/>
@@ -19050,7 +19000,7 @@
           <a:p>
             <a:pPr algn="l">
               <a:lnSpc>
-                <a:spcPts val="1820"/>
+                <a:spcPct val="125000"/>
               </a:lnSpc>
               <a:spcBef>
                 <a:spcPts val="200"/>
@@ -19072,7 +19022,7 @@
           <a:p>
             <a:pPr algn="l">
               <a:lnSpc>
-                <a:spcPts val="2080"/>
+                <a:spcPct val="125000"/>
               </a:lnSpc>
               <a:spcBef>
                 <a:spcPts val="800"/>
@@ -19094,7 +19044,7 @@
           <a:p>
             <a:pPr algn="l">
               <a:lnSpc>
-                <a:spcPts val="1820"/>
+                <a:spcPct val="125000"/>
               </a:lnSpc>
               <a:spcBef>
                 <a:spcPts val="200"/>
@@ -19205,11 +19155,10 @@
             <a:spAutoFit/>
           </a:bodyPr>
           <a:lstStyle/>
-          <a:p/>
-          <a:p>
-            <a:pPr algn="l">
-              <a:lnSpc>
-                <a:spcPts val="2080"/>
+          <a:p>
+            <a:pPr algn="l">
+              <a:lnSpc>
+                <a:spcPct val="125000"/>
               </a:lnSpc>
               <a:spcBef>
                 <a:spcPts val="0"/>
@@ -19231,7 +19180,7 @@
           <a:p>
             <a:pPr algn="l">
               <a:lnSpc>
-                <a:spcPts val="2080"/>
+                <a:spcPct val="125000"/>
               </a:lnSpc>
               <a:spcBef>
                 <a:spcPts val="800"/>
@@ -19253,7 +19202,7 @@
           <a:p>
             <a:pPr algn="l">
               <a:lnSpc>
-                <a:spcPts val="1820"/>
+                <a:spcPct val="125000"/>
               </a:lnSpc>
               <a:spcBef>
                 <a:spcPts val="200"/>
@@ -19275,7 +19224,7 @@
           <a:p>
             <a:pPr algn="l">
               <a:lnSpc>
-                <a:spcPts val="2080"/>
+                <a:spcPct val="125000"/>
               </a:lnSpc>
               <a:spcBef>
                 <a:spcPts val="800"/>
@@ -19297,7 +19246,7 @@
           <a:p>
             <a:pPr algn="l">
               <a:lnSpc>
-                <a:spcPts val="1820"/>
+                <a:spcPct val="125000"/>
               </a:lnSpc>
               <a:spcBef>
                 <a:spcPts val="200"/>
@@ -19319,7 +19268,7 @@
           <a:p>
             <a:pPr algn="l">
               <a:lnSpc>
-                <a:spcPts val="2080"/>
+                <a:spcPct val="125000"/>
               </a:lnSpc>
               <a:spcBef>
                 <a:spcPts val="800"/>
@@ -19341,7 +19290,7 @@
           <a:p>
             <a:pPr algn="l">
               <a:lnSpc>
-                <a:spcPts val="1820"/>
+                <a:spcPct val="125000"/>
               </a:lnSpc>
               <a:spcBef>
                 <a:spcPts val="200"/>
@@ -19363,7 +19312,7 @@
           <a:p>
             <a:pPr algn="l">
               <a:lnSpc>
-                <a:spcPts val="2080"/>
+                <a:spcPct val="125000"/>
               </a:lnSpc>
               <a:spcBef>
                 <a:spcPts val="800"/>
@@ -19385,7 +19334,7 @@
           <a:p>
             <a:pPr algn="l">
               <a:lnSpc>
-                <a:spcPts val="1820"/>
+                <a:spcPct val="125000"/>
               </a:lnSpc>
               <a:spcBef>
                 <a:spcPts val="200"/>
@@ -19496,11 +19445,10 @@
             <a:spAutoFit/>
           </a:bodyPr>
           <a:lstStyle/>
-          <a:p/>
-          <a:p>
-            <a:pPr algn="l">
-              <a:lnSpc>
-                <a:spcPts val="2080"/>
+          <a:p>
+            <a:pPr algn="l">
+              <a:lnSpc>
+                <a:spcPct val="125000"/>
               </a:lnSpc>
               <a:spcBef>
                 <a:spcPts val="0"/>
@@ -19522,7 +19470,7 @@
           <a:p>
             <a:pPr algn="l">
               <a:lnSpc>
-                <a:spcPts val="2080"/>
+                <a:spcPct val="125000"/>
               </a:lnSpc>
               <a:spcBef>
                 <a:spcPts val="800"/>
@@ -19544,7 +19492,7 @@
           <a:p>
             <a:pPr algn="l">
               <a:lnSpc>
-                <a:spcPts val="1820"/>
+                <a:spcPct val="125000"/>
               </a:lnSpc>
               <a:spcBef>
                 <a:spcPts val="200"/>
@@ -19566,7 +19514,7 @@
           <a:p>
             <a:pPr algn="l">
               <a:lnSpc>
-                <a:spcPts val="2080"/>
+                <a:spcPct val="125000"/>
               </a:lnSpc>
               <a:spcBef>
                 <a:spcPts val="800"/>
@@ -19588,7 +19536,7 @@
           <a:p>
             <a:pPr algn="l">
               <a:lnSpc>
-                <a:spcPts val="1820"/>
+                <a:spcPct val="125000"/>
               </a:lnSpc>
               <a:spcBef>
                 <a:spcPts val="200"/>
@@ -19610,7 +19558,7 @@
           <a:p>
             <a:pPr algn="l">
               <a:lnSpc>
-                <a:spcPts val="2080"/>
+                <a:spcPct val="125000"/>
               </a:lnSpc>
               <a:spcBef>
                 <a:spcPts val="800"/>
@@ -19632,7 +19580,7 @@
           <a:p>
             <a:pPr algn="l">
               <a:lnSpc>
-                <a:spcPts val="1820"/>
+                <a:spcPct val="125000"/>
               </a:lnSpc>
               <a:spcBef>
                 <a:spcPts val="200"/>
@@ -19654,7 +19602,7 @@
           <a:p>
             <a:pPr algn="l">
               <a:lnSpc>
-                <a:spcPts val="2080"/>
+                <a:spcPct val="125000"/>
               </a:lnSpc>
               <a:spcBef>
                 <a:spcPts val="800"/>
@@ -19676,7 +19624,7 @@
           <a:p>
             <a:pPr algn="l">
               <a:lnSpc>
-                <a:spcPts val="1820"/>
+                <a:spcPct val="125000"/>
               </a:lnSpc>
               <a:spcBef>
                 <a:spcPts val="200"/>
@@ -19787,11 +19735,10 @@
             <a:spAutoFit/>
           </a:bodyPr>
           <a:lstStyle/>
-          <a:p/>
-          <a:p>
-            <a:pPr algn="l">
-              <a:lnSpc>
-                <a:spcPts val="2080"/>
+          <a:p>
+            <a:pPr algn="l">
+              <a:lnSpc>
+                <a:spcPct val="125000"/>
               </a:lnSpc>
               <a:spcBef>
                 <a:spcPts val="0"/>
@@ -19813,7 +19760,7 @@
           <a:p>
             <a:pPr algn="l">
               <a:lnSpc>
-                <a:spcPts val="2080"/>
+                <a:spcPct val="125000"/>
               </a:lnSpc>
               <a:spcBef>
                 <a:spcPts val="800"/>
@@ -19835,7 +19782,7 @@
           <a:p>
             <a:pPr algn="l">
               <a:lnSpc>
-                <a:spcPts val="1820"/>
+                <a:spcPct val="125000"/>
               </a:lnSpc>
               <a:spcBef>
                 <a:spcPts val="200"/>
@@ -19857,7 +19804,7 @@
           <a:p>
             <a:pPr algn="l">
               <a:lnSpc>
-                <a:spcPts val="2080"/>
+                <a:spcPct val="125000"/>
               </a:lnSpc>
               <a:spcBef>
                 <a:spcPts val="800"/>
@@ -19879,7 +19826,7 @@
           <a:p>
             <a:pPr algn="l">
               <a:lnSpc>
-                <a:spcPts val="1820"/>
+                <a:spcPct val="125000"/>
               </a:lnSpc>
               <a:spcBef>
                 <a:spcPts val="200"/>
@@ -19901,7 +19848,7 @@
           <a:p>
             <a:pPr algn="l">
               <a:lnSpc>
-                <a:spcPts val="1820"/>
+                <a:spcPct val="125000"/>
               </a:lnSpc>
               <a:spcBef>
                 <a:spcPts val="200"/>
@@ -19923,7 +19870,7 @@
           <a:p>
             <a:pPr algn="l">
               <a:lnSpc>
-                <a:spcPts val="1820"/>
+                <a:spcPct val="125000"/>
               </a:lnSpc>
               <a:spcBef>
                 <a:spcPts val="200"/>
@@ -19945,7 +19892,7 @@
           <a:p>
             <a:pPr algn="l">
               <a:lnSpc>
-                <a:spcPts val="1820"/>
+                <a:spcPct val="125000"/>
               </a:lnSpc>
               <a:spcBef>
                 <a:spcPts val="200"/>
@@ -19967,7 +19914,7 @@
           <a:p>
             <a:pPr algn="l">
               <a:lnSpc>
-                <a:spcPts val="1820"/>
+                <a:spcPct val="125000"/>
               </a:lnSpc>
               <a:spcBef>
                 <a:spcPts val="200"/>
@@ -19989,7 +19936,7 @@
           <a:p>
             <a:pPr algn="l">
               <a:lnSpc>
-                <a:spcPts val="2080"/>
+                <a:spcPct val="125000"/>
               </a:lnSpc>
               <a:spcBef>
                 <a:spcPts val="800"/>
@@ -20011,7 +19958,7 @@
           <a:p>
             <a:pPr algn="l">
               <a:lnSpc>
-                <a:spcPts val="1820"/>
+                <a:spcPct val="125000"/>
               </a:lnSpc>
               <a:spcBef>
                 <a:spcPts val="200"/>
@@ -20033,7 +19980,7 @@
           <a:p>
             <a:pPr algn="l">
               <a:lnSpc>
-                <a:spcPts val="2080"/>
+                <a:spcPct val="125000"/>
               </a:lnSpc>
               <a:spcBef>
                 <a:spcPts val="800"/>
@@ -20055,7 +20002,7 @@
           <a:p>
             <a:pPr algn="l">
               <a:lnSpc>
-                <a:spcPts val="1820"/>
+                <a:spcPct val="125000"/>
               </a:lnSpc>
               <a:spcBef>
                 <a:spcPts val="200"/>
@@ -20166,11 +20113,10 @@
             <a:spAutoFit/>
           </a:bodyPr>
           <a:lstStyle/>
-          <a:p/>
-          <a:p>
-            <a:pPr algn="l">
-              <a:lnSpc>
-                <a:spcPts val="2080"/>
+          <a:p>
+            <a:pPr algn="l">
+              <a:lnSpc>
+                <a:spcPct val="125000"/>
               </a:lnSpc>
               <a:spcBef>
                 <a:spcPts val="0"/>
@@ -20192,7 +20138,7 @@
           <a:p>
             <a:pPr algn="l">
               <a:lnSpc>
-                <a:spcPts val="2080"/>
+                <a:spcPct val="125000"/>
               </a:lnSpc>
               <a:spcBef>
                 <a:spcPts val="800"/>
@@ -20214,7 +20160,7 @@
           <a:p>
             <a:pPr algn="l">
               <a:lnSpc>
-                <a:spcPts val="1820"/>
+                <a:spcPct val="125000"/>
               </a:lnSpc>
               <a:spcBef>
                 <a:spcPts val="200"/>
@@ -20236,7 +20182,7 @@
           <a:p>
             <a:pPr algn="l">
               <a:lnSpc>
-                <a:spcPts val="2080"/>
+                <a:spcPct val="125000"/>
               </a:lnSpc>
               <a:spcBef>
                 <a:spcPts val="800"/>
@@ -20258,7 +20204,7 @@
           <a:p>
             <a:pPr algn="l">
               <a:lnSpc>
-                <a:spcPts val="1820"/>
+                <a:spcPct val="125000"/>
               </a:lnSpc>
               <a:spcBef>
                 <a:spcPts val="200"/>
@@ -20280,7 +20226,7 @@
           <a:p>
             <a:pPr algn="l">
               <a:lnSpc>
-                <a:spcPts val="1820"/>
+                <a:spcPct val="125000"/>
               </a:lnSpc>
               <a:spcBef>
                 <a:spcPts val="200"/>
@@ -20302,7 +20248,7 @@
           <a:p>
             <a:pPr algn="l">
               <a:lnSpc>
-                <a:spcPts val="2080"/>
+                <a:spcPct val="125000"/>
               </a:lnSpc>
               <a:spcBef>
                 <a:spcPts val="800"/>
@@ -20324,7 +20270,7 @@
           <a:p>
             <a:pPr algn="l">
               <a:lnSpc>
-                <a:spcPts val="1820"/>
+                <a:spcPct val="125000"/>
               </a:lnSpc>
               <a:spcBef>
                 <a:spcPts val="200"/>
@@ -20346,7 +20292,7 @@
           <a:p>
             <a:pPr algn="l">
               <a:lnSpc>
-                <a:spcPts val="2080"/>
+                <a:spcPct val="125000"/>
               </a:lnSpc>
               <a:spcBef>
                 <a:spcPts val="800"/>
@@ -20368,7 +20314,7 @@
           <a:p>
             <a:pPr algn="l">
               <a:lnSpc>
-                <a:spcPts val="1820"/>
+                <a:spcPct val="125000"/>
               </a:lnSpc>
               <a:spcBef>
                 <a:spcPts val="200"/>
@@ -20479,11 +20425,10 @@
             <a:spAutoFit/>
           </a:bodyPr>
           <a:lstStyle/>
-          <a:p/>
-          <a:p>
-            <a:pPr algn="l">
-              <a:lnSpc>
-                <a:spcPts val="2080"/>
+          <a:p>
+            <a:pPr algn="l">
+              <a:lnSpc>
+                <a:spcPct val="125000"/>
               </a:lnSpc>
               <a:spcBef>
                 <a:spcPts val="0"/>
@@ -20505,7 +20450,7 @@
           <a:p>
             <a:pPr algn="l">
               <a:lnSpc>
-                <a:spcPts val="2080"/>
+                <a:spcPct val="125000"/>
               </a:lnSpc>
               <a:spcBef>
                 <a:spcPts val="800"/>
@@ -20527,7 +20472,7 @@
           <a:p>
             <a:pPr algn="l">
               <a:lnSpc>
-                <a:spcPts val="1820"/>
+                <a:spcPct val="125000"/>
               </a:lnSpc>
               <a:spcBef>
                 <a:spcPts val="200"/>
@@ -20549,7 +20494,7 @@
           <a:p>
             <a:pPr algn="l">
               <a:lnSpc>
-                <a:spcPts val="2080"/>
+                <a:spcPct val="125000"/>
               </a:lnSpc>
               <a:spcBef>
                 <a:spcPts val="800"/>
@@ -20571,7 +20516,7 @@
           <a:p>
             <a:pPr algn="l">
               <a:lnSpc>
-                <a:spcPts val="1820"/>
+                <a:spcPct val="125000"/>
               </a:lnSpc>
               <a:spcBef>
                 <a:spcPts val="200"/>
@@ -20593,7 +20538,7 @@
           <a:p>
             <a:pPr algn="l">
               <a:lnSpc>
-                <a:spcPts val="2080"/>
+                <a:spcPct val="125000"/>
               </a:lnSpc>
               <a:spcBef>
                 <a:spcPts val="800"/>
@@ -20615,7 +20560,7 @@
           <a:p>
             <a:pPr algn="l">
               <a:lnSpc>
-                <a:spcPts val="1820"/>
+                <a:spcPct val="125000"/>
               </a:lnSpc>
               <a:spcBef>
                 <a:spcPts val="200"/>
@@ -20637,7 +20582,7 @@
           <a:p>
             <a:pPr algn="l">
               <a:lnSpc>
-                <a:spcPts val="2080"/>
+                <a:spcPct val="125000"/>
               </a:lnSpc>
               <a:spcBef>
                 <a:spcPts val="800"/>
@@ -20659,7 +20604,7 @@
           <a:p>
             <a:pPr algn="l">
               <a:lnSpc>
-                <a:spcPts val="1820"/>
+                <a:spcPct val="125000"/>
               </a:lnSpc>
               <a:spcBef>
                 <a:spcPts val="200"/>
@@ -20770,11 +20715,10 @@
             <a:spAutoFit/>
           </a:bodyPr>
           <a:lstStyle/>
-          <a:p/>
-          <a:p>
-            <a:pPr algn="l">
-              <a:lnSpc>
-                <a:spcPts val="2080"/>
+          <a:p>
+            <a:pPr algn="l">
+              <a:lnSpc>
+                <a:spcPct val="125000"/>
               </a:lnSpc>
               <a:spcBef>
                 <a:spcPts val="0"/>
@@ -20796,7 +20740,7 @@
           <a:p>
             <a:pPr algn="l">
               <a:lnSpc>
-                <a:spcPts val="2080"/>
+                <a:spcPct val="125000"/>
               </a:lnSpc>
               <a:spcBef>
                 <a:spcPts val="800"/>
@@ -20818,7 +20762,7 @@
           <a:p>
             <a:pPr algn="l">
               <a:lnSpc>
-                <a:spcPts val="1820"/>
+                <a:spcPct val="125000"/>
               </a:lnSpc>
               <a:spcBef>
                 <a:spcPts val="200"/>
@@ -20840,7 +20784,7 @@
           <a:p>
             <a:pPr algn="l">
               <a:lnSpc>
-                <a:spcPts val="2080"/>
+                <a:spcPct val="125000"/>
               </a:lnSpc>
               <a:spcBef>
                 <a:spcPts val="800"/>
@@ -20862,7 +20806,7 @@
           <a:p>
             <a:pPr algn="l">
               <a:lnSpc>
-                <a:spcPts val="1820"/>
+                <a:spcPct val="125000"/>
               </a:lnSpc>
               <a:spcBef>
                 <a:spcPts val="200"/>
@@ -20884,7 +20828,7 @@
           <a:p>
             <a:pPr algn="l">
               <a:lnSpc>
-                <a:spcPts val="2080"/>
+                <a:spcPct val="125000"/>
               </a:lnSpc>
               <a:spcBef>
                 <a:spcPts val="800"/>
@@ -20906,7 +20850,7 @@
           <a:p>
             <a:pPr algn="l">
               <a:lnSpc>
-                <a:spcPts val="1820"/>
+                <a:spcPct val="125000"/>
               </a:lnSpc>
               <a:spcBef>
                 <a:spcPts val="200"/>
@@ -20928,7 +20872,7 @@
           <a:p>
             <a:pPr algn="l">
               <a:lnSpc>
-                <a:spcPts val="2080"/>
+                <a:spcPct val="125000"/>
               </a:lnSpc>
               <a:spcBef>
                 <a:spcPts val="800"/>
@@ -20950,7 +20894,7 @@
           <a:p>
             <a:pPr algn="l">
               <a:lnSpc>
-                <a:spcPts val="1820"/>
+                <a:spcPct val="125000"/>
               </a:lnSpc>
               <a:spcBef>
                 <a:spcPts val="200"/>
@@ -21061,11 +21005,10 @@
             <a:spAutoFit/>
           </a:bodyPr>
           <a:lstStyle/>
-          <a:p/>
-          <a:p>
-            <a:pPr algn="l">
-              <a:lnSpc>
-                <a:spcPts val="2080"/>
+          <a:p>
+            <a:pPr algn="l">
+              <a:lnSpc>
+                <a:spcPct val="125000"/>
               </a:lnSpc>
               <a:spcBef>
                 <a:spcPts val="0"/>
@@ -21087,7 +21030,7 @@
           <a:p>
             <a:pPr algn="l">
               <a:lnSpc>
-                <a:spcPts val="2080"/>
+                <a:spcPct val="125000"/>
               </a:lnSpc>
               <a:spcBef>
                 <a:spcPts val="800"/>
@@ -21109,7 +21052,7 @@
           <a:p>
             <a:pPr algn="l">
               <a:lnSpc>
-                <a:spcPts val="1820"/>
+                <a:spcPct val="125000"/>
               </a:lnSpc>
               <a:spcBef>
                 <a:spcPts val="200"/>
@@ -21131,7 +21074,7 @@
           <a:p>
             <a:pPr algn="l">
               <a:lnSpc>
-                <a:spcPts val="2080"/>
+                <a:spcPct val="125000"/>
               </a:lnSpc>
               <a:spcBef>
                 <a:spcPts val="800"/>
@@ -21153,7 +21096,7 @@
           <a:p>
             <a:pPr algn="l">
               <a:lnSpc>
-                <a:spcPts val="1820"/>
+                <a:spcPct val="125000"/>
               </a:lnSpc>
               <a:spcBef>
                 <a:spcPts val="200"/>
@@ -21175,7 +21118,7 @@
           <a:p>
             <a:pPr algn="l">
               <a:lnSpc>
-                <a:spcPts val="1820"/>
+                <a:spcPct val="125000"/>
               </a:lnSpc>
               <a:spcBef>
                 <a:spcPts val="200"/>
@@ -21197,7 +21140,7 @@
           <a:p>
             <a:pPr algn="l">
               <a:lnSpc>
-                <a:spcPts val="2080"/>
+                <a:spcPct val="125000"/>
               </a:lnSpc>
               <a:spcBef>
                 <a:spcPts val="800"/>
@@ -21219,7 +21162,7 @@
           <a:p>
             <a:pPr algn="l">
               <a:lnSpc>
-                <a:spcPts val="1820"/>
+                <a:spcPct val="125000"/>
               </a:lnSpc>
               <a:spcBef>
                 <a:spcPts val="200"/>
@@ -21241,7 +21184,7 @@
           <a:p>
             <a:pPr algn="l">
               <a:lnSpc>
-                <a:spcPts val="2080"/>
+                <a:spcPct val="125000"/>
               </a:lnSpc>
               <a:spcBef>
                 <a:spcPts val="800"/>
@@ -21263,7 +21206,7 @@
           <a:p>
             <a:pPr algn="l">
               <a:lnSpc>
-                <a:spcPts val="1820"/>
+                <a:spcPct val="125000"/>
               </a:lnSpc>
               <a:spcBef>
                 <a:spcPts val="200"/>
@@ -21374,11 +21317,10 @@
             <a:spAutoFit/>
           </a:bodyPr>
           <a:lstStyle/>
-          <a:p/>
-          <a:p>
-            <a:pPr algn="l">
-              <a:lnSpc>
-                <a:spcPts val="2080"/>
+          <a:p>
+            <a:pPr algn="l">
+              <a:lnSpc>
+                <a:spcPct val="125000"/>
               </a:lnSpc>
               <a:spcBef>
                 <a:spcPts val="0"/>
@@ -21400,7 +21342,7 @@
           <a:p>
             <a:pPr algn="l">
               <a:lnSpc>
-                <a:spcPts val="2080"/>
+                <a:spcPct val="125000"/>
               </a:lnSpc>
               <a:spcBef>
                 <a:spcPts val="800"/>
@@ -21422,7 +21364,7 @@
           <a:p>
             <a:pPr algn="l">
               <a:lnSpc>
-                <a:spcPts val="1820"/>
+                <a:spcPct val="125000"/>
               </a:lnSpc>
               <a:spcBef>
                 <a:spcPts val="200"/>
@@ -21444,7 +21386,7 @@
           <a:p>
             <a:pPr algn="l">
               <a:lnSpc>
-                <a:spcPts val="2080"/>
+                <a:spcPct val="125000"/>
               </a:lnSpc>
               <a:spcBef>
                 <a:spcPts val="800"/>
@@ -21466,7 +21408,7 @@
           <a:p>
             <a:pPr algn="l">
               <a:lnSpc>
-                <a:spcPts val="1820"/>
+                <a:spcPct val="125000"/>
               </a:lnSpc>
               <a:spcBef>
                 <a:spcPts val="200"/>
@@ -21488,7 +21430,7 @@
           <a:p>
             <a:pPr algn="l">
               <a:lnSpc>
-                <a:spcPts val="2080"/>
+                <a:spcPct val="125000"/>
               </a:lnSpc>
               <a:spcBef>
                 <a:spcPts val="800"/>
@@ -21510,7 +21452,7 @@
           <a:p>
             <a:pPr algn="l">
               <a:lnSpc>
-                <a:spcPts val="1820"/>
+                <a:spcPct val="125000"/>
               </a:lnSpc>
               <a:spcBef>
                 <a:spcPts val="200"/>
@@ -21532,7 +21474,7 @@
           <a:p>
             <a:pPr algn="l">
               <a:lnSpc>
-                <a:spcPts val="2080"/>
+                <a:spcPct val="125000"/>
               </a:lnSpc>
               <a:spcBef>
                 <a:spcPts val="800"/>
@@ -21554,7 +21496,7 @@
           <a:p>
             <a:pPr algn="l">
               <a:lnSpc>
-                <a:spcPts val="1820"/>
+                <a:spcPct val="125000"/>
               </a:lnSpc>
               <a:spcBef>
                 <a:spcPts val="200"/>
@@ -21665,11 +21607,10 @@
             <a:spAutoFit/>
           </a:bodyPr>
           <a:lstStyle/>
-          <a:p/>
-          <a:p>
-            <a:pPr algn="l">
-              <a:lnSpc>
-                <a:spcPts val="2080"/>
+          <a:p>
+            <a:pPr algn="l">
+              <a:lnSpc>
+                <a:spcPct val="125000"/>
               </a:lnSpc>
               <a:spcBef>
                 <a:spcPts val="0"/>
@@ -21691,7 +21632,7 @@
           <a:p>
             <a:pPr algn="l">
               <a:lnSpc>
-                <a:spcPts val="2080"/>
+                <a:spcPct val="125000"/>
               </a:lnSpc>
               <a:spcBef>
                 <a:spcPts val="800"/>
@@ -21713,7 +21654,7 @@
           <a:p>
             <a:pPr algn="l">
               <a:lnSpc>
-                <a:spcPts val="1820"/>
+                <a:spcPct val="125000"/>
               </a:lnSpc>
               <a:spcBef>
                 <a:spcPts val="200"/>
@@ -21735,7 +21676,7 @@
           <a:p>
             <a:pPr algn="l">
               <a:lnSpc>
-                <a:spcPts val="2080"/>
+                <a:spcPct val="125000"/>
               </a:lnSpc>
               <a:spcBef>
                 <a:spcPts val="800"/>
@@ -21757,7 +21698,7 @@
           <a:p>
             <a:pPr algn="l">
               <a:lnSpc>
-                <a:spcPts val="1820"/>
+                <a:spcPct val="125000"/>
               </a:lnSpc>
               <a:spcBef>
                 <a:spcPts val="200"/>
@@ -21779,7 +21720,7 @@
           <a:p>
             <a:pPr algn="l">
               <a:lnSpc>
-                <a:spcPts val="2080"/>
+                <a:spcPct val="125000"/>
               </a:lnSpc>
               <a:spcBef>
                 <a:spcPts val="800"/>
@@ -21801,7 +21742,7 @@
           <a:p>
             <a:pPr algn="l">
               <a:lnSpc>
-                <a:spcPts val="1820"/>
+                <a:spcPct val="125000"/>
               </a:lnSpc>
               <a:spcBef>
                 <a:spcPts val="200"/>
@@ -21823,7 +21764,7 @@
           <a:p>
             <a:pPr algn="l">
               <a:lnSpc>
-                <a:spcPts val="2080"/>
+                <a:spcPct val="125000"/>
               </a:lnSpc>
               <a:spcBef>
                 <a:spcPts val="800"/>
@@ -21845,7 +21786,7 @@
           <a:p>
             <a:pPr algn="l">
               <a:lnSpc>
-                <a:spcPts val="1820"/>
+                <a:spcPct val="125000"/>
               </a:lnSpc>
               <a:spcBef>
                 <a:spcPts val="200"/>
@@ -21956,11 +21897,10 @@
             <a:spAutoFit/>
           </a:bodyPr>
           <a:lstStyle/>
-          <a:p/>
-          <a:p>
-            <a:pPr algn="l">
-              <a:lnSpc>
-                <a:spcPts val="2080"/>
+          <a:p>
+            <a:pPr algn="l">
+              <a:lnSpc>
+                <a:spcPct val="125000"/>
               </a:lnSpc>
               <a:spcBef>
                 <a:spcPts val="0"/>
@@ -21982,7 +21922,7 @@
           <a:p>
             <a:pPr algn="l">
               <a:lnSpc>
-                <a:spcPts val="2080"/>
+                <a:spcPct val="125000"/>
               </a:lnSpc>
               <a:spcBef>
                 <a:spcPts val="800"/>
@@ -22004,7 +21944,7 @@
           <a:p>
             <a:pPr algn="l">
               <a:lnSpc>
-                <a:spcPts val="1820"/>
+                <a:spcPct val="125000"/>
               </a:lnSpc>
               <a:spcBef>
                 <a:spcPts val="200"/>
@@ -22026,7 +21966,7 @@
           <a:p>
             <a:pPr algn="l">
               <a:lnSpc>
-                <a:spcPts val="2080"/>
+                <a:spcPct val="125000"/>
               </a:lnSpc>
               <a:spcBef>
                 <a:spcPts val="800"/>
@@ -22048,7 +21988,7 @@
           <a:p>
             <a:pPr algn="l">
               <a:lnSpc>
-                <a:spcPts val="1820"/>
+                <a:spcPct val="125000"/>
               </a:lnSpc>
               <a:spcBef>
                 <a:spcPts val="200"/>
@@ -22070,7 +22010,7 @@
           <a:p>
             <a:pPr algn="l">
               <a:lnSpc>
-                <a:spcPts val="1820"/>
+                <a:spcPct val="125000"/>
               </a:lnSpc>
               <a:spcBef>
                 <a:spcPts val="200"/>
@@ -22092,7 +22032,7 @@
           <a:p>
             <a:pPr algn="l">
               <a:lnSpc>
-                <a:spcPts val="1820"/>
+                <a:spcPct val="125000"/>
               </a:lnSpc>
               <a:spcBef>
                 <a:spcPts val="200"/>
@@ -22114,7 +22054,7 @@
           <a:p>
             <a:pPr algn="l">
               <a:lnSpc>
-                <a:spcPts val="1820"/>
+                <a:spcPct val="125000"/>
               </a:lnSpc>
               <a:spcBef>
                 <a:spcPts val="200"/>
@@ -22136,7 +22076,7 @@
           <a:p>
             <a:pPr algn="l">
               <a:lnSpc>
-                <a:spcPts val="2080"/>
+                <a:spcPct val="125000"/>
               </a:lnSpc>
               <a:spcBef>
                 <a:spcPts val="800"/>
@@ -22158,7 +22098,7 @@
           <a:p>
             <a:pPr algn="l">
               <a:lnSpc>
-                <a:spcPts val="1820"/>
+                <a:spcPct val="125000"/>
               </a:lnSpc>
               <a:spcBef>
                 <a:spcPts val="200"/>
@@ -22180,7 +22120,7 @@
           <a:p>
             <a:pPr algn="l">
               <a:lnSpc>
-                <a:spcPts val="2080"/>
+                <a:spcPct val="125000"/>
               </a:lnSpc>
               <a:spcBef>
                 <a:spcPts val="800"/>
@@ -22202,7 +22142,7 @@
           <a:p>
             <a:pPr algn="l">
               <a:lnSpc>
-                <a:spcPts val="1820"/>
+                <a:spcPct val="125000"/>
               </a:lnSpc>
               <a:spcBef>
                 <a:spcPts val="200"/>
@@ -22313,11 +22253,10 @@
             <a:spAutoFit/>
           </a:bodyPr>
           <a:lstStyle/>
-          <a:p/>
-          <a:p>
-            <a:pPr algn="l">
-              <a:lnSpc>
-                <a:spcPts val="2080"/>
+          <a:p>
+            <a:pPr algn="l">
+              <a:lnSpc>
+                <a:spcPct val="125000"/>
               </a:lnSpc>
               <a:spcBef>
                 <a:spcPts val="0"/>
@@ -22339,7 +22278,7 @@
           <a:p>
             <a:pPr algn="l">
               <a:lnSpc>
-                <a:spcPts val="2080"/>
+                <a:spcPct val="125000"/>
               </a:lnSpc>
               <a:spcBef>
                 <a:spcPts val="800"/>
@@ -22361,7 +22300,7 @@
           <a:p>
             <a:pPr algn="l">
               <a:lnSpc>
-                <a:spcPts val="1820"/>
+                <a:spcPct val="125000"/>
               </a:lnSpc>
               <a:spcBef>
                 <a:spcPts val="200"/>
@@ -22383,7 +22322,7 @@
           <a:p>
             <a:pPr algn="l">
               <a:lnSpc>
-                <a:spcPts val="2080"/>
+                <a:spcPct val="125000"/>
               </a:lnSpc>
               <a:spcBef>
                 <a:spcPts val="800"/>
@@ -22405,7 +22344,7 @@
           <a:p>
             <a:pPr algn="l">
               <a:lnSpc>
-                <a:spcPts val="1820"/>
+                <a:spcPct val="125000"/>
               </a:lnSpc>
               <a:spcBef>
                 <a:spcPts val="200"/>
@@ -22427,7 +22366,7 @@
           <a:p>
             <a:pPr algn="l">
               <a:lnSpc>
-                <a:spcPts val="2080"/>
+                <a:spcPct val="125000"/>
               </a:lnSpc>
               <a:spcBef>
                 <a:spcPts val="800"/>
@@ -22449,7 +22388,7 @@
           <a:p>
             <a:pPr algn="l">
               <a:lnSpc>
-                <a:spcPts val="1820"/>
+                <a:spcPct val="125000"/>
               </a:lnSpc>
               <a:spcBef>
                 <a:spcPts val="200"/>
@@ -22471,7 +22410,7 @@
           <a:p>
             <a:pPr algn="l">
               <a:lnSpc>
-                <a:spcPts val="2080"/>
+                <a:spcPct val="125000"/>
               </a:lnSpc>
               <a:spcBef>
                 <a:spcPts val="800"/>
@@ -22493,7 +22432,7 @@
           <a:p>
             <a:pPr algn="l">
               <a:lnSpc>
-                <a:spcPts val="1820"/>
+                <a:spcPct val="125000"/>
               </a:lnSpc>
               <a:spcBef>
                 <a:spcPts val="200"/>
@@ -22604,11 +22543,10 @@
             <a:spAutoFit/>
           </a:bodyPr>
           <a:lstStyle/>
-          <a:p/>
-          <a:p>
-            <a:pPr algn="l">
-              <a:lnSpc>
-                <a:spcPts val="2080"/>
+          <a:p>
+            <a:pPr algn="l">
+              <a:lnSpc>
+                <a:spcPct val="125000"/>
               </a:lnSpc>
               <a:spcBef>
                 <a:spcPts val="0"/>
@@ -22630,7 +22568,7 @@
           <a:p>
             <a:pPr algn="l">
               <a:lnSpc>
-                <a:spcPts val="2080"/>
+                <a:spcPct val="125000"/>
               </a:lnSpc>
               <a:spcBef>
                 <a:spcPts val="800"/>
@@ -22652,7 +22590,7 @@
           <a:p>
             <a:pPr algn="l">
               <a:lnSpc>
-                <a:spcPts val="1820"/>
+                <a:spcPct val="125000"/>
               </a:lnSpc>
               <a:spcBef>
                 <a:spcPts val="200"/>
@@ -22674,7 +22612,7 @@
           <a:p>
             <a:pPr algn="l">
               <a:lnSpc>
-                <a:spcPts val="2080"/>
+                <a:spcPct val="125000"/>
               </a:lnSpc>
               <a:spcBef>
                 <a:spcPts val="800"/>
@@ -22696,7 +22634,7 @@
           <a:p>
             <a:pPr algn="l">
               <a:lnSpc>
-                <a:spcPts val="1820"/>
+                <a:spcPct val="125000"/>
               </a:lnSpc>
               <a:spcBef>
                 <a:spcPts val="200"/>
@@ -22718,7 +22656,7 @@
           <a:p>
             <a:pPr algn="l">
               <a:lnSpc>
-                <a:spcPts val="2080"/>
+                <a:spcPct val="125000"/>
               </a:lnSpc>
               <a:spcBef>
                 <a:spcPts val="800"/>
@@ -22740,7 +22678,7 @@
           <a:p>
             <a:pPr algn="l">
               <a:lnSpc>
-                <a:spcPts val="1820"/>
+                <a:spcPct val="125000"/>
               </a:lnSpc>
               <a:spcBef>
                 <a:spcPts val="200"/>
@@ -22762,7 +22700,7 @@
           <a:p>
             <a:pPr algn="l">
               <a:lnSpc>
-                <a:spcPts val="2080"/>
+                <a:spcPct val="125000"/>
               </a:lnSpc>
               <a:spcBef>
                 <a:spcPts val="800"/>
@@ -22784,7 +22722,7 @@
           <a:p>
             <a:pPr algn="l">
               <a:lnSpc>
-                <a:spcPts val="1820"/>
+                <a:spcPct val="125000"/>
               </a:lnSpc>
               <a:spcBef>
                 <a:spcPts val="200"/>
@@ -22895,11 +22833,10 @@
             <a:spAutoFit/>
           </a:bodyPr>
           <a:lstStyle/>
-          <a:p/>
-          <a:p>
-            <a:pPr algn="l">
-              <a:lnSpc>
-                <a:spcPts val="2080"/>
+          <a:p>
+            <a:pPr algn="l">
+              <a:lnSpc>
+                <a:spcPct val="125000"/>
               </a:lnSpc>
               <a:spcBef>
                 <a:spcPts val="0"/>
@@ -22921,7 +22858,7 @@
           <a:p>
             <a:pPr algn="l">
               <a:lnSpc>
-                <a:spcPts val="2080"/>
+                <a:spcPct val="125000"/>
               </a:lnSpc>
               <a:spcBef>
                 <a:spcPts val="800"/>
@@ -22943,7 +22880,7 @@
           <a:p>
             <a:pPr algn="l">
               <a:lnSpc>
-                <a:spcPts val="1820"/>
+                <a:spcPct val="125000"/>
               </a:lnSpc>
               <a:spcBef>
                 <a:spcPts val="200"/>
@@ -22965,7 +22902,7 @@
           <a:p>
             <a:pPr algn="l">
               <a:lnSpc>
-                <a:spcPts val="2080"/>
+                <a:spcPct val="125000"/>
               </a:lnSpc>
               <a:spcBef>
                 <a:spcPts val="800"/>
@@ -22987,7 +22924,7 @@
           <a:p>
             <a:pPr algn="l">
               <a:lnSpc>
-                <a:spcPts val="1820"/>
+                <a:spcPct val="125000"/>
               </a:lnSpc>
               <a:spcBef>
                 <a:spcPts val="200"/>
@@ -23009,7 +22946,7 @@
           <a:p>
             <a:pPr algn="l">
               <a:lnSpc>
-                <a:spcPts val="1820"/>
+                <a:spcPct val="125000"/>
               </a:lnSpc>
               <a:spcBef>
                 <a:spcPts val="200"/>
@@ -23031,7 +22968,7 @@
           <a:p>
             <a:pPr algn="l">
               <a:lnSpc>
-                <a:spcPts val="1820"/>
+                <a:spcPct val="125000"/>
               </a:lnSpc>
               <a:spcBef>
                 <a:spcPts val="200"/>
@@ -23053,7 +22990,7 @@
           <a:p>
             <a:pPr algn="l">
               <a:lnSpc>
-                <a:spcPts val="1820"/>
+                <a:spcPct val="125000"/>
               </a:lnSpc>
               <a:spcBef>
                 <a:spcPts val="200"/>
@@ -23075,7 +23012,7 @@
           <a:p>
             <a:pPr algn="l">
               <a:lnSpc>
-                <a:spcPts val="2080"/>
+                <a:spcPct val="125000"/>
               </a:lnSpc>
               <a:spcBef>
                 <a:spcPts val="800"/>
@@ -23097,7 +23034,7 @@
           <a:p>
             <a:pPr algn="l">
               <a:lnSpc>
-                <a:spcPts val="1820"/>
+                <a:spcPct val="125000"/>
               </a:lnSpc>
               <a:spcBef>
                 <a:spcPts val="200"/>
@@ -23119,7 +23056,7 @@
           <a:p>
             <a:pPr algn="l">
               <a:lnSpc>
-                <a:spcPts val="2080"/>
+                <a:spcPct val="125000"/>
               </a:lnSpc>
               <a:spcBef>
                 <a:spcPts val="800"/>
@@ -23141,7 +23078,7 @@
           <a:p>
             <a:pPr algn="l">
               <a:lnSpc>
-                <a:spcPts val="1820"/>
+                <a:spcPct val="125000"/>
               </a:lnSpc>
               <a:spcBef>
                 <a:spcPts val="200"/>
@@ -23252,11 +23189,10 @@
             <a:spAutoFit/>
           </a:bodyPr>
           <a:lstStyle/>
-          <a:p/>
-          <a:p>
-            <a:pPr algn="l">
-              <a:lnSpc>
-                <a:spcPts val="2080"/>
+          <a:p>
+            <a:pPr algn="l">
+              <a:lnSpc>
+                <a:spcPct val="125000"/>
               </a:lnSpc>
               <a:spcBef>
                 <a:spcPts val="0"/>
@@ -23278,7 +23214,7 @@
           <a:p>
             <a:pPr algn="l">
               <a:lnSpc>
-                <a:spcPts val="2080"/>
+                <a:spcPct val="125000"/>
               </a:lnSpc>
               <a:spcBef>
                 <a:spcPts val="800"/>
@@ -23300,7 +23236,7 @@
           <a:p>
             <a:pPr algn="l">
               <a:lnSpc>
-                <a:spcPts val="1820"/>
+                <a:spcPct val="125000"/>
               </a:lnSpc>
               <a:spcBef>
                 <a:spcPts val="200"/>
@@ -23322,7 +23258,7 @@
           <a:p>
             <a:pPr algn="l">
               <a:lnSpc>
-                <a:spcPts val="2080"/>
+                <a:spcPct val="125000"/>
               </a:lnSpc>
               <a:spcBef>
                 <a:spcPts val="800"/>
@@ -23344,7 +23280,7 @@
           <a:p>
             <a:pPr algn="l">
               <a:lnSpc>
-                <a:spcPts val="1820"/>
+                <a:spcPct val="125000"/>
               </a:lnSpc>
               <a:spcBef>
                 <a:spcPts val="200"/>
@@ -23366,7 +23302,7 @@
           <a:p>
             <a:pPr algn="l">
               <a:lnSpc>
-                <a:spcPts val="1820"/>
+                <a:spcPct val="125000"/>
               </a:lnSpc>
               <a:spcBef>
                 <a:spcPts val="200"/>
@@ -23388,7 +23324,7 @@
           <a:p>
             <a:pPr algn="l">
               <a:lnSpc>
-                <a:spcPts val="1820"/>
+                <a:spcPct val="125000"/>
               </a:lnSpc>
               <a:spcBef>
                 <a:spcPts val="200"/>
@@ -23410,7 +23346,7 @@
           <a:p>
             <a:pPr algn="l">
               <a:lnSpc>
-                <a:spcPts val="1820"/>
+                <a:spcPct val="125000"/>
               </a:lnSpc>
               <a:spcBef>
                 <a:spcPts val="200"/>
@@ -23432,7 +23368,7 @@
           <a:p>
             <a:pPr algn="l">
               <a:lnSpc>
-                <a:spcPts val="2080"/>
+                <a:spcPct val="125000"/>
               </a:lnSpc>
               <a:spcBef>
                 <a:spcPts val="800"/>
@@ -23454,7 +23390,7 @@
           <a:p>
             <a:pPr algn="l">
               <a:lnSpc>
-                <a:spcPts val="1820"/>
+                <a:spcPct val="125000"/>
               </a:lnSpc>
               <a:spcBef>
                 <a:spcPts val="200"/>
@@ -23476,7 +23412,7 @@
           <a:p>
             <a:pPr algn="l">
               <a:lnSpc>
-                <a:spcPts val="2080"/>
+                <a:spcPct val="125000"/>
               </a:lnSpc>
               <a:spcBef>
                 <a:spcPts val="800"/>
@@ -23498,7 +23434,7 @@
           <a:p>
             <a:pPr algn="l">
               <a:lnSpc>
-                <a:spcPts val="1820"/>
+                <a:spcPct val="125000"/>
               </a:lnSpc>
               <a:spcBef>
                 <a:spcPts val="200"/>
@@ -23609,11 +23545,10 @@
             <a:spAutoFit/>
           </a:bodyPr>
           <a:lstStyle/>
-          <a:p/>
-          <a:p>
-            <a:pPr algn="l">
-              <a:lnSpc>
-                <a:spcPts val="2080"/>
+          <a:p>
+            <a:pPr algn="l">
+              <a:lnSpc>
+                <a:spcPct val="125000"/>
               </a:lnSpc>
               <a:spcBef>
                 <a:spcPts val="0"/>
@@ -23635,7 +23570,7 @@
           <a:p>
             <a:pPr algn="l">
               <a:lnSpc>
-                <a:spcPts val="2080"/>
+                <a:spcPct val="125000"/>
               </a:lnSpc>
               <a:spcBef>
                 <a:spcPts val="800"/>
@@ -23657,7 +23592,7 @@
           <a:p>
             <a:pPr algn="l">
               <a:lnSpc>
-                <a:spcPts val="1820"/>
+                <a:spcPct val="125000"/>
               </a:lnSpc>
               <a:spcBef>
                 <a:spcPts val="200"/>
@@ -23679,7 +23614,7 @@
           <a:p>
             <a:pPr algn="l">
               <a:lnSpc>
-                <a:spcPts val="2080"/>
+                <a:spcPct val="125000"/>
               </a:lnSpc>
               <a:spcBef>
                 <a:spcPts val="800"/>
@@ -23701,7 +23636,7 @@
           <a:p>
             <a:pPr algn="l">
               <a:lnSpc>
-                <a:spcPts val="1820"/>
+                <a:spcPct val="125000"/>
               </a:lnSpc>
               <a:spcBef>
                 <a:spcPts val="200"/>
@@ -23723,7 +23658,7 @@
           <a:p>
             <a:pPr algn="l">
               <a:lnSpc>
-                <a:spcPts val="1820"/>
+                <a:spcPct val="125000"/>
               </a:lnSpc>
               <a:spcBef>
                 <a:spcPts val="200"/>
@@ -23745,7 +23680,7 @@
           <a:p>
             <a:pPr algn="l">
               <a:lnSpc>
-                <a:spcPts val="1820"/>
+                <a:spcPct val="125000"/>
               </a:lnSpc>
               <a:spcBef>
                 <a:spcPts val="200"/>
@@ -23767,7 +23702,7 @@
           <a:p>
             <a:pPr algn="l">
               <a:lnSpc>
-                <a:spcPts val="1820"/>
+                <a:spcPct val="125000"/>
               </a:lnSpc>
               <a:spcBef>
                 <a:spcPts val="200"/>
@@ -23789,7 +23724,7 @@
           <a:p>
             <a:pPr algn="l">
               <a:lnSpc>
-                <a:spcPts val="1820"/>
+                <a:spcPct val="125000"/>
               </a:lnSpc>
               <a:spcBef>
                 <a:spcPts val="200"/>
@@ -23811,7 +23746,7 @@
           <a:p>
             <a:pPr algn="l">
               <a:lnSpc>
-                <a:spcPts val="1820"/>
+                <a:spcPct val="125000"/>
               </a:lnSpc>
               <a:spcBef>
                 <a:spcPts val="200"/>
@@ -23833,7 +23768,7 @@
           <a:p>
             <a:pPr algn="l">
               <a:lnSpc>
-                <a:spcPts val="1820"/>
+                <a:spcPct val="125000"/>
               </a:lnSpc>
               <a:spcBef>
                 <a:spcPts val="200"/>
@@ -23855,7 +23790,7 @@
           <a:p>
             <a:pPr algn="l">
               <a:lnSpc>
-                <a:spcPts val="1820"/>
+                <a:spcPct val="125000"/>
               </a:lnSpc>
               <a:spcBef>
                 <a:spcPts val="200"/>
@@ -23877,7 +23812,7 @@
           <a:p>
             <a:pPr algn="l">
               <a:lnSpc>
-                <a:spcPts val="1820"/>
+                <a:spcPct val="125000"/>
               </a:lnSpc>
               <a:spcBef>
                 <a:spcPts val="200"/>
@@ -23899,7 +23834,7 @@
           <a:p>
             <a:pPr algn="l">
               <a:lnSpc>
-                <a:spcPts val="1820"/>
+                <a:spcPct val="125000"/>
               </a:lnSpc>
               <a:spcBef>
                 <a:spcPts val="200"/>
@@ -23921,7 +23856,7 @@
           <a:p>
             <a:pPr algn="l">
               <a:lnSpc>
-                <a:spcPts val="2080"/>
+                <a:spcPct val="125000"/>
               </a:lnSpc>
               <a:spcBef>
                 <a:spcPts val="800"/>
@@ -23943,7 +23878,7 @@
           <a:p>
             <a:pPr algn="l">
               <a:lnSpc>
-                <a:spcPts val="1820"/>
+                <a:spcPct val="125000"/>
               </a:lnSpc>
               <a:spcBef>
                 <a:spcPts val="200"/>
@@ -23965,7 +23900,7 @@
           <a:p>
             <a:pPr algn="l">
               <a:lnSpc>
-                <a:spcPts val="2080"/>
+                <a:spcPct val="125000"/>
               </a:lnSpc>
               <a:spcBef>
                 <a:spcPts val="800"/>
@@ -23987,7 +23922,7 @@
           <a:p>
             <a:pPr algn="l">
               <a:lnSpc>
-                <a:spcPts val="1820"/>
+                <a:spcPct val="125000"/>
               </a:lnSpc>
               <a:spcBef>
                 <a:spcPts val="200"/>
@@ -24098,11 +24033,10 @@
             <a:spAutoFit/>
           </a:bodyPr>
           <a:lstStyle/>
-          <a:p/>
-          <a:p>
-            <a:pPr algn="l">
-              <a:lnSpc>
-                <a:spcPts val="2080"/>
+          <a:p>
+            <a:pPr algn="l">
+              <a:lnSpc>
+                <a:spcPct val="125000"/>
               </a:lnSpc>
               <a:spcBef>
                 <a:spcPts val="0"/>
@@ -24124,7 +24058,7 @@
           <a:p>
             <a:pPr algn="l">
               <a:lnSpc>
-                <a:spcPts val="2080"/>
+                <a:spcPct val="125000"/>
               </a:lnSpc>
               <a:spcBef>
                 <a:spcPts val="800"/>
@@ -24146,7 +24080,7 @@
           <a:p>
             <a:pPr algn="l">
               <a:lnSpc>
-                <a:spcPts val="1820"/>
+                <a:spcPct val="125000"/>
               </a:lnSpc>
               <a:spcBef>
                 <a:spcPts val="200"/>
@@ -24168,7 +24102,7 @@
           <a:p>
             <a:pPr algn="l">
               <a:lnSpc>
-                <a:spcPts val="2080"/>
+                <a:spcPct val="125000"/>
               </a:lnSpc>
               <a:spcBef>
                 <a:spcPts val="800"/>
@@ -24190,7 +24124,7 @@
           <a:p>
             <a:pPr algn="l">
               <a:lnSpc>
-                <a:spcPts val="1820"/>
+                <a:spcPct val="125000"/>
               </a:lnSpc>
               <a:spcBef>
                 <a:spcPts val="200"/>
@@ -24212,7 +24146,7 @@
           <a:p>
             <a:pPr algn="l">
               <a:lnSpc>
-                <a:spcPts val="2080"/>
+                <a:spcPct val="125000"/>
               </a:lnSpc>
               <a:spcBef>
                 <a:spcPts val="800"/>
@@ -24234,7 +24168,7 @@
           <a:p>
             <a:pPr algn="l">
               <a:lnSpc>
-                <a:spcPts val="1820"/>
+                <a:spcPct val="125000"/>
               </a:lnSpc>
               <a:spcBef>
                 <a:spcPts val="200"/>
@@ -24256,7 +24190,7 @@
           <a:p>
             <a:pPr algn="l">
               <a:lnSpc>
-                <a:spcPts val="2080"/>
+                <a:spcPct val="125000"/>
               </a:lnSpc>
               <a:spcBef>
                 <a:spcPts val="800"/>
@@ -24278,7 +24212,7 @@
           <a:p>
             <a:pPr algn="l">
               <a:lnSpc>
-                <a:spcPts val="1820"/>
+                <a:spcPct val="125000"/>
               </a:lnSpc>
               <a:spcBef>
                 <a:spcPts val="200"/>
@@ -24389,11 +24323,10 @@
             <a:spAutoFit/>
           </a:bodyPr>
           <a:lstStyle/>
-          <a:p/>
-          <a:p>
-            <a:pPr algn="l">
-              <a:lnSpc>
-                <a:spcPts val="2080"/>
+          <a:p>
+            <a:pPr algn="l">
+              <a:lnSpc>
+                <a:spcPct val="125000"/>
               </a:lnSpc>
               <a:spcBef>
                 <a:spcPts val="0"/>
@@ -24415,7 +24348,7 @@
           <a:p>
             <a:pPr algn="l">
               <a:lnSpc>
-                <a:spcPts val="2080"/>
+                <a:spcPct val="125000"/>
               </a:lnSpc>
               <a:spcBef>
                 <a:spcPts val="800"/>
@@ -24437,7 +24370,7 @@
           <a:p>
             <a:pPr algn="l">
               <a:lnSpc>
-                <a:spcPts val="1820"/>
+                <a:spcPct val="125000"/>
               </a:lnSpc>
               <a:spcBef>
                 <a:spcPts val="200"/>
@@ -24459,7 +24392,7 @@
           <a:p>
             <a:pPr algn="l">
               <a:lnSpc>
-                <a:spcPts val="2080"/>
+                <a:spcPct val="125000"/>
               </a:lnSpc>
               <a:spcBef>
                 <a:spcPts val="800"/>
@@ -24481,7 +24414,7 @@
           <a:p>
             <a:pPr algn="l">
               <a:lnSpc>
-                <a:spcPts val="1820"/>
+                <a:spcPct val="125000"/>
               </a:lnSpc>
               <a:spcBef>
                 <a:spcPts val="200"/>
@@ -24503,7 +24436,7 @@
           <a:p>
             <a:pPr algn="l">
               <a:lnSpc>
-                <a:spcPts val="1820"/>
+                <a:spcPct val="125000"/>
               </a:lnSpc>
               <a:spcBef>
                 <a:spcPts val="200"/>
@@ -24525,7 +24458,7 @@
           <a:p>
             <a:pPr algn="l">
               <a:lnSpc>
-                <a:spcPts val="1820"/>
+                <a:spcPct val="125000"/>
               </a:lnSpc>
               <a:spcBef>
                 <a:spcPts val="200"/>
@@ -24547,7 +24480,7 @@
           <a:p>
             <a:pPr algn="l">
               <a:lnSpc>
-                <a:spcPts val="1820"/>
+                <a:spcPct val="125000"/>
               </a:lnSpc>
               <a:spcBef>
                 <a:spcPts val="200"/>
@@ -24569,7 +24502,7 @@
           <a:p>
             <a:pPr algn="l">
               <a:lnSpc>
-                <a:spcPts val="1820"/>
+                <a:spcPct val="125000"/>
               </a:lnSpc>
               <a:spcBef>
                 <a:spcPts val="200"/>
@@ -24591,7 +24524,7 @@
           <a:p>
             <a:pPr algn="l">
               <a:lnSpc>
-                <a:spcPts val="1820"/>
+                <a:spcPct val="125000"/>
               </a:lnSpc>
               <a:spcBef>
                 <a:spcPts val="200"/>
@@ -24613,7 +24546,7 @@
           <a:p>
             <a:pPr algn="l">
               <a:lnSpc>
-                <a:spcPts val="1820"/>
+                <a:spcPct val="125000"/>
               </a:lnSpc>
               <a:spcBef>
                 <a:spcPts val="200"/>
@@ -24635,7 +24568,7 @@
           <a:p>
             <a:pPr algn="l">
               <a:lnSpc>
-                <a:spcPts val="2080"/>
+                <a:spcPct val="125000"/>
               </a:lnSpc>
               <a:spcBef>
                 <a:spcPts val="800"/>
@@ -24657,7 +24590,7 @@
           <a:p>
             <a:pPr algn="l">
               <a:lnSpc>
-                <a:spcPts val="1820"/>
+                <a:spcPct val="125000"/>
               </a:lnSpc>
               <a:spcBef>
                 <a:spcPts val="200"/>
@@ -24679,7 +24612,7 @@
           <a:p>
             <a:pPr algn="l">
               <a:lnSpc>
-                <a:spcPts val="2080"/>
+                <a:spcPct val="125000"/>
               </a:lnSpc>
               <a:spcBef>
                 <a:spcPts val="800"/>
@@ -24701,7 +24634,7 @@
           <a:p>
             <a:pPr algn="l">
               <a:lnSpc>
-                <a:spcPts val="1820"/>
+                <a:spcPct val="125000"/>
               </a:lnSpc>
               <a:spcBef>
                 <a:spcPts val="200"/>
@@ -24812,11 +24745,10 @@
             <a:spAutoFit/>
           </a:bodyPr>
           <a:lstStyle/>
-          <a:p/>
-          <a:p>
-            <a:pPr algn="l">
-              <a:lnSpc>
-                <a:spcPts val="2080"/>
+          <a:p>
+            <a:pPr algn="l">
+              <a:lnSpc>
+                <a:spcPct val="125000"/>
               </a:lnSpc>
               <a:spcBef>
                 <a:spcPts val="0"/>
@@ -24838,7 +24770,7 @@
           <a:p>
             <a:pPr algn="l">
               <a:lnSpc>
-                <a:spcPts val="2080"/>
+                <a:spcPct val="125000"/>
               </a:lnSpc>
               <a:spcBef>
                 <a:spcPts val="800"/>
@@ -24860,7 +24792,7 @@
           <a:p>
             <a:pPr algn="l">
               <a:lnSpc>
-                <a:spcPts val="1820"/>
+                <a:spcPct val="125000"/>
               </a:lnSpc>
               <a:spcBef>
                 <a:spcPts val="200"/>
@@ -24882,7 +24814,7 @@
           <a:p>
             <a:pPr algn="l">
               <a:lnSpc>
-                <a:spcPts val="2080"/>
+                <a:spcPct val="125000"/>
               </a:lnSpc>
               <a:spcBef>
                 <a:spcPts val="800"/>
@@ -24904,7 +24836,7 @@
           <a:p>
             <a:pPr algn="l">
               <a:lnSpc>
-                <a:spcPts val="1820"/>
+                <a:spcPct val="125000"/>
               </a:lnSpc>
               <a:spcBef>
                 <a:spcPts val="200"/>
@@ -24926,7 +24858,7 @@
           <a:p>
             <a:pPr algn="l">
               <a:lnSpc>
-                <a:spcPts val="1820"/>
+                <a:spcPct val="125000"/>
               </a:lnSpc>
               <a:spcBef>
                 <a:spcPts val="200"/>
@@ -24948,7 +24880,7 @@
           <a:p>
             <a:pPr algn="l">
               <a:lnSpc>
-                <a:spcPts val="1820"/>
+                <a:spcPct val="125000"/>
               </a:lnSpc>
               <a:spcBef>
                 <a:spcPts val="200"/>
@@ -24970,7 +24902,7 @@
           <a:p>
             <a:pPr algn="l">
               <a:lnSpc>
-                <a:spcPts val="2080"/>
+                <a:spcPct val="125000"/>
               </a:lnSpc>
               <a:spcBef>
                 <a:spcPts val="800"/>
@@ -24992,7 +24924,7 @@
           <a:p>
             <a:pPr algn="l">
               <a:lnSpc>
-                <a:spcPts val="1820"/>
+                <a:spcPct val="125000"/>
               </a:lnSpc>
               <a:spcBef>
                 <a:spcPts val="200"/>
@@ -25014,7 +24946,7 @@
           <a:p>
             <a:pPr algn="l">
               <a:lnSpc>
-                <a:spcPts val="2080"/>
+                <a:spcPct val="125000"/>
               </a:lnSpc>
               <a:spcBef>
                 <a:spcPts val="800"/>
@@ -25036,7 +24968,7 @@
           <a:p>
             <a:pPr algn="l">
               <a:lnSpc>
-                <a:spcPts val="1820"/>
+                <a:spcPct val="125000"/>
               </a:lnSpc>
               <a:spcBef>
                 <a:spcPts val="200"/>
@@ -25147,11 +25079,10 @@
             <a:spAutoFit/>
           </a:bodyPr>
           <a:lstStyle/>
-          <a:p/>
-          <a:p>
-            <a:pPr algn="l">
-              <a:lnSpc>
-                <a:spcPts val="2080"/>
+          <a:p>
+            <a:pPr algn="l">
+              <a:lnSpc>
+                <a:spcPct val="125000"/>
               </a:lnSpc>
               <a:spcBef>
                 <a:spcPts val="0"/>
@@ -25173,7 +25104,7 @@
           <a:p>
             <a:pPr algn="l">
               <a:lnSpc>
-                <a:spcPts val="2080"/>
+                <a:spcPct val="125000"/>
               </a:lnSpc>
               <a:spcBef>
                 <a:spcPts val="800"/>
@@ -25195,7 +25126,7 @@
           <a:p>
             <a:pPr algn="l">
               <a:lnSpc>
-                <a:spcPts val="1820"/>
+                <a:spcPct val="125000"/>
               </a:lnSpc>
               <a:spcBef>
                 <a:spcPts val="200"/>
@@ -25217,7 +25148,7 @@
           <a:p>
             <a:pPr algn="l">
               <a:lnSpc>
-                <a:spcPts val="2080"/>
+                <a:spcPct val="125000"/>
               </a:lnSpc>
               <a:spcBef>
                 <a:spcPts val="800"/>
@@ -25239,7 +25170,7 @@
           <a:p>
             <a:pPr algn="l">
               <a:lnSpc>
-                <a:spcPts val="1820"/>
+                <a:spcPct val="125000"/>
               </a:lnSpc>
               <a:spcBef>
                 <a:spcPts val="200"/>
@@ -25261,7 +25192,7 @@
           <a:p>
             <a:pPr algn="l">
               <a:lnSpc>
-                <a:spcPts val="1820"/>
+                <a:spcPct val="125000"/>
               </a:lnSpc>
               <a:spcBef>
                 <a:spcPts val="200"/>
@@ -25283,7 +25214,7 @@
           <a:p>
             <a:pPr algn="l">
               <a:lnSpc>
-                <a:spcPts val="1820"/>
+                <a:spcPct val="125000"/>
               </a:lnSpc>
               <a:spcBef>
                 <a:spcPts val="200"/>
@@ -25305,7 +25236,7 @@
           <a:p>
             <a:pPr algn="l">
               <a:lnSpc>
-                <a:spcPts val="1820"/>
+                <a:spcPct val="125000"/>
               </a:lnSpc>
               <a:spcBef>
                 <a:spcPts val="200"/>
@@ -25327,7 +25258,7 @@
           <a:p>
             <a:pPr algn="l">
               <a:lnSpc>
-                <a:spcPts val="1820"/>
+                <a:spcPct val="125000"/>
               </a:lnSpc>
               <a:spcBef>
                 <a:spcPts val="200"/>
@@ -25349,7 +25280,7 @@
           <a:p>
             <a:pPr algn="l">
               <a:lnSpc>
-                <a:spcPts val="1820"/>
+                <a:spcPct val="125000"/>
               </a:lnSpc>
               <a:spcBef>
                 <a:spcPts val="200"/>
@@ -25371,7 +25302,7 @@
           <a:p>
             <a:pPr algn="l">
               <a:lnSpc>
-                <a:spcPts val="1820"/>
+                <a:spcPct val="125000"/>
               </a:lnSpc>
               <a:spcBef>
                 <a:spcPts val="200"/>
@@ -25393,7 +25324,7 @@
           <a:p>
             <a:pPr algn="l">
               <a:lnSpc>
-                <a:spcPts val="1820"/>
+                <a:spcPct val="125000"/>
               </a:lnSpc>
               <a:spcBef>
                 <a:spcPts val="200"/>
@@ -25415,7 +25346,7 @@
           <a:p>
             <a:pPr algn="l">
               <a:lnSpc>
-                <a:spcPts val="1820"/>
+                <a:spcPct val="125000"/>
               </a:lnSpc>
               <a:spcBef>
                 <a:spcPts val="200"/>
@@ -25437,7 +25368,7 @@
           <a:p>
             <a:pPr algn="l">
               <a:lnSpc>
-                <a:spcPts val="1820"/>
+                <a:spcPct val="125000"/>
               </a:lnSpc>
               <a:spcBef>
                 <a:spcPts val="200"/>
@@ -25459,7 +25390,7 @@
           <a:p>
             <a:pPr algn="l">
               <a:lnSpc>
-                <a:spcPts val="1820"/>
+                <a:spcPct val="125000"/>
               </a:lnSpc>
               <a:spcBef>
                 <a:spcPts val="200"/>
@@ -25481,7 +25412,7 @@
           <a:p>
             <a:pPr algn="l">
               <a:lnSpc>
-                <a:spcPts val="1820"/>
+                <a:spcPct val="125000"/>
               </a:lnSpc>
               <a:spcBef>
                 <a:spcPts val="200"/>
@@ -25503,7 +25434,7 @@
           <a:p>
             <a:pPr algn="l">
               <a:lnSpc>
-                <a:spcPts val="2080"/>
+                <a:spcPct val="125000"/>
               </a:lnSpc>
               <a:spcBef>
                 <a:spcPts val="800"/>
@@ -25525,7 +25456,7 @@
           <a:p>
             <a:pPr algn="l">
               <a:lnSpc>
-                <a:spcPts val="1820"/>
+                <a:spcPct val="125000"/>
               </a:lnSpc>
               <a:spcBef>
                 <a:spcPts val="200"/>
@@ -25547,7 +25478,7 @@
           <a:p>
             <a:pPr algn="l">
               <a:lnSpc>
-                <a:spcPts val="2080"/>
+                <a:spcPct val="125000"/>
               </a:lnSpc>
               <a:spcBef>
                 <a:spcPts val="800"/>
@@ -25569,7 +25500,7 @@
           <a:p>
             <a:pPr algn="l">
               <a:lnSpc>
-                <a:spcPts val="1820"/>
+                <a:spcPct val="125000"/>
               </a:lnSpc>
               <a:spcBef>
                 <a:spcPts val="200"/>
@@ -25680,11 +25611,10 @@
             <a:spAutoFit/>
           </a:bodyPr>
           <a:lstStyle/>
-          <a:p/>
-          <a:p>
-            <a:pPr algn="l">
-              <a:lnSpc>
-                <a:spcPts val="2080"/>
+          <a:p>
+            <a:pPr algn="l">
+              <a:lnSpc>
+                <a:spcPct val="125000"/>
               </a:lnSpc>
               <a:spcBef>
                 <a:spcPts val="0"/>
@@ -25706,7 +25636,7 @@
           <a:p>
             <a:pPr algn="l">
               <a:lnSpc>
-                <a:spcPts val="2080"/>
+                <a:spcPct val="125000"/>
               </a:lnSpc>
               <a:spcBef>
                 <a:spcPts val="800"/>
@@ -25728,7 +25658,7 @@
           <a:p>
             <a:pPr algn="l">
               <a:lnSpc>
-                <a:spcPts val="1820"/>
+                <a:spcPct val="125000"/>
               </a:lnSpc>
               <a:spcBef>
                 <a:spcPts val="200"/>
@@ -25750,7 +25680,7 @@
           <a:p>
             <a:pPr algn="l">
               <a:lnSpc>
-                <a:spcPts val="2080"/>
+                <a:spcPct val="125000"/>
               </a:lnSpc>
               <a:spcBef>
                 <a:spcPts val="800"/>
@@ -25772,7 +25702,7 @@
           <a:p>
             <a:pPr algn="l">
               <a:lnSpc>
-                <a:spcPts val="1820"/>
+                <a:spcPct val="125000"/>
               </a:lnSpc>
               <a:spcBef>
                 <a:spcPts val="200"/>
@@ -25794,7 +25724,7 @@
           <a:p>
             <a:pPr algn="l">
               <a:lnSpc>
-                <a:spcPts val="1820"/>
+                <a:spcPct val="125000"/>
               </a:lnSpc>
               <a:spcBef>
                 <a:spcPts val="200"/>
@@ -25816,7 +25746,7 @@
           <a:p>
             <a:pPr algn="l">
               <a:lnSpc>
-                <a:spcPts val="1820"/>
+                <a:spcPct val="125000"/>
               </a:lnSpc>
               <a:spcBef>
                 <a:spcPts val="200"/>
@@ -25838,7 +25768,7 @@
           <a:p>
             <a:pPr algn="l">
               <a:lnSpc>
-                <a:spcPts val="1820"/>
+                <a:spcPct val="125000"/>
               </a:lnSpc>
               <a:spcBef>
                 <a:spcPts val="200"/>
@@ -25860,7 +25790,7 @@
           <a:p>
             <a:pPr algn="l">
               <a:lnSpc>
-                <a:spcPts val="1820"/>
+                <a:spcPct val="125000"/>
               </a:lnSpc>
               <a:spcBef>
                 <a:spcPts val="200"/>
@@ -25882,7 +25812,7 @@
           <a:p>
             <a:pPr algn="l">
               <a:lnSpc>
-                <a:spcPts val="2080"/>
+                <a:spcPct val="125000"/>
               </a:lnSpc>
               <a:spcBef>
                 <a:spcPts val="800"/>
@@ -25904,7 +25834,7 @@
           <a:p>
             <a:pPr algn="l">
               <a:lnSpc>
-                <a:spcPts val="1820"/>
+                <a:spcPct val="125000"/>
               </a:lnSpc>
               <a:spcBef>
                 <a:spcPts val="200"/>
@@ -25926,7 +25856,7 @@
           <a:p>
             <a:pPr algn="l">
               <a:lnSpc>
-                <a:spcPts val="2080"/>
+                <a:spcPct val="125000"/>
               </a:lnSpc>
               <a:spcBef>
                 <a:spcPts val="800"/>
@@ -25948,7 +25878,7 @@
           <a:p>
             <a:pPr algn="l">
               <a:lnSpc>
-                <a:spcPts val="1820"/>
+                <a:spcPct val="125000"/>
               </a:lnSpc>
               <a:spcBef>
                 <a:spcPts val="200"/>
@@ -26059,11 +25989,10 @@
             <a:spAutoFit/>
           </a:bodyPr>
           <a:lstStyle/>
-          <a:p/>
-          <a:p>
-            <a:pPr algn="l">
-              <a:lnSpc>
-                <a:spcPts val="2080"/>
+          <a:p>
+            <a:pPr algn="l">
+              <a:lnSpc>
+                <a:spcPct val="125000"/>
               </a:lnSpc>
               <a:spcBef>
                 <a:spcPts val="0"/>
@@ -26085,7 +26014,7 @@
           <a:p>
             <a:pPr algn="l">
               <a:lnSpc>
-                <a:spcPts val="2080"/>
+                <a:spcPct val="125000"/>
               </a:lnSpc>
               <a:spcBef>
                 <a:spcPts val="800"/>
@@ -26107,7 +26036,7 @@
           <a:p>
             <a:pPr algn="l">
               <a:lnSpc>
-                <a:spcPts val="1820"/>
+                <a:spcPct val="125000"/>
               </a:lnSpc>
               <a:spcBef>
                 <a:spcPts val="200"/>
@@ -26129,7 +26058,7 @@
           <a:p>
             <a:pPr algn="l">
               <a:lnSpc>
-                <a:spcPts val="2080"/>
+                <a:spcPct val="125000"/>
               </a:lnSpc>
               <a:spcBef>
                 <a:spcPts val="800"/>
@@ -26151,7 +26080,7 @@
           <a:p>
             <a:pPr algn="l">
               <a:lnSpc>
-                <a:spcPts val="1820"/>
+                <a:spcPct val="125000"/>
               </a:lnSpc>
               <a:spcBef>
                 <a:spcPts val="200"/>
@@ -26173,7 +26102,7 @@
           <a:p>
             <a:pPr algn="l">
               <a:lnSpc>
-                <a:spcPts val="1820"/>
+                <a:spcPct val="125000"/>
               </a:lnSpc>
               <a:spcBef>
                 <a:spcPts val="200"/>
@@ -26195,7 +26124,7 @@
           <a:p>
             <a:pPr algn="l">
               <a:lnSpc>
-                <a:spcPts val="1820"/>
+                <a:spcPct val="125000"/>
               </a:lnSpc>
               <a:spcBef>
                 <a:spcPts val="200"/>
@@ -26217,7 +26146,7 @@
           <a:p>
             <a:pPr algn="l">
               <a:lnSpc>
-                <a:spcPts val="1820"/>
+                <a:spcPct val="125000"/>
               </a:lnSpc>
               <a:spcBef>
                 <a:spcPts val="200"/>
@@ -26239,7 +26168,7 @@
           <a:p>
             <a:pPr algn="l">
               <a:lnSpc>
-                <a:spcPts val="1820"/>
+                <a:spcPct val="125000"/>
               </a:lnSpc>
               <a:spcBef>
                 <a:spcPts val="200"/>
@@ -26261,7 +26190,7 @@
           <a:p>
             <a:pPr algn="l">
               <a:lnSpc>
-                <a:spcPts val="1820"/>
+                <a:spcPct val="125000"/>
               </a:lnSpc>
               <a:spcBef>
                 <a:spcPts val="200"/>
@@ -26283,7 +26212,7 @@
           <a:p>
             <a:pPr algn="l">
               <a:lnSpc>
-                <a:spcPts val="1820"/>
+                <a:spcPct val="125000"/>
               </a:lnSpc>
               <a:spcBef>
                 <a:spcPts val="200"/>
@@ -26305,7 +26234,7 @@
           <a:p>
             <a:pPr algn="l">
               <a:lnSpc>
-                <a:spcPts val="1820"/>
+                <a:spcPct val="125000"/>
               </a:lnSpc>
               <a:spcBef>
                 <a:spcPts val="200"/>
@@ -26327,7 +26256,7 @@
           <a:p>
             <a:pPr algn="l">
               <a:lnSpc>
-                <a:spcPts val="1820"/>
+                <a:spcPct val="125000"/>
               </a:lnSpc>
               <a:spcBef>
                 <a:spcPts val="200"/>
@@ -26349,7 +26278,7 @@
           <a:p>
             <a:pPr algn="l">
               <a:lnSpc>
-                <a:spcPts val="1820"/>
+                <a:spcPct val="125000"/>
               </a:lnSpc>
               <a:spcBef>
                 <a:spcPts val="200"/>
@@ -26371,7 +26300,7 @@
           <a:p>
             <a:pPr algn="l">
               <a:lnSpc>
-                <a:spcPts val="1820"/>
+                <a:spcPct val="125000"/>
               </a:lnSpc>
               <a:spcBef>
                 <a:spcPts val="200"/>
@@ -26393,7 +26322,7 @@
           <a:p>
             <a:pPr algn="l">
               <a:lnSpc>
-                <a:spcPts val="1820"/>
+                <a:spcPct val="125000"/>
               </a:lnSpc>
               <a:spcBef>
                 <a:spcPts val="200"/>
@@ -26415,7 +26344,7 @@
           <a:p>
             <a:pPr algn="l">
               <a:lnSpc>
-                <a:spcPts val="2080"/>
+                <a:spcPct val="125000"/>
               </a:lnSpc>
               <a:spcBef>
                 <a:spcPts val="800"/>
@@ -26437,7 +26366,7 @@
           <a:p>
             <a:pPr algn="l">
               <a:lnSpc>
-                <a:spcPts val="1820"/>
+                <a:spcPct val="125000"/>
               </a:lnSpc>
               <a:spcBef>
                 <a:spcPts val="200"/>
@@ -26459,7 +26388,7 @@
           <a:p>
             <a:pPr algn="l">
               <a:lnSpc>
-                <a:spcPts val="2080"/>
+                <a:spcPct val="125000"/>
               </a:lnSpc>
               <a:spcBef>
                 <a:spcPts val="800"/>
@@ -26481,7 +26410,7 @@
           <a:p>
             <a:pPr algn="l">
               <a:lnSpc>
-                <a:spcPts val="1820"/>
+                <a:spcPct val="125000"/>
               </a:lnSpc>
               <a:spcBef>
                 <a:spcPts val="200"/>
@@ -26592,11 +26521,10 @@
             <a:spAutoFit/>
           </a:bodyPr>
           <a:lstStyle/>
-          <a:p/>
-          <a:p>
-            <a:pPr algn="l">
-              <a:lnSpc>
-                <a:spcPts val="2080"/>
+          <a:p>
+            <a:pPr algn="l">
+              <a:lnSpc>
+                <a:spcPct val="125000"/>
               </a:lnSpc>
               <a:spcBef>
                 <a:spcPts val="0"/>
@@ -26618,7 +26546,7 @@
           <a:p>
             <a:pPr algn="l">
               <a:lnSpc>
-                <a:spcPts val="2080"/>
+                <a:spcPct val="125000"/>
               </a:lnSpc>
               <a:spcBef>
                 <a:spcPts val="800"/>
@@ -26640,7 +26568,7 @@
           <a:p>
             <a:pPr algn="l">
               <a:lnSpc>
-                <a:spcPts val="1820"/>
+                <a:spcPct val="125000"/>
               </a:lnSpc>
               <a:spcBef>
                 <a:spcPts val="200"/>
@@ -26662,7 +26590,7 @@
           <a:p>
             <a:pPr algn="l">
               <a:lnSpc>
-                <a:spcPts val="2080"/>
+                <a:spcPct val="125000"/>
               </a:lnSpc>
               <a:spcBef>
                 <a:spcPts val="800"/>
@@ -26684,7 +26612,7 @@
           <a:p>
             <a:pPr algn="l">
               <a:lnSpc>
-                <a:spcPts val="1820"/>
+                <a:spcPct val="125000"/>
               </a:lnSpc>
               <a:spcBef>
                 <a:spcPts val="200"/>
@@ -26706,7 +26634,7 @@
           <a:p>
             <a:pPr algn="l">
               <a:lnSpc>
-                <a:spcPts val="1820"/>
+                <a:spcPct val="125000"/>
               </a:lnSpc>
               <a:spcBef>
                 <a:spcPts val="200"/>
@@ -26728,7 +26656,7 @@
           <a:p>
             <a:pPr algn="l">
               <a:lnSpc>
-                <a:spcPts val="1820"/>
+                <a:spcPct val="125000"/>
               </a:lnSpc>
               <a:spcBef>
                 <a:spcPts val="200"/>
@@ -26750,7 +26678,7 @@
           <a:p>
             <a:pPr algn="l">
               <a:lnSpc>
-                <a:spcPts val="1820"/>
+                <a:spcPct val="125000"/>
               </a:lnSpc>
               <a:spcBef>
                 <a:spcPts val="200"/>
@@ -26772,7 +26700,7 @@
           <a:p>
             <a:pPr algn="l">
               <a:lnSpc>
-                <a:spcPts val="1820"/>
+                <a:spcPct val="125000"/>
               </a:lnSpc>
               <a:spcBef>
                 <a:spcPts val="200"/>
@@ -26794,7 +26722,7 @@
           <a:p>
             <a:pPr algn="l">
               <a:lnSpc>
-                <a:spcPts val="1820"/>
+                <a:spcPct val="125000"/>
               </a:lnSpc>
               <a:spcBef>
                 <a:spcPts val="200"/>
@@ -26816,7 +26744,7 @@
           <a:p>
             <a:pPr algn="l">
               <a:lnSpc>
-                <a:spcPts val="1820"/>
+                <a:spcPct val="125000"/>
               </a:lnSpc>
               <a:spcBef>
                 <a:spcPts val="200"/>
@@ -26838,7 +26766,7 @@
           <a:p>
             <a:pPr algn="l">
               <a:lnSpc>
-                <a:spcPts val="1820"/>
+                <a:spcPct val="125000"/>
               </a:lnSpc>
               <a:spcBef>
                 <a:spcPts val="200"/>
@@ -26860,7 +26788,7 @@
           <a:p>
             <a:pPr algn="l">
               <a:lnSpc>
-                <a:spcPts val="1820"/>
+                <a:spcPct val="125000"/>
               </a:lnSpc>
               <a:spcBef>
                 <a:spcPts val="200"/>
@@ -26882,7 +26810,7 @@
           <a:p>
             <a:pPr algn="l">
               <a:lnSpc>
-                <a:spcPts val="1820"/>
+                <a:spcPct val="125000"/>
               </a:lnSpc>
               <a:spcBef>
                 <a:spcPts val="200"/>
@@ -26904,7 +26832,7 @@
           <a:p>
             <a:pPr algn="l">
               <a:lnSpc>
-                <a:spcPts val="1820"/>
+                <a:spcPct val="125000"/>
               </a:lnSpc>
               <a:spcBef>
                 <a:spcPts val="200"/>
@@ -26926,7 +26854,7 @@
           <a:p>
             <a:pPr algn="l">
               <a:lnSpc>
-                <a:spcPts val="1820"/>
+                <a:spcPct val="125000"/>
               </a:lnSpc>
               <a:spcBef>
                 <a:spcPts val="200"/>
@@ -26948,7 +26876,7 @@
           <a:p>
             <a:pPr algn="l">
               <a:lnSpc>
-                <a:spcPts val="1820"/>
+                <a:spcPct val="125000"/>
               </a:lnSpc>
               <a:spcBef>
                 <a:spcPts val="200"/>
@@ -26970,7 +26898,7 @@
           <a:p>
             <a:pPr algn="l">
               <a:lnSpc>
-                <a:spcPts val="2080"/>
+                <a:spcPct val="125000"/>
               </a:lnSpc>
               <a:spcBef>
                 <a:spcPts val="800"/>
@@ -26992,7 +26920,7 @@
           <a:p>
             <a:pPr algn="l">
               <a:lnSpc>
-                <a:spcPts val="1820"/>
+                <a:spcPct val="125000"/>
               </a:lnSpc>
               <a:spcBef>
                 <a:spcPts val="200"/>
@@ -27014,7 +26942,7 @@
           <a:p>
             <a:pPr algn="l">
               <a:lnSpc>
-                <a:spcPts val="2080"/>
+                <a:spcPct val="125000"/>
               </a:lnSpc>
               <a:spcBef>
                 <a:spcPts val="800"/>
@@ -27036,7 +26964,7 @@
           <a:p>
             <a:pPr algn="l">
               <a:lnSpc>
-                <a:spcPts val="1820"/>
+                <a:spcPct val="125000"/>
               </a:lnSpc>
               <a:spcBef>
                 <a:spcPts val="200"/>
@@ -27147,11 +27075,10 @@
             <a:spAutoFit/>
           </a:bodyPr>
           <a:lstStyle/>
-          <a:p/>
-          <a:p>
-            <a:pPr algn="l">
-              <a:lnSpc>
-                <a:spcPts val="2080"/>
+          <a:p>
+            <a:pPr algn="l">
+              <a:lnSpc>
+                <a:spcPct val="125000"/>
               </a:lnSpc>
               <a:spcBef>
                 <a:spcPts val="0"/>
@@ -27173,7 +27100,7 @@
           <a:p>
             <a:pPr algn="l">
               <a:lnSpc>
-                <a:spcPts val="2080"/>
+                <a:spcPct val="125000"/>
               </a:lnSpc>
               <a:spcBef>
                 <a:spcPts val="800"/>
@@ -27195,7 +27122,7 @@
           <a:p>
             <a:pPr algn="l">
               <a:lnSpc>
-                <a:spcPts val="1820"/>
+                <a:spcPct val="125000"/>
               </a:lnSpc>
               <a:spcBef>
                 <a:spcPts val="200"/>
@@ -27217,7 +27144,7 @@
           <a:p>
             <a:pPr algn="l">
               <a:lnSpc>
-                <a:spcPts val="2080"/>
+                <a:spcPct val="125000"/>
               </a:lnSpc>
               <a:spcBef>
                 <a:spcPts val="800"/>
@@ -27239,7 +27166,7 @@
           <a:p>
             <a:pPr algn="l">
               <a:lnSpc>
-                <a:spcPts val="1820"/>
+                <a:spcPct val="125000"/>
               </a:lnSpc>
               <a:spcBef>
                 <a:spcPts val="200"/>
@@ -27261,7 +27188,7 @@
           <a:p>
             <a:pPr algn="l">
               <a:lnSpc>
-                <a:spcPts val="1820"/>
+                <a:spcPct val="125000"/>
               </a:lnSpc>
               <a:spcBef>
                 <a:spcPts val="200"/>
@@ -27283,7 +27210,7 @@
           <a:p>
             <a:pPr algn="l">
               <a:lnSpc>
-                <a:spcPts val="1820"/>
+                <a:spcPct val="125000"/>
               </a:lnSpc>
               <a:spcBef>
                 <a:spcPts val="200"/>
@@ -27305,7 +27232,7 @@
           <a:p>
             <a:pPr algn="l">
               <a:lnSpc>
-                <a:spcPts val="1820"/>
+                <a:spcPct val="125000"/>
               </a:lnSpc>
               <a:spcBef>
                 <a:spcPts val="200"/>
@@ -27327,7 +27254,7 @@
           <a:p>
             <a:pPr algn="l">
               <a:lnSpc>
-                <a:spcPts val="1820"/>
+                <a:spcPct val="125000"/>
               </a:lnSpc>
               <a:spcBef>
                 <a:spcPts val="200"/>
@@ -27349,7 +27276,7 @@
           <a:p>
             <a:pPr algn="l">
               <a:lnSpc>
-                <a:spcPts val="1820"/>
+                <a:spcPct val="125000"/>
               </a:lnSpc>
               <a:spcBef>
                 <a:spcPts val="200"/>
@@ -27371,7 +27298,7 @@
           <a:p>
             <a:pPr algn="l">
               <a:lnSpc>
-                <a:spcPts val="1820"/>
+                <a:spcPct val="125000"/>
               </a:lnSpc>
               <a:spcBef>
                 <a:spcPts val="200"/>
@@ -27393,7 +27320,7 @@
           <a:p>
             <a:pPr algn="l">
               <a:lnSpc>
-                <a:spcPts val="1820"/>
+                <a:spcPct val="125000"/>
               </a:lnSpc>
               <a:spcBef>
                 <a:spcPts val="200"/>
@@ -27415,7 +27342,7 @@
           <a:p>
             <a:pPr algn="l">
               <a:lnSpc>
-                <a:spcPts val="1820"/>
+                <a:spcPct val="125000"/>
               </a:lnSpc>
               <a:spcBef>
                 <a:spcPts val="200"/>
@@ -27437,7 +27364,7 @@
           <a:p>
             <a:pPr algn="l">
               <a:lnSpc>
-                <a:spcPts val="1820"/>
+                <a:spcPct val="125000"/>
               </a:lnSpc>
               <a:spcBef>
                 <a:spcPts val="200"/>
@@ -27459,7 +27386,7 @@
           <a:p>
             <a:pPr algn="l">
               <a:lnSpc>
-                <a:spcPts val="2080"/>
+                <a:spcPct val="125000"/>
               </a:lnSpc>
               <a:spcBef>
                 <a:spcPts val="800"/>
@@ -27481,7 +27408,7 @@
           <a:p>
             <a:pPr algn="l">
               <a:lnSpc>
-                <a:spcPts val="1820"/>
+                <a:spcPct val="125000"/>
               </a:lnSpc>
               <a:spcBef>
                 <a:spcPts val="200"/>
@@ -27503,7 +27430,7 @@
           <a:p>
             <a:pPr algn="l">
               <a:lnSpc>
-                <a:spcPts val="2080"/>
+                <a:spcPct val="125000"/>
               </a:lnSpc>
               <a:spcBef>
                 <a:spcPts val="800"/>
@@ -27525,7 +27452,7 @@
           <a:p>
             <a:pPr algn="l">
               <a:lnSpc>
-                <a:spcPts val="1820"/>
+                <a:spcPct val="125000"/>
               </a:lnSpc>
               <a:spcBef>
                 <a:spcPts val="200"/>
@@ -27636,11 +27563,10 @@
             <a:spAutoFit/>
           </a:bodyPr>
           <a:lstStyle/>
-          <a:p/>
-          <a:p>
-            <a:pPr algn="l">
-              <a:lnSpc>
-                <a:spcPts val="2080"/>
+          <a:p>
+            <a:pPr algn="l">
+              <a:lnSpc>
+                <a:spcPct val="125000"/>
               </a:lnSpc>
               <a:spcBef>
                 <a:spcPts val="0"/>
@@ -27662,7 +27588,7 @@
           <a:p>
             <a:pPr algn="l">
               <a:lnSpc>
-                <a:spcPts val="2080"/>
+                <a:spcPct val="125000"/>
               </a:lnSpc>
               <a:spcBef>
                 <a:spcPts val="800"/>
@@ -27684,7 +27610,7 @@
           <a:p>
             <a:pPr algn="l">
               <a:lnSpc>
-                <a:spcPts val="1820"/>
+                <a:spcPct val="125000"/>
               </a:lnSpc>
               <a:spcBef>
                 <a:spcPts val="200"/>
@@ -27706,7 +27632,7 @@
           <a:p>
             <a:pPr algn="l">
               <a:lnSpc>
-                <a:spcPts val="2080"/>
+                <a:spcPct val="125000"/>
               </a:lnSpc>
               <a:spcBef>
                 <a:spcPts val="800"/>
@@ -27728,7 +27654,7 @@
           <a:p>
             <a:pPr algn="l">
               <a:lnSpc>
-                <a:spcPts val="1820"/>
+                <a:spcPct val="125000"/>
               </a:lnSpc>
               <a:spcBef>
                 <a:spcPts val="200"/>
@@ -27750,7 +27676,7 @@
           <a:p>
             <a:pPr algn="l">
               <a:lnSpc>
-                <a:spcPts val="1820"/>
+                <a:spcPct val="125000"/>
               </a:lnSpc>
               <a:spcBef>
                 <a:spcPts val="200"/>
@@ -27772,7 +27698,7 @@
           <a:p>
             <a:pPr algn="l">
               <a:lnSpc>
-                <a:spcPts val="1820"/>
+                <a:spcPct val="125000"/>
               </a:lnSpc>
               <a:spcBef>
                 <a:spcPts val="200"/>
@@ -27794,7 +27720,7 @@
           <a:p>
             <a:pPr algn="l">
               <a:lnSpc>
-                <a:spcPts val="1820"/>
+                <a:spcPct val="125000"/>
               </a:lnSpc>
               <a:spcBef>
                 <a:spcPts val="200"/>
@@ -27816,7 +27742,7 @@
           <a:p>
             <a:pPr algn="l">
               <a:lnSpc>
-                <a:spcPts val="1820"/>
+                <a:spcPct val="125000"/>
               </a:lnSpc>
               <a:spcBef>
                 <a:spcPts val="200"/>
@@ -27838,7 +27764,7 @@
           <a:p>
             <a:pPr algn="l">
               <a:lnSpc>
-                <a:spcPts val="1820"/>
+                <a:spcPct val="125000"/>
               </a:lnSpc>
               <a:spcBef>
                 <a:spcPts val="200"/>
@@ -27860,7 +27786,7 @@
           <a:p>
             <a:pPr algn="l">
               <a:lnSpc>
-                <a:spcPts val="1820"/>
+                <a:spcPct val="125000"/>
               </a:lnSpc>
               <a:spcBef>
                 <a:spcPts val="200"/>
@@ -27882,7 +27808,7 @@
           <a:p>
             <a:pPr algn="l">
               <a:lnSpc>
-                <a:spcPts val="1820"/>
+                <a:spcPct val="125000"/>
               </a:lnSpc>
               <a:spcBef>
                 <a:spcPts val="200"/>
@@ -27904,7 +27830,7 @@
           <a:p>
             <a:pPr algn="l">
               <a:lnSpc>
-                <a:spcPts val="1820"/>
+                <a:spcPct val="125000"/>
               </a:lnSpc>
               <a:spcBef>
                 <a:spcPts val="200"/>
@@ -27926,7 +27852,7 @@
           <a:p>
             <a:pPr algn="l">
               <a:lnSpc>
-                <a:spcPts val="1820"/>
+                <a:spcPct val="125000"/>
               </a:lnSpc>
               <a:spcBef>
                 <a:spcPts val="200"/>
@@ -27948,7 +27874,7 @@
           <a:p>
             <a:pPr algn="l">
               <a:lnSpc>
-                <a:spcPts val="1820"/>
+                <a:spcPct val="125000"/>
               </a:lnSpc>
               <a:spcBef>
                 <a:spcPts val="200"/>
@@ -27970,7 +27896,7 @@
           <a:p>
             <a:pPr algn="l">
               <a:lnSpc>
-                <a:spcPts val="2080"/>
+                <a:spcPct val="125000"/>
               </a:lnSpc>
               <a:spcBef>
                 <a:spcPts val="800"/>
@@ -27992,7 +27918,7 @@
           <a:p>
             <a:pPr algn="l">
               <a:lnSpc>
-                <a:spcPts val="1820"/>
+                <a:spcPct val="125000"/>
               </a:lnSpc>
               <a:spcBef>
                 <a:spcPts val="200"/>
@@ -28014,7 +27940,7 @@
           <a:p>
             <a:pPr algn="l">
               <a:lnSpc>
-                <a:spcPts val="2080"/>
+                <a:spcPct val="125000"/>
               </a:lnSpc>
               <a:spcBef>
                 <a:spcPts val="800"/>
@@ -28036,7 +27962,7 @@
           <a:p>
             <a:pPr algn="l">
               <a:lnSpc>
-                <a:spcPts val="1820"/>
+                <a:spcPct val="125000"/>
               </a:lnSpc>
               <a:spcBef>
                 <a:spcPts val="200"/>
@@ -28147,11 +28073,10 @@
             <a:spAutoFit/>
           </a:bodyPr>
           <a:lstStyle/>
-          <a:p/>
-          <a:p>
-            <a:pPr algn="l">
-              <a:lnSpc>
-                <a:spcPts val="2080"/>
+          <a:p>
+            <a:pPr algn="l">
+              <a:lnSpc>
+                <a:spcPct val="125000"/>
               </a:lnSpc>
               <a:spcBef>
                 <a:spcPts val="0"/>
@@ -28173,7 +28098,7 @@
           <a:p>
             <a:pPr algn="l">
               <a:lnSpc>
-                <a:spcPts val="2080"/>
+                <a:spcPct val="125000"/>
               </a:lnSpc>
               <a:spcBef>
                 <a:spcPts val="800"/>
@@ -28195,7 +28120,7 @@
           <a:p>
             <a:pPr algn="l">
               <a:lnSpc>
-                <a:spcPts val="1820"/>
+                <a:spcPct val="125000"/>
               </a:lnSpc>
               <a:spcBef>
                 <a:spcPts val="200"/>
@@ -28217,7 +28142,7 @@
           <a:p>
             <a:pPr algn="l">
               <a:lnSpc>
-                <a:spcPts val="2080"/>
+                <a:spcPct val="125000"/>
               </a:lnSpc>
               <a:spcBef>
                 <a:spcPts val="800"/>
@@ -28239,7 +28164,7 @@
           <a:p>
             <a:pPr algn="l">
               <a:lnSpc>
-                <a:spcPts val="1820"/>
+                <a:spcPct val="125000"/>
               </a:lnSpc>
               <a:spcBef>
                 <a:spcPts val="200"/>
@@ -28261,7 +28186,7 @@
           <a:p>
             <a:pPr algn="l">
               <a:lnSpc>
-                <a:spcPts val="1820"/>
+                <a:spcPct val="125000"/>
               </a:lnSpc>
               <a:spcBef>
                 <a:spcPts val="200"/>
@@ -28283,7 +28208,7 @@
           <a:p>
             <a:pPr algn="l">
               <a:lnSpc>
-                <a:spcPts val="1820"/>
+                <a:spcPct val="125000"/>
               </a:lnSpc>
               <a:spcBef>
                 <a:spcPts val="200"/>
@@ -28305,7 +28230,7 @@
           <a:p>
             <a:pPr algn="l">
               <a:lnSpc>
-                <a:spcPts val="1820"/>
+                <a:spcPct val="125000"/>
               </a:lnSpc>
               <a:spcBef>
                 <a:spcPts val="200"/>
@@ -28327,7 +28252,7 @@
           <a:p>
             <a:pPr algn="l">
               <a:lnSpc>
-                <a:spcPts val="1820"/>
+                <a:spcPct val="125000"/>
               </a:lnSpc>
               <a:spcBef>
                 <a:spcPts val="200"/>
@@ -28349,7 +28274,7 @@
           <a:p>
             <a:pPr algn="l">
               <a:lnSpc>
-                <a:spcPts val="1820"/>
+                <a:spcPct val="125000"/>
               </a:lnSpc>
               <a:spcBef>
                 <a:spcPts val="200"/>
@@ -28371,7 +28296,7 @@
           <a:p>
             <a:pPr algn="l">
               <a:lnSpc>
-                <a:spcPts val="1820"/>
+                <a:spcPct val="125000"/>
               </a:lnSpc>
               <a:spcBef>
                 <a:spcPts val="200"/>
@@ -28393,7 +28318,7 @@
           <a:p>
             <a:pPr algn="l">
               <a:lnSpc>
-                <a:spcPts val="1820"/>
+                <a:spcPct val="125000"/>
               </a:lnSpc>
               <a:spcBef>
                 <a:spcPts val="200"/>
@@ -28415,7 +28340,7 @@
           <a:p>
             <a:pPr algn="l">
               <a:lnSpc>
-                <a:spcPts val="1820"/>
+                <a:spcPct val="125000"/>
               </a:lnSpc>
               <a:spcBef>
                 <a:spcPts val="200"/>
@@ -28437,7 +28362,7 @@
           <a:p>
             <a:pPr algn="l">
               <a:lnSpc>
-                <a:spcPts val="1820"/>
+                <a:spcPct val="125000"/>
               </a:lnSpc>
               <a:spcBef>
                 <a:spcPts val="200"/>
@@ -28459,7 +28384,7 @@
           <a:p>
             <a:pPr algn="l">
               <a:lnSpc>
-                <a:spcPts val="1820"/>
+                <a:spcPct val="125000"/>
               </a:lnSpc>
               <a:spcBef>
                 <a:spcPts val="200"/>
@@ -28481,7 +28406,7 @@
           <a:p>
             <a:pPr algn="l">
               <a:lnSpc>
-                <a:spcPts val="1820"/>
+                <a:spcPct val="125000"/>
               </a:lnSpc>
               <a:spcBef>
                 <a:spcPts val="200"/>
@@ -28503,7 +28428,7 @@
           <a:p>
             <a:pPr algn="l">
               <a:lnSpc>
-                <a:spcPts val="1820"/>
+                <a:spcPct val="125000"/>
               </a:lnSpc>
               <a:spcBef>
                 <a:spcPts val="200"/>
@@ -28525,7 +28450,7 @@
           <a:p>
             <a:pPr algn="l">
               <a:lnSpc>
-                <a:spcPts val="1820"/>
+                <a:spcPct val="125000"/>
               </a:lnSpc>
               <a:spcBef>
                 <a:spcPts val="200"/>
@@ -28547,7 +28472,7 @@
           <a:p>
             <a:pPr algn="l">
               <a:lnSpc>
-                <a:spcPts val="2080"/>
+                <a:spcPct val="125000"/>
               </a:lnSpc>
               <a:spcBef>
                 <a:spcPts val="800"/>
@@ -28569,7 +28494,7 @@
           <a:p>
             <a:pPr algn="l">
               <a:lnSpc>
-                <a:spcPts val="1820"/>
+                <a:spcPct val="125000"/>
               </a:lnSpc>
               <a:spcBef>
                 <a:spcPts val="200"/>
@@ -28591,7 +28516,7 @@
           <a:p>
             <a:pPr algn="l">
               <a:lnSpc>
-                <a:spcPts val="2080"/>
+                <a:spcPct val="125000"/>
               </a:lnSpc>
               <a:spcBef>
                 <a:spcPts val="800"/>
@@ -28613,7 +28538,7 @@
           <a:p>
             <a:pPr algn="l">
               <a:lnSpc>
-                <a:spcPts val="1820"/>
+                <a:spcPct val="125000"/>
               </a:lnSpc>
               <a:spcBef>
                 <a:spcPts val="200"/>
@@ -28724,11 +28649,10 @@
             <a:spAutoFit/>
           </a:bodyPr>
           <a:lstStyle/>
-          <a:p/>
-          <a:p>
-            <a:pPr algn="l">
-              <a:lnSpc>
-                <a:spcPts val="2080"/>
+          <a:p>
+            <a:pPr algn="l">
+              <a:lnSpc>
+                <a:spcPct val="125000"/>
               </a:lnSpc>
               <a:spcBef>
                 <a:spcPts val="0"/>
@@ -28750,7 +28674,7 @@
           <a:p>
             <a:pPr algn="l">
               <a:lnSpc>
-                <a:spcPts val="2080"/>
+                <a:spcPct val="125000"/>
               </a:lnSpc>
               <a:spcBef>
                 <a:spcPts val="800"/>
@@ -28772,7 +28696,7 @@
           <a:p>
             <a:pPr algn="l">
               <a:lnSpc>
-                <a:spcPts val="1820"/>
+                <a:spcPct val="125000"/>
               </a:lnSpc>
               <a:spcBef>
                 <a:spcPts val="200"/>
@@ -28794,7 +28718,7 @@
           <a:p>
             <a:pPr algn="l">
               <a:lnSpc>
-                <a:spcPts val="2080"/>
+                <a:spcPct val="125000"/>
               </a:lnSpc>
               <a:spcBef>
                 <a:spcPts val="800"/>
@@ -28816,7 +28740,7 @@
           <a:p>
             <a:pPr algn="l">
               <a:lnSpc>
-                <a:spcPts val="1820"/>
+                <a:spcPct val="125000"/>
               </a:lnSpc>
               <a:spcBef>
                 <a:spcPts val="200"/>
@@ -28838,7 +28762,7 @@
           <a:p>
             <a:pPr algn="l">
               <a:lnSpc>
-                <a:spcPts val="1820"/>
+                <a:spcPct val="125000"/>
               </a:lnSpc>
               <a:spcBef>
                 <a:spcPts val="200"/>
@@ -28860,7 +28784,7 @@
           <a:p>
             <a:pPr algn="l">
               <a:lnSpc>
-                <a:spcPts val="1820"/>
+                <a:spcPct val="125000"/>
               </a:lnSpc>
               <a:spcBef>
                 <a:spcPts val="200"/>
@@ -28882,7 +28806,7 @@
           <a:p>
             <a:pPr algn="l">
               <a:lnSpc>
-                <a:spcPts val="1820"/>
+                <a:spcPct val="125000"/>
               </a:lnSpc>
               <a:spcBef>
                 <a:spcPts val="200"/>
@@ -28904,7 +28828,7 @@
           <a:p>
             <a:pPr algn="l">
               <a:lnSpc>
-                <a:spcPts val="1820"/>
+                <a:spcPct val="125000"/>
               </a:lnSpc>
               <a:spcBef>
                 <a:spcPts val="200"/>
@@ -28926,7 +28850,7 @@
           <a:p>
             <a:pPr algn="l">
               <a:lnSpc>
-                <a:spcPts val="2080"/>
+                <a:spcPct val="125000"/>
               </a:lnSpc>
               <a:spcBef>
                 <a:spcPts val="800"/>
@@ -28948,7 +28872,7 @@
           <a:p>
             <a:pPr algn="l">
               <a:lnSpc>
-                <a:spcPts val="1820"/>
+                <a:spcPct val="125000"/>
               </a:lnSpc>
               <a:spcBef>
                 <a:spcPts val="200"/>
@@ -28970,7 +28894,7 @@
           <a:p>
             <a:pPr algn="l">
               <a:lnSpc>
-                <a:spcPts val="2080"/>
+                <a:spcPct val="125000"/>
               </a:lnSpc>
               <a:spcBef>
                 <a:spcPts val="800"/>
@@ -28992,7 +28916,7 @@
           <a:p>
             <a:pPr algn="l">
               <a:lnSpc>
-                <a:spcPts val="1820"/>
+                <a:spcPct val="125000"/>
               </a:lnSpc>
               <a:spcBef>
                 <a:spcPts val="200"/>
@@ -29103,11 +29027,10 @@
             <a:spAutoFit/>
           </a:bodyPr>
           <a:lstStyle/>
-          <a:p/>
-          <a:p>
-            <a:pPr algn="l">
-              <a:lnSpc>
-                <a:spcPts val="2080"/>
+          <a:p>
+            <a:pPr algn="l">
+              <a:lnSpc>
+                <a:spcPct val="125000"/>
               </a:lnSpc>
               <a:spcBef>
                 <a:spcPts val="0"/>
@@ -29129,7 +29052,7 @@
           <a:p>
             <a:pPr algn="l">
               <a:lnSpc>
-                <a:spcPts val="2080"/>
+                <a:spcPct val="125000"/>
               </a:lnSpc>
               <a:spcBef>
                 <a:spcPts val="800"/>
@@ -29151,7 +29074,7 @@
           <a:p>
             <a:pPr algn="l">
               <a:lnSpc>
-                <a:spcPts val="1820"/>
+                <a:spcPct val="125000"/>
               </a:lnSpc>
               <a:spcBef>
                 <a:spcPts val="200"/>
@@ -29173,7 +29096,7 @@
           <a:p>
             <a:pPr algn="l">
               <a:lnSpc>
-                <a:spcPts val="2080"/>
+                <a:spcPct val="125000"/>
               </a:lnSpc>
               <a:spcBef>
                 <a:spcPts val="800"/>
@@ -29195,7 +29118,7 @@
           <a:p>
             <a:pPr algn="l">
               <a:lnSpc>
-                <a:spcPts val="1820"/>
+                <a:spcPct val="125000"/>
               </a:lnSpc>
               <a:spcBef>
                 <a:spcPts val="200"/>
@@ -29217,7 +29140,7 @@
           <a:p>
             <a:pPr algn="l">
               <a:lnSpc>
-                <a:spcPts val="2080"/>
+                <a:spcPct val="125000"/>
               </a:lnSpc>
               <a:spcBef>
                 <a:spcPts val="800"/>
@@ -29239,7 +29162,7 @@
           <a:p>
             <a:pPr algn="l">
               <a:lnSpc>
-                <a:spcPts val="1820"/>
+                <a:spcPct val="125000"/>
               </a:lnSpc>
               <a:spcBef>
                 <a:spcPts val="200"/>
@@ -29261,7 +29184,7 @@
           <a:p>
             <a:pPr algn="l">
               <a:lnSpc>
-                <a:spcPts val="2080"/>
+                <a:spcPct val="125000"/>
               </a:lnSpc>
               <a:spcBef>
                 <a:spcPts val="800"/>
@@ -29283,7 +29206,7 @@
           <a:p>
             <a:pPr algn="l">
               <a:lnSpc>
-                <a:spcPts val="1820"/>
+                <a:spcPct val="125000"/>
               </a:lnSpc>
               <a:spcBef>
                 <a:spcPts val="200"/>
@@ -29394,11 +29317,10 @@
             <a:spAutoFit/>
           </a:bodyPr>
           <a:lstStyle/>
-          <a:p/>
-          <a:p>
-            <a:pPr algn="l">
-              <a:lnSpc>
-                <a:spcPts val="2080"/>
+          <a:p>
+            <a:pPr algn="l">
+              <a:lnSpc>
+                <a:spcPct val="125000"/>
               </a:lnSpc>
               <a:spcBef>
                 <a:spcPts val="0"/>
@@ -29420,7 +29342,7 @@
           <a:p>
             <a:pPr algn="l">
               <a:lnSpc>
-                <a:spcPts val="2080"/>
+                <a:spcPct val="125000"/>
               </a:lnSpc>
               <a:spcBef>
                 <a:spcPts val="800"/>
@@ -29442,7 +29364,7 @@
           <a:p>
             <a:pPr algn="l">
               <a:lnSpc>
-                <a:spcPts val="1820"/>
+                <a:spcPct val="125000"/>
               </a:lnSpc>
               <a:spcBef>
                 <a:spcPts val="200"/>
@@ -29464,7 +29386,7 @@
           <a:p>
             <a:pPr algn="l">
               <a:lnSpc>
-                <a:spcPts val="2080"/>
+                <a:spcPct val="125000"/>
               </a:lnSpc>
               <a:spcBef>
                 <a:spcPts val="800"/>
@@ -29486,7 +29408,7 @@
           <a:p>
             <a:pPr algn="l">
               <a:lnSpc>
-                <a:spcPts val="1820"/>
+                <a:spcPct val="125000"/>
               </a:lnSpc>
               <a:spcBef>
                 <a:spcPts val="200"/>
@@ -29508,7 +29430,7 @@
           <a:p>
             <a:pPr algn="l">
               <a:lnSpc>
-                <a:spcPts val="1820"/>
+                <a:spcPct val="125000"/>
               </a:lnSpc>
               <a:spcBef>
                 <a:spcPts val="200"/>
@@ -29530,7 +29452,7 @@
           <a:p>
             <a:pPr algn="l">
               <a:lnSpc>
-                <a:spcPts val="1820"/>
+                <a:spcPct val="125000"/>
               </a:lnSpc>
               <a:spcBef>
                 <a:spcPts val="200"/>
@@ -29552,7 +29474,7 @@
           <a:p>
             <a:pPr algn="l">
               <a:lnSpc>
-                <a:spcPts val="1820"/>
+                <a:spcPct val="125000"/>
               </a:lnSpc>
               <a:spcBef>
                 <a:spcPts val="200"/>
@@ -29574,7 +29496,7 @@
           <a:p>
             <a:pPr algn="l">
               <a:lnSpc>
-                <a:spcPts val="1820"/>
+                <a:spcPct val="125000"/>
               </a:lnSpc>
               <a:spcBef>
                 <a:spcPts val="200"/>
@@ -29596,7 +29518,7 @@
           <a:p>
             <a:pPr algn="l">
               <a:lnSpc>
-                <a:spcPts val="1820"/>
+                <a:spcPct val="125000"/>
               </a:lnSpc>
               <a:spcBef>
                 <a:spcPts val="200"/>
@@ -29618,7 +29540,7 @@
           <a:p>
             <a:pPr algn="l">
               <a:lnSpc>
-                <a:spcPts val="1820"/>
+                <a:spcPct val="125000"/>
               </a:lnSpc>
               <a:spcBef>
                 <a:spcPts val="200"/>
@@ -29640,7 +29562,7 @@
           <a:p>
             <a:pPr algn="l">
               <a:lnSpc>
-                <a:spcPts val="1820"/>
+                <a:spcPct val="125000"/>
               </a:lnSpc>
               <a:spcBef>
                 <a:spcPts val="200"/>
@@ -29662,7 +29584,7 @@
           <a:p>
             <a:pPr algn="l">
               <a:lnSpc>
-                <a:spcPts val="1820"/>
+                <a:spcPct val="125000"/>
               </a:lnSpc>
               <a:spcBef>
                 <a:spcPts val="200"/>
@@ -29684,7 +29606,7 @@
           <a:p>
             <a:pPr algn="l">
               <a:lnSpc>
-                <a:spcPts val="1820"/>
+                <a:spcPct val="125000"/>
               </a:lnSpc>
               <a:spcBef>
                 <a:spcPts val="200"/>
@@ -29706,7 +29628,7 @@
           <a:p>
             <a:pPr algn="l">
               <a:lnSpc>
-                <a:spcPts val="1820"/>
+                <a:spcPct val="125000"/>
               </a:lnSpc>
               <a:spcBef>
                 <a:spcPts val="200"/>
@@ -29728,7 +29650,7 @@
           <a:p>
             <a:pPr algn="l">
               <a:lnSpc>
-                <a:spcPts val="2080"/>
+                <a:spcPct val="125000"/>
               </a:lnSpc>
               <a:spcBef>
                 <a:spcPts val="800"/>
@@ -29750,7 +29672,7 @@
           <a:p>
             <a:pPr algn="l">
               <a:lnSpc>
-                <a:spcPts val="1820"/>
+                <a:spcPct val="125000"/>
               </a:lnSpc>
               <a:spcBef>
                 <a:spcPts val="200"/>
@@ -29772,7 +29694,7 @@
           <a:p>
             <a:pPr algn="l">
               <a:lnSpc>
-                <a:spcPts val="2080"/>
+                <a:spcPct val="125000"/>
               </a:lnSpc>
               <a:spcBef>
                 <a:spcPts val="800"/>
@@ -29794,7 +29716,7 @@
           <a:p>
             <a:pPr algn="l">
               <a:lnSpc>
-                <a:spcPts val="1820"/>
+                <a:spcPct val="125000"/>
               </a:lnSpc>
               <a:spcBef>
                 <a:spcPts val="200"/>
@@ -29905,11 +29827,10 @@
             <a:spAutoFit/>
           </a:bodyPr>
           <a:lstStyle/>
-          <a:p/>
-          <a:p>
-            <a:pPr algn="l">
-              <a:lnSpc>
-                <a:spcPts val="2080"/>
+          <a:p>
+            <a:pPr algn="l">
+              <a:lnSpc>
+                <a:spcPct val="125000"/>
               </a:lnSpc>
               <a:spcBef>
                 <a:spcPts val="0"/>
@@ -29931,7 +29852,7 @@
           <a:p>
             <a:pPr algn="l">
               <a:lnSpc>
-                <a:spcPts val="2080"/>
+                <a:spcPct val="125000"/>
               </a:lnSpc>
               <a:spcBef>
                 <a:spcPts val="800"/>
@@ -29953,7 +29874,7 @@
           <a:p>
             <a:pPr algn="l">
               <a:lnSpc>
-                <a:spcPts val="1820"/>
+                <a:spcPct val="125000"/>
               </a:lnSpc>
               <a:spcBef>
                 <a:spcPts val="200"/>
@@ -29975,7 +29896,7 @@
           <a:p>
             <a:pPr algn="l">
               <a:lnSpc>
-                <a:spcPts val="2080"/>
+                <a:spcPct val="125000"/>
               </a:lnSpc>
               <a:spcBef>
                 <a:spcPts val="800"/>
@@ -29997,7 +29918,7 @@
           <a:p>
             <a:pPr algn="l">
               <a:lnSpc>
-                <a:spcPts val="1820"/>
+                <a:spcPct val="125000"/>
               </a:lnSpc>
               <a:spcBef>
                 <a:spcPts val="200"/>
@@ -30019,7 +29940,7 @@
           <a:p>
             <a:pPr algn="l">
               <a:lnSpc>
-                <a:spcPts val="1820"/>
+                <a:spcPct val="125000"/>
               </a:lnSpc>
               <a:spcBef>
                 <a:spcPts val="200"/>
@@ -30041,7 +29962,7 @@
           <a:p>
             <a:pPr algn="l">
               <a:lnSpc>
-                <a:spcPts val="1820"/>
+                <a:spcPct val="125000"/>
               </a:lnSpc>
               <a:spcBef>
                 <a:spcPts val="200"/>
@@ -30063,7 +29984,7 @@
           <a:p>
             <a:pPr algn="l">
               <a:lnSpc>
-                <a:spcPts val="1820"/>
+                <a:spcPct val="125000"/>
               </a:lnSpc>
               <a:spcBef>
                 <a:spcPts val="200"/>
@@ -30085,7 +30006,7 @@
           <a:p>
             <a:pPr algn="l">
               <a:lnSpc>
-                <a:spcPts val="1820"/>
+                <a:spcPct val="125000"/>
               </a:lnSpc>
               <a:spcBef>
                 <a:spcPts val="200"/>
@@ -30107,7 +30028,7 @@
           <a:p>
             <a:pPr algn="l">
               <a:lnSpc>
-                <a:spcPts val="1820"/>
+                <a:spcPct val="125000"/>
               </a:lnSpc>
               <a:spcBef>
                 <a:spcPts val="200"/>
@@ -30129,7 +30050,7 @@
           <a:p>
             <a:pPr algn="l">
               <a:lnSpc>
-                <a:spcPts val="1820"/>
+                <a:spcPct val="125000"/>
               </a:lnSpc>
               <a:spcBef>
                 <a:spcPts val="200"/>
@@ -30151,7 +30072,7 @@
           <a:p>
             <a:pPr algn="l">
               <a:lnSpc>
-                <a:spcPts val="1820"/>
+                <a:spcPct val="125000"/>
               </a:lnSpc>
               <a:spcBef>
                 <a:spcPts val="200"/>
@@ -30173,7 +30094,7 @@
           <a:p>
             <a:pPr algn="l">
               <a:lnSpc>
-                <a:spcPts val="1820"/>
+                <a:spcPct val="125000"/>
               </a:lnSpc>
               <a:spcBef>
                 <a:spcPts val="200"/>
@@ -30195,7 +30116,7 @@
           <a:p>
             <a:pPr algn="l">
               <a:lnSpc>
-                <a:spcPts val="1820"/>
+                <a:spcPct val="125000"/>
               </a:lnSpc>
               <a:spcBef>
                 <a:spcPts val="200"/>
@@ -30217,7 +30138,7 @@
           <a:p>
             <a:pPr algn="l">
               <a:lnSpc>
-                <a:spcPts val="1820"/>
+                <a:spcPct val="125000"/>
               </a:lnSpc>
               <a:spcBef>
                 <a:spcPts val="200"/>
@@ -30239,7 +30160,7 @@
           <a:p>
             <a:pPr algn="l">
               <a:lnSpc>
-                <a:spcPts val="2080"/>
+                <a:spcPct val="125000"/>
               </a:lnSpc>
               <a:spcBef>
                 <a:spcPts val="800"/>
@@ -30261,7 +30182,7 @@
           <a:p>
             <a:pPr algn="l">
               <a:lnSpc>
-                <a:spcPts val="1820"/>
+                <a:spcPct val="125000"/>
               </a:lnSpc>
               <a:spcBef>
                 <a:spcPts val="200"/>
@@ -30283,7 +30204,7 @@
           <a:p>
             <a:pPr algn="l">
               <a:lnSpc>
-                <a:spcPts val="2080"/>
+                <a:spcPct val="125000"/>
               </a:lnSpc>
               <a:spcBef>
                 <a:spcPts val="800"/>
@@ -30305,7 +30226,7 @@
           <a:p>
             <a:pPr algn="l">
               <a:lnSpc>
-                <a:spcPts val="1820"/>
+                <a:spcPct val="125000"/>
               </a:lnSpc>
               <a:spcBef>
                 <a:spcPts val="200"/>
@@ -30416,11 +30337,10 @@
             <a:spAutoFit/>
           </a:bodyPr>
           <a:lstStyle/>
-          <a:p/>
-          <a:p>
-            <a:pPr algn="l">
-              <a:lnSpc>
-                <a:spcPts val="2080"/>
+          <a:p>
+            <a:pPr algn="l">
+              <a:lnSpc>
+                <a:spcPct val="125000"/>
               </a:lnSpc>
               <a:spcBef>
                 <a:spcPts val="0"/>
@@ -30442,7 +30362,7 @@
           <a:p>
             <a:pPr algn="l">
               <a:lnSpc>
-                <a:spcPts val="2080"/>
+                <a:spcPct val="125000"/>
               </a:lnSpc>
               <a:spcBef>
                 <a:spcPts val="800"/>
@@ -30464,7 +30384,7 @@
           <a:p>
             <a:pPr algn="l">
               <a:lnSpc>
-                <a:spcPts val="1820"/>
+                <a:spcPct val="125000"/>
               </a:lnSpc>
               <a:spcBef>
                 <a:spcPts val="200"/>
@@ -30486,7 +30406,7 @@
           <a:p>
             <a:pPr algn="l">
               <a:lnSpc>
-                <a:spcPts val="2080"/>
+                <a:spcPct val="125000"/>
               </a:lnSpc>
               <a:spcBef>
                 <a:spcPts val="800"/>
@@ -30508,7 +30428,7 @@
           <a:p>
             <a:pPr algn="l">
               <a:lnSpc>
-                <a:spcPts val="1820"/>
+                <a:spcPct val="125000"/>
               </a:lnSpc>
               <a:spcBef>
                 <a:spcPts val="200"/>
@@ -30530,7 +30450,7 @@
           <a:p>
             <a:pPr algn="l">
               <a:lnSpc>
-                <a:spcPts val="1820"/>
+                <a:spcPct val="125000"/>
               </a:lnSpc>
               <a:spcBef>
                 <a:spcPts val="200"/>
@@ -30552,7 +30472,7 @@
           <a:p>
             <a:pPr algn="l">
               <a:lnSpc>
-                <a:spcPts val="2080"/>
+                <a:spcPct val="125000"/>
               </a:lnSpc>
               <a:spcBef>
                 <a:spcPts val="800"/>
@@ -30574,7 +30494,7 @@
           <a:p>
             <a:pPr algn="l">
               <a:lnSpc>
-                <a:spcPts val="1820"/>
+                <a:spcPct val="125000"/>
               </a:lnSpc>
               <a:spcBef>
                 <a:spcPts val="200"/>
@@ -30596,7 +30516,7 @@
           <a:p>
             <a:pPr algn="l">
               <a:lnSpc>
-                <a:spcPts val="2080"/>
+                <a:spcPct val="125000"/>
               </a:lnSpc>
               <a:spcBef>
                 <a:spcPts val="800"/>
@@ -30618,7 +30538,7 @@
           <a:p>
             <a:pPr algn="l">
               <a:lnSpc>
-                <a:spcPts val="1820"/>
+                <a:spcPct val="125000"/>
               </a:lnSpc>
               <a:spcBef>
                 <a:spcPts val="200"/>
@@ -30729,11 +30649,10 @@
             <a:spAutoFit/>
           </a:bodyPr>
           <a:lstStyle/>
-          <a:p/>
-          <a:p>
-            <a:pPr algn="l">
-              <a:lnSpc>
-                <a:spcPts val="2080"/>
+          <a:p>
+            <a:pPr algn="l">
+              <a:lnSpc>
+                <a:spcPct val="125000"/>
               </a:lnSpc>
               <a:spcBef>
                 <a:spcPts val="0"/>
@@ -30755,7 +30674,7 @@
           <a:p>
             <a:pPr algn="l">
               <a:lnSpc>
-                <a:spcPts val="2080"/>
+                <a:spcPct val="125000"/>
               </a:lnSpc>
               <a:spcBef>
                 <a:spcPts val="800"/>
@@ -30777,7 +30696,7 @@
           <a:p>
             <a:pPr algn="l">
               <a:lnSpc>
-                <a:spcPts val="1820"/>
+                <a:spcPct val="125000"/>
               </a:lnSpc>
               <a:spcBef>
                 <a:spcPts val="200"/>
@@ -30799,7 +30718,7 @@
           <a:p>
             <a:pPr algn="l">
               <a:lnSpc>
-                <a:spcPts val="2080"/>
+                <a:spcPct val="125000"/>
               </a:lnSpc>
               <a:spcBef>
                 <a:spcPts val="800"/>
@@ -30821,7 +30740,7 @@
           <a:p>
             <a:pPr algn="l">
               <a:lnSpc>
-                <a:spcPts val="1820"/>
+                <a:spcPct val="125000"/>
               </a:lnSpc>
               <a:spcBef>
                 <a:spcPts val="200"/>
@@ -30843,7 +30762,7 @@
           <a:p>
             <a:pPr algn="l">
               <a:lnSpc>
-                <a:spcPts val="2080"/>
+                <a:spcPct val="125000"/>
               </a:lnSpc>
               <a:spcBef>
                 <a:spcPts val="800"/>
@@ -30865,7 +30784,7 @@
           <a:p>
             <a:pPr algn="l">
               <a:lnSpc>
-                <a:spcPts val="1820"/>
+                <a:spcPct val="125000"/>
               </a:lnSpc>
               <a:spcBef>
                 <a:spcPts val="200"/>
@@ -30887,7 +30806,7 @@
           <a:p>
             <a:pPr algn="l">
               <a:lnSpc>
-                <a:spcPts val="2080"/>
+                <a:spcPct val="125000"/>
               </a:lnSpc>
               <a:spcBef>
                 <a:spcPts val="800"/>
@@ -30909,7 +30828,7 @@
           <a:p>
             <a:pPr algn="l">
               <a:lnSpc>
-                <a:spcPts val="1820"/>
+                <a:spcPct val="125000"/>
               </a:lnSpc>
               <a:spcBef>
                 <a:spcPts val="200"/>
@@ -31020,11 +30939,10 @@
             <a:spAutoFit/>
           </a:bodyPr>
           <a:lstStyle/>
-          <a:p/>
-          <a:p>
-            <a:pPr algn="l">
-              <a:lnSpc>
-                <a:spcPts val="2080"/>
+          <a:p>
+            <a:pPr algn="l">
+              <a:lnSpc>
+                <a:spcPct val="125000"/>
               </a:lnSpc>
               <a:spcBef>
                 <a:spcPts val="0"/>
@@ -31046,7 +30964,7 @@
           <a:p>
             <a:pPr algn="l">
               <a:lnSpc>
-                <a:spcPts val="2080"/>
+                <a:spcPct val="125000"/>
               </a:lnSpc>
               <a:spcBef>
                 <a:spcPts val="800"/>
@@ -31068,7 +30986,7 @@
           <a:p>
             <a:pPr algn="l">
               <a:lnSpc>
-                <a:spcPts val="1820"/>
+                <a:spcPct val="125000"/>
               </a:lnSpc>
               <a:spcBef>
                 <a:spcPts val="200"/>
@@ -31090,7 +31008,7 @@
           <a:p>
             <a:pPr algn="l">
               <a:lnSpc>
-                <a:spcPts val="2080"/>
+                <a:spcPct val="125000"/>
               </a:lnSpc>
               <a:spcBef>
                 <a:spcPts val="800"/>
@@ -31112,7 +31030,7 @@
           <a:p>
             <a:pPr algn="l">
               <a:lnSpc>
-                <a:spcPts val="1820"/>
+                <a:spcPct val="125000"/>
               </a:lnSpc>
               <a:spcBef>
                 <a:spcPts val="200"/>
@@ -31134,7 +31052,7 @@
           <a:p>
             <a:pPr algn="l">
               <a:lnSpc>
-                <a:spcPts val="1820"/>
+                <a:spcPct val="125000"/>
               </a:lnSpc>
               <a:spcBef>
                 <a:spcPts val="200"/>
@@ -31156,7 +31074,7 @@
           <a:p>
             <a:pPr algn="l">
               <a:lnSpc>
-                <a:spcPts val="2080"/>
+                <a:spcPct val="125000"/>
               </a:lnSpc>
               <a:spcBef>
                 <a:spcPts val="800"/>
@@ -31178,7 +31096,7 @@
           <a:p>
             <a:pPr algn="l">
               <a:lnSpc>
-                <a:spcPts val="1820"/>
+                <a:spcPct val="125000"/>
               </a:lnSpc>
               <a:spcBef>
                 <a:spcPts val="200"/>
@@ -31200,7 +31118,7 @@
           <a:p>
             <a:pPr algn="l">
               <a:lnSpc>
-                <a:spcPts val="2080"/>
+                <a:spcPct val="125000"/>
               </a:lnSpc>
               <a:spcBef>
                 <a:spcPts val="800"/>
@@ -31222,7 +31140,7 @@
           <a:p>
             <a:pPr algn="l">
               <a:lnSpc>
-                <a:spcPts val="1820"/>
+                <a:spcPct val="125000"/>
               </a:lnSpc>
               <a:spcBef>
                 <a:spcPts val="200"/>
@@ -31333,11 +31251,10 @@
             <a:spAutoFit/>
           </a:bodyPr>
           <a:lstStyle/>
-          <a:p/>
-          <a:p>
-            <a:pPr algn="l">
-              <a:lnSpc>
-                <a:spcPts val="2080"/>
+          <a:p>
+            <a:pPr algn="l">
+              <a:lnSpc>
+                <a:spcPct val="125000"/>
               </a:lnSpc>
               <a:spcBef>
                 <a:spcPts val="0"/>
@@ -31359,7 +31276,7 @@
           <a:p>
             <a:pPr algn="l">
               <a:lnSpc>
-                <a:spcPts val="2080"/>
+                <a:spcPct val="125000"/>
               </a:lnSpc>
               <a:spcBef>
                 <a:spcPts val="800"/>
@@ -31381,7 +31298,7 @@
           <a:p>
             <a:pPr algn="l">
               <a:lnSpc>
-                <a:spcPts val="1820"/>
+                <a:spcPct val="125000"/>
               </a:lnSpc>
               <a:spcBef>
                 <a:spcPts val="200"/>
@@ -31403,7 +31320,7 @@
           <a:p>
             <a:pPr algn="l">
               <a:lnSpc>
-                <a:spcPts val="2080"/>
+                <a:spcPct val="125000"/>
               </a:lnSpc>
               <a:spcBef>
                 <a:spcPts val="800"/>
@@ -31425,7 +31342,7 @@
           <a:p>
             <a:pPr algn="l">
               <a:lnSpc>
-                <a:spcPts val="1820"/>
+                <a:spcPct val="125000"/>
               </a:lnSpc>
               <a:spcBef>
                 <a:spcPts val="200"/>
@@ -31447,7 +31364,7 @@
           <a:p>
             <a:pPr algn="l">
               <a:lnSpc>
-                <a:spcPts val="1820"/>
+                <a:spcPct val="125000"/>
               </a:lnSpc>
               <a:spcBef>
                 <a:spcPts val="200"/>
@@ -31469,7 +31386,7 @@
           <a:p>
             <a:pPr algn="l">
               <a:lnSpc>
-                <a:spcPts val="2080"/>
+                <a:spcPct val="125000"/>
               </a:lnSpc>
               <a:spcBef>
                 <a:spcPts val="800"/>
@@ -31491,7 +31408,7 @@
           <a:p>
             <a:pPr algn="l">
               <a:lnSpc>
-                <a:spcPts val="1820"/>
+                <a:spcPct val="125000"/>
               </a:lnSpc>
               <a:spcBef>
                 <a:spcPts val="200"/>
@@ -31513,7 +31430,7 @@
           <a:p>
             <a:pPr algn="l">
               <a:lnSpc>
-                <a:spcPts val="2080"/>
+                <a:spcPct val="125000"/>
               </a:lnSpc>
               <a:spcBef>
                 <a:spcPts val="800"/>
@@ -31535,7 +31452,7 @@
           <a:p>
             <a:pPr algn="l">
               <a:lnSpc>
-                <a:spcPts val="1820"/>
+                <a:spcPct val="125000"/>
               </a:lnSpc>
               <a:spcBef>
                 <a:spcPts val="200"/>
@@ -31646,11 +31563,10 @@
             <a:spAutoFit/>
           </a:bodyPr>
           <a:lstStyle/>
-          <a:p/>
-          <a:p>
-            <a:pPr algn="l">
-              <a:lnSpc>
-                <a:spcPts val="2080"/>
+          <a:p>
+            <a:pPr algn="l">
+              <a:lnSpc>
+                <a:spcPct val="125000"/>
               </a:lnSpc>
               <a:spcBef>
                 <a:spcPts val="0"/>
@@ -31672,7 +31588,7 @@
           <a:p>
             <a:pPr algn="l">
               <a:lnSpc>
-                <a:spcPts val="2080"/>
+                <a:spcPct val="125000"/>
               </a:lnSpc>
               <a:spcBef>
                 <a:spcPts val="800"/>
@@ -31694,7 +31610,7 @@
           <a:p>
             <a:pPr algn="l">
               <a:lnSpc>
-                <a:spcPts val="1820"/>
+                <a:spcPct val="125000"/>
               </a:lnSpc>
               <a:spcBef>
                 <a:spcPts val="200"/>
@@ -31716,7 +31632,7 @@
           <a:p>
             <a:pPr algn="l">
               <a:lnSpc>
-                <a:spcPts val="2080"/>
+                <a:spcPct val="125000"/>
               </a:lnSpc>
               <a:spcBef>
                 <a:spcPts val="800"/>
@@ -31738,7 +31654,7 @@
           <a:p>
             <a:pPr algn="l">
               <a:lnSpc>
-                <a:spcPts val="1820"/>
+                <a:spcPct val="125000"/>
               </a:lnSpc>
               <a:spcBef>
                 <a:spcPts val="200"/>
@@ -31760,7 +31676,7 @@
           <a:p>
             <a:pPr algn="l">
               <a:lnSpc>
-                <a:spcPts val="1820"/>
+                <a:spcPct val="125000"/>
               </a:lnSpc>
               <a:spcBef>
                 <a:spcPts val="200"/>
@@ -31782,7 +31698,7 @@
           <a:p>
             <a:pPr algn="l">
               <a:lnSpc>
-                <a:spcPts val="1820"/>
+                <a:spcPct val="125000"/>
               </a:lnSpc>
               <a:spcBef>
                 <a:spcPts val="200"/>
@@ -31804,7 +31720,7 @@
           <a:p>
             <a:pPr algn="l">
               <a:lnSpc>
-                <a:spcPts val="1820"/>
+                <a:spcPct val="125000"/>
               </a:lnSpc>
               <a:spcBef>
                 <a:spcPts val="200"/>
@@ -31826,7 +31742,7 @@
           <a:p>
             <a:pPr algn="l">
               <a:lnSpc>
-                <a:spcPts val="1820"/>
+                <a:spcPct val="125000"/>
               </a:lnSpc>
               <a:spcBef>
                 <a:spcPts val="200"/>
@@ -31848,7 +31764,7 @@
           <a:p>
             <a:pPr algn="l">
               <a:lnSpc>
-                <a:spcPts val="2080"/>
+                <a:spcPct val="125000"/>
               </a:lnSpc>
               <a:spcBef>
                 <a:spcPts val="800"/>
@@ -31870,7 +31786,7 @@
           <a:p>
             <a:pPr algn="l">
               <a:lnSpc>
-                <a:spcPts val="1820"/>
+                <a:spcPct val="125000"/>
               </a:lnSpc>
               <a:spcBef>
                 <a:spcPts val="200"/>
@@ -31892,7 +31808,7 @@
           <a:p>
             <a:pPr algn="l">
               <a:lnSpc>
-                <a:spcPts val="2080"/>
+                <a:spcPct val="125000"/>
               </a:lnSpc>
               <a:spcBef>
                 <a:spcPts val="800"/>
@@ -31914,7 +31830,7 @@
           <a:p>
             <a:pPr algn="l">
               <a:lnSpc>
-                <a:spcPts val="1820"/>
+                <a:spcPct val="125000"/>
               </a:lnSpc>
               <a:spcBef>
                 <a:spcPts val="200"/>
@@ -32025,11 +31941,10 @@
             <a:spAutoFit/>
           </a:bodyPr>
           <a:lstStyle/>
-          <a:p/>
-          <a:p>
-            <a:pPr algn="l">
-              <a:lnSpc>
-                <a:spcPts val="2080"/>
+          <a:p>
+            <a:pPr algn="l">
+              <a:lnSpc>
+                <a:spcPct val="125000"/>
               </a:lnSpc>
               <a:spcBef>
                 <a:spcPts val="0"/>
@@ -32051,7 +31966,7 @@
           <a:p>
             <a:pPr algn="l">
               <a:lnSpc>
-                <a:spcPts val="2080"/>
+                <a:spcPct val="125000"/>
               </a:lnSpc>
               <a:spcBef>
                 <a:spcPts val="800"/>
@@ -32073,7 +31988,7 @@
           <a:p>
             <a:pPr algn="l">
               <a:lnSpc>
-                <a:spcPts val="1820"/>
+                <a:spcPct val="125000"/>
               </a:lnSpc>
               <a:spcBef>
                 <a:spcPts val="200"/>
@@ -32095,7 +32010,7 @@
           <a:p>
             <a:pPr algn="l">
               <a:lnSpc>
-                <a:spcPts val="2080"/>
+                <a:spcPct val="125000"/>
               </a:lnSpc>
               <a:spcBef>
                 <a:spcPts val="800"/>
@@ -32117,7 +32032,7 @@
           <a:p>
             <a:pPr algn="l">
               <a:lnSpc>
-                <a:spcPts val="1820"/>
+                <a:spcPct val="125000"/>
               </a:lnSpc>
               <a:spcBef>
                 <a:spcPts val="200"/>
@@ -32139,7 +32054,7 @@
           <a:p>
             <a:pPr algn="l">
               <a:lnSpc>
-                <a:spcPts val="1820"/>
+                <a:spcPct val="125000"/>
               </a:lnSpc>
               <a:spcBef>
                 <a:spcPts val="200"/>
@@ -32161,7 +32076,7 @@
           <a:p>
             <a:pPr algn="l">
               <a:lnSpc>
-                <a:spcPts val="2080"/>
+                <a:spcPct val="125000"/>
               </a:lnSpc>
               <a:spcBef>
                 <a:spcPts val="800"/>
@@ -32183,7 +32098,7 @@
           <a:p>
             <a:pPr algn="l">
               <a:lnSpc>
-                <a:spcPts val="1820"/>
+                <a:spcPct val="125000"/>
               </a:lnSpc>
               <a:spcBef>
                 <a:spcPts val="200"/>
@@ -32205,7 +32120,7 @@
           <a:p>
             <a:pPr algn="l">
               <a:lnSpc>
-                <a:spcPts val="2080"/>
+                <a:spcPct val="125000"/>
               </a:lnSpc>
               <a:spcBef>
                 <a:spcPts val="800"/>
@@ -32227,7 +32142,7 @@
           <a:p>
             <a:pPr algn="l">
               <a:lnSpc>
-                <a:spcPts val="1820"/>
+                <a:spcPct val="125000"/>
               </a:lnSpc>
               <a:spcBef>
                 <a:spcPts val="200"/>
@@ -32338,11 +32253,10 @@
             <a:spAutoFit/>
           </a:bodyPr>
           <a:lstStyle/>
-          <a:p/>
-          <a:p>
-            <a:pPr algn="l">
-              <a:lnSpc>
-                <a:spcPts val="2080"/>
+          <a:p>
+            <a:pPr algn="l">
+              <a:lnSpc>
+                <a:spcPct val="125000"/>
               </a:lnSpc>
               <a:spcBef>
                 <a:spcPts val="0"/>
@@ -32364,7 +32278,7 @@
           <a:p>
             <a:pPr algn="l">
               <a:lnSpc>
-                <a:spcPts val="2080"/>
+                <a:spcPct val="125000"/>
               </a:lnSpc>
               <a:spcBef>
                 <a:spcPts val="800"/>
@@ -32386,7 +32300,7 @@
           <a:p>
             <a:pPr algn="l">
               <a:lnSpc>
-                <a:spcPts val="1820"/>
+                <a:spcPct val="125000"/>
               </a:lnSpc>
               <a:spcBef>
                 <a:spcPts val="200"/>
@@ -32408,7 +32322,7 @@
           <a:p>
             <a:pPr algn="l">
               <a:lnSpc>
-                <a:spcPts val="2080"/>
+                <a:spcPct val="125000"/>
               </a:lnSpc>
               <a:spcBef>
                 <a:spcPts val="800"/>
@@ -32430,7 +32344,7 @@
           <a:p>
             <a:pPr algn="l">
               <a:lnSpc>
-                <a:spcPts val="1820"/>
+                <a:spcPct val="125000"/>
               </a:lnSpc>
               <a:spcBef>
                 <a:spcPts val="200"/>
@@ -32452,7 +32366,7 @@
           <a:p>
             <a:pPr algn="l">
               <a:lnSpc>
-                <a:spcPts val="1820"/>
+                <a:spcPct val="125000"/>
               </a:lnSpc>
               <a:spcBef>
                 <a:spcPts val="200"/>
@@ -32474,7 +32388,7 @@
           <a:p>
             <a:pPr algn="l">
               <a:lnSpc>
-                <a:spcPts val="1820"/>
+                <a:spcPct val="125000"/>
               </a:lnSpc>
               <a:spcBef>
                 <a:spcPts val="200"/>
@@ -32496,7 +32410,7 @@
           <a:p>
             <a:pPr algn="l">
               <a:lnSpc>
-                <a:spcPts val="1820"/>
+                <a:spcPct val="125000"/>
               </a:lnSpc>
               <a:spcBef>
                 <a:spcPts val="200"/>
@@ -32518,7 +32432,7 @@
           <a:p>
             <a:pPr algn="l">
               <a:lnSpc>
-                <a:spcPts val="2080"/>
+                <a:spcPct val="125000"/>
               </a:lnSpc>
               <a:spcBef>
                 <a:spcPts val="800"/>
@@ -32540,7 +32454,7 @@
           <a:p>
             <a:pPr algn="l">
               <a:lnSpc>
-                <a:spcPts val="1820"/>
+                <a:spcPct val="125000"/>
               </a:lnSpc>
               <a:spcBef>
                 <a:spcPts val="200"/>
@@ -32562,7 +32476,7 @@
           <a:p>
             <a:pPr algn="l">
               <a:lnSpc>
-                <a:spcPts val="2080"/>
+                <a:spcPct val="125000"/>
               </a:lnSpc>
               <a:spcBef>
                 <a:spcPts val="800"/>
@@ -32584,7 +32498,7 @@
           <a:p>
             <a:pPr algn="l">
               <a:lnSpc>
-                <a:spcPts val="1820"/>
+                <a:spcPct val="125000"/>
               </a:lnSpc>
               <a:spcBef>
                 <a:spcPts val="200"/>
@@ -32695,11 +32609,10 @@
             <a:spAutoFit/>
           </a:bodyPr>
           <a:lstStyle/>
-          <a:p/>
-          <a:p>
-            <a:pPr algn="l">
-              <a:lnSpc>
-                <a:spcPts val="2080"/>
+          <a:p>
+            <a:pPr algn="l">
+              <a:lnSpc>
+                <a:spcPct val="125000"/>
               </a:lnSpc>
               <a:spcBef>
                 <a:spcPts val="0"/>
@@ -32721,7 +32634,7 @@
           <a:p>
             <a:pPr algn="l">
               <a:lnSpc>
-                <a:spcPts val="2080"/>
+                <a:spcPct val="125000"/>
               </a:lnSpc>
               <a:spcBef>
                 <a:spcPts val="800"/>
@@ -32743,7 +32656,7 @@
           <a:p>
             <a:pPr algn="l">
               <a:lnSpc>
-                <a:spcPts val="1820"/>
+                <a:spcPct val="125000"/>
               </a:lnSpc>
               <a:spcBef>
                 <a:spcPts val="200"/>
@@ -32765,7 +32678,7 @@
           <a:p>
             <a:pPr algn="l">
               <a:lnSpc>
-                <a:spcPts val="2080"/>
+                <a:spcPct val="125000"/>
               </a:lnSpc>
               <a:spcBef>
                 <a:spcPts val="800"/>
@@ -32787,7 +32700,7 @@
           <a:p>
             <a:pPr algn="l">
               <a:lnSpc>
-                <a:spcPts val="1820"/>
+                <a:spcPct val="125000"/>
               </a:lnSpc>
               <a:spcBef>
                 <a:spcPts val="200"/>
@@ -32809,7 +32722,7 @@
           <a:p>
             <a:pPr algn="l">
               <a:lnSpc>
-                <a:spcPts val="1820"/>
+                <a:spcPct val="125000"/>
               </a:lnSpc>
               <a:spcBef>
                 <a:spcPts val="200"/>
@@ -32831,7 +32744,7 @@
           <a:p>
             <a:pPr algn="l">
               <a:lnSpc>
-                <a:spcPts val="1820"/>
+                <a:spcPct val="125000"/>
               </a:lnSpc>
               <a:spcBef>
                 <a:spcPts val="200"/>
@@ -32853,7 +32766,7 @@
           <a:p>
             <a:pPr algn="l">
               <a:lnSpc>
-                <a:spcPts val="1820"/>
+                <a:spcPct val="125000"/>
               </a:lnSpc>
               <a:spcBef>
                 <a:spcPts val="200"/>
@@ -32875,7 +32788,7 @@
           <a:p>
             <a:pPr algn="l">
               <a:lnSpc>
-                <a:spcPts val="1820"/>
+                <a:spcPct val="125000"/>
               </a:lnSpc>
               <a:spcBef>
                 <a:spcPts val="200"/>
@@ -32897,7 +32810,7 @@
           <a:p>
             <a:pPr algn="l">
               <a:lnSpc>
-                <a:spcPts val="1820"/>
+                <a:spcPct val="125000"/>
               </a:lnSpc>
               <a:spcBef>
                 <a:spcPts val="200"/>
@@ -32919,7 +32832,7 @@
           <a:p>
             <a:pPr algn="l">
               <a:lnSpc>
-                <a:spcPts val="1820"/>
+                <a:spcPct val="125000"/>
               </a:lnSpc>
               <a:spcBef>
                 <a:spcPts val="200"/>
@@ -32941,7 +32854,7 @@
           <a:p>
             <a:pPr algn="l">
               <a:lnSpc>
-                <a:spcPts val="1820"/>
+                <a:spcPct val="125000"/>
               </a:lnSpc>
               <a:spcBef>
                 <a:spcPts val="200"/>
@@ -32963,7 +32876,7 @@
           <a:p>
             <a:pPr algn="l">
               <a:lnSpc>
-                <a:spcPts val="1820"/>
+                <a:spcPct val="125000"/>
               </a:lnSpc>
               <a:spcBef>
                 <a:spcPts val="200"/>
@@ -32985,7 +32898,7 @@
           <a:p>
             <a:pPr algn="l">
               <a:lnSpc>
-                <a:spcPts val="1820"/>
+                <a:spcPct val="125000"/>
               </a:lnSpc>
               <a:spcBef>
                 <a:spcPts val="200"/>
@@ -33007,7 +32920,7 @@
           <a:p>
             <a:pPr algn="l">
               <a:lnSpc>
-                <a:spcPts val="1820"/>
+                <a:spcPct val="125000"/>
               </a:lnSpc>
               <a:spcBef>
                 <a:spcPts val="200"/>
@@ -33029,7 +32942,7 @@
           <a:p>
             <a:pPr algn="l">
               <a:lnSpc>
-                <a:spcPts val="1820"/>
+                <a:spcPct val="125000"/>
               </a:lnSpc>
               <a:spcBef>
                 <a:spcPts val="200"/>
@@ -33051,7 +32964,7 @@
           <a:p>
             <a:pPr algn="l">
               <a:lnSpc>
-                <a:spcPts val="1820"/>
+                <a:spcPct val="125000"/>
               </a:lnSpc>
               <a:spcBef>
                 <a:spcPts val="200"/>
@@ -33073,7 +32986,7 @@
           <a:p>
             <a:pPr algn="l">
               <a:lnSpc>
-                <a:spcPts val="1820"/>
+                <a:spcPct val="125000"/>
               </a:lnSpc>
               <a:spcBef>
                 <a:spcPts val="200"/>
@@ -33095,7 +33008,7 @@
           <a:p>
             <a:pPr algn="l">
               <a:lnSpc>
-                <a:spcPts val="1820"/>
+                <a:spcPct val="125000"/>
               </a:lnSpc>
               <a:spcBef>
                 <a:spcPts val="200"/>
@@ -33117,7 +33030,7 @@
           <a:p>
             <a:pPr algn="l">
               <a:lnSpc>
-                <a:spcPts val="1820"/>
+                <a:spcPct val="125000"/>
               </a:lnSpc>
               <a:spcBef>
                 <a:spcPts val="200"/>
@@ -33139,7 +33052,7 @@
           <a:p>
             <a:pPr algn="l">
               <a:lnSpc>
-                <a:spcPts val="1820"/>
+                <a:spcPct val="125000"/>
               </a:lnSpc>
               <a:spcBef>
                 <a:spcPts val="200"/>
@@ -33161,7 +33074,7 @@
           <a:p>
             <a:pPr algn="l">
               <a:lnSpc>
-                <a:spcPts val="1820"/>
+                <a:spcPct val="125000"/>
               </a:lnSpc>
               <a:spcBef>
                 <a:spcPts val="200"/>
@@ -33183,7 +33096,7 @@
           <a:p>
             <a:pPr algn="l">
               <a:lnSpc>
-                <a:spcPts val="1820"/>
+                <a:spcPct val="125000"/>
               </a:lnSpc>
               <a:spcBef>
                 <a:spcPts val="200"/>
@@ -33205,7 +33118,7 @@
           <a:p>
             <a:pPr algn="l">
               <a:lnSpc>
-                <a:spcPts val="1820"/>
+                <a:spcPct val="125000"/>
               </a:lnSpc>
               <a:spcBef>
                 <a:spcPts val="200"/>
@@ -33227,7 +33140,7 @@
           <a:p>
             <a:pPr algn="l">
               <a:lnSpc>
-                <a:spcPts val="1820"/>
+                <a:spcPct val="125000"/>
               </a:lnSpc>
               <a:spcBef>
                 <a:spcPts val="200"/>
@@ -33249,7 +33162,7 @@
           <a:p>
             <a:pPr algn="l">
               <a:lnSpc>
-                <a:spcPts val="1820"/>
+                <a:spcPct val="125000"/>
               </a:lnSpc>
               <a:spcBef>
                 <a:spcPts val="200"/>
@@ -33271,7 +33184,7 @@
           <a:p>
             <a:pPr algn="l">
               <a:lnSpc>
-                <a:spcPts val="1820"/>
+                <a:spcPct val="125000"/>
               </a:lnSpc>
               <a:spcBef>
                 <a:spcPts val="200"/>
@@ -33293,7 +33206,7 @@
           <a:p>
             <a:pPr algn="l">
               <a:lnSpc>
-                <a:spcPts val="1820"/>
+                <a:spcPct val="125000"/>
               </a:lnSpc>
               <a:spcBef>
                 <a:spcPts val="200"/>
@@ -33315,7 +33228,7 @@
           <a:p>
             <a:pPr algn="l">
               <a:lnSpc>
-                <a:spcPts val="1820"/>
+                <a:spcPct val="125000"/>
               </a:lnSpc>
               <a:spcBef>
                 <a:spcPts val="200"/>
@@ -33337,7 +33250,7 @@
           <a:p>
             <a:pPr algn="l">
               <a:lnSpc>
-                <a:spcPts val="1820"/>
+                <a:spcPct val="125000"/>
               </a:lnSpc>
               <a:spcBef>
                 <a:spcPts val="200"/>
@@ -33359,7 +33272,7 @@
           <a:p>
             <a:pPr algn="l">
               <a:lnSpc>
-                <a:spcPts val="1820"/>
+                <a:spcPct val="125000"/>
               </a:lnSpc>
               <a:spcBef>
                 <a:spcPts val="200"/>
@@ -33381,7 +33294,7 @@
           <a:p>
             <a:pPr algn="l">
               <a:lnSpc>
-                <a:spcPts val="2080"/>
+                <a:spcPct val="125000"/>
               </a:lnSpc>
               <a:spcBef>
                 <a:spcPts val="800"/>
@@ -33403,7 +33316,7 @@
           <a:p>
             <a:pPr algn="l">
               <a:lnSpc>
-                <a:spcPts val="1820"/>
+                <a:spcPct val="125000"/>
               </a:lnSpc>
               <a:spcBef>
                 <a:spcPts val="200"/>
@@ -33425,7 +33338,7 @@
           <a:p>
             <a:pPr algn="l">
               <a:lnSpc>
-                <a:spcPts val="2080"/>
+                <a:spcPct val="125000"/>
               </a:lnSpc>
               <a:spcBef>
                 <a:spcPts val="800"/>
@@ -33447,7 +33360,7 @@
           <a:p>
             <a:pPr algn="l">
               <a:lnSpc>
-                <a:spcPts val="1820"/>
+                <a:spcPct val="125000"/>
               </a:lnSpc>
               <a:spcBef>
                 <a:spcPts val="200"/>
@@ -33558,11 +33471,10 @@
             <a:spAutoFit/>
           </a:bodyPr>
           <a:lstStyle/>
-          <a:p/>
-          <a:p>
-            <a:pPr algn="l">
-              <a:lnSpc>
-                <a:spcPts val="2080"/>
+          <a:p>
+            <a:pPr algn="l">
+              <a:lnSpc>
+                <a:spcPct val="125000"/>
               </a:lnSpc>
               <a:spcBef>
                 <a:spcPts val="0"/>
@@ -33584,7 +33496,7 @@
           <a:p>
             <a:pPr algn="l">
               <a:lnSpc>
-                <a:spcPts val="2080"/>
+                <a:spcPct val="125000"/>
               </a:lnSpc>
               <a:spcBef>
                 <a:spcPts val="800"/>
@@ -33606,7 +33518,7 @@
           <a:p>
             <a:pPr algn="l">
               <a:lnSpc>
-                <a:spcPts val="1820"/>
+                <a:spcPct val="125000"/>
               </a:lnSpc>
               <a:spcBef>
                 <a:spcPts val="200"/>
@@ -33628,7 +33540,7 @@
           <a:p>
             <a:pPr algn="l">
               <a:lnSpc>
-                <a:spcPts val="2080"/>
+                <a:spcPct val="125000"/>
               </a:lnSpc>
               <a:spcBef>
                 <a:spcPts val="800"/>
@@ -33650,7 +33562,7 @@
           <a:p>
             <a:pPr algn="l">
               <a:lnSpc>
-                <a:spcPts val="1820"/>
+                <a:spcPct val="125000"/>
               </a:lnSpc>
               <a:spcBef>
                 <a:spcPts val="200"/>
@@ -33672,7 +33584,7 @@
           <a:p>
             <a:pPr algn="l">
               <a:lnSpc>
-                <a:spcPts val="1820"/>
+                <a:spcPct val="125000"/>
               </a:lnSpc>
               <a:spcBef>
                 <a:spcPts val="200"/>
@@ -33694,7 +33606,7 @@
           <a:p>
             <a:pPr algn="l">
               <a:lnSpc>
-                <a:spcPts val="1820"/>
+                <a:spcPct val="125000"/>
               </a:lnSpc>
               <a:spcBef>
                 <a:spcPts val="200"/>
@@ -33716,7 +33628,7 @@
           <a:p>
             <a:pPr algn="l">
               <a:lnSpc>
-                <a:spcPts val="2080"/>
+                <a:spcPct val="125000"/>
               </a:lnSpc>
               <a:spcBef>
                 <a:spcPts val="800"/>
@@ -33738,7 +33650,7 @@
           <a:p>
             <a:pPr algn="l">
               <a:lnSpc>
-                <a:spcPts val="1820"/>
+                <a:spcPct val="125000"/>
               </a:lnSpc>
               <a:spcBef>
                 <a:spcPts val="200"/>
@@ -33760,7 +33672,7 @@
           <a:p>
             <a:pPr algn="l">
               <a:lnSpc>
-                <a:spcPts val="2080"/>
+                <a:spcPct val="125000"/>
               </a:lnSpc>
               <a:spcBef>
                 <a:spcPts val="800"/>
@@ -33782,7 +33694,7 @@
           <a:p>
             <a:pPr algn="l">
               <a:lnSpc>
-                <a:spcPts val="1820"/>
+                <a:spcPct val="125000"/>
               </a:lnSpc>
               <a:spcBef>
                 <a:spcPts val="200"/>

--- a/ppts_output_v3/02_企业所得税风险指引.pptx
+++ b/ppts_output_v3/02_企业所得税风险指引.pptx
@@ -3346,7 +3346,7 @@
           <a:bodyPr rtlCol="0" anchor="ctr" wrap="square" lIns="365760"/>
           <a:lstStyle/>
           <a:p>
-            <a:pPr algn="l"/>
+            <a:pPr algn="just"/>
             <a:r>
               <a:rPr sz="1500" b="1">
                 <a:solidFill>
@@ -3380,7 +3380,7 @@
           </a:bodyPr>
           <a:lstStyle/>
           <a:p>
-            <a:pPr algn="l">
+            <a:pPr algn="just">
               <a:lnSpc>
                 <a:spcPct val="125000"/>
               </a:lnSpc>
@@ -3402,7 +3402,7 @@
             </a:r>
           </a:p>
           <a:p>
-            <a:pPr algn="l">
+            <a:pPr algn="just">
               <a:lnSpc>
                 <a:spcPct val="125000"/>
               </a:lnSpc>
@@ -3424,7 +3424,7 @@
             </a:r>
           </a:p>
           <a:p>
-            <a:pPr algn="l">
+            <a:pPr algn="just">
               <a:lnSpc>
                 <a:spcPct val="125000"/>
               </a:lnSpc>
@@ -3446,7 +3446,7 @@
             </a:r>
           </a:p>
           <a:p>
-            <a:pPr algn="l">
+            <a:pPr algn="just">
               <a:lnSpc>
                 <a:spcPct val="125000"/>
               </a:lnSpc>
@@ -3468,7 +3468,7 @@
             </a:r>
           </a:p>
           <a:p>
-            <a:pPr algn="l">
+            <a:pPr algn="just">
               <a:lnSpc>
                 <a:spcPct val="125000"/>
               </a:lnSpc>
@@ -3490,7 +3490,7 @@
             </a:r>
           </a:p>
           <a:p>
-            <a:pPr algn="l">
+            <a:pPr algn="just">
               <a:lnSpc>
                 <a:spcPct val="125000"/>
               </a:lnSpc>
@@ -3512,7 +3512,7 @@
             </a:r>
           </a:p>
           <a:p>
-            <a:pPr algn="l">
+            <a:pPr algn="just">
               <a:lnSpc>
                 <a:spcPct val="125000"/>
               </a:lnSpc>
@@ -3534,7 +3534,7 @@
             </a:r>
           </a:p>
           <a:p>
-            <a:pPr algn="l">
+            <a:pPr algn="just">
               <a:lnSpc>
                 <a:spcPct val="125000"/>
               </a:lnSpc>
@@ -3556,7 +3556,7 @@
             </a:r>
           </a:p>
           <a:p>
-            <a:pPr algn="l">
+            <a:pPr algn="just">
               <a:lnSpc>
                 <a:spcPct val="125000"/>
               </a:lnSpc>
@@ -3578,7 +3578,7 @@
             </a:r>
           </a:p>
           <a:p>
-            <a:pPr algn="l">
+            <a:pPr algn="just">
               <a:lnSpc>
                 <a:spcPct val="125000"/>
               </a:lnSpc>
@@ -3658,7 +3658,7 @@
           <a:bodyPr rtlCol="0" anchor="ctr" wrap="square" lIns="365760"/>
           <a:lstStyle/>
           <a:p>
-            <a:pPr algn="l"/>
+            <a:pPr algn="just"/>
             <a:r>
               <a:rPr sz="1500" b="1">
                 <a:solidFill>
@@ -3692,7 +3692,7 @@
           </a:bodyPr>
           <a:lstStyle/>
           <a:p>
-            <a:pPr algn="l">
+            <a:pPr algn="just">
               <a:lnSpc>
                 <a:spcPct val="125000"/>
               </a:lnSpc>
@@ -3714,7 +3714,7 @@
             </a:r>
           </a:p>
           <a:p>
-            <a:pPr algn="l">
+            <a:pPr algn="just">
               <a:lnSpc>
                 <a:spcPct val="125000"/>
               </a:lnSpc>
@@ -3736,7 +3736,7 @@
             </a:r>
           </a:p>
           <a:p>
-            <a:pPr algn="l">
+            <a:pPr algn="just">
               <a:lnSpc>
                 <a:spcPct val="125000"/>
               </a:lnSpc>
@@ -3758,7 +3758,7 @@
             </a:r>
           </a:p>
           <a:p>
-            <a:pPr algn="l">
+            <a:pPr algn="just">
               <a:lnSpc>
                 <a:spcPct val="125000"/>
               </a:lnSpc>
@@ -3780,7 +3780,7 @@
             </a:r>
           </a:p>
           <a:p>
-            <a:pPr algn="l">
+            <a:pPr algn="just">
               <a:lnSpc>
                 <a:spcPct val="125000"/>
               </a:lnSpc>
@@ -3802,7 +3802,7 @@
             </a:r>
           </a:p>
           <a:p>
-            <a:pPr algn="l">
+            <a:pPr algn="just">
               <a:lnSpc>
                 <a:spcPct val="125000"/>
               </a:lnSpc>
@@ -3824,7 +3824,7 @@
             </a:r>
           </a:p>
           <a:p>
-            <a:pPr algn="l">
+            <a:pPr algn="just">
               <a:lnSpc>
                 <a:spcPct val="125000"/>
               </a:lnSpc>
@@ -3846,7 +3846,7 @@
             </a:r>
           </a:p>
           <a:p>
-            <a:pPr algn="l">
+            <a:pPr algn="just">
               <a:lnSpc>
                 <a:spcPct val="125000"/>
               </a:lnSpc>
@@ -3868,7 +3868,7 @@
             </a:r>
           </a:p>
           <a:p>
-            <a:pPr algn="l">
+            <a:pPr algn="just">
               <a:lnSpc>
                 <a:spcPct val="125000"/>
               </a:lnSpc>
@@ -3890,7 +3890,7 @@
             </a:r>
           </a:p>
           <a:p>
-            <a:pPr algn="l">
+            <a:pPr algn="just">
               <a:lnSpc>
                 <a:spcPct val="125000"/>
               </a:lnSpc>
@@ -3970,7 +3970,7 @@
           <a:bodyPr rtlCol="0" anchor="ctr" wrap="square" lIns="365760"/>
           <a:lstStyle/>
           <a:p>
-            <a:pPr algn="l"/>
+            <a:pPr algn="just"/>
             <a:r>
               <a:rPr sz="1500" b="1">
                 <a:solidFill>
@@ -4004,7 +4004,7 @@
           </a:bodyPr>
           <a:lstStyle/>
           <a:p>
-            <a:pPr algn="l">
+            <a:pPr algn="just">
               <a:lnSpc>
                 <a:spcPct val="125000"/>
               </a:lnSpc>
@@ -4026,7 +4026,7 @@
             </a:r>
           </a:p>
           <a:p>
-            <a:pPr algn="l">
+            <a:pPr algn="just">
               <a:lnSpc>
                 <a:spcPct val="125000"/>
               </a:lnSpc>
@@ -4048,7 +4048,7 @@
             </a:r>
           </a:p>
           <a:p>
-            <a:pPr algn="l">
+            <a:pPr algn="just">
               <a:lnSpc>
                 <a:spcPct val="125000"/>
               </a:lnSpc>
@@ -4070,7 +4070,7 @@
             </a:r>
           </a:p>
           <a:p>
-            <a:pPr algn="l">
+            <a:pPr algn="just">
               <a:lnSpc>
                 <a:spcPct val="125000"/>
               </a:lnSpc>
@@ -4092,7 +4092,7 @@
             </a:r>
           </a:p>
           <a:p>
-            <a:pPr algn="l">
+            <a:pPr algn="just">
               <a:lnSpc>
                 <a:spcPct val="125000"/>
               </a:lnSpc>
@@ -4114,7 +4114,7 @@
             </a:r>
           </a:p>
           <a:p>
-            <a:pPr algn="l">
+            <a:pPr algn="just">
               <a:lnSpc>
                 <a:spcPct val="125000"/>
               </a:lnSpc>
@@ -4136,7 +4136,7 @@
             </a:r>
           </a:p>
           <a:p>
-            <a:pPr algn="l">
+            <a:pPr algn="just">
               <a:lnSpc>
                 <a:spcPct val="125000"/>
               </a:lnSpc>
@@ -4158,7 +4158,7 @@
             </a:r>
           </a:p>
           <a:p>
-            <a:pPr algn="l">
+            <a:pPr algn="just">
               <a:lnSpc>
                 <a:spcPct val="125000"/>
               </a:lnSpc>
@@ -4180,7 +4180,7 @@
             </a:r>
           </a:p>
           <a:p>
-            <a:pPr algn="l">
+            <a:pPr algn="just">
               <a:lnSpc>
                 <a:spcPct val="125000"/>
               </a:lnSpc>
@@ -4260,7 +4260,7 @@
           <a:bodyPr rtlCol="0" anchor="ctr" wrap="square" lIns="365760"/>
           <a:lstStyle/>
           <a:p>
-            <a:pPr algn="l"/>
+            <a:pPr algn="just"/>
             <a:r>
               <a:rPr sz="1500" b="1">
                 <a:solidFill>
@@ -4294,7 +4294,7 @@
           </a:bodyPr>
           <a:lstStyle/>
           <a:p>
-            <a:pPr algn="l">
+            <a:pPr algn="just">
               <a:lnSpc>
                 <a:spcPct val="125000"/>
               </a:lnSpc>
@@ -4316,7 +4316,7 @@
             </a:r>
           </a:p>
           <a:p>
-            <a:pPr algn="l">
+            <a:pPr algn="just">
               <a:lnSpc>
                 <a:spcPct val="125000"/>
               </a:lnSpc>
@@ -4338,7 +4338,7 @@
             </a:r>
           </a:p>
           <a:p>
-            <a:pPr algn="l">
+            <a:pPr algn="just">
               <a:lnSpc>
                 <a:spcPct val="125000"/>
               </a:lnSpc>
@@ -4360,7 +4360,7 @@
             </a:r>
           </a:p>
           <a:p>
-            <a:pPr algn="l">
+            <a:pPr algn="just">
               <a:lnSpc>
                 <a:spcPct val="125000"/>
               </a:lnSpc>
@@ -4382,7 +4382,7 @@
             </a:r>
           </a:p>
           <a:p>
-            <a:pPr algn="l">
+            <a:pPr algn="just">
               <a:lnSpc>
                 <a:spcPct val="125000"/>
               </a:lnSpc>
@@ -4404,7 +4404,7 @@
             </a:r>
           </a:p>
           <a:p>
-            <a:pPr algn="l">
+            <a:pPr algn="just">
               <a:lnSpc>
                 <a:spcPct val="125000"/>
               </a:lnSpc>
@@ -4426,7 +4426,7 @@
             </a:r>
           </a:p>
           <a:p>
-            <a:pPr algn="l">
+            <a:pPr algn="just">
               <a:lnSpc>
                 <a:spcPct val="125000"/>
               </a:lnSpc>
@@ -4448,7 +4448,7 @@
             </a:r>
           </a:p>
           <a:p>
-            <a:pPr algn="l">
+            <a:pPr algn="just">
               <a:lnSpc>
                 <a:spcPct val="125000"/>
               </a:lnSpc>
@@ -4470,7 +4470,7 @@
             </a:r>
           </a:p>
           <a:p>
-            <a:pPr algn="l">
+            <a:pPr algn="just">
               <a:lnSpc>
                 <a:spcPct val="125000"/>
               </a:lnSpc>
@@ -4550,7 +4550,7 @@
           <a:bodyPr rtlCol="0" anchor="ctr" wrap="square" lIns="365760"/>
           <a:lstStyle/>
           <a:p>
-            <a:pPr algn="l"/>
+            <a:pPr algn="just"/>
             <a:r>
               <a:rPr sz="1500" b="1">
                 <a:solidFill>
@@ -4584,7 +4584,7 @@
           </a:bodyPr>
           <a:lstStyle/>
           <a:p>
-            <a:pPr algn="l">
+            <a:pPr algn="just">
               <a:lnSpc>
                 <a:spcPct val="125000"/>
               </a:lnSpc>
@@ -4606,7 +4606,7 @@
             </a:r>
           </a:p>
           <a:p>
-            <a:pPr algn="l">
+            <a:pPr algn="just">
               <a:lnSpc>
                 <a:spcPct val="125000"/>
               </a:lnSpc>
@@ -4628,7 +4628,7 @@
             </a:r>
           </a:p>
           <a:p>
-            <a:pPr algn="l">
+            <a:pPr algn="just">
               <a:lnSpc>
                 <a:spcPct val="125000"/>
               </a:lnSpc>
@@ -4650,7 +4650,7 @@
             </a:r>
           </a:p>
           <a:p>
-            <a:pPr algn="l">
+            <a:pPr algn="just">
               <a:lnSpc>
                 <a:spcPct val="125000"/>
               </a:lnSpc>
@@ -4672,7 +4672,7 @@
             </a:r>
           </a:p>
           <a:p>
-            <a:pPr algn="l">
+            <a:pPr algn="just">
               <a:lnSpc>
                 <a:spcPct val="125000"/>
               </a:lnSpc>
@@ -4694,7 +4694,7 @@
             </a:r>
           </a:p>
           <a:p>
-            <a:pPr algn="l">
+            <a:pPr algn="just">
               <a:lnSpc>
                 <a:spcPct val="125000"/>
               </a:lnSpc>
@@ -4716,7 +4716,7 @@
             </a:r>
           </a:p>
           <a:p>
-            <a:pPr algn="l">
+            <a:pPr algn="just">
               <a:lnSpc>
                 <a:spcPct val="125000"/>
               </a:lnSpc>
@@ -4738,7 +4738,7 @@
             </a:r>
           </a:p>
           <a:p>
-            <a:pPr algn="l">
+            <a:pPr algn="just">
               <a:lnSpc>
                 <a:spcPct val="125000"/>
               </a:lnSpc>
@@ -4760,7 +4760,7 @@
             </a:r>
           </a:p>
           <a:p>
-            <a:pPr algn="l">
+            <a:pPr algn="just">
               <a:lnSpc>
                 <a:spcPct val="125000"/>
               </a:lnSpc>
@@ -4782,7 +4782,7 @@
             </a:r>
           </a:p>
           <a:p>
-            <a:pPr algn="l">
+            <a:pPr algn="just">
               <a:lnSpc>
                 <a:spcPct val="125000"/>
               </a:lnSpc>
@@ -4862,7 +4862,7 @@
           <a:bodyPr rtlCol="0" anchor="ctr" wrap="square" lIns="365760"/>
           <a:lstStyle/>
           <a:p>
-            <a:pPr algn="l"/>
+            <a:pPr algn="just"/>
             <a:r>
               <a:rPr sz="1500" b="1">
                 <a:solidFill>
@@ -4896,7 +4896,7 @@
           </a:bodyPr>
           <a:lstStyle/>
           <a:p>
-            <a:pPr algn="l">
+            <a:pPr algn="just">
               <a:lnSpc>
                 <a:spcPct val="125000"/>
               </a:lnSpc>
@@ -4918,7 +4918,7 @@
             </a:r>
           </a:p>
           <a:p>
-            <a:pPr algn="l">
+            <a:pPr algn="just">
               <a:lnSpc>
                 <a:spcPct val="125000"/>
               </a:lnSpc>
@@ -4940,7 +4940,7 @@
             </a:r>
           </a:p>
           <a:p>
-            <a:pPr algn="l">
+            <a:pPr algn="just">
               <a:lnSpc>
                 <a:spcPct val="125000"/>
               </a:lnSpc>
@@ -4962,7 +4962,7 @@
             </a:r>
           </a:p>
           <a:p>
-            <a:pPr algn="l">
+            <a:pPr algn="just">
               <a:lnSpc>
                 <a:spcPct val="125000"/>
               </a:lnSpc>
@@ -4984,7 +4984,7 @@
             </a:r>
           </a:p>
           <a:p>
-            <a:pPr algn="l">
+            <a:pPr algn="just">
               <a:lnSpc>
                 <a:spcPct val="125000"/>
               </a:lnSpc>
@@ -5006,7 +5006,7 @@
             </a:r>
           </a:p>
           <a:p>
-            <a:pPr algn="l">
+            <a:pPr algn="just">
               <a:lnSpc>
                 <a:spcPct val="125000"/>
               </a:lnSpc>
@@ -5028,7 +5028,7 @@
             </a:r>
           </a:p>
           <a:p>
-            <a:pPr algn="l">
+            <a:pPr algn="just">
               <a:lnSpc>
                 <a:spcPct val="125000"/>
               </a:lnSpc>
@@ -5050,7 +5050,7 @@
             </a:r>
           </a:p>
           <a:p>
-            <a:pPr algn="l">
+            <a:pPr algn="just">
               <a:lnSpc>
                 <a:spcPct val="125000"/>
               </a:lnSpc>
@@ -5072,7 +5072,7 @@
             </a:r>
           </a:p>
           <a:p>
-            <a:pPr algn="l">
+            <a:pPr algn="just">
               <a:lnSpc>
                 <a:spcPct val="125000"/>
               </a:lnSpc>
@@ -5094,7 +5094,7 @@
             </a:r>
           </a:p>
           <a:p>
-            <a:pPr algn="l">
+            <a:pPr algn="just">
               <a:lnSpc>
                 <a:spcPct val="125000"/>
               </a:lnSpc>
@@ -5174,7 +5174,7 @@
           <a:bodyPr rtlCol="0" anchor="ctr" wrap="square" lIns="365760"/>
           <a:lstStyle/>
           <a:p>
-            <a:pPr algn="l"/>
+            <a:pPr algn="just"/>
             <a:r>
               <a:rPr sz="1500" b="1">
                 <a:solidFill>
@@ -5208,7 +5208,7 @@
           </a:bodyPr>
           <a:lstStyle/>
           <a:p>
-            <a:pPr algn="l">
+            <a:pPr algn="just">
               <a:lnSpc>
                 <a:spcPct val="125000"/>
               </a:lnSpc>
@@ -5230,7 +5230,7 @@
             </a:r>
           </a:p>
           <a:p>
-            <a:pPr algn="l">
+            <a:pPr algn="just">
               <a:lnSpc>
                 <a:spcPct val="125000"/>
               </a:lnSpc>
@@ -5252,7 +5252,7 @@
             </a:r>
           </a:p>
           <a:p>
-            <a:pPr algn="l">
+            <a:pPr algn="just">
               <a:lnSpc>
                 <a:spcPct val="125000"/>
               </a:lnSpc>
@@ -5274,7 +5274,7 @@
             </a:r>
           </a:p>
           <a:p>
-            <a:pPr algn="l">
+            <a:pPr algn="just">
               <a:lnSpc>
                 <a:spcPct val="125000"/>
               </a:lnSpc>
@@ -5296,7 +5296,7 @@
             </a:r>
           </a:p>
           <a:p>
-            <a:pPr algn="l">
+            <a:pPr algn="just">
               <a:lnSpc>
                 <a:spcPct val="125000"/>
               </a:lnSpc>
@@ -5318,7 +5318,7 @@
             </a:r>
           </a:p>
           <a:p>
-            <a:pPr algn="l">
+            <a:pPr algn="just">
               <a:lnSpc>
                 <a:spcPct val="125000"/>
               </a:lnSpc>
@@ -5340,7 +5340,7 @@
             </a:r>
           </a:p>
           <a:p>
-            <a:pPr algn="l">
+            <a:pPr algn="just">
               <a:lnSpc>
                 <a:spcPct val="125000"/>
               </a:lnSpc>
@@ -5362,7 +5362,7 @@
             </a:r>
           </a:p>
           <a:p>
-            <a:pPr algn="l">
+            <a:pPr algn="just">
               <a:lnSpc>
                 <a:spcPct val="125000"/>
               </a:lnSpc>
@@ -5384,7 +5384,7 @@
             </a:r>
           </a:p>
           <a:p>
-            <a:pPr algn="l">
+            <a:pPr algn="just">
               <a:lnSpc>
                 <a:spcPct val="125000"/>
               </a:lnSpc>
@@ -5464,7 +5464,7 @@
           <a:bodyPr rtlCol="0" anchor="ctr" wrap="square" lIns="365760"/>
           <a:lstStyle/>
           <a:p>
-            <a:pPr algn="l"/>
+            <a:pPr algn="just"/>
             <a:r>
               <a:rPr sz="1500" b="1">
                 <a:solidFill>
@@ -5498,7 +5498,7 @@
           </a:bodyPr>
           <a:lstStyle/>
           <a:p>
-            <a:pPr algn="l">
+            <a:pPr algn="just">
               <a:lnSpc>
                 <a:spcPct val="125000"/>
               </a:lnSpc>
@@ -5520,7 +5520,7 @@
             </a:r>
           </a:p>
           <a:p>
-            <a:pPr algn="l">
+            <a:pPr algn="just">
               <a:lnSpc>
                 <a:spcPct val="125000"/>
               </a:lnSpc>
@@ -5542,7 +5542,7 @@
             </a:r>
           </a:p>
           <a:p>
-            <a:pPr algn="l">
+            <a:pPr algn="just">
               <a:lnSpc>
                 <a:spcPct val="125000"/>
               </a:lnSpc>
@@ -5564,7 +5564,7 @@
             </a:r>
           </a:p>
           <a:p>
-            <a:pPr algn="l">
+            <a:pPr algn="just">
               <a:lnSpc>
                 <a:spcPct val="125000"/>
               </a:lnSpc>
@@ -5586,7 +5586,7 @@
             </a:r>
           </a:p>
           <a:p>
-            <a:pPr algn="l">
+            <a:pPr algn="just">
               <a:lnSpc>
                 <a:spcPct val="125000"/>
               </a:lnSpc>
@@ -5608,7 +5608,7 @@
             </a:r>
           </a:p>
           <a:p>
-            <a:pPr algn="l">
+            <a:pPr algn="just">
               <a:lnSpc>
                 <a:spcPct val="125000"/>
               </a:lnSpc>
@@ -5630,7 +5630,7 @@
             </a:r>
           </a:p>
           <a:p>
-            <a:pPr algn="l">
+            <a:pPr algn="just">
               <a:lnSpc>
                 <a:spcPct val="125000"/>
               </a:lnSpc>
@@ -5652,7 +5652,7 @@
             </a:r>
           </a:p>
           <a:p>
-            <a:pPr algn="l">
+            <a:pPr algn="just">
               <a:lnSpc>
                 <a:spcPct val="125000"/>
               </a:lnSpc>
@@ -5674,7 +5674,7 @@
             </a:r>
           </a:p>
           <a:p>
-            <a:pPr algn="l">
+            <a:pPr algn="just">
               <a:lnSpc>
                 <a:spcPct val="125000"/>
               </a:lnSpc>
@@ -5754,7 +5754,7 @@
           <a:bodyPr rtlCol="0" anchor="ctr" wrap="square" lIns="365760"/>
           <a:lstStyle/>
           <a:p>
-            <a:pPr algn="l"/>
+            <a:pPr algn="just"/>
             <a:r>
               <a:rPr sz="1500" b="1">
                 <a:solidFill>
@@ -5788,7 +5788,7 @@
           </a:bodyPr>
           <a:lstStyle/>
           <a:p>
-            <a:pPr algn="l">
+            <a:pPr algn="just">
               <a:lnSpc>
                 <a:spcPct val="125000"/>
               </a:lnSpc>
@@ -5810,7 +5810,7 @@
             </a:r>
           </a:p>
           <a:p>
-            <a:pPr algn="l">
+            <a:pPr algn="just">
               <a:lnSpc>
                 <a:spcPct val="125000"/>
               </a:lnSpc>
@@ -5832,7 +5832,7 @@
             </a:r>
           </a:p>
           <a:p>
-            <a:pPr algn="l">
+            <a:pPr algn="just">
               <a:lnSpc>
                 <a:spcPct val="125000"/>
               </a:lnSpc>
@@ -5854,7 +5854,7 @@
             </a:r>
           </a:p>
           <a:p>
-            <a:pPr algn="l">
+            <a:pPr algn="just">
               <a:lnSpc>
                 <a:spcPct val="125000"/>
               </a:lnSpc>
@@ -5876,7 +5876,7 @@
             </a:r>
           </a:p>
           <a:p>
-            <a:pPr algn="l">
+            <a:pPr algn="just">
               <a:lnSpc>
                 <a:spcPct val="125000"/>
               </a:lnSpc>
@@ -5898,7 +5898,7 @@
             </a:r>
           </a:p>
           <a:p>
-            <a:pPr algn="l">
+            <a:pPr algn="just">
               <a:lnSpc>
                 <a:spcPct val="125000"/>
               </a:lnSpc>
@@ -5920,7 +5920,7 @@
             </a:r>
           </a:p>
           <a:p>
-            <a:pPr algn="l">
+            <a:pPr algn="just">
               <a:lnSpc>
                 <a:spcPct val="125000"/>
               </a:lnSpc>
@@ -5942,7 +5942,7 @@
             </a:r>
           </a:p>
           <a:p>
-            <a:pPr algn="l">
+            <a:pPr algn="just">
               <a:lnSpc>
                 <a:spcPct val="125000"/>
               </a:lnSpc>
@@ -5964,7 +5964,7 @@
             </a:r>
           </a:p>
           <a:p>
-            <a:pPr algn="l">
+            <a:pPr algn="just">
               <a:lnSpc>
                 <a:spcPct val="125000"/>
               </a:lnSpc>
@@ -6044,7 +6044,7 @@
           <a:bodyPr rtlCol="0" anchor="ctr" wrap="square" lIns="365760"/>
           <a:lstStyle/>
           <a:p>
-            <a:pPr algn="l"/>
+            <a:pPr algn="just"/>
             <a:r>
               <a:rPr sz="1500" b="1">
                 <a:solidFill>
@@ -6078,7 +6078,7 @@
           </a:bodyPr>
           <a:lstStyle/>
           <a:p>
-            <a:pPr algn="l">
+            <a:pPr algn="just">
               <a:lnSpc>
                 <a:spcPct val="125000"/>
               </a:lnSpc>
@@ -6100,7 +6100,7 @@
             </a:r>
           </a:p>
           <a:p>
-            <a:pPr algn="l">
+            <a:pPr algn="just">
               <a:lnSpc>
                 <a:spcPct val="125000"/>
               </a:lnSpc>
@@ -6122,7 +6122,7 @@
             </a:r>
           </a:p>
           <a:p>
-            <a:pPr algn="l">
+            <a:pPr algn="just">
               <a:lnSpc>
                 <a:spcPct val="125000"/>
               </a:lnSpc>
@@ -6144,7 +6144,7 @@
             </a:r>
           </a:p>
           <a:p>
-            <a:pPr algn="l">
+            <a:pPr algn="just">
               <a:lnSpc>
                 <a:spcPct val="125000"/>
               </a:lnSpc>
@@ -6166,7 +6166,7 @@
             </a:r>
           </a:p>
           <a:p>
-            <a:pPr algn="l">
+            <a:pPr algn="just">
               <a:lnSpc>
                 <a:spcPct val="125000"/>
               </a:lnSpc>
@@ -6188,7 +6188,7 @@
             </a:r>
           </a:p>
           <a:p>
-            <a:pPr algn="l">
+            <a:pPr algn="just">
               <a:lnSpc>
                 <a:spcPct val="125000"/>
               </a:lnSpc>
@@ -6210,7 +6210,7 @@
             </a:r>
           </a:p>
           <a:p>
-            <a:pPr algn="l">
+            <a:pPr algn="just">
               <a:lnSpc>
                 <a:spcPct val="125000"/>
               </a:lnSpc>
@@ -6232,7 +6232,7 @@
             </a:r>
           </a:p>
           <a:p>
-            <a:pPr algn="l">
+            <a:pPr algn="just">
               <a:lnSpc>
                 <a:spcPct val="125000"/>
               </a:lnSpc>
@@ -6254,7 +6254,7 @@
             </a:r>
           </a:p>
           <a:p>
-            <a:pPr algn="l">
+            <a:pPr algn="just">
               <a:lnSpc>
                 <a:spcPct val="125000"/>
               </a:lnSpc>
@@ -6276,7 +6276,7 @@
             </a:r>
           </a:p>
           <a:p>
-            <a:pPr algn="l">
+            <a:pPr algn="just">
               <a:lnSpc>
                 <a:spcPct val="125000"/>
               </a:lnSpc>
@@ -6298,7 +6298,7 @@
             </a:r>
           </a:p>
           <a:p>
-            <a:pPr algn="l">
+            <a:pPr algn="just">
               <a:lnSpc>
                 <a:spcPct val="125000"/>
               </a:lnSpc>
@@ -6320,7 +6320,7 @@
             </a:r>
           </a:p>
           <a:p>
-            <a:pPr algn="l">
+            <a:pPr algn="just">
               <a:lnSpc>
                 <a:spcPct val="125000"/>
               </a:lnSpc>
@@ -6342,7 +6342,7 @@
             </a:r>
           </a:p>
           <a:p>
-            <a:pPr algn="l">
+            <a:pPr algn="just">
               <a:lnSpc>
                 <a:spcPct val="125000"/>
               </a:lnSpc>
@@ -6364,7 +6364,7 @@
             </a:r>
           </a:p>
           <a:p>
-            <a:pPr algn="l">
+            <a:pPr algn="just">
               <a:lnSpc>
                 <a:spcPct val="125000"/>
               </a:lnSpc>
@@ -6386,7 +6386,7 @@
             </a:r>
           </a:p>
           <a:p>
-            <a:pPr algn="l">
+            <a:pPr algn="just">
               <a:lnSpc>
                 <a:spcPct val="125000"/>
               </a:lnSpc>
@@ -6408,7 +6408,7 @@
             </a:r>
           </a:p>
           <a:p>
-            <a:pPr algn="l">
+            <a:pPr algn="just">
               <a:lnSpc>
                 <a:spcPct val="125000"/>
               </a:lnSpc>
@@ -6430,7 +6430,7 @@
             </a:r>
           </a:p>
           <a:p>
-            <a:pPr algn="l">
+            <a:pPr algn="just">
               <a:lnSpc>
                 <a:spcPct val="125000"/>
               </a:lnSpc>
@@ -6510,7 +6510,7 @@
           <a:bodyPr rtlCol="0" anchor="ctr" wrap="square" lIns="365760"/>
           <a:lstStyle/>
           <a:p>
-            <a:pPr algn="l"/>
+            <a:pPr algn="just"/>
             <a:r>
               <a:rPr sz="1500" b="1">
                 <a:solidFill>
@@ -6544,7 +6544,7 @@
           </a:bodyPr>
           <a:lstStyle/>
           <a:p>
-            <a:pPr algn="l">
+            <a:pPr algn="just">
               <a:lnSpc>
                 <a:spcPct val="125000"/>
               </a:lnSpc>
@@ -6566,7 +6566,7 @@
             </a:r>
           </a:p>
           <a:p>
-            <a:pPr algn="l">
+            <a:pPr algn="just">
               <a:lnSpc>
                 <a:spcPct val="125000"/>
               </a:lnSpc>
@@ -6588,7 +6588,7 @@
             </a:r>
           </a:p>
           <a:p>
-            <a:pPr algn="l">
+            <a:pPr algn="just">
               <a:lnSpc>
                 <a:spcPct val="125000"/>
               </a:lnSpc>
@@ -6610,7 +6610,7 @@
             </a:r>
           </a:p>
           <a:p>
-            <a:pPr algn="l">
+            <a:pPr algn="just">
               <a:lnSpc>
                 <a:spcPct val="125000"/>
               </a:lnSpc>
@@ -6632,7 +6632,7 @@
             </a:r>
           </a:p>
           <a:p>
-            <a:pPr algn="l">
+            <a:pPr algn="just">
               <a:lnSpc>
                 <a:spcPct val="125000"/>
               </a:lnSpc>
@@ -6654,7 +6654,7 @@
             </a:r>
           </a:p>
           <a:p>
-            <a:pPr algn="l">
+            <a:pPr algn="just">
               <a:lnSpc>
                 <a:spcPct val="125000"/>
               </a:lnSpc>
@@ -6676,7 +6676,7 @@
             </a:r>
           </a:p>
           <a:p>
-            <a:pPr algn="l">
+            <a:pPr algn="just">
               <a:lnSpc>
                 <a:spcPct val="125000"/>
               </a:lnSpc>
@@ -6698,7 +6698,7 @@
             </a:r>
           </a:p>
           <a:p>
-            <a:pPr algn="l">
+            <a:pPr algn="just">
               <a:lnSpc>
                 <a:spcPct val="125000"/>
               </a:lnSpc>
@@ -6720,7 +6720,7 @@
             </a:r>
           </a:p>
           <a:p>
-            <a:pPr algn="l">
+            <a:pPr algn="just">
               <a:lnSpc>
                 <a:spcPct val="125000"/>
               </a:lnSpc>
@@ -6800,7 +6800,7 @@
           <a:bodyPr rtlCol="0" anchor="ctr" wrap="square" lIns="365760"/>
           <a:lstStyle/>
           <a:p>
-            <a:pPr algn="l"/>
+            <a:pPr algn="just"/>
             <a:r>
               <a:rPr sz="1500" b="1">
                 <a:solidFill>
@@ -6834,7 +6834,7 @@
           </a:bodyPr>
           <a:lstStyle/>
           <a:p>
-            <a:pPr algn="l">
+            <a:pPr algn="just">
               <a:lnSpc>
                 <a:spcPct val="125000"/>
               </a:lnSpc>
@@ -6856,7 +6856,7 @@
             </a:r>
           </a:p>
           <a:p>
-            <a:pPr algn="l">
+            <a:pPr algn="just">
               <a:lnSpc>
                 <a:spcPct val="125000"/>
               </a:lnSpc>
@@ -6878,7 +6878,7 @@
             </a:r>
           </a:p>
           <a:p>
-            <a:pPr algn="l">
+            <a:pPr algn="just">
               <a:lnSpc>
                 <a:spcPct val="125000"/>
               </a:lnSpc>
@@ -6900,7 +6900,7 @@
             </a:r>
           </a:p>
           <a:p>
-            <a:pPr algn="l">
+            <a:pPr algn="just">
               <a:lnSpc>
                 <a:spcPct val="125000"/>
               </a:lnSpc>
@@ -6922,7 +6922,7 @@
             </a:r>
           </a:p>
           <a:p>
-            <a:pPr algn="l">
+            <a:pPr algn="just">
               <a:lnSpc>
                 <a:spcPct val="125000"/>
               </a:lnSpc>
@@ -6944,7 +6944,7 @@
             </a:r>
           </a:p>
           <a:p>
-            <a:pPr algn="l">
+            <a:pPr algn="just">
               <a:lnSpc>
                 <a:spcPct val="125000"/>
               </a:lnSpc>
@@ -6966,7 +6966,7 @@
             </a:r>
           </a:p>
           <a:p>
-            <a:pPr algn="l">
+            <a:pPr algn="just">
               <a:lnSpc>
                 <a:spcPct val="125000"/>
               </a:lnSpc>
@@ -6988,7 +6988,7 @@
             </a:r>
           </a:p>
           <a:p>
-            <a:pPr algn="l">
+            <a:pPr algn="just">
               <a:lnSpc>
                 <a:spcPct val="125000"/>
               </a:lnSpc>
@@ -7010,7 +7010,7 @@
             </a:r>
           </a:p>
           <a:p>
-            <a:pPr algn="l">
+            <a:pPr algn="just">
               <a:lnSpc>
                 <a:spcPct val="125000"/>
               </a:lnSpc>
@@ -7032,7 +7032,7 @@
             </a:r>
           </a:p>
           <a:p>
-            <a:pPr algn="l">
+            <a:pPr algn="just">
               <a:lnSpc>
                 <a:spcPct val="125000"/>
               </a:lnSpc>
@@ -7112,7 +7112,7 @@
           <a:bodyPr rtlCol="0" anchor="ctr" wrap="square" lIns="365760"/>
           <a:lstStyle/>
           <a:p>
-            <a:pPr algn="l"/>
+            <a:pPr algn="just"/>
             <a:r>
               <a:rPr sz="1500" b="1">
                 <a:solidFill>
@@ -7146,7 +7146,7 @@
           </a:bodyPr>
           <a:lstStyle/>
           <a:p>
-            <a:pPr algn="l">
+            <a:pPr algn="just">
               <a:lnSpc>
                 <a:spcPct val="125000"/>
               </a:lnSpc>
@@ -7168,7 +7168,7 @@
             </a:r>
           </a:p>
           <a:p>
-            <a:pPr algn="l">
+            <a:pPr algn="just">
               <a:lnSpc>
                 <a:spcPct val="125000"/>
               </a:lnSpc>
@@ -7190,7 +7190,7 @@
             </a:r>
           </a:p>
           <a:p>
-            <a:pPr algn="l">
+            <a:pPr algn="just">
               <a:lnSpc>
                 <a:spcPct val="125000"/>
               </a:lnSpc>
@@ -7212,7 +7212,7 @@
             </a:r>
           </a:p>
           <a:p>
-            <a:pPr algn="l">
+            <a:pPr algn="just">
               <a:lnSpc>
                 <a:spcPct val="125000"/>
               </a:lnSpc>
@@ -7234,7 +7234,7 @@
             </a:r>
           </a:p>
           <a:p>
-            <a:pPr algn="l">
+            <a:pPr algn="just">
               <a:lnSpc>
                 <a:spcPct val="125000"/>
               </a:lnSpc>
@@ -7256,7 +7256,7 @@
             </a:r>
           </a:p>
           <a:p>
-            <a:pPr algn="l">
+            <a:pPr algn="just">
               <a:lnSpc>
                 <a:spcPct val="125000"/>
               </a:lnSpc>
@@ -7278,7 +7278,7 @@
             </a:r>
           </a:p>
           <a:p>
-            <a:pPr algn="l">
+            <a:pPr algn="just">
               <a:lnSpc>
                 <a:spcPct val="125000"/>
               </a:lnSpc>
@@ -7300,7 +7300,7 @@
             </a:r>
           </a:p>
           <a:p>
-            <a:pPr algn="l">
+            <a:pPr algn="just">
               <a:lnSpc>
                 <a:spcPct val="125000"/>
               </a:lnSpc>
@@ -7322,7 +7322,7 @@
             </a:r>
           </a:p>
           <a:p>
-            <a:pPr algn="l">
+            <a:pPr algn="just">
               <a:lnSpc>
                 <a:spcPct val="125000"/>
               </a:lnSpc>
@@ -7344,7 +7344,7 @@
             </a:r>
           </a:p>
           <a:p>
-            <a:pPr algn="l">
+            <a:pPr algn="just">
               <a:lnSpc>
                 <a:spcPct val="125000"/>
               </a:lnSpc>
@@ -7424,7 +7424,7 @@
           <a:bodyPr rtlCol="0" anchor="ctr" wrap="square" lIns="365760"/>
           <a:lstStyle/>
           <a:p>
-            <a:pPr algn="l"/>
+            <a:pPr algn="just"/>
             <a:r>
               <a:rPr sz="1500" b="1">
                 <a:solidFill>
@@ -7458,7 +7458,7 @@
           </a:bodyPr>
           <a:lstStyle/>
           <a:p>
-            <a:pPr algn="l">
+            <a:pPr algn="just">
               <a:lnSpc>
                 <a:spcPct val="125000"/>
               </a:lnSpc>
@@ -7480,7 +7480,7 @@
             </a:r>
           </a:p>
           <a:p>
-            <a:pPr algn="l">
+            <a:pPr algn="just">
               <a:lnSpc>
                 <a:spcPct val="125000"/>
               </a:lnSpc>
@@ -7502,7 +7502,7 @@
             </a:r>
           </a:p>
           <a:p>
-            <a:pPr algn="l">
+            <a:pPr algn="just">
               <a:lnSpc>
                 <a:spcPct val="125000"/>
               </a:lnSpc>
@@ -7524,7 +7524,7 @@
             </a:r>
           </a:p>
           <a:p>
-            <a:pPr algn="l">
+            <a:pPr algn="just">
               <a:lnSpc>
                 <a:spcPct val="125000"/>
               </a:lnSpc>
@@ -7546,7 +7546,7 @@
             </a:r>
           </a:p>
           <a:p>
-            <a:pPr algn="l">
+            <a:pPr algn="just">
               <a:lnSpc>
                 <a:spcPct val="125000"/>
               </a:lnSpc>
@@ -7568,7 +7568,7 @@
             </a:r>
           </a:p>
           <a:p>
-            <a:pPr algn="l">
+            <a:pPr algn="just">
               <a:lnSpc>
                 <a:spcPct val="125000"/>
               </a:lnSpc>
@@ -7590,7 +7590,7 @@
             </a:r>
           </a:p>
           <a:p>
-            <a:pPr algn="l">
+            <a:pPr algn="just">
               <a:lnSpc>
                 <a:spcPct val="125000"/>
               </a:lnSpc>
@@ -7612,7 +7612,7 @@
             </a:r>
           </a:p>
           <a:p>
-            <a:pPr algn="l">
+            <a:pPr algn="just">
               <a:lnSpc>
                 <a:spcPct val="125000"/>
               </a:lnSpc>
@@ -7634,7 +7634,7 @@
             </a:r>
           </a:p>
           <a:p>
-            <a:pPr algn="l">
+            <a:pPr algn="just">
               <a:lnSpc>
                 <a:spcPct val="125000"/>
               </a:lnSpc>
@@ -7714,7 +7714,7 @@
           <a:bodyPr rtlCol="0" anchor="ctr" wrap="square" lIns="365760"/>
           <a:lstStyle/>
           <a:p>
-            <a:pPr algn="l"/>
+            <a:pPr algn="just"/>
             <a:r>
               <a:rPr sz="1500" b="1">
                 <a:solidFill>
@@ -7748,7 +7748,7 @@
           </a:bodyPr>
           <a:lstStyle/>
           <a:p>
-            <a:pPr algn="l">
+            <a:pPr algn="just">
               <a:lnSpc>
                 <a:spcPct val="125000"/>
               </a:lnSpc>
@@ -7770,7 +7770,7 @@
             </a:r>
           </a:p>
           <a:p>
-            <a:pPr algn="l">
+            <a:pPr algn="just">
               <a:lnSpc>
                 <a:spcPct val="125000"/>
               </a:lnSpc>
@@ -7792,7 +7792,7 @@
             </a:r>
           </a:p>
           <a:p>
-            <a:pPr algn="l">
+            <a:pPr algn="just">
               <a:lnSpc>
                 <a:spcPct val="125000"/>
               </a:lnSpc>
@@ -7814,7 +7814,7 @@
             </a:r>
           </a:p>
           <a:p>
-            <a:pPr algn="l">
+            <a:pPr algn="just">
               <a:lnSpc>
                 <a:spcPct val="125000"/>
               </a:lnSpc>
@@ -7836,7 +7836,7 @@
             </a:r>
           </a:p>
           <a:p>
-            <a:pPr algn="l">
+            <a:pPr algn="just">
               <a:lnSpc>
                 <a:spcPct val="125000"/>
               </a:lnSpc>
@@ -7858,7 +7858,7 @@
             </a:r>
           </a:p>
           <a:p>
-            <a:pPr algn="l">
+            <a:pPr algn="just">
               <a:lnSpc>
                 <a:spcPct val="125000"/>
               </a:lnSpc>
@@ -7880,7 +7880,7 @@
             </a:r>
           </a:p>
           <a:p>
-            <a:pPr algn="l">
+            <a:pPr algn="just">
               <a:lnSpc>
                 <a:spcPct val="125000"/>
               </a:lnSpc>
@@ -7902,7 +7902,7 @@
             </a:r>
           </a:p>
           <a:p>
-            <a:pPr algn="l">
+            <a:pPr algn="just">
               <a:lnSpc>
                 <a:spcPct val="125000"/>
               </a:lnSpc>
@@ -7924,7 +7924,7 @@
             </a:r>
           </a:p>
           <a:p>
-            <a:pPr algn="l">
+            <a:pPr algn="just">
               <a:lnSpc>
                 <a:spcPct val="125000"/>
               </a:lnSpc>
@@ -8004,7 +8004,7 @@
           <a:bodyPr rtlCol="0" anchor="ctr" wrap="square" lIns="365760"/>
           <a:lstStyle/>
           <a:p>
-            <a:pPr algn="l"/>
+            <a:pPr algn="just"/>
             <a:r>
               <a:rPr sz="1500" b="1">
                 <a:solidFill>
@@ -8038,7 +8038,7 @@
           </a:bodyPr>
           <a:lstStyle/>
           <a:p>
-            <a:pPr algn="l">
+            <a:pPr algn="just">
               <a:lnSpc>
                 <a:spcPct val="125000"/>
               </a:lnSpc>
@@ -8060,7 +8060,7 @@
             </a:r>
           </a:p>
           <a:p>
-            <a:pPr algn="l">
+            <a:pPr algn="just">
               <a:lnSpc>
                 <a:spcPct val="125000"/>
               </a:lnSpc>
@@ -8082,7 +8082,7 @@
             </a:r>
           </a:p>
           <a:p>
-            <a:pPr algn="l">
+            <a:pPr algn="just">
               <a:lnSpc>
                 <a:spcPct val="125000"/>
               </a:lnSpc>
@@ -8104,7 +8104,7 @@
             </a:r>
           </a:p>
           <a:p>
-            <a:pPr algn="l">
+            <a:pPr algn="just">
               <a:lnSpc>
                 <a:spcPct val="125000"/>
               </a:lnSpc>
@@ -8126,7 +8126,7 @@
             </a:r>
           </a:p>
           <a:p>
-            <a:pPr algn="l">
+            <a:pPr algn="just">
               <a:lnSpc>
                 <a:spcPct val="125000"/>
               </a:lnSpc>
@@ -8148,7 +8148,7 @@
             </a:r>
           </a:p>
           <a:p>
-            <a:pPr algn="l">
+            <a:pPr algn="just">
               <a:lnSpc>
                 <a:spcPct val="125000"/>
               </a:lnSpc>
@@ -8170,7 +8170,7 @@
             </a:r>
           </a:p>
           <a:p>
-            <a:pPr algn="l">
+            <a:pPr algn="just">
               <a:lnSpc>
                 <a:spcPct val="125000"/>
               </a:lnSpc>
@@ -8192,7 +8192,7 @@
             </a:r>
           </a:p>
           <a:p>
-            <a:pPr algn="l">
+            <a:pPr algn="just">
               <a:lnSpc>
                 <a:spcPct val="125000"/>
               </a:lnSpc>
@@ -8214,7 +8214,7 @@
             </a:r>
           </a:p>
           <a:p>
-            <a:pPr algn="l">
+            <a:pPr algn="just">
               <a:lnSpc>
                 <a:spcPct val="125000"/>
               </a:lnSpc>
@@ -8294,7 +8294,7 @@
           <a:bodyPr rtlCol="0" anchor="ctr" wrap="square" lIns="365760"/>
           <a:lstStyle/>
           <a:p>
-            <a:pPr algn="l"/>
+            <a:pPr algn="just"/>
             <a:r>
               <a:rPr sz="1500" b="1">
                 <a:solidFill>
@@ -8328,7 +8328,7 @@
           </a:bodyPr>
           <a:lstStyle/>
           <a:p>
-            <a:pPr algn="l">
+            <a:pPr algn="just">
               <a:lnSpc>
                 <a:spcPct val="125000"/>
               </a:lnSpc>
@@ -8350,7 +8350,7 @@
             </a:r>
           </a:p>
           <a:p>
-            <a:pPr algn="l">
+            <a:pPr algn="just">
               <a:lnSpc>
                 <a:spcPct val="125000"/>
               </a:lnSpc>
@@ -8372,7 +8372,7 @@
             </a:r>
           </a:p>
           <a:p>
-            <a:pPr algn="l">
+            <a:pPr algn="just">
               <a:lnSpc>
                 <a:spcPct val="125000"/>
               </a:lnSpc>
@@ -8394,7 +8394,7 @@
             </a:r>
           </a:p>
           <a:p>
-            <a:pPr algn="l">
+            <a:pPr algn="just">
               <a:lnSpc>
                 <a:spcPct val="125000"/>
               </a:lnSpc>
@@ -8416,7 +8416,7 @@
             </a:r>
           </a:p>
           <a:p>
-            <a:pPr algn="l">
+            <a:pPr algn="just">
               <a:lnSpc>
                 <a:spcPct val="125000"/>
               </a:lnSpc>
@@ -8438,7 +8438,7 @@
             </a:r>
           </a:p>
           <a:p>
-            <a:pPr algn="l">
+            <a:pPr algn="just">
               <a:lnSpc>
                 <a:spcPct val="125000"/>
               </a:lnSpc>
@@ -8460,7 +8460,7 @@
             </a:r>
           </a:p>
           <a:p>
-            <a:pPr algn="l">
+            <a:pPr algn="just">
               <a:lnSpc>
                 <a:spcPct val="125000"/>
               </a:lnSpc>
@@ -8482,7 +8482,7 @@
             </a:r>
           </a:p>
           <a:p>
-            <a:pPr algn="l">
+            <a:pPr algn="just">
               <a:lnSpc>
                 <a:spcPct val="125000"/>
               </a:lnSpc>
@@ -8504,7 +8504,7 @@
             </a:r>
           </a:p>
           <a:p>
-            <a:pPr algn="l">
+            <a:pPr algn="just">
               <a:lnSpc>
                 <a:spcPct val="125000"/>
               </a:lnSpc>
@@ -8584,7 +8584,7 @@
           <a:bodyPr rtlCol="0" anchor="ctr" wrap="square" lIns="365760"/>
           <a:lstStyle/>
           <a:p>
-            <a:pPr algn="l"/>
+            <a:pPr algn="just"/>
             <a:r>
               <a:rPr sz="1500" b="1">
                 <a:solidFill>
@@ -8618,7 +8618,7 @@
           </a:bodyPr>
           <a:lstStyle/>
           <a:p>
-            <a:pPr algn="l">
+            <a:pPr algn="just">
               <a:lnSpc>
                 <a:spcPct val="125000"/>
               </a:lnSpc>
@@ -8640,7 +8640,7 @@
             </a:r>
           </a:p>
           <a:p>
-            <a:pPr algn="l">
+            <a:pPr algn="just">
               <a:lnSpc>
                 <a:spcPct val="125000"/>
               </a:lnSpc>
@@ -8662,7 +8662,7 @@
             </a:r>
           </a:p>
           <a:p>
-            <a:pPr algn="l">
+            <a:pPr algn="just">
               <a:lnSpc>
                 <a:spcPct val="125000"/>
               </a:lnSpc>
@@ -8684,7 +8684,7 @@
             </a:r>
           </a:p>
           <a:p>
-            <a:pPr algn="l">
+            <a:pPr algn="just">
               <a:lnSpc>
                 <a:spcPct val="125000"/>
               </a:lnSpc>
@@ -8706,7 +8706,7 @@
             </a:r>
           </a:p>
           <a:p>
-            <a:pPr algn="l">
+            <a:pPr algn="just">
               <a:lnSpc>
                 <a:spcPct val="125000"/>
               </a:lnSpc>
@@ -8728,7 +8728,7 @@
             </a:r>
           </a:p>
           <a:p>
-            <a:pPr algn="l">
+            <a:pPr algn="just">
               <a:lnSpc>
                 <a:spcPct val="125000"/>
               </a:lnSpc>
@@ -8750,7 +8750,7 @@
             </a:r>
           </a:p>
           <a:p>
-            <a:pPr algn="l">
+            <a:pPr algn="just">
               <a:lnSpc>
                 <a:spcPct val="125000"/>
               </a:lnSpc>
@@ -8772,7 +8772,7 @@
             </a:r>
           </a:p>
           <a:p>
-            <a:pPr algn="l">
+            <a:pPr algn="just">
               <a:lnSpc>
                 <a:spcPct val="125000"/>
               </a:lnSpc>
@@ -8794,7 +8794,7 @@
             </a:r>
           </a:p>
           <a:p>
-            <a:pPr algn="l">
+            <a:pPr algn="just">
               <a:lnSpc>
                 <a:spcPct val="125000"/>
               </a:lnSpc>
@@ -8816,7 +8816,7 @@
             </a:r>
           </a:p>
           <a:p>
-            <a:pPr algn="l">
+            <a:pPr algn="just">
               <a:lnSpc>
                 <a:spcPct val="125000"/>
               </a:lnSpc>
@@ -8838,7 +8838,7 @@
             </a:r>
           </a:p>
           <a:p>
-            <a:pPr algn="l">
+            <a:pPr algn="just">
               <a:lnSpc>
                 <a:spcPct val="125000"/>
               </a:lnSpc>
@@ -8918,7 +8918,7 @@
           <a:bodyPr rtlCol="0" anchor="ctr" wrap="square" lIns="365760"/>
           <a:lstStyle/>
           <a:p>
-            <a:pPr algn="l"/>
+            <a:pPr algn="just"/>
             <a:r>
               <a:rPr sz="1500" b="1">
                 <a:solidFill>
@@ -8952,7 +8952,7 @@
           </a:bodyPr>
           <a:lstStyle/>
           <a:p>
-            <a:pPr algn="l">
+            <a:pPr algn="just">
               <a:lnSpc>
                 <a:spcPct val="125000"/>
               </a:lnSpc>
@@ -8974,7 +8974,7 @@
             </a:r>
           </a:p>
           <a:p>
-            <a:pPr algn="l">
+            <a:pPr algn="just">
               <a:lnSpc>
                 <a:spcPct val="125000"/>
               </a:lnSpc>
@@ -8996,7 +8996,7 @@
             </a:r>
           </a:p>
           <a:p>
-            <a:pPr algn="l">
+            <a:pPr algn="just">
               <a:lnSpc>
                 <a:spcPct val="125000"/>
               </a:lnSpc>
@@ -9018,7 +9018,7 @@
             </a:r>
           </a:p>
           <a:p>
-            <a:pPr algn="l">
+            <a:pPr algn="just">
               <a:lnSpc>
                 <a:spcPct val="125000"/>
               </a:lnSpc>
@@ -9040,7 +9040,7 @@
             </a:r>
           </a:p>
           <a:p>
-            <a:pPr algn="l">
+            <a:pPr algn="just">
               <a:lnSpc>
                 <a:spcPct val="125000"/>
               </a:lnSpc>
@@ -9062,7 +9062,7 @@
             </a:r>
           </a:p>
           <a:p>
-            <a:pPr algn="l">
+            <a:pPr algn="just">
               <a:lnSpc>
                 <a:spcPct val="125000"/>
               </a:lnSpc>
@@ -9084,7 +9084,7 @@
             </a:r>
           </a:p>
           <a:p>
-            <a:pPr algn="l">
+            <a:pPr algn="just">
               <a:lnSpc>
                 <a:spcPct val="125000"/>
               </a:lnSpc>
@@ -9106,7 +9106,7 @@
             </a:r>
           </a:p>
           <a:p>
-            <a:pPr algn="l">
+            <a:pPr algn="just">
               <a:lnSpc>
                 <a:spcPct val="125000"/>
               </a:lnSpc>
@@ -9128,7 +9128,7 @@
             </a:r>
           </a:p>
           <a:p>
-            <a:pPr algn="l">
+            <a:pPr algn="just">
               <a:lnSpc>
                 <a:spcPct val="125000"/>
               </a:lnSpc>
@@ -9150,7 +9150,7 @@
             </a:r>
           </a:p>
           <a:p>
-            <a:pPr algn="l">
+            <a:pPr algn="just">
               <a:lnSpc>
                 <a:spcPct val="125000"/>
               </a:lnSpc>
@@ -9230,7 +9230,7 @@
           <a:bodyPr rtlCol="0" anchor="ctr" wrap="square" lIns="365760"/>
           <a:lstStyle/>
           <a:p>
-            <a:pPr algn="l"/>
+            <a:pPr algn="just"/>
             <a:r>
               <a:rPr sz="1500" b="1">
                 <a:solidFill>
@@ -9264,7 +9264,7 @@
           </a:bodyPr>
           <a:lstStyle/>
           <a:p>
-            <a:pPr algn="l">
+            <a:pPr algn="just">
               <a:lnSpc>
                 <a:spcPct val="125000"/>
               </a:lnSpc>
@@ -9286,7 +9286,7 @@
             </a:r>
           </a:p>
           <a:p>
-            <a:pPr algn="l">
+            <a:pPr algn="just">
               <a:lnSpc>
                 <a:spcPct val="125000"/>
               </a:lnSpc>
@@ -9308,7 +9308,7 @@
             </a:r>
           </a:p>
           <a:p>
-            <a:pPr algn="l">
+            <a:pPr algn="just">
               <a:lnSpc>
                 <a:spcPct val="125000"/>
               </a:lnSpc>
@@ -9330,7 +9330,7 @@
             </a:r>
           </a:p>
           <a:p>
-            <a:pPr algn="l">
+            <a:pPr algn="just">
               <a:lnSpc>
                 <a:spcPct val="125000"/>
               </a:lnSpc>
@@ -9352,7 +9352,7 @@
             </a:r>
           </a:p>
           <a:p>
-            <a:pPr algn="l">
+            <a:pPr algn="just">
               <a:lnSpc>
                 <a:spcPct val="125000"/>
               </a:lnSpc>
@@ -9374,7 +9374,7 @@
             </a:r>
           </a:p>
           <a:p>
-            <a:pPr algn="l">
+            <a:pPr algn="just">
               <a:lnSpc>
                 <a:spcPct val="125000"/>
               </a:lnSpc>
@@ -9396,7 +9396,7 @@
             </a:r>
           </a:p>
           <a:p>
-            <a:pPr algn="l">
+            <a:pPr algn="just">
               <a:lnSpc>
                 <a:spcPct val="125000"/>
               </a:lnSpc>
@@ -9418,7 +9418,7 @@
             </a:r>
           </a:p>
           <a:p>
-            <a:pPr algn="l">
+            <a:pPr algn="just">
               <a:lnSpc>
                 <a:spcPct val="125000"/>
               </a:lnSpc>
@@ -9440,7 +9440,7 @@
             </a:r>
           </a:p>
           <a:p>
-            <a:pPr algn="l">
+            <a:pPr algn="just">
               <a:lnSpc>
                 <a:spcPct val="125000"/>
               </a:lnSpc>
@@ -9520,7 +9520,7 @@
           <a:bodyPr rtlCol="0" anchor="ctr" wrap="square" lIns="365760"/>
           <a:lstStyle/>
           <a:p>
-            <a:pPr algn="l"/>
+            <a:pPr algn="just"/>
             <a:r>
               <a:rPr sz="1500" b="1">
                 <a:solidFill>
@@ -9554,7 +9554,7 @@
           </a:bodyPr>
           <a:lstStyle/>
           <a:p>
-            <a:pPr algn="l">
+            <a:pPr algn="just">
               <a:lnSpc>
                 <a:spcPct val="125000"/>
               </a:lnSpc>
@@ -9576,7 +9576,7 @@
             </a:r>
           </a:p>
           <a:p>
-            <a:pPr algn="l">
+            <a:pPr algn="just">
               <a:lnSpc>
                 <a:spcPct val="125000"/>
               </a:lnSpc>
@@ -9598,7 +9598,7 @@
             </a:r>
           </a:p>
           <a:p>
-            <a:pPr algn="l">
+            <a:pPr algn="just">
               <a:lnSpc>
                 <a:spcPct val="125000"/>
               </a:lnSpc>
@@ -9620,7 +9620,7 @@
             </a:r>
           </a:p>
           <a:p>
-            <a:pPr algn="l">
+            <a:pPr algn="just">
               <a:lnSpc>
                 <a:spcPct val="125000"/>
               </a:lnSpc>
@@ -9642,7 +9642,7 @@
             </a:r>
           </a:p>
           <a:p>
-            <a:pPr algn="l">
+            <a:pPr algn="just">
               <a:lnSpc>
                 <a:spcPct val="125000"/>
               </a:lnSpc>
@@ -9664,7 +9664,7 @@
             </a:r>
           </a:p>
           <a:p>
-            <a:pPr algn="l">
+            <a:pPr algn="just">
               <a:lnSpc>
                 <a:spcPct val="125000"/>
               </a:lnSpc>
@@ -9686,7 +9686,7 @@
             </a:r>
           </a:p>
           <a:p>
-            <a:pPr algn="l">
+            <a:pPr algn="just">
               <a:lnSpc>
                 <a:spcPct val="125000"/>
               </a:lnSpc>
@@ -9708,7 +9708,7 @@
             </a:r>
           </a:p>
           <a:p>
-            <a:pPr algn="l">
+            <a:pPr algn="just">
               <a:lnSpc>
                 <a:spcPct val="125000"/>
               </a:lnSpc>
@@ -9730,7 +9730,7 @@
             </a:r>
           </a:p>
           <a:p>
-            <a:pPr algn="l">
+            <a:pPr algn="just">
               <a:lnSpc>
                 <a:spcPct val="125000"/>
               </a:lnSpc>
@@ -9810,7 +9810,7 @@
           <a:bodyPr rtlCol="0" anchor="ctr" wrap="square" lIns="365760"/>
           <a:lstStyle/>
           <a:p>
-            <a:pPr algn="l"/>
+            <a:pPr algn="just"/>
             <a:r>
               <a:rPr sz="1500" b="1">
                 <a:solidFill>
@@ -9844,7 +9844,7 @@
           </a:bodyPr>
           <a:lstStyle/>
           <a:p>
-            <a:pPr algn="l">
+            <a:pPr algn="just">
               <a:lnSpc>
                 <a:spcPct val="125000"/>
               </a:lnSpc>
@@ -9866,7 +9866,7 @@
             </a:r>
           </a:p>
           <a:p>
-            <a:pPr algn="l">
+            <a:pPr algn="just">
               <a:lnSpc>
                 <a:spcPct val="125000"/>
               </a:lnSpc>
@@ -9888,7 +9888,7 @@
             </a:r>
           </a:p>
           <a:p>
-            <a:pPr algn="l">
+            <a:pPr algn="just">
               <a:lnSpc>
                 <a:spcPct val="125000"/>
               </a:lnSpc>
@@ -9910,7 +9910,7 @@
             </a:r>
           </a:p>
           <a:p>
-            <a:pPr algn="l">
+            <a:pPr algn="just">
               <a:lnSpc>
                 <a:spcPct val="125000"/>
               </a:lnSpc>
@@ -9932,7 +9932,7 @@
             </a:r>
           </a:p>
           <a:p>
-            <a:pPr algn="l">
+            <a:pPr algn="just">
               <a:lnSpc>
                 <a:spcPct val="125000"/>
               </a:lnSpc>
@@ -9954,7 +9954,7 @@
             </a:r>
           </a:p>
           <a:p>
-            <a:pPr algn="l">
+            <a:pPr algn="just">
               <a:lnSpc>
                 <a:spcPct val="125000"/>
               </a:lnSpc>
@@ -9976,7 +9976,7 @@
             </a:r>
           </a:p>
           <a:p>
-            <a:pPr algn="l">
+            <a:pPr algn="just">
               <a:lnSpc>
                 <a:spcPct val="125000"/>
               </a:lnSpc>
@@ -9998,7 +9998,7 @@
             </a:r>
           </a:p>
           <a:p>
-            <a:pPr algn="l">
+            <a:pPr algn="just">
               <a:lnSpc>
                 <a:spcPct val="125000"/>
               </a:lnSpc>
@@ -10020,7 +10020,7 @@
             </a:r>
           </a:p>
           <a:p>
-            <a:pPr algn="l">
+            <a:pPr algn="just">
               <a:lnSpc>
                 <a:spcPct val="125000"/>
               </a:lnSpc>
@@ -10100,7 +10100,7 @@
           <a:bodyPr rtlCol="0" anchor="ctr" wrap="square" lIns="365760"/>
           <a:lstStyle/>
           <a:p>
-            <a:pPr algn="l"/>
+            <a:pPr algn="just"/>
             <a:r>
               <a:rPr sz="1500" b="1">
                 <a:solidFill>
@@ -10134,7 +10134,7 @@
           </a:bodyPr>
           <a:lstStyle/>
           <a:p>
-            <a:pPr algn="l">
+            <a:pPr algn="just">
               <a:lnSpc>
                 <a:spcPct val="125000"/>
               </a:lnSpc>
@@ -10156,7 +10156,7 @@
             </a:r>
           </a:p>
           <a:p>
-            <a:pPr algn="l">
+            <a:pPr algn="just">
               <a:lnSpc>
                 <a:spcPct val="125000"/>
               </a:lnSpc>
@@ -10178,7 +10178,7 @@
             </a:r>
           </a:p>
           <a:p>
-            <a:pPr algn="l">
+            <a:pPr algn="just">
               <a:lnSpc>
                 <a:spcPct val="125000"/>
               </a:lnSpc>
@@ -10200,7 +10200,7 @@
             </a:r>
           </a:p>
           <a:p>
-            <a:pPr algn="l">
+            <a:pPr algn="just">
               <a:lnSpc>
                 <a:spcPct val="125000"/>
               </a:lnSpc>
@@ -10222,7 +10222,7 @@
             </a:r>
           </a:p>
           <a:p>
-            <a:pPr algn="l">
+            <a:pPr algn="just">
               <a:lnSpc>
                 <a:spcPct val="125000"/>
               </a:lnSpc>
@@ -10244,7 +10244,7 @@
             </a:r>
           </a:p>
           <a:p>
-            <a:pPr algn="l">
+            <a:pPr algn="just">
               <a:lnSpc>
                 <a:spcPct val="125000"/>
               </a:lnSpc>
@@ -10266,7 +10266,7 @@
             </a:r>
           </a:p>
           <a:p>
-            <a:pPr algn="l">
+            <a:pPr algn="just">
               <a:lnSpc>
                 <a:spcPct val="125000"/>
               </a:lnSpc>
@@ -10288,7 +10288,7 @@
             </a:r>
           </a:p>
           <a:p>
-            <a:pPr algn="l">
+            <a:pPr algn="just">
               <a:lnSpc>
                 <a:spcPct val="125000"/>
               </a:lnSpc>
@@ -10310,7 +10310,7 @@
             </a:r>
           </a:p>
           <a:p>
-            <a:pPr algn="l">
+            <a:pPr algn="just">
               <a:lnSpc>
                 <a:spcPct val="125000"/>
               </a:lnSpc>
@@ -10390,7 +10390,7 @@
           <a:bodyPr rtlCol="0" anchor="ctr" wrap="square" lIns="365760"/>
           <a:lstStyle/>
           <a:p>
-            <a:pPr algn="l"/>
+            <a:pPr algn="just"/>
             <a:r>
               <a:rPr sz="1500" b="1">
                 <a:solidFill>
@@ -10424,7 +10424,7 @@
           </a:bodyPr>
           <a:lstStyle/>
           <a:p>
-            <a:pPr algn="l">
+            <a:pPr algn="just">
               <a:lnSpc>
                 <a:spcPct val="125000"/>
               </a:lnSpc>
@@ -10446,7 +10446,7 @@
             </a:r>
           </a:p>
           <a:p>
-            <a:pPr algn="l">
+            <a:pPr algn="just">
               <a:lnSpc>
                 <a:spcPct val="125000"/>
               </a:lnSpc>
@@ -10468,7 +10468,7 @@
             </a:r>
           </a:p>
           <a:p>
-            <a:pPr algn="l">
+            <a:pPr algn="just">
               <a:lnSpc>
                 <a:spcPct val="125000"/>
               </a:lnSpc>
@@ -10490,7 +10490,7 @@
             </a:r>
           </a:p>
           <a:p>
-            <a:pPr algn="l">
+            <a:pPr algn="just">
               <a:lnSpc>
                 <a:spcPct val="125000"/>
               </a:lnSpc>
@@ -10512,7 +10512,7 @@
             </a:r>
           </a:p>
           <a:p>
-            <a:pPr algn="l">
+            <a:pPr algn="just">
               <a:lnSpc>
                 <a:spcPct val="125000"/>
               </a:lnSpc>
@@ -10534,7 +10534,7 @@
             </a:r>
           </a:p>
           <a:p>
-            <a:pPr algn="l">
+            <a:pPr algn="just">
               <a:lnSpc>
                 <a:spcPct val="125000"/>
               </a:lnSpc>
@@ -10556,7 +10556,7 @@
             </a:r>
           </a:p>
           <a:p>
-            <a:pPr algn="l">
+            <a:pPr algn="just">
               <a:lnSpc>
                 <a:spcPct val="125000"/>
               </a:lnSpc>
@@ -10578,7 +10578,7 @@
             </a:r>
           </a:p>
           <a:p>
-            <a:pPr algn="l">
+            <a:pPr algn="just">
               <a:lnSpc>
                 <a:spcPct val="125000"/>
               </a:lnSpc>
@@ -10600,7 +10600,7 @@
             </a:r>
           </a:p>
           <a:p>
-            <a:pPr algn="l">
+            <a:pPr algn="just">
               <a:lnSpc>
                 <a:spcPct val="125000"/>
               </a:lnSpc>
@@ -10622,7 +10622,7 @@
             </a:r>
           </a:p>
           <a:p>
-            <a:pPr algn="l">
+            <a:pPr algn="just">
               <a:lnSpc>
                 <a:spcPct val="125000"/>
               </a:lnSpc>
@@ -10644,7 +10644,7 @@
             </a:r>
           </a:p>
           <a:p>
-            <a:pPr algn="l">
+            <a:pPr algn="just">
               <a:lnSpc>
                 <a:spcPct val="125000"/>
               </a:lnSpc>
@@ -10666,7 +10666,7 @@
             </a:r>
           </a:p>
           <a:p>
-            <a:pPr algn="l">
+            <a:pPr algn="just">
               <a:lnSpc>
                 <a:spcPct val="125000"/>
               </a:lnSpc>
@@ -10746,7 +10746,7 @@
           <a:bodyPr rtlCol="0" anchor="ctr" wrap="square" lIns="365760"/>
           <a:lstStyle/>
           <a:p>
-            <a:pPr algn="l"/>
+            <a:pPr algn="just"/>
             <a:r>
               <a:rPr sz="1500" b="1">
                 <a:solidFill>
@@ -10780,7 +10780,7 @@
           </a:bodyPr>
           <a:lstStyle/>
           <a:p>
-            <a:pPr algn="l">
+            <a:pPr algn="just">
               <a:lnSpc>
                 <a:spcPct val="125000"/>
               </a:lnSpc>
@@ -10802,7 +10802,7 @@
             </a:r>
           </a:p>
           <a:p>
-            <a:pPr algn="l">
+            <a:pPr algn="just">
               <a:lnSpc>
                 <a:spcPct val="125000"/>
               </a:lnSpc>
@@ -10824,7 +10824,7 @@
             </a:r>
           </a:p>
           <a:p>
-            <a:pPr algn="l">
+            <a:pPr algn="just">
               <a:lnSpc>
                 <a:spcPct val="125000"/>
               </a:lnSpc>
@@ -10846,7 +10846,7 @@
             </a:r>
           </a:p>
           <a:p>
-            <a:pPr algn="l">
+            <a:pPr algn="just">
               <a:lnSpc>
                 <a:spcPct val="125000"/>
               </a:lnSpc>
@@ -10868,7 +10868,7 @@
             </a:r>
           </a:p>
           <a:p>
-            <a:pPr algn="l">
+            <a:pPr algn="just">
               <a:lnSpc>
                 <a:spcPct val="125000"/>
               </a:lnSpc>
@@ -10890,7 +10890,7 @@
             </a:r>
           </a:p>
           <a:p>
-            <a:pPr algn="l">
+            <a:pPr algn="just">
               <a:lnSpc>
                 <a:spcPct val="125000"/>
               </a:lnSpc>
@@ -10912,7 +10912,7 @@
             </a:r>
           </a:p>
           <a:p>
-            <a:pPr algn="l">
+            <a:pPr algn="just">
               <a:lnSpc>
                 <a:spcPct val="125000"/>
               </a:lnSpc>
@@ -10934,7 +10934,7 @@
             </a:r>
           </a:p>
           <a:p>
-            <a:pPr algn="l">
+            <a:pPr algn="just">
               <a:lnSpc>
                 <a:spcPct val="125000"/>
               </a:lnSpc>
@@ -10956,7 +10956,7 @@
             </a:r>
           </a:p>
           <a:p>
-            <a:pPr algn="l">
+            <a:pPr algn="just">
               <a:lnSpc>
                 <a:spcPct val="125000"/>
               </a:lnSpc>
@@ -10978,7 +10978,7 @@
             </a:r>
           </a:p>
           <a:p>
-            <a:pPr algn="l">
+            <a:pPr algn="just">
               <a:lnSpc>
                 <a:spcPct val="125000"/>
               </a:lnSpc>
@@ -11000,7 +11000,7 @@
             </a:r>
           </a:p>
           <a:p>
-            <a:pPr algn="l">
+            <a:pPr algn="just">
               <a:lnSpc>
                 <a:spcPct val="125000"/>
               </a:lnSpc>
@@ -11080,7 +11080,7 @@
           <a:bodyPr rtlCol="0" anchor="ctr" wrap="square" lIns="365760"/>
           <a:lstStyle/>
           <a:p>
-            <a:pPr algn="l"/>
+            <a:pPr algn="just"/>
             <a:r>
               <a:rPr sz="1500" b="1">
                 <a:solidFill>
@@ -11114,7 +11114,7 @@
           </a:bodyPr>
           <a:lstStyle/>
           <a:p>
-            <a:pPr algn="l">
+            <a:pPr algn="just">
               <a:lnSpc>
                 <a:spcPct val="125000"/>
               </a:lnSpc>
@@ -11136,7 +11136,7 @@
             </a:r>
           </a:p>
           <a:p>
-            <a:pPr algn="l">
+            <a:pPr algn="just">
               <a:lnSpc>
                 <a:spcPct val="125000"/>
               </a:lnSpc>
@@ -11158,7 +11158,7 @@
             </a:r>
           </a:p>
           <a:p>
-            <a:pPr algn="l">
+            <a:pPr algn="just">
               <a:lnSpc>
                 <a:spcPct val="125000"/>
               </a:lnSpc>
@@ -11180,7 +11180,7 @@
             </a:r>
           </a:p>
           <a:p>
-            <a:pPr algn="l">
+            <a:pPr algn="just">
               <a:lnSpc>
                 <a:spcPct val="125000"/>
               </a:lnSpc>
@@ -11202,7 +11202,7 @@
             </a:r>
           </a:p>
           <a:p>
-            <a:pPr algn="l">
+            <a:pPr algn="just">
               <a:lnSpc>
                 <a:spcPct val="125000"/>
               </a:lnSpc>
@@ -11224,7 +11224,7 @@
             </a:r>
           </a:p>
           <a:p>
-            <a:pPr algn="l">
+            <a:pPr algn="just">
               <a:lnSpc>
                 <a:spcPct val="125000"/>
               </a:lnSpc>
@@ -11246,7 +11246,7 @@
             </a:r>
           </a:p>
           <a:p>
-            <a:pPr algn="l">
+            <a:pPr algn="just">
               <a:lnSpc>
                 <a:spcPct val="125000"/>
               </a:lnSpc>
@@ -11268,7 +11268,7 @@
             </a:r>
           </a:p>
           <a:p>
-            <a:pPr algn="l">
+            <a:pPr algn="just">
               <a:lnSpc>
                 <a:spcPct val="125000"/>
               </a:lnSpc>
@@ -11290,7 +11290,7 @@
             </a:r>
           </a:p>
           <a:p>
-            <a:pPr algn="l">
+            <a:pPr algn="just">
               <a:lnSpc>
                 <a:spcPct val="125000"/>
               </a:lnSpc>
@@ -11312,7 +11312,7 @@
             </a:r>
           </a:p>
           <a:p>
-            <a:pPr algn="l">
+            <a:pPr algn="just">
               <a:lnSpc>
                 <a:spcPct val="125000"/>
               </a:lnSpc>
@@ -11334,7 +11334,7 @@
             </a:r>
           </a:p>
           <a:p>
-            <a:pPr algn="l">
+            <a:pPr algn="just">
               <a:lnSpc>
                 <a:spcPct val="125000"/>
               </a:lnSpc>
@@ -11356,7 +11356,7 @@
             </a:r>
           </a:p>
           <a:p>
-            <a:pPr algn="l">
+            <a:pPr algn="just">
               <a:lnSpc>
                 <a:spcPct val="125000"/>
               </a:lnSpc>
@@ -11378,7 +11378,7 @@
             </a:r>
           </a:p>
           <a:p>
-            <a:pPr algn="l">
+            <a:pPr algn="just">
               <a:lnSpc>
                 <a:spcPct val="125000"/>
               </a:lnSpc>
@@ -11458,7 +11458,7 @@
           <a:bodyPr rtlCol="0" anchor="ctr" wrap="square" lIns="365760"/>
           <a:lstStyle/>
           <a:p>
-            <a:pPr algn="l"/>
+            <a:pPr algn="just"/>
             <a:r>
               <a:rPr sz="1500" b="1">
                 <a:solidFill>
@@ -11492,7 +11492,7 @@
           </a:bodyPr>
           <a:lstStyle/>
           <a:p>
-            <a:pPr algn="l">
+            <a:pPr algn="just">
               <a:lnSpc>
                 <a:spcPct val="125000"/>
               </a:lnSpc>
@@ -11514,7 +11514,7 @@
             </a:r>
           </a:p>
           <a:p>
-            <a:pPr algn="l">
+            <a:pPr algn="just">
               <a:lnSpc>
                 <a:spcPct val="125000"/>
               </a:lnSpc>
@@ -11536,7 +11536,7 @@
             </a:r>
           </a:p>
           <a:p>
-            <a:pPr algn="l">
+            <a:pPr algn="just">
               <a:lnSpc>
                 <a:spcPct val="125000"/>
               </a:lnSpc>
@@ -11558,7 +11558,7 @@
             </a:r>
           </a:p>
           <a:p>
-            <a:pPr algn="l">
+            <a:pPr algn="just">
               <a:lnSpc>
                 <a:spcPct val="125000"/>
               </a:lnSpc>
@@ -11580,7 +11580,7 @@
             </a:r>
           </a:p>
           <a:p>
-            <a:pPr algn="l">
+            <a:pPr algn="just">
               <a:lnSpc>
                 <a:spcPct val="125000"/>
               </a:lnSpc>
@@ -11602,7 +11602,7 @@
             </a:r>
           </a:p>
           <a:p>
-            <a:pPr algn="l">
+            <a:pPr algn="just">
               <a:lnSpc>
                 <a:spcPct val="125000"/>
               </a:lnSpc>
@@ -11624,7 +11624,7 @@
             </a:r>
           </a:p>
           <a:p>
-            <a:pPr algn="l">
+            <a:pPr algn="just">
               <a:lnSpc>
                 <a:spcPct val="125000"/>
               </a:lnSpc>
@@ -11646,7 +11646,7 @@
             </a:r>
           </a:p>
           <a:p>
-            <a:pPr algn="l">
+            <a:pPr algn="just">
               <a:lnSpc>
                 <a:spcPct val="125000"/>
               </a:lnSpc>
@@ -11668,7 +11668,7 @@
             </a:r>
           </a:p>
           <a:p>
-            <a:pPr algn="l">
+            <a:pPr algn="just">
               <a:lnSpc>
                 <a:spcPct val="125000"/>
               </a:lnSpc>
@@ -11690,7 +11690,7 @@
             </a:r>
           </a:p>
           <a:p>
-            <a:pPr algn="l">
+            <a:pPr algn="just">
               <a:lnSpc>
                 <a:spcPct val="125000"/>
               </a:lnSpc>
@@ -11770,7 +11770,7 @@
           <a:bodyPr rtlCol="0" anchor="ctr" wrap="square" lIns="365760"/>
           <a:lstStyle/>
           <a:p>
-            <a:pPr algn="l"/>
+            <a:pPr algn="just"/>
             <a:r>
               <a:rPr sz="1500" b="1">
                 <a:solidFill>
@@ -11804,7 +11804,7 @@
           </a:bodyPr>
           <a:lstStyle/>
           <a:p>
-            <a:pPr algn="l">
+            <a:pPr algn="just">
               <a:lnSpc>
                 <a:spcPct val="125000"/>
               </a:lnSpc>
@@ -11826,7 +11826,7 @@
             </a:r>
           </a:p>
           <a:p>
-            <a:pPr algn="l">
+            <a:pPr algn="just">
               <a:lnSpc>
                 <a:spcPct val="125000"/>
               </a:lnSpc>
@@ -11848,7 +11848,7 @@
             </a:r>
           </a:p>
           <a:p>
-            <a:pPr algn="l">
+            <a:pPr algn="just">
               <a:lnSpc>
                 <a:spcPct val="125000"/>
               </a:lnSpc>
@@ -11870,7 +11870,7 @@
             </a:r>
           </a:p>
           <a:p>
-            <a:pPr algn="l">
+            <a:pPr algn="just">
               <a:lnSpc>
                 <a:spcPct val="125000"/>
               </a:lnSpc>
@@ -11892,7 +11892,7 @@
             </a:r>
           </a:p>
           <a:p>
-            <a:pPr algn="l">
+            <a:pPr algn="just">
               <a:lnSpc>
                 <a:spcPct val="125000"/>
               </a:lnSpc>
@@ -11914,7 +11914,7 @@
             </a:r>
           </a:p>
           <a:p>
-            <a:pPr algn="l">
+            <a:pPr algn="just">
               <a:lnSpc>
                 <a:spcPct val="125000"/>
               </a:lnSpc>
@@ -11936,7 +11936,7 @@
             </a:r>
           </a:p>
           <a:p>
-            <a:pPr algn="l">
+            <a:pPr algn="just">
               <a:lnSpc>
                 <a:spcPct val="125000"/>
               </a:lnSpc>
@@ -11958,7 +11958,7 @@
             </a:r>
           </a:p>
           <a:p>
-            <a:pPr algn="l">
+            <a:pPr algn="just">
               <a:lnSpc>
                 <a:spcPct val="125000"/>
               </a:lnSpc>
@@ -11980,7 +11980,7 @@
             </a:r>
           </a:p>
           <a:p>
-            <a:pPr algn="l">
+            <a:pPr algn="just">
               <a:lnSpc>
                 <a:spcPct val="125000"/>
               </a:lnSpc>
@@ -12002,7 +12002,7 @@
             </a:r>
           </a:p>
           <a:p>
-            <a:pPr algn="l">
+            <a:pPr algn="just">
               <a:lnSpc>
                 <a:spcPct val="125000"/>
               </a:lnSpc>
@@ -12024,7 +12024,7 @@
             </a:r>
           </a:p>
           <a:p>
-            <a:pPr algn="l">
+            <a:pPr algn="just">
               <a:lnSpc>
                 <a:spcPct val="125000"/>
               </a:lnSpc>
@@ -12046,7 +12046,7 @@
             </a:r>
           </a:p>
           <a:p>
-            <a:pPr algn="l">
+            <a:pPr algn="just">
               <a:lnSpc>
                 <a:spcPct val="125000"/>
               </a:lnSpc>
@@ -12068,7 +12068,7 @@
             </a:r>
           </a:p>
           <a:p>
-            <a:pPr algn="l">
+            <a:pPr algn="just">
               <a:lnSpc>
                 <a:spcPct val="125000"/>
               </a:lnSpc>
@@ -12148,7 +12148,7 @@
           <a:bodyPr rtlCol="0" anchor="ctr" wrap="square" lIns="365760"/>
           <a:lstStyle/>
           <a:p>
-            <a:pPr algn="l"/>
+            <a:pPr algn="just"/>
             <a:r>
               <a:rPr sz="1500" b="1">
                 <a:solidFill>
@@ -12182,7 +12182,7 @@
           </a:bodyPr>
           <a:lstStyle/>
           <a:p>
-            <a:pPr algn="l">
+            <a:pPr algn="just">
               <a:lnSpc>
                 <a:spcPct val="125000"/>
               </a:lnSpc>
@@ -12204,7 +12204,7 @@
             </a:r>
           </a:p>
           <a:p>
-            <a:pPr algn="l">
+            <a:pPr algn="just">
               <a:lnSpc>
                 <a:spcPct val="125000"/>
               </a:lnSpc>
@@ -12226,7 +12226,7 @@
             </a:r>
           </a:p>
           <a:p>
-            <a:pPr algn="l">
+            <a:pPr algn="just">
               <a:lnSpc>
                 <a:spcPct val="125000"/>
               </a:lnSpc>
@@ -12248,7 +12248,7 @@
             </a:r>
           </a:p>
           <a:p>
-            <a:pPr algn="l">
+            <a:pPr algn="just">
               <a:lnSpc>
                 <a:spcPct val="125000"/>
               </a:lnSpc>
@@ -12270,7 +12270,7 @@
             </a:r>
           </a:p>
           <a:p>
-            <a:pPr algn="l">
+            <a:pPr algn="just">
               <a:lnSpc>
                 <a:spcPct val="125000"/>
               </a:lnSpc>
@@ -12292,7 +12292,7 @@
             </a:r>
           </a:p>
           <a:p>
-            <a:pPr algn="l">
+            <a:pPr algn="just">
               <a:lnSpc>
                 <a:spcPct val="125000"/>
               </a:lnSpc>
@@ -12314,7 +12314,7 @@
             </a:r>
           </a:p>
           <a:p>
-            <a:pPr algn="l">
+            <a:pPr algn="just">
               <a:lnSpc>
                 <a:spcPct val="125000"/>
               </a:lnSpc>
@@ -12336,7 +12336,7 @@
             </a:r>
           </a:p>
           <a:p>
-            <a:pPr algn="l">
+            <a:pPr algn="just">
               <a:lnSpc>
                 <a:spcPct val="125000"/>
               </a:lnSpc>
@@ -12358,7 +12358,7 @@
             </a:r>
           </a:p>
           <a:p>
-            <a:pPr algn="l">
+            <a:pPr algn="just">
               <a:lnSpc>
                 <a:spcPct val="125000"/>
               </a:lnSpc>
@@ -12380,7 +12380,7 @@
             </a:r>
           </a:p>
           <a:p>
-            <a:pPr algn="l">
+            <a:pPr algn="just">
               <a:lnSpc>
                 <a:spcPct val="125000"/>
               </a:lnSpc>
@@ -12402,7 +12402,7 @@
             </a:r>
           </a:p>
           <a:p>
-            <a:pPr algn="l">
+            <a:pPr algn="just">
               <a:lnSpc>
                 <a:spcPct val="125000"/>
               </a:lnSpc>
@@ -12424,7 +12424,7 @@
             </a:r>
           </a:p>
           <a:p>
-            <a:pPr algn="l">
+            <a:pPr algn="just">
               <a:lnSpc>
                 <a:spcPct val="125000"/>
               </a:lnSpc>
@@ -12446,7 +12446,7 @@
             </a:r>
           </a:p>
           <a:p>
-            <a:pPr algn="l">
+            <a:pPr algn="just">
               <a:lnSpc>
                 <a:spcPct val="125000"/>
               </a:lnSpc>
@@ -12468,7 +12468,7 @@
             </a:r>
           </a:p>
           <a:p>
-            <a:pPr algn="l">
+            <a:pPr algn="just">
               <a:lnSpc>
                 <a:spcPct val="125000"/>
               </a:lnSpc>
@@ -12490,7 +12490,7 @@
             </a:r>
           </a:p>
           <a:p>
-            <a:pPr algn="l">
+            <a:pPr algn="just">
               <a:lnSpc>
                 <a:spcPct val="125000"/>
               </a:lnSpc>
@@ -12570,7 +12570,7 @@
           <a:bodyPr rtlCol="0" anchor="ctr" wrap="square" lIns="365760"/>
           <a:lstStyle/>
           <a:p>
-            <a:pPr algn="l"/>
+            <a:pPr algn="just"/>
             <a:r>
               <a:rPr sz="1500" b="1">
                 <a:solidFill>
@@ -12604,7 +12604,7 @@
           </a:bodyPr>
           <a:lstStyle/>
           <a:p>
-            <a:pPr algn="l">
+            <a:pPr algn="just">
               <a:lnSpc>
                 <a:spcPct val="125000"/>
               </a:lnSpc>
@@ -12626,7 +12626,7 @@
             </a:r>
           </a:p>
           <a:p>
-            <a:pPr algn="l">
+            <a:pPr algn="just">
               <a:lnSpc>
                 <a:spcPct val="125000"/>
               </a:lnSpc>
@@ -12648,7 +12648,7 @@
             </a:r>
           </a:p>
           <a:p>
-            <a:pPr algn="l">
+            <a:pPr algn="just">
               <a:lnSpc>
                 <a:spcPct val="125000"/>
               </a:lnSpc>
@@ -12670,7 +12670,7 @@
             </a:r>
           </a:p>
           <a:p>
-            <a:pPr algn="l">
+            <a:pPr algn="just">
               <a:lnSpc>
                 <a:spcPct val="125000"/>
               </a:lnSpc>
@@ -12692,7 +12692,7 @@
             </a:r>
           </a:p>
           <a:p>
-            <a:pPr algn="l">
+            <a:pPr algn="just">
               <a:lnSpc>
                 <a:spcPct val="125000"/>
               </a:lnSpc>
@@ -12714,7 +12714,7 @@
             </a:r>
           </a:p>
           <a:p>
-            <a:pPr algn="l">
+            <a:pPr algn="just">
               <a:lnSpc>
                 <a:spcPct val="125000"/>
               </a:lnSpc>
@@ -12736,7 +12736,7 @@
             </a:r>
           </a:p>
           <a:p>
-            <a:pPr algn="l">
+            <a:pPr algn="just">
               <a:lnSpc>
                 <a:spcPct val="125000"/>
               </a:lnSpc>
@@ -12758,7 +12758,7 @@
             </a:r>
           </a:p>
           <a:p>
-            <a:pPr algn="l">
+            <a:pPr algn="just">
               <a:lnSpc>
                 <a:spcPct val="125000"/>
               </a:lnSpc>
@@ -12780,7 +12780,7 @@
             </a:r>
           </a:p>
           <a:p>
-            <a:pPr algn="l">
+            <a:pPr algn="just">
               <a:lnSpc>
                 <a:spcPct val="125000"/>
               </a:lnSpc>
@@ -12860,7 +12860,7 @@
           <a:bodyPr rtlCol="0" anchor="ctr" wrap="square" lIns="365760"/>
           <a:lstStyle/>
           <a:p>
-            <a:pPr algn="l"/>
+            <a:pPr algn="just"/>
             <a:r>
               <a:rPr sz="1500" b="1">
                 <a:solidFill>
@@ -12894,7 +12894,7 @@
           </a:bodyPr>
           <a:lstStyle/>
           <a:p>
-            <a:pPr algn="l">
+            <a:pPr algn="just">
               <a:lnSpc>
                 <a:spcPct val="125000"/>
               </a:lnSpc>
@@ -12916,7 +12916,7 @@
             </a:r>
           </a:p>
           <a:p>
-            <a:pPr algn="l">
+            <a:pPr algn="just">
               <a:lnSpc>
                 <a:spcPct val="125000"/>
               </a:lnSpc>
@@ -12938,7 +12938,7 @@
             </a:r>
           </a:p>
           <a:p>
-            <a:pPr algn="l">
+            <a:pPr algn="just">
               <a:lnSpc>
                 <a:spcPct val="125000"/>
               </a:lnSpc>
@@ -12960,7 +12960,7 @@
             </a:r>
           </a:p>
           <a:p>
-            <a:pPr algn="l">
+            <a:pPr algn="just">
               <a:lnSpc>
                 <a:spcPct val="125000"/>
               </a:lnSpc>
@@ -12982,7 +12982,7 @@
             </a:r>
           </a:p>
           <a:p>
-            <a:pPr algn="l">
+            <a:pPr algn="just">
               <a:lnSpc>
                 <a:spcPct val="125000"/>
               </a:lnSpc>
@@ -13004,7 +13004,7 @@
             </a:r>
           </a:p>
           <a:p>
-            <a:pPr algn="l">
+            <a:pPr algn="just">
               <a:lnSpc>
                 <a:spcPct val="125000"/>
               </a:lnSpc>
@@ -13026,7 +13026,7 @@
             </a:r>
           </a:p>
           <a:p>
-            <a:pPr algn="l">
+            <a:pPr algn="just">
               <a:lnSpc>
                 <a:spcPct val="125000"/>
               </a:lnSpc>
@@ -13048,7 +13048,7 @@
             </a:r>
           </a:p>
           <a:p>
-            <a:pPr algn="l">
+            <a:pPr algn="just">
               <a:lnSpc>
                 <a:spcPct val="125000"/>
               </a:lnSpc>
@@ -13070,7 +13070,7 @@
             </a:r>
           </a:p>
           <a:p>
-            <a:pPr algn="l">
+            <a:pPr algn="just">
               <a:lnSpc>
                 <a:spcPct val="125000"/>
               </a:lnSpc>
@@ -13092,7 +13092,7 @@
             </a:r>
           </a:p>
           <a:p>
-            <a:pPr algn="l">
+            <a:pPr algn="just">
               <a:lnSpc>
                 <a:spcPct val="125000"/>
               </a:lnSpc>
@@ -13114,7 +13114,7 @@
             </a:r>
           </a:p>
           <a:p>
-            <a:pPr algn="l">
+            <a:pPr algn="just">
               <a:lnSpc>
                 <a:spcPct val="125000"/>
               </a:lnSpc>
@@ -13136,7 +13136,7 @@
             </a:r>
           </a:p>
           <a:p>
-            <a:pPr algn="l">
+            <a:pPr algn="just">
               <a:lnSpc>
                 <a:spcPct val="125000"/>
               </a:lnSpc>
@@ -13216,7 +13216,7 @@
           <a:bodyPr rtlCol="0" anchor="ctr" wrap="square" lIns="365760"/>
           <a:lstStyle/>
           <a:p>
-            <a:pPr algn="l"/>
+            <a:pPr algn="just"/>
             <a:r>
               <a:rPr sz="1500" b="1">
                 <a:solidFill>
@@ -13250,7 +13250,7 @@
           </a:bodyPr>
           <a:lstStyle/>
           <a:p>
-            <a:pPr algn="l">
+            <a:pPr algn="just">
               <a:lnSpc>
                 <a:spcPct val="125000"/>
               </a:lnSpc>
@@ -13272,7 +13272,7 @@
             </a:r>
           </a:p>
           <a:p>
-            <a:pPr algn="l">
+            <a:pPr algn="just">
               <a:lnSpc>
                 <a:spcPct val="125000"/>
               </a:lnSpc>
@@ -13294,7 +13294,7 @@
             </a:r>
           </a:p>
           <a:p>
-            <a:pPr algn="l">
+            <a:pPr algn="just">
               <a:lnSpc>
                 <a:spcPct val="125000"/>
               </a:lnSpc>
@@ -13316,7 +13316,7 @@
             </a:r>
           </a:p>
           <a:p>
-            <a:pPr algn="l">
+            <a:pPr algn="just">
               <a:lnSpc>
                 <a:spcPct val="125000"/>
               </a:lnSpc>
@@ -13338,7 +13338,7 @@
             </a:r>
           </a:p>
           <a:p>
-            <a:pPr algn="l">
+            <a:pPr algn="just">
               <a:lnSpc>
                 <a:spcPct val="125000"/>
               </a:lnSpc>
@@ -13360,7 +13360,7 @@
             </a:r>
           </a:p>
           <a:p>
-            <a:pPr algn="l">
+            <a:pPr algn="just">
               <a:lnSpc>
                 <a:spcPct val="125000"/>
               </a:lnSpc>
@@ -13382,7 +13382,7 @@
             </a:r>
           </a:p>
           <a:p>
-            <a:pPr algn="l">
+            <a:pPr algn="just">
               <a:lnSpc>
                 <a:spcPct val="125000"/>
               </a:lnSpc>
@@ -13404,7 +13404,7 @@
             </a:r>
           </a:p>
           <a:p>
-            <a:pPr algn="l">
+            <a:pPr algn="just">
               <a:lnSpc>
                 <a:spcPct val="125000"/>
               </a:lnSpc>
@@ -13426,7 +13426,7 @@
             </a:r>
           </a:p>
           <a:p>
-            <a:pPr algn="l">
+            <a:pPr algn="just">
               <a:lnSpc>
                 <a:spcPct val="125000"/>
               </a:lnSpc>
@@ -13506,7 +13506,7 @@
           <a:bodyPr rtlCol="0" anchor="ctr" wrap="square" lIns="365760"/>
           <a:lstStyle/>
           <a:p>
-            <a:pPr algn="l"/>
+            <a:pPr algn="just"/>
             <a:r>
               <a:rPr sz="1500" b="1">
                 <a:solidFill>
@@ -13540,7 +13540,7 @@
           </a:bodyPr>
           <a:lstStyle/>
           <a:p>
-            <a:pPr algn="l">
+            <a:pPr algn="just">
               <a:lnSpc>
                 <a:spcPct val="125000"/>
               </a:lnSpc>
@@ -13562,7 +13562,7 @@
             </a:r>
           </a:p>
           <a:p>
-            <a:pPr algn="l">
+            <a:pPr algn="just">
               <a:lnSpc>
                 <a:spcPct val="125000"/>
               </a:lnSpc>
@@ -13584,7 +13584,7 @@
             </a:r>
           </a:p>
           <a:p>
-            <a:pPr algn="l">
+            <a:pPr algn="just">
               <a:lnSpc>
                 <a:spcPct val="125000"/>
               </a:lnSpc>
@@ -13606,7 +13606,7 @@
             </a:r>
           </a:p>
           <a:p>
-            <a:pPr algn="l">
+            <a:pPr algn="just">
               <a:lnSpc>
                 <a:spcPct val="125000"/>
               </a:lnSpc>
@@ -13628,7 +13628,7 @@
             </a:r>
           </a:p>
           <a:p>
-            <a:pPr algn="l">
+            <a:pPr algn="just">
               <a:lnSpc>
                 <a:spcPct val="125000"/>
               </a:lnSpc>
@@ -13650,7 +13650,7 @@
             </a:r>
           </a:p>
           <a:p>
-            <a:pPr algn="l">
+            <a:pPr algn="just">
               <a:lnSpc>
                 <a:spcPct val="125000"/>
               </a:lnSpc>
@@ -13672,7 +13672,7 @@
             </a:r>
           </a:p>
           <a:p>
-            <a:pPr algn="l">
+            <a:pPr algn="just">
               <a:lnSpc>
                 <a:spcPct val="125000"/>
               </a:lnSpc>
@@ -13694,7 +13694,7 @@
             </a:r>
           </a:p>
           <a:p>
-            <a:pPr algn="l">
+            <a:pPr algn="just">
               <a:lnSpc>
                 <a:spcPct val="125000"/>
               </a:lnSpc>
@@ -13716,7 +13716,7 @@
             </a:r>
           </a:p>
           <a:p>
-            <a:pPr algn="l">
+            <a:pPr algn="just">
               <a:lnSpc>
                 <a:spcPct val="125000"/>
               </a:lnSpc>
@@ -13738,7 +13738,7 @@
             </a:r>
           </a:p>
           <a:p>
-            <a:pPr algn="l">
+            <a:pPr algn="just">
               <a:lnSpc>
                 <a:spcPct val="125000"/>
               </a:lnSpc>
@@ -13818,7 +13818,7 @@
           <a:bodyPr rtlCol="0" anchor="ctr" wrap="square" lIns="365760"/>
           <a:lstStyle/>
           <a:p>
-            <a:pPr algn="l"/>
+            <a:pPr algn="just"/>
             <a:r>
               <a:rPr sz="1500" b="1">
                 <a:solidFill>
@@ -13852,7 +13852,7 @@
           </a:bodyPr>
           <a:lstStyle/>
           <a:p>
-            <a:pPr algn="l">
+            <a:pPr algn="just">
               <a:lnSpc>
                 <a:spcPct val="125000"/>
               </a:lnSpc>
@@ -13874,7 +13874,7 @@
             </a:r>
           </a:p>
           <a:p>
-            <a:pPr algn="l">
+            <a:pPr algn="just">
               <a:lnSpc>
                 <a:spcPct val="125000"/>
               </a:lnSpc>
@@ -13896,7 +13896,7 @@
             </a:r>
           </a:p>
           <a:p>
-            <a:pPr algn="l">
+            <a:pPr algn="just">
               <a:lnSpc>
                 <a:spcPct val="125000"/>
               </a:lnSpc>
@@ -13918,7 +13918,7 @@
             </a:r>
           </a:p>
           <a:p>
-            <a:pPr algn="l">
+            <a:pPr algn="just">
               <a:lnSpc>
                 <a:spcPct val="125000"/>
               </a:lnSpc>
@@ -13940,7 +13940,7 @@
             </a:r>
           </a:p>
           <a:p>
-            <a:pPr algn="l">
+            <a:pPr algn="just">
               <a:lnSpc>
                 <a:spcPct val="125000"/>
               </a:lnSpc>
@@ -13962,7 +13962,7 @@
             </a:r>
           </a:p>
           <a:p>
-            <a:pPr algn="l">
+            <a:pPr algn="just">
               <a:lnSpc>
                 <a:spcPct val="125000"/>
               </a:lnSpc>
@@ -13984,7 +13984,7 @@
             </a:r>
           </a:p>
           <a:p>
-            <a:pPr algn="l">
+            <a:pPr algn="just">
               <a:lnSpc>
                 <a:spcPct val="125000"/>
               </a:lnSpc>
@@ -14006,7 +14006,7 @@
             </a:r>
           </a:p>
           <a:p>
-            <a:pPr algn="l">
+            <a:pPr algn="just">
               <a:lnSpc>
                 <a:spcPct val="125000"/>
               </a:lnSpc>
@@ -14028,7 +14028,7 @@
             </a:r>
           </a:p>
           <a:p>
-            <a:pPr algn="l">
+            <a:pPr algn="just">
               <a:lnSpc>
                 <a:spcPct val="125000"/>
               </a:lnSpc>
@@ -14108,7 +14108,7 @@
           <a:bodyPr rtlCol="0" anchor="ctr" wrap="square" lIns="365760"/>
           <a:lstStyle/>
           <a:p>
-            <a:pPr algn="l"/>
+            <a:pPr algn="just"/>
             <a:r>
               <a:rPr sz="1500" b="1">
                 <a:solidFill>
@@ -14142,7 +14142,7 @@
           </a:bodyPr>
           <a:lstStyle/>
           <a:p>
-            <a:pPr algn="l">
+            <a:pPr algn="just">
               <a:lnSpc>
                 <a:spcPct val="125000"/>
               </a:lnSpc>
@@ -14164,7 +14164,7 @@
             </a:r>
           </a:p>
           <a:p>
-            <a:pPr algn="l">
+            <a:pPr algn="just">
               <a:lnSpc>
                 <a:spcPct val="125000"/>
               </a:lnSpc>
@@ -14186,7 +14186,7 @@
             </a:r>
           </a:p>
           <a:p>
-            <a:pPr algn="l">
+            <a:pPr algn="just">
               <a:lnSpc>
                 <a:spcPct val="125000"/>
               </a:lnSpc>
@@ -14208,7 +14208,7 @@
             </a:r>
           </a:p>
           <a:p>
-            <a:pPr algn="l">
+            <a:pPr algn="just">
               <a:lnSpc>
                 <a:spcPct val="125000"/>
               </a:lnSpc>
@@ -14230,7 +14230,7 @@
             </a:r>
           </a:p>
           <a:p>
-            <a:pPr algn="l">
+            <a:pPr algn="just">
               <a:lnSpc>
                 <a:spcPct val="125000"/>
               </a:lnSpc>
@@ -14252,7 +14252,7 @@
             </a:r>
           </a:p>
           <a:p>
-            <a:pPr algn="l">
+            <a:pPr algn="just">
               <a:lnSpc>
                 <a:spcPct val="125000"/>
               </a:lnSpc>
@@ -14274,7 +14274,7 @@
             </a:r>
           </a:p>
           <a:p>
-            <a:pPr algn="l">
+            <a:pPr algn="just">
               <a:lnSpc>
                 <a:spcPct val="125000"/>
               </a:lnSpc>
@@ -14296,7 +14296,7 @@
             </a:r>
           </a:p>
           <a:p>
-            <a:pPr algn="l">
+            <a:pPr algn="just">
               <a:lnSpc>
                 <a:spcPct val="125000"/>
               </a:lnSpc>
@@ -14318,7 +14318,7 @@
             </a:r>
           </a:p>
           <a:p>
-            <a:pPr algn="l">
+            <a:pPr algn="just">
               <a:lnSpc>
                 <a:spcPct val="125000"/>
               </a:lnSpc>
@@ -14340,7 +14340,7 @@
             </a:r>
           </a:p>
           <a:p>
-            <a:pPr algn="l">
+            <a:pPr algn="just">
               <a:lnSpc>
                 <a:spcPct val="125000"/>
               </a:lnSpc>
@@ -14420,7 +14420,7 @@
           <a:bodyPr rtlCol="0" anchor="ctr" wrap="square" lIns="365760"/>
           <a:lstStyle/>
           <a:p>
-            <a:pPr algn="l"/>
+            <a:pPr algn="just"/>
             <a:r>
               <a:rPr sz="1500" b="1">
                 <a:solidFill>
@@ -14454,7 +14454,7 @@
           </a:bodyPr>
           <a:lstStyle/>
           <a:p>
-            <a:pPr algn="l">
+            <a:pPr algn="just">
               <a:lnSpc>
                 <a:spcPct val="125000"/>
               </a:lnSpc>
@@ -14476,7 +14476,7 @@
             </a:r>
           </a:p>
           <a:p>
-            <a:pPr algn="l">
+            <a:pPr algn="just">
               <a:lnSpc>
                 <a:spcPct val="125000"/>
               </a:lnSpc>
@@ -14498,7 +14498,7 @@
             </a:r>
           </a:p>
           <a:p>
-            <a:pPr algn="l">
+            <a:pPr algn="just">
               <a:lnSpc>
                 <a:spcPct val="125000"/>
               </a:lnSpc>
@@ -14520,7 +14520,7 @@
             </a:r>
           </a:p>
           <a:p>
-            <a:pPr algn="l">
+            <a:pPr algn="just">
               <a:lnSpc>
                 <a:spcPct val="125000"/>
               </a:lnSpc>
@@ -14542,7 +14542,7 @@
             </a:r>
           </a:p>
           <a:p>
-            <a:pPr algn="l">
+            <a:pPr algn="just">
               <a:lnSpc>
                 <a:spcPct val="125000"/>
               </a:lnSpc>
@@ -14564,7 +14564,7 @@
             </a:r>
           </a:p>
           <a:p>
-            <a:pPr algn="l">
+            <a:pPr algn="just">
               <a:lnSpc>
                 <a:spcPct val="125000"/>
               </a:lnSpc>
@@ -14586,7 +14586,7 @@
             </a:r>
           </a:p>
           <a:p>
-            <a:pPr algn="l">
+            <a:pPr algn="just">
               <a:lnSpc>
                 <a:spcPct val="125000"/>
               </a:lnSpc>
@@ -14608,7 +14608,7 @@
             </a:r>
           </a:p>
           <a:p>
-            <a:pPr algn="l">
+            <a:pPr algn="just">
               <a:lnSpc>
                 <a:spcPct val="125000"/>
               </a:lnSpc>
@@ -14630,7 +14630,7 @@
             </a:r>
           </a:p>
           <a:p>
-            <a:pPr algn="l">
+            <a:pPr algn="just">
               <a:lnSpc>
                 <a:spcPct val="125000"/>
               </a:lnSpc>
@@ -14652,7 +14652,7 @@
             </a:r>
           </a:p>
           <a:p>
-            <a:pPr algn="l">
+            <a:pPr algn="just">
               <a:lnSpc>
                 <a:spcPct val="125000"/>
               </a:lnSpc>
@@ -14674,7 +14674,7 @@
             </a:r>
           </a:p>
           <a:p>
-            <a:pPr algn="l">
+            <a:pPr algn="just">
               <a:lnSpc>
                 <a:spcPct val="125000"/>
               </a:lnSpc>
@@ -14754,7 +14754,7 @@
           <a:bodyPr rtlCol="0" anchor="ctr" wrap="square" lIns="365760"/>
           <a:lstStyle/>
           <a:p>
-            <a:pPr algn="l"/>
+            <a:pPr algn="just"/>
             <a:r>
               <a:rPr sz="1500" b="1">
                 <a:solidFill>
@@ -14788,7 +14788,7 @@
           </a:bodyPr>
           <a:lstStyle/>
           <a:p>
-            <a:pPr algn="l">
+            <a:pPr algn="just">
               <a:lnSpc>
                 <a:spcPct val="125000"/>
               </a:lnSpc>
@@ -14810,7 +14810,7 @@
             </a:r>
           </a:p>
           <a:p>
-            <a:pPr algn="l">
+            <a:pPr algn="just">
               <a:lnSpc>
                 <a:spcPct val="125000"/>
               </a:lnSpc>
@@ -14832,7 +14832,7 @@
             </a:r>
           </a:p>
           <a:p>
-            <a:pPr algn="l">
+            <a:pPr algn="just">
               <a:lnSpc>
                 <a:spcPct val="125000"/>
               </a:lnSpc>
@@ -14854,7 +14854,7 @@
             </a:r>
           </a:p>
           <a:p>
-            <a:pPr algn="l">
+            <a:pPr algn="just">
               <a:lnSpc>
                 <a:spcPct val="125000"/>
               </a:lnSpc>
@@ -14876,7 +14876,7 @@
             </a:r>
           </a:p>
           <a:p>
-            <a:pPr algn="l">
+            <a:pPr algn="just">
               <a:lnSpc>
                 <a:spcPct val="125000"/>
               </a:lnSpc>
@@ -14898,7 +14898,7 @@
             </a:r>
           </a:p>
           <a:p>
-            <a:pPr algn="l">
+            <a:pPr algn="just">
               <a:lnSpc>
                 <a:spcPct val="125000"/>
               </a:lnSpc>
@@ -14920,7 +14920,7 @@
             </a:r>
           </a:p>
           <a:p>
-            <a:pPr algn="l">
+            <a:pPr algn="just">
               <a:lnSpc>
                 <a:spcPct val="125000"/>
               </a:lnSpc>
@@ -14942,7 +14942,7 @@
             </a:r>
           </a:p>
           <a:p>
-            <a:pPr algn="l">
+            <a:pPr algn="just">
               <a:lnSpc>
                 <a:spcPct val="125000"/>
               </a:lnSpc>
@@ -14964,7 +14964,7 @@
             </a:r>
           </a:p>
           <a:p>
-            <a:pPr algn="l">
+            <a:pPr algn="just">
               <a:lnSpc>
                 <a:spcPct val="125000"/>
               </a:lnSpc>
@@ -14986,7 +14986,7 @@
             </a:r>
           </a:p>
           <a:p>
-            <a:pPr algn="l">
+            <a:pPr algn="just">
               <a:lnSpc>
                 <a:spcPct val="125000"/>
               </a:lnSpc>
@@ -15008,7 +15008,7 @@
             </a:r>
           </a:p>
           <a:p>
-            <a:pPr algn="l">
+            <a:pPr algn="just">
               <a:lnSpc>
                 <a:spcPct val="125000"/>
               </a:lnSpc>
@@ -15030,7 +15030,7 @@
             </a:r>
           </a:p>
           <a:p>
-            <a:pPr algn="l">
+            <a:pPr algn="just">
               <a:lnSpc>
                 <a:spcPct val="125000"/>
               </a:lnSpc>
@@ -15110,7 +15110,7 @@
           <a:bodyPr rtlCol="0" anchor="ctr" wrap="square" lIns="365760"/>
           <a:lstStyle/>
           <a:p>
-            <a:pPr algn="l"/>
+            <a:pPr algn="just"/>
             <a:r>
               <a:rPr sz="1500" b="1">
                 <a:solidFill>
@@ -15144,7 +15144,7 @@
           </a:bodyPr>
           <a:lstStyle/>
           <a:p>
-            <a:pPr algn="l">
+            <a:pPr algn="just">
               <a:lnSpc>
                 <a:spcPct val="125000"/>
               </a:lnSpc>
@@ -15166,7 +15166,7 @@
             </a:r>
           </a:p>
           <a:p>
-            <a:pPr algn="l">
+            <a:pPr algn="just">
               <a:lnSpc>
                 <a:spcPct val="125000"/>
               </a:lnSpc>
@@ -15188,7 +15188,7 @@
             </a:r>
           </a:p>
           <a:p>
-            <a:pPr algn="l">
+            <a:pPr algn="just">
               <a:lnSpc>
                 <a:spcPct val="125000"/>
               </a:lnSpc>
@@ -15210,7 +15210,7 @@
             </a:r>
           </a:p>
           <a:p>
-            <a:pPr algn="l">
+            <a:pPr algn="just">
               <a:lnSpc>
                 <a:spcPct val="125000"/>
               </a:lnSpc>
@@ -15232,7 +15232,7 @@
             </a:r>
           </a:p>
           <a:p>
-            <a:pPr algn="l">
+            <a:pPr algn="just">
               <a:lnSpc>
                 <a:spcPct val="125000"/>
               </a:lnSpc>
@@ -15254,7 +15254,7 @@
             </a:r>
           </a:p>
           <a:p>
-            <a:pPr algn="l">
+            <a:pPr algn="just">
               <a:lnSpc>
                 <a:spcPct val="125000"/>
               </a:lnSpc>
@@ -15276,7 +15276,7 @@
             </a:r>
           </a:p>
           <a:p>
-            <a:pPr algn="l">
+            <a:pPr algn="just">
               <a:lnSpc>
                 <a:spcPct val="125000"/>
               </a:lnSpc>
@@ -15298,7 +15298,7 @@
             </a:r>
           </a:p>
           <a:p>
-            <a:pPr algn="l">
+            <a:pPr algn="just">
               <a:lnSpc>
                 <a:spcPct val="125000"/>
               </a:lnSpc>
@@ -15320,7 +15320,7 @@
             </a:r>
           </a:p>
           <a:p>
-            <a:pPr algn="l">
+            <a:pPr algn="just">
               <a:lnSpc>
                 <a:spcPct val="125000"/>
               </a:lnSpc>
@@ -15342,7 +15342,7 @@
             </a:r>
           </a:p>
           <a:p>
-            <a:pPr algn="l">
+            <a:pPr algn="just">
               <a:lnSpc>
                 <a:spcPct val="125000"/>
               </a:lnSpc>
@@ -15364,7 +15364,7 @@
             </a:r>
           </a:p>
           <a:p>
-            <a:pPr algn="l">
+            <a:pPr algn="just">
               <a:lnSpc>
                 <a:spcPct val="125000"/>
               </a:lnSpc>
@@ -15386,7 +15386,7 @@
             </a:r>
           </a:p>
           <a:p>
-            <a:pPr algn="l">
+            <a:pPr algn="just">
               <a:lnSpc>
                 <a:spcPct val="125000"/>
               </a:lnSpc>
@@ -15466,7 +15466,7 @@
           <a:bodyPr rtlCol="0" anchor="ctr" wrap="square" lIns="365760"/>
           <a:lstStyle/>
           <a:p>
-            <a:pPr algn="l"/>
+            <a:pPr algn="just"/>
             <a:r>
               <a:rPr sz="1500" b="1">
                 <a:solidFill>
@@ -15500,7 +15500,7 @@
           </a:bodyPr>
           <a:lstStyle/>
           <a:p>
-            <a:pPr algn="l">
+            <a:pPr algn="just">
               <a:lnSpc>
                 <a:spcPct val="125000"/>
               </a:lnSpc>
@@ -15522,7 +15522,7 @@
             </a:r>
           </a:p>
           <a:p>
-            <a:pPr algn="l">
+            <a:pPr algn="just">
               <a:lnSpc>
                 <a:spcPct val="125000"/>
               </a:lnSpc>
@@ -15544,7 +15544,7 @@
             </a:r>
           </a:p>
           <a:p>
-            <a:pPr algn="l">
+            <a:pPr algn="just">
               <a:lnSpc>
                 <a:spcPct val="125000"/>
               </a:lnSpc>
@@ -15566,7 +15566,7 @@
             </a:r>
           </a:p>
           <a:p>
-            <a:pPr algn="l">
+            <a:pPr algn="just">
               <a:lnSpc>
                 <a:spcPct val="125000"/>
               </a:lnSpc>
@@ -15588,7 +15588,7 @@
             </a:r>
           </a:p>
           <a:p>
-            <a:pPr algn="l">
+            <a:pPr algn="just">
               <a:lnSpc>
                 <a:spcPct val="125000"/>
               </a:lnSpc>
@@ -15610,7 +15610,7 @@
             </a:r>
           </a:p>
           <a:p>
-            <a:pPr algn="l">
+            <a:pPr algn="just">
               <a:lnSpc>
                 <a:spcPct val="125000"/>
               </a:lnSpc>
@@ -15632,7 +15632,7 @@
             </a:r>
           </a:p>
           <a:p>
-            <a:pPr algn="l">
+            <a:pPr algn="just">
               <a:lnSpc>
                 <a:spcPct val="125000"/>
               </a:lnSpc>
@@ -15654,7 +15654,7 @@
             </a:r>
           </a:p>
           <a:p>
-            <a:pPr algn="l">
+            <a:pPr algn="just">
               <a:lnSpc>
                 <a:spcPct val="125000"/>
               </a:lnSpc>
@@ -15676,7 +15676,7 @@
             </a:r>
           </a:p>
           <a:p>
-            <a:pPr algn="l">
+            <a:pPr algn="just">
               <a:lnSpc>
                 <a:spcPct val="125000"/>
               </a:lnSpc>
@@ -15756,7 +15756,7 @@
           <a:bodyPr rtlCol="0" anchor="ctr" wrap="square" lIns="365760"/>
           <a:lstStyle/>
           <a:p>
-            <a:pPr algn="l"/>
+            <a:pPr algn="just"/>
             <a:r>
               <a:rPr sz="1500" b="1">
                 <a:solidFill>
@@ -15790,7 +15790,7 @@
           </a:bodyPr>
           <a:lstStyle/>
           <a:p>
-            <a:pPr algn="l">
+            <a:pPr algn="just">
               <a:lnSpc>
                 <a:spcPct val="125000"/>
               </a:lnSpc>
@@ -15812,7 +15812,7 @@
             </a:r>
           </a:p>
           <a:p>
-            <a:pPr algn="l">
+            <a:pPr algn="just">
               <a:lnSpc>
                 <a:spcPct val="125000"/>
               </a:lnSpc>
@@ -15834,7 +15834,7 @@
             </a:r>
           </a:p>
           <a:p>
-            <a:pPr algn="l">
+            <a:pPr algn="just">
               <a:lnSpc>
                 <a:spcPct val="125000"/>
               </a:lnSpc>
@@ -15856,7 +15856,7 @@
             </a:r>
           </a:p>
           <a:p>
-            <a:pPr algn="l">
+            <a:pPr algn="just">
               <a:lnSpc>
                 <a:spcPct val="125000"/>
               </a:lnSpc>
@@ -15878,7 +15878,7 @@
             </a:r>
           </a:p>
           <a:p>
-            <a:pPr algn="l">
+            <a:pPr algn="just">
               <a:lnSpc>
                 <a:spcPct val="125000"/>
               </a:lnSpc>
@@ -15900,7 +15900,7 @@
             </a:r>
           </a:p>
           <a:p>
-            <a:pPr algn="l">
+            <a:pPr algn="just">
               <a:lnSpc>
                 <a:spcPct val="125000"/>
               </a:lnSpc>
@@ -15922,7 +15922,7 @@
             </a:r>
           </a:p>
           <a:p>
-            <a:pPr algn="l">
+            <a:pPr algn="just">
               <a:lnSpc>
                 <a:spcPct val="125000"/>
               </a:lnSpc>
@@ -15944,7 +15944,7 @@
             </a:r>
           </a:p>
           <a:p>
-            <a:pPr algn="l">
+            <a:pPr algn="just">
               <a:lnSpc>
                 <a:spcPct val="125000"/>
               </a:lnSpc>
@@ -15966,7 +15966,7 @@
             </a:r>
           </a:p>
           <a:p>
-            <a:pPr algn="l">
+            <a:pPr algn="just">
               <a:lnSpc>
                 <a:spcPct val="125000"/>
               </a:lnSpc>
@@ -16046,7 +16046,7 @@
           <a:bodyPr rtlCol="0" anchor="ctr" wrap="square" lIns="365760"/>
           <a:lstStyle/>
           <a:p>
-            <a:pPr algn="l"/>
+            <a:pPr algn="just"/>
             <a:r>
               <a:rPr sz="1500" b="1">
                 <a:solidFill>
@@ -16080,7 +16080,7 @@
           </a:bodyPr>
           <a:lstStyle/>
           <a:p>
-            <a:pPr algn="l">
+            <a:pPr algn="just">
               <a:lnSpc>
                 <a:spcPct val="125000"/>
               </a:lnSpc>
@@ -16102,7 +16102,7 @@
             </a:r>
           </a:p>
           <a:p>
-            <a:pPr algn="l">
+            <a:pPr algn="just">
               <a:lnSpc>
                 <a:spcPct val="125000"/>
               </a:lnSpc>
@@ -16124,7 +16124,7 @@
             </a:r>
           </a:p>
           <a:p>
-            <a:pPr algn="l">
+            <a:pPr algn="just">
               <a:lnSpc>
                 <a:spcPct val="125000"/>
               </a:lnSpc>
@@ -16146,7 +16146,7 @@
             </a:r>
           </a:p>
           <a:p>
-            <a:pPr algn="l">
+            <a:pPr algn="just">
               <a:lnSpc>
                 <a:spcPct val="125000"/>
               </a:lnSpc>
@@ -16168,7 +16168,7 @@
             </a:r>
           </a:p>
           <a:p>
-            <a:pPr algn="l">
+            <a:pPr algn="just">
               <a:lnSpc>
                 <a:spcPct val="125000"/>
               </a:lnSpc>
@@ -16190,7 +16190,7 @@
             </a:r>
           </a:p>
           <a:p>
-            <a:pPr algn="l">
+            <a:pPr algn="just">
               <a:lnSpc>
                 <a:spcPct val="125000"/>
               </a:lnSpc>
@@ -16212,7 +16212,7 @@
             </a:r>
           </a:p>
           <a:p>
-            <a:pPr algn="l">
+            <a:pPr algn="just">
               <a:lnSpc>
                 <a:spcPct val="125000"/>
               </a:lnSpc>
@@ -16234,7 +16234,7 @@
             </a:r>
           </a:p>
           <a:p>
-            <a:pPr algn="l">
+            <a:pPr algn="just">
               <a:lnSpc>
                 <a:spcPct val="125000"/>
               </a:lnSpc>
@@ -16256,7 +16256,7 @@
             </a:r>
           </a:p>
           <a:p>
-            <a:pPr algn="l">
+            <a:pPr algn="just">
               <a:lnSpc>
                 <a:spcPct val="125000"/>
               </a:lnSpc>
@@ -16278,7 +16278,7 @@
             </a:r>
           </a:p>
           <a:p>
-            <a:pPr algn="l">
+            <a:pPr algn="just">
               <a:lnSpc>
                 <a:spcPct val="125000"/>
               </a:lnSpc>
@@ -16300,7 +16300,7 @@
             </a:r>
           </a:p>
           <a:p>
-            <a:pPr algn="l">
+            <a:pPr algn="just">
               <a:lnSpc>
                 <a:spcPct val="125000"/>
               </a:lnSpc>
@@ -16322,7 +16322,7 @@
             </a:r>
           </a:p>
           <a:p>
-            <a:pPr algn="l">
+            <a:pPr algn="just">
               <a:lnSpc>
                 <a:spcPct val="125000"/>
               </a:lnSpc>
@@ -16402,7 +16402,7 @@
           <a:bodyPr rtlCol="0" anchor="ctr" wrap="square" lIns="365760"/>
           <a:lstStyle/>
           <a:p>
-            <a:pPr algn="l"/>
+            <a:pPr algn="just"/>
             <a:r>
               <a:rPr sz="1500" b="1">
                 <a:solidFill>
@@ -16436,7 +16436,7 @@
           </a:bodyPr>
           <a:lstStyle/>
           <a:p>
-            <a:pPr algn="l">
+            <a:pPr algn="just">
               <a:lnSpc>
                 <a:spcPct val="125000"/>
               </a:lnSpc>
@@ -16458,7 +16458,7 @@
             </a:r>
           </a:p>
           <a:p>
-            <a:pPr algn="l">
+            <a:pPr algn="just">
               <a:lnSpc>
                 <a:spcPct val="125000"/>
               </a:lnSpc>
@@ -16480,7 +16480,7 @@
             </a:r>
           </a:p>
           <a:p>
-            <a:pPr algn="l">
+            <a:pPr algn="just">
               <a:lnSpc>
                 <a:spcPct val="125000"/>
               </a:lnSpc>
@@ -16502,7 +16502,7 @@
             </a:r>
           </a:p>
           <a:p>
-            <a:pPr algn="l">
+            <a:pPr algn="just">
               <a:lnSpc>
                 <a:spcPct val="125000"/>
               </a:lnSpc>
@@ -16524,7 +16524,7 @@
             </a:r>
           </a:p>
           <a:p>
-            <a:pPr algn="l">
+            <a:pPr algn="just">
               <a:lnSpc>
                 <a:spcPct val="125000"/>
               </a:lnSpc>
@@ -16546,7 +16546,7 @@
             </a:r>
           </a:p>
           <a:p>
-            <a:pPr algn="l">
+            <a:pPr algn="just">
               <a:lnSpc>
                 <a:spcPct val="125000"/>
               </a:lnSpc>
@@ -16568,7 +16568,7 @@
             </a:r>
           </a:p>
           <a:p>
-            <a:pPr algn="l">
+            <a:pPr algn="just">
               <a:lnSpc>
                 <a:spcPct val="125000"/>
               </a:lnSpc>
@@ -16590,7 +16590,7 @@
             </a:r>
           </a:p>
           <a:p>
-            <a:pPr algn="l">
+            <a:pPr algn="just">
               <a:lnSpc>
                 <a:spcPct val="125000"/>
               </a:lnSpc>
@@ -16612,7 +16612,7 @@
             </a:r>
           </a:p>
           <a:p>
-            <a:pPr algn="l">
+            <a:pPr algn="just">
               <a:lnSpc>
                 <a:spcPct val="125000"/>
               </a:lnSpc>
@@ -16692,7 +16692,7 @@
           <a:bodyPr rtlCol="0" anchor="ctr" wrap="square" lIns="365760"/>
           <a:lstStyle/>
           <a:p>
-            <a:pPr algn="l"/>
+            <a:pPr algn="just"/>
             <a:r>
               <a:rPr sz="1500" b="1">
                 <a:solidFill>
@@ -16726,7 +16726,7 @@
           </a:bodyPr>
           <a:lstStyle/>
           <a:p>
-            <a:pPr algn="l">
+            <a:pPr algn="just">
               <a:lnSpc>
                 <a:spcPct val="125000"/>
               </a:lnSpc>
@@ -16748,7 +16748,7 @@
             </a:r>
           </a:p>
           <a:p>
-            <a:pPr algn="l">
+            <a:pPr algn="just">
               <a:lnSpc>
                 <a:spcPct val="125000"/>
               </a:lnSpc>
@@ -16770,7 +16770,7 @@
             </a:r>
           </a:p>
           <a:p>
-            <a:pPr algn="l">
+            <a:pPr algn="just">
               <a:lnSpc>
                 <a:spcPct val="125000"/>
               </a:lnSpc>
@@ -16792,7 +16792,7 @@
             </a:r>
           </a:p>
           <a:p>
-            <a:pPr algn="l">
+            <a:pPr algn="just">
               <a:lnSpc>
                 <a:spcPct val="125000"/>
               </a:lnSpc>
@@ -16814,7 +16814,7 @@
             </a:r>
           </a:p>
           <a:p>
-            <a:pPr algn="l">
+            <a:pPr algn="just">
               <a:lnSpc>
                 <a:spcPct val="125000"/>
               </a:lnSpc>
@@ -16836,7 +16836,7 @@
             </a:r>
           </a:p>
           <a:p>
-            <a:pPr algn="l">
+            <a:pPr algn="just">
               <a:lnSpc>
                 <a:spcPct val="125000"/>
               </a:lnSpc>
@@ -16858,7 +16858,7 @@
             </a:r>
           </a:p>
           <a:p>
-            <a:pPr algn="l">
+            <a:pPr algn="just">
               <a:lnSpc>
                 <a:spcPct val="125000"/>
               </a:lnSpc>
@@ -16880,7 +16880,7 @@
             </a:r>
           </a:p>
           <a:p>
-            <a:pPr algn="l">
+            <a:pPr algn="just">
               <a:lnSpc>
                 <a:spcPct val="125000"/>
               </a:lnSpc>
@@ -16902,7 +16902,7 @@
             </a:r>
           </a:p>
           <a:p>
-            <a:pPr algn="l">
+            <a:pPr algn="just">
               <a:lnSpc>
                 <a:spcPct val="125000"/>
               </a:lnSpc>
@@ -16982,7 +16982,7 @@
           <a:bodyPr rtlCol="0" anchor="ctr" wrap="square" lIns="365760"/>
           <a:lstStyle/>
           <a:p>
-            <a:pPr algn="l"/>
+            <a:pPr algn="just"/>
             <a:r>
               <a:rPr sz="1500" b="1">
                 <a:solidFill>
@@ -17016,7 +17016,7 @@
           </a:bodyPr>
           <a:lstStyle/>
           <a:p>
-            <a:pPr algn="l">
+            <a:pPr algn="just">
               <a:lnSpc>
                 <a:spcPct val="125000"/>
               </a:lnSpc>
@@ -17038,7 +17038,7 @@
             </a:r>
           </a:p>
           <a:p>
-            <a:pPr algn="l">
+            <a:pPr algn="just">
               <a:lnSpc>
                 <a:spcPct val="125000"/>
               </a:lnSpc>
@@ -17060,7 +17060,7 @@
             </a:r>
           </a:p>
           <a:p>
-            <a:pPr algn="l">
+            <a:pPr algn="just">
               <a:lnSpc>
                 <a:spcPct val="125000"/>
               </a:lnSpc>
@@ -17082,7 +17082,7 @@
             </a:r>
           </a:p>
           <a:p>
-            <a:pPr algn="l">
+            <a:pPr algn="just">
               <a:lnSpc>
                 <a:spcPct val="125000"/>
               </a:lnSpc>
@@ -17104,7 +17104,7 @@
             </a:r>
           </a:p>
           <a:p>
-            <a:pPr algn="l">
+            <a:pPr algn="just">
               <a:lnSpc>
                 <a:spcPct val="125000"/>
               </a:lnSpc>
@@ -17126,7 +17126,7 @@
             </a:r>
           </a:p>
           <a:p>
-            <a:pPr algn="l">
+            <a:pPr algn="just">
               <a:lnSpc>
                 <a:spcPct val="125000"/>
               </a:lnSpc>
@@ -17148,7 +17148,7 @@
             </a:r>
           </a:p>
           <a:p>
-            <a:pPr algn="l">
+            <a:pPr algn="just">
               <a:lnSpc>
                 <a:spcPct val="125000"/>
               </a:lnSpc>
@@ -17170,7 +17170,7 @@
             </a:r>
           </a:p>
           <a:p>
-            <a:pPr algn="l">
+            <a:pPr algn="just">
               <a:lnSpc>
                 <a:spcPct val="125000"/>
               </a:lnSpc>
@@ -17192,7 +17192,7 @@
             </a:r>
           </a:p>
           <a:p>
-            <a:pPr algn="l">
+            <a:pPr algn="just">
               <a:lnSpc>
                 <a:spcPct val="125000"/>
               </a:lnSpc>
@@ -17272,7 +17272,7 @@
           <a:bodyPr rtlCol="0" anchor="ctr" wrap="square" lIns="365760"/>
           <a:lstStyle/>
           <a:p>
-            <a:pPr algn="l"/>
+            <a:pPr algn="just"/>
             <a:r>
               <a:rPr sz="1500" b="1">
                 <a:solidFill>
@@ -17306,7 +17306,7 @@
           </a:bodyPr>
           <a:lstStyle/>
           <a:p>
-            <a:pPr algn="l">
+            <a:pPr algn="just">
               <a:lnSpc>
                 <a:spcPct val="125000"/>
               </a:lnSpc>
@@ -17328,7 +17328,7 @@
             </a:r>
           </a:p>
           <a:p>
-            <a:pPr algn="l">
+            <a:pPr algn="just">
               <a:lnSpc>
                 <a:spcPct val="125000"/>
               </a:lnSpc>
@@ -17350,7 +17350,7 @@
             </a:r>
           </a:p>
           <a:p>
-            <a:pPr algn="l">
+            <a:pPr algn="just">
               <a:lnSpc>
                 <a:spcPct val="125000"/>
               </a:lnSpc>
@@ -17372,7 +17372,7 @@
             </a:r>
           </a:p>
           <a:p>
-            <a:pPr algn="l">
+            <a:pPr algn="just">
               <a:lnSpc>
                 <a:spcPct val="125000"/>
               </a:lnSpc>
@@ -17394,7 +17394,7 @@
             </a:r>
           </a:p>
           <a:p>
-            <a:pPr algn="l">
+            <a:pPr algn="just">
               <a:lnSpc>
                 <a:spcPct val="125000"/>
               </a:lnSpc>
@@ -17416,7 +17416,7 @@
             </a:r>
           </a:p>
           <a:p>
-            <a:pPr algn="l">
+            <a:pPr algn="just">
               <a:lnSpc>
                 <a:spcPct val="125000"/>
               </a:lnSpc>
@@ -17438,7 +17438,7 @@
             </a:r>
           </a:p>
           <a:p>
-            <a:pPr algn="l">
+            <a:pPr algn="just">
               <a:lnSpc>
                 <a:spcPct val="125000"/>
               </a:lnSpc>
@@ -17460,7 +17460,7 @@
             </a:r>
           </a:p>
           <a:p>
-            <a:pPr algn="l">
+            <a:pPr algn="just">
               <a:lnSpc>
                 <a:spcPct val="125000"/>
               </a:lnSpc>
@@ -17482,7 +17482,7 @@
             </a:r>
           </a:p>
           <a:p>
-            <a:pPr algn="l">
+            <a:pPr algn="just">
               <a:lnSpc>
                 <a:spcPct val="125000"/>
               </a:lnSpc>
@@ -17504,7 +17504,7 @@
             </a:r>
           </a:p>
           <a:p>
-            <a:pPr algn="l">
+            <a:pPr algn="just">
               <a:lnSpc>
                 <a:spcPct val="125000"/>
               </a:lnSpc>
@@ -17584,7 +17584,7 @@
           <a:bodyPr rtlCol="0" anchor="ctr" wrap="square" lIns="365760"/>
           <a:lstStyle/>
           <a:p>
-            <a:pPr algn="l"/>
+            <a:pPr algn="just"/>
             <a:r>
               <a:rPr sz="1500" b="1">
                 <a:solidFill>
@@ -17618,7 +17618,7 @@
           </a:bodyPr>
           <a:lstStyle/>
           <a:p>
-            <a:pPr algn="l">
+            <a:pPr algn="just">
               <a:lnSpc>
                 <a:spcPct val="125000"/>
               </a:lnSpc>
@@ -17640,7 +17640,7 @@
             </a:r>
           </a:p>
           <a:p>
-            <a:pPr algn="l">
+            <a:pPr algn="just">
               <a:lnSpc>
                 <a:spcPct val="125000"/>
               </a:lnSpc>
@@ -17662,7 +17662,7 @@
             </a:r>
           </a:p>
           <a:p>
-            <a:pPr algn="l">
+            <a:pPr algn="just">
               <a:lnSpc>
                 <a:spcPct val="125000"/>
               </a:lnSpc>
@@ -17684,7 +17684,7 @@
             </a:r>
           </a:p>
           <a:p>
-            <a:pPr algn="l">
+            <a:pPr algn="just">
               <a:lnSpc>
                 <a:spcPct val="125000"/>
               </a:lnSpc>
@@ -17706,7 +17706,7 @@
             </a:r>
           </a:p>
           <a:p>
-            <a:pPr algn="l">
+            <a:pPr algn="just">
               <a:lnSpc>
                 <a:spcPct val="125000"/>
               </a:lnSpc>
@@ -17728,7 +17728,7 @@
             </a:r>
           </a:p>
           <a:p>
-            <a:pPr algn="l">
+            <a:pPr algn="just">
               <a:lnSpc>
                 <a:spcPct val="125000"/>
               </a:lnSpc>
@@ -17750,7 +17750,7 @@
             </a:r>
           </a:p>
           <a:p>
-            <a:pPr algn="l">
+            <a:pPr algn="just">
               <a:lnSpc>
                 <a:spcPct val="125000"/>
               </a:lnSpc>
@@ -17772,7 +17772,7 @@
             </a:r>
           </a:p>
           <a:p>
-            <a:pPr algn="l">
+            <a:pPr algn="just">
               <a:lnSpc>
                 <a:spcPct val="125000"/>
               </a:lnSpc>
@@ -17794,7 +17794,7 @@
             </a:r>
           </a:p>
           <a:p>
-            <a:pPr algn="l">
+            <a:pPr algn="just">
               <a:lnSpc>
                 <a:spcPct val="125000"/>
               </a:lnSpc>
@@ -17874,7 +17874,7 @@
           <a:bodyPr rtlCol="0" anchor="ctr" wrap="square" lIns="365760"/>
           <a:lstStyle/>
           <a:p>
-            <a:pPr algn="l"/>
+            <a:pPr algn="just"/>
             <a:r>
               <a:rPr sz="1500" b="1">
                 <a:solidFill>
@@ -17908,7 +17908,7 @@
           </a:bodyPr>
           <a:lstStyle/>
           <a:p>
-            <a:pPr algn="l">
+            <a:pPr algn="just">
               <a:lnSpc>
                 <a:spcPct val="125000"/>
               </a:lnSpc>
@@ -17930,7 +17930,7 @@
             </a:r>
           </a:p>
           <a:p>
-            <a:pPr algn="l">
+            <a:pPr algn="just">
               <a:lnSpc>
                 <a:spcPct val="125000"/>
               </a:lnSpc>
@@ -17952,7 +17952,7 @@
             </a:r>
           </a:p>
           <a:p>
-            <a:pPr algn="l">
+            <a:pPr algn="just">
               <a:lnSpc>
                 <a:spcPct val="125000"/>
               </a:lnSpc>
@@ -17974,7 +17974,7 @@
             </a:r>
           </a:p>
           <a:p>
-            <a:pPr algn="l">
+            <a:pPr algn="just">
               <a:lnSpc>
                 <a:spcPct val="125000"/>
               </a:lnSpc>
@@ -17996,7 +17996,7 @@
             </a:r>
           </a:p>
           <a:p>
-            <a:pPr algn="l">
+            <a:pPr algn="just">
               <a:lnSpc>
                 <a:spcPct val="125000"/>
               </a:lnSpc>
@@ -18018,7 +18018,7 @@
             </a:r>
           </a:p>
           <a:p>
-            <a:pPr algn="l">
+            <a:pPr algn="just">
               <a:lnSpc>
                 <a:spcPct val="125000"/>
               </a:lnSpc>
@@ -18040,7 +18040,7 @@
             </a:r>
           </a:p>
           <a:p>
-            <a:pPr algn="l">
+            <a:pPr algn="just">
               <a:lnSpc>
                 <a:spcPct val="125000"/>
               </a:lnSpc>
@@ -18062,7 +18062,7 @@
             </a:r>
           </a:p>
           <a:p>
-            <a:pPr algn="l">
+            <a:pPr algn="just">
               <a:lnSpc>
                 <a:spcPct val="125000"/>
               </a:lnSpc>
@@ -18084,7 +18084,7 @@
             </a:r>
           </a:p>
           <a:p>
-            <a:pPr algn="l">
+            <a:pPr algn="just">
               <a:lnSpc>
                 <a:spcPct val="125000"/>
               </a:lnSpc>
@@ -18164,7 +18164,7 @@
           <a:bodyPr rtlCol="0" anchor="ctr" wrap="square" lIns="365760"/>
           <a:lstStyle/>
           <a:p>
-            <a:pPr algn="l"/>
+            <a:pPr algn="just"/>
             <a:r>
               <a:rPr sz="1500" b="1">
                 <a:solidFill>
@@ -18198,7 +18198,7 @@
           </a:bodyPr>
           <a:lstStyle/>
           <a:p>
-            <a:pPr algn="l">
+            <a:pPr algn="just">
               <a:lnSpc>
                 <a:spcPct val="125000"/>
               </a:lnSpc>
@@ -18220,7 +18220,7 @@
             </a:r>
           </a:p>
           <a:p>
-            <a:pPr algn="l">
+            <a:pPr algn="just">
               <a:lnSpc>
                 <a:spcPct val="125000"/>
               </a:lnSpc>
@@ -18242,7 +18242,7 @@
             </a:r>
           </a:p>
           <a:p>
-            <a:pPr algn="l">
+            <a:pPr algn="just">
               <a:lnSpc>
                 <a:spcPct val="125000"/>
               </a:lnSpc>
@@ -18264,7 +18264,7 @@
             </a:r>
           </a:p>
           <a:p>
-            <a:pPr algn="l">
+            <a:pPr algn="just">
               <a:lnSpc>
                 <a:spcPct val="125000"/>
               </a:lnSpc>
@@ -18286,7 +18286,7 @@
             </a:r>
           </a:p>
           <a:p>
-            <a:pPr algn="l">
+            <a:pPr algn="just">
               <a:lnSpc>
                 <a:spcPct val="125000"/>
               </a:lnSpc>
@@ -18308,7 +18308,7 @@
             </a:r>
           </a:p>
           <a:p>
-            <a:pPr algn="l">
+            <a:pPr algn="just">
               <a:lnSpc>
                 <a:spcPct val="125000"/>
               </a:lnSpc>
@@ -18330,7 +18330,7 @@
             </a:r>
           </a:p>
           <a:p>
-            <a:pPr algn="l">
+            <a:pPr algn="just">
               <a:lnSpc>
                 <a:spcPct val="125000"/>
               </a:lnSpc>
@@ -18352,7 +18352,7 @@
             </a:r>
           </a:p>
           <a:p>
-            <a:pPr algn="l">
+            <a:pPr algn="just">
               <a:lnSpc>
                 <a:spcPct val="125000"/>
               </a:lnSpc>
@@ -18374,7 +18374,7 @@
             </a:r>
           </a:p>
           <a:p>
-            <a:pPr algn="l">
+            <a:pPr algn="just">
               <a:lnSpc>
                 <a:spcPct val="125000"/>
               </a:lnSpc>
@@ -18454,7 +18454,7 @@
           <a:bodyPr rtlCol="0" anchor="ctr" wrap="square" lIns="365760"/>
           <a:lstStyle/>
           <a:p>
-            <a:pPr algn="l"/>
+            <a:pPr algn="just"/>
             <a:r>
               <a:rPr sz="1500" b="1">
                 <a:solidFill>
@@ -18488,7 +18488,7 @@
           </a:bodyPr>
           <a:lstStyle/>
           <a:p>
-            <a:pPr algn="l">
+            <a:pPr algn="just">
               <a:lnSpc>
                 <a:spcPct val="125000"/>
               </a:lnSpc>
@@ -18510,7 +18510,7 @@
             </a:r>
           </a:p>
           <a:p>
-            <a:pPr algn="l">
+            <a:pPr algn="just">
               <a:lnSpc>
                 <a:spcPct val="125000"/>
               </a:lnSpc>
@@ -18532,7 +18532,7 @@
             </a:r>
           </a:p>
           <a:p>
-            <a:pPr algn="l">
+            <a:pPr algn="just">
               <a:lnSpc>
                 <a:spcPct val="125000"/>
               </a:lnSpc>
@@ -18554,7 +18554,7 @@
             </a:r>
           </a:p>
           <a:p>
-            <a:pPr algn="l">
+            <a:pPr algn="just">
               <a:lnSpc>
                 <a:spcPct val="125000"/>
               </a:lnSpc>
@@ -18576,7 +18576,7 @@
             </a:r>
           </a:p>
           <a:p>
-            <a:pPr algn="l">
+            <a:pPr algn="just">
               <a:lnSpc>
                 <a:spcPct val="125000"/>
               </a:lnSpc>
@@ -18598,7 +18598,7 @@
             </a:r>
           </a:p>
           <a:p>
-            <a:pPr algn="l">
+            <a:pPr algn="just">
               <a:lnSpc>
                 <a:spcPct val="125000"/>
               </a:lnSpc>
@@ -18620,7 +18620,7 @@
             </a:r>
           </a:p>
           <a:p>
-            <a:pPr algn="l">
+            <a:pPr algn="just">
               <a:lnSpc>
                 <a:spcPct val="125000"/>
               </a:lnSpc>
@@ -18642,7 +18642,7 @@
             </a:r>
           </a:p>
           <a:p>
-            <a:pPr algn="l">
+            <a:pPr algn="just">
               <a:lnSpc>
                 <a:spcPct val="125000"/>
               </a:lnSpc>
@@ -18664,7 +18664,7 @@
             </a:r>
           </a:p>
           <a:p>
-            <a:pPr algn="l">
+            <a:pPr algn="just">
               <a:lnSpc>
                 <a:spcPct val="125000"/>
               </a:lnSpc>
@@ -18686,7 +18686,7 @@
             </a:r>
           </a:p>
           <a:p>
-            <a:pPr algn="l">
+            <a:pPr algn="just">
               <a:lnSpc>
                 <a:spcPct val="125000"/>
               </a:lnSpc>
@@ -18766,7 +18766,7 @@
           <a:bodyPr rtlCol="0" anchor="ctr" wrap="square" lIns="365760"/>
           <a:lstStyle/>
           <a:p>
-            <a:pPr algn="l"/>
+            <a:pPr algn="just"/>
             <a:r>
               <a:rPr sz="1500" b="1">
                 <a:solidFill>
@@ -18800,7 +18800,7 @@
           </a:bodyPr>
           <a:lstStyle/>
           <a:p>
-            <a:pPr algn="l">
+            <a:pPr algn="just">
               <a:lnSpc>
                 <a:spcPct val="125000"/>
               </a:lnSpc>
@@ -18822,7 +18822,7 @@
             </a:r>
           </a:p>
           <a:p>
-            <a:pPr algn="l">
+            <a:pPr algn="just">
               <a:lnSpc>
                 <a:spcPct val="125000"/>
               </a:lnSpc>
@@ -18844,7 +18844,7 @@
             </a:r>
           </a:p>
           <a:p>
-            <a:pPr algn="l">
+            <a:pPr algn="just">
               <a:lnSpc>
                 <a:spcPct val="125000"/>
               </a:lnSpc>
@@ -18866,7 +18866,7 @@
             </a:r>
           </a:p>
           <a:p>
-            <a:pPr algn="l">
+            <a:pPr algn="just">
               <a:lnSpc>
                 <a:spcPct val="125000"/>
               </a:lnSpc>
@@ -18888,7 +18888,7 @@
             </a:r>
           </a:p>
           <a:p>
-            <a:pPr algn="l">
+            <a:pPr algn="just">
               <a:lnSpc>
                 <a:spcPct val="125000"/>
               </a:lnSpc>
@@ -18910,7 +18910,7 @@
             </a:r>
           </a:p>
           <a:p>
-            <a:pPr algn="l">
+            <a:pPr algn="just">
               <a:lnSpc>
                 <a:spcPct val="125000"/>
               </a:lnSpc>
@@ -18932,7 +18932,7 @@
             </a:r>
           </a:p>
           <a:p>
-            <a:pPr algn="l">
+            <a:pPr algn="just">
               <a:lnSpc>
                 <a:spcPct val="125000"/>
               </a:lnSpc>
@@ -18954,7 +18954,7 @@
             </a:r>
           </a:p>
           <a:p>
-            <a:pPr algn="l">
+            <a:pPr algn="just">
               <a:lnSpc>
                 <a:spcPct val="125000"/>
               </a:lnSpc>
@@ -18976,7 +18976,7 @@
             </a:r>
           </a:p>
           <a:p>
-            <a:pPr algn="l">
+            <a:pPr algn="just">
               <a:lnSpc>
                 <a:spcPct val="125000"/>
               </a:lnSpc>
@@ -18998,7 +18998,7 @@
             </a:r>
           </a:p>
           <a:p>
-            <a:pPr algn="l">
+            <a:pPr algn="just">
               <a:lnSpc>
                 <a:spcPct val="125000"/>
               </a:lnSpc>
@@ -19020,7 +19020,7 @@
             </a:r>
           </a:p>
           <a:p>
-            <a:pPr algn="l">
+            <a:pPr algn="just">
               <a:lnSpc>
                 <a:spcPct val="125000"/>
               </a:lnSpc>
@@ -19042,7 +19042,7 @@
             </a:r>
           </a:p>
           <a:p>
-            <a:pPr algn="l">
+            <a:pPr algn="just">
               <a:lnSpc>
                 <a:spcPct val="125000"/>
               </a:lnSpc>
@@ -19122,7 +19122,7 @@
           <a:bodyPr rtlCol="0" anchor="ctr" wrap="square" lIns="365760"/>
           <a:lstStyle/>
           <a:p>
-            <a:pPr algn="l"/>
+            <a:pPr algn="just"/>
             <a:r>
               <a:rPr sz="1500" b="1">
                 <a:solidFill>
@@ -19156,7 +19156,7 @@
           </a:bodyPr>
           <a:lstStyle/>
           <a:p>
-            <a:pPr algn="l">
+            <a:pPr algn="just">
               <a:lnSpc>
                 <a:spcPct val="125000"/>
               </a:lnSpc>
@@ -19178,7 +19178,7 @@
             </a:r>
           </a:p>
           <a:p>
-            <a:pPr algn="l">
+            <a:pPr algn="just">
               <a:lnSpc>
                 <a:spcPct val="125000"/>
               </a:lnSpc>
@@ -19200,7 +19200,7 @@
             </a:r>
           </a:p>
           <a:p>
-            <a:pPr algn="l">
+            <a:pPr algn="just">
               <a:lnSpc>
                 <a:spcPct val="125000"/>
               </a:lnSpc>
@@ -19222,7 +19222,7 @@
             </a:r>
           </a:p>
           <a:p>
-            <a:pPr algn="l">
+            <a:pPr algn="just">
               <a:lnSpc>
                 <a:spcPct val="125000"/>
               </a:lnSpc>
@@ -19244,7 +19244,7 @@
             </a:r>
           </a:p>
           <a:p>
-            <a:pPr algn="l">
+            <a:pPr algn="just">
               <a:lnSpc>
                 <a:spcPct val="125000"/>
               </a:lnSpc>
@@ -19266,7 +19266,7 @@
             </a:r>
           </a:p>
           <a:p>
-            <a:pPr algn="l">
+            <a:pPr algn="just">
               <a:lnSpc>
                 <a:spcPct val="125000"/>
               </a:lnSpc>
@@ -19288,7 +19288,7 @@
             </a:r>
           </a:p>
           <a:p>
-            <a:pPr algn="l">
+            <a:pPr algn="just">
               <a:lnSpc>
                 <a:spcPct val="125000"/>
               </a:lnSpc>
@@ -19310,7 +19310,7 @@
             </a:r>
           </a:p>
           <a:p>
-            <a:pPr algn="l">
+            <a:pPr algn="just">
               <a:lnSpc>
                 <a:spcPct val="125000"/>
               </a:lnSpc>
@@ -19332,7 +19332,7 @@
             </a:r>
           </a:p>
           <a:p>
-            <a:pPr algn="l">
+            <a:pPr algn="just">
               <a:lnSpc>
                 <a:spcPct val="125000"/>
               </a:lnSpc>
@@ -19412,7 +19412,7 @@
           <a:bodyPr rtlCol="0" anchor="ctr" wrap="square" lIns="365760"/>
           <a:lstStyle/>
           <a:p>
-            <a:pPr algn="l"/>
+            <a:pPr algn="just"/>
             <a:r>
               <a:rPr sz="1500" b="1">
                 <a:solidFill>
@@ -19446,7 +19446,7 @@
           </a:bodyPr>
           <a:lstStyle/>
           <a:p>
-            <a:pPr algn="l">
+            <a:pPr algn="just">
               <a:lnSpc>
                 <a:spcPct val="125000"/>
               </a:lnSpc>
@@ -19468,7 +19468,7 @@
             </a:r>
           </a:p>
           <a:p>
-            <a:pPr algn="l">
+            <a:pPr algn="just">
               <a:lnSpc>
                 <a:spcPct val="125000"/>
               </a:lnSpc>
@@ -19490,7 +19490,7 @@
             </a:r>
           </a:p>
           <a:p>
-            <a:pPr algn="l">
+            <a:pPr algn="just">
               <a:lnSpc>
                 <a:spcPct val="125000"/>
               </a:lnSpc>
@@ -19512,7 +19512,7 @@
             </a:r>
           </a:p>
           <a:p>
-            <a:pPr algn="l">
+            <a:pPr algn="just">
               <a:lnSpc>
                 <a:spcPct val="125000"/>
               </a:lnSpc>
@@ -19534,7 +19534,7 @@
             </a:r>
           </a:p>
           <a:p>
-            <a:pPr algn="l">
+            <a:pPr algn="just">
               <a:lnSpc>
                 <a:spcPct val="125000"/>
               </a:lnSpc>
@@ -19556,7 +19556,7 @@
             </a:r>
           </a:p>
           <a:p>
-            <a:pPr algn="l">
+            <a:pPr algn="just">
               <a:lnSpc>
                 <a:spcPct val="125000"/>
               </a:lnSpc>
@@ -19578,7 +19578,7 @@
             </a:r>
           </a:p>
           <a:p>
-            <a:pPr algn="l">
+            <a:pPr algn="just">
               <a:lnSpc>
                 <a:spcPct val="125000"/>
               </a:lnSpc>
@@ -19600,7 +19600,7 @@
             </a:r>
           </a:p>
           <a:p>
-            <a:pPr algn="l">
+            <a:pPr algn="just">
               <a:lnSpc>
                 <a:spcPct val="125000"/>
               </a:lnSpc>
@@ -19622,7 +19622,7 @@
             </a:r>
           </a:p>
           <a:p>
-            <a:pPr algn="l">
+            <a:pPr algn="just">
               <a:lnSpc>
                 <a:spcPct val="125000"/>
               </a:lnSpc>
@@ -19702,7 +19702,7 @@
           <a:bodyPr rtlCol="0" anchor="ctr" wrap="square" lIns="365760"/>
           <a:lstStyle/>
           <a:p>
-            <a:pPr algn="l"/>
+            <a:pPr algn="just"/>
             <a:r>
               <a:rPr sz="1500" b="1">
                 <a:solidFill>
@@ -19736,7 +19736,7 @@
           </a:bodyPr>
           <a:lstStyle/>
           <a:p>
-            <a:pPr algn="l">
+            <a:pPr algn="just">
               <a:lnSpc>
                 <a:spcPct val="125000"/>
               </a:lnSpc>
@@ -19758,7 +19758,7 @@
             </a:r>
           </a:p>
           <a:p>
-            <a:pPr algn="l">
+            <a:pPr algn="just">
               <a:lnSpc>
                 <a:spcPct val="125000"/>
               </a:lnSpc>
@@ -19780,7 +19780,7 @@
             </a:r>
           </a:p>
           <a:p>
-            <a:pPr algn="l">
+            <a:pPr algn="just">
               <a:lnSpc>
                 <a:spcPct val="125000"/>
               </a:lnSpc>
@@ -19802,7 +19802,7 @@
             </a:r>
           </a:p>
           <a:p>
-            <a:pPr algn="l">
+            <a:pPr algn="just">
               <a:lnSpc>
                 <a:spcPct val="125000"/>
               </a:lnSpc>
@@ -19824,7 +19824,7 @@
             </a:r>
           </a:p>
           <a:p>
-            <a:pPr algn="l">
+            <a:pPr algn="just">
               <a:lnSpc>
                 <a:spcPct val="125000"/>
               </a:lnSpc>
@@ -19846,7 +19846,7 @@
             </a:r>
           </a:p>
           <a:p>
-            <a:pPr algn="l">
+            <a:pPr algn="just">
               <a:lnSpc>
                 <a:spcPct val="125000"/>
               </a:lnSpc>
@@ -19868,7 +19868,7 @@
             </a:r>
           </a:p>
           <a:p>
-            <a:pPr algn="l">
+            <a:pPr algn="just">
               <a:lnSpc>
                 <a:spcPct val="125000"/>
               </a:lnSpc>
@@ -19890,7 +19890,7 @@
             </a:r>
           </a:p>
           <a:p>
-            <a:pPr algn="l">
+            <a:pPr algn="just">
               <a:lnSpc>
                 <a:spcPct val="125000"/>
               </a:lnSpc>
@@ -19912,7 +19912,7 @@
             </a:r>
           </a:p>
           <a:p>
-            <a:pPr algn="l">
+            <a:pPr algn="just">
               <a:lnSpc>
                 <a:spcPct val="125000"/>
               </a:lnSpc>
@@ -19934,7 +19934,7 @@
             </a:r>
           </a:p>
           <a:p>
-            <a:pPr algn="l">
+            <a:pPr algn="just">
               <a:lnSpc>
                 <a:spcPct val="125000"/>
               </a:lnSpc>
@@ -19956,7 +19956,7 @@
             </a:r>
           </a:p>
           <a:p>
-            <a:pPr algn="l">
+            <a:pPr algn="just">
               <a:lnSpc>
                 <a:spcPct val="125000"/>
               </a:lnSpc>
@@ -19978,7 +19978,7 @@
             </a:r>
           </a:p>
           <a:p>
-            <a:pPr algn="l">
+            <a:pPr algn="just">
               <a:lnSpc>
                 <a:spcPct val="125000"/>
               </a:lnSpc>
@@ -20000,7 +20000,7 @@
             </a:r>
           </a:p>
           <a:p>
-            <a:pPr algn="l">
+            <a:pPr algn="just">
               <a:lnSpc>
                 <a:spcPct val="125000"/>
               </a:lnSpc>
@@ -20080,7 +20080,7 @@
           <a:bodyPr rtlCol="0" anchor="ctr" wrap="square" lIns="365760"/>
           <a:lstStyle/>
           <a:p>
-            <a:pPr algn="l"/>
+            <a:pPr algn="just"/>
             <a:r>
               <a:rPr sz="1500" b="1">
                 <a:solidFill>
@@ -20114,7 +20114,7 @@
           </a:bodyPr>
           <a:lstStyle/>
           <a:p>
-            <a:pPr algn="l">
+            <a:pPr algn="just">
               <a:lnSpc>
                 <a:spcPct val="125000"/>
               </a:lnSpc>
@@ -20136,7 +20136,7 @@
             </a:r>
           </a:p>
           <a:p>
-            <a:pPr algn="l">
+            <a:pPr algn="just">
               <a:lnSpc>
                 <a:spcPct val="125000"/>
               </a:lnSpc>
@@ -20158,7 +20158,7 @@
             </a:r>
           </a:p>
           <a:p>
-            <a:pPr algn="l">
+            <a:pPr algn="just">
               <a:lnSpc>
                 <a:spcPct val="125000"/>
               </a:lnSpc>
@@ -20180,7 +20180,7 @@
             </a:r>
           </a:p>
           <a:p>
-            <a:pPr algn="l">
+            <a:pPr algn="just">
               <a:lnSpc>
                 <a:spcPct val="125000"/>
               </a:lnSpc>
@@ -20202,7 +20202,7 @@
             </a:r>
           </a:p>
           <a:p>
-            <a:pPr algn="l">
+            <a:pPr algn="just">
               <a:lnSpc>
                 <a:spcPct val="125000"/>
               </a:lnSpc>
@@ -20224,7 +20224,7 @@
             </a:r>
           </a:p>
           <a:p>
-            <a:pPr algn="l">
+            <a:pPr algn="just">
               <a:lnSpc>
                 <a:spcPct val="125000"/>
               </a:lnSpc>
@@ -20246,7 +20246,7 @@
             </a:r>
           </a:p>
           <a:p>
-            <a:pPr algn="l">
+            <a:pPr algn="just">
               <a:lnSpc>
                 <a:spcPct val="125000"/>
               </a:lnSpc>
@@ -20268,7 +20268,7 @@
             </a:r>
           </a:p>
           <a:p>
-            <a:pPr algn="l">
+            <a:pPr algn="just">
               <a:lnSpc>
                 <a:spcPct val="125000"/>
               </a:lnSpc>
@@ -20290,7 +20290,7 @@
             </a:r>
           </a:p>
           <a:p>
-            <a:pPr algn="l">
+            <a:pPr algn="just">
               <a:lnSpc>
                 <a:spcPct val="125000"/>
               </a:lnSpc>
@@ -20312,7 +20312,7 @@
             </a:r>
           </a:p>
           <a:p>
-            <a:pPr algn="l">
+            <a:pPr algn="just">
               <a:lnSpc>
                 <a:spcPct val="125000"/>
               </a:lnSpc>
@@ -20392,7 +20392,7 @@
           <a:bodyPr rtlCol="0" anchor="ctr" wrap="square" lIns="365760"/>
           <a:lstStyle/>
           <a:p>
-            <a:pPr algn="l"/>
+            <a:pPr algn="just"/>
             <a:r>
               <a:rPr sz="1500" b="1">
                 <a:solidFill>
@@ -20426,7 +20426,7 @@
           </a:bodyPr>
           <a:lstStyle/>
           <a:p>
-            <a:pPr algn="l">
+            <a:pPr algn="just">
               <a:lnSpc>
                 <a:spcPct val="125000"/>
               </a:lnSpc>
@@ -20448,7 +20448,7 @@
             </a:r>
           </a:p>
           <a:p>
-            <a:pPr algn="l">
+            <a:pPr algn="just">
               <a:lnSpc>
                 <a:spcPct val="125000"/>
               </a:lnSpc>
@@ -20470,7 +20470,7 @@
             </a:r>
           </a:p>
           <a:p>
-            <a:pPr algn="l">
+            <a:pPr algn="just">
               <a:lnSpc>
                 <a:spcPct val="125000"/>
               </a:lnSpc>
@@ -20492,7 +20492,7 @@
             </a:r>
           </a:p>
           <a:p>
-            <a:pPr algn="l">
+            <a:pPr algn="just">
               <a:lnSpc>
                 <a:spcPct val="125000"/>
               </a:lnSpc>
@@ -20514,7 +20514,7 @@
             </a:r>
           </a:p>
           <a:p>
-            <a:pPr algn="l">
+            <a:pPr algn="just">
               <a:lnSpc>
                 <a:spcPct val="125000"/>
               </a:lnSpc>
@@ -20536,7 +20536,7 @@
             </a:r>
           </a:p>
           <a:p>
-            <a:pPr algn="l">
+            <a:pPr algn="just">
               <a:lnSpc>
                 <a:spcPct val="125000"/>
               </a:lnSpc>
@@ -20558,7 +20558,7 @@
             </a:r>
           </a:p>
           <a:p>
-            <a:pPr algn="l">
+            <a:pPr algn="just">
               <a:lnSpc>
                 <a:spcPct val="125000"/>
               </a:lnSpc>
@@ -20580,7 +20580,7 @@
             </a:r>
           </a:p>
           <a:p>
-            <a:pPr algn="l">
+            <a:pPr algn="just">
               <a:lnSpc>
                 <a:spcPct val="125000"/>
               </a:lnSpc>
@@ -20602,7 +20602,7 @@
             </a:r>
           </a:p>
           <a:p>
-            <a:pPr algn="l">
+            <a:pPr algn="just">
               <a:lnSpc>
                 <a:spcPct val="125000"/>
               </a:lnSpc>
@@ -20682,7 +20682,7 @@
           <a:bodyPr rtlCol="0" anchor="ctr" wrap="square" lIns="365760"/>
           <a:lstStyle/>
           <a:p>
-            <a:pPr algn="l"/>
+            <a:pPr algn="just"/>
             <a:r>
               <a:rPr sz="1500" b="1">
                 <a:solidFill>
@@ -20716,7 +20716,7 @@
           </a:bodyPr>
           <a:lstStyle/>
           <a:p>
-            <a:pPr algn="l">
+            <a:pPr algn="just">
               <a:lnSpc>
                 <a:spcPct val="125000"/>
               </a:lnSpc>
@@ -20738,7 +20738,7 @@
             </a:r>
           </a:p>
           <a:p>
-            <a:pPr algn="l">
+            <a:pPr algn="just">
               <a:lnSpc>
                 <a:spcPct val="125000"/>
               </a:lnSpc>
@@ -20760,7 +20760,7 @@
             </a:r>
           </a:p>
           <a:p>
-            <a:pPr algn="l">
+            <a:pPr algn="just">
               <a:lnSpc>
                 <a:spcPct val="125000"/>
               </a:lnSpc>
@@ -20782,7 +20782,7 @@
             </a:r>
           </a:p>
           <a:p>
-            <a:pPr algn="l">
+            <a:pPr algn="just">
               <a:lnSpc>
                 <a:spcPct val="125000"/>
               </a:lnSpc>
@@ -20804,7 +20804,7 @@
             </a:r>
           </a:p>
           <a:p>
-            <a:pPr algn="l">
+            <a:pPr algn="just">
               <a:lnSpc>
                 <a:spcPct val="125000"/>
               </a:lnSpc>
@@ -20826,7 +20826,7 @@
             </a:r>
           </a:p>
           <a:p>
-            <a:pPr algn="l">
+            <a:pPr algn="just">
               <a:lnSpc>
                 <a:spcPct val="125000"/>
               </a:lnSpc>
@@ -20848,7 +20848,7 @@
             </a:r>
           </a:p>
           <a:p>
-            <a:pPr algn="l">
+            <a:pPr algn="just">
               <a:lnSpc>
                 <a:spcPct val="125000"/>
               </a:lnSpc>
@@ -20870,7 +20870,7 @@
             </a:r>
           </a:p>
           <a:p>
-            <a:pPr algn="l">
+            <a:pPr algn="just">
               <a:lnSpc>
                 <a:spcPct val="125000"/>
               </a:lnSpc>
@@ -20892,7 +20892,7 @@
             </a:r>
           </a:p>
           <a:p>
-            <a:pPr algn="l">
+            <a:pPr algn="just">
               <a:lnSpc>
                 <a:spcPct val="125000"/>
               </a:lnSpc>
@@ -20972,7 +20972,7 @@
           <a:bodyPr rtlCol="0" anchor="ctr" wrap="square" lIns="365760"/>
           <a:lstStyle/>
           <a:p>
-            <a:pPr algn="l"/>
+            <a:pPr algn="just"/>
             <a:r>
               <a:rPr sz="1500" b="1">
                 <a:solidFill>
@@ -21006,7 +21006,7 @@
           </a:bodyPr>
           <a:lstStyle/>
           <a:p>
-            <a:pPr algn="l">
+            <a:pPr algn="just">
               <a:lnSpc>
                 <a:spcPct val="125000"/>
               </a:lnSpc>
@@ -21028,7 +21028,7 @@
             </a:r>
           </a:p>
           <a:p>
-            <a:pPr algn="l">
+            <a:pPr algn="just">
               <a:lnSpc>
                 <a:spcPct val="125000"/>
               </a:lnSpc>
@@ -21050,7 +21050,7 @@
             </a:r>
           </a:p>
           <a:p>
-            <a:pPr algn="l">
+            <a:pPr algn="just">
               <a:lnSpc>
                 <a:spcPct val="125000"/>
               </a:lnSpc>
@@ -21072,7 +21072,7 @@
             </a:r>
           </a:p>
           <a:p>
-            <a:pPr algn="l">
+            <a:pPr algn="just">
               <a:lnSpc>
                 <a:spcPct val="125000"/>
               </a:lnSpc>
@@ -21094,7 +21094,7 @@
             </a:r>
           </a:p>
           <a:p>
-            <a:pPr algn="l">
+            <a:pPr algn="just">
               <a:lnSpc>
                 <a:spcPct val="125000"/>
               </a:lnSpc>
@@ -21116,7 +21116,7 @@
             </a:r>
           </a:p>
           <a:p>
-            <a:pPr algn="l">
+            <a:pPr algn="just">
               <a:lnSpc>
                 <a:spcPct val="125000"/>
               </a:lnSpc>
@@ -21138,7 +21138,7 @@
             </a:r>
           </a:p>
           <a:p>
-            <a:pPr algn="l">
+            <a:pPr algn="just">
               <a:lnSpc>
                 <a:spcPct val="125000"/>
               </a:lnSpc>
@@ -21160,7 +21160,7 @@
             </a:r>
           </a:p>
           <a:p>
-            <a:pPr algn="l">
+            <a:pPr algn="just">
               <a:lnSpc>
                 <a:spcPct val="125000"/>
               </a:lnSpc>
@@ -21182,7 +21182,7 @@
             </a:r>
           </a:p>
           <a:p>
-            <a:pPr algn="l">
+            <a:pPr algn="just">
               <a:lnSpc>
                 <a:spcPct val="125000"/>
               </a:lnSpc>
@@ -21204,7 +21204,7 @@
             </a:r>
           </a:p>
           <a:p>
-            <a:pPr algn="l">
+            <a:pPr algn="just">
               <a:lnSpc>
                 <a:spcPct val="125000"/>
               </a:lnSpc>
@@ -21284,7 +21284,7 @@
           <a:bodyPr rtlCol="0" anchor="ctr" wrap="square" lIns="365760"/>
           <a:lstStyle/>
           <a:p>
-            <a:pPr algn="l"/>
+            <a:pPr algn="just"/>
             <a:r>
               <a:rPr sz="1500" b="1">
                 <a:solidFill>
@@ -21318,7 +21318,7 @@
           </a:bodyPr>
           <a:lstStyle/>
           <a:p>
-            <a:pPr algn="l">
+            <a:pPr algn="just">
               <a:lnSpc>
                 <a:spcPct val="125000"/>
               </a:lnSpc>
@@ -21340,7 +21340,7 @@
             </a:r>
           </a:p>
           <a:p>
-            <a:pPr algn="l">
+            <a:pPr algn="just">
               <a:lnSpc>
                 <a:spcPct val="125000"/>
               </a:lnSpc>
@@ -21362,7 +21362,7 @@
             </a:r>
           </a:p>
           <a:p>
-            <a:pPr algn="l">
+            <a:pPr algn="just">
               <a:lnSpc>
                 <a:spcPct val="125000"/>
               </a:lnSpc>
@@ -21384,7 +21384,7 @@
             </a:r>
           </a:p>
           <a:p>
-            <a:pPr algn="l">
+            <a:pPr algn="just">
               <a:lnSpc>
                 <a:spcPct val="125000"/>
               </a:lnSpc>
@@ -21406,7 +21406,7 @@
             </a:r>
           </a:p>
           <a:p>
-            <a:pPr algn="l">
+            <a:pPr algn="just">
               <a:lnSpc>
                 <a:spcPct val="125000"/>
               </a:lnSpc>
@@ -21428,7 +21428,7 @@
             </a:r>
           </a:p>
           <a:p>
-            <a:pPr algn="l">
+            <a:pPr algn="just">
               <a:lnSpc>
                 <a:spcPct val="125000"/>
               </a:lnSpc>
@@ -21450,7 +21450,7 @@
             </a:r>
           </a:p>
           <a:p>
-            <a:pPr algn="l">
+            <a:pPr algn="just">
               <a:lnSpc>
                 <a:spcPct val="125000"/>
               </a:lnSpc>
@@ -21472,7 +21472,7 @@
             </a:r>
           </a:p>
           <a:p>
-            <a:pPr algn="l">
+            <a:pPr algn="just">
               <a:lnSpc>
                 <a:spcPct val="125000"/>
               </a:lnSpc>
@@ -21494,7 +21494,7 @@
             </a:r>
           </a:p>
           <a:p>
-            <a:pPr algn="l">
+            <a:pPr algn="just">
               <a:lnSpc>
                 <a:spcPct val="125000"/>
               </a:lnSpc>
@@ -21574,7 +21574,7 @@
           <a:bodyPr rtlCol="0" anchor="ctr" wrap="square" lIns="365760"/>
           <a:lstStyle/>
           <a:p>
-            <a:pPr algn="l"/>
+            <a:pPr algn="just"/>
             <a:r>
               <a:rPr sz="1500" b="1">
                 <a:solidFill>
@@ -21608,7 +21608,7 @@
           </a:bodyPr>
           <a:lstStyle/>
           <a:p>
-            <a:pPr algn="l">
+            <a:pPr algn="just">
               <a:lnSpc>
                 <a:spcPct val="125000"/>
               </a:lnSpc>
@@ -21630,7 +21630,7 @@
             </a:r>
           </a:p>
           <a:p>
-            <a:pPr algn="l">
+            <a:pPr algn="just">
               <a:lnSpc>
                 <a:spcPct val="125000"/>
               </a:lnSpc>
@@ -21652,7 +21652,7 @@
             </a:r>
           </a:p>
           <a:p>
-            <a:pPr algn="l">
+            <a:pPr algn="just">
               <a:lnSpc>
                 <a:spcPct val="125000"/>
               </a:lnSpc>
@@ -21674,7 +21674,7 @@
             </a:r>
           </a:p>
           <a:p>
-            <a:pPr algn="l">
+            <a:pPr algn="just">
               <a:lnSpc>
                 <a:spcPct val="125000"/>
               </a:lnSpc>
@@ -21696,7 +21696,7 @@
             </a:r>
           </a:p>
           <a:p>
-            <a:pPr algn="l">
+            <a:pPr algn="just">
               <a:lnSpc>
                 <a:spcPct val="125000"/>
               </a:lnSpc>
@@ -21718,7 +21718,7 @@
             </a:r>
           </a:p>
           <a:p>
-            <a:pPr algn="l">
+            <a:pPr algn="just">
               <a:lnSpc>
                 <a:spcPct val="125000"/>
               </a:lnSpc>
@@ -21740,7 +21740,7 @@
             </a:r>
           </a:p>
           <a:p>
-            <a:pPr algn="l">
+            <a:pPr algn="just">
               <a:lnSpc>
                 <a:spcPct val="125000"/>
               </a:lnSpc>
@@ -21762,7 +21762,7 @@
             </a:r>
           </a:p>
           <a:p>
-            <a:pPr algn="l">
+            <a:pPr algn="just">
               <a:lnSpc>
                 <a:spcPct val="125000"/>
               </a:lnSpc>
@@ -21784,7 +21784,7 @@
             </a:r>
           </a:p>
           <a:p>
-            <a:pPr algn="l">
+            <a:pPr algn="just">
               <a:lnSpc>
                 <a:spcPct val="125000"/>
               </a:lnSpc>
@@ -21864,7 +21864,7 @@
           <a:bodyPr rtlCol="0" anchor="ctr" wrap="square" lIns="365760"/>
           <a:lstStyle/>
           <a:p>
-            <a:pPr algn="l"/>
+            <a:pPr algn="just"/>
             <a:r>
               <a:rPr sz="1500" b="1">
                 <a:solidFill>
@@ -21898,7 +21898,7 @@
           </a:bodyPr>
           <a:lstStyle/>
           <a:p>
-            <a:pPr algn="l">
+            <a:pPr algn="just">
               <a:lnSpc>
                 <a:spcPct val="125000"/>
               </a:lnSpc>
@@ -21920,7 +21920,7 @@
             </a:r>
           </a:p>
           <a:p>
-            <a:pPr algn="l">
+            <a:pPr algn="just">
               <a:lnSpc>
                 <a:spcPct val="125000"/>
               </a:lnSpc>
@@ -21942,7 +21942,7 @@
             </a:r>
           </a:p>
           <a:p>
-            <a:pPr algn="l">
+            <a:pPr algn="just">
               <a:lnSpc>
                 <a:spcPct val="125000"/>
               </a:lnSpc>
@@ -21964,7 +21964,7 @@
             </a:r>
           </a:p>
           <a:p>
-            <a:pPr algn="l">
+            <a:pPr algn="just">
               <a:lnSpc>
                 <a:spcPct val="125000"/>
               </a:lnSpc>
@@ -21986,7 +21986,7 @@
             </a:r>
           </a:p>
           <a:p>
-            <a:pPr algn="l">
+            <a:pPr algn="just">
               <a:lnSpc>
                 <a:spcPct val="125000"/>
               </a:lnSpc>
@@ -22008,7 +22008,7 @@
             </a:r>
           </a:p>
           <a:p>
-            <a:pPr algn="l">
+            <a:pPr algn="just">
               <a:lnSpc>
                 <a:spcPct val="125000"/>
               </a:lnSpc>
@@ -22030,7 +22030,7 @@
             </a:r>
           </a:p>
           <a:p>
-            <a:pPr algn="l">
+            <a:pPr algn="just">
               <a:lnSpc>
                 <a:spcPct val="125000"/>
               </a:lnSpc>
@@ -22052,7 +22052,7 @@
             </a:r>
           </a:p>
           <a:p>
-            <a:pPr algn="l">
+            <a:pPr algn="just">
               <a:lnSpc>
                 <a:spcPct val="125000"/>
               </a:lnSpc>
@@ -22074,7 +22074,7 @@
             </a:r>
           </a:p>
           <a:p>
-            <a:pPr algn="l">
+            <a:pPr algn="just">
               <a:lnSpc>
                 <a:spcPct val="125000"/>
               </a:lnSpc>
@@ -22096,7 +22096,7 @@
             </a:r>
           </a:p>
           <a:p>
-            <a:pPr algn="l">
+            <a:pPr algn="just">
               <a:lnSpc>
                 <a:spcPct val="125000"/>
               </a:lnSpc>
@@ -22118,7 +22118,7 @@
             </a:r>
           </a:p>
           <a:p>
-            <a:pPr algn="l">
+            <a:pPr algn="just">
               <a:lnSpc>
                 <a:spcPct val="125000"/>
               </a:lnSpc>
@@ -22140,7 +22140,7 @@
             </a:r>
           </a:p>
           <a:p>
-            <a:pPr algn="l">
+            <a:pPr algn="just">
               <a:lnSpc>
                 <a:spcPct val="125000"/>
               </a:lnSpc>
@@ -22220,7 +22220,7 @@
           <a:bodyPr rtlCol="0" anchor="ctr" wrap="square" lIns="365760"/>
           <a:lstStyle/>
           <a:p>
-            <a:pPr algn="l"/>
+            <a:pPr algn="just"/>
             <a:r>
               <a:rPr sz="1500" b="1">
                 <a:solidFill>
@@ -22254,7 +22254,7 @@
           </a:bodyPr>
           <a:lstStyle/>
           <a:p>
-            <a:pPr algn="l">
+            <a:pPr algn="just">
               <a:lnSpc>
                 <a:spcPct val="125000"/>
               </a:lnSpc>
@@ -22276,7 +22276,7 @@
             </a:r>
           </a:p>
           <a:p>
-            <a:pPr algn="l">
+            <a:pPr algn="just">
               <a:lnSpc>
                 <a:spcPct val="125000"/>
               </a:lnSpc>
@@ -22298,7 +22298,7 @@
             </a:r>
           </a:p>
           <a:p>
-            <a:pPr algn="l">
+            <a:pPr algn="just">
               <a:lnSpc>
                 <a:spcPct val="125000"/>
               </a:lnSpc>
@@ -22320,7 +22320,7 @@
             </a:r>
           </a:p>
           <a:p>
-            <a:pPr algn="l">
+            <a:pPr algn="just">
               <a:lnSpc>
                 <a:spcPct val="125000"/>
               </a:lnSpc>
@@ -22342,7 +22342,7 @@
             </a:r>
           </a:p>
           <a:p>
-            <a:pPr algn="l">
+            <a:pPr algn="just">
               <a:lnSpc>
                 <a:spcPct val="125000"/>
               </a:lnSpc>
@@ -22364,7 +22364,7 @@
             </a:r>
           </a:p>
           <a:p>
-            <a:pPr algn="l">
+            <a:pPr algn="just">
               <a:lnSpc>
                 <a:spcPct val="125000"/>
               </a:lnSpc>
@@ -22386,7 +22386,7 @@
             </a:r>
           </a:p>
           <a:p>
-            <a:pPr algn="l">
+            <a:pPr algn="just">
               <a:lnSpc>
                 <a:spcPct val="125000"/>
               </a:lnSpc>
@@ -22408,7 +22408,7 @@
             </a:r>
           </a:p>
           <a:p>
-            <a:pPr algn="l">
+            <a:pPr algn="just">
               <a:lnSpc>
                 <a:spcPct val="125000"/>
               </a:lnSpc>
@@ -22430,7 +22430,7 @@
             </a:r>
           </a:p>
           <a:p>
-            <a:pPr algn="l">
+            <a:pPr algn="just">
               <a:lnSpc>
                 <a:spcPct val="125000"/>
               </a:lnSpc>
@@ -22510,7 +22510,7 @@
           <a:bodyPr rtlCol="0" anchor="ctr" wrap="square" lIns="365760"/>
           <a:lstStyle/>
           <a:p>
-            <a:pPr algn="l"/>
+            <a:pPr algn="just"/>
             <a:r>
               <a:rPr sz="1500" b="1">
                 <a:solidFill>
@@ -22544,7 +22544,7 @@
           </a:bodyPr>
           <a:lstStyle/>
           <a:p>
-            <a:pPr algn="l">
+            <a:pPr algn="just">
               <a:lnSpc>
                 <a:spcPct val="125000"/>
               </a:lnSpc>
@@ -22566,7 +22566,7 @@
             </a:r>
           </a:p>
           <a:p>
-            <a:pPr algn="l">
+            <a:pPr algn="just">
               <a:lnSpc>
                 <a:spcPct val="125000"/>
               </a:lnSpc>
@@ -22588,7 +22588,7 @@
             </a:r>
           </a:p>
           <a:p>
-            <a:pPr algn="l">
+            <a:pPr algn="just">
               <a:lnSpc>
                 <a:spcPct val="125000"/>
               </a:lnSpc>
@@ -22610,7 +22610,7 @@
             </a:r>
           </a:p>
           <a:p>
-            <a:pPr algn="l">
+            <a:pPr algn="just">
               <a:lnSpc>
                 <a:spcPct val="125000"/>
               </a:lnSpc>
@@ -22632,7 +22632,7 @@
             </a:r>
           </a:p>
           <a:p>
-            <a:pPr algn="l">
+            <a:pPr algn="just">
               <a:lnSpc>
                 <a:spcPct val="125000"/>
               </a:lnSpc>
@@ -22654,7 +22654,7 @@
             </a:r>
           </a:p>
           <a:p>
-            <a:pPr algn="l">
+            <a:pPr algn="just">
               <a:lnSpc>
                 <a:spcPct val="125000"/>
               </a:lnSpc>
@@ -22676,7 +22676,7 @@
             </a:r>
           </a:p>
           <a:p>
-            <a:pPr algn="l">
+            <a:pPr algn="just">
               <a:lnSpc>
                 <a:spcPct val="125000"/>
               </a:lnSpc>
@@ -22698,7 +22698,7 @@
             </a:r>
           </a:p>
           <a:p>
-            <a:pPr algn="l">
+            <a:pPr algn="just">
               <a:lnSpc>
                 <a:spcPct val="125000"/>
               </a:lnSpc>
@@ -22720,7 +22720,7 @@
             </a:r>
           </a:p>
           <a:p>
-            <a:pPr algn="l">
+            <a:pPr algn="just">
               <a:lnSpc>
                 <a:spcPct val="125000"/>
               </a:lnSpc>
@@ -22800,7 +22800,7 @@
           <a:bodyPr rtlCol="0" anchor="ctr" wrap="square" lIns="365760"/>
           <a:lstStyle/>
           <a:p>
-            <a:pPr algn="l"/>
+            <a:pPr algn="just"/>
             <a:r>
               <a:rPr sz="1500" b="1">
                 <a:solidFill>
@@ -22834,7 +22834,7 @@
           </a:bodyPr>
           <a:lstStyle/>
           <a:p>
-            <a:pPr algn="l">
+            <a:pPr algn="just">
               <a:lnSpc>
                 <a:spcPct val="125000"/>
               </a:lnSpc>
@@ -22856,7 +22856,7 @@
             </a:r>
           </a:p>
           <a:p>
-            <a:pPr algn="l">
+            <a:pPr algn="just">
               <a:lnSpc>
                 <a:spcPct val="125000"/>
               </a:lnSpc>
@@ -22878,7 +22878,7 @@
             </a:r>
           </a:p>
           <a:p>
-            <a:pPr algn="l">
+            <a:pPr algn="just">
               <a:lnSpc>
                 <a:spcPct val="125000"/>
               </a:lnSpc>
@@ -22900,7 +22900,7 @@
             </a:r>
           </a:p>
           <a:p>
-            <a:pPr algn="l">
+            <a:pPr algn="just">
               <a:lnSpc>
                 <a:spcPct val="125000"/>
               </a:lnSpc>
@@ -22922,7 +22922,7 @@
             </a:r>
           </a:p>
           <a:p>
-            <a:pPr algn="l">
+            <a:pPr algn="just">
               <a:lnSpc>
                 <a:spcPct val="125000"/>
               </a:lnSpc>
@@ -22944,7 +22944,7 @@
             </a:r>
           </a:p>
           <a:p>
-            <a:pPr algn="l">
+            <a:pPr algn="just">
               <a:lnSpc>
                 <a:spcPct val="125000"/>
               </a:lnSpc>
@@ -22966,7 +22966,7 @@
             </a:r>
           </a:p>
           <a:p>
-            <a:pPr algn="l">
+            <a:pPr algn="just">
               <a:lnSpc>
                 <a:spcPct val="125000"/>
               </a:lnSpc>
@@ -22988,7 +22988,7 @@
             </a:r>
           </a:p>
           <a:p>
-            <a:pPr algn="l">
+            <a:pPr algn="just">
               <a:lnSpc>
                 <a:spcPct val="125000"/>
               </a:lnSpc>
@@ -23010,7 +23010,7 @@
             </a:r>
           </a:p>
           <a:p>
-            <a:pPr algn="l">
+            <a:pPr algn="just">
               <a:lnSpc>
                 <a:spcPct val="125000"/>
               </a:lnSpc>
@@ -23032,7 +23032,7 @@
             </a:r>
           </a:p>
           <a:p>
-            <a:pPr algn="l">
+            <a:pPr algn="just">
               <a:lnSpc>
                 <a:spcPct val="125000"/>
               </a:lnSpc>
@@ -23054,7 +23054,7 @@
             </a:r>
           </a:p>
           <a:p>
-            <a:pPr algn="l">
+            <a:pPr algn="just">
               <a:lnSpc>
                 <a:spcPct val="125000"/>
               </a:lnSpc>
@@ -23076,7 +23076,7 @@
             </a:r>
           </a:p>
           <a:p>
-            <a:pPr algn="l">
+            <a:pPr algn="just">
               <a:lnSpc>
                 <a:spcPct val="125000"/>
               </a:lnSpc>
@@ -23156,7 +23156,7 @@
           <a:bodyPr rtlCol="0" anchor="ctr" wrap="square" lIns="365760"/>
           <a:lstStyle/>
           <a:p>
-            <a:pPr algn="l"/>
+            <a:pPr algn="just"/>
             <a:r>
               <a:rPr sz="1500" b="1">
                 <a:solidFill>
@@ -23190,7 +23190,7 @@
           </a:bodyPr>
           <a:lstStyle/>
           <a:p>
-            <a:pPr algn="l">
+            <a:pPr algn="just">
               <a:lnSpc>
                 <a:spcPct val="125000"/>
               </a:lnSpc>
@@ -23212,7 +23212,7 @@
             </a:r>
           </a:p>
           <a:p>
-            <a:pPr algn="l">
+            <a:pPr algn="just">
               <a:lnSpc>
                 <a:spcPct val="125000"/>
               </a:lnSpc>
@@ -23234,7 +23234,7 @@
             </a:r>
           </a:p>
           <a:p>
-            <a:pPr algn="l">
+            <a:pPr algn="just">
               <a:lnSpc>
                 <a:spcPct val="125000"/>
               </a:lnSpc>
@@ -23256,7 +23256,7 @@
             </a:r>
           </a:p>
           <a:p>
-            <a:pPr algn="l">
+            <a:pPr algn="just">
               <a:lnSpc>
                 <a:spcPct val="125000"/>
               </a:lnSpc>
@@ -23278,7 +23278,7 @@
             </a:r>
           </a:p>
           <a:p>
-            <a:pPr algn="l">
+            <a:pPr algn="just">
               <a:lnSpc>
                 <a:spcPct val="125000"/>
               </a:lnSpc>
@@ -23300,7 +23300,7 @@
             </a:r>
           </a:p>
           <a:p>
-            <a:pPr algn="l">
+            <a:pPr algn="just">
               <a:lnSpc>
                 <a:spcPct val="125000"/>
               </a:lnSpc>
@@ -23322,7 +23322,7 @@
             </a:r>
           </a:p>
           <a:p>
-            <a:pPr algn="l">
+            <a:pPr algn="just">
               <a:lnSpc>
                 <a:spcPct val="125000"/>
               </a:lnSpc>
@@ -23344,7 +23344,7 @@
             </a:r>
           </a:p>
           <a:p>
-            <a:pPr algn="l">
+            <a:pPr algn="just">
               <a:lnSpc>
                 <a:spcPct val="125000"/>
               </a:lnSpc>
@@ -23366,7 +23366,7 @@
             </a:r>
           </a:p>
           <a:p>
-            <a:pPr algn="l">
+            <a:pPr algn="just">
               <a:lnSpc>
                 <a:spcPct val="125000"/>
               </a:lnSpc>
@@ -23388,7 +23388,7 @@
             </a:r>
           </a:p>
           <a:p>
-            <a:pPr algn="l">
+            <a:pPr algn="just">
               <a:lnSpc>
                 <a:spcPct val="125000"/>
               </a:lnSpc>
@@ -23410,7 +23410,7 @@
             </a:r>
           </a:p>
           <a:p>
-            <a:pPr algn="l">
+            <a:pPr algn="just">
               <a:lnSpc>
                 <a:spcPct val="125000"/>
               </a:lnSpc>
@@ -23432,7 +23432,7 @@
             </a:r>
           </a:p>
           <a:p>
-            <a:pPr algn="l">
+            <a:pPr algn="just">
               <a:lnSpc>
                 <a:spcPct val="125000"/>
               </a:lnSpc>
@@ -23512,7 +23512,7 @@
           <a:bodyPr rtlCol="0" anchor="ctr" wrap="square" lIns="365760"/>
           <a:lstStyle/>
           <a:p>
-            <a:pPr algn="l"/>
+            <a:pPr algn="just"/>
             <a:r>
               <a:rPr sz="1500" b="1">
                 <a:solidFill>
@@ -23546,7 +23546,7 @@
           </a:bodyPr>
           <a:lstStyle/>
           <a:p>
-            <a:pPr algn="l">
+            <a:pPr algn="just">
               <a:lnSpc>
                 <a:spcPct val="125000"/>
               </a:lnSpc>
@@ -23568,7 +23568,7 @@
             </a:r>
           </a:p>
           <a:p>
-            <a:pPr algn="l">
+            <a:pPr algn="just">
               <a:lnSpc>
                 <a:spcPct val="125000"/>
               </a:lnSpc>
@@ -23590,7 +23590,7 @@
             </a:r>
           </a:p>
           <a:p>
-            <a:pPr algn="l">
+            <a:pPr algn="just">
               <a:lnSpc>
                 <a:spcPct val="125000"/>
               </a:lnSpc>
@@ -23612,7 +23612,7 @@
             </a:r>
           </a:p>
           <a:p>
-            <a:pPr algn="l">
+            <a:pPr algn="just">
               <a:lnSpc>
                 <a:spcPct val="125000"/>
               </a:lnSpc>
@@ -23634,7 +23634,7 @@
             </a:r>
           </a:p>
           <a:p>
-            <a:pPr algn="l">
+            <a:pPr algn="just">
               <a:lnSpc>
                 <a:spcPct val="125000"/>
               </a:lnSpc>
@@ -23656,7 +23656,7 @@
             </a:r>
           </a:p>
           <a:p>
-            <a:pPr algn="l">
+            <a:pPr algn="just">
               <a:lnSpc>
                 <a:spcPct val="125000"/>
               </a:lnSpc>
@@ -23678,7 +23678,7 @@
             </a:r>
           </a:p>
           <a:p>
-            <a:pPr algn="l">
+            <a:pPr algn="just">
               <a:lnSpc>
                 <a:spcPct val="125000"/>
               </a:lnSpc>
@@ -23700,7 +23700,7 @@
             </a:r>
           </a:p>
           <a:p>
-            <a:pPr algn="l">
+            <a:pPr algn="just">
               <a:lnSpc>
                 <a:spcPct val="125000"/>
               </a:lnSpc>
@@ -23722,7 +23722,7 @@
             </a:r>
           </a:p>
           <a:p>
-            <a:pPr algn="l">
+            <a:pPr algn="just">
               <a:lnSpc>
                 <a:spcPct val="125000"/>
               </a:lnSpc>
@@ -23744,7 +23744,7 @@
             </a:r>
           </a:p>
           <a:p>
-            <a:pPr algn="l">
+            <a:pPr algn="just">
               <a:lnSpc>
                 <a:spcPct val="125000"/>
               </a:lnSpc>
@@ -23766,7 +23766,7 @@
             </a:r>
           </a:p>
           <a:p>
-            <a:pPr algn="l">
+            <a:pPr algn="just">
               <a:lnSpc>
                 <a:spcPct val="125000"/>
               </a:lnSpc>
@@ -23788,7 +23788,7 @@
             </a:r>
           </a:p>
           <a:p>
-            <a:pPr algn="l">
+            <a:pPr algn="just">
               <a:lnSpc>
                 <a:spcPct val="125000"/>
               </a:lnSpc>
@@ -23810,7 +23810,7 @@
             </a:r>
           </a:p>
           <a:p>
-            <a:pPr algn="l">
+            <a:pPr algn="just">
               <a:lnSpc>
                 <a:spcPct val="125000"/>
               </a:lnSpc>
@@ -23832,7 +23832,7 @@
             </a:r>
           </a:p>
           <a:p>
-            <a:pPr algn="l">
+            <a:pPr algn="just">
               <a:lnSpc>
                 <a:spcPct val="125000"/>
               </a:lnSpc>
@@ -23854,7 +23854,7 @@
             </a:r>
           </a:p>
           <a:p>
-            <a:pPr algn="l">
+            <a:pPr algn="just">
               <a:lnSpc>
                 <a:spcPct val="125000"/>
               </a:lnSpc>
@@ -23876,7 +23876,7 @@
             </a:r>
           </a:p>
           <a:p>
-            <a:pPr algn="l">
+            <a:pPr algn="just">
               <a:lnSpc>
                 <a:spcPct val="125000"/>
               </a:lnSpc>
@@ -23898,7 +23898,7 @@
             </a:r>
           </a:p>
           <a:p>
-            <a:pPr algn="l">
+            <a:pPr algn="just">
               <a:lnSpc>
                 <a:spcPct val="125000"/>
               </a:lnSpc>
@@ -23920,7 +23920,7 @@
             </a:r>
           </a:p>
           <a:p>
-            <a:pPr algn="l">
+            <a:pPr algn="just">
               <a:lnSpc>
                 <a:spcPct val="125000"/>
               </a:lnSpc>
@@ -24000,7 +24000,7 @@
           <a:bodyPr rtlCol="0" anchor="ctr" wrap="square" lIns="365760"/>
           <a:lstStyle/>
           <a:p>
-            <a:pPr algn="l"/>
+            <a:pPr algn="just"/>
             <a:r>
               <a:rPr sz="1500" b="1">
                 <a:solidFill>
@@ -24034,7 +24034,7 @@
           </a:bodyPr>
           <a:lstStyle/>
           <a:p>
-            <a:pPr algn="l">
+            <a:pPr algn="just">
               <a:lnSpc>
                 <a:spcPct val="125000"/>
               </a:lnSpc>
@@ -24056,7 +24056,7 @@
             </a:r>
           </a:p>
           <a:p>
-            <a:pPr algn="l">
+            <a:pPr algn="just">
               <a:lnSpc>
                 <a:spcPct val="125000"/>
               </a:lnSpc>
@@ -24078,7 +24078,7 @@
             </a:r>
           </a:p>
           <a:p>
-            <a:pPr algn="l">
+            <a:pPr algn="just">
               <a:lnSpc>
                 <a:spcPct val="125000"/>
               </a:lnSpc>
@@ -24100,7 +24100,7 @@
             </a:r>
           </a:p>
           <a:p>
-            <a:pPr algn="l">
+            <a:pPr algn="just">
               <a:lnSpc>
                 <a:spcPct val="125000"/>
               </a:lnSpc>
@@ -24122,7 +24122,7 @@
             </a:r>
           </a:p>
           <a:p>
-            <a:pPr algn="l">
+            <a:pPr algn="just">
               <a:lnSpc>
                 <a:spcPct val="125000"/>
               </a:lnSpc>
@@ -24144,7 +24144,7 @@
             </a:r>
           </a:p>
           <a:p>
-            <a:pPr algn="l">
+            <a:pPr algn="just">
               <a:lnSpc>
                 <a:spcPct val="125000"/>
               </a:lnSpc>
@@ -24166,7 +24166,7 @@
             </a:r>
           </a:p>
           <a:p>
-            <a:pPr algn="l">
+            <a:pPr algn="just">
               <a:lnSpc>
                 <a:spcPct val="125000"/>
               </a:lnSpc>
@@ -24188,7 +24188,7 @@
             </a:r>
           </a:p>
           <a:p>
-            <a:pPr algn="l">
+            <a:pPr algn="just">
               <a:lnSpc>
                 <a:spcPct val="125000"/>
               </a:lnSpc>
@@ -24210,7 +24210,7 @@
             </a:r>
           </a:p>
           <a:p>
-            <a:pPr algn="l">
+            <a:pPr algn="just">
               <a:lnSpc>
                 <a:spcPct val="125000"/>
               </a:lnSpc>
@@ -24290,7 +24290,7 @@
           <a:bodyPr rtlCol="0" anchor="ctr" wrap="square" lIns="365760"/>
           <a:lstStyle/>
           <a:p>
-            <a:pPr algn="l"/>
+            <a:pPr algn="just"/>
             <a:r>
               <a:rPr sz="1500" b="1">
                 <a:solidFill>
@@ -24324,7 +24324,7 @@
           </a:bodyPr>
           <a:lstStyle/>
           <a:p>
-            <a:pPr algn="l">
+            <a:pPr algn="just">
               <a:lnSpc>
                 <a:spcPct val="125000"/>
               </a:lnSpc>
@@ -24346,7 +24346,7 @@
             </a:r>
           </a:p>
           <a:p>
-            <a:pPr algn="l">
+            <a:pPr algn="just">
               <a:lnSpc>
                 <a:spcPct val="125000"/>
               </a:lnSpc>
@@ -24368,7 +24368,7 @@
             </a:r>
           </a:p>
           <a:p>
-            <a:pPr algn="l">
+            <a:pPr algn="just">
               <a:lnSpc>
                 <a:spcPct val="125000"/>
               </a:lnSpc>
@@ -24390,7 +24390,7 @@
             </a:r>
           </a:p>
           <a:p>
-            <a:pPr algn="l">
+            <a:pPr algn="just">
               <a:lnSpc>
                 <a:spcPct val="125000"/>
               </a:lnSpc>
@@ -24412,7 +24412,7 @@
             </a:r>
           </a:p>
           <a:p>
-            <a:pPr algn="l">
+            <a:pPr algn="just">
               <a:lnSpc>
                 <a:spcPct val="125000"/>
               </a:lnSpc>
@@ -24434,7 +24434,7 @@
             </a:r>
           </a:p>
           <a:p>
-            <a:pPr algn="l">
+            <a:pPr algn="just">
               <a:lnSpc>
                 <a:spcPct val="125000"/>
               </a:lnSpc>
@@ -24456,7 +24456,7 @@
             </a:r>
           </a:p>
           <a:p>
-            <a:pPr algn="l">
+            <a:pPr algn="just">
               <a:lnSpc>
                 <a:spcPct val="125000"/>
               </a:lnSpc>
@@ -24478,7 +24478,7 @@
             </a:r>
           </a:p>
           <a:p>
-            <a:pPr algn="l">
+            <a:pPr algn="just">
               <a:lnSpc>
                 <a:spcPct val="125000"/>
               </a:lnSpc>
@@ -24500,7 +24500,7 @@
             </a:r>
           </a:p>
           <a:p>
-            <a:pPr algn="l">
+            <a:pPr algn="just">
               <a:lnSpc>
                 <a:spcPct val="125000"/>
               </a:lnSpc>
@@ -24522,7 +24522,7 @@
             </a:r>
           </a:p>
           <a:p>
-            <a:pPr algn="l">
+            <a:pPr algn="just">
               <a:lnSpc>
                 <a:spcPct val="125000"/>
               </a:lnSpc>
@@ -24544,7 +24544,7 @@
             </a:r>
           </a:p>
           <a:p>
-            <a:pPr algn="l">
+            <a:pPr algn="just">
               <a:lnSpc>
                 <a:spcPct val="125000"/>
               </a:lnSpc>
@@ -24566,7 +24566,7 @@
             </a:r>
           </a:p>
           <a:p>
-            <a:pPr algn="l">
+            <a:pPr algn="just">
               <a:lnSpc>
                 <a:spcPct val="125000"/>
               </a:lnSpc>
@@ -24588,7 +24588,7 @@
             </a:r>
           </a:p>
           <a:p>
-            <a:pPr algn="l">
+            <a:pPr algn="just">
               <a:lnSpc>
                 <a:spcPct val="125000"/>
               </a:lnSpc>
@@ -24610,7 +24610,7 @@
             </a:r>
           </a:p>
           <a:p>
-            <a:pPr algn="l">
+            <a:pPr algn="just">
               <a:lnSpc>
                 <a:spcPct val="125000"/>
               </a:lnSpc>
@@ -24632,7 +24632,7 @@
             </a:r>
           </a:p>
           <a:p>
-            <a:pPr algn="l">
+            <a:pPr algn="just">
               <a:lnSpc>
                 <a:spcPct val="125000"/>
               </a:lnSpc>
@@ -24712,7 +24712,7 @@
           <a:bodyPr rtlCol="0" anchor="ctr" wrap="square" lIns="365760"/>
           <a:lstStyle/>
           <a:p>
-            <a:pPr algn="l"/>
+            <a:pPr algn="just"/>
             <a:r>
               <a:rPr sz="1500" b="1">
                 <a:solidFill>
@@ -24746,7 +24746,7 @@
           </a:bodyPr>
           <a:lstStyle/>
           <a:p>
-            <a:pPr algn="l">
+            <a:pPr algn="just">
               <a:lnSpc>
                 <a:spcPct val="125000"/>
               </a:lnSpc>
@@ -24768,7 +24768,7 @@
             </a:r>
           </a:p>
           <a:p>
-            <a:pPr algn="l">
+            <a:pPr algn="just">
               <a:lnSpc>
                 <a:spcPct val="125000"/>
               </a:lnSpc>
@@ -24790,7 +24790,7 @@
             </a:r>
           </a:p>
           <a:p>
-            <a:pPr algn="l">
+            <a:pPr algn="just">
               <a:lnSpc>
                 <a:spcPct val="125000"/>
               </a:lnSpc>
@@ -24812,7 +24812,7 @@
             </a:r>
           </a:p>
           <a:p>
-            <a:pPr algn="l">
+            <a:pPr algn="just">
               <a:lnSpc>
                 <a:spcPct val="125000"/>
               </a:lnSpc>
@@ -24834,7 +24834,7 @@
             </a:r>
           </a:p>
           <a:p>
-            <a:pPr algn="l">
+            <a:pPr algn="just">
               <a:lnSpc>
                 <a:spcPct val="125000"/>
               </a:lnSpc>
@@ -24856,7 +24856,7 @@
             </a:r>
           </a:p>
           <a:p>
-            <a:pPr algn="l">
+            <a:pPr algn="just">
               <a:lnSpc>
                 <a:spcPct val="125000"/>
               </a:lnSpc>
@@ -24878,7 +24878,7 @@
             </a:r>
           </a:p>
           <a:p>
-            <a:pPr algn="l">
+            <a:pPr algn="just">
               <a:lnSpc>
                 <a:spcPct val="125000"/>
               </a:lnSpc>
@@ -24900,7 +24900,7 @@
             </a:r>
           </a:p>
           <a:p>
-            <a:pPr algn="l">
+            <a:pPr algn="just">
               <a:lnSpc>
                 <a:spcPct val="125000"/>
               </a:lnSpc>
@@ -24922,7 +24922,7 @@
             </a:r>
           </a:p>
           <a:p>
-            <a:pPr algn="l">
+            <a:pPr algn="just">
               <a:lnSpc>
                 <a:spcPct val="125000"/>
               </a:lnSpc>
@@ -24944,7 +24944,7 @@
             </a:r>
           </a:p>
           <a:p>
-            <a:pPr algn="l">
+            <a:pPr algn="just">
               <a:lnSpc>
                 <a:spcPct val="125000"/>
               </a:lnSpc>
@@ -24966,7 +24966,7 @@
             </a:r>
           </a:p>
           <a:p>
-            <a:pPr algn="l">
+            <a:pPr algn="just">
               <a:lnSpc>
                 <a:spcPct val="125000"/>
               </a:lnSpc>
@@ -25046,7 +25046,7 @@
           <a:bodyPr rtlCol="0" anchor="ctr" wrap="square" lIns="365760"/>
           <a:lstStyle/>
           <a:p>
-            <a:pPr algn="l"/>
+            <a:pPr algn="just"/>
             <a:r>
               <a:rPr sz="1500" b="1">
                 <a:solidFill>
@@ -25080,7 +25080,7 @@
           </a:bodyPr>
           <a:lstStyle/>
           <a:p>
-            <a:pPr algn="l">
+            <a:pPr algn="just">
               <a:lnSpc>
                 <a:spcPct val="125000"/>
               </a:lnSpc>
@@ -25102,7 +25102,7 @@
             </a:r>
           </a:p>
           <a:p>
-            <a:pPr algn="l">
+            <a:pPr algn="just">
               <a:lnSpc>
                 <a:spcPct val="125000"/>
               </a:lnSpc>
@@ -25124,7 +25124,7 @@
             </a:r>
           </a:p>
           <a:p>
-            <a:pPr algn="l">
+            <a:pPr algn="just">
               <a:lnSpc>
                 <a:spcPct val="125000"/>
               </a:lnSpc>
@@ -25146,7 +25146,7 @@
             </a:r>
           </a:p>
           <a:p>
-            <a:pPr algn="l">
+            <a:pPr algn="just">
               <a:lnSpc>
                 <a:spcPct val="125000"/>
               </a:lnSpc>
@@ -25168,7 +25168,7 @@
             </a:r>
           </a:p>
           <a:p>
-            <a:pPr algn="l">
+            <a:pPr algn="just">
               <a:lnSpc>
                 <a:spcPct val="125000"/>
               </a:lnSpc>
@@ -25190,7 +25190,7 @@
             </a:r>
           </a:p>
           <a:p>
-            <a:pPr algn="l">
+            <a:pPr algn="just">
               <a:lnSpc>
                 <a:spcPct val="125000"/>
               </a:lnSpc>
@@ -25212,7 +25212,7 @@
             </a:r>
           </a:p>
           <a:p>
-            <a:pPr algn="l">
+            <a:pPr algn="just">
               <a:lnSpc>
                 <a:spcPct val="125000"/>
               </a:lnSpc>
@@ -25234,7 +25234,7 @@
             </a:r>
           </a:p>
           <a:p>
-            <a:pPr algn="l">
+            <a:pPr algn="just">
               <a:lnSpc>
                 <a:spcPct val="125000"/>
               </a:lnSpc>
@@ -25256,7 +25256,7 @@
             </a:r>
           </a:p>
           <a:p>
-            <a:pPr algn="l">
+            <a:pPr algn="just">
               <a:lnSpc>
                 <a:spcPct val="125000"/>
               </a:lnSpc>
@@ -25278,7 +25278,7 @@
             </a:r>
           </a:p>
           <a:p>
-            <a:pPr algn="l">
+            <a:pPr algn="just">
               <a:lnSpc>
                 <a:spcPct val="125000"/>
               </a:lnSpc>
@@ -25300,7 +25300,7 @@
             </a:r>
           </a:p>
           <a:p>
-            <a:pPr algn="l">
+            <a:pPr algn="just">
               <a:lnSpc>
                 <a:spcPct val="125000"/>
               </a:lnSpc>
@@ -25322,7 +25322,7 @@
             </a:r>
           </a:p>
           <a:p>
-            <a:pPr algn="l">
+            <a:pPr algn="just">
               <a:lnSpc>
                 <a:spcPct val="125000"/>
               </a:lnSpc>
@@ -25344,7 +25344,7 @@
             </a:r>
           </a:p>
           <a:p>
-            <a:pPr algn="l">
+            <a:pPr algn="just">
               <a:lnSpc>
                 <a:spcPct val="125000"/>
               </a:lnSpc>
@@ -25366,7 +25366,7 @@
             </a:r>
           </a:p>
           <a:p>
-            <a:pPr algn="l">
+            <a:pPr algn="just">
               <a:lnSpc>
                 <a:spcPct val="125000"/>
               </a:lnSpc>
@@ -25388,7 +25388,7 @@
             </a:r>
           </a:p>
           <a:p>
-            <a:pPr algn="l">
+            <a:pPr algn="just">
               <a:lnSpc>
                 <a:spcPct val="125000"/>
               </a:lnSpc>
@@ -25410,7 +25410,7 @@
             </a:r>
           </a:p>
           <a:p>
-            <a:pPr algn="l">
+            <a:pPr algn="just">
               <a:lnSpc>
                 <a:spcPct val="125000"/>
               </a:lnSpc>
@@ -25432,7 +25432,7 @@
             </a:r>
           </a:p>
           <a:p>
-            <a:pPr algn="l">
+            <a:pPr algn="just">
               <a:lnSpc>
                 <a:spcPct val="125000"/>
               </a:lnSpc>
@@ -25454,7 +25454,7 @@
             </a:r>
           </a:p>
           <a:p>
-            <a:pPr algn="l">
+            <a:pPr algn="just">
               <a:lnSpc>
                 <a:spcPct val="125000"/>
               </a:lnSpc>
@@ -25476,7 +25476,7 @@
             </a:r>
           </a:p>
           <a:p>
-            <a:pPr algn="l">
+            <a:pPr algn="just">
               <a:lnSpc>
                 <a:spcPct val="125000"/>
               </a:lnSpc>
@@ -25498,7 +25498,7 @@
             </a:r>
           </a:p>
           <a:p>
-            <a:pPr algn="l">
+            <a:pPr algn="just">
               <a:lnSpc>
                 <a:spcPct val="125000"/>
               </a:lnSpc>
@@ -25578,7 +25578,7 @@
           <a:bodyPr rtlCol="0" anchor="ctr" wrap="square" lIns="365760"/>
           <a:lstStyle/>
           <a:p>
-            <a:pPr algn="l"/>
+            <a:pPr algn="just"/>
             <a:r>
               <a:rPr sz="1500" b="1">
                 <a:solidFill>
@@ -25612,7 +25612,7 @@
           </a:bodyPr>
           <a:lstStyle/>
           <a:p>
-            <a:pPr algn="l">
+            <a:pPr algn="just">
               <a:lnSpc>
                 <a:spcPct val="125000"/>
               </a:lnSpc>
@@ -25634,7 +25634,7 @@
             </a:r>
           </a:p>
           <a:p>
-            <a:pPr algn="l">
+            <a:pPr algn="just">
               <a:lnSpc>
                 <a:spcPct val="125000"/>
               </a:lnSpc>
@@ -25656,7 +25656,7 @@
             </a:r>
           </a:p>
           <a:p>
-            <a:pPr algn="l">
+            <a:pPr algn="just">
               <a:lnSpc>
                 <a:spcPct val="125000"/>
               </a:lnSpc>
@@ -25678,7 +25678,7 @@
             </a:r>
           </a:p>
           <a:p>
-            <a:pPr algn="l">
+            <a:pPr algn="just">
               <a:lnSpc>
                 <a:spcPct val="125000"/>
               </a:lnSpc>
@@ -25700,7 +25700,7 @@
             </a:r>
           </a:p>
           <a:p>
-            <a:pPr algn="l">
+            <a:pPr algn="just">
               <a:lnSpc>
                 <a:spcPct val="125000"/>
               </a:lnSpc>
@@ -25722,7 +25722,7 @@
             </a:r>
           </a:p>
           <a:p>
-            <a:pPr algn="l">
+            <a:pPr algn="just">
               <a:lnSpc>
                 <a:spcPct val="125000"/>
               </a:lnSpc>
@@ -25744,7 +25744,7 @@
             </a:r>
           </a:p>
           <a:p>
-            <a:pPr algn="l">
+            <a:pPr algn="just">
               <a:lnSpc>
                 <a:spcPct val="125000"/>
               </a:lnSpc>
@@ -25766,7 +25766,7 @@
             </a:r>
           </a:p>
           <a:p>
-            <a:pPr algn="l">
+            <a:pPr algn="just">
               <a:lnSpc>
                 <a:spcPct val="125000"/>
               </a:lnSpc>
@@ -25788,7 +25788,7 @@
             </a:r>
           </a:p>
           <a:p>
-            <a:pPr algn="l">
+            <a:pPr algn="just">
               <a:lnSpc>
                 <a:spcPct val="125000"/>
               </a:lnSpc>
@@ -25810,7 +25810,7 @@
             </a:r>
           </a:p>
           <a:p>
-            <a:pPr algn="l">
+            <a:pPr algn="just">
               <a:lnSpc>
                 <a:spcPct val="125000"/>
               </a:lnSpc>
@@ -25832,7 +25832,7 @@
             </a:r>
           </a:p>
           <a:p>
-            <a:pPr algn="l">
+            <a:pPr algn="just">
               <a:lnSpc>
                 <a:spcPct val="125000"/>
               </a:lnSpc>
@@ -25854,7 +25854,7 @@
             </a:r>
           </a:p>
           <a:p>
-            <a:pPr algn="l">
+            <a:pPr algn="just">
               <a:lnSpc>
                 <a:spcPct val="125000"/>
               </a:lnSpc>
@@ -25876,7 +25876,7 @@
             </a:r>
           </a:p>
           <a:p>
-            <a:pPr algn="l">
+            <a:pPr algn="just">
               <a:lnSpc>
                 <a:spcPct val="125000"/>
               </a:lnSpc>
@@ -25956,7 +25956,7 @@
           <a:bodyPr rtlCol="0" anchor="ctr" wrap="square" lIns="365760"/>
           <a:lstStyle/>
           <a:p>
-            <a:pPr algn="l"/>
+            <a:pPr algn="just"/>
             <a:r>
               <a:rPr sz="1500" b="1">
                 <a:solidFill>
@@ -25990,7 +25990,7 @@
           </a:bodyPr>
           <a:lstStyle/>
           <a:p>
-            <a:pPr algn="l">
+            <a:pPr algn="just">
               <a:lnSpc>
                 <a:spcPct val="125000"/>
               </a:lnSpc>
@@ -26012,7 +26012,7 @@
             </a:r>
           </a:p>
           <a:p>
-            <a:pPr algn="l">
+            <a:pPr algn="just">
               <a:lnSpc>
                 <a:spcPct val="125000"/>
               </a:lnSpc>
@@ -26034,7 +26034,7 @@
             </a:r>
           </a:p>
           <a:p>
-            <a:pPr algn="l">
+            <a:pPr algn="just">
               <a:lnSpc>
                 <a:spcPct val="125000"/>
               </a:lnSpc>
@@ -26056,7 +26056,7 @@
             </a:r>
           </a:p>
           <a:p>
-            <a:pPr algn="l">
+            <a:pPr algn="just">
               <a:lnSpc>
                 <a:spcPct val="125000"/>
               </a:lnSpc>
@@ -26078,7 +26078,7 @@
             </a:r>
           </a:p>
           <a:p>
-            <a:pPr algn="l">
+            <a:pPr algn="just">
               <a:lnSpc>
                 <a:spcPct val="125000"/>
               </a:lnSpc>
@@ -26100,7 +26100,7 @@
             </a:r>
           </a:p>
           <a:p>
-            <a:pPr algn="l">
+            <a:pPr algn="just">
               <a:lnSpc>
                 <a:spcPct val="125000"/>
               </a:lnSpc>
@@ -26122,7 +26122,7 @@
             </a:r>
           </a:p>
           <a:p>
-            <a:pPr algn="l">
+            <a:pPr algn="just">
               <a:lnSpc>
                 <a:spcPct val="125000"/>
               </a:lnSpc>
@@ -26144,7 +26144,7 @@
             </a:r>
           </a:p>
           <a:p>
-            <a:pPr algn="l">
+            <a:pPr algn="just">
               <a:lnSpc>
                 <a:spcPct val="125000"/>
               </a:lnSpc>
@@ -26166,7 +26166,7 @@
             </a:r>
           </a:p>
           <a:p>
-            <a:pPr algn="l">
+            <a:pPr algn="just">
               <a:lnSpc>
                 <a:spcPct val="125000"/>
               </a:lnSpc>
@@ -26188,7 +26188,7 @@
             </a:r>
           </a:p>
           <a:p>
-            <a:pPr algn="l">
+            <a:pPr algn="just">
               <a:lnSpc>
                 <a:spcPct val="125000"/>
               </a:lnSpc>
@@ -26210,7 +26210,7 @@
             </a:r>
           </a:p>
           <a:p>
-            <a:pPr algn="l">
+            <a:pPr algn="just">
               <a:lnSpc>
                 <a:spcPct val="125000"/>
               </a:lnSpc>
@@ -26232,7 +26232,7 @@
             </a:r>
           </a:p>
           <a:p>
-            <a:pPr algn="l">
+            <a:pPr algn="just">
               <a:lnSpc>
                 <a:spcPct val="125000"/>
               </a:lnSpc>
@@ -26254,7 +26254,7 @@
             </a:r>
           </a:p>
           <a:p>
-            <a:pPr algn="l">
+            <a:pPr algn="just">
               <a:lnSpc>
                 <a:spcPct val="125000"/>
               </a:lnSpc>
@@ -26276,7 +26276,7 @@
             </a:r>
           </a:p>
           <a:p>
-            <a:pPr algn="l">
+            <a:pPr algn="just">
               <a:lnSpc>
                 <a:spcPct val="125000"/>
               </a:lnSpc>
@@ -26298,7 +26298,7 @@
             </a:r>
           </a:p>
           <a:p>
-            <a:pPr algn="l">
+            <a:pPr algn="just">
               <a:lnSpc>
                 <a:spcPct val="125000"/>
               </a:lnSpc>
@@ -26320,7 +26320,7 @@
             </a:r>
           </a:p>
           <a:p>
-            <a:pPr algn="l">
+            <a:pPr algn="just">
               <a:lnSpc>
                 <a:spcPct val="125000"/>
               </a:lnSpc>
@@ -26342,7 +26342,7 @@
             </a:r>
           </a:p>
           <a:p>
-            <a:pPr algn="l">
+            <a:pPr algn="just">
               <a:lnSpc>
                 <a:spcPct val="125000"/>
               </a:lnSpc>
@@ -26364,7 +26364,7 @@
             </a:r>
           </a:p>
           <a:p>
-            <a:pPr algn="l">
+            <a:pPr algn="just">
               <a:lnSpc>
                 <a:spcPct val="125000"/>
               </a:lnSpc>
@@ -26386,7 +26386,7 @@
             </a:r>
           </a:p>
           <a:p>
-            <a:pPr algn="l">
+            <a:pPr algn="just">
               <a:lnSpc>
                 <a:spcPct val="125000"/>
               </a:lnSpc>
@@ -26408,7 +26408,7 @@
             </a:r>
           </a:p>
           <a:p>
-            <a:pPr algn="l">
+            <a:pPr algn="just">
               <a:lnSpc>
                 <a:spcPct val="125000"/>
               </a:lnSpc>
@@ -26488,7 +26488,7 @@
           <a:bodyPr rtlCol="0" anchor="ctr" wrap="square" lIns="365760"/>
           <a:lstStyle/>
           <a:p>
-            <a:pPr algn="l"/>
+            <a:pPr algn="just"/>
             <a:r>
               <a:rPr sz="1500" b="1">
                 <a:solidFill>
@@ -26522,7 +26522,7 @@
           </a:bodyPr>
           <a:lstStyle/>
           <a:p>
-            <a:pPr algn="l">
+            <a:pPr algn="just">
               <a:lnSpc>
                 <a:spcPct val="125000"/>
               </a:lnSpc>
@@ -26544,7 +26544,7 @@
             </a:r>
           </a:p>
           <a:p>
-            <a:pPr algn="l">
+            <a:pPr algn="just">
               <a:lnSpc>
                 <a:spcPct val="125000"/>
               </a:lnSpc>
@@ -26566,7 +26566,7 @@
             </a:r>
           </a:p>
           <a:p>
-            <a:pPr algn="l">
+            <a:pPr algn="just">
               <a:lnSpc>
                 <a:spcPct val="125000"/>
               </a:lnSpc>
@@ -26588,7 +26588,7 @@
             </a:r>
           </a:p>
           <a:p>
-            <a:pPr algn="l">
+            <a:pPr algn="just">
               <a:lnSpc>
                 <a:spcPct val="125000"/>
               </a:lnSpc>
@@ -26610,7 +26610,7 @@
             </a:r>
           </a:p>
           <a:p>
-            <a:pPr algn="l">
+            <a:pPr algn="just">
               <a:lnSpc>
                 <a:spcPct val="125000"/>
               </a:lnSpc>
@@ -26632,7 +26632,7 @@
             </a:r>
           </a:p>
           <a:p>
-            <a:pPr algn="l">
+            <a:pPr algn="just">
               <a:lnSpc>
                 <a:spcPct val="125000"/>
               </a:lnSpc>
@@ -26654,7 +26654,7 @@
             </a:r>
           </a:p>
           <a:p>
-            <a:pPr algn="l">
+            <a:pPr algn="just">
               <a:lnSpc>
                 <a:spcPct val="125000"/>
               </a:lnSpc>
@@ -26676,7 +26676,7 @@
             </a:r>
           </a:p>
           <a:p>
-            <a:pPr algn="l">
+            <a:pPr algn="just">
               <a:lnSpc>
                 <a:spcPct val="125000"/>
               </a:lnSpc>
@@ -26698,7 +26698,7 @@
             </a:r>
           </a:p>
           <a:p>
-            <a:pPr algn="l">
+            <a:pPr algn="just">
               <a:lnSpc>
                 <a:spcPct val="125000"/>
               </a:lnSpc>
@@ -26720,7 +26720,7 @@
             </a:r>
           </a:p>
           <a:p>
-            <a:pPr algn="l">
+            <a:pPr algn="just">
               <a:lnSpc>
                 <a:spcPct val="125000"/>
               </a:lnSpc>
@@ -26742,7 +26742,7 @@
             </a:r>
           </a:p>
           <a:p>
-            <a:pPr algn="l">
+            <a:pPr algn="just">
               <a:lnSpc>
                 <a:spcPct val="125000"/>
               </a:lnSpc>
@@ -26764,7 +26764,7 @@
             </a:r>
           </a:p>
           <a:p>
-            <a:pPr algn="l">
+            <a:pPr algn="just">
               <a:lnSpc>
                 <a:spcPct val="125000"/>
               </a:lnSpc>
@@ -26786,7 +26786,7 @@
             </a:r>
           </a:p>
           <a:p>
-            <a:pPr algn="l">
+            <a:pPr algn="just">
               <a:lnSpc>
                 <a:spcPct val="125000"/>
               </a:lnSpc>
@@ -26808,7 +26808,7 @@
             </a:r>
           </a:p>
           <a:p>
-            <a:pPr algn="l">
+            <a:pPr algn="just">
               <a:lnSpc>
                 <a:spcPct val="125000"/>
               </a:lnSpc>
@@ -26830,7 +26830,7 @@
             </a:r>
           </a:p>
           <a:p>
-            <a:pPr algn="l">
+            <a:pPr algn="just">
               <a:lnSpc>
                 <a:spcPct val="125000"/>
               </a:lnSpc>
@@ -26852,7 +26852,7 @@
             </a:r>
           </a:p>
           <a:p>
-            <a:pPr algn="l">
+            <a:pPr algn="just">
               <a:lnSpc>
                 <a:spcPct val="125000"/>
               </a:lnSpc>
@@ -26874,7 +26874,7 @@
             </a:r>
           </a:p>
           <a:p>
-            <a:pPr algn="l">
+            <a:pPr algn="just">
               <a:lnSpc>
                 <a:spcPct val="125000"/>
               </a:lnSpc>
@@ -26896,7 +26896,7 @@
             </a:r>
           </a:p>
           <a:p>
-            <a:pPr algn="l">
+            <a:pPr algn="just">
               <a:lnSpc>
                 <a:spcPct val="125000"/>
               </a:lnSpc>
@@ -26918,7 +26918,7 @@
             </a:r>
           </a:p>
           <a:p>
-            <a:pPr algn="l">
+            <a:pPr algn="just">
               <a:lnSpc>
                 <a:spcPct val="125000"/>
               </a:lnSpc>
@@ -26940,7 +26940,7 @@
             </a:r>
           </a:p>
           <a:p>
-            <a:pPr algn="l">
+            <a:pPr algn="just">
               <a:lnSpc>
                 <a:spcPct val="125000"/>
               </a:lnSpc>
@@ -26962,7 +26962,7 @@
             </a:r>
           </a:p>
           <a:p>
-            <a:pPr algn="l">
+            <a:pPr algn="just">
               <a:lnSpc>
                 <a:spcPct val="125000"/>
               </a:lnSpc>
@@ -27042,7 +27042,7 @@
           <a:bodyPr rtlCol="0" anchor="ctr" wrap="square" lIns="365760"/>
           <a:lstStyle/>
           <a:p>
-            <a:pPr algn="l"/>
+            <a:pPr algn="just"/>
             <a:r>
               <a:rPr sz="1500" b="1">
                 <a:solidFill>
@@ -27076,7 +27076,7 @@
           </a:bodyPr>
           <a:lstStyle/>
           <a:p>
-            <a:pPr algn="l">
+            <a:pPr algn="just">
               <a:lnSpc>
                 <a:spcPct val="125000"/>
               </a:lnSpc>
@@ -27098,7 +27098,7 @@
             </a:r>
           </a:p>
           <a:p>
-            <a:pPr algn="l">
+            <a:pPr algn="just">
               <a:lnSpc>
                 <a:spcPct val="125000"/>
               </a:lnSpc>
@@ -27120,7 +27120,7 @@
             </a:r>
           </a:p>
           <a:p>
-            <a:pPr algn="l">
+            <a:pPr algn="just">
               <a:lnSpc>
                 <a:spcPct val="125000"/>
               </a:lnSpc>
@@ -27142,7 +27142,7 @@
             </a:r>
           </a:p>
           <a:p>
-            <a:pPr algn="l">
+            <a:pPr algn="just">
               <a:lnSpc>
                 <a:spcPct val="125000"/>
               </a:lnSpc>
@@ -27164,7 +27164,7 @@
             </a:r>
           </a:p>
           <a:p>
-            <a:pPr algn="l">
+            <a:pPr algn="just">
               <a:lnSpc>
                 <a:spcPct val="125000"/>
               </a:lnSpc>
@@ -27186,7 +27186,7 @@
             </a:r>
           </a:p>
           <a:p>
-            <a:pPr algn="l">
+            <a:pPr algn="just">
               <a:lnSpc>
                 <a:spcPct val="125000"/>
               </a:lnSpc>
@@ -27208,7 +27208,7 @@
             </a:r>
           </a:p>
           <a:p>
-            <a:pPr algn="l">
+            <a:pPr algn="just">
               <a:lnSpc>
                 <a:spcPct val="125000"/>
               </a:lnSpc>
@@ -27230,7 +27230,7 @@
             </a:r>
           </a:p>
           <a:p>
-            <a:pPr algn="l">
+            <a:pPr algn="just">
               <a:lnSpc>
                 <a:spcPct val="125000"/>
               </a:lnSpc>
@@ -27252,7 +27252,7 @@
             </a:r>
           </a:p>
           <a:p>
-            <a:pPr algn="l">
+            <a:pPr algn="just">
               <a:lnSpc>
                 <a:spcPct val="125000"/>
               </a:lnSpc>
@@ -27274,7 +27274,7 @@
             </a:r>
           </a:p>
           <a:p>
-            <a:pPr algn="l">
+            <a:pPr algn="just">
               <a:lnSpc>
                 <a:spcPct val="125000"/>
               </a:lnSpc>
@@ -27296,7 +27296,7 @@
             </a:r>
           </a:p>
           <a:p>
-            <a:pPr algn="l">
+            <a:pPr algn="just">
               <a:lnSpc>
                 <a:spcPct val="125000"/>
               </a:lnSpc>
@@ -27318,7 +27318,7 @@
             </a:r>
           </a:p>
           <a:p>
-            <a:pPr algn="l">
+            <a:pPr algn="just">
               <a:lnSpc>
                 <a:spcPct val="125000"/>
               </a:lnSpc>
@@ -27340,7 +27340,7 @@
             </a:r>
           </a:p>
           <a:p>
-            <a:pPr algn="l">
+            <a:pPr algn="just">
               <a:lnSpc>
                 <a:spcPct val="125000"/>
               </a:lnSpc>
@@ -27362,7 +27362,7 @@
             </a:r>
           </a:p>
           <a:p>
-            <a:pPr algn="l">
+            <a:pPr algn="just">
               <a:lnSpc>
                 <a:spcPct val="125000"/>
               </a:lnSpc>
@@ -27384,7 +27384,7 @@
             </a:r>
           </a:p>
           <a:p>
-            <a:pPr algn="l">
+            <a:pPr algn="just">
               <a:lnSpc>
                 <a:spcPct val="125000"/>
               </a:lnSpc>
@@ -27406,7 +27406,7 @@
             </a:r>
           </a:p>
           <a:p>
-            <a:pPr algn="l">
+            <a:pPr algn="just">
               <a:lnSpc>
                 <a:spcPct val="125000"/>
               </a:lnSpc>
@@ -27428,7 +27428,7 @@
             </a:r>
           </a:p>
           <a:p>
-            <a:pPr algn="l">
+            <a:pPr algn="just">
               <a:lnSpc>
                 <a:spcPct val="125000"/>
               </a:lnSpc>
@@ -27450,7 +27450,7 @@
             </a:r>
           </a:p>
           <a:p>
-            <a:pPr algn="l">
+            <a:pPr algn="just">
               <a:lnSpc>
                 <a:spcPct val="125000"/>
               </a:lnSpc>
@@ -27530,7 +27530,7 @@
           <a:bodyPr rtlCol="0" anchor="ctr" wrap="square" lIns="365760"/>
           <a:lstStyle/>
           <a:p>
-            <a:pPr algn="l"/>
+            <a:pPr algn="just"/>
             <a:r>
               <a:rPr sz="1500" b="1">
                 <a:solidFill>
@@ -27564,7 +27564,7 @@
           </a:bodyPr>
           <a:lstStyle/>
           <a:p>
-            <a:pPr algn="l">
+            <a:pPr algn="just">
               <a:lnSpc>
                 <a:spcPct val="125000"/>
               </a:lnSpc>
@@ -27586,7 +27586,7 @@
             </a:r>
           </a:p>
           <a:p>
-            <a:pPr algn="l">
+            <a:pPr algn="just">
               <a:lnSpc>
                 <a:spcPct val="125000"/>
               </a:lnSpc>
@@ -27608,7 +27608,7 @@
             </a:r>
           </a:p>
           <a:p>
-            <a:pPr algn="l">
+            <a:pPr algn="just">
               <a:lnSpc>
                 <a:spcPct val="125000"/>
               </a:lnSpc>
@@ -27630,7 +27630,7 @@
             </a:r>
           </a:p>
           <a:p>
-            <a:pPr algn="l">
+            <a:pPr algn="just">
               <a:lnSpc>
                 <a:spcPct val="125000"/>
               </a:lnSpc>
@@ -27652,7 +27652,7 @@
             </a:r>
           </a:p>
           <a:p>
-            <a:pPr algn="l">
+            <a:pPr algn="just">
               <a:lnSpc>
                 <a:spcPct val="125000"/>
               </a:lnSpc>
@@ -27674,7 +27674,7 @@
             </a:r>
           </a:p>
           <a:p>
-            <a:pPr algn="l">
+            <a:pPr algn="just">
               <a:lnSpc>
                 <a:spcPct val="125000"/>
               </a:lnSpc>
@@ -27696,7 +27696,7 @@
             </a:r>
           </a:p>
           <a:p>
-            <a:pPr algn="l">
+            <a:pPr algn="just">
               <a:lnSpc>
                 <a:spcPct val="125000"/>
               </a:lnSpc>
@@ -27718,7 +27718,7 @@
             </a:r>
           </a:p>
           <a:p>
-            <a:pPr algn="l">
+            <a:pPr algn="just">
               <a:lnSpc>
                 <a:spcPct val="125000"/>
               </a:lnSpc>
@@ -27740,7 +27740,7 @@
             </a:r>
           </a:p>
           <a:p>
-            <a:pPr algn="l">
+            <a:pPr algn="just">
               <a:lnSpc>
                 <a:spcPct val="125000"/>
               </a:lnSpc>
@@ -27762,7 +27762,7 @@
             </a:r>
           </a:p>
           <a:p>
-            <a:pPr algn="l">
+            <a:pPr algn="just">
               <a:lnSpc>
                 <a:spcPct val="125000"/>
               </a:lnSpc>
@@ -27784,7 +27784,7 @@
             </a:r>
           </a:p>
           <a:p>
-            <a:pPr algn="l">
+            <a:pPr algn="just">
               <a:lnSpc>
                 <a:spcPct val="125000"/>
               </a:lnSpc>
@@ -27806,7 +27806,7 @@
             </a:r>
           </a:p>
           <a:p>
-            <a:pPr algn="l">
+            <a:pPr algn="just">
               <a:lnSpc>
                 <a:spcPct val="125000"/>
               </a:lnSpc>
@@ -27828,7 +27828,7 @@
             </a:r>
           </a:p>
           <a:p>
-            <a:pPr algn="l">
+            <a:pPr algn="just">
               <a:lnSpc>
                 <a:spcPct val="125000"/>
               </a:lnSpc>
@@ -27850,7 +27850,7 @@
             </a:r>
           </a:p>
           <a:p>
-            <a:pPr algn="l">
+            <a:pPr algn="just">
               <a:lnSpc>
                 <a:spcPct val="125000"/>
               </a:lnSpc>
@@ -27872,7 +27872,7 @@
             </a:r>
           </a:p>
           <a:p>
-            <a:pPr algn="l">
+            <a:pPr algn="just">
               <a:lnSpc>
                 <a:spcPct val="125000"/>
               </a:lnSpc>
@@ -27894,7 +27894,7 @@
             </a:r>
           </a:p>
           <a:p>
-            <a:pPr algn="l">
+            <a:pPr algn="just">
               <a:lnSpc>
                 <a:spcPct val="125000"/>
               </a:lnSpc>
@@ -27916,7 +27916,7 @@
             </a:r>
           </a:p>
           <a:p>
-            <a:pPr algn="l">
+            <a:pPr algn="just">
               <a:lnSpc>
                 <a:spcPct val="125000"/>
               </a:lnSpc>
@@ -27938,7 +27938,7 @@
             </a:r>
           </a:p>
           <a:p>
-            <a:pPr algn="l">
+            <a:pPr algn="just">
               <a:lnSpc>
                 <a:spcPct val="125000"/>
               </a:lnSpc>
@@ -27960,7 +27960,7 @@
             </a:r>
           </a:p>
           <a:p>
-            <a:pPr algn="l">
+            <a:pPr algn="just">
               <a:lnSpc>
                 <a:spcPct val="125000"/>
               </a:lnSpc>
@@ -28040,7 +28040,7 @@
           <a:bodyPr rtlCol="0" anchor="ctr" wrap="square" lIns="365760"/>
           <a:lstStyle/>
           <a:p>
-            <a:pPr algn="l"/>
+            <a:pPr algn="just"/>
             <a:r>
               <a:rPr sz="1500" b="1">
                 <a:solidFill>
@@ -28074,7 +28074,7 @@
           </a:bodyPr>
           <a:lstStyle/>
           <a:p>
-            <a:pPr algn="l">
+            <a:pPr algn="just">
               <a:lnSpc>
                 <a:spcPct val="125000"/>
               </a:lnSpc>
@@ -28096,7 +28096,7 @@
             </a:r>
           </a:p>
           <a:p>
-            <a:pPr algn="l">
+            <a:pPr algn="just">
               <a:lnSpc>
                 <a:spcPct val="125000"/>
               </a:lnSpc>
@@ -28118,7 +28118,7 @@
             </a:r>
           </a:p>
           <a:p>
-            <a:pPr algn="l">
+            <a:pPr algn="just">
               <a:lnSpc>
                 <a:spcPct val="125000"/>
               </a:lnSpc>
@@ -28140,7 +28140,7 @@
             </a:r>
           </a:p>
           <a:p>
-            <a:pPr algn="l">
+            <a:pPr algn="just">
               <a:lnSpc>
                 <a:spcPct val="125000"/>
               </a:lnSpc>
@@ -28162,7 +28162,7 @@
             </a:r>
           </a:p>
           <a:p>
-            <a:pPr algn="l">
+            <a:pPr algn="just">
               <a:lnSpc>
                 <a:spcPct val="125000"/>
               </a:lnSpc>
@@ -28184,7 +28184,7 @@
             </a:r>
           </a:p>
           <a:p>
-            <a:pPr algn="l">
+            <a:pPr algn="just">
               <a:lnSpc>
                 <a:spcPct val="125000"/>
               </a:lnSpc>
@@ -28206,7 +28206,7 @@
             </a:r>
           </a:p>
           <a:p>
-            <a:pPr algn="l">
+            <a:pPr algn="just">
               <a:lnSpc>
                 <a:spcPct val="125000"/>
               </a:lnSpc>
@@ -28228,7 +28228,7 @@
             </a:r>
           </a:p>
           <a:p>
-            <a:pPr algn="l">
+            <a:pPr algn="just">
               <a:lnSpc>
                 <a:spcPct val="125000"/>
               </a:lnSpc>
@@ -28250,7 +28250,7 @@
             </a:r>
           </a:p>
           <a:p>
-            <a:pPr algn="l">
+            <a:pPr algn="just">
               <a:lnSpc>
                 <a:spcPct val="125000"/>
               </a:lnSpc>
@@ -28272,7 +28272,7 @@
             </a:r>
           </a:p>
           <a:p>
-            <a:pPr algn="l">
+            <a:pPr algn="just">
               <a:lnSpc>
                 <a:spcPct val="125000"/>
               </a:lnSpc>
@@ -28294,7 +28294,7 @@
             </a:r>
           </a:p>
           <a:p>
-            <a:pPr algn="l">
+            <a:pPr algn="just">
               <a:lnSpc>
                 <a:spcPct val="125000"/>
               </a:lnSpc>
@@ -28316,7 +28316,7 @@
             </a:r>
           </a:p>
           <a:p>
-            <a:pPr algn="l">
+            <a:pPr algn="just">
               <a:lnSpc>
                 <a:spcPct val="125000"/>
               </a:lnSpc>
@@ -28338,7 +28338,7 @@
             </a:r>
           </a:p>
           <a:p>
-            <a:pPr algn="l">
+            <a:pPr algn="just">
               <a:lnSpc>
                 <a:spcPct val="125000"/>
               </a:lnSpc>
@@ -28360,7 +28360,7 @@
             </a:r>
           </a:p>
           <a:p>
-            <a:pPr algn="l">
+            <a:pPr algn="just">
               <a:lnSpc>
                 <a:spcPct val="125000"/>
               </a:lnSpc>
@@ -28382,7 +28382,7 @@
             </a:r>
           </a:p>
           <a:p>
-            <a:pPr algn="l">
+            <a:pPr algn="just">
               <a:lnSpc>
                 <a:spcPct val="125000"/>
               </a:lnSpc>
@@ -28404,7 +28404,7 @@
             </a:r>
           </a:p>
           <a:p>
-            <a:pPr algn="l">
+            <a:pPr algn="just">
               <a:lnSpc>
                 <a:spcPct val="125000"/>
               </a:lnSpc>
@@ -28426,7 +28426,7 @@
             </a:r>
           </a:p>
           <a:p>
-            <a:pPr algn="l">
+            <a:pPr algn="just">
               <a:lnSpc>
                 <a:spcPct val="125000"/>
               </a:lnSpc>
@@ -28448,7 +28448,7 @@
             </a:r>
           </a:p>
           <a:p>
-            <a:pPr algn="l">
+            <a:pPr algn="just">
               <a:lnSpc>
                 <a:spcPct val="125000"/>
               </a:lnSpc>
@@ -28470,7 +28470,7 @@
             </a:r>
           </a:p>
           <a:p>
-            <a:pPr algn="l">
+            <a:pPr algn="just">
               <a:lnSpc>
                 <a:spcPct val="125000"/>
               </a:lnSpc>
@@ -28492,7 +28492,7 @@
             </a:r>
           </a:p>
           <a:p>
-            <a:pPr algn="l">
+            <a:pPr algn="just">
               <a:lnSpc>
                 <a:spcPct val="125000"/>
               </a:lnSpc>
@@ -28514,7 +28514,7 @@
             </a:r>
           </a:p>
           <a:p>
-            <a:pPr algn="l">
+            <a:pPr algn="just">
               <a:lnSpc>
                 <a:spcPct val="125000"/>
               </a:lnSpc>
@@ -28536,7 +28536,7 @@
             </a:r>
           </a:p>
           <a:p>
-            <a:pPr algn="l">
+            <a:pPr algn="just">
               <a:lnSpc>
                 <a:spcPct val="125000"/>
               </a:lnSpc>
@@ -28616,7 +28616,7 @@
           <a:bodyPr rtlCol="0" anchor="ctr" wrap="square" lIns="365760"/>
           <a:lstStyle/>
           <a:p>
-            <a:pPr algn="l"/>
+            <a:pPr algn="just"/>
             <a:r>
               <a:rPr sz="1500" b="1">
                 <a:solidFill>
@@ -28650,7 +28650,7 @@
           </a:bodyPr>
           <a:lstStyle/>
           <a:p>
-            <a:pPr algn="l">
+            <a:pPr algn="just">
               <a:lnSpc>
                 <a:spcPct val="125000"/>
               </a:lnSpc>
@@ -28672,7 +28672,7 @@
             </a:r>
           </a:p>
           <a:p>
-            <a:pPr algn="l">
+            <a:pPr algn="just">
               <a:lnSpc>
                 <a:spcPct val="125000"/>
               </a:lnSpc>
@@ -28694,7 +28694,7 @@
             </a:r>
           </a:p>
           <a:p>
-            <a:pPr algn="l">
+            <a:pPr algn="just">
               <a:lnSpc>
                 <a:spcPct val="125000"/>
               </a:lnSpc>
@@ -28716,7 +28716,7 @@
             </a:r>
           </a:p>
           <a:p>
-            <a:pPr algn="l">
+            <a:pPr algn="just">
               <a:lnSpc>
                 <a:spcPct val="125000"/>
               </a:lnSpc>
@@ -28738,7 +28738,7 @@
             </a:r>
           </a:p>
           <a:p>
-            <a:pPr algn="l">
+            <a:pPr algn="just">
               <a:lnSpc>
                 <a:spcPct val="125000"/>
               </a:lnSpc>
@@ -28760,7 +28760,7 @@
             </a:r>
           </a:p>
           <a:p>
-            <a:pPr algn="l">
+            <a:pPr algn="just">
               <a:lnSpc>
                 <a:spcPct val="125000"/>
               </a:lnSpc>
@@ -28782,7 +28782,7 @@
             </a:r>
           </a:p>
           <a:p>
-            <a:pPr algn="l">
+            <a:pPr algn="just">
               <a:lnSpc>
                 <a:spcPct val="125000"/>
               </a:lnSpc>
@@ -28804,7 +28804,7 @@
             </a:r>
           </a:p>
           <a:p>
-            <a:pPr algn="l">
+            <a:pPr algn="just">
               <a:lnSpc>
                 <a:spcPct val="125000"/>
               </a:lnSpc>
@@ -28826,7 +28826,7 @@
             </a:r>
           </a:p>
           <a:p>
-            <a:pPr algn="l">
+            <a:pPr algn="just">
               <a:lnSpc>
                 <a:spcPct val="125000"/>
               </a:lnSpc>
@@ -28848,7 +28848,7 @@
             </a:r>
           </a:p>
           <a:p>
-            <a:pPr algn="l">
+            <a:pPr algn="just">
               <a:lnSpc>
                 <a:spcPct val="125000"/>
               </a:lnSpc>
@@ -28870,7 +28870,7 @@
             </a:r>
           </a:p>
           <a:p>
-            <a:pPr algn="l">
+            <a:pPr algn="just">
               <a:lnSpc>
                 <a:spcPct val="125000"/>
               </a:lnSpc>
@@ -28892,7 +28892,7 @@
             </a:r>
           </a:p>
           <a:p>
-            <a:pPr algn="l">
+            <a:pPr algn="just">
               <a:lnSpc>
                 <a:spcPct val="125000"/>
               </a:lnSpc>
@@ -28914,7 +28914,7 @@
             </a:r>
           </a:p>
           <a:p>
-            <a:pPr algn="l">
+            <a:pPr algn="just">
               <a:lnSpc>
                 <a:spcPct val="125000"/>
               </a:lnSpc>
@@ -28994,7 +28994,7 @@
           <a:bodyPr rtlCol="0" anchor="ctr" wrap="square" lIns="365760"/>
           <a:lstStyle/>
           <a:p>
-            <a:pPr algn="l"/>
+            <a:pPr algn="just"/>
             <a:r>
               <a:rPr sz="1500" b="1">
                 <a:solidFill>
@@ -29028,7 +29028,7 @@
           </a:bodyPr>
           <a:lstStyle/>
           <a:p>
-            <a:pPr algn="l">
+            <a:pPr algn="just">
               <a:lnSpc>
                 <a:spcPct val="125000"/>
               </a:lnSpc>
@@ -29050,7 +29050,7 @@
             </a:r>
           </a:p>
           <a:p>
-            <a:pPr algn="l">
+            <a:pPr algn="just">
               <a:lnSpc>
                 <a:spcPct val="125000"/>
               </a:lnSpc>
@@ -29072,7 +29072,7 @@
             </a:r>
           </a:p>
           <a:p>
-            <a:pPr algn="l">
+            <a:pPr algn="just">
               <a:lnSpc>
                 <a:spcPct val="125000"/>
               </a:lnSpc>
@@ -29094,7 +29094,7 @@
             </a:r>
           </a:p>
           <a:p>
-            <a:pPr algn="l">
+            <a:pPr algn="just">
               <a:lnSpc>
                 <a:spcPct val="125000"/>
               </a:lnSpc>
@@ -29116,7 +29116,7 @@
             </a:r>
           </a:p>
           <a:p>
-            <a:pPr algn="l">
+            <a:pPr algn="just">
               <a:lnSpc>
                 <a:spcPct val="125000"/>
               </a:lnSpc>
@@ -29138,7 +29138,7 @@
             </a:r>
           </a:p>
           <a:p>
-            <a:pPr algn="l">
+            <a:pPr algn="just">
               <a:lnSpc>
                 <a:spcPct val="125000"/>
               </a:lnSpc>
@@ -29160,7 +29160,7 @@
             </a:r>
           </a:p>
           <a:p>
-            <a:pPr algn="l">
+            <a:pPr algn="just">
               <a:lnSpc>
                 <a:spcPct val="125000"/>
               </a:lnSpc>
@@ -29182,7 +29182,7 @@
             </a:r>
           </a:p>
           <a:p>
-            <a:pPr algn="l">
+            <a:pPr algn="just">
               <a:lnSpc>
                 <a:spcPct val="125000"/>
               </a:lnSpc>
@@ -29204,7 +29204,7 @@
             </a:r>
           </a:p>
           <a:p>
-            <a:pPr algn="l">
+            <a:pPr algn="just">
               <a:lnSpc>
                 <a:spcPct val="125000"/>
               </a:lnSpc>
@@ -29284,7 +29284,7 @@
           <a:bodyPr rtlCol="0" anchor="ctr" wrap="square" lIns="365760"/>
           <a:lstStyle/>
           <a:p>
-            <a:pPr algn="l"/>
+            <a:pPr algn="just"/>
             <a:r>
               <a:rPr sz="1500" b="1">
                 <a:solidFill>
@@ -29318,7 +29318,7 @@
           </a:bodyPr>
           <a:lstStyle/>
           <a:p>
-            <a:pPr algn="l">
+            <a:pPr algn="just">
               <a:lnSpc>
                 <a:spcPct val="125000"/>
               </a:lnSpc>
@@ -29340,7 +29340,7 @@
             </a:r>
           </a:p>
           <a:p>
-            <a:pPr algn="l">
+            <a:pPr algn="just">
               <a:lnSpc>
                 <a:spcPct val="125000"/>
               </a:lnSpc>
@@ -29362,7 +29362,7 @@
             </a:r>
           </a:p>
           <a:p>
-            <a:pPr algn="l">
+            <a:pPr algn="just">
               <a:lnSpc>
                 <a:spcPct val="125000"/>
               </a:lnSpc>
@@ -29384,7 +29384,7 @@
             </a:r>
           </a:p>
           <a:p>
-            <a:pPr algn="l">
+            <a:pPr algn="just">
               <a:lnSpc>
                 <a:spcPct val="125000"/>
               </a:lnSpc>
@@ -29406,7 +29406,7 @@
             </a:r>
           </a:p>
           <a:p>
-            <a:pPr algn="l">
+            <a:pPr algn="just">
               <a:lnSpc>
                 <a:spcPct val="125000"/>
               </a:lnSpc>
@@ -29428,7 +29428,7 @@
             </a:r>
           </a:p>
           <a:p>
-            <a:pPr algn="l">
+            <a:pPr algn="just">
               <a:lnSpc>
                 <a:spcPct val="125000"/>
               </a:lnSpc>
@@ -29450,7 +29450,7 @@
             </a:r>
           </a:p>
           <a:p>
-            <a:pPr algn="l">
+            <a:pPr algn="just">
               <a:lnSpc>
                 <a:spcPct val="125000"/>
               </a:lnSpc>
@@ -29472,7 +29472,7 @@
             </a:r>
           </a:p>
           <a:p>
-            <a:pPr algn="l">
+            <a:pPr algn="just">
               <a:lnSpc>
                 <a:spcPct val="125000"/>
               </a:lnSpc>
@@ -29494,7 +29494,7 @@
             </a:r>
           </a:p>
           <a:p>
-            <a:pPr algn="l">
+            <a:pPr algn="just">
               <a:lnSpc>
                 <a:spcPct val="125000"/>
               </a:lnSpc>
@@ -29516,7 +29516,7 @@
             </a:r>
           </a:p>
           <a:p>
-            <a:pPr algn="l">
+            <a:pPr algn="just">
               <a:lnSpc>
                 <a:spcPct val="125000"/>
               </a:lnSpc>
@@ -29538,7 +29538,7 @@
             </a:r>
           </a:p>
           <a:p>
-            <a:pPr algn="l">
+            <a:pPr algn="just">
               <a:lnSpc>
                 <a:spcPct val="125000"/>
               </a:lnSpc>
@@ -29560,7 +29560,7 @@
             </a:r>
           </a:p>
           <a:p>
-            <a:pPr algn="l">
+            <a:pPr algn="just">
               <a:lnSpc>
                 <a:spcPct val="125000"/>
               </a:lnSpc>
@@ -29582,7 +29582,7 @@
             </a:r>
           </a:p>
           <a:p>
-            <a:pPr algn="l">
+            <a:pPr algn="just">
               <a:lnSpc>
                 <a:spcPct val="125000"/>
               </a:lnSpc>
@@ -29604,7 +29604,7 @@
             </a:r>
           </a:p>
           <a:p>
-            <a:pPr algn="l">
+            <a:pPr algn="just">
               <a:lnSpc>
                 <a:spcPct val="125000"/>
               </a:lnSpc>
@@ -29626,7 +29626,7 @@
             </a:r>
           </a:p>
           <a:p>
-            <a:pPr algn="l">
+            <a:pPr algn="just">
               <a:lnSpc>
                 <a:spcPct val="125000"/>
               </a:lnSpc>
@@ -29648,7 +29648,7 @@
             </a:r>
           </a:p>
           <a:p>
-            <a:pPr algn="l">
+            <a:pPr algn="just">
               <a:lnSpc>
                 <a:spcPct val="125000"/>
               </a:lnSpc>
@@ -29670,7 +29670,7 @@
             </a:r>
           </a:p>
           <a:p>
-            <a:pPr algn="l">
+            <a:pPr algn="just">
               <a:lnSpc>
                 <a:spcPct val="125000"/>
               </a:lnSpc>
@@ -29692,7 +29692,7 @@
             </a:r>
           </a:p>
           <a:p>
-            <a:pPr algn="l">
+            <a:pPr algn="just">
               <a:lnSpc>
                 <a:spcPct val="125000"/>
               </a:lnSpc>
@@ -29714,7 +29714,7 @@
             </a:r>
           </a:p>
           <a:p>
-            <a:pPr algn="l">
+            <a:pPr algn="just">
               <a:lnSpc>
                 <a:spcPct val="125000"/>
               </a:lnSpc>
@@ -29794,7 +29794,7 @@
           <a:bodyPr rtlCol="0" anchor="ctr" wrap="square" lIns="365760"/>
           <a:lstStyle/>
           <a:p>
-            <a:pPr algn="l"/>
+            <a:pPr algn="just"/>
             <a:r>
               <a:rPr sz="1500" b="1">
                 <a:solidFill>
@@ -29828,7 +29828,7 @@
           </a:bodyPr>
           <a:lstStyle/>
           <a:p>
-            <a:pPr algn="l">
+            <a:pPr algn="just">
               <a:lnSpc>
                 <a:spcPct val="125000"/>
               </a:lnSpc>
@@ -29850,7 +29850,7 @@
             </a:r>
           </a:p>
           <a:p>
-            <a:pPr algn="l">
+            <a:pPr algn="just">
               <a:lnSpc>
                 <a:spcPct val="125000"/>
               </a:lnSpc>
@@ -29872,7 +29872,7 @@
             </a:r>
           </a:p>
           <a:p>
-            <a:pPr algn="l">
+            <a:pPr algn="just">
               <a:lnSpc>
                 <a:spcPct val="125000"/>
               </a:lnSpc>
@@ -29894,7 +29894,7 @@
             </a:r>
           </a:p>
           <a:p>
-            <a:pPr algn="l">
+            <a:pPr algn="just">
               <a:lnSpc>
                 <a:spcPct val="125000"/>
               </a:lnSpc>
@@ -29916,7 +29916,7 @@
             </a:r>
           </a:p>
           <a:p>
-            <a:pPr algn="l">
+            <a:pPr algn="just">
               <a:lnSpc>
                 <a:spcPct val="125000"/>
               </a:lnSpc>
@@ -29938,7 +29938,7 @@
             </a:r>
           </a:p>
           <a:p>
-            <a:pPr algn="l">
+            <a:pPr algn="just">
               <a:lnSpc>
                 <a:spcPct val="125000"/>
               </a:lnSpc>
@@ -29960,7 +29960,7 @@
             </a:r>
           </a:p>
           <a:p>
-            <a:pPr algn="l">
+            <a:pPr algn="just">
               <a:lnSpc>
                 <a:spcPct val="125000"/>
               </a:lnSpc>
@@ -29982,7 +29982,7 @@
             </a:r>
           </a:p>
           <a:p>
-            <a:pPr algn="l">
+            <a:pPr algn="just">
               <a:lnSpc>
                 <a:spcPct val="125000"/>
               </a:lnSpc>
@@ -30004,7 +30004,7 @@
             </a:r>
           </a:p>
           <a:p>
-            <a:pPr algn="l">
+            <a:pPr algn="just">
               <a:lnSpc>
                 <a:spcPct val="125000"/>
               </a:lnSpc>
@@ -30026,7 +30026,7 @@
             </a:r>
           </a:p>
           <a:p>
-            <a:pPr algn="l">
+            <a:pPr algn="just">
               <a:lnSpc>
                 <a:spcPct val="125000"/>
               </a:lnSpc>
@@ -30048,7 +30048,7 @@
             </a:r>
           </a:p>
           <a:p>
-            <a:pPr algn="l">
+            <a:pPr algn="just">
               <a:lnSpc>
                 <a:spcPct val="125000"/>
               </a:lnSpc>
@@ -30070,7 +30070,7 @@
             </a:r>
           </a:p>
           <a:p>
-            <a:pPr algn="l">
+            <a:pPr algn="just">
               <a:lnSpc>
                 <a:spcPct val="125000"/>
               </a:lnSpc>
@@ -30092,7 +30092,7 @@
             </a:r>
           </a:p>
           <a:p>
-            <a:pPr algn="l">
+            <a:pPr algn="just">
               <a:lnSpc>
                 <a:spcPct val="125000"/>
               </a:lnSpc>
@@ -30114,7 +30114,7 @@
             </a:r>
           </a:p>
           <a:p>
-            <a:pPr algn="l">
+            <a:pPr algn="just">
               <a:lnSpc>
                 <a:spcPct val="125000"/>
               </a:lnSpc>
@@ -30136,7 +30136,7 @@
             </a:r>
           </a:p>
           <a:p>
-            <a:pPr algn="l">
+            <a:pPr algn="just">
               <a:lnSpc>
                 <a:spcPct val="125000"/>
               </a:lnSpc>
@@ -30158,7 +30158,7 @@
             </a:r>
           </a:p>
           <a:p>
-            <a:pPr algn="l">
+            <a:pPr algn="just">
               <a:lnSpc>
                 <a:spcPct val="125000"/>
               </a:lnSpc>
@@ -30180,7 +30180,7 @@
             </a:r>
           </a:p>
           <a:p>
-            <a:pPr algn="l">
+            <a:pPr algn="just">
               <a:lnSpc>
                 <a:spcPct val="125000"/>
               </a:lnSpc>
@@ -30202,7 +30202,7 @@
             </a:r>
           </a:p>
           <a:p>
-            <a:pPr algn="l">
+            <a:pPr algn="just">
               <a:lnSpc>
                 <a:spcPct val="125000"/>
               </a:lnSpc>
@@ -30224,7 +30224,7 @@
             </a:r>
           </a:p>
           <a:p>
-            <a:pPr algn="l">
+            <a:pPr algn="just">
               <a:lnSpc>
                 <a:spcPct val="125000"/>
               </a:lnSpc>
@@ -30304,7 +30304,7 @@
           <a:bodyPr rtlCol="0" anchor="ctr" wrap="square" lIns="365760"/>
           <a:lstStyle/>
           <a:p>
-            <a:pPr algn="l"/>
+            <a:pPr algn="just"/>
             <a:r>
               <a:rPr sz="1500" b="1">
                 <a:solidFill>
@@ -30338,7 +30338,7 @@
           </a:bodyPr>
           <a:lstStyle/>
           <a:p>
-            <a:pPr algn="l">
+            <a:pPr algn="just">
               <a:lnSpc>
                 <a:spcPct val="125000"/>
               </a:lnSpc>
@@ -30360,7 +30360,7 @@
             </a:r>
           </a:p>
           <a:p>
-            <a:pPr algn="l">
+            <a:pPr algn="just">
               <a:lnSpc>
                 <a:spcPct val="125000"/>
               </a:lnSpc>
@@ -30382,7 +30382,7 @@
             </a:r>
           </a:p>
           <a:p>
-            <a:pPr algn="l">
+            <a:pPr algn="just">
               <a:lnSpc>
                 <a:spcPct val="125000"/>
               </a:lnSpc>
@@ -30404,7 +30404,7 @@
             </a:r>
           </a:p>
           <a:p>
-            <a:pPr algn="l">
+            <a:pPr algn="just">
               <a:lnSpc>
                 <a:spcPct val="125000"/>
               </a:lnSpc>
@@ -30426,7 +30426,7 @@
             </a:r>
           </a:p>
           <a:p>
-            <a:pPr algn="l">
+            <a:pPr algn="just">
               <a:lnSpc>
                 <a:spcPct val="125000"/>
               </a:lnSpc>
@@ -30448,7 +30448,7 @@
             </a:r>
           </a:p>
           <a:p>
-            <a:pPr algn="l">
+            <a:pPr algn="just">
               <a:lnSpc>
                 <a:spcPct val="125000"/>
               </a:lnSpc>
@@ -30470,7 +30470,7 @@
             </a:r>
           </a:p>
           <a:p>
-            <a:pPr algn="l">
+            <a:pPr algn="just">
               <a:lnSpc>
                 <a:spcPct val="125000"/>
               </a:lnSpc>
@@ -30492,7 +30492,7 @@
             </a:r>
           </a:p>
           <a:p>
-            <a:pPr algn="l">
+            <a:pPr algn="just">
               <a:lnSpc>
                 <a:spcPct val="125000"/>
               </a:lnSpc>
@@ -30514,7 +30514,7 @@
             </a:r>
           </a:p>
           <a:p>
-            <a:pPr algn="l">
+            <a:pPr algn="just">
               <a:lnSpc>
                 <a:spcPct val="125000"/>
               </a:lnSpc>
@@ -30536,7 +30536,7 @@
             </a:r>
           </a:p>
           <a:p>
-            <a:pPr algn="l">
+            <a:pPr algn="just">
               <a:lnSpc>
                 <a:spcPct val="125000"/>
               </a:lnSpc>
@@ -30616,7 +30616,7 @@
           <a:bodyPr rtlCol="0" anchor="ctr" wrap="square" lIns="365760"/>
           <a:lstStyle/>
           <a:p>
-            <a:pPr algn="l"/>
+            <a:pPr algn="just"/>
             <a:r>
               <a:rPr sz="1500" b="1">
                 <a:solidFill>
@@ -30650,7 +30650,7 @@
           </a:bodyPr>
           <a:lstStyle/>
           <a:p>
-            <a:pPr algn="l">
+            <a:pPr algn="just">
               <a:lnSpc>
                 <a:spcPct val="125000"/>
               </a:lnSpc>
@@ -30672,7 +30672,7 @@
             </a:r>
           </a:p>
           <a:p>
-            <a:pPr algn="l">
+            <a:pPr algn="just">
               <a:lnSpc>
                 <a:spcPct val="125000"/>
               </a:lnSpc>
@@ -30694,7 +30694,7 @@
             </a:r>
           </a:p>
           <a:p>
-            <a:pPr algn="l">
+            <a:pPr algn="just">
               <a:lnSpc>
                 <a:spcPct val="125000"/>
               </a:lnSpc>
@@ -30716,7 +30716,7 @@
             </a:r>
           </a:p>
           <a:p>
-            <a:pPr algn="l">
+            <a:pPr algn="just">
               <a:lnSpc>
                 <a:spcPct val="125000"/>
               </a:lnSpc>
@@ -30738,7 +30738,7 @@
             </a:r>
           </a:p>
           <a:p>
-            <a:pPr algn="l">
+            <a:pPr algn="just">
               <a:lnSpc>
                 <a:spcPct val="125000"/>
               </a:lnSpc>
@@ -30760,7 +30760,7 @@
             </a:r>
           </a:p>
           <a:p>
-            <a:pPr algn="l">
+            <a:pPr algn="just">
               <a:lnSpc>
                 <a:spcPct val="125000"/>
               </a:lnSpc>
@@ -30782,7 +30782,7 @@
             </a:r>
           </a:p>
           <a:p>
-            <a:pPr algn="l">
+            <a:pPr algn="just">
               <a:lnSpc>
                 <a:spcPct val="125000"/>
               </a:lnSpc>
@@ -30804,7 +30804,7 @@
             </a:r>
           </a:p>
           <a:p>
-            <a:pPr algn="l">
+            <a:pPr algn="just">
               <a:lnSpc>
                 <a:spcPct val="125000"/>
               </a:lnSpc>
@@ -30826,7 +30826,7 @@
             </a:r>
           </a:p>
           <a:p>
-            <a:pPr algn="l">
+            <a:pPr algn="just">
               <a:lnSpc>
                 <a:spcPct val="125000"/>
               </a:lnSpc>
@@ -30906,7 +30906,7 @@
           <a:bodyPr rtlCol="0" anchor="ctr" wrap="square" lIns="365760"/>
           <a:lstStyle/>
           <a:p>
-            <a:pPr algn="l"/>
+            <a:pPr algn="just"/>
             <a:r>
               <a:rPr sz="1500" b="1">
                 <a:solidFill>
@@ -30940,7 +30940,7 @@
           </a:bodyPr>
           <a:lstStyle/>
           <a:p>
-            <a:pPr algn="l">
+            <a:pPr algn="just">
               <a:lnSpc>
                 <a:spcPct val="125000"/>
               </a:lnSpc>
@@ -30962,7 +30962,7 @@
             </a:r>
           </a:p>
           <a:p>
-            <a:pPr algn="l">
+            <a:pPr algn="just">
               <a:lnSpc>
                 <a:spcPct val="125000"/>
               </a:lnSpc>
@@ -30984,7 +30984,7 @@
             </a:r>
           </a:p>
           <a:p>
-            <a:pPr algn="l">
+            <a:pPr algn="just">
               <a:lnSpc>
                 <a:spcPct val="125000"/>
               </a:lnSpc>
@@ -31006,7 +31006,7 @@
             </a:r>
           </a:p>
           <a:p>
-            <a:pPr algn="l">
+            <a:pPr algn="just">
               <a:lnSpc>
                 <a:spcPct val="125000"/>
               </a:lnSpc>
@@ -31028,7 +31028,7 @@
             </a:r>
           </a:p>
           <a:p>
-            <a:pPr algn="l">
+            <a:pPr algn="just">
               <a:lnSpc>
                 <a:spcPct val="125000"/>
               </a:lnSpc>
@@ -31050,7 +31050,7 @@
             </a:r>
           </a:p>
           <a:p>
-            <a:pPr algn="l">
+            <a:pPr algn="just">
               <a:lnSpc>
                 <a:spcPct val="125000"/>
               </a:lnSpc>
@@ -31072,7 +31072,7 @@
             </a:r>
           </a:p>
           <a:p>
-            <a:pPr algn="l">
+            <a:pPr algn="just">
               <a:lnSpc>
                 <a:spcPct val="125000"/>
               </a:lnSpc>
@@ -31094,7 +31094,7 @@
             </a:r>
           </a:p>
           <a:p>
-            <a:pPr algn="l">
+            <a:pPr algn="just">
               <a:lnSpc>
                 <a:spcPct val="125000"/>
               </a:lnSpc>
@@ -31116,7 +31116,7 @@
             </a:r>
           </a:p>
           <a:p>
-            <a:pPr algn="l">
+            <a:pPr algn="just">
               <a:lnSpc>
                 <a:spcPct val="125000"/>
               </a:lnSpc>
@@ -31138,7 +31138,7 @@
             </a:r>
           </a:p>
           <a:p>
-            <a:pPr algn="l">
+            <a:pPr algn="just">
               <a:lnSpc>
                 <a:spcPct val="125000"/>
               </a:lnSpc>
@@ -31218,7 +31218,7 @@
           <a:bodyPr rtlCol="0" anchor="ctr" wrap="square" lIns="365760"/>
           <a:lstStyle/>
           <a:p>
-            <a:pPr algn="l"/>
+            <a:pPr algn="just"/>
             <a:r>
               <a:rPr sz="1500" b="1">
                 <a:solidFill>
@@ -31252,7 +31252,7 @@
           </a:bodyPr>
           <a:lstStyle/>
           <a:p>
-            <a:pPr algn="l">
+            <a:pPr algn="just">
               <a:lnSpc>
                 <a:spcPct val="125000"/>
               </a:lnSpc>
@@ -31274,7 +31274,7 @@
             </a:r>
           </a:p>
           <a:p>
-            <a:pPr algn="l">
+            <a:pPr algn="just">
               <a:lnSpc>
                 <a:spcPct val="125000"/>
               </a:lnSpc>
@@ -31296,7 +31296,7 @@
             </a:r>
           </a:p>
           <a:p>
-            <a:pPr algn="l">
+            <a:pPr algn="just">
               <a:lnSpc>
                 <a:spcPct val="125000"/>
               </a:lnSpc>
@@ -31318,7 +31318,7 @@
             </a:r>
           </a:p>
           <a:p>
-            <a:pPr algn="l">
+            <a:pPr algn="just">
               <a:lnSpc>
                 <a:spcPct val="125000"/>
               </a:lnSpc>
@@ -31340,7 +31340,7 @@
             </a:r>
           </a:p>
           <a:p>
-            <a:pPr algn="l">
+            <a:pPr algn="just">
               <a:lnSpc>
                 <a:spcPct val="125000"/>
               </a:lnSpc>
@@ -31362,7 +31362,7 @@
             </a:r>
           </a:p>
           <a:p>
-            <a:pPr algn="l">
+            <a:pPr algn="just">
               <a:lnSpc>
                 <a:spcPct val="125000"/>
               </a:lnSpc>
@@ -31384,7 +31384,7 @@
             </a:r>
           </a:p>
           <a:p>
-            <a:pPr algn="l">
+            <a:pPr algn="just">
               <a:lnSpc>
                 <a:spcPct val="125000"/>
               </a:lnSpc>
@@ -31406,7 +31406,7 @@
             </a:r>
           </a:p>
           <a:p>
-            <a:pPr algn="l">
+            <a:pPr algn="just">
               <a:lnSpc>
                 <a:spcPct val="125000"/>
               </a:lnSpc>
@@ -31428,7 +31428,7 @@
             </a:r>
           </a:p>
           <a:p>
-            <a:pPr algn="l">
+            <a:pPr algn="just">
               <a:lnSpc>
                 <a:spcPct val="125000"/>
               </a:lnSpc>
@@ -31450,7 +31450,7 @@
             </a:r>
           </a:p>
           <a:p>
-            <a:pPr algn="l">
+            <a:pPr algn="just">
               <a:lnSpc>
                 <a:spcPct val="125000"/>
               </a:lnSpc>
@@ -31530,7 +31530,7 @@
           <a:bodyPr rtlCol="0" anchor="ctr" wrap="square" lIns="365760"/>
           <a:lstStyle/>
           <a:p>
-            <a:pPr algn="l"/>
+            <a:pPr algn="just"/>
             <a:r>
               <a:rPr sz="1500" b="1">
                 <a:solidFill>
@@ -31564,7 +31564,7 @@
           </a:bodyPr>
           <a:lstStyle/>
           <a:p>
-            <a:pPr algn="l">
+            <a:pPr algn="just">
               <a:lnSpc>
                 <a:spcPct val="125000"/>
               </a:lnSpc>
@@ -31586,7 +31586,7 @@
             </a:r>
           </a:p>
           <a:p>
-            <a:pPr algn="l">
+            <a:pPr algn="just">
               <a:lnSpc>
                 <a:spcPct val="125000"/>
               </a:lnSpc>
@@ -31608,7 +31608,7 @@
             </a:r>
           </a:p>
           <a:p>
-            <a:pPr algn="l">
+            <a:pPr algn="just">
               <a:lnSpc>
                 <a:spcPct val="125000"/>
               </a:lnSpc>
@@ -31630,7 +31630,7 @@
             </a:r>
           </a:p>
           <a:p>
-            <a:pPr algn="l">
+            <a:pPr algn="just">
               <a:lnSpc>
                 <a:spcPct val="125000"/>
               </a:lnSpc>
@@ -31652,7 +31652,7 @@
             </a:r>
           </a:p>
           <a:p>
-            <a:pPr algn="l">
+            <a:pPr algn="just">
               <a:lnSpc>
                 <a:spcPct val="125000"/>
               </a:lnSpc>
@@ -31674,7 +31674,7 @@
             </a:r>
           </a:p>
           <a:p>
-            <a:pPr algn="l">
+            <a:pPr algn="just">
               <a:lnSpc>
                 <a:spcPct val="125000"/>
               </a:lnSpc>
@@ -31696,7 +31696,7 @@
             </a:r>
           </a:p>
           <a:p>
-            <a:pPr algn="l">
+            <a:pPr algn="just">
               <a:lnSpc>
                 <a:spcPct val="125000"/>
               </a:lnSpc>
@@ -31718,7 +31718,7 @@
             </a:r>
           </a:p>
           <a:p>
-            <a:pPr algn="l">
+            <a:pPr algn="just">
               <a:lnSpc>
                 <a:spcPct val="125000"/>
               </a:lnSpc>
@@ -31740,7 +31740,7 @@
             </a:r>
           </a:p>
           <a:p>
-            <a:pPr algn="l">
+            <a:pPr algn="just">
               <a:lnSpc>
                 <a:spcPct val="125000"/>
               </a:lnSpc>
@@ -31762,7 +31762,7 @@
             </a:r>
           </a:p>
           <a:p>
-            <a:pPr algn="l">
+            <a:pPr algn="just">
               <a:lnSpc>
                 <a:spcPct val="125000"/>
               </a:lnSpc>
@@ -31784,7 +31784,7 @@
             </a:r>
           </a:p>
           <a:p>
-            <a:pPr algn="l">
+            <a:pPr algn="just">
               <a:lnSpc>
                 <a:spcPct val="125000"/>
               </a:lnSpc>
@@ -31806,7 +31806,7 @@
             </a:r>
           </a:p>
           <a:p>
-            <a:pPr algn="l">
+            <a:pPr algn="just">
               <a:lnSpc>
                 <a:spcPct val="125000"/>
               </a:lnSpc>
@@ -31828,7 +31828,7 @@
             </a:r>
           </a:p>
           <a:p>
-            <a:pPr algn="l">
+            <a:pPr algn="just">
               <a:lnSpc>
                 <a:spcPct val="125000"/>
               </a:lnSpc>
@@ -31908,7 +31908,7 @@
           <a:bodyPr rtlCol="0" anchor="ctr" wrap="square" lIns="365760"/>
           <a:lstStyle/>
           <a:p>
-            <a:pPr algn="l"/>
+            <a:pPr algn="just"/>
             <a:r>
               <a:rPr sz="1500" b="1">
                 <a:solidFill>
@@ -31942,7 +31942,7 @@
           </a:bodyPr>
           <a:lstStyle/>
           <a:p>
-            <a:pPr algn="l">
+            <a:pPr algn="just">
               <a:lnSpc>
                 <a:spcPct val="125000"/>
               </a:lnSpc>
@@ -31964,7 +31964,7 @@
             </a:r>
           </a:p>
           <a:p>
-            <a:pPr algn="l">
+            <a:pPr algn="just">
               <a:lnSpc>
                 <a:spcPct val="125000"/>
               </a:lnSpc>
@@ -31986,7 +31986,7 @@
             </a:r>
           </a:p>
           <a:p>
-            <a:pPr algn="l">
+            <a:pPr algn="just">
               <a:lnSpc>
                 <a:spcPct val="125000"/>
               </a:lnSpc>
@@ -32008,7 +32008,7 @@
             </a:r>
           </a:p>
           <a:p>
-            <a:pPr algn="l">
+            <a:pPr algn="just">
               <a:lnSpc>
                 <a:spcPct val="125000"/>
               </a:lnSpc>
@@ -32030,7 +32030,7 @@
             </a:r>
           </a:p>
           <a:p>
-            <a:pPr algn="l">
+            <a:pPr algn="just">
               <a:lnSpc>
                 <a:spcPct val="125000"/>
               </a:lnSpc>
@@ -32052,7 +32052,7 @@
             </a:r>
           </a:p>
           <a:p>
-            <a:pPr algn="l">
+            <a:pPr algn="just">
               <a:lnSpc>
                 <a:spcPct val="125000"/>
               </a:lnSpc>
@@ -32074,7 +32074,7 @@
             </a:r>
           </a:p>
           <a:p>
-            <a:pPr algn="l">
+            <a:pPr algn="just">
               <a:lnSpc>
                 <a:spcPct val="125000"/>
               </a:lnSpc>
@@ -32096,7 +32096,7 @@
             </a:r>
           </a:p>
           <a:p>
-            <a:pPr algn="l">
+            <a:pPr algn="just">
               <a:lnSpc>
                 <a:spcPct val="125000"/>
               </a:lnSpc>
@@ -32118,7 +32118,7 @@
             </a:r>
           </a:p>
           <a:p>
-            <a:pPr algn="l">
+            <a:pPr algn="just">
               <a:lnSpc>
                 <a:spcPct val="125000"/>
               </a:lnSpc>
@@ -32140,7 +32140,7 @@
             </a:r>
           </a:p>
           <a:p>
-            <a:pPr algn="l">
+            <a:pPr algn="just">
               <a:lnSpc>
                 <a:spcPct val="125000"/>
               </a:lnSpc>
@@ -32220,7 +32220,7 @@
           <a:bodyPr rtlCol="0" anchor="ctr" wrap="square" lIns="365760"/>
           <a:lstStyle/>
           <a:p>
-            <a:pPr algn="l"/>
+            <a:pPr algn="just"/>
             <a:r>
               <a:rPr sz="1500" b="1">
                 <a:solidFill>
@@ -32254,7 +32254,7 @@
           </a:bodyPr>
           <a:lstStyle/>
           <a:p>
-            <a:pPr algn="l">
+            <a:pPr algn="just">
               <a:lnSpc>
                 <a:spcPct val="125000"/>
               </a:lnSpc>
@@ -32276,7 +32276,7 @@
             </a:r>
           </a:p>
           <a:p>
-            <a:pPr algn="l">
+            <a:pPr algn="just">
               <a:lnSpc>
                 <a:spcPct val="125000"/>
               </a:lnSpc>
@@ -32298,7 +32298,7 @@
             </a:r>
           </a:p>
           <a:p>
-            <a:pPr algn="l">
+            <a:pPr algn="just">
               <a:lnSpc>
                 <a:spcPct val="125000"/>
               </a:lnSpc>
@@ -32320,7 +32320,7 @@
             </a:r>
           </a:p>
           <a:p>
-            <a:pPr algn="l">
+            <a:pPr algn="just">
               <a:lnSpc>
                 <a:spcPct val="125000"/>
               </a:lnSpc>
@@ -32342,7 +32342,7 @@
             </a:r>
           </a:p>
           <a:p>
-            <a:pPr algn="l">
+            <a:pPr algn="just">
               <a:lnSpc>
                 <a:spcPct val="125000"/>
               </a:lnSpc>
@@ -32364,7 +32364,7 @@
             </a:r>
           </a:p>
           <a:p>
-            <a:pPr algn="l">
+            <a:pPr algn="just">
               <a:lnSpc>
                 <a:spcPct val="125000"/>
               </a:lnSpc>
@@ -32386,7 +32386,7 @@
             </a:r>
           </a:p>
           <a:p>
-            <a:pPr algn="l">
+            <a:pPr algn="just">
               <a:lnSpc>
                 <a:spcPct val="125000"/>
               </a:lnSpc>
@@ -32408,7 +32408,7 @@
             </a:r>
           </a:p>
           <a:p>
-            <a:pPr algn="l">
+            <a:pPr algn="just">
               <a:lnSpc>
                 <a:spcPct val="125000"/>
               </a:lnSpc>
@@ -32430,7 +32430,7 @@
             </a:r>
           </a:p>
           <a:p>
-            <a:pPr algn="l">
+            <a:pPr algn="just">
               <a:lnSpc>
                 <a:spcPct val="125000"/>
               </a:lnSpc>
@@ -32452,7 +32452,7 @@
             </a:r>
           </a:p>
           <a:p>
-            <a:pPr algn="l">
+            <a:pPr algn="just">
               <a:lnSpc>
                 <a:spcPct val="125000"/>
               </a:lnSpc>
@@ -32474,7 +32474,7 @@
             </a:r>
           </a:p>
           <a:p>
-            <a:pPr algn="l">
+            <a:pPr algn="just">
               <a:lnSpc>
                 <a:spcPct val="125000"/>
               </a:lnSpc>
@@ -32496,7 +32496,7 @@
             </a:r>
           </a:p>
           <a:p>
-            <a:pPr algn="l">
+            <a:pPr algn="just">
               <a:lnSpc>
                 <a:spcPct val="125000"/>
               </a:lnSpc>
@@ -32576,7 +32576,7 @@
           <a:bodyPr rtlCol="0" anchor="ctr" wrap="square" lIns="365760"/>
           <a:lstStyle/>
           <a:p>
-            <a:pPr algn="l"/>
+            <a:pPr algn="just"/>
             <a:r>
               <a:rPr sz="1500" b="1">
                 <a:solidFill>
@@ -32610,7 +32610,7 @@
           </a:bodyPr>
           <a:lstStyle/>
           <a:p>
-            <a:pPr algn="l">
+            <a:pPr algn="just">
               <a:lnSpc>
                 <a:spcPct val="125000"/>
               </a:lnSpc>
@@ -32632,7 +32632,7 @@
             </a:r>
           </a:p>
           <a:p>
-            <a:pPr algn="l">
+            <a:pPr algn="just">
               <a:lnSpc>
                 <a:spcPct val="125000"/>
               </a:lnSpc>
@@ -32654,7 +32654,7 @@
             </a:r>
           </a:p>
           <a:p>
-            <a:pPr algn="l">
+            <a:pPr algn="just">
               <a:lnSpc>
                 <a:spcPct val="125000"/>
               </a:lnSpc>
@@ -32676,7 +32676,7 @@
             </a:r>
           </a:p>
           <a:p>
-            <a:pPr algn="l">
+            <a:pPr algn="just">
               <a:lnSpc>
                 <a:spcPct val="125000"/>
               </a:lnSpc>
@@ -32698,7 +32698,7 @@
             </a:r>
           </a:p>
           <a:p>
-            <a:pPr algn="l">
+            <a:pPr algn="just">
               <a:lnSpc>
                 <a:spcPct val="125000"/>
               </a:lnSpc>
@@ -32720,7 +32720,7 @@
             </a:r>
           </a:p>
           <a:p>
-            <a:pPr algn="l">
+            <a:pPr algn="just">
               <a:lnSpc>
                 <a:spcPct val="125000"/>
               </a:lnSpc>
@@ -32742,7 +32742,7 @@
             </a:r>
           </a:p>
           <a:p>
-            <a:pPr algn="l">
+            <a:pPr algn="just">
               <a:lnSpc>
                 <a:spcPct val="125000"/>
               </a:lnSpc>
@@ -32764,7 +32764,7 @@
             </a:r>
           </a:p>
           <a:p>
-            <a:pPr algn="l">
+            <a:pPr algn="just">
               <a:lnSpc>
                 <a:spcPct val="125000"/>
               </a:lnSpc>
@@ -32786,7 +32786,7 @@
             </a:r>
           </a:p>
           <a:p>
-            <a:pPr algn="l">
+            <a:pPr algn="just">
               <a:lnSpc>
                 <a:spcPct val="125000"/>
               </a:lnSpc>
@@ -32808,7 +32808,7 @@
             </a:r>
           </a:p>
           <a:p>
-            <a:pPr algn="l">
+            <a:pPr algn="just">
               <a:lnSpc>
                 <a:spcPct val="125000"/>
               </a:lnSpc>
@@ -32830,7 +32830,7 @@
             </a:r>
           </a:p>
           <a:p>
-            <a:pPr algn="l">
+            <a:pPr algn="just">
               <a:lnSpc>
                 <a:spcPct val="125000"/>
               </a:lnSpc>
@@ -32852,7 +32852,7 @@
             </a:r>
           </a:p>
           <a:p>
-            <a:pPr algn="l">
+            <a:pPr algn="just">
               <a:lnSpc>
                 <a:spcPct val="125000"/>
               </a:lnSpc>
@@ -32874,7 +32874,7 @@
             </a:r>
           </a:p>
           <a:p>
-            <a:pPr algn="l">
+            <a:pPr algn="just">
               <a:lnSpc>
                 <a:spcPct val="125000"/>
               </a:lnSpc>
@@ -32896,7 +32896,7 @@
             </a:r>
           </a:p>
           <a:p>
-            <a:pPr algn="l">
+            <a:pPr algn="just">
               <a:lnSpc>
                 <a:spcPct val="125000"/>
               </a:lnSpc>
@@ -32918,7 +32918,7 @@
             </a:r>
           </a:p>
           <a:p>
-            <a:pPr algn="l">
+            <a:pPr algn="just">
               <a:lnSpc>
                 <a:spcPct val="125000"/>
               </a:lnSpc>
@@ -32940,7 +32940,7 @@
             </a:r>
           </a:p>
           <a:p>
-            <a:pPr algn="l">
+            <a:pPr algn="just">
               <a:lnSpc>
                 <a:spcPct val="125000"/>
               </a:lnSpc>
@@ -32962,7 +32962,7 @@
             </a:r>
           </a:p>
           <a:p>
-            <a:pPr algn="l">
+            <a:pPr algn="just">
               <a:lnSpc>
                 <a:spcPct val="125000"/>
               </a:lnSpc>
@@ -32984,7 +32984,7 @@
             </a:r>
           </a:p>
           <a:p>
-            <a:pPr algn="l">
+            <a:pPr algn="just">
               <a:lnSpc>
                 <a:spcPct val="125000"/>
               </a:lnSpc>
@@ -33006,7 +33006,7 @@
             </a:r>
           </a:p>
           <a:p>
-            <a:pPr algn="l">
+            <a:pPr algn="just">
               <a:lnSpc>
                 <a:spcPct val="125000"/>
               </a:lnSpc>
@@ -33028,7 +33028,7 @@
             </a:r>
           </a:p>
           <a:p>
-            <a:pPr algn="l">
+            <a:pPr algn="just">
               <a:lnSpc>
                 <a:spcPct val="125000"/>
               </a:lnSpc>
@@ -33050,7 +33050,7 @@
             </a:r>
           </a:p>
           <a:p>
-            <a:pPr algn="l">
+            <a:pPr algn="just">
               <a:lnSpc>
                 <a:spcPct val="125000"/>
               </a:lnSpc>
@@ -33072,7 +33072,7 @@
             </a:r>
           </a:p>
           <a:p>
-            <a:pPr algn="l">
+            <a:pPr algn="just">
               <a:lnSpc>
                 <a:spcPct val="125000"/>
               </a:lnSpc>
@@ -33094,7 +33094,7 @@
             </a:r>
           </a:p>
           <a:p>
-            <a:pPr algn="l">
+            <a:pPr algn="just">
               <a:lnSpc>
                 <a:spcPct val="125000"/>
               </a:lnSpc>
@@ -33116,7 +33116,7 @@
             </a:r>
           </a:p>
           <a:p>
-            <a:pPr algn="l">
+            <a:pPr algn="just">
               <a:lnSpc>
                 <a:spcPct val="125000"/>
               </a:lnSpc>
@@ -33138,7 +33138,7 @@
             </a:r>
           </a:p>
           <a:p>
-            <a:pPr algn="l">
+            <a:pPr algn="just">
               <a:lnSpc>
                 <a:spcPct val="125000"/>
               </a:lnSpc>
@@ -33160,7 +33160,7 @@
             </a:r>
           </a:p>
           <a:p>
-            <a:pPr algn="l">
+            <a:pPr algn="just">
               <a:lnSpc>
                 <a:spcPct val="125000"/>
               </a:lnSpc>
@@ -33182,7 +33182,7 @@
             </a:r>
           </a:p>
           <a:p>
-            <a:pPr algn="l">
+            <a:pPr algn="just">
               <a:lnSpc>
                 <a:spcPct val="125000"/>
               </a:lnSpc>
@@ -33204,7 +33204,7 @@
             </a:r>
           </a:p>
           <a:p>
-            <a:pPr algn="l">
+            <a:pPr algn="just">
               <a:lnSpc>
                 <a:spcPct val="125000"/>
               </a:lnSpc>
@@ -33226,7 +33226,7 @@
             </a:r>
           </a:p>
           <a:p>
-            <a:pPr algn="l">
+            <a:pPr algn="just">
               <a:lnSpc>
                 <a:spcPct val="125000"/>
               </a:lnSpc>
@@ -33248,7 +33248,7 @@
             </a:r>
           </a:p>
           <a:p>
-            <a:pPr algn="l">
+            <a:pPr algn="just">
               <a:lnSpc>
                 <a:spcPct val="125000"/>
               </a:lnSpc>
@@ -33270,7 +33270,7 @@
             </a:r>
           </a:p>
           <a:p>
-            <a:pPr algn="l">
+            <a:pPr algn="just">
               <a:lnSpc>
                 <a:spcPct val="125000"/>
               </a:lnSpc>
@@ -33292,7 +33292,7 @@
             </a:r>
           </a:p>
           <a:p>
-            <a:pPr algn="l">
+            <a:pPr algn="just">
               <a:lnSpc>
                 <a:spcPct val="125000"/>
               </a:lnSpc>
@@ -33314,7 +33314,7 @@
             </a:r>
           </a:p>
           <a:p>
-            <a:pPr algn="l">
+            <a:pPr algn="just">
               <a:lnSpc>
                 <a:spcPct val="125000"/>
               </a:lnSpc>
@@ -33336,7 +33336,7 @@
             </a:r>
           </a:p>
           <a:p>
-            <a:pPr algn="l">
+            <a:pPr algn="just">
               <a:lnSpc>
                 <a:spcPct val="125000"/>
               </a:lnSpc>
@@ -33358,7 +33358,7 @@
             </a:r>
           </a:p>
           <a:p>
-            <a:pPr algn="l">
+            <a:pPr algn="just">
               <a:lnSpc>
                 <a:spcPct val="125000"/>
               </a:lnSpc>
@@ -33438,7 +33438,7 @@
           <a:bodyPr rtlCol="0" anchor="ctr" wrap="square" lIns="365760"/>
           <a:lstStyle/>
           <a:p>
-            <a:pPr algn="l"/>
+            <a:pPr algn="just"/>
             <a:r>
               <a:rPr sz="1500" b="1">
                 <a:solidFill>
@@ -33472,7 +33472,7 @@
           </a:bodyPr>
           <a:lstStyle/>
           <a:p>
-            <a:pPr algn="l">
+            <a:pPr algn="just">
               <a:lnSpc>
                 <a:spcPct val="125000"/>
               </a:lnSpc>
@@ -33494,7 +33494,7 @@
             </a:r>
           </a:p>
           <a:p>
-            <a:pPr algn="l">
+            <a:pPr algn="just">
               <a:lnSpc>
                 <a:spcPct val="125000"/>
               </a:lnSpc>
@@ -33516,7 +33516,7 @@
             </a:r>
           </a:p>
           <a:p>
-            <a:pPr algn="l">
+            <a:pPr algn="just">
               <a:lnSpc>
                 <a:spcPct val="125000"/>
               </a:lnSpc>
@@ -33538,7 +33538,7 @@
             </a:r>
           </a:p>
           <a:p>
-            <a:pPr algn="l">
+            <a:pPr algn="just">
               <a:lnSpc>
                 <a:spcPct val="125000"/>
               </a:lnSpc>
@@ -33560,7 +33560,7 @@
             </a:r>
           </a:p>
           <a:p>
-            <a:pPr algn="l">
+            <a:pPr algn="just">
               <a:lnSpc>
                 <a:spcPct val="125000"/>
               </a:lnSpc>
@@ -33582,7 +33582,7 @@
             </a:r>
           </a:p>
           <a:p>
-            <a:pPr algn="l">
+            <a:pPr algn="just">
               <a:lnSpc>
                 <a:spcPct val="125000"/>
               </a:lnSpc>
@@ -33604,7 +33604,7 @@
             </a:r>
           </a:p>
           <a:p>
-            <a:pPr algn="l">
+            <a:pPr algn="just">
               <a:lnSpc>
                 <a:spcPct val="125000"/>
               </a:lnSpc>
@@ -33626,7 +33626,7 @@
             </a:r>
           </a:p>
           <a:p>
-            <a:pPr algn="l">
+            <a:pPr algn="just">
               <a:lnSpc>
                 <a:spcPct val="125000"/>
               </a:lnSpc>
@@ -33648,7 +33648,7 @@
             </a:r>
           </a:p>
           <a:p>
-            <a:pPr algn="l">
+            <a:pPr algn="just">
               <a:lnSpc>
                 <a:spcPct val="125000"/>
               </a:lnSpc>
@@ -33670,7 +33670,7 @@
             </a:r>
           </a:p>
           <a:p>
-            <a:pPr algn="l">
+            <a:pPr algn="just">
               <a:lnSpc>
                 <a:spcPct val="125000"/>
               </a:lnSpc>
@@ -33692,7 +33692,7 @@
             </a:r>
           </a:p>
           <a:p>
-            <a:pPr algn="l">
+            <a:pPr algn="just">
               <a:lnSpc>
                 <a:spcPct val="125000"/>
               </a:lnSpc>

--- a/ppts_output_v3/02_企业所得税风险指引.pptx
+++ b/ppts_output_v3/02_企业所得税风险指引.pptx
@@ -3382,7 +3382,7 @@
           <a:p>
             <a:pPr algn="just">
               <a:lnSpc>
-                <a:spcPct val="125000"/>
+                <a:spcPct val="110000"/>
               </a:lnSpc>
               <a:spcBef>
                 <a:spcPts val="0"/>
@@ -3404,7 +3404,7 @@
           <a:p>
             <a:pPr algn="just">
               <a:lnSpc>
-                <a:spcPct val="125000"/>
+                <a:spcPct val="110000"/>
               </a:lnSpc>
               <a:spcBef>
                 <a:spcPts val="0"/>
@@ -3426,7 +3426,7 @@
           <a:p>
             <a:pPr algn="just">
               <a:lnSpc>
-                <a:spcPct val="125000"/>
+                <a:spcPct val="110000"/>
               </a:lnSpc>
               <a:spcBef>
                 <a:spcPts val="0"/>
@@ -3448,7 +3448,7 @@
           <a:p>
             <a:pPr algn="just">
               <a:lnSpc>
-                <a:spcPct val="125000"/>
+                <a:spcPct val="110000"/>
               </a:lnSpc>
               <a:spcBef>
                 <a:spcPts val="0"/>
@@ -3470,7 +3470,7 @@
           <a:p>
             <a:pPr algn="just">
               <a:lnSpc>
-                <a:spcPct val="125000"/>
+                <a:spcPct val="110000"/>
               </a:lnSpc>
               <a:spcBef>
                 <a:spcPts val="0"/>
@@ -3492,7 +3492,7 @@
           <a:p>
             <a:pPr algn="just">
               <a:lnSpc>
-                <a:spcPct val="125000"/>
+                <a:spcPct val="110000"/>
               </a:lnSpc>
               <a:spcBef>
                 <a:spcPts val="0"/>
@@ -3514,7 +3514,7 @@
           <a:p>
             <a:pPr algn="just">
               <a:lnSpc>
-                <a:spcPct val="125000"/>
+                <a:spcPct val="110000"/>
               </a:lnSpc>
               <a:spcBef>
                 <a:spcPts val="0"/>
@@ -3536,7 +3536,7 @@
           <a:p>
             <a:pPr algn="just">
               <a:lnSpc>
-                <a:spcPct val="125000"/>
+                <a:spcPct val="110000"/>
               </a:lnSpc>
               <a:spcBef>
                 <a:spcPts val="0"/>
@@ -3558,7 +3558,7 @@
           <a:p>
             <a:pPr algn="just">
               <a:lnSpc>
-                <a:spcPct val="125000"/>
+                <a:spcPct val="110000"/>
               </a:lnSpc>
               <a:spcBef>
                 <a:spcPts val="0"/>
@@ -3580,7 +3580,7 @@
           <a:p>
             <a:pPr algn="just">
               <a:lnSpc>
-                <a:spcPct val="125000"/>
+                <a:spcPct val="110000"/>
               </a:lnSpc>
               <a:spcBef>
                 <a:spcPts val="0"/>
@@ -3694,7 +3694,7 @@
           <a:p>
             <a:pPr algn="just">
               <a:lnSpc>
-                <a:spcPct val="125000"/>
+                <a:spcPct val="110000"/>
               </a:lnSpc>
               <a:spcBef>
                 <a:spcPts val="0"/>
@@ -3716,7 +3716,7 @@
           <a:p>
             <a:pPr algn="just">
               <a:lnSpc>
-                <a:spcPct val="125000"/>
+                <a:spcPct val="110000"/>
               </a:lnSpc>
               <a:spcBef>
                 <a:spcPts val="0"/>
@@ -3738,7 +3738,7 @@
           <a:p>
             <a:pPr algn="just">
               <a:lnSpc>
-                <a:spcPct val="125000"/>
+                <a:spcPct val="110000"/>
               </a:lnSpc>
               <a:spcBef>
                 <a:spcPts val="0"/>
@@ -3760,7 +3760,7 @@
           <a:p>
             <a:pPr algn="just">
               <a:lnSpc>
-                <a:spcPct val="125000"/>
+                <a:spcPct val="110000"/>
               </a:lnSpc>
               <a:spcBef>
                 <a:spcPts val="0"/>
@@ -3782,7 +3782,7 @@
           <a:p>
             <a:pPr algn="just">
               <a:lnSpc>
-                <a:spcPct val="125000"/>
+                <a:spcPct val="110000"/>
               </a:lnSpc>
               <a:spcBef>
                 <a:spcPts val="0"/>
@@ -3804,7 +3804,7 @@
           <a:p>
             <a:pPr algn="just">
               <a:lnSpc>
-                <a:spcPct val="125000"/>
+                <a:spcPct val="110000"/>
               </a:lnSpc>
               <a:spcBef>
                 <a:spcPts val="0"/>
@@ -3826,7 +3826,7 @@
           <a:p>
             <a:pPr algn="just">
               <a:lnSpc>
-                <a:spcPct val="125000"/>
+                <a:spcPct val="110000"/>
               </a:lnSpc>
               <a:spcBef>
                 <a:spcPts val="0"/>
@@ -3848,7 +3848,7 @@
           <a:p>
             <a:pPr algn="just">
               <a:lnSpc>
-                <a:spcPct val="125000"/>
+                <a:spcPct val="110000"/>
               </a:lnSpc>
               <a:spcBef>
                 <a:spcPts val="0"/>
@@ -3870,7 +3870,7 @@
           <a:p>
             <a:pPr algn="just">
               <a:lnSpc>
-                <a:spcPct val="125000"/>
+                <a:spcPct val="110000"/>
               </a:lnSpc>
               <a:spcBef>
                 <a:spcPts val="0"/>
@@ -3892,7 +3892,7 @@
           <a:p>
             <a:pPr algn="just">
               <a:lnSpc>
-                <a:spcPct val="125000"/>
+                <a:spcPct val="110000"/>
               </a:lnSpc>
               <a:spcBef>
                 <a:spcPts val="0"/>
@@ -4006,7 +4006,7 @@
           <a:p>
             <a:pPr algn="just">
               <a:lnSpc>
-                <a:spcPct val="125000"/>
+                <a:spcPct val="110000"/>
               </a:lnSpc>
               <a:spcBef>
                 <a:spcPts val="0"/>
@@ -4028,7 +4028,7 @@
           <a:p>
             <a:pPr algn="just">
               <a:lnSpc>
-                <a:spcPct val="125000"/>
+                <a:spcPct val="110000"/>
               </a:lnSpc>
               <a:spcBef>
                 <a:spcPts val="0"/>
@@ -4050,7 +4050,7 @@
           <a:p>
             <a:pPr algn="just">
               <a:lnSpc>
-                <a:spcPct val="125000"/>
+                <a:spcPct val="110000"/>
               </a:lnSpc>
               <a:spcBef>
                 <a:spcPts val="0"/>
@@ -4072,7 +4072,7 @@
           <a:p>
             <a:pPr algn="just">
               <a:lnSpc>
-                <a:spcPct val="125000"/>
+                <a:spcPct val="110000"/>
               </a:lnSpc>
               <a:spcBef>
                 <a:spcPts val="0"/>
@@ -4094,7 +4094,7 @@
           <a:p>
             <a:pPr algn="just">
               <a:lnSpc>
-                <a:spcPct val="125000"/>
+                <a:spcPct val="110000"/>
               </a:lnSpc>
               <a:spcBef>
                 <a:spcPts val="0"/>
@@ -4116,7 +4116,7 @@
           <a:p>
             <a:pPr algn="just">
               <a:lnSpc>
-                <a:spcPct val="125000"/>
+                <a:spcPct val="110000"/>
               </a:lnSpc>
               <a:spcBef>
                 <a:spcPts val="0"/>
@@ -4138,7 +4138,7 @@
           <a:p>
             <a:pPr algn="just">
               <a:lnSpc>
-                <a:spcPct val="125000"/>
+                <a:spcPct val="110000"/>
               </a:lnSpc>
               <a:spcBef>
                 <a:spcPts val="0"/>
@@ -4160,7 +4160,7 @@
           <a:p>
             <a:pPr algn="just">
               <a:lnSpc>
-                <a:spcPct val="125000"/>
+                <a:spcPct val="110000"/>
               </a:lnSpc>
               <a:spcBef>
                 <a:spcPts val="0"/>
@@ -4182,7 +4182,7 @@
           <a:p>
             <a:pPr algn="just">
               <a:lnSpc>
-                <a:spcPct val="125000"/>
+                <a:spcPct val="110000"/>
               </a:lnSpc>
               <a:spcBef>
                 <a:spcPts val="0"/>
@@ -4296,7 +4296,7 @@
           <a:p>
             <a:pPr algn="just">
               <a:lnSpc>
-                <a:spcPct val="125000"/>
+                <a:spcPct val="110000"/>
               </a:lnSpc>
               <a:spcBef>
                 <a:spcPts val="0"/>
@@ -4318,7 +4318,7 @@
           <a:p>
             <a:pPr algn="just">
               <a:lnSpc>
-                <a:spcPct val="125000"/>
+                <a:spcPct val="110000"/>
               </a:lnSpc>
               <a:spcBef>
                 <a:spcPts val="0"/>
@@ -4340,7 +4340,7 @@
           <a:p>
             <a:pPr algn="just">
               <a:lnSpc>
-                <a:spcPct val="125000"/>
+                <a:spcPct val="110000"/>
               </a:lnSpc>
               <a:spcBef>
                 <a:spcPts val="0"/>
@@ -4362,7 +4362,7 @@
           <a:p>
             <a:pPr algn="just">
               <a:lnSpc>
-                <a:spcPct val="125000"/>
+                <a:spcPct val="110000"/>
               </a:lnSpc>
               <a:spcBef>
                 <a:spcPts val="0"/>
@@ -4384,7 +4384,7 @@
           <a:p>
             <a:pPr algn="just">
               <a:lnSpc>
-                <a:spcPct val="125000"/>
+                <a:spcPct val="110000"/>
               </a:lnSpc>
               <a:spcBef>
                 <a:spcPts val="0"/>
@@ -4406,7 +4406,7 @@
           <a:p>
             <a:pPr algn="just">
               <a:lnSpc>
-                <a:spcPct val="125000"/>
+                <a:spcPct val="110000"/>
               </a:lnSpc>
               <a:spcBef>
                 <a:spcPts val="0"/>
@@ -4428,7 +4428,7 @@
           <a:p>
             <a:pPr algn="just">
               <a:lnSpc>
-                <a:spcPct val="125000"/>
+                <a:spcPct val="110000"/>
               </a:lnSpc>
               <a:spcBef>
                 <a:spcPts val="0"/>
@@ -4450,7 +4450,7 @@
           <a:p>
             <a:pPr algn="just">
               <a:lnSpc>
-                <a:spcPct val="125000"/>
+                <a:spcPct val="110000"/>
               </a:lnSpc>
               <a:spcBef>
                 <a:spcPts val="0"/>
@@ -4472,7 +4472,7 @@
           <a:p>
             <a:pPr algn="just">
               <a:lnSpc>
-                <a:spcPct val="125000"/>
+                <a:spcPct val="110000"/>
               </a:lnSpc>
               <a:spcBef>
                 <a:spcPts val="0"/>
@@ -4586,7 +4586,7 @@
           <a:p>
             <a:pPr algn="just">
               <a:lnSpc>
-                <a:spcPct val="125000"/>
+                <a:spcPct val="110000"/>
               </a:lnSpc>
               <a:spcBef>
                 <a:spcPts val="0"/>
@@ -4608,7 +4608,7 @@
           <a:p>
             <a:pPr algn="just">
               <a:lnSpc>
-                <a:spcPct val="125000"/>
+                <a:spcPct val="110000"/>
               </a:lnSpc>
               <a:spcBef>
                 <a:spcPts val="0"/>
@@ -4630,7 +4630,7 @@
           <a:p>
             <a:pPr algn="just">
               <a:lnSpc>
-                <a:spcPct val="125000"/>
+                <a:spcPct val="110000"/>
               </a:lnSpc>
               <a:spcBef>
                 <a:spcPts val="0"/>
@@ -4652,7 +4652,7 @@
           <a:p>
             <a:pPr algn="just">
               <a:lnSpc>
-                <a:spcPct val="125000"/>
+                <a:spcPct val="110000"/>
               </a:lnSpc>
               <a:spcBef>
                 <a:spcPts val="0"/>
@@ -4674,7 +4674,7 @@
           <a:p>
             <a:pPr algn="just">
               <a:lnSpc>
-                <a:spcPct val="125000"/>
+                <a:spcPct val="110000"/>
               </a:lnSpc>
               <a:spcBef>
                 <a:spcPts val="0"/>
@@ -4696,7 +4696,7 @@
           <a:p>
             <a:pPr algn="just">
               <a:lnSpc>
-                <a:spcPct val="125000"/>
+                <a:spcPct val="110000"/>
               </a:lnSpc>
               <a:spcBef>
                 <a:spcPts val="0"/>
@@ -4718,7 +4718,7 @@
           <a:p>
             <a:pPr algn="just">
               <a:lnSpc>
-                <a:spcPct val="125000"/>
+                <a:spcPct val="110000"/>
               </a:lnSpc>
               <a:spcBef>
                 <a:spcPts val="0"/>
@@ -4740,7 +4740,7 @@
           <a:p>
             <a:pPr algn="just">
               <a:lnSpc>
-                <a:spcPct val="125000"/>
+                <a:spcPct val="110000"/>
               </a:lnSpc>
               <a:spcBef>
                 <a:spcPts val="0"/>
@@ -4762,7 +4762,7 @@
           <a:p>
             <a:pPr algn="just">
               <a:lnSpc>
-                <a:spcPct val="125000"/>
+                <a:spcPct val="110000"/>
               </a:lnSpc>
               <a:spcBef>
                 <a:spcPts val="0"/>
@@ -4784,7 +4784,7 @@
           <a:p>
             <a:pPr algn="just">
               <a:lnSpc>
-                <a:spcPct val="125000"/>
+                <a:spcPct val="110000"/>
               </a:lnSpc>
               <a:spcBef>
                 <a:spcPts val="0"/>
@@ -4898,7 +4898,7 @@
           <a:p>
             <a:pPr algn="just">
               <a:lnSpc>
-                <a:spcPct val="125000"/>
+                <a:spcPct val="110000"/>
               </a:lnSpc>
               <a:spcBef>
                 <a:spcPts val="0"/>
@@ -4920,7 +4920,7 @@
           <a:p>
             <a:pPr algn="just">
               <a:lnSpc>
-                <a:spcPct val="125000"/>
+                <a:spcPct val="110000"/>
               </a:lnSpc>
               <a:spcBef>
                 <a:spcPts val="0"/>
@@ -4942,7 +4942,7 @@
           <a:p>
             <a:pPr algn="just">
               <a:lnSpc>
-                <a:spcPct val="125000"/>
+                <a:spcPct val="110000"/>
               </a:lnSpc>
               <a:spcBef>
                 <a:spcPts val="0"/>
@@ -4964,7 +4964,7 @@
           <a:p>
             <a:pPr algn="just">
               <a:lnSpc>
-                <a:spcPct val="125000"/>
+                <a:spcPct val="110000"/>
               </a:lnSpc>
               <a:spcBef>
                 <a:spcPts val="0"/>
@@ -4986,7 +4986,7 @@
           <a:p>
             <a:pPr algn="just">
               <a:lnSpc>
-                <a:spcPct val="125000"/>
+                <a:spcPct val="110000"/>
               </a:lnSpc>
               <a:spcBef>
                 <a:spcPts val="0"/>
@@ -5008,7 +5008,7 @@
           <a:p>
             <a:pPr algn="just">
               <a:lnSpc>
-                <a:spcPct val="125000"/>
+                <a:spcPct val="110000"/>
               </a:lnSpc>
               <a:spcBef>
                 <a:spcPts val="0"/>
@@ -5030,7 +5030,7 @@
           <a:p>
             <a:pPr algn="just">
               <a:lnSpc>
-                <a:spcPct val="125000"/>
+                <a:spcPct val="110000"/>
               </a:lnSpc>
               <a:spcBef>
                 <a:spcPts val="0"/>
@@ -5052,7 +5052,7 @@
           <a:p>
             <a:pPr algn="just">
               <a:lnSpc>
-                <a:spcPct val="125000"/>
+                <a:spcPct val="110000"/>
               </a:lnSpc>
               <a:spcBef>
                 <a:spcPts val="0"/>
@@ -5074,7 +5074,7 @@
           <a:p>
             <a:pPr algn="just">
               <a:lnSpc>
-                <a:spcPct val="125000"/>
+                <a:spcPct val="110000"/>
               </a:lnSpc>
               <a:spcBef>
                 <a:spcPts val="0"/>
@@ -5096,7 +5096,7 @@
           <a:p>
             <a:pPr algn="just">
               <a:lnSpc>
-                <a:spcPct val="125000"/>
+                <a:spcPct val="110000"/>
               </a:lnSpc>
               <a:spcBef>
                 <a:spcPts val="0"/>
@@ -5210,7 +5210,7 @@
           <a:p>
             <a:pPr algn="just">
               <a:lnSpc>
-                <a:spcPct val="125000"/>
+                <a:spcPct val="110000"/>
               </a:lnSpc>
               <a:spcBef>
                 <a:spcPts val="0"/>
@@ -5232,7 +5232,7 @@
           <a:p>
             <a:pPr algn="just">
               <a:lnSpc>
-                <a:spcPct val="125000"/>
+                <a:spcPct val="110000"/>
               </a:lnSpc>
               <a:spcBef>
                 <a:spcPts val="0"/>
@@ -5254,7 +5254,7 @@
           <a:p>
             <a:pPr algn="just">
               <a:lnSpc>
-                <a:spcPct val="125000"/>
+                <a:spcPct val="110000"/>
               </a:lnSpc>
               <a:spcBef>
                 <a:spcPts val="0"/>
@@ -5276,7 +5276,7 @@
           <a:p>
             <a:pPr algn="just">
               <a:lnSpc>
-                <a:spcPct val="125000"/>
+                <a:spcPct val="110000"/>
               </a:lnSpc>
               <a:spcBef>
                 <a:spcPts val="0"/>
@@ -5298,7 +5298,7 @@
           <a:p>
             <a:pPr algn="just">
               <a:lnSpc>
-                <a:spcPct val="125000"/>
+                <a:spcPct val="110000"/>
               </a:lnSpc>
               <a:spcBef>
                 <a:spcPts val="0"/>
@@ -5320,7 +5320,7 @@
           <a:p>
             <a:pPr algn="just">
               <a:lnSpc>
-                <a:spcPct val="125000"/>
+                <a:spcPct val="110000"/>
               </a:lnSpc>
               <a:spcBef>
                 <a:spcPts val="0"/>
@@ -5342,7 +5342,7 @@
           <a:p>
             <a:pPr algn="just">
               <a:lnSpc>
-                <a:spcPct val="125000"/>
+                <a:spcPct val="110000"/>
               </a:lnSpc>
               <a:spcBef>
                 <a:spcPts val="0"/>
@@ -5364,7 +5364,7 @@
           <a:p>
             <a:pPr algn="just">
               <a:lnSpc>
-                <a:spcPct val="125000"/>
+                <a:spcPct val="110000"/>
               </a:lnSpc>
               <a:spcBef>
                 <a:spcPts val="0"/>
@@ -5386,7 +5386,7 @@
           <a:p>
             <a:pPr algn="just">
               <a:lnSpc>
-                <a:spcPct val="125000"/>
+                <a:spcPct val="110000"/>
               </a:lnSpc>
               <a:spcBef>
                 <a:spcPts val="0"/>
@@ -5500,7 +5500,7 @@
           <a:p>
             <a:pPr algn="just">
               <a:lnSpc>
-                <a:spcPct val="125000"/>
+                <a:spcPct val="110000"/>
               </a:lnSpc>
               <a:spcBef>
                 <a:spcPts val="0"/>
@@ -5522,7 +5522,7 @@
           <a:p>
             <a:pPr algn="just">
               <a:lnSpc>
-                <a:spcPct val="125000"/>
+                <a:spcPct val="110000"/>
               </a:lnSpc>
               <a:spcBef>
                 <a:spcPts val="0"/>
@@ -5544,7 +5544,7 @@
           <a:p>
             <a:pPr algn="just">
               <a:lnSpc>
-                <a:spcPct val="125000"/>
+                <a:spcPct val="110000"/>
               </a:lnSpc>
               <a:spcBef>
                 <a:spcPts val="0"/>
@@ -5566,7 +5566,7 @@
           <a:p>
             <a:pPr algn="just">
               <a:lnSpc>
-                <a:spcPct val="125000"/>
+                <a:spcPct val="110000"/>
               </a:lnSpc>
               <a:spcBef>
                 <a:spcPts val="0"/>
@@ -5588,7 +5588,7 @@
           <a:p>
             <a:pPr algn="just">
               <a:lnSpc>
-                <a:spcPct val="125000"/>
+                <a:spcPct val="110000"/>
               </a:lnSpc>
               <a:spcBef>
                 <a:spcPts val="0"/>
@@ -5610,7 +5610,7 @@
           <a:p>
             <a:pPr algn="just">
               <a:lnSpc>
-                <a:spcPct val="125000"/>
+                <a:spcPct val="110000"/>
               </a:lnSpc>
               <a:spcBef>
                 <a:spcPts val="0"/>
@@ -5632,7 +5632,7 @@
           <a:p>
             <a:pPr algn="just">
               <a:lnSpc>
-                <a:spcPct val="125000"/>
+                <a:spcPct val="110000"/>
               </a:lnSpc>
               <a:spcBef>
                 <a:spcPts val="0"/>
@@ -5654,7 +5654,7 @@
           <a:p>
             <a:pPr algn="just">
               <a:lnSpc>
-                <a:spcPct val="125000"/>
+                <a:spcPct val="110000"/>
               </a:lnSpc>
               <a:spcBef>
                 <a:spcPts val="0"/>
@@ -5676,7 +5676,7 @@
           <a:p>
             <a:pPr algn="just">
               <a:lnSpc>
-                <a:spcPct val="125000"/>
+                <a:spcPct val="110000"/>
               </a:lnSpc>
               <a:spcBef>
                 <a:spcPts val="0"/>
@@ -5790,7 +5790,7 @@
           <a:p>
             <a:pPr algn="just">
               <a:lnSpc>
-                <a:spcPct val="125000"/>
+                <a:spcPct val="110000"/>
               </a:lnSpc>
               <a:spcBef>
                 <a:spcPts val="0"/>
@@ -5812,7 +5812,7 @@
           <a:p>
             <a:pPr algn="just">
               <a:lnSpc>
-                <a:spcPct val="125000"/>
+                <a:spcPct val="110000"/>
               </a:lnSpc>
               <a:spcBef>
                 <a:spcPts val="0"/>
@@ -5834,7 +5834,7 @@
           <a:p>
             <a:pPr algn="just">
               <a:lnSpc>
-                <a:spcPct val="125000"/>
+                <a:spcPct val="110000"/>
               </a:lnSpc>
               <a:spcBef>
                 <a:spcPts val="0"/>
@@ -5856,7 +5856,7 @@
           <a:p>
             <a:pPr algn="just">
               <a:lnSpc>
-                <a:spcPct val="125000"/>
+                <a:spcPct val="110000"/>
               </a:lnSpc>
               <a:spcBef>
                 <a:spcPts val="0"/>
@@ -5878,7 +5878,7 @@
           <a:p>
             <a:pPr algn="just">
               <a:lnSpc>
-                <a:spcPct val="125000"/>
+                <a:spcPct val="110000"/>
               </a:lnSpc>
               <a:spcBef>
                 <a:spcPts val="0"/>
@@ -5900,7 +5900,7 @@
           <a:p>
             <a:pPr algn="just">
               <a:lnSpc>
-                <a:spcPct val="125000"/>
+                <a:spcPct val="110000"/>
               </a:lnSpc>
               <a:spcBef>
                 <a:spcPts val="0"/>
@@ -5922,7 +5922,7 @@
           <a:p>
             <a:pPr algn="just">
               <a:lnSpc>
-                <a:spcPct val="125000"/>
+                <a:spcPct val="110000"/>
               </a:lnSpc>
               <a:spcBef>
                 <a:spcPts val="0"/>
@@ -5944,7 +5944,7 @@
           <a:p>
             <a:pPr algn="just">
               <a:lnSpc>
-                <a:spcPct val="125000"/>
+                <a:spcPct val="110000"/>
               </a:lnSpc>
               <a:spcBef>
                 <a:spcPts val="0"/>
@@ -5966,7 +5966,7 @@
           <a:p>
             <a:pPr algn="just">
               <a:lnSpc>
-                <a:spcPct val="125000"/>
+                <a:spcPct val="110000"/>
               </a:lnSpc>
               <a:spcBef>
                 <a:spcPts val="0"/>
@@ -6080,7 +6080,7 @@
           <a:p>
             <a:pPr algn="just">
               <a:lnSpc>
-                <a:spcPct val="125000"/>
+                <a:spcPct val="110000"/>
               </a:lnSpc>
               <a:spcBef>
                 <a:spcPts val="0"/>
@@ -6102,7 +6102,7 @@
           <a:p>
             <a:pPr algn="just">
               <a:lnSpc>
-                <a:spcPct val="125000"/>
+                <a:spcPct val="110000"/>
               </a:lnSpc>
               <a:spcBef>
                 <a:spcPts val="0"/>
@@ -6124,7 +6124,7 @@
           <a:p>
             <a:pPr algn="just">
               <a:lnSpc>
-                <a:spcPct val="125000"/>
+                <a:spcPct val="110000"/>
               </a:lnSpc>
               <a:spcBef>
                 <a:spcPts val="0"/>
@@ -6146,7 +6146,7 @@
           <a:p>
             <a:pPr algn="just">
               <a:lnSpc>
-                <a:spcPct val="125000"/>
+                <a:spcPct val="110000"/>
               </a:lnSpc>
               <a:spcBef>
                 <a:spcPts val="0"/>
@@ -6168,7 +6168,7 @@
           <a:p>
             <a:pPr algn="just">
               <a:lnSpc>
-                <a:spcPct val="125000"/>
+                <a:spcPct val="110000"/>
               </a:lnSpc>
               <a:spcBef>
                 <a:spcPts val="0"/>
@@ -6190,7 +6190,7 @@
           <a:p>
             <a:pPr algn="just">
               <a:lnSpc>
-                <a:spcPct val="125000"/>
+                <a:spcPct val="110000"/>
               </a:lnSpc>
               <a:spcBef>
                 <a:spcPts val="0"/>
@@ -6212,7 +6212,7 @@
           <a:p>
             <a:pPr algn="just">
               <a:lnSpc>
-                <a:spcPct val="125000"/>
+                <a:spcPct val="110000"/>
               </a:lnSpc>
               <a:spcBef>
                 <a:spcPts val="0"/>
@@ -6234,7 +6234,7 @@
           <a:p>
             <a:pPr algn="just">
               <a:lnSpc>
-                <a:spcPct val="125000"/>
+                <a:spcPct val="110000"/>
               </a:lnSpc>
               <a:spcBef>
                 <a:spcPts val="0"/>
@@ -6256,7 +6256,7 @@
           <a:p>
             <a:pPr algn="just">
               <a:lnSpc>
-                <a:spcPct val="125000"/>
+                <a:spcPct val="110000"/>
               </a:lnSpc>
               <a:spcBef>
                 <a:spcPts val="0"/>
@@ -6278,7 +6278,7 @@
           <a:p>
             <a:pPr algn="just">
               <a:lnSpc>
-                <a:spcPct val="125000"/>
+                <a:spcPct val="110000"/>
               </a:lnSpc>
               <a:spcBef>
                 <a:spcPts val="0"/>
@@ -6300,7 +6300,7 @@
           <a:p>
             <a:pPr algn="just">
               <a:lnSpc>
-                <a:spcPct val="125000"/>
+                <a:spcPct val="110000"/>
               </a:lnSpc>
               <a:spcBef>
                 <a:spcPts val="0"/>
@@ -6322,7 +6322,7 @@
           <a:p>
             <a:pPr algn="just">
               <a:lnSpc>
-                <a:spcPct val="125000"/>
+                <a:spcPct val="110000"/>
               </a:lnSpc>
               <a:spcBef>
                 <a:spcPts val="0"/>
@@ -6344,7 +6344,7 @@
           <a:p>
             <a:pPr algn="just">
               <a:lnSpc>
-                <a:spcPct val="125000"/>
+                <a:spcPct val="110000"/>
               </a:lnSpc>
               <a:spcBef>
                 <a:spcPts val="0"/>
@@ -6366,7 +6366,7 @@
           <a:p>
             <a:pPr algn="just">
               <a:lnSpc>
-                <a:spcPct val="125000"/>
+                <a:spcPct val="110000"/>
               </a:lnSpc>
               <a:spcBef>
                 <a:spcPts val="0"/>
@@ -6388,7 +6388,7 @@
           <a:p>
             <a:pPr algn="just">
               <a:lnSpc>
-                <a:spcPct val="125000"/>
+                <a:spcPct val="110000"/>
               </a:lnSpc>
               <a:spcBef>
                 <a:spcPts val="0"/>
@@ -6410,7 +6410,7 @@
           <a:p>
             <a:pPr algn="just">
               <a:lnSpc>
-                <a:spcPct val="125000"/>
+                <a:spcPct val="110000"/>
               </a:lnSpc>
               <a:spcBef>
                 <a:spcPts val="0"/>
@@ -6432,7 +6432,7 @@
           <a:p>
             <a:pPr algn="just">
               <a:lnSpc>
-                <a:spcPct val="125000"/>
+                <a:spcPct val="110000"/>
               </a:lnSpc>
               <a:spcBef>
                 <a:spcPts val="0"/>
@@ -6546,7 +6546,7 @@
           <a:p>
             <a:pPr algn="just">
               <a:lnSpc>
-                <a:spcPct val="125000"/>
+                <a:spcPct val="110000"/>
               </a:lnSpc>
               <a:spcBef>
                 <a:spcPts val="0"/>
@@ -6568,7 +6568,7 @@
           <a:p>
             <a:pPr algn="just">
               <a:lnSpc>
-                <a:spcPct val="125000"/>
+                <a:spcPct val="110000"/>
               </a:lnSpc>
               <a:spcBef>
                 <a:spcPts val="0"/>
@@ -6590,7 +6590,7 @@
           <a:p>
             <a:pPr algn="just">
               <a:lnSpc>
-                <a:spcPct val="125000"/>
+                <a:spcPct val="110000"/>
               </a:lnSpc>
               <a:spcBef>
                 <a:spcPts val="0"/>
@@ -6612,7 +6612,7 @@
           <a:p>
             <a:pPr algn="just">
               <a:lnSpc>
-                <a:spcPct val="125000"/>
+                <a:spcPct val="110000"/>
               </a:lnSpc>
               <a:spcBef>
                 <a:spcPts val="0"/>
@@ -6634,7 +6634,7 @@
           <a:p>
             <a:pPr algn="just">
               <a:lnSpc>
-                <a:spcPct val="125000"/>
+                <a:spcPct val="110000"/>
               </a:lnSpc>
               <a:spcBef>
                 <a:spcPts val="0"/>
@@ -6656,7 +6656,7 @@
           <a:p>
             <a:pPr algn="just">
               <a:lnSpc>
-                <a:spcPct val="125000"/>
+                <a:spcPct val="110000"/>
               </a:lnSpc>
               <a:spcBef>
                 <a:spcPts val="0"/>
@@ -6678,7 +6678,7 @@
           <a:p>
             <a:pPr algn="just">
               <a:lnSpc>
-                <a:spcPct val="125000"/>
+                <a:spcPct val="110000"/>
               </a:lnSpc>
               <a:spcBef>
                 <a:spcPts val="0"/>
@@ -6700,7 +6700,7 @@
           <a:p>
             <a:pPr algn="just">
               <a:lnSpc>
-                <a:spcPct val="125000"/>
+                <a:spcPct val="110000"/>
               </a:lnSpc>
               <a:spcBef>
                 <a:spcPts val="0"/>
@@ -6722,7 +6722,7 @@
           <a:p>
             <a:pPr algn="just">
               <a:lnSpc>
-                <a:spcPct val="125000"/>
+                <a:spcPct val="110000"/>
               </a:lnSpc>
               <a:spcBef>
                 <a:spcPts val="0"/>
@@ -6836,7 +6836,7 @@
           <a:p>
             <a:pPr algn="just">
               <a:lnSpc>
-                <a:spcPct val="125000"/>
+                <a:spcPct val="110000"/>
               </a:lnSpc>
               <a:spcBef>
                 <a:spcPts val="0"/>
@@ -6858,7 +6858,7 @@
           <a:p>
             <a:pPr algn="just">
               <a:lnSpc>
-                <a:spcPct val="125000"/>
+                <a:spcPct val="110000"/>
               </a:lnSpc>
               <a:spcBef>
                 <a:spcPts val="0"/>
@@ -6880,7 +6880,7 @@
           <a:p>
             <a:pPr algn="just">
               <a:lnSpc>
-                <a:spcPct val="125000"/>
+                <a:spcPct val="110000"/>
               </a:lnSpc>
               <a:spcBef>
                 <a:spcPts val="0"/>
@@ -6902,7 +6902,7 @@
           <a:p>
             <a:pPr algn="just">
               <a:lnSpc>
-                <a:spcPct val="125000"/>
+                <a:spcPct val="110000"/>
               </a:lnSpc>
               <a:spcBef>
                 <a:spcPts val="0"/>
@@ -6924,7 +6924,7 @@
           <a:p>
             <a:pPr algn="just">
               <a:lnSpc>
-                <a:spcPct val="125000"/>
+                <a:spcPct val="110000"/>
               </a:lnSpc>
               <a:spcBef>
                 <a:spcPts val="0"/>
@@ -6946,7 +6946,7 @@
           <a:p>
             <a:pPr algn="just">
               <a:lnSpc>
-                <a:spcPct val="125000"/>
+                <a:spcPct val="110000"/>
               </a:lnSpc>
               <a:spcBef>
                 <a:spcPts val="0"/>
@@ -6968,7 +6968,7 @@
           <a:p>
             <a:pPr algn="just">
               <a:lnSpc>
-                <a:spcPct val="125000"/>
+                <a:spcPct val="110000"/>
               </a:lnSpc>
               <a:spcBef>
                 <a:spcPts val="0"/>
@@ -6990,7 +6990,7 @@
           <a:p>
             <a:pPr algn="just">
               <a:lnSpc>
-                <a:spcPct val="125000"/>
+                <a:spcPct val="110000"/>
               </a:lnSpc>
               <a:spcBef>
                 <a:spcPts val="0"/>
@@ -7012,7 +7012,7 @@
           <a:p>
             <a:pPr algn="just">
               <a:lnSpc>
-                <a:spcPct val="125000"/>
+                <a:spcPct val="110000"/>
               </a:lnSpc>
               <a:spcBef>
                 <a:spcPts val="0"/>
@@ -7034,7 +7034,7 @@
           <a:p>
             <a:pPr algn="just">
               <a:lnSpc>
-                <a:spcPct val="125000"/>
+                <a:spcPct val="110000"/>
               </a:lnSpc>
               <a:spcBef>
                 <a:spcPts val="0"/>
@@ -7148,7 +7148,7 @@
           <a:p>
             <a:pPr algn="just">
               <a:lnSpc>
-                <a:spcPct val="125000"/>
+                <a:spcPct val="110000"/>
               </a:lnSpc>
               <a:spcBef>
                 <a:spcPts val="0"/>
@@ -7170,7 +7170,7 @@
           <a:p>
             <a:pPr algn="just">
               <a:lnSpc>
-                <a:spcPct val="125000"/>
+                <a:spcPct val="110000"/>
               </a:lnSpc>
               <a:spcBef>
                 <a:spcPts val="0"/>
@@ -7192,7 +7192,7 @@
           <a:p>
             <a:pPr algn="just">
               <a:lnSpc>
-                <a:spcPct val="125000"/>
+                <a:spcPct val="110000"/>
               </a:lnSpc>
               <a:spcBef>
                 <a:spcPts val="0"/>
@@ -7214,7 +7214,7 @@
           <a:p>
             <a:pPr algn="just">
               <a:lnSpc>
-                <a:spcPct val="125000"/>
+                <a:spcPct val="110000"/>
               </a:lnSpc>
               <a:spcBef>
                 <a:spcPts val="0"/>
@@ -7236,7 +7236,7 @@
           <a:p>
             <a:pPr algn="just">
               <a:lnSpc>
-                <a:spcPct val="125000"/>
+                <a:spcPct val="110000"/>
               </a:lnSpc>
               <a:spcBef>
                 <a:spcPts val="0"/>
@@ -7258,7 +7258,7 @@
           <a:p>
             <a:pPr algn="just">
               <a:lnSpc>
-                <a:spcPct val="125000"/>
+                <a:spcPct val="110000"/>
               </a:lnSpc>
               <a:spcBef>
                 <a:spcPts val="0"/>
@@ -7280,7 +7280,7 @@
           <a:p>
             <a:pPr algn="just">
               <a:lnSpc>
-                <a:spcPct val="125000"/>
+                <a:spcPct val="110000"/>
               </a:lnSpc>
               <a:spcBef>
                 <a:spcPts val="0"/>
@@ -7302,7 +7302,7 @@
           <a:p>
             <a:pPr algn="just">
               <a:lnSpc>
-                <a:spcPct val="125000"/>
+                <a:spcPct val="110000"/>
               </a:lnSpc>
               <a:spcBef>
                 <a:spcPts val="0"/>
@@ -7324,7 +7324,7 @@
           <a:p>
             <a:pPr algn="just">
               <a:lnSpc>
-                <a:spcPct val="125000"/>
+                <a:spcPct val="110000"/>
               </a:lnSpc>
               <a:spcBef>
                 <a:spcPts val="0"/>
@@ -7346,7 +7346,7 @@
           <a:p>
             <a:pPr algn="just">
               <a:lnSpc>
-                <a:spcPct val="125000"/>
+                <a:spcPct val="110000"/>
               </a:lnSpc>
               <a:spcBef>
                 <a:spcPts val="0"/>
@@ -7460,7 +7460,7 @@
           <a:p>
             <a:pPr algn="just">
               <a:lnSpc>
-                <a:spcPct val="125000"/>
+                <a:spcPct val="110000"/>
               </a:lnSpc>
               <a:spcBef>
                 <a:spcPts val="0"/>
@@ -7482,7 +7482,7 @@
           <a:p>
             <a:pPr algn="just">
               <a:lnSpc>
-                <a:spcPct val="125000"/>
+                <a:spcPct val="110000"/>
               </a:lnSpc>
               <a:spcBef>
                 <a:spcPts val="0"/>
@@ -7504,7 +7504,7 @@
           <a:p>
             <a:pPr algn="just">
               <a:lnSpc>
-                <a:spcPct val="125000"/>
+                <a:spcPct val="110000"/>
               </a:lnSpc>
               <a:spcBef>
                 <a:spcPts val="0"/>
@@ -7526,7 +7526,7 @@
           <a:p>
             <a:pPr algn="just">
               <a:lnSpc>
-                <a:spcPct val="125000"/>
+                <a:spcPct val="110000"/>
               </a:lnSpc>
               <a:spcBef>
                 <a:spcPts val="0"/>
@@ -7548,7 +7548,7 @@
           <a:p>
             <a:pPr algn="just">
               <a:lnSpc>
-                <a:spcPct val="125000"/>
+                <a:spcPct val="110000"/>
               </a:lnSpc>
               <a:spcBef>
                 <a:spcPts val="0"/>
@@ -7570,7 +7570,7 @@
           <a:p>
             <a:pPr algn="just">
               <a:lnSpc>
-                <a:spcPct val="125000"/>
+                <a:spcPct val="110000"/>
               </a:lnSpc>
               <a:spcBef>
                 <a:spcPts val="0"/>
@@ -7592,7 +7592,7 @@
           <a:p>
             <a:pPr algn="just">
               <a:lnSpc>
-                <a:spcPct val="125000"/>
+                <a:spcPct val="110000"/>
               </a:lnSpc>
               <a:spcBef>
                 <a:spcPts val="0"/>
@@ -7614,7 +7614,7 @@
           <a:p>
             <a:pPr algn="just">
               <a:lnSpc>
-                <a:spcPct val="125000"/>
+                <a:spcPct val="110000"/>
               </a:lnSpc>
               <a:spcBef>
                 <a:spcPts val="0"/>
@@ -7636,7 +7636,7 @@
           <a:p>
             <a:pPr algn="just">
               <a:lnSpc>
-                <a:spcPct val="125000"/>
+                <a:spcPct val="110000"/>
               </a:lnSpc>
               <a:spcBef>
                 <a:spcPts val="0"/>
@@ -7750,7 +7750,7 @@
           <a:p>
             <a:pPr algn="just">
               <a:lnSpc>
-                <a:spcPct val="125000"/>
+                <a:spcPct val="110000"/>
               </a:lnSpc>
               <a:spcBef>
                 <a:spcPts val="0"/>
@@ -7772,7 +7772,7 @@
           <a:p>
             <a:pPr algn="just">
               <a:lnSpc>
-                <a:spcPct val="125000"/>
+                <a:spcPct val="110000"/>
               </a:lnSpc>
               <a:spcBef>
                 <a:spcPts val="0"/>
@@ -7794,7 +7794,7 @@
           <a:p>
             <a:pPr algn="just">
               <a:lnSpc>
-                <a:spcPct val="125000"/>
+                <a:spcPct val="110000"/>
               </a:lnSpc>
               <a:spcBef>
                 <a:spcPts val="0"/>
@@ -7816,7 +7816,7 @@
           <a:p>
             <a:pPr algn="just">
               <a:lnSpc>
-                <a:spcPct val="125000"/>
+                <a:spcPct val="110000"/>
               </a:lnSpc>
               <a:spcBef>
                 <a:spcPts val="0"/>
@@ -7838,7 +7838,7 @@
           <a:p>
             <a:pPr algn="just">
               <a:lnSpc>
-                <a:spcPct val="125000"/>
+                <a:spcPct val="110000"/>
               </a:lnSpc>
               <a:spcBef>
                 <a:spcPts val="0"/>
@@ -7860,7 +7860,7 @@
           <a:p>
             <a:pPr algn="just">
               <a:lnSpc>
-                <a:spcPct val="125000"/>
+                <a:spcPct val="110000"/>
               </a:lnSpc>
               <a:spcBef>
                 <a:spcPts val="0"/>
@@ -7882,7 +7882,7 @@
           <a:p>
             <a:pPr algn="just">
               <a:lnSpc>
-                <a:spcPct val="125000"/>
+                <a:spcPct val="110000"/>
               </a:lnSpc>
               <a:spcBef>
                 <a:spcPts val="0"/>
@@ -7904,7 +7904,7 @@
           <a:p>
             <a:pPr algn="just">
               <a:lnSpc>
-                <a:spcPct val="125000"/>
+                <a:spcPct val="110000"/>
               </a:lnSpc>
               <a:spcBef>
                 <a:spcPts val="0"/>
@@ -7926,7 +7926,7 @@
           <a:p>
             <a:pPr algn="just">
               <a:lnSpc>
-                <a:spcPct val="125000"/>
+                <a:spcPct val="110000"/>
               </a:lnSpc>
               <a:spcBef>
                 <a:spcPts val="0"/>
@@ -8040,7 +8040,7 @@
           <a:p>
             <a:pPr algn="just">
               <a:lnSpc>
-                <a:spcPct val="125000"/>
+                <a:spcPct val="110000"/>
               </a:lnSpc>
               <a:spcBef>
                 <a:spcPts val="0"/>
@@ -8062,7 +8062,7 @@
           <a:p>
             <a:pPr algn="just">
               <a:lnSpc>
-                <a:spcPct val="125000"/>
+                <a:spcPct val="110000"/>
               </a:lnSpc>
               <a:spcBef>
                 <a:spcPts val="0"/>
@@ -8084,7 +8084,7 @@
           <a:p>
             <a:pPr algn="just">
               <a:lnSpc>
-                <a:spcPct val="125000"/>
+                <a:spcPct val="110000"/>
               </a:lnSpc>
               <a:spcBef>
                 <a:spcPts val="0"/>
@@ -8106,7 +8106,7 @@
           <a:p>
             <a:pPr algn="just">
               <a:lnSpc>
-                <a:spcPct val="125000"/>
+                <a:spcPct val="110000"/>
               </a:lnSpc>
               <a:spcBef>
                 <a:spcPts val="0"/>
@@ -8128,7 +8128,7 @@
           <a:p>
             <a:pPr algn="just">
               <a:lnSpc>
-                <a:spcPct val="125000"/>
+                <a:spcPct val="110000"/>
               </a:lnSpc>
               <a:spcBef>
                 <a:spcPts val="0"/>
@@ -8150,7 +8150,7 @@
           <a:p>
             <a:pPr algn="just">
               <a:lnSpc>
-                <a:spcPct val="125000"/>
+                <a:spcPct val="110000"/>
               </a:lnSpc>
               <a:spcBef>
                 <a:spcPts val="0"/>
@@ -8172,7 +8172,7 @@
           <a:p>
             <a:pPr algn="just">
               <a:lnSpc>
-                <a:spcPct val="125000"/>
+                <a:spcPct val="110000"/>
               </a:lnSpc>
               <a:spcBef>
                 <a:spcPts val="0"/>
@@ -8194,7 +8194,7 @@
           <a:p>
             <a:pPr algn="just">
               <a:lnSpc>
-                <a:spcPct val="125000"/>
+                <a:spcPct val="110000"/>
               </a:lnSpc>
               <a:spcBef>
                 <a:spcPts val="0"/>
@@ -8216,7 +8216,7 @@
           <a:p>
             <a:pPr algn="just">
               <a:lnSpc>
-                <a:spcPct val="125000"/>
+                <a:spcPct val="110000"/>
               </a:lnSpc>
               <a:spcBef>
                 <a:spcPts val="0"/>
@@ -8330,7 +8330,7 @@
           <a:p>
             <a:pPr algn="just">
               <a:lnSpc>
-                <a:spcPct val="125000"/>
+                <a:spcPct val="110000"/>
               </a:lnSpc>
               <a:spcBef>
                 <a:spcPts val="0"/>
@@ -8352,7 +8352,7 @@
           <a:p>
             <a:pPr algn="just">
               <a:lnSpc>
-                <a:spcPct val="125000"/>
+                <a:spcPct val="110000"/>
               </a:lnSpc>
               <a:spcBef>
                 <a:spcPts val="0"/>
@@ -8374,7 +8374,7 @@
           <a:p>
             <a:pPr algn="just">
               <a:lnSpc>
-                <a:spcPct val="125000"/>
+                <a:spcPct val="110000"/>
               </a:lnSpc>
               <a:spcBef>
                 <a:spcPts val="0"/>
@@ -8396,7 +8396,7 @@
           <a:p>
             <a:pPr algn="just">
               <a:lnSpc>
-                <a:spcPct val="125000"/>
+                <a:spcPct val="110000"/>
               </a:lnSpc>
               <a:spcBef>
                 <a:spcPts val="0"/>
@@ -8418,7 +8418,7 @@
           <a:p>
             <a:pPr algn="just">
               <a:lnSpc>
-                <a:spcPct val="125000"/>
+                <a:spcPct val="110000"/>
               </a:lnSpc>
               <a:spcBef>
                 <a:spcPts val="0"/>
@@ -8440,7 +8440,7 @@
           <a:p>
             <a:pPr algn="just">
               <a:lnSpc>
-                <a:spcPct val="125000"/>
+                <a:spcPct val="110000"/>
               </a:lnSpc>
               <a:spcBef>
                 <a:spcPts val="0"/>
@@ -8462,7 +8462,7 @@
           <a:p>
             <a:pPr algn="just">
               <a:lnSpc>
-                <a:spcPct val="125000"/>
+                <a:spcPct val="110000"/>
               </a:lnSpc>
               <a:spcBef>
                 <a:spcPts val="0"/>
@@ -8484,7 +8484,7 @@
           <a:p>
             <a:pPr algn="just">
               <a:lnSpc>
-                <a:spcPct val="125000"/>
+                <a:spcPct val="110000"/>
               </a:lnSpc>
               <a:spcBef>
                 <a:spcPts val="0"/>
@@ -8506,7 +8506,7 @@
           <a:p>
             <a:pPr algn="just">
               <a:lnSpc>
-                <a:spcPct val="125000"/>
+                <a:spcPct val="110000"/>
               </a:lnSpc>
               <a:spcBef>
                 <a:spcPts val="0"/>
@@ -8620,7 +8620,7 @@
           <a:p>
             <a:pPr algn="just">
               <a:lnSpc>
-                <a:spcPct val="125000"/>
+                <a:spcPct val="110000"/>
               </a:lnSpc>
               <a:spcBef>
                 <a:spcPts val="0"/>
@@ -8642,7 +8642,7 @@
           <a:p>
             <a:pPr algn="just">
               <a:lnSpc>
-                <a:spcPct val="125000"/>
+                <a:spcPct val="110000"/>
               </a:lnSpc>
               <a:spcBef>
                 <a:spcPts val="0"/>
@@ -8664,7 +8664,7 @@
           <a:p>
             <a:pPr algn="just">
               <a:lnSpc>
-                <a:spcPct val="125000"/>
+                <a:spcPct val="110000"/>
               </a:lnSpc>
               <a:spcBef>
                 <a:spcPts val="0"/>
@@ -8686,7 +8686,7 @@
           <a:p>
             <a:pPr algn="just">
               <a:lnSpc>
-                <a:spcPct val="125000"/>
+                <a:spcPct val="110000"/>
               </a:lnSpc>
               <a:spcBef>
                 <a:spcPts val="0"/>
@@ -8708,7 +8708,7 @@
           <a:p>
             <a:pPr algn="just">
               <a:lnSpc>
-                <a:spcPct val="125000"/>
+                <a:spcPct val="110000"/>
               </a:lnSpc>
               <a:spcBef>
                 <a:spcPts val="0"/>
@@ -8730,7 +8730,7 @@
           <a:p>
             <a:pPr algn="just">
               <a:lnSpc>
-                <a:spcPct val="125000"/>
+                <a:spcPct val="110000"/>
               </a:lnSpc>
               <a:spcBef>
                 <a:spcPts val="0"/>
@@ -8752,7 +8752,7 @@
           <a:p>
             <a:pPr algn="just">
               <a:lnSpc>
-                <a:spcPct val="125000"/>
+                <a:spcPct val="110000"/>
               </a:lnSpc>
               <a:spcBef>
                 <a:spcPts val="0"/>
@@ -8774,7 +8774,7 @@
           <a:p>
             <a:pPr algn="just">
               <a:lnSpc>
-                <a:spcPct val="125000"/>
+                <a:spcPct val="110000"/>
               </a:lnSpc>
               <a:spcBef>
                 <a:spcPts val="0"/>
@@ -8796,7 +8796,7 @@
           <a:p>
             <a:pPr algn="just">
               <a:lnSpc>
-                <a:spcPct val="125000"/>
+                <a:spcPct val="110000"/>
               </a:lnSpc>
               <a:spcBef>
                 <a:spcPts val="0"/>
@@ -8818,7 +8818,7 @@
           <a:p>
             <a:pPr algn="just">
               <a:lnSpc>
-                <a:spcPct val="125000"/>
+                <a:spcPct val="110000"/>
               </a:lnSpc>
               <a:spcBef>
                 <a:spcPts val="0"/>
@@ -8840,7 +8840,7 @@
           <a:p>
             <a:pPr algn="just">
               <a:lnSpc>
-                <a:spcPct val="125000"/>
+                <a:spcPct val="110000"/>
               </a:lnSpc>
               <a:spcBef>
                 <a:spcPts val="0"/>
@@ -8954,7 +8954,7 @@
           <a:p>
             <a:pPr algn="just">
               <a:lnSpc>
-                <a:spcPct val="125000"/>
+                <a:spcPct val="110000"/>
               </a:lnSpc>
               <a:spcBef>
                 <a:spcPts val="0"/>
@@ -8976,7 +8976,7 @@
           <a:p>
             <a:pPr algn="just">
               <a:lnSpc>
-                <a:spcPct val="125000"/>
+                <a:spcPct val="110000"/>
               </a:lnSpc>
               <a:spcBef>
                 <a:spcPts val="0"/>
@@ -8998,7 +8998,7 @@
           <a:p>
             <a:pPr algn="just">
               <a:lnSpc>
-                <a:spcPct val="125000"/>
+                <a:spcPct val="110000"/>
               </a:lnSpc>
               <a:spcBef>
                 <a:spcPts val="0"/>
@@ -9020,7 +9020,7 @@
           <a:p>
             <a:pPr algn="just">
               <a:lnSpc>
-                <a:spcPct val="125000"/>
+                <a:spcPct val="110000"/>
               </a:lnSpc>
               <a:spcBef>
                 <a:spcPts val="0"/>
@@ -9042,7 +9042,7 @@
           <a:p>
             <a:pPr algn="just">
               <a:lnSpc>
-                <a:spcPct val="125000"/>
+                <a:spcPct val="110000"/>
               </a:lnSpc>
               <a:spcBef>
                 <a:spcPts val="0"/>
@@ -9064,7 +9064,7 @@
           <a:p>
             <a:pPr algn="just">
               <a:lnSpc>
-                <a:spcPct val="125000"/>
+                <a:spcPct val="110000"/>
               </a:lnSpc>
               <a:spcBef>
                 <a:spcPts val="0"/>
@@ -9086,7 +9086,7 @@
           <a:p>
             <a:pPr algn="just">
               <a:lnSpc>
-                <a:spcPct val="125000"/>
+                <a:spcPct val="110000"/>
               </a:lnSpc>
               <a:spcBef>
                 <a:spcPts val="0"/>
@@ -9108,7 +9108,7 @@
           <a:p>
             <a:pPr algn="just">
               <a:lnSpc>
-                <a:spcPct val="125000"/>
+                <a:spcPct val="110000"/>
               </a:lnSpc>
               <a:spcBef>
                 <a:spcPts val="0"/>
@@ -9130,7 +9130,7 @@
           <a:p>
             <a:pPr algn="just">
               <a:lnSpc>
-                <a:spcPct val="125000"/>
+                <a:spcPct val="110000"/>
               </a:lnSpc>
               <a:spcBef>
                 <a:spcPts val="0"/>
@@ -9152,7 +9152,7 @@
           <a:p>
             <a:pPr algn="just">
               <a:lnSpc>
-                <a:spcPct val="125000"/>
+                <a:spcPct val="110000"/>
               </a:lnSpc>
               <a:spcBef>
                 <a:spcPts val="0"/>
@@ -9266,7 +9266,7 @@
           <a:p>
             <a:pPr algn="just">
               <a:lnSpc>
-                <a:spcPct val="125000"/>
+                <a:spcPct val="110000"/>
               </a:lnSpc>
               <a:spcBef>
                 <a:spcPts val="0"/>
@@ -9288,7 +9288,7 @@
           <a:p>
             <a:pPr algn="just">
               <a:lnSpc>
-                <a:spcPct val="125000"/>
+                <a:spcPct val="110000"/>
               </a:lnSpc>
               <a:spcBef>
                 <a:spcPts val="0"/>
@@ -9310,7 +9310,7 @@
           <a:p>
             <a:pPr algn="just">
               <a:lnSpc>
-                <a:spcPct val="125000"/>
+                <a:spcPct val="110000"/>
               </a:lnSpc>
               <a:spcBef>
                 <a:spcPts val="0"/>
@@ -9332,7 +9332,7 @@
           <a:p>
             <a:pPr algn="just">
               <a:lnSpc>
-                <a:spcPct val="125000"/>
+                <a:spcPct val="110000"/>
               </a:lnSpc>
               <a:spcBef>
                 <a:spcPts val="0"/>
@@ -9354,7 +9354,7 @@
           <a:p>
             <a:pPr algn="just">
               <a:lnSpc>
-                <a:spcPct val="125000"/>
+                <a:spcPct val="110000"/>
               </a:lnSpc>
               <a:spcBef>
                 <a:spcPts val="0"/>
@@ -9376,7 +9376,7 @@
           <a:p>
             <a:pPr algn="just">
               <a:lnSpc>
-                <a:spcPct val="125000"/>
+                <a:spcPct val="110000"/>
               </a:lnSpc>
               <a:spcBef>
                 <a:spcPts val="0"/>
@@ -9398,7 +9398,7 @@
           <a:p>
             <a:pPr algn="just">
               <a:lnSpc>
-                <a:spcPct val="125000"/>
+                <a:spcPct val="110000"/>
               </a:lnSpc>
               <a:spcBef>
                 <a:spcPts val="0"/>
@@ -9420,7 +9420,7 @@
           <a:p>
             <a:pPr algn="just">
               <a:lnSpc>
-                <a:spcPct val="125000"/>
+                <a:spcPct val="110000"/>
               </a:lnSpc>
               <a:spcBef>
                 <a:spcPts val="0"/>
@@ -9442,7 +9442,7 @@
           <a:p>
             <a:pPr algn="just">
               <a:lnSpc>
-                <a:spcPct val="125000"/>
+                <a:spcPct val="110000"/>
               </a:lnSpc>
               <a:spcBef>
                 <a:spcPts val="0"/>
@@ -9556,7 +9556,7 @@
           <a:p>
             <a:pPr algn="just">
               <a:lnSpc>
-                <a:spcPct val="125000"/>
+                <a:spcPct val="110000"/>
               </a:lnSpc>
               <a:spcBef>
                 <a:spcPts val="0"/>
@@ -9578,7 +9578,7 @@
           <a:p>
             <a:pPr algn="just">
               <a:lnSpc>
-                <a:spcPct val="125000"/>
+                <a:spcPct val="110000"/>
               </a:lnSpc>
               <a:spcBef>
                 <a:spcPts val="0"/>
@@ -9600,7 +9600,7 @@
           <a:p>
             <a:pPr algn="just">
               <a:lnSpc>
-                <a:spcPct val="125000"/>
+                <a:spcPct val="110000"/>
               </a:lnSpc>
               <a:spcBef>
                 <a:spcPts val="0"/>
@@ -9622,7 +9622,7 @@
           <a:p>
             <a:pPr algn="just">
               <a:lnSpc>
-                <a:spcPct val="125000"/>
+                <a:spcPct val="110000"/>
               </a:lnSpc>
               <a:spcBef>
                 <a:spcPts val="0"/>
@@ -9644,7 +9644,7 @@
           <a:p>
             <a:pPr algn="just">
               <a:lnSpc>
-                <a:spcPct val="125000"/>
+                <a:spcPct val="110000"/>
               </a:lnSpc>
               <a:spcBef>
                 <a:spcPts val="0"/>
@@ -9666,7 +9666,7 @@
           <a:p>
             <a:pPr algn="just">
               <a:lnSpc>
-                <a:spcPct val="125000"/>
+                <a:spcPct val="110000"/>
               </a:lnSpc>
               <a:spcBef>
                 <a:spcPts val="0"/>
@@ -9688,7 +9688,7 @@
           <a:p>
             <a:pPr algn="just">
               <a:lnSpc>
-                <a:spcPct val="125000"/>
+                <a:spcPct val="110000"/>
               </a:lnSpc>
               <a:spcBef>
                 <a:spcPts val="0"/>
@@ -9710,7 +9710,7 @@
           <a:p>
             <a:pPr algn="just">
               <a:lnSpc>
-                <a:spcPct val="125000"/>
+                <a:spcPct val="110000"/>
               </a:lnSpc>
               <a:spcBef>
                 <a:spcPts val="0"/>
@@ -9732,7 +9732,7 @@
           <a:p>
             <a:pPr algn="just">
               <a:lnSpc>
-                <a:spcPct val="125000"/>
+                <a:spcPct val="110000"/>
               </a:lnSpc>
               <a:spcBef>
                 <a:spcPts val="0"/>
@@ -9846,7 +9846,7 @@
           <a:p>
             <a:pPr algn="just">
               <a:lnSpc>
-                <a:spcPct val="125000"/>
+                <a:spcPct val="110000"/>
               </a:lnSpc>
               <a:spcBef>
                 <a:spcPts val="0"/>
@@ -9868,7 +9868,7 @@
           <a:p>
             <a:pPr algn="just">
               <a:lnSpc>
-                <a:spcPct val="125000"/>
+                <a:spcPct val="110000"/>
               </a:lnSpc>
               <a:spcBef>
                 <a:spcPts val="0"/>
@@ -9890,7 +9890,7 @@
           <a:p>
             <a:pPr algn="just">
               <a:lnSpc>
-                <a:spcPct val="125000"/>
+                <a:spcPct val="110000"/>
               </a:lnSpc>
               <a:spcBef>
                 <a:spcPts val="0"/>
@@ -9912,7 +9912,7 @@
           <a:p>
             <a:pPr algn="just">
               <a:lnSpc>
-                <a:spcPct val="125000"/>
+                <a:spcPct val="110000"/>
               </a:lnSpc>
               <a:spcBef>
                 <a:spcPts val="0"/>
@@ -9934,7 +9934,7 @@
           <a:p>
             <a:pPr algn="just">
               <a:lnSpc>
-                <a:spcPct val="125000"/>
+                <a:spcPct val="110000"/>
               </a:lnSpc>
               <a:spcBef>
                 <a:spcPts val="0"/>
@@ -9956,7 +9956,7 @@
           <a:p>
             <a:pPr algn="just">
               <a:lnSpc>
-                <a:spcPct val="125000"/>
+                <a:spcPct val="110000"/>
               </a:lnSpc>
               <a:spcBef>
                 <a:spcPts val="0"/>
@@ -9978,7 +9978,7 @@
           <a:p>
             <a:pPr algn="just">
               <a:lnSpc>
-                <a:spcPct val="125000"/>
+                <a:spcPct val="110000"/>
               </a:lnSpc>
               <a:spcBef>
                 <a:spcPts val="0"/>
@@ -10000,7 +10000,7 @@
           <a:p>
             <a:pPr algn="just">
               <a:lnSpc>
-                <a:spcPct val="125000"/>
+                <a:spcPct val="110000"/>
               </a:lnSpc>
               <a:spcBef>
                 <a:spcPts val="0"/>
@@ -10022,7 +10022,7 @@
           <a:p>
             <a:pPr algn="just">
               <a:lnSpc>
-                <a:spcPct val="125000"/>
+                <a:spcPct val="110000"/>
               </a:lnSpc>
               <a:spcBef>
                 <a:spcPts val="0"/>
@@ -10136,7 +10136,7 @@
           <a:p>
             <a:pPr algn="just">
               <a:lnSpc>
-                <a:spcPct val="125000"/>
+                <a:spcPct val="110000"/>
               </a:lnSpc>
               <a:spcBef>
                 <a:spcPts val="0"/>
@@ -10158,7 +10158,7 @@
           <a:p>
             <a:pPr algn="just">
               <a:lnSpc>
-                <a:spcPct val="125000"/>
+                <a:spcPct val="110000"/>
               </a:lnSpc>
               <a:spcBef>
                 <a:spcPts val="0"/>
@@ -10180,7 +10180,7 @@
           <a:p>
             <a:pPr algn="just">
               <a:lnSpc>
-                <a:spcPct val="125000"/>
+                <a:spcPct val="110000"/>
               </a:lnSpc>
               <a:spcBef>
                 <a:spcPts val="0"/>
@@ -10202,7 +10202,7 @@
           <a:p>
             <a:pPr algn="just">
               <a:lnSpc>
-                <a:spcPct val="125000"/>
+                <a:spcPct val="110000"/>
               </a:lnSpc>
               <a:spcBef>
                 <a:spcPts val="0"/>
@@ -10224,7 +10224,7 @@
           <a:p>
             <a:pPr algn="just">
               <a:lnSpc>
-                <a:spcPct val="125000"/>
+                <a:spcPct val="110000"/>
               </a:lnSpc>
               <a:spcBef>
                 <a:spcPts val="0"/>
@@ -10246,7 +10246,7 @@
           <a:p>
             <a:pPr algn="just">
               <a:lnSpc>
-                <a:spcPct val="125000"/>
+                <a:spcPct val="110000"/>
               </a:lnSpc>
               <a:spcBef>
                 <a:spcPts val="0"/>
@@ -10268,7 +10268,7 @@
           <a:p>
             <a:pPr algn="just">
               <a:lnSpc>
-                <a:spcPct val="125000"/>
+                <a:spcPct val="110000"/>
               </a:lnSpc>
               <a:spcBef>
                 <a:spcPts val="0"/>
@@ -10290,7 +10290,7 @@
           <a:p>
             <a:pPr algn="just">
               <a:lnSpc>
-                <a:spcPct val="125000"/>
+                <a:spcPct val="110000"/>
               </a:lnSpc>
               <a:spcBef>
                 <a:spcPts val="0"/>
@@ -10312,7 +10312,7 @@
           <a:p>
             <a:pPr algn="just">
               <a:lnSpc>
-                <a:spcPct val="125000"/>
+                <a:spcPct val="110000"/>
               </a:lnSpc>
               <a:spcBef>
                 <a:spcPts val="0"/>
@@ -10426,7 +10426,7 @@
           <a:p>
             <a:pPr algn="just">
               <a:lnSpc>
-                <a:spcPct val="125000"/>
+                <a:spcPct val="110000"/>
               </a:lnSpc>
               <a:spcBef>
                 <a:spcPts val="0"/>
@@ -10448,7 +10448,7 @@
           <a:p>
             <a:pPr algn="just">
               <a:lnSpc>
-                <a:spcPct val="125000"/>
+                <a:spcPct val="110000"/>
               </a:lnSpc>
               <a:spcBef>
                 <a:spcPts val="0"/>
@@ -10470,7 +10470,7 @@
           <a:p>
             <a:pPr algn="just">
               <a:lnSpc>
-                <a:spcPct val="125000"/>
+                <a:spcPct val="110000"/>
               </a:lnSpc>
               <a:spcBef>
                 <a:spcPts val="0"/>
@@ -10492,7 +10492,7 @@
           <a:p>
             <a:pPr algn="just">
               <a:lnSpc>
-                <a:spcPct val="125000"/>
+                <a:spcPct val="110000"/>
               </a:lnSpc>
               <a:spcBef>
                 <a:spcPts val="0"/>
@@ -10514,7 +10514,7 @@
           <a:p>
             <a:pPr algn="just">
               <a:lnSpc>
-                <a:spcPct val="125000"/>
+                <a:spcPct val="110000"/>
               </a:lnSpc>
               <a:spcBef>
                 <a:spcPts val="0"/>
@@ -10536,7 +10536,7 @@
           <a:p>
             <a:pPr algn="just">
               <a:lnSpc>
-                <a:spcPct val="125000"/>
+                <a:spcPct val="110000"/>
               </a:lnSpc>
               <a:spcBef>
                 <a:spcPts val="0"/>
@@ -10558,7 +10558,7 @@
           <a:p>
             <a:pPr algn="just">
               <a:lnSpc>
-                <a:spcPct val="125000"/>
+                <a:spcPct val="110000"/>
               </a:lnSpc>
               <a:spcBef>
                 <a:spcPts val="0"/>
@@ -10580,7 +10580,7 @@
           <a:p>
             <a:pPr algn="just">
               <a:lnSpc>
-                <a:spcPct val="125000"/>
+                <a:spcPct val="110000"/>
               </a:lnSpc>
               <a:spcBef>
                 <a:spcPts val="0"/>
@@ -10602,7 +10602,7 @@
           <a:p>
             <a:pPr algn="just">
               <a:lnSpc>
-                <a:spcPct val="125000"/>
+                <a:spcPct val="110000"/>
               </a:lnSpc>
               <a:spcBef>
                 <a:spcPts val="0"/>
@@ -10624,7 +10624,7 @@
           <a:p>
             <a:pPr algn="just">
               <a:lnSpc>
-                <a:spcPct val="125000"/>
+                <a:spcPct val="110000"/>
               </a:lnSpc>
               <a:spcBef>
                 <a:spcPts val="0"/>
@@ -10646,7 +10646,7 @@
           <a:p>
             <a:pPr algn="just">
               <a:lnSpc>
-                <a:spcPct val="125000"/>
+                <a:spcPct val="110000"/>
               </a:lnSpc>
               <a:spcBef>
                 <a:spcPts val="0"/>
@@ -10668,7 +10668,7 @@
           <a:p>
             <a:pPr algn="just">
               <a:lnSpc>
-                <a:spcPct val="125000"/>
+                <a:spcPct val="110000"/>
               </a:lnSpc>
               <a:spcBef>
                 <a:spcPts val="0"/>
@@ -10782,7 +10782,7 @@
           <a:p>
             <a:pPr algn="just">
               <a:lnSpc>
-                <a:spcPct val="125000"/>
+                <a:spcPct val="110000"/>
               </a:lnSpc>
               <a:spcBef>
                 <a:spcPts val="0"/>
@@ -10804,7 +10804,7 @@
           <a:p>
             <a:pPr algn="just">
               <a:lnSpc>
-                <a:spcPct val="125000"/>
+                <a:spcPct val="110000"/>
               </a:lnSpc>
               <a:spcBef>
                 <a:spcPts val="0"/>
@@ -10826,7 +10826,7 @@
           <a:p>
             <a:pPr algn="just">
               <a:lnSpc>
-                <a:spcPct val="125000"/>
+                <a:spcPct val="110000"/>
               </a:lnSpc>
               <a:spcBef>
                 <a:spcPts val="0"/>
@@ -10848,7 +10848,7 @@
           <a:p>
             <a:pPr algn="just">
               <a:lnSpc>
-                <a:spcPct val="125000"/>
+                <a:spcPct val="110000"/>
               </a:lnSpc>
               <a:spcBef>
                 <a:spcPts val="0"/>
@@ -10870,7 +10870,7 @@
           <a:p>
             <a:pPr algn="just">
               <a:lnSpc>
-                <a:spcPct val="125000"/>
+                <a:spcPct val="110000"/>
               </a:lnSpc>
               <a:spcBef>
                 <a:spcPts val="0"/>
@@ -10892,7 +10892,7 @@
           <a:p>
             <a:pPr algn="just">
               <a:lnSpc>
-                <a:spcPct val="125000"/>
+                <a:spcPct val="110000"/>
               </a:lnSpc>
               <a:spcBef>
                 <a:spcPts val="0"/>
@@ -10914,7 +10914,7 @@
           <a:p>
             <a:pPr algn="just">
               <a:lnSpc>
-                <a:spcPct val="125000"/>
+                <a:spcPct val="110000"/>
               </a:lnSpc>
               <a:spcBef>
                 <a:spcPts val="0"/>
@@ -10936,7 +10936,7 @@
           <a:p>
             <a:pPr algn="just">
               <a:lnSpc>
-                <a:spcPct val="125000"/>
+                <a:spcPct val="110000"/>
               </a:lnSpc>
               <a:spcBef>
                 <a:spcPts val="0"/>
@@ -10958,7 +10958,7 @@
           <a:p>
             <a:pPr algn="just">
               <a:lnSpc>
-                <a:spcPct val="125000"/>
+                <a:spcPct val="110000"/>
               </a:lnSpc>
               <a:spcBef>
                 <a:spcPts val="0"/>
@@ -10980,7 +10980,7 @@
           <a:p>
             <a:pPr algn="just">
               <a:lnSpc>
-                <a:spcPct val="125000"/>
+                <a:spcPct val="110000"/>
               </a:lnSpc>
               <a:spcBef>
                 <a:spcPts val="0"/>
@@ -11002,7 +11002,7 @@
           <a:p>
             <a:pPr algn="just">
               <a:lnSpc>
-                <a:spcPct val="125000"/>
+                <a:spcPct val="110000"/>
               </a:lnSpc>
               <a:spcBef>
                 <a:spcPts val="0"/>
@@ -11116,7 +11116,7 @@
           <a:p>
             <a:pPr algn="just">
               <a:lnSpc>
-                <a:spcPct val="125000"/>
+                <a:spcPct val="110000"/>
               </a:lnSpc>
               <a:spcBef>
                 <a:spcPts val="0"/>
@@ -11138,7 +11138,7 @@
           <a:p>
             <a:pPr algn="just">
               <a:lnSpc>
-                <a:spcPct val="125000"/>
+                <a:spcPct val="110000"/>
               </a:lnSpc>
               <a:spcBef>
                 <a:spcPts val="0"/>
@@ -11160,7 +11160,7 @@
           <a:p>
             <a:pPr algn="just">
               <a:lnSpc>
-                <a:spcPct val="125000"/>
+                <a:spcPct val="110000"/>
               </a:lnSpc>
               <a:spcBef>
                 <a:spcPts val="0"/>
@@ -11182,7 +11182,7 @@
           <a:p>
             <a:pPr algn="just">
               <a:lnSpc>
-                <a:spcPct val="125000"/>
+                <a:spcPct val="110000"/>
               </a:lnSpc>
               <a:spcBef>
                 <a:spcPts val="0"/>
@@ -11204,7 +11204,7 @@
           <a:p>
             <a:pPr algn="just">
               <a:lnSpc>
-                <a:spcPct val="125000"/>
+                <a:spcPct val="110000"/>
               </a:lnSpc>
               <a:spcBef>
                 <a:spcPts val="0"/>
@@ -11226,7 +11226,7 @@
           <a:p>
             <a:pPr algn="just">
               <a:lnSpc>
-                <a:spcPct val="125000"/>
+                <a:spcPct val="110000"/>
               </a:lnSpc>
               <a:spcBef>
                 <a:spcPts val="0"/>
@@ -11248,7 +11248,7 @@
           <a:p>
             <a:pPr algn="just">
               <a:lnSpc>
-                <a:spcPct val="125000"/>
+                <a:spcPct val="110000"/>
               </a:lnSpc>
               <a:spcBef>
                 <a:spcPts val="0"/>
@@ -11270,7 +11270,7 @@
           <a:p>
             <a:pPr algn="just">
               <a:lnSpc>
-                <a:spcPct val="125000"/>
+                <a:spcPct val="110000"/>
               </a:lnSpc>
               <a:spcBef>
                 <a:spcPts val="0"/>
@@ -11292,7 +11292,7 @@
           <a:p>
             <a:pPr algn="just">
               <a:lnSpc>
-                <a:spcPct val="125000"/>
+                <a:spcPct val="110000"/>
               </a:lnSpc>
               <a:spcBef>
                 <a:spcPts val="0"/>
@@ -11314,7 +11314,7 @@
           <a:p>
             <a:pPr algn="just">
               <a:lnSpc>
-                <a:spcPct val="125000"/>
+                <a:spcPct val="110000"/>
               </a:lnSpc>
               <a:spcBef>
                 <a:spcPts val="0"/>
@@ -11336,7 +11336,7 @@
           <a:p>
             <a:pPr algn="just">
               <a:lnSpc>
-                <a:spcPct val="125000"/>
+                <a:spcPct val="110000"/>
               </a:lnSpc>
               <a:spcBef>
                 <a:spcPts val="0"/>
@@ -11358,7 +11358,7 @@
           <a:p>
             <a:pPr algn="just">
               <a:lnSpc>
-                <a:spcPct val="125000"/>
+                <a:spcPct val="110000"/>
               </a:lnSpc>
               <a:spcBef>
                 <a:spcPts val="0"/>
@@ -11380,7 +11380,7 @@
           <a:p>
             <a:pPr algn="just">
               <a:lnSpc>
-                <a:spcPct val="125000"/>
+                <a:spcPct val="110000"/>
               </a:lnSpc>
               <a:spcBef>
                 <a:spcPts val="0"/>
@@ -11494,7 +11494,7 @@
           <a:p>
             <a:pPr algn="just">
               <a:lnSpc>
-                <a:spcPct val="125000"/>
+                <a:spcPct val="110000"/>
               </a:lnSpc>
               <a:spcBef>
                 <a:spcPts val="0"/>
@@ -11516,7 +11516,7 @@
           <a:p>
             <a:pPr algn="just">
               <a:lnSpc>
-                <a:spcPct val="125000"/>
+                <a:spcPct val="110000"/>
               </a:lnSpc>
               <a:spcBef>
                 <a:spcPts val="0"/>
@@ -11538,7 +11538,7 @@
           <a:p>
             <a:pPr algn="just">
               <a:lnSpc>
-                <a:spcPct val="125000"/>
+                <a:spcPct val="110000"/>
               </a:lnSpc>
               <a:spcBef>
                 <a:spcPts val="0"/>
@@ -11560,7 +11560,7 @@
           <a:p>
             <a:pPr algn="just">
               <a:lnSpc>
-                <a:spcPct val="125000"/>
+                <a:spcPct val="110000"/>
               </a:lnSpc>
               <a:spcBef>
                 <a:spcPts val="0"/>
@@ -11582,7 +11582,7 @@
           <a:p>
             <a:pPr algn="just">
               <a:lnSpc>
-                <a:spcPct val="125000"/>
+                <a:spcPct val="110000"/>
               </a:lnSpc>
               <a:spcBef>
                 <a:spcPts val="0"/>
@@ -11604,7 +11604,7 @@
           <a:p>
             <a:pPr algn="just">
               <a:lnSpc>
-                <a:spcPct val="125000"/>
+                <a:spcPct val="110000"/>
               </a:lnSpc>
               <a:spcBef>
                 <a:spcPts val="0"/>
@@ -11626,7 +11626,7 @@
           <a:p>
             <a:pPr algn="just">
               <a:lnSpc>
-                <a:spcPct val="125000"/>
+                <a:spcPct val="110000"/>
               </a:lnSpc>
               <a:spcBef>
                 <a:spcPts val="0"/>
@@ -11648,7 +11648,7 @@
           <a:p>
             <a:pPr algn="just">
               <a:lnSpc>
-                <a:spcPct val="125000"/>
+                <a:spcPct val="110000"/>
               </a:lnSpc>
               <a:spcBef>
                 <a:spcPts val="0"/>
@@ -11670,7 +11670,7 @@
           <a:p>
             <a:pPr algn="just">
               <a:lnSpc>
-                <a:spcPct val="125000"/>
+                <a:spcPct val="110000"/>
               </a:lnSpc>
               <a:spcBef>
                 <a:spcPts val="0"/>
@@ -11692,7 +11692,7 @@
           <a:p>
             <a:pPr algn="just">
               <a:lnSpc>
-                <a:spcPct val="125000"/>
+                <a:spcPct val="110000"/>
               </a:lnSpc>
               <a:spcBef>
                 <a:spcPts val="0"/>
@@ -11806,7 +11806,7 @@
           <a:p>
             <a:pPr algn="just">
               <a:lnSpc>
-                <a:spcPct val="125000"/>
+                <a:spcPct val="110000"/>
               </a:lnSpc>
               <a:spcBef>
                 <a:spcPts val="0"/>
@@ -11828,7 +11828,7 @@
           <a:p>
             <a:pPr algn="just">
               <a:lnSpc>
-                <a:spcPct val="125000"/>
+                <a:spcPct val="110000"/>
               </a:lnSpc>
               <a:spcBef>
                 <a:spcPts val="0"/>
@@ -11850,7 +11850,7 @@
           <a:p>
             <a:pPr algn="just">
               <a:lnSpc>
-                <a:spcPct val="125000"/>
+                <a:spcPct val="110000"/>
               </a:lnSpc>
               <a:spcBef>
                 <a:spcPts val="0"/>
@@ -11872,7 +11872,7 @@
           <a:p>
             <a:pPr algn="just">
               <a:lnSpc>
-                <a:spcPct val="125000"/>
+                <a:spcPct val="110000"/>
               </a:lnSpc>
               <a:spcBef>
                 <a:spcPts val="0"/>
@@ -11894,7 +11894,7 @@
           <a:p>
             <a:pPr algn="just">
               <a:lnSpc>
-                <a:spcPct val="125000"/>
+                <a:spcPct val="110000"/>
               </a:lnSpc>
               <a:spcBef>
                 <a:spcPts val="0"/>
@@ -11916,7 +11916,7 @@
           <a:p>
             <a:pPr algn="just">
               <a:lnSpc>
-                <a:spcPct val="125000"/>
+                <a:spcPct val="110000"/>
               </a:lnSpc>
               <a:spcBef>
                 <a:spcPts val="0"/>
@@ -11938,7 +11938,7 @@
           <a:p>
             <a:pPr algn="just">
               <a:lnSpc>
-                <a:spcPct val="125000"/>
+                <a:spcPct val="110000"/>
               </a:lnSpc>
               <a:spcBef>
                 <a:spcPts val="0"/>
@@ -11960,7 +11960,7 @@
           <a:p>
             <a:pPr algn="just">
               <a:lnSpc>
-                <a:spcPct val="125000"/>
+                <a:spcPct val="110000"/>
               </a:lnSpc>
               <a:spcBef>
                 <a:spcPts val="0"/>
@@ -11982,7 +11982,7 @@
           <a:p>
             <a:pPr algn="just">
               <a:lnSpc>
-                <a:spcPct val="125000"/>
+                <a:spcPct val="110000"/>
               </a:lnSpc>
               <a:spcBef>
                 <a:spcPts val="0"/>
@@ -12004,7 +12004,7 @@
           <a:p>
             <a:pPr algn="just">
               <a:lnSpc>
-                <a:spcPct val="125000"/>
+                <a:spcPct val="110000"/>
               </a:lnSpc>
               <a:spcBef>
                 <a:spcPts val="0"/>
@@ -12026,7 +12026,7 @@
           <a:p>
             <a:pPr algn="just">
               <a:lnSpc>
-                <a:spcPct val="125000"/>
+                <a:spcPct val="110000"/>
               </a:lnSpc>
               <a:spcBef>
                 <a:spcPts val="0"/>
@@ -12048,7 +12048,7 @@
           <a:p>
             <a:pPr algn="just">
               <a:lnSpc>
-                <a:spcPct val="125000"/>
+                <a:spcPct val="110000"/>
               </a:lnSpc>
               <a:spcBef>
                 <a:spcPts val="0"/>
@@ -12070,7 +12070,7 @@
           <a:p>
             <a:pPr algn="just">
               <a:lnSpc>
-                <a:spcPct val="125000"/>
+                <a:spcPct val="110000"/>
               </a:lnSpc>
               <a:spcBef>
                 <a:spcPts val="0"/>
@@ -12184,7 +12184,7 @@
           <a:p>
             <a:pPr algn="just">
               <a:lnSpc>
-                <a:spcPct val="125000"/>
+                <a:spcPct val="110000"/>
               </a:lnSpc>
               <a:spcBef>
                 <a:spcPts val="0"/>
@@ -12206,7 +12206,7 @@
           <a:p>
             <a:pPr algn="just">
               <a:lnSpc>
-                <a:spcPct val="125000"/>
+                <a:spcPct val="110000"/>
               </a:lnSpc>
               <a:spcBef>
                 <a:spcPts val="0"/>
@@ -12228,7 +12228,7 @@
           <a:p>
             <a:pPr algn="just">
               <a:lnSpc>
-                <a:spcPct val="125000"/>
+                <a:spcPct val="110000"/>
               </a:lnSpc>
               <a:spcBef>
                 <a:spcPts val="0"/>
@@ -12250,7 +12250,7 @@
           <a:p>
             <a:pPr algn="just">
               <a:lnSpc>
-                <a:spcPct val="125000"/>
+                <a:spcPct val="110000"/>
               </a:lnSpc>
               <a:spcBef>
                 <a:spcPts val="0"/>
@@ -12272,7 +12272,7 @@
           <a:p>
             <a:pPr algn="just">
               <a:lnSpc>
-                <a:spcPct val="125000"/>
+                <a:spcPct val="110000"/>
               </a:lnSpc>
               <a:spcBef>
                 <a:spcPts val="0"/>
@@ -12294,7 +12294,7 @@
           <a:p>
             <a:pPr algn="just">
               <a:lnSpc>
-                <a:spcPct val="125000"/>
+                <a:spcPct val="110000"/>
               </a:lnSpc>
               <a:spcBef>
                 <a:spcPts val="0"/>
@@ -12316,7 +12316,7 @@
           <a:p>
             <a:pPr algn="just">
               <a:lnSpc>
-                <a:spcPct val="125000"/>
+                <a:spcPct val="110000"/>
               </a:lnSpc>
               <a:spcBef>
                 <a:spcPts val="0"/>
@@ -12338,7 +12338,7 @@
           <a:p>
             <a:pPr algn="just">
               <a:lnSpc>
-                <a:spcPct val="125000"/>
+                <a:spcPct val="110000"/>
               </a:lnSpc>
               <a:spcBef>
                 <a:spcPts val="0"/>
@@ -12360,7 +12360,7 @@
           <a:p>
             <a:pPr algn="just">
               <a:lnSpc>
-                <a:spcPct val="125000"/>
+                <a:spcPct val="110000"/>
               </a:lnSpc>
               <a:spcBef>
                 <a:spcPts val="0"/>
@@ -12382,7 +12382,7 @@
           <a:p>
             <a:pPr algn="just">
               <a:lnSpc>
-                <a:spcPct val="125000"/>
+                <a:spcPct val="110000"/>
               </a:lnSpc>
               <a:spcBef>
                 <a:spcPts val="0"/>
@@ -12404,7 +12404,7 @@
           <a:p>
             <a:pPr algn="just">
               <a:lnSpc>
-                <a:spcPct val="125000"/>
+                <a:spcPct val="110000"/>
               </a:lnSpc>
               <a:spcBef>
                 <a:spcPts val="0"/>
@@ -12426,7 +12426,7 @@
           <a:p>
             <a:pPr algn="just">
               <a:lnSpc>
-                <a:spcPct val="125000"/>
+                <a:spcPct val="110000"/>
               </a:lnSpc>
               <a:spcBef>
                 <a:spcPts val="0"/>
@@ -12448,7 +12448,7 @@
           <a:p>
             <a:pPr algn="just">
               <a:lnSpc>
-                <a:spcPct val="125000"/>
+                <a:spcPct val="110000"/>
               </a:lnSpc>
               <a:spcBef>
                 <a:spcPts val="0"/>
@@ -12470,7 +12470,7 @@
           <a:p>
             <a:pPr algn="just">
               <a:lnSpc>
-                <a:spcPct val="125000"/>
+                <a:spcPct val="110000"/>
               </a:lnSpc>
               <a:spcBef>
                 <a:spcPts val="0"/>
@@ -12492,7 +12492,7 @@
           <a:p>
             <a:pPr algn="just">
               <a:lnSpc>
-                <a:spcPct val="125000"/>
+                <a:spcPct val="110000"/>
               </a:lnSpc>
               <a:spcBef>
                 <a:spcPts val="0"/>
@@ -12606,7 +12606,7 @@
           <a:p>
             <a:pPr algn="just">
               <a:lnSpc>
-                <a:spcPct val="125000"/>
+                <a:spcPct val="110000"/>
               </a:lnSpc>
               <a:spcBef>
                 <a:spcPts val="0"/>
@@ -12628,7 +12628,7 @@
           <a:p>
             <a:pPr algn="just">
               <a:lnSpc>
-                <a:spcPct val="125000"/>
+                <a:spcPct val="110000"/>
               </a:lnSpc>
               <a:spcBef>
                 <a:spcPts val="0"/>
@@ -12650,7 +12650,7 @@
           <a:p>
             <a:pPr algn="just">
               <a:lnSpc>
-                <a:spcPct val="125000"/>
+                <a:spcPct val="110000"/>
               </a:lnSpc>
               <a:spcBef>
                 <a:spcPts val="0"/>
@@ -12672,7 +12672,7 @@
           <a:p>
             <a:pPr algn="just">
               <a:lnSpc>
-                <a:spcPct val="125000"/>
+                <a:spcPct val="110000"/>
               </a:lnSpc>
               <a:spcBef>
                 <a:spcPts val="0"/>
@@ -12694,7 +12694,7 @@
           <a:p>
             <a:pPr algn="just">
               <a:lnSpc>
-                <a:spcPct val="125000"/>
+                <a:spcPct val="110000"/>
               </a:lnSpc>
               <a:spcBef>
                 <a:spcPts val="0"/>
@@ -12716,7 +12716,7 @@
           <a:p>
             <a:pPr algn="just">
               <a:lnSpc>
-                <a:spcPct val="125000"/>
+                <a:spcPct val="110000"/>
               </a:lnSpc>
               <a:spcBef>
                 <a:spcPts val="0"/>
@@ -12738,7 +12738,7 @@
           <a:p>
             <a:pPr algn="just">
               <a:lnSpc>
-                <a:spcPct val="125000"/>
+                <a:spcPct val="110000"/>
               </a:lnSpc>
               <a:spcBef>
                 <a:spcPts val="0"/>
@@ -12760,7 +12760,7 @@
           <a:p>
             <a:pPr algn="just">
               <a:lnSpc>
-                <a:spcPct val="125000"/>
+                <a:spcPct val="110000"/>
               </a:lnSpc>
               <a:spcBef>
                 <a:spcPts val="0"/>
@@ -12782,7 +12782,7 @@
           <a:p>
             <a:pPr algn="just">
               <a:lnSpc>
-                <a:spcPct val="125000"/>
+                <a:spcPct val="110000"/>
               </a:lnSpc>
               <a:spcBef>
                 <a:spcPts val="0"/>
@@ -12896,7 +12896,7 @@
           <a:p>
             <a:pPr algn="just">
               <a:lnSpc>
-                <a:spcPct val="125000"/>
+                <a:spcPct val="110000"/>
               </a:lnSpc>
               <a:spcBef>
                 <a:spcPts val="0"/>
@@ -12918,7 +12918,7 @@
           <a:p>
             <a:pPr algn="just">
               <a:lnSpc>
-                <a:spcPct val="125000"/>
+                <a:spcPct val="110000"/>
               </a:lnSpc>
               <a:spcBef>
                 <a:spcPts val="0"/>
@@ -12940,7 +12940,7 @@
           <a:p>
             <a:pPr algn="just">
               <a:lnSpc>
-                <a:spcPct val="125000"/>
+                <a:spcPct val="110000"/>
               </a:lnSpc>
               <a:spcBef>
                 <a:spcPts val="0"/>
@@ -12962,7 +12962,7 @@
           <a:p>
             <a:pPr algn="just">
               <a:lnSpc>
-                <a:spcPct val="125000"/>
+                <a:spcPct val="110000"/>
               </a:lnSpc>
               <a:spcBef>
                 <a:spcPts val="0"/>
@@ -12984,7 +12984,7 @@
           <a:p>
             <a:pPr algn="just">
               <a:lnSpc>
-                <a:spcPct val="125000"/>
+                <a:spcPct val="110000"/>
               </a:lnSpc>
               <a:spcBef>
                 <a:spcPts val="0"/>
@@ -13006,7 +13006,7 @@
           <a:p>
             <a:pPr algn="just">
               <a:lnSpc>
-                <a:spcPct val="125000"/>
+                <a:spcPct val="110000"/>
               </a:lnSpc>
               <a:spcBef>
                 <a:spcPts val="0"/>
@@ -13028,7 +13028,7 @@
           <a:p>
             <a:pPr algn="just">
               <a:lnSpc>
-                <a:spcPct val="125000"/>
+                <a:spcPct val="110000"/>
               </a:lnSpc>
               <a:spcBef>
                 <a:spcPts val="0"/>
@@ -13050,7 +13050,7 @@
           <a:p>
             <a:pPr algn="just">
               <a:lnSpc>
-                <a:spcPct val="125000"/>
+                <a:spcPct val="110000"/>
               </a:lnSpc>
               <a:spcBef>
                 <a:spcPts val="0"/>
@@ -13072,7 +13072,7 @@
           <a:p>
             <a:pPr algn="just">
               <a:lnSpc>
-                <a:spcPct val="125000"/>
+                <a:spcPct val="110000"/>
               </a:lnSpc>
               <a:spcBef>
                 <a:spcPts val="0"/>
@@ -13094,7 +13094,7 @@
           <a:p>
             <a:pPr algn="just">
               <a:lnSpc>
-                <a:spcPct val="125000"/>
+                <a:spcPct val="110000"/>
               </a:lnSpc>
               <a:spcBef>
                 <a:spcPts val="0"/>
@@ -13116,7 +13116,7 @@
           <a:p>
             <a:pPr algn="just">
               <a:lnSpc>
-                <a:spcPct val="125000"/>
+                <a:spcPct val="110000"/>
               </a:lnSpc>
               <a:spcBef>
                 <a:spcPts val="0"/>
@@ -13138,7 +13138,7 @@
           <a:p>
             <a:pPr algn="just">
               <a:lnSpc>
-                <a:spcPct val="125000"/>
+                <a:spcPct val="110000"/>
               </a:lnSpc>
               <a:spcBef>
                 <a:spcPts val="0"/>
@@ -13252,7 +13252,7 @@
           <a:p>
             <a:pPr algn="just">
               <a:lnSpc>
-                <a:spcPct val="125000"/>
+                <a:spcPct val="110000"/>
               </a:lnSpc>
               <a:spcBef>
                 <a:spcPts val="0"/>
@@ -13274,7 +13274,7 @@
           <a:p>
             <a:pPr algn="just">
               <a:lnSpc>
-                <a:spcPct val="125000"/>
+                <a:spcPct val="110000"/>
               </a:lnSpc>
               <a:spcBef>
                 <a:spcPts val="0"/>
@@ -13296,7 +13296,7 @@
           <a:p>
             <a:pPr algn="just">
               <a:lnSpc>
-                <a:spcPct val="125000"/>
+                <a:spcPct val="110000"/>
               </a:lnSpc>
               <a:spcBef>
                 <a:spcPts val="0"/>
@@ -13318,7 +13318,7 @@
           <a:p>
             <a:pPr algn="just">
               <a:lnSpc>
-                <a:spcPct val="125000"/>
+                <a:spcPct val="110000"/>
               </a:lnSpc>
               <a:spcBef>
                 <a:spcPts val="0"/>
@@ -13340,7 +13340,7 @@
           <a:p>
             <a:pPr algn="just">
               <a:lnSpc>
-                <a:spcPct val="125000"/>
+                <a:spcPct val="110000"/>
               </a:lnSpc>
               <a:spcBef>
                 <a:spcPts val="0"/>
@@ -13362,7 +13362,7 @@
           <a:p>
             <a:pPr algn="just">
               <a:lnSpc>
-                <a:spcPct val="125000"/>
+                <a:spcPct val="110000"/>
               </a:lnSpc>
               <a:spcBef>
                 <a:spcPts val="0"/>
@@ -13384,7 +13384,7 @@
           <a:p>
             <a:pPr algn="just">
               <a:lnSpc>
-                <a:spcPct val="125000"/>
+                <a:spcPct val="110000"/>
               </a:lnSpc>
               <a:spcBef>
                 <a:spcPts val="0"/>
@@ -13406,7 +13406,7 @@
           <a:p>
             <a:pPr algn="just">
               <a:lnSpc>
-                <a:spcPct val="125000"/>
+                <a:spcPct val="110000"/>
               </a:lnSpc>
               <a:spcBef>
                 <a:spcPts val="0"/>
@@ -13428,7 +13428,7 @@
           <a:p>
             <a:pPr algn="just">
               <a:lnSpc>
-                <a:spcPct val="125000"/>
+                <a:spcPct val="110000"/>
               </a:lnSpc>
               <a:spcBef>
                 <a:spcPts val="0"/>
@@ -13542,7 +13542,7 @@
           <a:p>
             <a:pPr algn="just">
               <a:lnSpc>
-                <a:spcPct val="125000"/>
+                <a:spcPct val="110000"/>
               </a:lnSpc>
               <a:spcBef>
                 <a:spcPts val="0"/>
@@ -13564,7 +13564,7 @@
           <a:p>
             <a:pPr algn="just">
               <a:lnSpc>
-                <a:spcPct val="125000"/>
+                <a:spcPct val="110000"/>
               </a:lnSpc>
               <a:spcBef>
                 <a:spcPts val="0"/>
@@ -13586,7 +13586,7 @@
           <a:p>
             <a:pPr algn="just">
               <a:lnSpc>
-                <a:spcPct val="125000"/>
+                <a:spcPct val="110000"/>
               </a:lnSpc>
               <a:spcBef>
                 <a:spcPts val="0"/>
@@ -13608,7 +13608,7 @@
           <a:p>
             <a:pPr algn="just">
               <a:lnSpc>
-                <a:spcPct val="125000"/>
+                <a:spcPct val="110000"/>
               </a:lnSpc>
               <a:spcBef>
                 <a:spcPts val="0"/>
@@ -13630,7 +13630,7 @@
           <a:p>
             <a:pPr algn="just">
               <a:lnSpc>
-                <a:spcPct val="125000"/>
+                <a:spcPct val="110000"/>
               </a:lnSpc>
               <a:spcBef>
                 <a:spcPts val="0"/>
@@ -13652,7 +13652,7 @@
           <a:p>
             <a:pPr algn="just">
               <a:lnSpc>
-                <a:spcPct val="125000"/>
+                <a:spcPct val="110000"/>
               </a:lnSpc>
               <a:spcBef>
                 <a:spcPts val="0"/>
@@ -13674,7 +13674,7 @@
           <a:p>
             <a:pPr algn="just">
               <a:lnSpc>
-                <a:spcPct val="125000"/>
+                <a:spcPct val="110000"/>
               </a:lnSpc>
               <a:spcBef>
                 <a:spcPts val="0"/>
@@ -13696,7 +13696,7 @@
           <a:p>
             <a:pPr algn="just">
               <a:lnSpc>
-                <a:spcPct val="125000"/>
+                <a:spcPct val="110000"/>
               </a:lnSpc>
               <a:spcBef>
                 <a:spcPts val="0"/>
@@ -13718,7 +13718,7 @@
           <a:p>
             <a:pPr algn="just">
               <a:lnSpc>
-                <a:spcPct val="125000"/>
+                <a:spcPct val="110000"/>
               </a:lnSpc>
               <a:spcBef>
                 <a:spcPts val="0"/>
@@ -13740,7 +13740,7 @@
           <a:p>
             <a:pPr algn="just">
               <a:lnSpc>
-                <a:spcPct val="125000"/>
+                <a:spcPct val="110000"/>
               </a:lnSpc>
               <a:spcBef>
                 <a:spcPts val="0"/>
@@ -13854,7 +13854,7 @@
           <a:p>
             <a:pPr algn="just">
               <a:lnSpc>
-                <a:spcPct val="125000"/>
+                <a:spcPct val="110000"/>
               </a:lnSpc>
               <a:spcBef>
                 <a:spcPts val="0"/>
@@ -13876,7 +13876,7 @@
           <a:p>
             <a:pPr algn="just">
               <a:lnSpc>
-                <a:spcPct val="125000"/>
+                <a:spcPct val="110000"/>
               </a:lnSpc>
               <a:spcBef>
                 <a:spcPts val="0"/>
@@ -13898,7 +13898,7 @@
           <a:p>
             <a:pPr algn="just">
               <a:lnSpc>
-                <a:spcPct val="125000"/>
+                <a:spcPct val="110000"/>
               </a:lnSpc>
               <a:spcBef>
                 <a:spcPts val="0"/>
@@ -13920,7 +13920,7 @@
           <a:p>
             <a:pPr algn="just">
               <a:lnSpc>
-                <a:spcPct val="125000"/>
+                <a:spcPct val="110000"/>
               </a:lnSpc>
               <a:spcBef>
                 <a:spcPts val="0"/>
@@ -13942,7 +13942,7 @@
           <a:p>
             <a:pPr algn="just">
               <a:lnSpc>
-                <a:spcPct val="125000"/>
+                <a:spcPct val="110000"/>
               </a:lnSpc>
               <a:spcBef>
                 <a:spcPts val="0"/>
@@ -13964,7 +13964,7 @@
           <a:p>
             <a:pPr algn="just">
               <a:lnSpc>
-                <a:spcPct val="125000"/>
+                <a:spcPct val="110000"/>
               </a:lnSpc>
               <a:spcBef>
                 <a:spcPts val="0"/>
@@ -13986,7 +13986,7 @@
           <a:p>
             <a:pPr algn="just">
               <a:lnSpc>
-                <a:spcPct val="125000"/>
+                <a:spcPct val="110000"/>
               </a:lnSpc>
               <a:spcBef>
                 <a:spcPts val="0"/>
@@ -14008,7 +14008,7 @@
           <a:p>
             <a:pPr algn="just">
               <a:lnSpc>
-                <a:spcPct val="125000"/>
+                <a:spcPct val="110000"/>
               </a:lnSpc>
               <a:spcBef>
                 <a:spcPts val="0"/>
@@ -14030,7 +14030,7 @@
           <a:p>
             <a:pPr algn="just">
               <a:lnSpc>
-                <a:spcPct val="125000"/>
+                <a:spcPct val="110000"/>
               </a:lnSpc>
               <a:spcBef>
                 <a:spcPts val="0"/>
@@ -14144,7 +14144,7 @@
           <a:p>
             <a:pPr algn="just">
               <a:lnSpc>
-                <a:spcPct val="125000"/>
+                <a:spcPct val="110000"/>
               </a:lnSpc>
               <a:spcBef>
                 <a:spcPts val="0"/>
@@ -14166,7 +14166,7 @@
           <a:p>
             <a:pPr algn="just">
               <a:lnSpc>
-                <a:spcPct val="125000"/>
+                <a:spcPct val="110000"/>
               </a:lnSpc>
               <a:spcBef>
                 <a:spcPts val="0"/>
@@ -14188,7 +14188,7 @@
           <a:p>
             <a:pPr algn="just">
               <a:lnSpc>
-                <a:spcPct val="125000"/>
+                <a:spcPct val="110000"/>
               </a:lnSpc>
               <a:spcBef>
                 <a:spcPts val="0"/>
@@ -14210,7 +14210,7 @@
           <a:p>
             <a:pPr algn="just">
               <a:lnSpc>
-                <a:spcPct val="125000"/>
+                <a:spcPct val="110000"/>
               </a:lnSpc>
               <a:spcBef>
                 <a:spcPts val="0"/>
@@ -14232,7 +14232,7 @@
           <a:p>
             <a:pPr algn="just">
               <a:lnSpc>
-                <a:spcPct val="125000"/>
+                <a:spcPct val="110000"/>
               </a:lnSpc>
               <a:spcBef>
                 <a:spcPts val="0"/>
@@ -14254,7 +14254,7 @@
           <a:p>
             <a:pPr algn="just">
               <a:lnSpc>
-                <a:spcPct val="125000"/>
+                <a:spcPct val="110000"/>
               </a:lnSpc>
               <a:spcBef>
                 <a:spcPts val="0"/>
@@ -14276,7 +14276,7 @@
           <a:p>
             <a:pPr algn="just">
               <a:lnSpc>
-                <a:spcPct val="125000"/>
+                <a:spcPct val="110000"/>
               </a:lnSpc>
               <a:spcBef>
                 <a:spcPts val="0"/>
@@ -14298,7 +14298,7 @@
           <a:p>
             <a:pPr algn="just">
               <a:lnSpc>
-                <a:spcPct val="125000"/>
+                <a:spcPct val="110000"/>
               </a:lnSpc>
               <a:spcBef>
                 <a:spcPts val="0"/>
@@ -14320,7 +14320,7 @@
           <a:p>
             <a:pPr algn="just">
               <a:lnSpc>
-                <a:spcPct val="125000"/>
+                <a:spcPct val="110000"/>
               </a:lnSpc>
               <a:spcBef>
                 <a:spcPts val="0"/>
@@ -14342,7 +14342,7 @@
           <a:p>
             <a:pPr algn="just">
               <a:lnSpc>
-                <a:spcPct val="125000"/>
+                <a:spcPct val="110000"/>
               </a:lnSpc>
               <a:spcBef>
                 <a:spcPts val="0"/>
@@ -14456,7 +14456,7 @@
           <a:p>
             <a:pPr algn="just">
               <a:lnSpc>
-                <a:spcPct val="125000"/>
+                <a:spcPct val="110000"/>
               </a:lnSpc>
               <a:spcBef>
                 <a:spcPts val="0"/>
@@ -14478,7 +14478,7 @@
           <a:p>
             <a:pPr algn="just">
               <a:lnSpc>
-                <a:spcPct val="125000"/>
+                <a:spcPct val="110000"/>
               </a:lnSpc>
               <a:spcBef>
                 <a:spcPts val="0"/>
@@ -14500,7 +14500,7 @@
           <a:p>
             <a:pPr algn="just">
               <a:lnSpc>
-                <a:spcPct val="125000"/>
+                <a:spcPct val="110000"/>
               </a:lnSpc>
               <a:spcBef>
                 <a:spcPts val="0"/>
@@ -14522,7 +14522,7 @@
           <a:p>
             <a:pPr algn="just">
               <a:lnSpc>
-                <a:spcPct val="125000"/>
+                <a:spcPct val="110000"/>
               </a:lnSpc>
               <a:spcBef>
                 <a:spcPts val="0"/>
@@ -14544,7 +14544,7 @@
           <a:p>
             <a:pPr algn="just">
               <a:lnSpc>
-                <a:spcPct val="125000"/>
+                <a:spcPct val="110000"/>
               </a:lnSpc>
               <a:spcBef>
                 <a:spcPts val="0"/>
@@ -14566,7 +14566,7 @@
           <a:p>
             <a:pPr algn="just">
               <a:lnSpc>
-                <a:spcPct val="125000"/>
+                <a:spcPct val="110000"/>
               </a:lnSpc>
               <a:spcBef>
                 <a:spcPts val="0"/>
@@ -14588,7 +14588,7 @@
           <a:p>
             <a:pPr algn="just">
               <a:lnSpc>
-                <a:spcPct val="125000"/>
+                <a:spcPct val="110000"/>
               </a:lnSpc>
               <a:spcBef>
                 <a:spcPts val="0"/>
@@ -14610,7 +14610,7 @@
           <a:p>
             <a:pPr algn="just">
               <a:lnSpc>
-                <a:spcPct val="125000"/>
+                <a:spcPct val="110000"/>
               </a:lnSpc>
               <a:spcBef>
                 <a:spcPts val="0"/>
@@ -14632,7 +14632,7 @@
           <a:p>
             <a:pPr algn="just">
               <a:lnSpc>
-                <a:spcPct val="125000"/>
+                <a:spcPct val="110000"/>
               </a:lnSpc>
               <a:spcBef>
                 <a:spcPts val="0"/>
@@ -14654,7 +14654,7 @@
           <a:p>
             <a:pPr algn="just">
               <a:lnSpc>
-                <a:spcPct val="125000"/>
+                <a:spcPct val="110000"/>
               </a:lnSpc>
               <a:spcBef>
                 <a:spcPts val="0"/>
@@ -14676,7 +14676,7 @@
           <a:p>
             <a:pPr algn="just">
               <a:lnSpc>
-                <a:spcPct val="125000"/>
+                <a:spcPct val="110000"/>
               </a:lnSpc>
               <a:spcBef>
                 <a:spcPts val="0"/>
@@ -14790,7 +14790,7 @@
           <a:p>
             <a:pPr algn="just">
               <a:lnSpc>
-                <a:spcPct val="125000"/>
+                <a:spcPct val="110000"/>
               </a:lnSpc>
               <a:spcBef>
                 <a:spcPts val="0"/>
@@ -14812,7 +14812,7 @@
           <a:p>
             <a:pPr algn="just">
               <a:lnSpc>
-                <a:spcPct val="125000"/>
+                <a:spcPct val="110000"/>
               </a:lnSpc>
               <a:spcBef>
                 <a:spcPts val="0"/>
@@ -14834,7 +14834,7 @@
           <a:p>
             <a:pPr algn="just">
               <a:lnSpc>
-                <a:spcPct val="125000"/>
+                <a:spcPct val="110000"/>
               </a:lnSpc>
               <a:spcBef>
                 <a:spcPts val="0"/>
@@ -14856,7 +14856,7 @@
           <a:p>
             <a:pPr algn="just">
               <a:lnSpc>
-                <a:spcPct val="125000"/>
+                <a:spcPct val="110000"/>
               </a:lnSpc>
               <a:spcBef>
                 <a:spcPts val="0"/>
@@ -14878,7 +14878,7 @@
           <a:p>
             <a:pPr algn="just">
               <a:lnSpc>
-                <a:spcPct val="125000"/>
+                <a:spcPct val="110000"/>
               </a:lnSpc>
               <a:spcBef>
                 <a:spcPts val="0"/>
@@ -14900,7 +14900,7 @@
           <a:p>
             <a:pPr algn="just">
               <a:lnSpc>
-                <a:spcPct val="125000"/>
+                <a:spcPct val="110000"/>
               </a:lnSpc>
               <a:spcBef>
                 <a:spcPts val="0"/>
@@ -14922,7 +14922,7 @@
           <a:p>
             <a:pPr algn="just">
               <a:lnSpc>
-                <a:spcPct val="125000"/>
+                <a:spcPct val="110000"/>
               </a:lnSpc>
               <a:spcBef>
                 <a:spcPts val="0"/>
@@ -14944,7 +14944,7 @@
           <a:p>
             <a:pPr algn="just">
               <a:lnSpc>
-                <a:spcPct val="125000"/>
+                <a:spcPct val="110000"/>
               </a:lnSpc>
               <a:spcBef>
                 <a:spcPts val="0"/>
@@ -14966,7 +14966,7 @@
           <a:p>
             <a:pPr algn="just">
               <a:lnSpc>
-                <a:spcPct val="125000"/>
+                <a:spcPct val="110000"/>
               </a:lnSpc>
               <a:spcBef>
                 <a:spcPts val="0"/>
@@ -14988,7 +14988,7 @@
           <a:p>
             <a:pPr algn="just">
               <a:lnSpc>
-                <a:spcPct val="125000"/>
+                <a:spcPct val="110000"/>
               </a:lnSpc>
               <a:spcBef>
                 <a:spcPts val="0"/>
@@ -15010,7 +15010,7 @@
           <a:p>
             <a:pPr algn="just">
               <a:lnSpc>
-                <a:spcPct val="125000"/>
+                <a:spcPct val="110000"/>
               </a:lnSpc>
               <a:spcBef>
                 <a:spcPts val="0"/>
@@ -15032,7 +15032,7 @@
           <a:p>
             <a:pPr algn="just">
               <a:lnSpc>
-                <a:spcPct val="125000"/>
+                <a:spcPct val="110000"/>
               </a:lnSpc>
               <a:spcBef>
                 <a:spcPts val="0"/>
@@ -15146,7 +15146,7 @@
           <a:p>
             <a:pPr algn="just">
               <a:lnSpc>
-                <a:spcPct val="125000"/>
+                <a:spcPct val="110000"/>
               </a:lnSpc>
               <a:spcBef>
                 <a:spcPts val="0"/>
@@ -15168,7 +15168,7 @@
           <a:p>
             <a:pPr algn="just">
               <a:lnSpc>
-                <a:spcPct val="125000"/>
+                <a:spcPct val="110000"/>
               </a:lnSpc>
               <a:spcBef>
                 <a:spcPts val="0"/>
@@ -15190,7 +15190,7 @@
           <a:p>
             <a:pPr algn="just">
               <a:lnSpc>
-                <a:spcPct val="125000"/>
+                <a:spcPct val="110000"/>
               </a:lnSpc>
               <a:spcBef>
                 <a:spcPts val="0"/>
@@ -15212,7 +15212,7 @@
           <a:p>
             <a:pPr algn="just">
               <a:lnSpc>
-                <a:spcPct val="125000"/>
+                <a:spcPct val="110000"/>
               </a:lnSpc>
               <a:spcBef>
                 <a:spcPts val="0"/>
@@ -15234,7 +15234,7 @@
           <a:p>
             <a:pPr algn="just">
               <a:lnSpc>
-                <a:spcPct val="125000"/>
+                <a:spcPct val="110000"/>
               </a:lnSpc>
               <a:spcBef>
                 <a:spcPts val="0"/>
@@ -15256,7 +15256,7 @@
           <a:p>
             <a:pPr algn="just">
               <a:lnSpc>
-                <a:spcPct val="125000"/>
+                <a:spcPct val="110000"/>
               </a:lnSpc>
               <a:spcBef>
                 <a:spcPts val="0"/>
@@ -15278,7 +15278,7 @@
           <a:p>
             <a:pPr algn="just">
               <a:lnSpc>
-                <a:spcPct val="125000"/>
+                <a:spcPct val="110000"/>
               </a:lnSpc>
               <a:spcBef>
                 <a:spcPts val="0"/>
@@ -15300,7 +15300,7 @@
           <a:p>
             <a:pPr algn="just">
               <a:lnSpc>
-                <a:spcPct val="125000"/>
+                <a:spcPct val="110000"/>
               </a:lnSpc>
               <a:spcBef>
                 <a:spcPts val="0"/>
@@ -15322,7 +15322,7 @@
           <a:p>
             <a:pPr algn="just">
               <a:lnSpc>
-                <a:spcPct val="125000"/>
+                <a:spcPct val="110000"/>
               </a:lnSpc>
               <a:spcBef>
                 <a:spcPts val="0"/>
@@ -15344,7 +15344,7 @@
           <a:p>
             <a:pPr algn="just">
               <a:lnSpc>
-                <a:spcPct val="125000"/>
+                <a:spcPct val="110000"/>
               </a:lnSpc>
               <a:spcBef>
                 <a:spcPts val="0"/>
@@ -15366,7 +15366,7 @@
           <a:p>
             <a:pPr algn="just">
               <a:lnSpc>
-                <a:spcPct val="125000"/>
+                <a:spcPct val="110000"/>
               </a:lnSpc>
               <a:spcBef>
                 <a:spcPts val="0"/>
@@ -15388,7 +15388,7 @@
           <a:p>
             <a:pPr algn="just">
               <a:lnSpc>
-                <a:spcPct val="125000"/>
+                <a:spcPct val="110000"/>
               </a:lnSpc>
               <a:spcBef>
                 <a:spcPts val="0"/>
@@ -15502,7 +15502,7 @@
           <a:p>
             <a:pPr algn="just">
               <a:lnSpc>
-                <a:spcPct val="125000"/>
+                <a:spcPct val="110000"/>
               </a:lnSpc>
               <a:spcBef>
                 <a:spcPts val="0"/>
@@ -15524,7 +15524,7 @@
           <a:p>
             <a:pPr algn="just">
               <a:lnSpc>
-                <a:spcPct val="125000"/>
+                <a:spcPct val="110000"/>
               </a:lnSpc>
               <a:spcBef>
                 <a:spcPts val="0"/>
@@ -15546,7 +15546,7 @@
           <a:p>
             <a:pPr algn="just">
               <a:lnSpc>
-                <a:spcPct val="125000"/>
+                <a:spcPct val="110000"/>
               </a:lnSpc>
               <a:spcBef>
                 <a:spcPts val="0"/>
@@ -15568,7 +15568,7 @@
           <a:p>
             <a:pPr algn="just">
               <a:lnSpc>
-                <a:spcPct val="125000"/>
+                <a:spcPct val="110000"/>
               </a:lnSpc>
               <a:spcBef>
                 <a:spcPts val="0"/>
@@ -15590,7 +15590,7 @@
           <a:p>
             <a:pPr algn="just">
               <a:lnSpc>
-                <a:spcPct val="125000"/>
+                <a:spcPct val="110000"/>
               </a:lnSpc>
               <a:spcBef>
                 <a:spcPts val="0"/>
@@ -15612,7 +15612,7 @@
           <a:p>
             <a:pPr algn="just">
               <a:lnSpc>
-                <a:spcPct val="125000"/>
+                <a:spcPct val="110000"/>
               </a:lnSpc>
               <a:spcBef>
                 <a:spcPts val="0"/>
@@ -15634,7 +15634,7 @@
           <a:p>
             <a:pPr algn="just">
               <a:lnSpc>
-                <a:spcPct val="125000"/>
+                <a:spcPct val="110000"/>
               </a:lnSpc>
               <a:spcBef>
                 <a:spcPts val="0"/>
@@ -15656,7 +15656,7 @@
           <a:p>
             <a:pPr algn="just">
               <a:lnSpc>
-                <a:spcPct val="125000"/>
+                <a:spcPct val="110000"/>
               </a:lnSpc>
               <a:spcBef>
                 <a:spcPts val="0"/>
@@ -15678,7 +15678,7 @@
           <a:p>
             <a:pPr algn="just">
               <a:lnSpc>
-                <a:spcPct val="125000"/>
+                <a:spcPct val="110000"/>
               </a:lnSpc>
               <a:spcBef>
                 <a:spcPts val="0"/>
@@ -15792,7 +15792,7 @@
           <a:p>
             <a:pPr algn="just">
               <a:lnSpc>
-                <a:spcPct val="125000"/>
+                <a:spcPct val="110000"/>
               </a:lnSpc>
               <a:spcBef>
                 <a:spcPts val="0"/>
@@ -15814,7 +15814,7 @@
           <a:p>
             <a:pPr algn="just">
               <a:lnSpc>
-                <a:spcPct val="125000"/>
+                <a:spcPct val="110000"/>
               </a:lnSpc>
               <a:spcBef>
                 <a:spcPts val="0"/>
@@ -15836,7 +15836,7 @@
           <a:p>
             <a:pPr algn="just">
               <a:lnSpc>
-                <a:spcPct val="125000"/>
+                <a:spcPct val="110000"/>
               </a:lnSpc>
               <a:spcBef>
                 <a:spcPts val="0"/>
@@ -15858,7 +15858,7 @@
           <a:p>
             <a:pPr algn="just">
               <a:lnSpc>
-                <a:spcPct val="125000"/>
+                <a:spcPct val="110000"/>
               </a:lnSpc>
               <a:spcBef>
                 <a:spcPts val="0"/>
@@ -15880,7 +15880,7 @@
           <a:p>
             <a:pPr algn="just">
               <a:lnSpc>
-                <a:spcPct val="125000"/>
+                <a:spcPct val="110000"/>
               </a:lnSpc>
               <a:spcBef>
                 <a:spcPts val="0"/>
@@ -15902,7 +15902,7 @@
           <a:p>
             <a:pPr algn="just">
               <a:lnSpc>
-                <a:spcPct val="125000"/>
+                <a:spcPct val="110000"/>
               </a:lnSpc>
               <a:spcBef>
                 <a:spcPts val="0"/>
@@ -15924,7 +15924,7 @@
           <a:p>
             <a:pPr algn="just">
               <a:lnSpc>
-                <a:spcPct val="125000"/>
+                <a:spcPct val="110000"/>
               </a:lnSpc>
               <a:spcBef>
                 <a:spcPts val="0"/>
@@ -15946,7 +15946,7 @@
           <a:p>
             <a:pPr algn="just">
               <a:lnSpc>
-                <a:spcPct val="125000"/>
+                <a:spcPct val="110000"/>
               </a:lnSpc>
               <a:spcBef>
                 <a:spcPts val="0"/>
@@ -15968,7 +15968,7 @@
           <a:p>
             <a:pPr algn="just">
               <a:lnSpc>
-                <a:spcPct val="125000"/>
+                <a:spcPct val="110000"/>
               </a:lnSpc>
               <a:spcBef>
                 <a:spcPts val="0"/>
@@ -16082,7 +16082,7 @@
           <a:p>
             <a:pPr algn="just">
               <a:lnSpc>
-                <a:spcPct val="125000"/>
+                <a:spcPct val="110000"/>
               </a:lnSpc>
               <a:spcBef>
                 <a:spcPts val="0"/>
@@ -16104,7 +16104,7 @@
           <a:p>
             <a:pPr algn="just">
               <a:lnSpc>
-                <a:spcPct val="125000"/>
+                <a:spcPct val="110000"/>
               </a:lnSpc>
               <a:spcBef>
                 <a:spcPts val="0"/>
@@ -16126,7 +16126,7 @@
           <a:p>
             <a:pPr algn="just">
               <a:lnSpc>
-                <a:spcPct val="125000"/>
+                <a:spcPct val="110000"/>
               </a:lnSpc>
               <a:spcBef>
                 <a:spcPts val="0"/>
@@ -16148,7 +16148,7 @@
           <a:p>
             <a:pPr algn="just">
               <a:lnSpc>
-                <a:spcPct val="125000"/>
+                <a:spcPct val="110000"/>
               </a:lnSpc>
               <a:spcBef>
                 <a:spcPts val="0"/>
@@ -16170,7 +16170,7 @@
           <a:p>
             <a:pPr algn="just">
               <a:lnSpc>
-                <a:spcPct val="125000"/>
+                <a:spcPct val="110000"/>
               </a:lnSpc>
               <a:spcBef>
                 <a:spcPts val="0"/>
@@ -16192,7 +16192,7 @@
           <a:p>
             <a:pPr algn="just">
               <a:lnSpc>
-                <a:spcPct val="125000"/>
+                <a:spcPct val="110000"/>
               </a:lnSpc>
               <a:spcBef>
                 <a:spcPts val="0"/>
@@ -16214,7 +16214,7 @@
           <a:p>
             <a:pPr algn="just">
               <a:lnSpc>
-                <a:spcPct val="125000"/>
+                <a:spcPct val="110000"/>
               </a:lnSpc>
               <a:spcBef>
                 <a:spcPts val="0"/>
@@ -16236,7 +16236,7 @@
           <a:p>
             <a:pPr algn="just">
               <a:lnSpc>
-                <a:spcPct val="125000"/>
+                <a:spcPct val="110000"/>
               </a:lnSpc>
               <a:spcBef>
                 <a:spcPts val="0"/>
@@ -16258,7 +16258,7 @@
           <a:p>
             <a:pPr algn="just">
               <a:lnSpc>
-                <a:spcPct val="125000"/>
+                <a:spcPct val="110000"/>
               </a:lnSpc>
               <a:spcBef>
                 <a:spcPts val="0"/>
@@ -16280,7 +16280,7 @@
           <a:p>
             <a:pPr algn="just">
               <a:lnSpc>
-                <a:spcPct val="125000"/>
+                <a:spcPct val="110000"/>
               </a:lnSpc>
               <a:spcBef>
                 <a:spcPts val="0"/>
@@ -16302,7 +16302,7 @@
           <a:p>
             <a:pPr algn="just">
               <a:lnSpc>
-                <a:spcPct val="125000"/>
+                <a:spcPct val="110000"/>
               </a:lnSpc>
               <a:spcBef>
                 <a:spcPts val="0"/>
@@ -16324,7 +16324,7 @@
           <a:p>
             <a:pPr algn="just">
               <a:lnSpc>
-                <a:spcPct val="125000"/>
+                <a:spcPct val="110000"/>
               </a:lnSpc>
               <a:spcBef>
                 <a:spcPts val="0"/>
@@ -16438,7 +16438,7 @@
           <a:p>
             <a:pPr algn="just">
               <a:lnSpc>
-                <a:spcPct val="125000"/>
+                <a:spcPct val="110000"/>
               </a:lnSpc>
               <a:spcBef>
                 <a:spcPts val="0"/>
@@ -16460,7 +16460,7 @@
           <a:p>
             <a:pPr algn="just">
               <a:lnSpc>
-                <a:spcPct val="125000"/>
+                <a:spcPct val="110000"/>
               </a:lnSpc>
               <a:spcBef>
                 <a:spcPts val="0"/>
@@ -16482,7 +16482,7 @@
           <a:p>
             <a:pPr algn="just">
               <a:lnSpc>
-                <a:spcPct val="125000"/>
+                <a:spcPct val="110000"/>
               </a:lnSpc>
               <a:spcBef>
                 <a:spcPts val="0"/>
@@ -16504,7 +16504,7 @@
           <a:p>
             <a:pPr algn="just">
               <a:lnSpc>
-                <a:spcPct val="125000"/>
+                <a:spcPct val="110000"/>
               </a:lnSpc>
               <a:spcBef>
                 <a:spcPts val="0"/>
@@ -16526,7 +16526,7 @@
           <a:p>
             <a:pPr algn="just">
               <a:lnSpc>
-                <a:spcPct val="125000"/>
+                <a:spcPct val="110000"/>
               </a:lnSpc>
               <a:spcBef>
                 <a:spcPts val="0"/>
@@ -16548,7 +16548,7 @@
           <a:p>
             <a:pPr algn="just">
               <a:lnSpc>
-                <a:spcPct val="125000"/>
+                <a:spcPct val="110000"/>
               </a:lnSpc>
               <a:spcBef>
                 <a:spcPts val="0"/>
@@ -16570,7 +16570,7 @@
           <a:p>
             <a:pPr algn="just">
               <a:lnSpc>
-                <a:spcPct val="125000"/>
+                <a:spcPct val="110000"/>
               </a:lnSpc>
               <a:spcBef>
                 <a:spcPts val="0"/>
@@ -16592,7 +16592,7 @@
           <a:p>
             <a:pPr algn="just">
               <a:lnSpc>
-                <a:spcPct val="125000"/>
+                <a:spcPct val="110000"/>
               </a:lnSpc>
               <a:spcBef>
                 <a:spcPts val="0"/>
@@ -16614,7 +16614,7 @@
           <a:p>
             <a:pPr algn="just">
               <a:lnSpc>
-                <a:spcPct val="125000"/>
+                <a:spcPct val="110000"/>
               </a:lnSpc>
               <a:spcBef>
                 <a:spcPts val="0"/>
@@ -16728,7 +16728,7 @@
           <a:p>
             <a:pPr algn="just">
               <a:lnSpc>
-                <a:spcPct val="125000"/>
+                <a:spcPct val="110000"/>
               </a:lnSpc>
               <a:spcBef>
                 <a:spcPts val="0"/>
@@ -16750,7 +16750,7 @@
           <a:p>
             <a:pPr algn="just">
               <a:lnSpc>
-                <a:spcPct val="125000"/>
+                <a:spcPct val="110000"/>
               </a:lnSpc>
               <a:spcBef>
                 <a:spcPts val="0"/>
@@ -16772,7 +16772,7 @@
           <a:p>
             <a:pPr algn="just">
               <a:lnSpc>
-                <a:spcPct val="125000"/>
+                <a:spcPct val="110000"/>
               </a:lnSpc>
               <a:spcBef>
                 <a:spcPts val="0"/>
@@ -16794,7 +16794,7 @@
           <a:p>
             <a:pPr algn="just">
               <a:lnSpc>
-                <a:spcPct val="125000"/>
+                <a:spcPct val="110000"/>
               </a:lnSpc>
               <a:spcBef>
                 <a:spcPts val="0"/>
@@ -16816,7 +16816,7 @@
           <a:p>
             <a:pPr algn="just">
               <a:lnSpc>
-                <a:spcPct val="125000"/>
+                <a:spcPct val="110000"/>
               </a:lnSpc>
               <a:spcBef>
                 <a:spcPts val="0"/>
@@ -16838,7 +16838,7 @@
           <a:p>
             <a:pPr algn="just">
               <a:lnSpc>
-                <a:spcPct val="125000"/>
+                <a:spcPct val="110000"/>
               </a:lnSpc>
               <a:spcBef>
                 <a:spcPts val="0"/>
@@ -16860,7 +16860,7 @@
           <a:p>
             <a:pPr algn="just">
               <a:lnSpc>
-                <a:spcPct val="125000"/>
+                <a:spcPct val="110000"/>
               </a:lnSpc>
               <a:spcBef>
                 <a:spcPts val="0"/>
@@ -16882,7 +16882,7 @@
           <a:p>
             <a:pPr algn="just">
               <a:lnSpc>
-                <a:spcPct val="125000"/>
+                <a:spcPct val="110000"/>
               </a:lnSpc>
               <a:spcBef>
                 <a:spcPts val="0"/>
@@ -16904,7 +16904,7 @@
           <a:p>
             <a:pPr algn="just">
               <a:lnSpc>
-                <a:spcPct val="125000"/>
+                <a:spcPct val="110000"/>
               </a:lnSpc>
               <a:spcBef>
                 <a:spcPts val="0"/>
@@ -17018,7 +17018,7 @@
           <a:p>
             <a:pPr algn="just">
               <a:lnSpc>
-                <a:spcPct val="125000"/>
+                <a:spcPct val="110000"/>
               </a:lnSpc>
               <a:spcBef>
                 <a:spcPts val="0"/>
@@ -17040,7 +17040,7 @@
           <a:p>
             <a:pPr algn="just">
               <a:lnSpc>
-                <a:spcPct val="125000"/>
+                <a:spcPct val="110000"/>
               </a:lnSpc>
               <a:spcBef>
                 <a:spcPts val="0"/>
@@ -17062,7 +17062,7 @@
           <a:p>
             <a:pPr algn="just">
               <a:lnSpc>
-                <a:spcPct val="125000"/>
+                <a:spcPct val="110000"/>
               </a:lnSpc>
               <a:spcBef>
                 <a:spcPts val="0"/>
@@ -17084,7 +17084,7 @@
           <a:p>
             <a:pPr algn="just">
               <a:lnSpc>
-                <a:spcPct val="125000"/>
+                <a:spcPct val="110000"/>
               </a:lnSpc>
               <a:spcBef>
                 <a:spcPts val="0"/>
@@ -17106,7 +17106,7 @@
           <a:p>
             <a:pPr algn="just">
               <a:lnSpc>
-                <a:spcPct val="125000"/>
+                <a:spcPct val="110000"/>
               </a:lnSpc>
               <a:spcBef>
                 <a:spcPts val="0"/>
@@ -17128,7 +17128,7 @@
           <a:p>
             <a:pPr algn="just">
               <a:lnSpc>
-                <a:spcPct val="125000"/>
+                <a:spcPct val="110000"/>
               </a:lnSpc>
               <a:spcBef>
                 <a:spcPts val="0"/>
@@ -17150,7 +17150,7 @@
           <a:p>
             <a:pPr algn="just">
               <a:lnSpc>
-                <a:spcPct val="125000"/>
+                <a:spcPct val="110000"/>
               </a:lnSpc>
               <a:spcBef>
                 <a:spcPts val="0"/>
@@ -17172,7 +17172,7 @@
           <a:p>
             <a:pPr algn="just">
               <a:lnSpc>
-                <a:spcPct val="125000"/>
+                <a:spcPct val="110000"/>
               </a:lnSpc>
               <a:spcBef>
                 <a:spcPts val="0"/>
@@ -17194,7 +17194,7 @@
           <a:p>
             <a:pPr algn="just">
               <a:lnSpc>
-                <a:spcPct val="125000"/>
+                <a:spcPct val="110000"/>
               </a:lnSpc>
               <a:spcBef>
                 <a:spcPts val="0"/>
@@ -17308,7 +17308,7 @@
           <a:p>
             <a:pPr algn="just">
               <a:lnSpc>
-                <a:spcPct val="125000"/>
+                <a:spcPct val="110000"/>
               </a:lnSpc>
               <a:spcBef>
                 <a:spcPts val="0"/>
@@ -17330,7 +17330,7 @@
           <a:p>
             <a:pPr algn="just">
               <a:lnSpc>
-                <a:spcPct val="125000"/>
+                <a:spcPct val="110000"/>
               </a:lnSpc>
               <a:spcBef>
                 <a:spcPts val="0"/>
@@ -17352,7 +17352,7 @@
           <a:p>
             <a:pPr algn="just">
               <a:lnSpc>
-                <a:spcPct val="125000"/>
+                <a:spcPct val="110000"/>
               </a:lnSpc>
               <a:spcBef>
                 <a:spcPts val="0"/>
@@ -17374,7 +17374,7 @@
           <a:p>
             <a:pPr algn="just">
               <a:lnSpc>
-                <a:spcPct val="125000"/>
+                <a:spcPct val="110000"/>
               </a:lnSpc>
               <a:spcBef>
                 <a:spcPts val="0"/>
@@ -17396,7 +17396,7 @@
           <a:p>
             <a:pPr algn="just">
               <a:lnSpc>
-                <a:spcPct val="125000"/>
+                <a:spcPct val="110000"/>
               </a:lnSpc>
               <a:spcBef>
                 <a:spcPts val="0"/>
@@ -17418,7 +17418,7 @@
           <a:p>
             <a:pPr algn="just">
               <a:lnSpc>
-                <a:spcPct val="125000"/>
+                <a:spcPct val="110000"/>
               </a:lnSpc>
               <a:spcBef>
                 <a:spcPts val="0"/>
@@ -17440,7 +17440,7 @@
           <a:p>
             <a:pPr algn="just">
               <a:lnSpc>
-                <a:spcPct val="125000"/>
+                <a:spcPct val="110000"/>
               </a:lnSpc>
               <a:spcBef>
                 <a:spcPts val="0"/>
@@ -17462,7 +17462,7 @@
           <a:p>
             <a:pPr algn="just">
               <a:lnSpc>
-                <a:spcPct val="125000"/>
+                <a:spcPct val="110000"/>
               </a:lnSpc>
               <a:spcBef>
                 <a:spcPts val="0"/>
@@ -17484,7 +17484,7 @@
           <a:p>
             <a:pPr algn="just">
               <a:lnSpc>
-                <a:spcPct val="125000"/>
+                <a:spcPct val="110000"/>
               </a:lnSpc>
               <a:spcBef>
                 <a:spcPts val="0"/>
@@ -17506,7 +17506,7 @@
           <a:p>
             <a:pPr algn="just">
               <a:lnSpc>
-                <a:spcPct val="125000"/>
+                <a:spcPct val="110000"/>
               </a:lnSpc>
               <a:spcBef>
                 <a:spcPts val="0"/>
@@ -17620,7 +17620,7 @@
           <a:p>
             <a:pPr algn="just">
               <a:lnSpc>
-                <a:spcPct val="125000"/>
+                <a:spcPct val="110000"/>
               </a:lnSpc>
               <a:spcBef>
                 <a:spcPts val="0"/>
@@ -17642,7 +17642,7 @@
           <a:p>
             <a:pPr algn="just">
               <a:lnSpc>
-                <a:spcPct val="125000"/>
+                <a:spcPct val="110000"/>
               </a:lnSpc>
               <a:spcBef>
                 <a:spcPts val="0"/>
@@ -17664,7 +17664,7 @@
           <a:p>
             <a:pPr algn="just">
               <a:lnSpc>
-                <a:spcPct val="125000"/>
+                <a:spcPct val="110000"/>
               </a:lnSpc>
               <a:spcBef>
                 <a:spcPts val="0"/>
@@ -17686,7 +17686,7 @@
           <a:p>
             <a:pPr algn="just">
               <a:lnSpc>
-                <a:spcPct val="125000"/>
+                <a:spcPct val="110000"/>
               </a:lnSpc>
               <a:spcBef>
                 <a:spcPts val="0"/>
@@ -17708,7 +17708,7 @@
           <a:p>
             <a:pPr algn="just">
               <a:lnSpc>
-                <a:spcPct val="125000"/>
+                <a:spcPct val="110000"/>
               </a:lnSpc>
               <a:spcBef>
                 <a:spcPts val="0"/>
@@ -17730,7 +17730,7 @@
           <a:p>
             <a:pPr algn="just">
               <a:lnSpc>
-                <a:spcPct val="125000"/>
+                <a:spcPct val="110000"/>
               </a:lnSpc>
               <a:spcBef>
                 <a:spcPts val="0"/>
@@ -17752,7 +17752,7 @@
           <a:p>
             <a:pPr algn="just">
               <a:lnSpc>
-                <a:spcPct val="125000"/>
+                <a:spcPct val="110000"/>
               </a:lnSpc>
               <a:spcBef>
                 <a:spcPts val="0"/>
@@ -17774,7 +17774,7 @@
           <a:p>
             <a:pPr algn="just">
               <a:lnSpc>
-                <a:spcPct val="125000"/>
+                <a:spcPct val="110000"/>
               </a:lnSpc>
               <a:spcBef>
                 <a:spcPts val="0"/>
@@ -17796,7 +17796,7 @@
           <a:p>
             <a:pPr algn="just">
               <a:lnSpc>
-                <a:spcPct val="125000"/>
+                <a:spcPct val="110000"/>
               </a:lnSpc>
               <a:spcBef>
                 <a:spcPts val="0"/>
@@ -17910,7 +17910,7 @@
           <a:p>
             <a:pPr algn="just">
               <a:lnSpc>
-                <a:spcPct val="125000"/>
+                <a:spcPct val="110000"/>
               </a:lnSpc>
               <a:spcBef>
                 <a:spcPts val="0"/>
@@ -17932,7 +17932,7 @@
           <a:p>
             <a:pPr algn="just">
               <a:lnSpc>
-                <a:spcPct val="125000"/>
+                <a:spcPct val="110000"/>
               </a:lnSpc>
               <a:spcBef>
                 <a:spcPts val="0"/>
@@ -17954,7 +17954,7 @@
           <a:p>
             <a:pPr algn="just">
               <a:lnSpc>
-                <a:spcPct val="125000"/>
+                <a:spcPct val="110000"/>
               </a:lnSpc>
               <a:spcBef>
                 <a:spcPts val="0"/>
@@ -17976,7 +17976,7 @@
           <a:p>
             <a:pPr algn="just">
               <a:lnSpc>
-                <a:spcPct val="125000"/>
+                <a:spcPct val="110000"/>
               </a:lnSpc>
               <a:spcBef>
                 <a:spcPts val="0"/>
@@ -17998,7 +17998,7 @@
           <a:p>
             <a:pPr algn="just">
               <a:lnSpc>
-                <a:spcPct val="125000"/>
+                <a:spcPct val="110000"/>
               </a:lnSpc>
               <a:spcBef>
                 <a:spcPts val="0"/>
@@ -18020,7 +18020,7 @@
           <a:p>
             <a:pPr algn="just">
               <a:lnSpc>
-                <a:spcPct val="125000"/>
+                <a:spcPct val="110000"/>
               </a:lnSpc>
               <a:spcBef>
                 <a:spcPts val="0"/>
@@ -18042,7 +18042,7 @@
           <a:p>
             <a:pPr algn="just">
               <a:lnSpc>
-                <a:spcPct val="125000"/>
+                <a:spcPct val="110000"/>
               </a:lnSpc>
               <a:spcBef>
                 <a:spcPts val="0"/>
@@ -18064,7 +18064,7 @@
           <a:p>
             <a:pPr algn="just">
               <a:lnSpc>
-                <a:spcPct val="125000"/>
+                <a:spcPct val="110000"/>
               </a:lnSpc>
               <a:spcBef>
                 <a:spcPts val="0"/>
@@ -18086,7 +18086,7 @@
           <a:p>
             <a:pPr algn="just">
               <a:lnSpc>
-                <a:spcPct val="125000"/>
+                <a:spcPct val="110000"/>
               </a:lnSpc>
               <a:spcBef>
                 <a:spcPts val="0"/>
@@ -18200,7 +18200,7 @@
           <a:p>
             <a:pPr algn="just">
               <a:lnSpc>
-                <a:spcPct val="125000"/>
+                <a:spcPct val="110000"/>
               </a:lnSpc>
               <a:spcBef>
                 <a:spcPts val="0"/>
@@ -18222,7 +18222,7 @@
           <a:p>
             <a:pPr algn="just">
               <a:lnSpc>
-                <a:spcPct val="125000"/>
+                <a:spcPct val="110000"/>
               </a:lnSpc>
               <a:spcBef>
                 <a:spcPts val="0"/>
@@ -18244,7 +18244,7 @@
           <a:p>
             <a:pPr algn="just">
               <a:lnSpc>
-                <a:spcPct val="125000"/>
+                <a:spcPct val="110000"/>
               </a:lnSpc>
               <a:spcBef>
                 <a:spcPts val="0"/>
@@ -18266,7 +18266,7 @@
           <a:p>
             <a:pPr algn="just">
               <a:lnSpc>
-                <a:spcPct val="125000"/>
+                <a:spcPct val="110000"/>
               </a:lnSpc>
               <a:spcBef>
                 <a:spcPts val="0"/>
@@ -18288,7 +18288,7 @@
           <a:p>
             <a:pPr algn="just">
               <a:lnSpc>
-                <a:spcPct val="125000"/>
+                <a:spcPct val="110000"/>
               </a:lnSpc>
               <a:spcBef>
                 <a:spcPts val="0"/>
@@ -18310,7 +18310,7 @@
           <a:p>
             <a:pPr algn="just">
               <a:lnSpc>
-                <a:spcPct val="125000"/>
+                <a:spcPct val="110000"/>
               </a:lnSpc>
               <a:spcBef>
                 <a:spcPts val="0"/>
@@ -18332,7 +18332,7 @@
           <a:p>
             <a:pPr algn="just">
               <a:lnSpc>
-                <a:spcPct val="125000"/>
+                <a:spcPct val="110000"/>
               </a:lnSpc>
               <a:spcBef>
                 <a:spcPts val="0"/>
@@ -18354,7 +18354,7 @@
           <a:p>
             <a:pPr algn="just">
               <a:lnSpc>
-                <a:spcPct val="125000"/>
+                <a:spcPct val="110000"/>
               </a:lnSpc>
               <a:spcBef>
                 <a:spcPts val="0"/>
@@ -18376,7 +18376,7 @@
           <a:p>
             <a:pPr algn="just">
               <a:lnSpc>
-                <a:spcPct val="125000"/>
+                <a:spcPct val="110000"/>
               </a:lnSpc>
               <a:spcBef>
                 <a:spcPts val="0"/>
@@ -18490,7 +18490,7 @@
           <a:p>
             <a:pPr algn="just">
               <a:lnSpc>
-                <a:spcPct val="125000"/>
+                <a:spcPct val="110000"/>
               </a:lnSpc>
               <a:spcBef>
                 <a:spcPts val="0"/>
@@ -18512,7 +18512,7 @@
           <a:p>
             <a:pPr algn="just">
               <a:lnSpc>
-                <a:spcPct val="125000"/>
+                <a:spcPct val="110000"/>
               </a:lnSpc>
               <a:spcBef>
                 <a:spcPts val="0"/>
@@ -18534,7 +18534,7 @@
           <a:p>
             <a:pPr algn="just">
               <a:lnSpc>
-                <a:spcPct val="125000"/>
+                <a:spcPct val="110000"/>
               </a:lnSpc>
               <a:spcBef>
                 <a:spcPts val="0"/>
@@ -18556,7 +18556,7 @@
           <a:p>
             <a:pPr algn="just">
               <a:lnSpc>
-                <a:spcPct val="125000"/>
+                <a:spcPct val="110000"/>
               </a:lnSpc>
               <a:spcBef>
                 <a:spcPts val="0"/>
@@ -18578,7 +18578,7 @@
           <a:p>
             <a:pPr algn="just">
               <a:lnSpc>
-                <a:spcPct val="125000"/>
+                <a:spcPct val="110000"/>
               </a:lnSpc>
               <a:spcBef>
                 <a:spcPts val="0"/>
@@ -18600,7 +18600,7 @@
           <a:p>
             <a:pPr algn="just">
               <a:lnSpc>
-                <a:spcPct val="125000"/>
+                <a:spcPct val="110000"/>
               </a:lnSpc>
               <a:spcBef>
                 <a:spcPts val="0"/>
@@ -18622,7 +18622,7 @@
           <a:p>
             <a:pPr algn="just">
               <a:lnSpc>
-                <a:spcPct val="125000"/>
+                <a:spcPct val="110000"/>
               </a:lnSpc>
               <a:spcBef>
                 <a:spcPts val="0"/>
@@ -18644,7 +18644,7 @@
           <a:p>
             <a:pPr algn="just">
               <a:lnSpc>
-                <a:spcPct val="125000"/>
+                <a:spcPct val="110000"/>
               </a:lnSpc>
               <a:spcBef>
                 <a:spcPts val="0"/>
@@ -18666,7 +18666,7 @@
           <a:p>
             <a:pPr algn="just">
               <a:lnSpc>
-                <a:spcPct val="125000"/>
+                <a:spcPct val="110000"/>
               </a:lnSpc>
               <a:spcBef>
                 <a:spcPts val="0"/>
@@ -18688,7 +18688,7 @@
           <a:p>
             <a:pPr algn="just">
               <a:lnSpc>
-                <a:spcPct val="125000"/>
+                <a:spcPct val="110000"/>
               </a:lnSpc>
               <a:spcBef>
                 <a:spcPts val="0"/>
@@ -18802,7 +18802,7 @@
           <a:p>
             <a:pPr algn="just">
               <a:lnSpc>
-                <a:spcPct val="125000"/>
+                <a:spcPct val="110000"/>
               </a:lnSpc>
               <a:spcBef>
                 <a:spcPts val="0"/>
@@ -18824,7 +18824,7 @@
           <a:p>
             <a:pPr algn="just">
               <a:lnSpc>
-                <a:spcPct val="125000"/>
+                <a:spcPct val="110000"/>
               </a:lnSpc>
               <a:spcBef>
                 <a:spcPts val="0"/>
@@ -18846,7 +18846,7 @@
           <a:p>
             <a:pPr algn="just">
               <a:lnSpc>
-                <a:spcPct val="125000"/>
+                <a:spcPct val="110000"/>
               </a:lnSpc>
               <a:spcBef>
                 <a:spcPts val="0"/>
@@ -18868,7 +18868,7 @@
           <a:p>
             <a:pPr algn="just">
               <a:lnSpc>
-                <a:spcPct val="125000"/>
+                <a:spcPct val="110000"/>
               </a:lnSpc>
               <a:spcBef>
                 <a:spcPts val="0"/>
@@ -18890,7 +18890,7 @@
           <a:p>
             <a:pPr algn="just">
               <a:lnSpc>
-                <a:spcPct val="125000"/>
+                <a:spcPct val="110000"/>
               </a:lnSpc>
               <a:spcBef>
                 <a:spcPts val="0"/>
@@ -18912,7 +18912,7 @@
           <a:p>
             <a:pPr algn="just">
               <a:lnSpc>
-                <a:spcPct val="125000"/>
+                <a:spcPct val="110000"/>
               </a:lnSpc>
               <a:spcBef>
                 <a:spcPts val="0"/>
@@ -18934,7 +18934,7 @@
           <a:p>
             <a:pPr algn="just">
               <a:lnSpc>
-                <a:spcPct val="125000"/>
+                <a:spcPct val="110000"/>
               </a:lnSpc>
               <a:spcBef>
                 <a:spcPts val="0"/>
@@ -18956,7 +18956,7 @@
           <a:p>
             <a:pPr algn="just">
               <a:lnSpc>
-                <a:spcPct val="125000"/>
+                <a:spcPct val="110000"/>
               </a:lnSpc>
               <a:spcBef>
                 <a:spcPts val="0"/>
@@ -18978,7 +18978,7 @@
           <a:p>
             <a:pPr algn="just">
               <a:lnSpc>
-                <a:spcPct val="125000"/>
+                <a:spcPct val="110000"/>
               </a:lnSpc>
               <a:spcBef>
                 <a:spcPts val="0"/>
@@ -19000,7 +19000,7 @@
           <a:p>
             <a:pPr algn="just">
               <a:lnSpc>
-                <a:spcPct val="125000"/>
+                <a:spcPct val="110000"/>
               </a:lnSpc>
               <a:spcBef>
                 <a:spcPts val="0"/>
@@ -19022,7 +19022,7 @@
           <a:p>
             <a:pPr algn="just">
               <a:lnSpc>
-                <a:spcPct val="125000"/>
+                <a:spcPct val="110000"/>
               </a:lnSpc>
               <a:spcBef>
                 <a:spcPts val="0"/>
@@ -19044,7 +19044,7 @@
           <a:p>
             <a:pPr algn="just">
               <a:lnSpc>
-                <a:spcPct val="125000"/>
+                <a:spcPct val="110000"/>
               </a:lnSpc>
               <a:spcBef>
                 <a:spcPts val="0"/>
@@ -19158,7 +19158,7 @@
           <a:p>
             <a:pPr algn="just">
               <a:lnSpc>
-                <a:spcPct val="125000"/>
+                <a:spcPct val="110000"/>
               </a:lnSpc>
               <a:spcBef>
                 <a:spcPts val="0"/>
@@ -19180,7 +19180,7 @@
           <a:p>
             <a:pPr algn="just">
               <a:lnSpc>
-                <a:spcPct val="125000"/>
+                <a:spcPct val="110000"/>
               </a:lnSpc>
               <a:spcBef>
                 <a:spcPts val="0"/>
@@ -19202,7 +19202,7 @@
           <a:p>
             <a:pPr algn="just">
               <a:lnSpc>
-                <a:spcPct val="125000"/>
+                <a:spcPct val="110000"/>
               </a:lnSpc>
               <a:spcBef>
                 <a:spcPts val="0"/>
@@ -19224,7 +19224,7 @@
           <a:p>
             <a:pPr algn="just">
               <a:lnSpc>
-                <a:spcPct val="125000"/>
+                <a:spcPct val="110000"/>
               </a:lnSpc>
               <a:spcBef>
                 <a:spcPts val="0"/>
@@ -19246,7 +19246,7 @@
           <a:p>
             <a:pPr algn="just">
               <a:lnSpc>
-                <a:spcPct val="125000"/>
+                <a:spcPct val="110000"/>
               </a:lnSpc>
               <a:spcBef>
                 <a:spcPts val="0"/>
@@ -19268,7 +19268,7 @@
           <a:p>
             <a:pPr algn="just">
               <a:lnSpc>
-                <a:spcPct val="125000"/>
+                <a:spcPct val="110000"/>
               </a:lnSpc>
               <a:spcBef>
                 <a:spcPts val="0"/>
@@ -19290,7 +19290,7 @@
           <a:p>
             <a:pPr algn="just">
               <a:lnSpc>
-                <a:spcPct val="125000"/>
+                <a:spcPct val="110000"/>
               </a:lnSpc>
               <a:spcBef>
                 <a:spcPts val="0"/>
@@ -19312,7 +19312,7 @@
           <a:p>
             <a:pPr algn="just">
               <a:lnSpc>
-                <a:spcPct val="125000"/>
+                <a:spcPct val="110000"/>
               </a:lnSpc>
               <a:spcBef>
                 <a:spcPts val="0"/>
@@ -19334,7 +19334,7 @@
           <a:p>
             <a:pPr algn="just">
               <a:lnSpc>
-                <a:spcPct val="125000"/>
+                <a:spcPct val="110000"/>
               </a:lnSpc>
               <a:spcBef>
                 <a:spcPts val="0"/>
@@ -19448,7 +19448,7 @@
           <a:p>
             <a:pPr algn="just">
               <a:lnSpc>
-                <a:spcPct val="125000"/>
+                <a:spcPct val="110000"/>
               </a:lnSpc>
               <a:spcBef>
                 <a:spcPts val="0"/>
@@ -19470,7 +19470,7 @@
           <a:p>
             <a:pPr algn="just">
               <a:lnSpc>
-                <a:spcPct val="125000"/>
+                <a:spcPct val="110000"/>
               </a:lnSpc>
               <a:spcBef>
                 <a:spcPts val="0"/>
@@ -19492,7 +19492,7 @@
           <a:p>
             <a:pPr algn="just">
               <a:lnSpc>
-                <a:spcPct val="125000"/>
+                <a:spcPct val="110000"/>
               </a:lnSpc>
               <a:spcBef>
                 <a:spcPts val="0"/>
@@ -19514,7 +19514,7 @@
           <a:p>
             <a:pPr algn="just">
               <a:lnSpc>
-                <a:spcPct val="125000"/>
+                <a:spcPct val="110000"/>
               </a:lnSpc>
               <a:spcBef>
                 <a:spcPts val="0"/>
@@ -19536,7 +19536,7 @@
           <a:p>
             <a:pPr algn="just">
               <a:lnSpc>
-                <a:spcPct val="125000"/>
+                <a:spcPct val="110000"/>
               </a:lnSpc>
               <a:spcBef>
                 <a:spcPts val="0"/>
@@ -19558,7 +19558,7 @@
           <a:p>
             <a:pPr algn="just">
               <a:lnSpc>
-                <a:spcPct val="125000"/>
+                <a:spcPct val="110000"/>
               </a:lnSpc>
               <a:spcBef>
                 <a:spcPts val="0"/>
@@ -19580,7 +19580,7 @@
           <a:p>
             <a:pPr algn="just">
               <a:lnSpc>
-                <a:spcPct val="125000"/>
+                <a:spcPct val="110000"/>
               </a:lnSpc>
               <a:spcBef>
                 <a:spcPts val="0"/>
@@ -19602,7 +19602,7 @@
           <a:p>
             <a:pPr algn="just">
               <a:lnSpc>
-                <a:spcPct val="125000"/>
+                <a:spcPct val="110000"/>
               </a:lnSpc>
               <a:spcBef>
                 <a:spcPts val="0"/>
@@ -19624,7 +19624,7 @@
           <a:p>
             <a:pPr algn="just">
               <a:lnSpc>
-                <a:spcPct val="125000"/>
+                <a:spcPct val="110000"/>
               </a:lnSpc>
               <a:spcBef>
                 <a:spcPts val="0"/>
@@ -19738,7 +19738,7 @@
           <a:p>
             <a:pPr algn="just">
               <a:lnSpc>
-                <a:spcPct val="125000"/>
+                <a:spcPct val="110000"/>
               </a:lnSpc>
               <a:spcBef>
                 <a:spcPts val="0"/>
@@ -19760,7 +19760,7 @@
           <a:p>
             <a:pPr algn="just">
               <a:lnSpc>
-                <a:spcPct val="125000"/>
+                <a:spcPct val="110000"/>
               </a:lnSpc>
               <a:spcBef>
                 <a:spcPts val="0"/>
@@ -19782,7 +19782,7 @@
           <a:p>
             <a:pPr algn="just">
               <a:lnSpc>
-                <a:spcPct val="125000"/>
+                <a:spcPct val="110000"/>
               </a:lnSpc>
               <a:spcBef>
                 <a:spcPts val="0"/>
@@ -19804,7 +19804,7 @@
           <a:p>
             <a:pPr algn="just">
               <a:lnSpc>
-                <a:spcPct val="125000"/>
+                <a:spcPct val="110000"/>
               </a:lnSpc>
               <a:spcBef>
                 <a:spcPts val="0"/>
@@ -19826,7 +19826,7 @@
           <a:p>
             <a:pPr algn="just">
               <a:lnSpc>
-                <a:spcPct val="125000"/>
+                <a:spcPct val="110000"/>
               </a:lnSpc>
               <a:spcBef>
                 <a:spcPts val="0"/>
@@ -19848,7 +19848,7 @@
           <a:p>
             <a:pPr algn="just">
               <a:lnSpc>
-                <a:spcPct val="125000"/>
+                <a:spcPct val="110000"/>
               </a:lnSpc>
               <a:spcBef>
                 <a:spcPts val="0"/>
@@ -19870,7 +19870,7 @@
           <a:p>
             <a:pPr algn="just">
               <a:lnSpc>
-                <a:spcPct val="125000"/>
+                <a:spcPct val="110000"/>
               </a:lnSpc>
               <a:spcBef>
                 <a:spcPts val="0"/>
@@ -19892,7 +19892,7 @@
           <a:p>
             <a:pPr algn="just">
               <a:lnSpc>
-                <a:spcPct val="125000"/>
+                <a:spcPct val="110000"/>
               </a:lnSpc>
               <a:spcBef>
                 <a:spcPts val="0"/>
@@ -19914,7 +19914,7 @@
           <a:p>
             <a:pPr algn="just">
               <a:lnSpc>
-                <a:spcPct val="125000"/>
+                <a:spcPct val="110000"/>
               </a:lnSpc>
               <a:spcBef>
                 <a:spcPts val="0"/>
@@ -19936,7 +19936,7 @@
           <a:p>
             <a:pPr algn="just">
               <a:lnSpc>
-                <a:spcPct val="125000"/>
+                <a:spcPct val="110000"/>
               </a:lnSpc>
               <a:spcBef>
                 <a:spcPts val="0"/>
@@ -19958,7 +19958,7 @@
           <a:p>
             <a:pPr algn="just">
               <a:lnSpc>
-                <a:spcPct val="125000"/>
+                <a:spcPct val="110000"/>
               </a:lnSpc>
               <a:spcBef>
                 <a:spcPts val="0"/>
@@ -19980,7 +19980,7 @@
           <a:p>
             <a:pPr algn="just">
               <a:lnSpc>
-                <a:spcPct val="125000"/>
+                <a:spcPct val="110000"/>
               </a:lnSpc>
               <a:spcBef>
                 <a:spcPts val="0"/>
@@ -20002,7 +20002,7 @@
           <a:p>
             <a:pPr algn="just">
               <a:lnSpc>
-                <a:spcPct val="125000"/>
+                <a:spcPct val="110000"/>
               </a:lnSpc>
               <a:spcBef>
                 <a:spcPts val="0"/>
@@ -20116,7 +20116,7 @@
           <a:p>
             <a:pPr algn="just">
               <a:lnSpc>
-                <a:spcPct val="125000"/>
+                <a:spcPct val="110000"/>
               </a:lnSpc>
               <a:spcBef>
                 <a:spcPts val="0"/>
@@ -20138,7 +20138,7 @@
           <a:p>
             <a:pPr algn="just">
               <a:lnSpc>
-                <a:spcPct val="125000"/>
+                <a:spcPct val="110000"/>
               </a:lnSpc>
               <a:spcBef>
                 <a:spcPts val="0"/>
@@ -20160,7 +20160,7 @@
           <a:p>
             <a:pPr algn="just">
               <a:lnSpc>
-                <a:spcPct val="125000"/>
+                <a:spcPct val="110000"/>
               </a:lnSpc>
               <a:spcBef>
                 <a:spcPts val="0"/>
@@ -20182,7 +20182,7 @@
           <a:p>
             <a:pPr algn="just">
               <a:lnSpc>
-                <a:spcPct val="125000"/>
+                <a:spcPct val="110000"/>
               </a:lnSpc>
               <a:spcBef>
                 <a:spcPts val="0"/>
@@ -20204,7 +20204,7 @@
           <a:p>
             <a:pPr algn="just">
               <a:lnSpc>
-                <a:spcPct val="125000"/>
+                <a:spcPct val="110000"/>
               </a:lnSpc>
               <a:spcBef>
                 <a:spcPts val="0"/>
@@ -20226,7 +20226,7 @@
           <a:p>
             <a:pPr algn="just">
               <a:lnSpc>
-                <a:spcPct val="125000"/>
+                <a:spcPct val="110000"/>
               </a:lnSpc>
               <a:spcBef>
                 <a:spcPts val="0"/>
@@ -20248,7 +20248,7 @@
           <a:p>
             <a:pPr algn="just">
               <a:lnSpc>
-                <a:spcPct val="125000"/>
+                <a:spcPct val="110000"/>
               </a:lnSpc>
               <a:spcBef>
                 <a:spcPts val="0"/>
@@ -20270,7 +20270,7 @@
           <a:p>
             <a:pPr algn="just">
               <a:lnSpc>
-                <a:spcPct val="125000"/>
+                <a:spcPct val="110000"/>
               </a:lnSpc>
               <a:spcBef>
                 <a:spcPts val="0"/>
@@ -20292,7 +20292,7 @@
           <a:p>
             <a:pPr algn="just">
               <a:lnSpc>
-                <a:spcPct val="125000"/>
+                <a:spcPct val="110000"/>
               </a:lnSpc>
               <a:spcBef>
                 <a:spcPts val="0"/>
@@ -20314,7 +20314,7 @@
           <a:p>
             <a:pPr algn="just">
               <a:lnSpc>
-                <a:spcPct val="125000"/>
+                <a:spcPct val="110000"/>
               </a:lnSpc>
               <a:spcBef>
                 <a:spcPts val="0"/>
@@ -20428,7 +20428,7 @@
           <a:p>
             <a:pPr algn="just">
               <a:lnSpc>
-                <a:spcPct val="125000"/>
+                <a:spcPct val="110000"/>
               </a:lnSpc>
               <a:spcBef>
                 <a:spcPts val="0"/>
@@ -20450,7 +20450,7 @@
           <a:p>
             <a:pPr algn="just">
               <a:lnSpc>
-                <a:spcPct val="125000"/>
+                <a:spcPct val="110000"/>
               </a:lnSpc>
               <a:spcBef>
                 <a:spcPts val="0"/>
@@ -20472,7 +20472,7 @@
           <a:p>
             <a:pPr algn="just">
               <a:lnSpc>
-                <a:spcPct val="125000"/>
+                <a:spcPct val="110000"/>
               </a:lnSpc>
               <a:spcBef>
                 <a:spcPts val="0"/>
@@ -20494,7 +20494,7 @@
           <a:p>
             <a:pPr algn="just">
               <a:lnSpc>
-                <a:spcPct val="125000"/>
+                <a:spcPct val="110000"/>
               </a:lnSpc>
               <a:spcBef>
                 <a:spcPts val="0"/>
@@ -20516,7 +20516,7 @@
           <a:p>
             <a:pPr algn="just">
               <a:lnSpc>
-                <a:spcPct val="125000"/>
+                <a:spcPct val="110000"/>
               </a:lnSpc>
               <a:spcBef>
                 <a:spcPts val="0"/>
@@ -20538,7 +20538,7 @@
           <a:p>
             <a:pPr algn="just">
               <a:lnSpc>
-                <a:spcPct val="125000"/>
+                <a:spcPct val="110000"/>
               </a:lnSpc>
               <a:spcBef>
                 <a:spcPts val="0"/>
@@ -20560,7 +20560,7 @@
           <a:p>
             <a:pPr algn="just">
               <a:lnSpc>
-                <a:spcPct val="125000"/>
+                <a:spcPct val="110000"/>
               </a:lnSpc>
               <a:spcBef>
                 <a:spcPts val="0"/>
@@ -20582,7 +20582,7 @@
           <a:p>
             <a:pPr algn="just">
               <a:lnSpc>
-                <a:spcPct val="125000"/>
+                <a:spcPct val="110000"/>
               </a:lnSpc>
               <a:spcBef>
                 <a:spcPts val="0"/>
@@ -20604,7 +20604,7 @@
           <a:p>
             <a:pPr algn="just">
               <a:lnSpc>
-                <a:spcPct val="125000"/>
+                <a:spcPct val="110000"/>
               </a:lnSpc>
               <a:spcBef>
                 <a:spcPts val="0"/>
@@ -20718,7 +20718,7 @@
           <a:p>
             <a:pPr algn="just">
               <a:lnSpc>
-                <a:spcPct val="125000"/>
+                <a:spcPct val="110000"/>
               </a:lnSpc>
               <a:spcBef>
                 <a:spcPts val="0"/>
@@ -20740,7 +20740,7 @@
           <a:p>
             <a:pPr algn="just">
               <a:lnSpc>
-                <a:spcPct val="125000"/>
+                <a:spcPct val="110000"/>
               </a:lnSpc>
               <a:spcBef>
                 <a:spcPts val="0"/>
@@ -20762,7 +20762,7 @@
           <a:p>
             <a:pPr algn="just">
               <a:lnSpc>
-                <a:spcPct val="125000"/>
+                <a:spcPct val="110000"/>
               </a:lnSpc>
               <a:spcBef>
                 <a:spcPts val="0"/>
@@ -20784,7 +20784,7 @@
           <a:p>
             <a:pPr algn="just">
               <a:lnSpc>
-                <a:spcPct val="125000"/>
+                <a:spcPct val="110000"/>
               </a:lnSpc>
               <a:spcBef>
                 <a:spcPts val="0"/>
@@ -20806,7 +20806,7 @@
           <a:p>
             <a:pPr algn="just">
               <a:lnSpc>
-                <a:spcPct val="125000"/>
+                <a:spcPct val="110000"/>
               </a:lnSpc>
               <a:spcBef>
                 <a:spcPts val="0"/>
@@ -20828,7 +20828,7 @@
           <a:p>
             <a:pPr algn="just">
               <a:lnSpc>
-                <a:spcPct val="125000"/>
+                <a:spcPct val="110000"/>
               </a:lnSpc>
               <a:spcBef>
                 <a:spcPts val="0"/>
@@ -20850,7 +20850,7 @@
           <a:p>
             <a:pPr algn="just">
               <a:lnSpc>
-                <a:spcPct val="125000"/>
+                <a:spcPct val="110000"/>
               </a:lnSpc>
               <a:spcBef>
                 <a:spcPts val="0"/>
@@ -20872,7 +20872,7 @@
           <a:p>
             <a:pPr algn="just">
               <a:lnSpc>
-                <a:spcPct val="125000"/>
+                <a:spcPct val="110000"/>
               </a:lnSpc>
               <a:spcBef>
                 <a:spcPts val="0"/>
@@ -20894,7 +20894,7 @@
           <a:p>
             <a:pPr algn="just">
               <a:lnSpc>
-                <a:spcPct val="125000"/>
+                <a:spcPct val="110000"/>
               </a:lnSpc>
               <a:spcBef>
                 <a:spcPts val="0"/>
@@ -21008,7 +21008,7 @@
           <a:p>
             <a:pPr algn="just">
               <a:lnSpc>
-                <a:spcPct val="125000"/>
+                <a:spcPct val="110000"/>
               </a:lnSpc>
               <a:spcBef>
                 <a:spcPts val="0"/>
@@ -21030,7 +21030,7 @@
           <a:p>
             <a:pPr algn="just">
               <a:lnSpc>
-                <a:spcPct val="125000"/>
+                <a:spcPct val="110000"/>
               </a:lnSpc>
               <a:spcBef>
                 <a:spcPts val="0"/>
@@ -21052,7 +21052,7 @@
           <a:p>
             <a:pPr algn="just">
               <a:lnSpc>
-                <a:spcPct val="125000"/>
+                <a:spcPct val="110000"/>
               </a:lnSpc>
               <a:spcBef>
                 <a:spcPts val="0"/>
@@ -21074,7 +21074,7 @@
           <a:p>
             <a:pPr algn="just">
               <a:lnSpc>
-                <a:spcPct val="125000"/>
+                <a:spcPct val="110000"/>
               </a:lnSpc>
               <a:spcBef>
                 <a:spcPts val="0"/>
@@ -21096,7 +21096,7 @@
           <a:p>
             <a:pPr algn="just">
               <a:lnSpc>
-                <a:spcPct val="125000"/>
+                <a:spcPct val="110000"/>
               </a:lnSpc>
               <a:spcBef>
                 <a:spcPts val="0"/>
@@ -21118,7 +21118,7 @@
           <a:p>
             <a:pPr algn="just">
               <a:lnSpc>
-                <a:spcPct val="125000"/>
+                <a:spcPct val="110000"/>
               </a:lnSpc>
               <a:spcBef>
                 <a:spcPts val="0"/>
@@ -21140,7 +21140,7 @@
           <a:p>
             <a:pPr algn="just">
               <a:lnSpc>
-                <a:spcPct val="125000"/>
+                <a:spcPct val="110000"/>
               </a:lnSpc>
               <a:spcBef>
                 <a:spcPts val="0"/>
@@ -21162,7 +21162,7 @@
           <a:p>
             <a:pPr algn="just">
               <a:lnSpc>
-                <a:spcPct val="125000"/>
+                <a:spcPct val="110000"/>
               </a:lnSpc>
               <a:spcBef>
                 <a:spcPts val="0"/>
@@ -21184,7 +21184,7 @@
           <a:p>
             <a:pPr algn="just">
               <a:lnSpc>
-                <a:spcPct val="125000"/>
+                <a:spcPct val="110000"/>
               </a:lnSpc>
               <a:spcBef>
                 <a:spcPts val="0"/>
@@ -21206,7 +21206,7 @@
           <a:p>
             <a:pPr algn="just">
               <a:lnSpc>
-                <a:spcPct val="125000"/>
+                <a:spcPct val="110000"/>
               </a:lnSpc>
               <a:spcBef>
                 <a:spcPts val="0"/>
@@ -21320,7 +21320,7 @@
           <a:p>
             <a:pPr algn="just">
               <a:lnSpc>
-                <a:spcPct val="125000"/>
+                <a:spcPct val="110000"/>
               </a:lnSpc>
               <a:spcBef>
                 <a:spcPts val="0"/>
@@ -21342,7 +21342,7 @@
           <a:p>
             <a:pPr algn="just">
               <a:lnSpc>
-                <a:spcPct val="125000"/>
+                <a:spcPct val="110000"/>
               </a:lnSpc>
               <a:spcBef>
                 <a:spcPts val="0"/>
@@ -21364,7 +21364,7 @@
           <a:p>
             <a:pPr algn="just">
               <a:lnSpc>
-                <a:spcPct val="125000"/>
+                <a:spcPct val="110000"/>
               </a:lnSpc>
               <a:spcBef>
                 <a:spcPts val="0"/>
@@ -21386,7 +21386,7 @@
           <a:p>
             <a:pPr algn="just">
               <a:lnSpc>
-                <a:spcPct val="125000"/>
+                <a:spcPct val="110000"/>
               </a:lnSpc>
               <a:spcBef>
                 <a:spcPts val="0"/>
@@ -21408,7 +21408,7 @@
           <a:p>
             <a:pPr algn="just">
               <a:lnSpc>
-                <a:spcPct val="125000"/>
+                <a:spcPct val="110000"/>
               </a:lnSpc>
               <a:spcBef>
                 <a:spcPts val="0"/>
@@ -21430,7 +21430,7 @@
           <a:p>
             <a:pPr algn="just">
               <a:lnSpc>
-                <a:spcPct val="125000"/>
+                <a:spcPct val="110000"/>
               </a:lnSpc>
               <a:spcBef>
                 <a:spcPts val="0"/>
@@ -21452,7 +21452,7 @@
           <a:p>
             <a:pPr algn="just">
               <a:lnSpc>
-                <a:spcPct val="125000"/>
+                <a:spcPct val="110000"/>
               </a:lnSpc>
               <a:spcBef>
                 <a:spcPts val="0"/>
@@ -21474,7 +21474,7 @@
           <a:p>
             <a:pPr algn="just">
               <a:lnSpc>
-                <a:spcPct val="125000"/>
+                <a:spcPct val="110000"/>
               </a:lnSpc>
               <a:spcBef>
                 <a:spcPts val="0"/>
@@ -21496,7 +21496,7 @@
           <a:p>
             <a:pPr algn="just">
               <a:lnSpc>
-                <a:spcPct val="125000"/>
+                <a:spcPct val="110000"/>
               </a:lnSpc>
               <a:spcBef>
                 <a:spcPts val="0"/>
@@ -21610,7 +21610,7 @@
           <a:p>
             <a:pPr algn="just">
               <a:lnSpc>
-                <a:spcPct val="125000"/>
+                <a:spcPct val="110000"/>
               </a:lnSpc>
               <a:spcBef>
                 <a:spcPts val="0"/>
@@ -21632,7 +21632,7 @@
           <a:p>
             <a:pPr algn="just">
               <a:lnSpc>
-                <a:spcPct val="125000"/>
+                <a:spcPct val="110000"/>
               </a:lnSpc>
               <a:spcBef>
                 <a:spcPts val="0"/>
@@ -21654,7 +21654,7 @@
           <a:p>
             <a:pPr algn="just">
               <a:lnSpc>
-                <a:spcPct val="125000"/>
+                <a:spcPct val="110000"/>
               </a:lnSpc>
               <a:spcBef>
                 <a:spcPts val="0"/>
@@ -21676,7 +21676,7 @@
           <a:p>
             <a:pPr algn="just">
               <a:lnSpc>
-                <a:spcPct val="125000"/>
+                <a:spcPct val="110000"/>
               </a:lnSpc>
               <a:spcBef>
                 <a:spcPts val="0"/>
@@ -21698,7 +21698,7 @@
           <a:p>
             <a:pPr algn="just">
               <a:lnSpc>
-                <a:spcPct val="125000"/>
+                <a:spcPct val="110000"/>
               </a:lnSpc>
               <a:spcBef>
                 <a:spcPts val="0"/>
@@ -21720,7 +21720,7 @@
           <a:p>
             <a:pPr algn="just">
               <a:lnSpc>
-                <a:spcPct val="125000"/>
+                <a:spcPct val="110000"/>
               </a:lnSpc>
               <a:spcBef>
                 <a:spcPts val="0"/>
@@ -21742,7 +21742,7 @@
           <a:p>
             <a:pPr algn="just">
               <a:lnSpc>
-                <a:spcPct val="125000"/>
+                <a:spcPct val="110000"/>
               </a:lnSpc>
               <a:spcBef>
                 <a:spcPts val="0"/>
@@ -21764,7 +21764,7 @@
           <a:p>
             <a:pPr algn="just">
               <a:lnSpc>
-                <a:spcPct val="125000"/>
+                <a:spcPct val="110000"/>
               </a:lnSpc>
               <a:spcBef>
                 <a:spcPts val="0"/>
@@ -21786,7 +21786,7 @@
           <a:p>
             <a:pPr algn="just">
               <a:lnSpc>
-                <a:spcPct val="125000"/>
+                <a:spcPct val="110000"/>
               </a:lnSpc>
               <a:spcBef>
                 <a:spcPts val="0"/>
@@ -21900,7 +21900,7 @@
           <a:p>
             <a:pPr algn="just">
               <a:lnSpc>
-                <a:spcPct val="125000"/>
+                <a:spcPct val="110000"/>
               </a:lnSpc>
               <a:spcBef>
                 <a:spcPts val="0"/>
@@ -21922,7 +21922,7 @@
           <a:p>
             <a:pPr algn="just">
               <a:lnSpc>
-                <a:spcPct val="125000"/>
+                <a:spcPct val="110000"/>
               </a:lnSpc>
               <a:spcBef>
                 <a:spcPts val="0"/>
@@ -21944,7 +21944,7 @@
           <a:p>
             <a:pPr algn="just">
               <a:lnSpc>
-                <a:spcPct val="125000"/>
+                <a:spcPct val="110000"/>
               </a:lnSpc>
               <a:spcBef>
                 <a:spcPts val="0"/>
@@ -21966,7 +21966,7 @@
           <a:p>
             <a:pPr algn="just">
               <a:lnSpc>
-                <a:spcPct val="125000"/>
+                <a:spcPct val="110000"/>
               </a:lnSpc>
               <a:spcBef>
                 <a:spcPts val="0"/>
@@ -21988,7 +21988,7 @@
           <a:p>
             <a:pPr algn="just">
               <a:lnSpc>
-                <a:spcPct val="125000"/>
+                <a:spcPct val="110000"/>
               </a:lnSpc>
               <a:spcBef>
                 <a:spcPts val="0"/>
@@ -22010,7 +22010,7 @@
           <a:p>
             <a:pPr algn="just">
               <a:lnSpc>
-                <a:spcPct val="125000"/>
+                <a:spcPct val="110000"/>
               </a:lnSpc>
               <a:spcBef>
                 <a:spcPts val="0"/>
@@ -22032,7 +22032,7 @@
           <a:p>
             <a:pPr algn="just">
               <a:lnSpc>
-                <a:spcPct val="125000"/>
+                <a:spcPct val="110000"/>
               </a:lnSpc>
               <a:spcBef>
                 <a:spcPts val="0"/>
@@ -22054,7 +22054,7 @@
           <a:p>
             <a:pPr algn="just">
               <a:lnSpc>
-                <a:spcPct val="125000"/>
+                <a:spcPct val="110000"/>
               </a:lnSpc>
               <a:spcBef>
                 <a:spcPts val="0"/>
@@ -22076,7 +22076,7 @@
           <a:p>
             <a:pPr algn="just">
               <a:lnSpc>
-                <a:spcPct val="125000"/>
+                <a:spcPct val="110000"/>
               </a:lnSpc>
               <a:spcBef>
                 <a:spcPts val="0"/>
@@ -22098,7 +22098,7 @@
           <a:p>
             <a:pPr algn="just">
               <a:lnSpc>
-                <a:spcPct val="125000"/>
+                <a:spcPct val="110000"/>
               </a:lnSpc>
               <a:spcBef>
                 <a:spcPts val="0"/>
@@ -22120,7 +22120,7 @@
           <a:p>
             <a:pPr algn="just">
               <a:lnSpc>
-                <a:spcPct val="125000"/>
+                <a:spcPct val="110000"/>
               </a:lnSpc>
               <a:spcBef>
                 <a:spcPts val="0"/>
@@ -22142,7 +22142,7 @@
           <a:p>
             <a:pPr algn="just">
               <a:lnSpc>
-                <a:spcPct val="125000"/>
+                <a:spcPct val="110000"/>
               </a:lnSpc>
               <a:spcBef>
                 <a:spcPts val="0"/>
@@ -22256,7 +22256,7 @@
           <a:p>
             <a:pPr algn="just">
               <a:lnSpc>
-                <a:spcPct val="125000"/>
+                <a:spcPct val="110000"/>
               </a:lnSpc>
               <a:spcBef>
                 <a:spcPts val="0"/>
@@ -22278,7 +22278,7 @@
           <a:p>
             <a:pPr algn="just">
               <a:lnSpc>
-                <a:spcPct val="125000"/>
+                <a:spcPct val="110000"/>
               </a:lnSpc>
               <a:spcBef>
                 <a:spcPts val="0"/>
@@ -22300,7 +22300,7 @@
           <a:p>
             <a:pPr algn="just">
               <a:lnSpc>
-                <a:spcPct val="125000"/>
+                <a:spcPct val="110000"/>
               </a:lnSpc>
               <a:spcBef>
                 <a:spcPts val="0"/>
@@ -22322,7 +22322,7 @@
           <a:p>
             <a:pPr algn="just">
               <a:lnSpc>
-                <a:spcPct val="125000"/>
+                <a:spcPct val="110000"/>
               </a:lnSpc>
               <a:spcBef>
                 <a:spcPts val="0"/>
@@ -22344,7 +22344,7 @@
           <a:p>
             <a:pPr algn="just">
               <a:lnSpc>
-                <a:spcPct val="125000"/>
+                <a:spcPct val="110000"/>
               </a:lnSpc>
               <a:spcBef>
                 <a:spcPts val="0"/>
@@ -22366,7 +22366,7 @@
           <a:p>
             <a:pPr algn="just">
               <a:lnSpc>
-                <a:spcPct val="125000"/>
+                <a:spcPct val="110000"/>
               </a:lnSpc>
               <a:spcBef>
                 <a:spcPts val="0"/>
@@ -22388,7 +22388,7 @@
           <a:p>
             <a:pPr algn="just">
               <a:lnSpc>
-                <a:spcPct val="125000"/>
+                <a:spcPct val="110000"/>
               </a:lnSpc>
               <a:spcBef>
                 <a:spcPts val="0"/>
@@ -22410,7 +22410,7 @@
           <a:p>
             <a:pPr algn="just">
               <a:lnSpc>
-                <a:spcPct val="125000"/>
+                <a:spcPct val="110000"/>
               </a:lnSpc>
               <a:spcBef>
                 <a:spcPts val="0"/>
@@ -22432,7 +22432,7 @@
           <a:p>
             <a:pPr algn="just">
               <a:lnSpc>
-                <a:spcPct val="125000"/>
+                <a:spcPct val="110000"/>
               </a:lnSpc>
               <a:spcBef>
                 <a:spcPts val="0"/>
@@ -22546,7 +22546,7 @@
           <a:p>
             <a:pPr algn="just">
               <a:lnSpc>
-                <a:spcPct val="125000"/>
+                <a:spcPct val="110000"/>
               </a:lnSpc>
               <a:spcBef>
                 <a:spcPts val="0"/>
@@ -22568,7 +22568,7 @@
           <a:p>
             <a:pPr algn="just">
               <a:lnSpc>
-                <a:spcPct val="125000"/>
+                <a:spcPct val="110000"/>
               </a:lnSpc>
               <a:spcBef>
                 <a:spcPts val="0"/>
@@ -22590,7 +22590,7 @@
           <a:p>
             <a:pPr algn="just">
               <a:lnSpc>
-                <a:spcPct val="125000"/>
+                <a:spcPct val="110000"/>
               </a:lnSpc>
               <a:spcBef>
                 <a:spcPts val="0"/>
@@ -22612,7 +22612,7 @@
           <a:p>
             <a:pPr algn="just">
               <a:lnSpc>
-                <a:spcPct val="125000"/>
+                <a:spcPct val="110000"/>
               </a:lnSpc>
               <a:spcBef>
                 <a:spcPts val="0"/>
@@ -22634,7 +22634,7 @@
           <a:p>
             <a:pPr algn="just">
               <a:lnSpc>
-                <a:spcPct val="125000"/>
+                <a:spcPct val="110000"/>
               </a:lnSpc>
               <a:spcBef>
                 <a:spcPts val="0"/>
@@ -22656,7 +22656,7 @@
           <a:p>
             <a:pPr algn="just">
               <a:lnSpc>
-                <a:spcPct val="125000"/>
+                <a:spcPct val="110000"/>
               </a:lnSpc>
               <a:spcBef>
                 <a:spcPts val="0"/>
@@ -22678,7 +22678,7 @@
           <a:p>
             <a:pPr algn="just">
               <a:lnSpc>
-                <a:spcPct val="125000"/>
+                <a:spcPct val="110000"/>
               </a:lnSpc>
               <a:spcBef>
                 <a:spcPts val="0"/>
@@ -22700,7 +22700,7 @@
           <a:p>
             <a:pPr algn="just">
               <a:lnSpc>
-                <a:spcPct val="125000"/>
+                <a:spcPct val="110000"/>
               </a:lnSpc>
               <a:spcBef>
                 <a:spcPts val="0"/>
@@ -22722,7 +22722,7 @@
           <a:p>
             <a:pPr algn="just">
               <a:lnSpc>
-                <a:spcPct val="125000"/>
+                <a:spcPct val="110000"/>
               </a:lnSpc>
               <a:spcBef>
                 <a:spcPts val="0"/>
@@ -22836,7 +22836,7 @@
           <a:p>
             <a:pPr algn="just">
               <a:lnSpc>
-                <a:spcPct val="125000"/>
+                <a:spcPct val="110000"/>
               </a:lnSpc>
               <a:spcBef>
                 <a:spcPts val="0"/>
@@ -22858,7 +22858,7 @@
           <a:p>
             <a:pPr algn="just">
               <a:lnSpc>
-                <a:spcPct val="125000"/>
+                <a:spcPct val="110000"/>
               </a:lnSpc>
               <a:spcBef>
                 <a:spcPts val="0"/>
@@ -22880,7 +22880,7 @@
           <a:p>
             <a:pPr algn="just">
               <a:lnSpc>
-                <a:spcPct val="125000"/>
+                <a:spcPct val="110000"/>
               </a:lnSpc>
               <a:spcBef>
                 <a:spcPts val="0"/>
@@ -22902,7 +22902,7 @@
           <a:p>
             <a:pPr algn="just">
               <a:lnSpc>
-                <a:spcPct val="125000"/>
+                <a:spcPct val="110000"/>
               </a:lnSpc>
               <a:spcBef>
                 <a:spcPts val="0"/>
@@ -22924,7 +22924,7 @@
           <a:p>
             <a:pPr algn="just">
               <a:lnSpc>
-                <a:spcPct val="125000"/>
+                <a:spcPct val="110000"/>
               </a:lnSpc>
               <a:spcBef>
                 <a:spcPts val="0"/>
@@ -22946,7 +22946,7 @@
           <a:p>
             <a:pPr algn="just">
               <a:lnSpc>
-                <a:spcPct val="125000"/>
+                <a:spcPct val="110000"/>
               </a:lnSpc>
               <a:spcBef>
                 <a:spcPts val="0"/>
@@ -22968,7 +22968,7 @@
           <a:p>
             <a:pPr algn="just">
               <a:lnSpc>
-                <a:spcPct val="125000"/>
+                <a:spcPct val="110000"/>
               </a:lnSpc>
               <a:spcBef>
                 <a:spcPts val="0"/>
@@ -22990,7 +22990,7 @@
           <a:p>
             <a:pPr algn="just">
               <a:lnSpc>
-                <a:spcPct val="125000"/>
+                <a:spcPct val="110000"/>
               </a:lnSpc>
               <a:spcBef>
                 <a:spcPts val="0"/>
@@ -23012,7 +23012,7 @@
           <a:p>
             <a:pPr algn="just">
               <a:lnSpc>
-                <a:spcPct val="125000"/>
+                <a:spcPct val="110000"/>
               </a:lnSpc>
               <a:spcBef>
                 <a:spcPts val="0"/>
@@ -23034,7 +23034,7 @@
           <a:p>
             <a:pPr algn="just">
               <a:lnSpc>
-                <a:spcPct val="125000"/>
+                <a:spcPct val="110000"/>
               </a:lnSpc>
               <a:spcBef>
                 <a:spcPts val="0"/>
@@ -23056,7 +23056,7 @@
           <a:p>
             <a:pPr algn="just">
               <a:lnSpc>
-                <a:spcPct val="125000"/>
+                <a:spcPct val="110000"/>
               </a:lnSpc>
               <a:spcBef>
                 <a:spcPts val="0"/>
@@ -23078,7 +23078,7 @@
           <a:p>
             <a:pPr algn="just">
               <a:lnSpc>
-                <a:spcPct val="125000"/>
+                <a:spcPct val="110000"/>
               </a:lnSpc>
               <a:spcBef>
                 <a:spcPts val="0"/>
@@ -23192,7 +23192,7 @@
           <a:p>
             <a:pPr algn="just">
               <a:lnSpc>
-                <a:spcPct val="125000"/>
+                <a:spcPct val="110000"/>
               </a:lnSpc>
               <a:spcBef>
                 <a:spcPts val="0"/>
@@ -23214,7 +23214,7 @@
           <a:p>
             <a:pPr algn="just">
               <a:lnSpc>
-                <a:spcPct val="125000"/>
+                <a:spcPct val="110000"/>
               </a:lnSpc>
               <a:spcBef>
                 <a:spcPts val="0"/>
@@ -23236,7 +23236,7 @@
           <a:p>
             <a:pPr algn="just">
               <a:lnSpc>
-                <a:spcPct val="125000"/>
+                <a:spcPct val="110000"/>
               </a:lnSpc>
               <a:spcBef>
                 <a:spcPts val="0"/>
@@ -23258,7 +23258,7 @@
           <a:p>
             <a:pPr algn="just">
               <a:lnSpc>
-                <a:spcPct val="125000"/>
+                <a:spcPct val="110000"/>
               </a:lnSpc>
               <a:spcBef>
                 <a:spcPts val="0"/>
@@ -23280,7 +23280,7 @@
           <a:p>
             <a:pPr algn="just">
               <a:lnSpc>
-                <a:spcPct val="125000"/>
+                <a:spcPct val="110000"/>
               </a:lnSpc>
               <a:spcBef>
                 <a:spcPts val="0"/>
@@ -23302,7 +23302,7 @@
           <a:p>
             <a:pPr algn="just">
               <a:lnSpc>
-                <a:spcPct val="125000"/>
+                <a:spcPct val="110000"/>
               </a:lnSpc>
               <a:spcBef>
                 <a:spcPts val="0"/>
@@ -23324,7 +23324,7 @@
           <a:p>
             <a:pPr algn="just">
               <a:lnSpc>
-                <a:spcPct val="125000"/>
+                <a:spcPct val="110000"/>
               </a:lnSpc>
               <a:spcBef>
                 <a:spcPts val="0"/>
@@ -23346,7 +23346,7 @@
           <a:p>
             <a:pPr algn="just">
               <a:lnSpc>
-                <a:spcPct val="125000"/>
+                <a:spcPct val="110000"/>
               </a:lnSpc>
               <a:spcBef>
                 <a:spcPts val="0"/>
@@ -23368,7 +23368,7 @@
           <a:p>
             <a:pPr algn="just">
               <a:lnSpc>
-                <a:spcPct val="125000"/>
+                <a:spcPct val="110000"/>
               </a:lnSpc>
               <a:spcBef>
                 <a:spcPts val="0"/>
@@ -23390,7 +23390,7 @@
           <a:p>
             <a:pPr algn="just">
               <a:lnSpc>
-                <a:spcPct val="125000"/>
+                <a:spcPct val="110000"/>
               </a:lnSpc>
               <a:spcBef>
                 <a:spcPts val="0"/>
@@ -23412,7 +23412,7 @@
           <a:p>
             <a:pPr algn="just">
               <a:lnSpc>
-                <a:spcPct val="125000"/>
+                <a:spcPct val="110000"/>
               </a:lnSpc>
               <a:spcBef>
                 <a:spcPts val="0"/>
@@ -23434,7 +23434,7 @@
           <a:p>
             <a:pPr algn="just">
               <a:lnSpc>
-                <a:spcPct val="125000"/>
+                <a:spcPct val="110000"/>
               </a:lnSpc>
               <a:spcBef>
                 <a:spcPts val="0"/>
@@ -23548,7 +23548,7 @@
           <a:p>
             <a:pPr algn="just">
               <a:lnSpc>
-                <a:spcPct val="125000"/>
+                <a:spcPct val="110000"/>
               </a:lnSpc>
               <a:spcBef>
                 <a:spcPts val="0"/>
@@ -23570,7 +23570,7 @@
           <a:p>
             <a:pPr algn="just">
               <a:lnSpc>
-                <a:spcPct val="125000"/>
+                <a:spcPct val="110000"/>
               </a:lnSpc>
               <a:spcBef>
                 <a:spcPts val="0"/>
@@ -23592,7 +23592,7 @@
           <a:p>
             <a:pPr algn="just">
               <a:lnSpc>
-                <a:spcPct val="125000"/>
+                <a:spcPct val="110000"/>
               </a:lnSpc>
               <a:spcBef>
                 <a:spcPts val="0"/>
@@ -23614,7 +23614,7 @@
           <a:p>
             <a:pPr algn="just">
               <a:lnSpc>
-                <a:spcPct val="125000"/>
+                <a:spcPct val="110000"/>
               </a:lnSpc>
               <a:spcBef>
                 <a:spcPts val="0"/>
@@ -23636,7 +23636,7 @@
           <a:p>
             <a:pPr algn="just">
               <a:lnSpc>
-                <a:spcPct val="125000"/>
+                <a:spcPct val="110000"/>
               </a:lnSpc>
               <a:spcBef>
                 <a:spcPts val="0"/>
@@ -23658,7 +23658,7 @@
           <a:p>
             <a:pPr algn="just">
               <a:lnSpc>
-                <a:spcPct val="125000"/>
+                <a:spcPct val="110000"/>
               </a:lnSpc>
               <a:spcBef>
                 <a:spcPts val="0"/>
@@ -23680,7 +23680,7 @@
           <a:p>
             <a:pPr algn="just">
               <a:lnSpc>
-                <a:spcPct val="125000"/>
+                <a:spcPct val="110000"/>
               </a:lnSpc>
               <a:spcBef>
                 <a:spcPts val="0"/>
@@ -23702,7 +23702,7 @@
           <a:p>
             <a:pPr algn="just">
               <a:lnSpc>
-                <a:spcPct val="125000"/>
+                <a:spcPct val="110000"/>
               </a:lnSpc>
               <a:spcBef>
                 <a:spcPts val="0"/>
@@ -23724,7 +23724,7 @@
           <a:p>
             <a:pPr algn="just">
               <a:lnSpc>
-                <a:spcPct val="125000"/>
+                <a:spcPct val="110000"/>
               </a:lnSpc>
               <a:spcBef>
                 <a:spcPts val="0"/>
@@ -23746,7 +23746,7 @@
           <a:p>
             <a:pPr algn="just">
               <a:lnSpc>
-                <a:spcPct val="125000"/>
+                <a:spcPct val="110000"/>
               </a:lnSpc>
               <a:spcBef>
                 <a:spcPts val="0"/>
@@ -23768,7 +23768,7 @@
           <a:p>
             <a:pPr algn="just">
               <a:lnSpc>
-                <a:spcPct val="125000"/>
+                <a:spcPct val="110000"/>
               </a:lnSpc>
               <a:spcBef>
                 <a:spcPts val="0"/>
@@ -23790,7 +23790,7 @@
           <a:p>
             <a:pPr algn="just">
               <a:lnSpc>
-                <a:spcPct val="125000"/>
+                <a:spcPct val="110000"/>
               </a:lnSpc>
               <a:spcBef>
                 <a:spcPts val="0"/>
@@ -23812,7 +23812,7 @@
           <a:p>
             <a:pPr algn="just">
               <a:lnSpc>
-                <a:spcPct val="125000"/>
+                <a:spcPct val="110000"/>
               </a:lnSpc>
               <a:spcBef>
                 <a:spcPts val="0"/>
@@ -23834,7 +23834,7 @@
           <a:p>
             <a:pPr algn="just">
               <a:lnSpc>
-                <a:spcPct val="125000"/>
+                <a:spcPct val="110000"/>
               </a:lnSpc>
               <a:spcBef>
                 <a:spcPts val="0"/>
@@ -23856,7 +23856,7 @@
           <a:p>
             <a:pPr algn="just">
               <a:lnSpc>
-                <a:spcPct val="125000"/>
+                <a:spcPct val="110000"/>
               </a:lnSpc>
               <a:spcBef>
                 <a:spcPts val="0"/>
@@ -23878,7 +23878,7 @@
           <a:p>
             <a:pPr algn="just">
               <a:lnSpc>
-                <a:spcPct val="125000"/>
+                <a:spcPct val="110000"/>
               </a:lnSpc>
               <a:spcBef>
                 <a:spcPts val="0"/>
@@ -23900,7 +23900,7 @@
           <a:p>
             <a:pPr algn="just">
               <a:lnSpc>
-                <a:spcPct val="125000"/>
+                <a:spcPct val="110000"/>
               </a:lnSpc>
               <a:spcBef>
                 <a:spcPts val="0"/>
@@ -23922,7 +23922,7 @@
           <a:p>
             <a:pPr algn="just">
               <a:lnSpc>
-                <a:spcPct val="125000"/>
+                <a:spcPct val="110000"/>
               </a:lnSpc>
               <a:spcBef>
                 <a:spcPts val="0"/>
@@ -24036,7 +24036,7 @@
           <a:p>
             <a:pPr algn="just">
               <a:lnSpc>
-                <a:spcPct val="125000"/>
+                <a:spcPct val="110000"/>
               </a:lnSpc>
               <a:spcBef>
                 <a:spcPts val="0"/>
@@ -24058,7 +24058,7 @@
           <a:p>
             <a:pPr algn="just">
               <a:lnSpc>
-                <a:spcPct val="125000"/>
+                <a:spcPct val="110000"/>
               </a:lnSpc>
               <a:spcBef>
                 <a:spcPts val="0"/>
@@ -24080,7 +24080,7 @@
           <a:p>
             <a:pPr algn="just">
               <a:lnSpc>
-                <a:spcPct val="125000"/>
+                <a:spcPct val="110000"/>
               </a:lnSpc>
               <a:spcBef>
                 <a:spcPts val="0"/>
@@ -24102,7 +24102,7 @@
           <a:p>
             <a:pPr algn="just">
               <a:lnSpc>
-                <a:spcPct val="125000"/>
+                <a:spcPct val="110000"/>
               </a:lnSpc>
               <a:spcBef>
                 <a:spcPts val="0"/>
@@ -24124,7 +24124,7 @@
           <a:p>
             <a:pPr algn="just">
               <a:lnSpc>
-                <a:spcPct val="125000"/>
+                <a:spcPct val="110000"/>
               </a:lnSpc>
               <a:spcBef>
                 <a:spcPts val="0"/>
@@ -24146,7 +24146,7 @@
           <a:p>
             <a:pPr algn="just">
               <a:lnSpc>
-                <a:spcPct val="125000"/>
+                <a:spcPct val="110000"/>
               </a:lnSpc>
               <a:spcBef>
                 <a:spcPts val="0"/>
@@ -24168,7 +24168,7 @@
           <a:p>
             <a:pPr algn="just">
               <a:lnSpc>
-                <a:spcPct val="125000"/>
+                <a:spcPct val="110000"/>
               </a:lnSpc>
               <a:spcBef>
                 <a:spcPts val="0"/>
@@ -24190,7 +24190,7 @@
           <a:p>
             <a:pPr algn="just">
               <a:lnSpc>
-                <a:spcPct val="125000"/>
+                <a:spcPct val="110000"/>
               </a:lnSpc>
               <a:spcBef>
                 <a:spcPts val="0"/>
@@ -24212,7 +24212,7 @@
           <a:p>
             <a:pPr algn="just">
               <a:lnSpc>
-                <a:spcPct val="125000"/>
+                <a:spcPct val="110000"/>
               </a:lnSpc>
               <a:spcBef>
                 <a:spcPts val="0"/>
@@ -24326,7 +24326,7 @@
           <a:p>
             <a:pPr algn="just">
               <a:lnSpc>
-                <a:spcPct val="125000"/>
+                <a:spcPct val="110000"/>
               </a:lnSpc>
               <a:spcBef>
                 <a:spcPts val="0"/>
@@ -24348,7 +24348,7 @@
           <a:p>
             <a:pPr algn="just">
               <a:lnSpc>
-                <a:spcPct val="125000"/>
+                <a:spcPct val="110000"/>
               </a:lnSpc>
               <a:spcBef>
                 <a:spcPts val="0"/>
@@ -24370,7 +24370,7 @@
           <a:p>
             <a:pPr algn="just">
               <a:lnSpc>
-                <a:spcPct val="125000"/>
+                <a:spcPct val="110000"/>
               </a:lnSpc>
               <a:spcBef>
                 <a:spcPts val="0"/>
@@ -24392,7 +24392,7 @@
           <a:p>
             <a:pPr algn="just">
               <a:lnSpc>
-                <a:spcPct val="125000"/>
+                <a:spcPct val="110000"/>
               </a:lnSpc>
               <a:spcBef>
                 <a:spcPts val="0"/>
@@ -24414,7 +24414,7 @@
           <a:p>
             <a:pPr algn="just">
               <a:lnSpc>
-                <a:spcPct val="125000"/>
+                <a:spcPct val="110000"/>
               </a:lnSpc>
               <a:spcBef>
                 <a:spcPts val="0"/>
@@ -24436,7 +24436,7 @@
           <a:p>
             <a:pPr algn="just">
               <a:lnSpc>
-                <a:spcPct val="125000"/>
+                <a:spcPct val="110000"/>
               </a:lnSpc>
               <a:spcBef>
                 <a:spcPts val="0"/>
@@ -24458,7 +24458,7 @@
           <a:p>
             <a:pPr algn="just">
               <a:lnSpc>
-                <a:spcPct val="125000"/>
+                <a:spcPct val="110000"/>
               </a:lnSpc>
               <a:spcBef>
                 <a:spcPts val="0"/>
@@ -24480,7 +24480,7 @@
           <a:p>
             <a:pPr algn="just">
               <a:lnSpc>
-                <a:spcPct val="125000"/>
+                <a:spcPct val="110000"/>
               </a:lnSpc>
               <a:spcBef>
                 <a:spcPts val="0"/>
@@ -24502,7 +24502,7 @@
           <a:p>
             <a:pPr algn="just">
               <a:lnSpc>
-                <a:spcPct val="125000"/>
+                <a:spcPct val="110000"/>
               </a:lnSpc>
               <a:spcBef>
                 <a:spcPts val="0"/>
@@ -24524,7 +24524,7 @@
           <a:p>
             <a:pPr algn="just">
               <a:lnSpc>
-                <a:spcPct val="125000"/>
+                <a:spcPct val="110000"/>
               </a:lnSpc>
               <a:spcBef>
                 <a:spcPts val="0"/>
@@ -24546,7 +24546,7 @@
           <a:p>
             <a:pPr algn="just">
               <a:lnSpc>
-                <a:spcPct val="125000"/>
+                <a:spcPct val="110000"/>
               </a:lnSpc>
               <a:spcBef>
                 <a:spcPts val="0"/>
@@ -24568,7 +24568,7 @@
           <a:p>
             <a:pPr algn="just">
               <a:lnSpc>
-                <a:spcPct val="125000"/>
+                <a:spcPct val="110000"/>
               </a:lnSpc>
               <a:spcBef>
                 <a:spcPts val="0"/>
@@ -24590,7 +24590,7 @@
           <a:p>
             <a:pPr algn="just">
               <a:lnSpc>
-                <a:spcPct val="125000"/>
+                <a:spcPct val="110000"/>
               </a:lnSpc>
               <a:spcBef>
                 <a:spcPts val="0"/>
@@ -24612,7 +24612,7 @@
           <a:p>
             <a:pPr algn="just">
               <a:lnSpc>
-                <a:spcPct val="125000"/>
+                <a:spcPct val="110000"/>
               </a:lnSpc>
               <a:spcBef>
                 <a:spcPts val="0"/>
@@ -24634,7 +24634,7 @@
           <a:p>
             <a:pPr algn="just">
               <a:lnSpc>
-                <a:spcPct val="125000"/>
+                <a:spcPct val="110000"/>
               </a:lnSpc>
               <a:spcBef>
                 <a:spcPts val="0"/>
@@ -24748,7 +24748,7 @@
           <a:p>
             <a:pPr algn="just">
               <a:lnSpc>
-                <a:spcPct val="125000"/>
+                <a:spcPct val="110000"/>
               </a:lnSpc>
               <a:spcBef>
                 <a:spcPts val="0"/>
@@ -24770,7 +24770,7 @@
           <a:p>
             <a:pPr algn="just">
               <a:lnSpc>
-                <a:spcPct val="125000"/>
+                <a:spcPct val="110000"/>
               </a:lnSpc>
               <a:spcBef>
                 <a:spcPts val="0"/>
@@ -24792,7 +24792,7 @@
           <a:p>
             <a:pPr algn="just">
               <a:lnSpc>
-                <a:spcPct val="125000"/>
+                <a:spcPct val="110000"/>
               </a:lnSpc>
               <a:spcBef>
                 <a:spcPts val="0"/>
@@ -24814,7 +24814,7 @@
           <a:p>
             <a:pPr algn="just">
               <a:lnSpc>
-                <a:spcPct val="125000"/>
+                <a:spcPct val="110000"/>
               </a:lnSpc>
               <a:spcBef>
                 <a:spcPts val="0"/>
@@ -24836,7 +24836,7 @@
           <a:p>
             <a:pPr algn="just">
               <a:lnSpc>
-                <a:spcPct val="125000"/>
+                <a:spcPct val="110000"/>
               </a:lnSpc>
               <a:spcBef>
                 <a:spcPts val="0"/>
@@ -24858,7 +24858,7 @@
           <a:p>
             <a:pPr algn="just">
               <a:lnSpc>
-                <a:spcPct val="125000"/>
+                <a:spcPct val="110000"/>
               </a:lnSpc>
               <a:spcBef>
                 <a:spcPts val="0"/>
@@ -24880,7 +24880,7 @@
           <a:p>
             <a:pPr algn="just">
               <a:lnSpc>
-                <a:spcPct val="125000"/>
+                <a:spcPct val="110000"/>
               </a:lnSpc>
               <a:spcBef>
                 <a:spcPts val="0"/>
@@ -24902,7 +24902,7 @@
           <a:p>
             <a:pPr algn="just">
               <a:lnSpc>
-                <a:spcPct val="125000"/>
+                <a:spcPct val="110000"/>
               </a:lnSpc>
               <a:spcBef>
                 <a:spcPts val="0"/>
@@ -24924,7 +24924,7 @@
           <a:p>
             <a:pPr algn="just">
               <a:lnSpc>
-                <a:spcPct val="125000"/>
+                <a:spcPct val="110000"/>
               </a:lnSpc>
               <a:spcBef>
                 <a:spcPts val="0"/>
@@ -24946,7 +24946,7 @@
           <a:p>
             <a:pPr algn="just">
               <a:lnSpc>
-                <a:spcPct val="125000"/>
+                <a:spcPct val="110000"/>
               </a:lnSpc>
               <a:spcBef>
                 <a:spcPts val="0"/>
@@ -24968,7 +24968,7 @@
           <a:p>
             <a:pPr algn="just">
               <a:lnSpc>
-                <a:spcPct val="125000"/>
+                <a:spcPct val="110000"/>
               </a:lnSpc>
               <a:spcBef>
                 <a:spcPts val="0"/>
@@ -25082,7 +25082,7 @@
           <a:p>
             <a:pPr algn="just">
               <a:lnSpc>
-                <a:spcPct val="125000"/>
+                <a:spcPct val="110000"/>
               </a:lnSpc>
               <a:spcBef>
                 <a:spcPts val="0"/>
@@ -25104,7 +25104,7 @@
           <a:p>
             <a:pPr algn="just">
               <a:lnSpc>
-                <a:spcPct val="125000"/>
+                <a:spcPct val="110000"/>
               </a:lnSpc>
               <a:spcBef>
                 <a:spcPts val="0"/>
@@ -25126,7 +25126,7 @@
           <a:p>
             <a:pPr algn="just">
               <a:lnSpc>
-                <a:spcPct val="125000"/>
+                <a:spcPct val="110000"/>
               </a:lnSpc>
               <a:spcBef>
                 <a:spcPts val="0"/>
@@ -25148,7 +25148,7 @@
           <a:p>
             <a:pPr algn="just">
               <a:lnSpc>
-                <a:spcPct val="125000"/>
+                <a:spcPct val="110000"/>
               </a:lnSpc>
               <a:spcBef>
                 <a:spcPts val="0"/>
@@ -25170,7 +25170,7 @@
           <a:p>
             <a:pPr algn="just">
               <a:lnSpc>
-                <a:spcPct val="125000"/>
+                <a:spcPct val="110000"/>
               </a:lnSpc>
               <a:spcBef>
                 <a:spcPts val="0"/>
@@ -25192,7 +25192,7 @@
           <a:p>
             <a:pPr algn="just">
               <a:lnSpc>
-                <a:spcPct val="125000"/>
+                <a:spcPct val="110000"/>
               </a:lnSpc>
               <a:spcBef>
                 <a:spcPts val="0"/>
@@ -25214,7 +25214,7 @@
           <a:p>
             <a:pPr algn="just">
               <a:lnSpc>
-                <a:spcPct val="125000"/>
+                <a:spcPct val="110000"/>
               </a:lnSpc>
               <a:spcBef>
                 <a:spcPts val="0"/>
@@ -25236,7 +25236,7 @@
           <a:p>
             <a:pPr algn="just">
               <a:lnSpc>
-                <a:spcPct val="125000"/>
+                <a:spcPct val="110000"/>
               </a:lnSpc>
               <a:spcBef>
                 <a:spcPts val="0"/>
@@ -25258,7 +25258,7 @@
           <a:p>
             <a:pPr algn="just">
               <a:lnSpc>
-                <a:spcPct val="125000"/>
+                <a:spcPct val="110000"/>
               </a:lnSpc>
               <a:spcBef>
                 <a:spcPts val="0"/>
@@ -25280,7 +25280,7 @@
           <a:p>
             <a:pPr algn="just">
               <a:lnSpc>
-                <a:spcPct val="125000"/>
+                <a:spcPct val="110000"/>
               </a:lnSpc>
               <a:spcBef>
                 <a:spcPts val="0"/>
@@ -25302,7 +25302,7 @@
           <a:p>
             <a:pPr algn="just">
               <a:lnSpc>
-                <a:spcPct val="125000"/>
+                <a:spcPct val="110000"/>
               </a:lnSpc>
               <a:spcBef>
                 <a:spcPts val="0"/>
@@ -25324,7 +25324,7 @@
           <a:p>
             <a:pPr algn="just">
               <a:lnSpc>
-                <a:spcPct val="125000"/>
+                <a:spcPct val="110000"/>
               </a:lnSpc>
               <a:spcBef>
                 <a:spcPts val="0"/>
@@ -25346,7 +25346,7 @@
           <a:p>
             <a:pPr algn="just">
               <a:lnSpc>
-                <a:spcPct val="125000"/>
+                <a:spcPct val="110000"/>
               </a:lnSpc>
               <a:spcBef>
                 <a:spcPts val="0"/>
@@ -25368,7 +25368,7 @@
           <a:p>
             <a:pPr algn="just">
               <a:lnSpc>
-                <a:spcPct val="125000"/>
+                <a:spcPct val="110000"/>
               </a:lnSpc>
               <a:spcBef>
                 <a:spcPts val="0"/>
@@ -25390,7 +25390,7 @@
           <a:p>
             <a:pPr algn="just">
               <a:lnSpc>
-                <a:spcPct val="125000"/>
+                <a:spcPct val="110000"/>
               </a:lnSpc>
               <a:spcBef>
                 <a:spcPts val="0"/>
@@ -25412,7 +25412,7 @@
           <a:p>
             <a:pPr algn="just">
               <a:lnSpc>
-                <a:spcPct val="125000"/>
+                <a:spcPct val="110000"/>
               </a:lnSpc>
               <a:spcBef>
                 <a:spcPts val="0"/>
@@ -25434,7 +25434,7 @@
           <a:p>
             <a:pPr algn="just">
               <a:lnSpc>
-                <a:spcPct val="125000"/>
+                <a:spcPct val="110000"/>
               </a:lnSpc>
               <a:spcBef>
                 <a:spcPts val="0"/>
@@ -25456,7 +25456,7 @@
           <a:p>
             <a:pPr algn="just">
               <a:lnSpc>
-                <a:spcPct val="125000"/>
+                <a:spcPct val="110000"/>
               </a:lnSpc>
               <a:spcBef>
                 <a:spcPts val="0"/>
@@ -25478,7 +25478,7 @@
           <a:p>
             <a:pPr algn="just">
               <a:lnSpc>
-                <a:spcPct val="125000"/>
+                <a:spcPct val="110000"/>
               </a:lnSpc>
               <a:spcBef>
                 <a:spcPts val="0"/>
@@ -25500,7 +25500,7 @@
           <a:p>
             <a:pPr algn="just">
               <a:lnSpc>
-                <a:spcPct val="125000"/>
+                <a:spcPct val="110000"/>
               </a:lnSpc>
               <a:spcBef>
                 <a:spcPts val="0"/>
@@ -25614,7 +25614,7 @@
           <a:p>
             <a:pPr algn="just">
               <a:lnSpc>
-                <a:spcPct val="125000"/>
+                <a:spcPct val="110000"/>
               </a:lnSpc>
               <a:spcBef>
                 <a:spcPts val="0"/>
@@ -25636,7 +25636,7 @@
           <a:p>
             <a:pPr algn="just">
               <a:lnSpc>
-                <a:spcPct val="125000"/>
+                <a:spcPct val="110000"/>
               </a:lnSpc>
               <a:spcBef>
                 <a:spcPts val="0"/>
@@ -25658,7 +25658,7 @@
           <a:p>
             <a:pPr algn="just">
               <a:lnSpc>
-                <a:spcPct val="125000"/>
+                <a:spcPct val="110000"/>
               </a:lnSpc>
               <a:spcBef>
                 <a:spcPts val="0"/>
@@ -25680,7 +25680,7 @@
           <a:p>
             <a:pPr algn="just">
               <a:lnSpc>
-                <a:spcPct val="125000"/>
+                <a:spcPct val="110000"/>
               </a:lnSpc>
               <a:spcBef>
                 <a:spcPts val="0"/>
@@ -25702,7 +25702,7 @@
           <a:p>
             <a:pPr algn="just">
               <a:lnSpc>
-                <a:spcPct val="125000"/>
+                <a:spcPct val="110000"/>
               </a:lnSpc>
               <a:spcBef>
                 <a:spcPts val="0"/>
@@ -25724,7 +25724,7 @@
           <a:p>
             <a:pPr algn="just">
               <a:lnSpc>
-                <a:spcPct val="125000"/>
+                <a:spcPct val="110000"/>
               </a:lnSpc>
               <a:spcBef>
                 <a:spcPts val="0"/>
@@ -25746,7 +25746,7 @@
           <a:p>
             <a:pPr algn="just">
               <a:lnSpc>
-                <a:spcPct val="125000"/>
+                <a:spcPct val="110000"/>
               </a:lnSpc>
               <a:spcBef>
                 <a:spcPts val="0"/>
@@ -25768,7 +25768,7 @@
           <a:p>
             <a:pPr algn="just">
               <a:lnSpc>
-                <a:spcPct val="125000"/>
+                <a:spcPct val="110000"/>
               </a:lnSpc>
               <a:spcBef>
                 <a:spcPts val="0"/>
@@ -25790,7 +25790,7 @@
           <a:p>
             <a:pPr algn="just">
               <a:lnSpc>
-                <a:spcPct val="125000"/>
+                <a:spcPct val="110000"/>
               </a:lnSpc>
               <a:spcBef>
                 <a:spcPts val="0"/>
@@ -25812,7 +25812,7 @@
           <a:p>
             <a:pPr algn="just">
               <a:lnSpc>
-                <a:spcPct val="125000"/>
+                <a:spcPct val="110000"/>
               </a:lnSpc>
               <a:spcBef>
                 <a:spcPts val="0"/>
@@ -25834,7 +25834,7 @@
           <a:p>
             <a:pPr algn="just">
               <a:lnSpc>
-                <a:spcPct val="125000"/>
+                <a:spcPct val="110000"/>
               </a:lnSpc>
               <a:spcBef>
                 <a:spcPts val="0"/>
@@ -25856,7 +25856,7 @@
           <a:p>
             <a:pPr algn="just">
               <a:lnSpc>
-                <a:spcPct val="125000"/>
+                <a:spcPct val="110000"/>
               </a:lnSpc>
               <a:spcBef>
                 <a:spcPts val="0"/>
@@ -25878,7 +25878,7 @@
           <a:p>
             <a:pPr algn="just">
               <a:lnSpc>
-                <a:spcPct val="125000"/>
+                <a:spcPct val="110000"/>
               </a:lnSpc>
               <a:spcBef>
                 <a:spcPts val="0"/>
@@ -25992,7 +25992,7 @@
           <a:p>
             <a:pPr algn="just">
               <a:lnSpc>
-                <a:spcPct val="125000"/>
+                <a:spcPct val="110000"/>
               </a:lnSpc>
               <a:spcBef>
                 <a:spcPts val="0"/>
@@ -26014,7 +26014,7 @@
           <a:p>
             <a:pPr algn="just">
               <a:lnSpc>
-                <a:spcPct val="125000"/>
+                <a:spcPct val="110000"/>
               </a:lnSpc>
               <a:spcBef>
                 <a:spcPts val="0"/>
@@ -26036,7 +26036,7 @@
           <a:p>
             <a:pPr algn="just">
               <a:lnSpc>
-                <a:spcPct val="125000"/>
+                <a:spcPct val="110000"/>
               </a:lnSpc>
               <a:spcBef>
                 <a:spcPts val="0"/>
@@ -26058,7 +26058,7 @@
           <a:p>
             <a:pPr algn="just">
               <a:lnSpc>
-                <a:spcPct val="125000"/>
+                <a:spcPct val="110000"/>
               </a:lnSpc>
               <a:spcBef>
                 <a:spcPts val="0"/>
@@ -26080,7 +26080,7 @@
           <a:p>
             <a:pPr algn="just">
               <a:lnSpc>
-                <a:spcPct val="125000"/>
+                <a:spcPct val="110000"/>
               </a:lnSpc>
               <a:spcBef>
                 <a:spcPts val="0"/>
@@ -26102,7 +26102,7 @@
           <a:p>
             <a:pPr algn="just">
               <a:lnSpc>
-                <a:spcPct val="125000"/>
+                <a:spcPct val="110000"/>
               </a:lnSpc>
               <a:spcBef>
                 <a:spcPts val="0"/>
@@ -26124,7 +26124,7 @@
           <a:p>
             <a:pPr algn="just">
               <a:lnSpc>
-                <a:spcPct val="125000"/>
+                <a:spcPct val="110000"/>
               </a:lnSpc>
               <a:spcBef>
                 <a:spcPts val="0"/>
@@ -26146,7 +26146,7 @@
           <a:p>
             <a:pPr algn="just">
               <a:lnSpc>
-                <a:spcPct val="125000"/>
+                <a:spcPct val="110000"/>
               </a:lnSpc>
               <a:spcBef>
                 <a:spcPts val="0"/>
@@ -26168,7 +26168,7 @@
           <a:p>
             <a:pPr algn="just">
               <a:lnSpc>
-                <a:spcPct val="125000"/>
+                <a:spcPct val="110000"/>
               </a:lnSpc>
               <a:spcBef>
                 <a:spcPts val="0"/>
@@ -26190,7 +26190,7 @@
           <a:p>
             <a:pPr algn="just">
               <a:lnSpc>
-                <a:spcPct val="125000"/>
+                <a:spcPct val="110000"/>
               </a:lnSpc>
               <a:spcBef>
                 <a:spcPts val="0"/>
@@ -26212,7 +26212,7 @@
           <a:p>
             <a:pPr algn="just">
               <a:lnSpc>
-                <a:spcPct val="125000"/>
+                <a:spcPct val="110000"/>
               </a:lnSpc>
               <a:spcBef>
                 <a:spcPts val="0"/>
@@ -26234,7 +26234,7 @@
           <a:p>
             <a:pPr algn="just">
               <a:lnSpc>
-                <a:spcPct val="125000"/>
+                <a:spcPct val="110000"/>
               </a:lnSpc>
               <a:spcBef>
                 <a:spcPts val="0"/>
@@ -26256,7 +26256,7 @@
           <a:p>
             <a:pPr algn="just">
               <a:lnSpc>
-                <a:spcPct val="125000"/>
+                <a:spcPct val="110000"/>
               </a:lnSpc>
               <a:spcBef>
                 <a:spcPts val="0"/>
@@ -26278,7 +26278,7 @@
           <a:p>
             <a:pPr algn="just">
               <a:lnSpc>
-                <a:spcPct val="125000"/>
+                <a:spcPct val="110000"/>
               </a:lnSpc>
               <a:spcBef>
                 <a:spcPts val="0"/>
@@ -26300,7 +26300,7 @@
           <a:p>
             <a:pPr algn="just">
               <a:lnSpc>
-                <a:spcPct val="125000"/>
+                <a:spcPct val="110000"/>
               </a:lnSpc>
               <a:spcBef>
                 <a:spcPts val="0"/>
@@ -26322,7 +26322,7 @@
           <a:p>
             <a:pPr algn="just">
               <a:lnSpc>
-                <a:spcPct val="125000"/>
+                <a:spcPct val="110000"/>
               </a:lnSpc>
               <a:spcBef>
                 <a:spcPts val="0"/>
@@ -26344,7 +26344,7 @@
           <a:p>
             <a:pPr algn="just">
               <a:lnSpc>
-                <a:spcPct val="125000"/>
+                <a:spcPct val="110000"/>
               </a:lnSpc>
               <a:spcBef>
                 <a:spcPts val="0"/>
@@ -26366,7 +26366,7 @@
           <a:p>
             <a:pPr algn="just">
               <a:lnSpc>
-                <a:spcPct val="125000"/>
+                <a:spcPct val="110000"/>
               </a:lnSpc>
               <a:spcBef>
                 <a:spcPts val="0"/>
@@ -26388,7 +26388,7 @@
           <a:p>
             <a:pPr algn="just">
               <a:lnSpc>
-                <a:spcPct val="125000"/>
+                <a:spcPct val="110000"/>
               </a:lnSpc>
               <a:spcBef>
                 <a:spcPts val="0"/>
@@ -26410,7 +26410,7 @@
           <a:p>
             <a:pPr algn="just">
               <a:lnSpc>
-                <a:spcPct val="125000"/>
+                <a:spcPct val="110000"/>
               </a:lnSpc>
               <a:spcBef>
                 <a:spcPts val="0"/>
@@ -26524,7 +26524,7 @@
           <a:p>
             <a:pPr algn="just">
               <a:lnSpc>
-                <a:spcPct val="125000"/>
+                <a:spcPct val="110000"/>
               </a:lnSpc>
               <a:spcBef>
                 <a:spcPts val="0"/>
@@ -26546,7 +26546,7 @@
           <a:p>
             <a:pPr algn="just">
               <a:lnSpc>
-                <a:spcPct val="125000"/>
+                <a:spcPct val="110000"/>
               </a:lnSpc>
               <a:spcBef>
                 <a:spcPts val="0"/>
@@ -26568,7 +26568,7 @@
           <a:p>
             <a:pPr algn="just">
               <a:lnSpc>
-                <a:spcPct val="125000"/>
+                <a:spcPct val="110000"/>
               </a:lnSpc>
               <a:spcBef>
                 <a:spcPts val="0"/>
@@ -26590,7 +26590,7 @@
           <a:p>
             <a:pPr algn="just">
               <a:lnSpc>
-                <a:spcPct val="125000"/>
+                <a:spcPct val="110000"/>
               </a:lnSpc>
               <a:spcBef>
                 <a:spcPts val="0"/>
@@ -26612,7 +26612,7 @@
           <a:p>
             <a:pPr algn="just">
               <a:lnSpc>
-                <a:spcPct val="125000"/>
+                <a:spcPct val="110000"/>
               </a:lnSpc>
               <a:spcBef>
                 <a:spcPts val="0"/>
@@ -26634,7 +26634,7 @@
           <a:p>
             <a:pPr algn="just">
               <a:lnSpc>
-                <a:spcPct val="125000"/>
+                <a:spcPct val="110000"/>
               </a:lnSpc>
               <a:spcBef>
                 <a:spcPts val="0"/>
@@ -26656,7 +26656,7 @@
           <a:p>
             <a:pPr algn="just">
               <a:lnSpc>
-                <a:spcPct val="125000"/>
+                <a:spcPct val="110000"/>
               </a:lnSpc>
               <a:spcBef>
                 <a:spcPts val="0"/>
@@ -26678,7 +26678,7 @@
           <a:p>
             <a:pPr algn="just">
               <a:lnSpc>
-                <a:spcPct val="125000"/>
+                <a:spcPct val="110000"/>
               </a:lnSpc>
               <a:spcBef>
                 <a:spcPts val="0"/>
@@ -26700,7 +26700,7 @@
           <a:p>
             <a:pPr algn="just">
               <a:lnSpc>
-                <a:spcPct val="125000"/>
+                <a:spcPct val="110000"/>
               </a:lnSpc>
               <a:spcBef>
                 <a:spcPts val="0"/>
@@ -26722,7 +26722,7 @@
           <a:p>
             <a:pPr algn="just">
               <a:lnSpc>
-                <a:spcPct val="125000"/>
+                <a:spcPct val="110000"/>
               </a:lnSpc>
               <a:spcBef>
                 <a:spcPts val="0"/>
@@ -26744,7 +26744,7 @@
           <a:p>
             <a:pPr algn="just">
               <a:lnSpc>
-                <a:spcPct val="125000"/>
+                <a:spcPct val="110000"/>
               </a:lnSpc>
               <a:spcBef>
                 <a:spcPts val="0"/>
@@ -26766,7 +26766,7 @@
           <a:p>
             <a:pPr algn="just">
               <a:lnSpc>
-                <a:spcPct val="125000"/>
+                <a:spcPct val="110000"/>
               </a:lnSpc>
               <a:spcBef>
                 <a:spcPts val="0"/>
@@ -26788,7 +26788,7 @@
           <a:p>
             <a:pPr algn="just">
               <a:lnSpc>
-                <a:spcPct val="125000"/>
+                <a:spcPct val="110000"/>
               </a:lnSpc>
               <a:spcBef>
                 <a:spcPts val="0"/>
@@ -26810,7 +26810,7 @@
           <a:p>
             <a:pPr algn="just">
               <a:lnSpc>
-                <a:spcPct val="125000"/>
+                <a:spcPct val="110000"/>
               </a:lnSpc>
               <a:spcBef>
                 <a:spcPts val="0"/>
@@ -26832,7 +26832,7 @@
           <a:p>
             <a:pPr algn="just">
               <a:lnSpc>
-                <a:spcPct val="125000"/>
+                <a:spcPct val="110000"/>
               </a:lnSpc>
               <a:spcBef>
                 <a:spcPts val="0"/>
@@ -26854,7 +26854,7 @@
           <a:p>
             <a:pPr algn="just">
               <a:lnSpc>
-                <a:spcPct val="125000"/>
+                <a:spcPct val="110000"/>
               </a:lnSpc>
               <a:spcBef>
                 <a:spcPts val="0"/>
@@ -26876,7 +26876,7 @@
           <a:p>
             <a:pPr algn="just">
               <a:lnSpc>
-                <a:spcPct val="125000"/>
+                <a:spcPct val="110000"/>
               </a:lnSpc>
               <a:spcBef>
                 <a:spcPts val="0"/>
@@ -26898,7 +26898,7 @@
           <a:p>
             <a:pPr algn="just">
               <a:lnSpc>
-                <a:spcPct val="125000"/>
+                <a:spcPct val="110000"/>
               </a:lnSpc>
               <a:spcBef>
                 <a:spcPts val="0"/>
@@ -26920,7 +26920,7 @@
           <a:p>
             <a:pPr algn="just">
               <a:lnSpc>
-                <a:spcPct val="125000"/>
+                <a:spcPct val="110000"/>
               </a:lnSpc>
               <a:spcBef>
                 <a:spcPts val="0"/>
@@ -26942,7 +26942,7 @@
           <a:p>
             <a:pPr algn="just">
               <a:lnSpc>
-                <a:spcPct val="125000"/>
+                <a:spcPct val="110000"/>
               </a:lnSpc>
               <a:spcBef>
                 <a:spcPts val="0"/>
@@ -26964,7 +26964,7 @@
           <a:p>
             <a:pPr algn="just">
               <a:lnSpc>
-                <a:spcPct val="125000"/>
+                <a:spcPct val="110000"/>
               </a:lnSpc>
               <a:spcBef>
                 <a:spcPts val="0"/>
@@ -27078,7 +27078,7 @@
           <a:p>
             <a:pPr algn="just">
               <a:lnSpc>
-                <a:spcPct val="125000"/>
+                <a:spcPct val="110000"/>
               </a:lnSpc>
               <a:spcBef>
                 <a:spcPts val="0"/>
@@ -27100,7 +27100,7 @@
           <a:p>
             <a:pPr algn="just">
               <a:lnSpc>
-                <a:spcPct val="125000"/>
+                <a:spcPct val="110000"/>
               </a:lnSpc>
               <a:spcBef>
                 <a:spcPts val="0"/>
@@ -27122,7 +27122,7 @@
           <a:p>
             <a:pPr algn="just">
               <a:lnSpc>
-                <a:spcPct val="125000"/>
+                <a:spcPct val="110000"/>
               </a:lnSpc>
               <a:spcBef>
                 <a:spcPts val="0"/>
@@ -27144,7 +27144,7 @@
           <a:p>
             <a:pPr algn="just">
               <a:lnSpc>
-                <a:spcPct val="125000"/>
+                <a:spcPct val="110000"/>
               </a:lnSpc>
               <a:spcBef>
                 <a:spcPts val="0"/>
@@ -27166,7 +27166,7 @@
           <a:p>
             <a:pPr algn="just">
               <a:lnSpc>
-                <a:spcPct val="125000"/>
+                <a:spcPct val="110000"/>
               </a:lnSpc>
               <a:spcBef>
                 <a:spcPts val="0"/>
@@ -27188,7 +27188,7 @@
           <a:p>
             <a:pPr algn="just">
               <a:lnSpc>
-                <a:spcPct val="125000"/>
+                <a:spcPct val="110000"/>
               </a:lnSpc>
               <a:spcBef>
                 <a:spcPts val="0"/>
@@ -27210,7 +27210,7 @@
           <a:p>
             <a:pPr algn="just">
               <a:lnSpc>
-                <a:spcPct val="125000"/>
+                <a:spcPct val="110000"/>
               </a:lnSpc>
               <a:spcBef>
                 <a:spcPts val="0"/>
@@ -27232,7 +27232,7 @@
           <a:p>
             <a:pPr algn="just">
               <a:lnSpc>
-                <a:spcPct val="125000"/>
+                <a:spcPct val="110000"/>
               </a:lnSpc>
               <a:spcBef>
                 <a:spcPts val="0"/>
@@ -27254,7 +27254,7 @@
           <a:p>
             <a:pPr algn="just">
               <a:lnSpc>
-                <a:spcPct val="125000"/>
+                <a:spcPct val="110000"/>
               </a:lnSpc>
               <a:spcBef>
                 <a:spcPts val="0"/>
@@ -27276,7 +27276,7 @@
           <a:p>
             <a:pPr algn="just">
               <a:lnSpc>
-                <a:spcPct val="125000"/>
+                <a:spcPct val="110000"/>
               </a:lnSpc>
               <a:spcBef>
                 <a:spcPts val="0"/>
@@ -27298,7 +27298,7 @@
           <a:p>
             <a:pPr algn="just">
               <a:lnSpc>
-                <a:spcPct val="125000"/>
+                <a:spcPct val="110000"/>
               </a:lnSpc>
               <a:spcBef>
                 <a:spcPts val="0"/>
@@ -27320,7 +27320,7 @@
           <a:p>
             <a:pPr algn="just">
               <a:lnSpc>
-                <a:spcPct val="125000"/>
+                <a:spcPct val="110000"/>
               </a:lnSpc>
               <a:spcBef>
                 <a:spcPts val="0"/>
@@ -27342,7 +27342,7 @@
           <a:p>
             <a:pPr algn="just">
               <a:lnSpc>
-                <a:spcPct val="125000"/>
+                <a:spcPct val="110000"/>
               </a:lnSpc>
               <a:spcBef>
                 <a:spcPts val="0"/>
@@ -27364,7 +27364,7 @@
           <a:p>
             <a:pPr algn="just">
               <a:lnSpc>
-                <a:spcPct val="125000"/>
+                <a:spcPct val="110000"/>
               </a:lnSpc>
               <a:spcBef>
                 <a:spcPts val="0"/>
@@ -27386,7 +27386,7 @@
           <a:p>
             <a:pPr algn="just">
               <a:lnSpc>
-                <a:spcPct val="125000"/>
+                <a:spcPct val="110000"/>
               </a:lnSpc>
               <a:spcBef>
                 <a:spcPts val="0"/>
@@ -27408,7 +27408,7 @@
           <a:p>
             <a:pPr algn="just">
               <a:lnSpc>
-                <a:spcPct val="125000"/>
+                <a:spcPct val="110000"/>
               </a:lnSpc>
               <a:spcBef>
                 <a:spcPts val="0"/>
@@ -27430,7 +27430,7 @@
           <a:p>
             <a:pPr algn="just">
               <a:lnSpc>
-                <a:spcPct val="125000"/>
+                <a:spcPct val="110000"/>
               </a:lnSpc>
               <a:spcBef>
                 <a:spcPts val="0"/>
@@ -27452,7 +27452,7 @@
           <a:p>
             <a:pPr algn="just">
               <a:lnSpc>
-                <a:spcPct val="125000"/>
+                <a:spcPct val="110000"/>
               </a:lnSpc>
               <a:spcBef>
                 <a:spcPts val="0"/>
@@ -27566,7 +27566,7 @@
           <a:p>
             <a:pPr algn="just">
               <a:lnSpc>
-                <a:spcPct val="125000"/>
+                <a:spcPct val="110000"/>
               </a:lnSpc>
               <a:spcBef>
                 <a:spcPts val="0"/>
@@ -27588,7 +27588,7 @@
           <a:p>
             <a:pPr algn="just">
               <a:lnSpc>
-                <a:spcPct val="125000"/>
+                <a:spcPct val="110000"/>
               </a:lnSpc>
               <a:spcBef>
                 <a:spcPts val="0"/>
@@ -27610,7 +27610,7 @@
           <a:p>
             <a:pPr algn="just">
               <a:lnSpc>
-                <a:spcPct val="125000"/>
+                <a:spcPct val="110000"/>
               </a:lnSpc>
               <a:spcBef>
                 <a:spcPts val="0"/>
@@ -27632,7 +27632,7 @@
           <a:p>
             <a:pPr algn="just">
               <a:lnSpc>
-                <a:spcPct val="125000"/>
+                <a:spcPct val="110000"/>
               </a:lnSpc>
               <a:spcBef>
                 <a:spcPts val="0"/>
@@ -27654,7 +27654,7 @@
           <a:p>
             <a:pPr algn="just">
               <a:lnSpc>
-                <a:spcPct val="125000"/>
+                <a:spcPct val="110000"/>
               </a:lnSpc>
               <a:spcBef>
                 <a:spcPts val="0"/>
@@ -27676,7 +27676,7 @@
           <a:p>
             <a:pPr algn="just">
               <a:lnSpc>
-                <a:spcPct val="125000"/>
+                <a:spcPct val="110000"/>
               </a:lnSpc>
               <a:spcBef>
                 <a:spcPts val="0"/>
@@ -27698,7 +27698,7 @@
           <a:p>
             <a:pPr algn="just">
               <a:lnSpc>
-                <a:spcPct val="125000"/>
+                <a:spcPct val="110000"/>
               </a:lnSpc>
               <a:spcBef>
                 <a:spcPts val="0"/>
@@ -27720,7 +27720,7 @@
           <a:p>
             <a:pPr algn="just">
               <a:lnSpc>
-                <a:spcPct val="125000"/>
+                <a:spcPct val="110000"/>
               </a:lnSpc>
               <a:spcBef>
                 <a:spcPts val="0"/>
@@ -27742,7 +27742,7 @@
           <a:p>
             <a:pPr algn="just">
               <a:lnSpc>
-                <a:spcPct val="125000"/>
+                <a:spcPct val="110000"/>
               </a:lnSpc>
               <a:spcBef>
                 <a:spcPts val="0"/>
@@ -27764,7 +27764,7 @@
           <a:p>
             <a:pPr algn="just">
               <a:lnSpc>
-                <a:spcPct val="125000"/>
+                <a:spcPct val="110000"/>
               </a:lnSpc>
               <a:spcBef>
                 <a:spcPts val="0"/>
@@ -27786,7 +27786,7 @@
           <a:p>
             <a:pPr algn="just">
               <a:lnSpc>
-                <a:spcPct val="125000"/>
+                <a:spcPct val="110000"/>
               </a:lnSpc>
               <a:spcBef>
                 <a:spcPts val="0"/>
@@ -27808,7 +27808,7 @@
           <a:p>
             <a:pPr algn="just">
               <a:lnSpc>
-                <a:spcPct val="125000"/>
+                <a:spcPct val="110000"/>
               </a:lnSpc>
               <a:spcBef>
                 <a:spcPts val="0"/>
@@ -27830,7 +27830,7 @@
           <a:p>
             <a:pPr algn="just">
               <a:lnSpc>
-                <a:spcPct val="125000"/>
+                <a:spcPct val="110000"/>
               </a:lnSpc>
               <a:spcBef>
                 <a:spcPts val="0"/>
@@ -27852,7 +27852,7 @@
           <a:p>
             <a:pPr algn="just">
               <a:lnSpc>
-                <a:spcPct val="125000"/>
+                <a:spcPct val="110000"/>
               </a:lnSpc>
               <a:spcBef>
                 <a:spcPts val="0"/>
@@ -27874,7 +27874,7 @@
           <a:p>
             <a:pPr algn="just">
               <a:lnSpc>
-                <a:spcPct val="125000"/>
+                <a:spcPct val="110000"/>
               </a:lnSpc>
               <a:spcBef>
                 <a:spcPts val="0"/>
@@ -27896,7 +27896,7 @@
           <a:p>
             <a:pPr algn="just">
               <a:lnSpc>
-                <a:spcPct val="125000"/>
+                <a:spcPct val="110000"/>
               </a:lnSpc>
               <a:spcBef>
                 <a:spcPts val="0"/>
@@ -27918,7 +27918,7 @@
           <a:p>
             <a:pPr algn="just">
               <a:lnSpc>
-                <a:spcPct val="125000"/>
+                <a:spcPct val="110000"/>
               </a:lnSpc>
               <a:spcBef>
                 <a:spcPts val="0"/>
@@ -27940,7 +27940,7 @@
           <a:p>
             <a:pPr algn="just">
               <a:lnSpc>
-                <a:spcPct val="125000"/>
+                <a:spcPct val="110000"/>
               </a:lnSpc>
               <a:spcBef>
                 <a:spcPts val="0"/>
@@ -27962,7 +27962,7 @@
           <a:p>
             <a:pPr algn="just">
               <a:lnSpc>
-                <a:spcPct val="125000"/>
+                <a:spcPct val="110000"/>
               </a:lnSpc>
               <a:spcBef>
                 <a:spcPts val="0"/>
@@ -28076,7 +28076,7 @@
           <a:p>
             <a:pPr algn="just">
               <a:lnSpc>
-                <a:spcPct val="125000"/>
+                <a:spcPct val="110000"/>
               </a:lnSpc>
               <a:spcBef>
                 <a:spcPts val="0"/>
@@ -28098,7 +28098,7 @@
           <a:p>
             <a:pPr algn="just">
               <a:lnSpc>
-                <a:spcPct val="125000"/>
+                <a:spcPct val="110000"/>
               </a:lnSpc>
               <a:spcBef>
                 <a:spcPts val="0"/>
@@ -28120,7 +28120,7 @@
           <a:p>
             <a:pPr algn="just">
               <a:lnSpc>
-                <a:spcPct val="125000"/>
+                <a:spcPct val="110000"/>
               </a:lnSpc>
               <a:spcBef>
                 <a:spcPts val="0"/>
@@ -28142,7 +28142,7 @@
           <a:p>
             <a:pPr algn="just">
               <a:lnSpc>
-                <a:spcPct val="125000"/>
+                <a:spcPct val="110000"/>
               </a:lnSpc>
               <a:spcBef>
                 <a:spcPts val="0"/>
@@ -28164,7 +28164,7 @@
           <a:p>
             <a:pPr algn="just">
               <a:lnSpc>
-                <a:spcPct val="125000"/>
+                <a:spcPct val="110000"/>
               </a:lnSpc>
               <a:spcBef>
                 <a:spcPts val="0"/>
@@ -28186,7 +28186,7 @@
           <a:p>
             <a:pPr algn="just">
               <a:lnSpc>
-                <a:spcPct val="125000"/>
+                <a:spcPct val="110000"/>
               </a:lnSpc>
               <a:spcBef>
                 <a:spcPts val="0"/>
@@ -28208,7 +28208,7 @@
           <a:p>
             <a:pPr algn="just">
               <a:lnSpc>
-                <a:spcPct val="125000"/>
+                <a:spcPct val="110000"/>
               </a:lnSpc>
               <a:spcBef>
                 <a:spcPts val="0"/>
@@ -28230,7 +28230,7 @@
           <a:p>
             <a:pPr algn="just">
               <a:lnSpc>
-                <a:spcPct val="125000"/>
+                <a:spcPct val="110000"/>
               </a:lnSpc>
               <a:spcBef>
                 <a:spcPts val="0"/>
@@ -28252,7 +28252,7 @@
           <a:p>
             <a:pPr algn="just">
               <a:lnSpc>
-                <a:spcPct val="125000"/>
+                <a:spcPct val="110000"/>
               </a:lnSpc>
               <a:spcBef>
                 <a:spcPts val="0"/>
@@ -28274,7 +28274,7 @@
           <a:p>
             <a:pPr algn="just">
               <a:lnSpc>
-                <a:spcPct val="125000"/>
+                <a:spcPct val="110000"/>
               </a:lnSpc>
               <a:spcBef>
                 <a:spcPts val="0"/>
@@ -28296,7 +28296,7 @@
           <a:p>
             <a:pPr algn="just">
               <a:lnSpc>
-                <a:spcPct val="125000"/>
+                <a:spcPct val="110000"/>
               </a:lnSpc>
               <a:spcBef>
                 <a:spcPts val="0"/>
@@ -28318,7 +28318,7 @@
           <a:p>
             <a:pPr algn="just">
               <a:lnSpc>
-                <a:spcPct val="125000"/>
+                <a:spcPct val="110000"/>
               </a:lnSpc>
               <a:spcBef>
                 <a:spcPts val="0"/>
@@ -28340,7 +28340,7 @@
           <a:p>
             <a:pPr algn="just">
               <a:lnSpc>
-                <a:spcPct val="125000"/>
+                <a:spcPct val="110000"/>
               </a:lnSpc>
               <a:spcBef>
                 <a:spcPts val="0"/>
@@ -28362,7 +28362,7 @@
           <a:p>
             <a:pPr algn="just">
               <a:lnSpc>
-                <a:spcPct val="125000"/>
+                <a:spcPct val="110000"/>
               </a:lnSpc>
               <a:spcBef>
                 <a:spcPts val="0"/>
@@ -28384,7 +28384,7 @@
           <a:p>
             <a:pPr algn="just">
               <a:lnSpc>
-                <a:spcPct val="125000"/>
+                <a:spcPct val="110000"/>
               </a:lnSpc>
               <a:spcBef>
                 <a:spcPts val="0"/>
@@ -28406,7 +28406,7 @@
           <a:p>
             <a:pPr algn="just">
               <a:lnSpc>
-                <a:spcPct val="125000"/>
+                <a:spcPct val="110000"/>
               </a:lnSpc>
               <a:spcBef>
                 <a:spcPts val="0"/>
@@ -28428,7 +28428,7 @@
           <a:p>
             <a:pPr algn="just">
               <a:lnSpc>
-                <a:spcPct val="125000"/>
+                <a:spcPct val="110000"/>
               </a:lnSpc>
               <a:spcBef>
                 <a:spcPts val="0"/>
@@ -28450,7 +28450,7 @@
           <a:p>
             <a:pPr algn="just">
               <a:lnSpc>
-                <a:spcPct val="125000"/>
+                <a:spcPct val="110000"/>
               </a:lnSpc>
               <a:spcBef>
                 <a:spcPts val="0"/>
@@ -28472,7 +28472,7 @@
           <a:p>
             <a:pPr algn="just">
               <a:lnSpc>
-                <a:spcPct val="125000"/>
+                <a:spcPct val="110000"/>
               </a:lnSpc>
               <a:spcBef>
                 <a:spcPts val="0"/>
@@ -28494,7 +28494,7 @@
           <a:p>
             <a:pPr algn="just">
               <a:lnSpc>
-                <a:spcPct val="125000"/>
+                <a:spcPct val="110000"/>
               </a:lnSpc>
               <a:spcBef>
                 <a:spcPts val="0"/>
@@ -28516,7 +28516,7 @@
           <a:p>
             <a:pPr algn="just">
               <a:lnSpc>
-                <a:spcPct val="125000"/>
+                <a:spcPct val="110000"/>
               </a:lnSpc>
               <a:spcBef>
                 <a:spcPts val="0"/>
@@ -28538,7 +28538,7 @@
           <a:p>
             <a:pPr algn="just">
               <a:lnSpc>
-                <a:spcPct val="125000"/>
+                <a:spcPct val="110000"/>
               </a:lnSpc>
               <a:spcBef>
                 <a:spcPts val="0"/>
@@ -28652,7 +28652,7 @@
           <a:p>
             <a:pPr algn="just">
               <a:lnSpc>
-                <a:spcPct val="125000"/>
+                <a:spcPct val="110000"/>
               </a:lnSpc>
               <a:spcBef>
                 <a:spcPts val="0"/>
@@ -28674,7 +28674,7 @@
           <a:p>
             <a:pPr algn="just">
               <a:lnSpc>
-                <a:spcPct val="125000"/>
+                <a:spcPct val="110000"/>
               </a:lnSpc>
               <a:spcBef>
                 <a:spcPts val="0"/>
@@ -28696,7 +28696,7 @@
           <a:p>
             <a:pPr algn="just">
               <a:lnSpc>
-                <a:spcPct val="125000"/>
+                <a:spcPct val="110000"/>
               </a:lnSpc>
               <a:spcBef>
                 <a:spcPts val="0"/>
@@ -28718,7 +28718,7 @@
           <a:p>
             <a:pPr algn="just">
               <a:lnSpc>
-                <a:spcPct val="125000"/>
+                <a:spcPct val="110000"/>
               </a:lnSpc>
               <a:spcBef>
                 <a:spcPts val="0"/>
@@ -28740,7 +28740,7 @@
           <a:p>
             <a:pPr algn="just">
               <a:lnSpc>
-                <a:spcPct val="125000"/>
+                <a:spcPct val="110000"/>
               </a:lnSpc>
               <a:spcBef>
                 <a:spcPts val="0"/>
@@ -28762,7 +28762,7 @@
           <a:p>
             <a:pPr algn="just">
               <a:lnSpc>
-                <a:spcPct val="125000"/>
+                <a:spcPct val="110000"/>
               </a:lnSpc>
               <a:spcBef>
                 <a:spcPts val="0"/>
@@ -28784,7 +28784,7 @@
           <a:p>
             <a:pPr algn="just">
               <a:lnSpc>
-                <a:spcPct val="125000"/>
+                <a:spcPct val="110000"/>
               </a:lnSpc>
               <a:spcBef>
                 <a:spcPts val="0"/>
@@ -28806,7 +28806,7 @@
           <a:p>
             <a:pPr algn="just">
               <a:lnSpc>
-                <a:spcPct val="125000"/>
+                <a:spcPct val="110000"/>
               </a:lnSpc>
               <a:spcBef>
                 <a:spcPts val="0"/>
@@ -28828,7 +28828,7 @@
           <a:p>
             <a:pPr algn="just">
               <a:lnSpc>
-                <a:spcPct val="125000"/>
+                <a:spcPct val="110000"/>
               </a:lnSpc>
               <a:spcBef>
                 <a:spcPts val="0"/>
@@ -28850,7 +28850,7 @@
           <a:p>
             <a:pPr algn="just">
               <a:lnSpc>
-                <a:spcPct val="125000"/>
+                <a:spcPct val="110000"/>
               </a:lnSpc>
               <a:spcBef>
                 <a:spcPts val="0"/>
@@ -28872,7 +28872,7 @@
           <a:p>
             <a:pPr algn="just">
               <a:lnSpc>
-                <a:spcPct val="125000"/>
+                <a:spcPct val="110000"/>
               </a:lnSpc>
               <a:spcBef>
                 <a:spcPts val="0"/>
@@ -28894,7 +28894,7 @@
           <a:p>
             <a:pPr algn="just">
               <a:lnSpc>
-                <a:spcPct val="125000"/>
+                <a:spcPct val="110000"/>
               </a:lnSpc>
               <a:spcBef>
                 <a:spcPts val="0"/>
@@ -28916,7 +28916,7 @@
           <a:p>
             <a:pPr algn="just">
               <a:lnSpc>
-                <a:spcPct val="125000"/>
+                <a:spcPct val="110000"/>
               </a:lnSpc>
               <a:spcBef>
                 <a:spcPts val="0"/>
@@ -29030,7 +29030,7 @@
           <a:p>
             <a:pPr algn="just">
               <a:lnSpc>
-                <a:spcPct val="125000"/>
+                <a:spcPct val="110000"/>
               </a:lnSpc>
               <a:spcBef>
                 <a:spcPts val="0"/>
@@ -29052,7 +29052,7 @@
           <a:p>
             <a:pPr algn="just">
               <a:lnSpc>
-                <a:spcPct val="125000"/>
+                <a:spcPct val="110000"/>
               </a:lnSpc>
               <a:spcBef>
                 <a:spcPts val="0"/>
@@ -29074,7 +29074,7 @@
           <a:p>
             <a:pPr algn="just">
               <a:lnSpc>
-                <a:spcPct val="125000"/>
+                <a:spcPct val="110000"/>
               </a:lnSpc>
               <a:spcBef>
                 <a:spcPts val="0"/>
@@ -29096,7 +29096,7 @@
           <a:p>
             <a:pPr algn="just">
               <a:lnSpc>
-                <a:spcPct val="125000"/>
+                <a:spcPct val="110000"/>
               </a:lnSpc>
               <a:spcBef>
                 <a:spcPts val="0"/>
@@ -29118,7 +29118,7 @@
           <a:p>
             <a:pPr algn="just">
               <a:lnSpc>
-                <a:spcPct val="125000"/>
+                <a:spcPct val="110000"/>
               </a:lnSpc>
               <a:spcBef>
                 <a:spcPts val="0"/>
@@ -29140,7 +29140,7 @@
           <a:p>
             <a:pPr algn="just">
               <a:lnSpc>
-                <a:spcPct val="125000"/>
+                <a:spcPct val="110000"/>
               </a:lnSpc>
               <a:spcBef>
                 <a:spcPts val="0"/>
@@ -29162,7 +29162,7 @@
           <a:p>
             <a:pPr algn="just">
               <a:lnSpc>
-                <a:spcPct val="125000"/>
+                <a:spcPct val="110000"/>
               </a:lnSpc>
               <a:spcBef>
                 <a:spcPts val="0"/>
@@ -29184,7 +29184,7 @@
           <a:p>
             <a:pPr algn="just">
               <a:lnSpc>
-                <a:spcPct val="125000"/>
+                <a:spcPct val="110000"/>
               </a:lnSpc>
               <a:spcBef>
                 <a:spcPts val="0"/>
@@ -29206,7 +29206,7 @@
           <a:p>
             <a:pPr algn="just">
               <a:lnSpc>
-                <a:spcPct val="125000"/>
+                <a:spcPct val="110000"/>
               </a:lnSpc>
               <a:spcBef>
                 <a:spcPts val="0"/>
@@ -29320,7 +29320,7 @@
           <a:p>
             <a:pPr algn="just">
               <a:lnSpc>
-                <a:spcPct val="125000"/>
+                <a:spcPct val="110000"/>
               </a:lnSpc>
               <a:spcBef>
                 <a:spcPts val="0"/>
@@ -29342,7 +29342,7 @@
           <a:p>
             <a:pPr algn="just">
               <a:lnSpc>
-                <a:spcPct val="125000"/>
+                <a:spcPct val="110000"/>
               </a:lnSpc>
               <a:spcBef>
                 <a:spcPts val="0"/>
@@ -29364,7 +29364,7 @@
           <a:p>
             <a:pPr algn="just">
               <a:lnSpc>
-                <a:spcPct val="125000"/>
+                <a:spcPct val="110000"/>
               </a:lnSpc>
               <a:spcBef>
                 <a:spcPts val="0"/>
@@ -29386,7 +29386,7 @@
           <a:p>
             <a:pPr algn="just">
               <a:lnSpc>
-                <a:spcPct val="125000"/>
+                <a:spcPct val="110000"/>
               </a:lnSpc>
               <a:spcBef>
                 <a:spcPts val="0"/>
@@ -29408,7 +29408,7 @@
           <a:p>
             <a:pPr algn="just">
               <a:lnSpc>
-                <a:spcPct val="125000"/>
+                <a:spcPct val="110000"/>
               </a:lnSpc>
               <a:spcBef>
                 <a:spcPts val="0"/>
@@ -29430,7 +29430,7 @@
           <a:p>
             <a:pPr algn="just">
               <a:lnSpc>
-                <a:spcPct val="125000"/>
+                <a:spcPct val="110000"/>
               </a:lnSpc>
               <a:spcBef>
                 <a:spcPts val="0"/>
@@ -29452,7 +29452,7 @@
           <a:p>
             <a:pPr algn="just">
               <a:lnSpc>
-                <a:spcPct val="125000"/>
+                <a:spcPct val="110000"/>
               </a:lnSpc>
               <a:spcBef>
                 <a:spcPts val="0"/>
@@ -29474,7 +29474,7 @@
           <a:p>
             <a:pPr algn="just">
               <a:lnSpc>
-                <a:spcPct val="125000"/>
+                <a:spcPct val="110000"/>
               </a:lnSpc>
               <a:spcBef>
                 <a:spcPts val="0"/>
@@ -29496,7 +29496,7 @@
           <a:p>
             <a:pPr algn="just">
               <a:lnSpc>
-                <a:spcPct val="125000"/>
+                <a:spcPct val="110000"/>
               </a:lnSpc>
               <a:spcBef>
                 <a:spcPts val="0"/>
@@ -29518,7 +29518,7 @@
           <a:p>
             <a:pPr algn="just">
               <a:lnSpc>
-                <a:spcPct val="125000"/>
+                <a:spcPct val="110000"/>
               </a:lnSpc>
               <a:spcBef>
                 <a:spcPts val="0"/>
@@ -29540,7 +29540,7 @@
           <a:p>
             <a:pPr algn="just">
               <a:lnSpc>
-                <a:spcPct val="125000"/>
+                <a:spcPct val="110000"/>
               </a:lnSpc>
               <a:spcBef>
                 <a:spcPts val="0"/>
@@ -29562,7 +29562,7 @@
           <a:p>
             <a:pPr algn="just">
               <a:lnSpc>
-                <a:spcPct val="125000"/>
+                <a:spcPct val="110000"/>
               </a:lnSpc>
               <a:spcBef>
                 <a:spcPts val="0"/>
@@ -29584,7 +29584,7 @@
           <a:p>
             <a:pPr algn="just">
               <a:lnSpc>
-                <a:spcPct val="125000"/>
+                <a:spcPct val="110000"/>
               </a:lnSpc>
               <a:spcBef>
                 <a:spcPts val="0"/>
@@ -29606,7 +29606,7 @@
           <a:p>
             <a:pPr algn="just">
               <a:lnSpc>
-                <a:spcPct val="125000"/>
+                <a:spcPct val="110000"/>
               </a:lnSpc>
               <a:spcBef>
                 <a:spcPts val="0"/>
@@ -29628,7 +29628,7 @@
           <a:p>
             <a:pPr algn="just">
               <a:lnSpc>
-                <a:spcPct val="125000"/>
+                <a:spcPct val="110000"/>
               </a:lnSpc>
               <a:spcBef>
                 <a:spcPts val="0"/>
@@ -29650,7 +29650,7 @@
           <a:p>
             <a:pPr algn="just">
               <a:lnSpc>
-                <a:spcPct val="125000"/>
+                <a:spcPct val="110000"/>
               </a:lnSpc>
               <a:spcBef>
                 <a:spcPts val="0"/>
@@ -29672,7 +29672,7 @@
           <a:p>
             <a:pPr algn="just">
               <a:lnSpc>
-                <a:spcPct val="125000"/>
+                <a:spcPct val="110000"/>
               </a:lnSpc>
               <a:spcBef>
                 <a:spcPts val="0"/>
@@ -29694,7 +29694,7 @@
           <a:p>
             <a:pPr algn="just">
               <a:lnSpc>
-                <a:spcPct val="125000"/>
+                <a:spcPct val="110000"/>
               </a:lnSpc>
               <a:spcBef>
                 <a:spcPts val="0"/>
@@ -29716,7 +29716,7 @@
           <a:p>
             <a:pPr algn="just">
               <a:lnSpc>
-                <a:spcPct val="125000"/>
+                <a:spcPct val="110000"/>
               </a:lnSpc>
               <a:spcBef>
                 <a:spcPts val="0"/>
@@ -29830,7 +29830,7 @@
           <a:p>
             <a:pPr algn="just">
               <a:lnSpc>
-                <a:spcPct val="125000"/>
+                <a:spcPct val="110000"/>
               </a:lnSpc>
               <a:spcBef>
                 <a:spcPts val="0"/>
@@ -29852,7 +29852,7 @@
           <a:p>
             <a:pPr algn="just">
               <a:lnSpc>
-                <a:spcPct val="125000"/>
+                <a:spcPct val="110000"/>
               </a:lnSpc>
               <a:spcBef>
                 <a:spcPts val="0"/>
@@ -29874,7 +29874,7 @@
           <a:p>
             <a:pPr algn="just">
               <a:lnSpc>
-                <a:spcPct val="125000"/>
+                <a:spcPct val="110000"/>
               </a:lnSpc>
               <a:spcBef>
                 <a:spcPts val="0"/>
@@ -29896,7 +29896,7 @@
           <a:p>
             <a:pPr algn="just">
               <a:lnSpc>
-                <a:spcPct val="125000"/>
+                <a:spcPct val="110000"/>
               </a:lnSpc>
               <a:spcBef>
                 <a:spcPts val="0"/>
@@ -29918,7 +29918,7 @@
           <a:p>
             <a:pPr algn="just">
               <a:lnSpc>
-                <a:spcPct val="125000"/>
+                <a:spcPct val="110000"/>
               </a:lnSpc>
               <a:spcBef>
                 <a:spcPts val="0"/>
@@ -29940,7 +29940,7 @@
           <a:p>
             <a:pPr algn="just">
               <a:lnSpc>
-                <a:spcPct val="125000"/>
+                <a:spcPct val="110000"/>
               </a:lnSpc>
               <a:spcBef>
                 <a:spcPts val="0"/>
@@ -29962,7 +29962,7 @@
           <a:p>
             <a:pPr algn="just">
               <a:lnSpc>
-                <a:spcPct val="125000"/>
+                <a:spcPct val="110000"/>
               </a:lnSpc>
               <a:spcBef>
                 <a:spcPts val="0"/>
@@ -29984,7 +29984,7 @@
           <a:p>
             <a:pPr algn="just">
               <a:lnSpc>
-                <a:spcPct val="125000"/>
+                <a:spcPct val="110000"/>
               </a:lnSpc>
               <a:spcBef>
                 <a:spcPts val="0"/>
@@ -30006,7 +30006,7 @@
           <a:p>
             <a:pPr algn="just">
               <a:lnSpc>
-                <a:spcPct val="125000"/>
+                <a:spcPct val="110000"/>
               </a:lnSpc>
               <a:spcBef>
                 <a:spcPts val="0"/>
@@ -30028,7 +30028,7 @@
           <a:p>
             <a:pPr algn="just">
               <a:lnSpc>
-                <a:spcPct val="125000"/>
+                <a:spcPct val="110000"/>
               </a:lnSpc>
               <a:spcBef>
                 <a:spcPts val="0"/>
@@ -30050,7 +30050,7 @@
           <a:p>
             <a:pPr algn="just">
               <a:lnSpc>
-                <a:spcPct val="125000"/>
+                <a:spcPct val="110000"/>
               </a:lnSpc>
               <a:spcBef>
                 <a:spcPts val="0"/>
@@ -30072,7 +30072,7 @@
           <a:p>
             <a:pPr algn="just">
               <a:lnSpc>
-                <a:spcPct val="125000"/>
+                <a:spcPct val="110000"/>
               </a:lnSpc>
               <a:spcBef>
                 <a:spcPts val="0"/>
@@ -30094,7 +30094,7 @@
           <a:p>
             <a:pPr algn="just">
               <a:lnSpc>
-                <a:spcPct val="125000"/>
+                <a:spcPct val="110000"/>
               </a:lnSpc>
               <a:spcBef>
                 <a:spcPts val="0"/>
@@ -30116,7 +30116,7 @@
           <a:p>
             <a:pPr algn="just">
               <a:lnSpc>
-                <a:spcPct val="125000"/>
+                <a:spcPct val="110000"/>
               </a:lnSpc>
               <a:spcBef>
                 <a:spcPts val="0"/>
@@ -30138,7 +30138,7 @@
           <a:p>
             <a:pPr algn="just">
               <a:lnSpc>
-                <a:spcPct val="125000"/>
+                <a:spcPct val="110000"/>
               </a:lnSpc>
               <a:spcBef>
                 <a:spcPts val="0"/>
@@ -30160,7 +30160,7 @@
           <a:p>
             <a:pPr algn="just">
               <a:lnSpc>
-                <a:spcPct val="125000"/>
+                <a:spcPct val="110000"/>
               </a:lnSpc>
               <a:spcBef>
                 <a:spcPts val="0"/>
@@ -30182,7 +30182,7 @@
           <a:p>
             <a:pPr algn="just">
               <a:lnSpc>
-                <a:spcPct val="125000"/>
+                <a:spcPct val="110000"/>
               </a:lnSpc>
               <a:spcBef>
                 <a:spcPts val="0"/>
@@ -30204,7 +30204,7 @@
           <a:p>
             <a:pPr algn="just">
               <a:lnSpc>
-                <a:spcPct val="125000"/>
+                <a:spcPct val="110000"/>
               </a:lnSpc>
               <a:spcBef>
                 <a:spcPts val="0"/>
@@ -30226,7 +30226,7 @@
           <a:p>
             <a:pPr algn="just">
               <a:lnSpc>
-                <a:spcPct val="125000"/>
+                <a:spcPct val="110000"/>
               </a:lnSpc>
               <a:spcBef>
                 <a:spcPts val="0"/>
@@ -30340,7 +30340,7 @@
           <a:p>
             <a:pPr algn="just">
               <a:lnSpc>
-                <a:spcPct val="125000"/>
+                <a:spcPct val="110000"/>
               </a:lnSpc>
               <a:spcBef>
                 <a:spcPts val="0"/>
@@ -30362,7 +30362,7 @@
           <a:p>
             <a:pPr algn="just">
               <a:lnSpc>
-                <a:spcPct val="125000"/>
+                <a:spcPct val="110000"/>
               </a:lnSpc>
               <a:spcBef>
                 <a:spcPts val="0"/>
@@ -30384,7 +30384,7 @@
           <a:p>
             <a:pPr algn="just">
               <a:lnSpc>
-                <a:spcPct val="125000"/>
+                <a:spcPct val="110000"/>
               </a:lnSpc>
               <a:spcBef>
                 <a:spcPts val="0"/>
@@ -30406,7 +30406,7 @@
           <a:p>
             <a:pPr algn="just">
               <a:lnSpc>
-                <a:spcPct val="125000"/>
+                <a:spcPct val="110000"/>
               </a:lnSpc>
               <a:spcBef>
                 <a:spcPts val="0"/>
@@ -30428,7 +30428,7 @@
           <a:p>
             <a:pPr algn="just">
               <a:lnSpc>
-                <a:spcPct val="125000"/>
+                <a:spcPct val="110000"/>
               </a:lnSpc>
               <a:spcBef>
                 <a:spcPts val="0"/>
@@ -30450,7 +30450,7 @@
           <a:p>
             <a:pPr algn="just">
               <a:lnSpc>
-                <a:spcPct val="125000"/>
+                <a:spcPct val="110000"/>
               </a:lnSpc>
               <a:spcBef>
                 <a:spcPts val="0"/>
@@ -30472,7 +30472,7 @@
           <a:p>
             <a:pPr algn="just">
               <a:lnSpc>
-                <a:spcPct val="125000"/>
+                <a:spcPct val="110000"/>
               </a:lnSpc>
               <a:spcBef>
                 <a:spcPts val="0"/>
@@ -30494,7 +30494,7 @@
           <a:p>
             <a:pPr algn="just">
               <a:lnSpc>
-                <a:spcPct val="125000"/>
+                <a:spcPct val="110000"/>
               </a:lnSpc>
               <a:spcBef>
                 <a:spcPts val="0"/>
@@ -30516,7 +30516,7 @@
           <a:p>
             <a:pPr algn="just">
               <a:lnSpc>
-                <a:spcPct val="125000"/>
+                <a:spcPct val="110000"/>
               </a:lnSpc>
               <a:spcBef>
                 <a:spcPts val="0"/>
@@ -30538,7 +30538,7 @@
           <a:p>
             <a:pPr algn="just">
               <a:lnSpc>
-                <a:spcPct val="125000"/>
+                <a:spcPct val="110000"/>
               </a:lnSpc>
               <a:spcBef>
                 <a:spcPts val="0"/>
@@ -30652,7 +30652,7 @@
           <a:p>
             <a:pPr algn="just">
               <a:lnSpc>
-                <a:spcPct val="125000"/>
+                <a:spcPct val="110000"/>
               </a:lnSpc>
               <a:spcBef>
                 <a:spcPts val="0"/>
@@ -30674,7 +30674,7 @@
           <a:p>
             <a:pPr algn="just">
               <a:lnSpc>
-                <a:spcPct val="125000"/>
+                <a:spcPct val="110000"/>
               </a:lnSpc>
               <a:spcBef>
                 <a:spcPts val="0"/>
@@ -30696,7 +30696,7 @@
           <a:p>
             <a:pPr algn="just">
               <a:lnSpc>
-                <a:spcPct val="125000"/>
+                <a:spcPct val="110000"/>
               </a:lnSpc>
               <a:spcBef>
                 <a:spcPts val="0"/>
@@ -30718,7 +30718,7 @@
           <a:p>
             <a:pPr algn="just">
               <a:lnSpc>
-                <a:spcPct val="125000"/>
+                <a:spcPct val="110000"/>
               </a:lnSpc>
               <a:spcBef>
                 <a:spcPts val="0"/>
@@ -30740,7 +30740,7 @@
           <a:p>
             <a:pPr algn="just">
               <a:lnSpc>
-                <a:spcPct val="125000"/>
+                <a:spcPct val="110000"/>
               </a:lnSpc>
               <a:spcBef>
                 <a:spcPts val="0"/>
@@ -30762,7 +30762,7 @@
           <a:p>
             <a:pPr algn="just">
               <a:lnSpc>
-                <a:spcPct val="125000"/>
+                <a:spcPct val="110000"/>
               </a:lnSpc>
               <a:spcBef>
                 <a:spcPts val="0"/>
@@ -30784,7 +30784,7 @@
           <a:p>
             <a:pPr algn="just">
               <a:lnSpc>
-                <a:spcPct val="125000"/>
+                <a:spcPct val="110000"/>
               </a:lnSpc>
               <a:spcBef>
                 <a:spcPts val="0"/>
@@ -30806,7 +30806,7 @@
           <a:p>
             <a:pPr algn="just">
               <a:lnSpc>
-                <a:spcPct val="125000"/>
+                <a:spcPct val="110000"/>
               </a:lnSpc>
               <a:spcBef>
                 <a:spcPts val="0"/>
@@ -30828,7 +30828,7 @@
           <a:p>
             <a:pPr algn="just">
               <a:lnSpc>
-                <a:spcPct val="125000"/>
+                <a:spcPct val="110000"/>
               </a:lnSpc>
               <a:spcBef>
                 <a:spcPts val="0"/>
@@ -30942,7 +30942,7 @@
           <a:p>
             <a:pPr algn="just">
               <a:lnSpc>
-                <a:spcPct val="125000"/>
+                <a:spcPct val="110000"/>
               </a:lnSpc>
               <a:spcBef>
                 <a:spcPts val="0"/>
@@ -30964,7 +30964,7 @@
           <a:p>
             <a:pPr algn="just">
               <a:lnSpc>
-                <a:spcPct val="125000"/>
+                <a:spcPct val="110000"/>
               </a:lnSpc>
               <a:spcBef>
                 <a:spcPts val="0"/>
@@ -30986,7 +30986,7 @@
           <a:p>
             <a:pPr algn="just">
               <a:lnSpc>
-                <a:spcPct val="125000"/>
+                <a:spcPct val="110000"/>
               </a:lnSpc>
               <a:spcBef>
                 <a:spcPts val="0"/>
@@ -31008,7 +31008,7 @@
           <a:p>
             <a:pPr algn="just">
               <a:lnSpc>
-                <a:spcPct val="125000"/>
+                <a:spcPct val="110000"/>
               </a:lnSpc>
               <a:spcBef>
                 <a:spcPts val="0"/>
@@ -31030,7 +31030,7 @@
           <a:p>
             <a:pPr algn="just">
               <a:lnSpc>
-                <a:spcPct val="125000"/>
+                <a:spcPct val="110000"/>
               </a:lnSpc>
               <a:spcBef>
                 <a:spcPts val="0"/>
@@ -31052,7 +31052,7 @@
           <a:p>
             <a:pPr algn="just">
               <a:lnSpc>
-                <a:spcPct val="125000"/>
+                <a:spcPct val="110000"/>
               </a:lnSpc>
               <a:spcBef>
                 <a:spcPts val="0"/>
@@ -31074,7 +31074,7 @@
           <a:p>
             <a:pPr algn="just">
               <a:lnSpc>
-                <a:spcPct val="125000"/>
+                <a:spcPct val="110000"/>
               </a:lnSpc>
               <a:spcBef>
                 <a:spcPts val="0"/>
@@ -31096,7 +31096,7 @@
           <a:p>
             <a:pPr algn="just">
               <a:lnSpc>
-                <a:spcPct val="125000"/>
+                <a:spcPct val="110000"/>
               </a:lnSpc>
               <a:spcBef>
                 <a:spcPts val="0"/>
@@ -31118,7 +31118,7 @@
           <a:p>
             <a:pPr algn="just">
               <a:lnSpc>
-                <a:spcPct val="125000"/>
+                <a:spcPct val="110000"/>
               </a:lnSpc>
               <a:spcBef>
                 <a:spcPts val="0"/>
@@ -31140,7 +31140,7 @@
           <a:p>
             <a:pPr algn="just">
               <a:lnSpc>
-                <a:spcPct val="125000"/>
+                <a:spcPct val="110000"/>
               </a:lnSpc>
               <a:spcBef>
                 <a:spcPts val="0"/>
@@ -31254,7 +31254,7 @@
           <a:p>
             <a:pPr algn="just">
               <a:lnSpc>
-                <a:spcPct val="125000"/>
+                <a:spcPct val="110000"/>
               </a:lnSpc>
               <a:spcBef>
                 <a:spcPts val="0"/>
@@ -31276,7 +31276,7 @@
           <a:p>
             <a:pPr algn="just">
               <a:lnSpc>
-                <a:spcPct val="125000"/>
+                <a:spcPct val="110000"/>
               </a:lnSpc>
               <a:spcBef>
                 <a:spcPts val="0"/>
@@ -31298,7 +31298,7 @@
           <a:p>
             <a:pPr algn="just">
               <a:lnSpc>
-                <a:spcPct val="125000"/>
+                <a:spcPct val="110000"/>
               </a:lnSpc>
               <a:spcBef>
                 <a:spcPts val="0"/>
@@ -31320,7 +31320,7 @@
           <a:p>
             <a:pPr algn="just">
               <a:lnSpc>
-                <a:spcPct val="125000"/>
+                <a:spcPct val="110000"/>
               </a:lnSpc>
               <a:spcBef>
                 <a:spcPts val="0"/>
@@ -31342,7 +31342,7 @@
           <a:p>
             <a:pPr algn="just">
               <a:lnSpc>
-                <a:spcPct val="125000"/>
+                <a:spcPct val="110000"/>
               </a:lnSpc>
               <a:spcBef>
                 <a:spcPts val="0"/>
@@ -31364,7 +31364,7 @@
           <a:p>
             <a:pPr algn="just">
               <a:lnSpc>
-                <a:spcPct val="125000"/>
+                <a:spcPct val="110000"/>
               </a:lnSpc>
               <a:spcBef>
                 <a:spcPts val="0"/>
@@ -31386,7 +31386,7 @@
           <a:p>
             <a:pPr algn="just">
               <a:lnSpc>
-                <a:spcPct val="125000"/>
+                <a:spcPct val="110000"/>
               </a:lnSpc>
               <a:spcBef>
                 <a:spcPts val="0"/>
@@ -31408,7 +31408,7 @@
           <a:p>
             <a:pPr algn="just">
               <a:lnSpc>
-                <a:spcPct val="125000"/>
+                <a:spcPct val="110000"/>
               </a:lnSpc>
               <a:spcBef>
                 <a:spcPts val="0"/>
@@ -31430,7 +31430,7 @@
           <a:p>
             <a:pPr algn="just">
               <a:lnSpc>
-                <a:spcPct val="125000"/>
+                <a:spcPct val="110000"/>
               </a:lnSpc>
               <a:spcBef>
                 <a:spcPts val="0"/>
@@ -31452,7 +31452,7 @@
           <a:p>
             <a:pPr algn="just">
               <a:lnSpc>
-                <a:spcPct val="125000"/>
+                <a:spcPct val="110000"/>
               </a:lnSpc>
               <a:spcBef>
                 <a:spcPts val="0"/>
@@ -31566,7 +31566,7 @@
           <a:p>
             <a:pPr algn="just">
               <a:lnSpc>
-                <a:spcPct val="125000"/>
+                <a:spcPct val="110000"/>
               </a:lnSpc>
               <a:spcBef>
                 <a:spcPts val="0"/>
@@ -31588,7 +31588,7 @@
           <a:p>
             <a:pPr algn="just">
               <a:lnSpc>
-                <a:spcPct val="125000"/>
+                <a:spcPct val="110000"/>
               </a:lnSpc>
               <a:spcBef>
                 <a:spcPts val="0"/>
@@ -31610,7 +31610,7 @@
           <a:p>
             <a:pPr algn="just">
               <a:lnSpc>
-                <a:spcPct val="125000"/>
+                <a:spcPct val="110000"/>
               </a:lnSpc>
               <a:spcBef>
                 <a:spcPts val="0"/>
@@ -31632,7 +31632,7 @@
           <a:p>
             <a:pPr algn="just">
               <a:lnSpc>
-                <a:spcPct val="125000"/>
+                <a:spcPct val="110000"/>
               </a:lnSpc>
               <a:spcBef>
                 <a:spcPts val="0"/>
@@ -31654,7 +31654,7 @@
           <a:p>
             <a:pPr algn="just">
               <a:lnSpc>
-                <a:spcPct val="125000"/>
+                <a:spcPct val="110000"/>
               </a:lnSpc>
               <a:spcBef>
                 <a:spcPts val="0"/>
@@ -31676,7 +31676,7 @@
           <a:p>
             <a:pPr algn="just">
               <a:lnSpc>
-                <a:spcPct val="125000"/>
+                <a:spcPct val="110000"/>
               </a:lnSpc>
               <a:spcBef>
                 <a:spcPts val="0"/>
@@ -31698,7 +31698,7 @@
           <a:p>
             <a:pPr algn="just">
               <a:lnSpc>
-                <a:spcPct val="125000"/>
+                <a:spcPct val="110000"/>
               </a:lnSpc>
               <a:spcBef>
                 <a:spcPts val="0"/>
@@ -31720,7 +31720,7 @@
           <a:p>
             <a:pPr algn="just">
               <a:lnSpc>
-                <a:spcPct val="125000"/>
+                <a:spcPct val="110000"/>
               </a:lnSpc>
               <a:spcBef>
                 <a:spcPts val="0"/>
@@ -31742,7 +31742,7 @@
           <a:p>
             <a:pPr algn="just">
               <a:lnSpc>
-                <a:spcPct val="125000"/>
+                <a:spcPct val="110000"/>
               </a:lnSpc>
               <a:spcBef>
                 <a:spcPts val="0"/>
@@ -31764,7 +31764,7 @@
           <a:p>
             <a:pPr algn="just">
               <a:lnSpc>
-                <a:spcPct val="125000"/>
+                <a:spcPct val="110000"/>
               </a:lnSpc>
               <a:spcBef>
                 <a:spcPts val="0"/>
@@ -31786,7 +31786,7 @@
           <a:p>
             <a:pPr algn="just">
               <a:lnSpc>
-                <a:spcPct val="125000"/>
+                <a:spcPct val="110000"/>
               </a:lnSpc>
               <a:spcBef>
                 <a:spcPts val="0"/>
@@ -31808,7 +31808,7 @@
           <a:p>
             <a:pPr algn="just">
               <a:lnSpc>
-                <a:spcPct val="125000"/>
+                <a:spcPct val="110000"/>
               </a:lnSpc>
               <a:spcBef>
                 <a:spcPts val="0"/>
@@ -31830,7 +31830,7 @@
           <a:p>
             <a:pPr algn="just">
               <a:lnSpc>
-                <a:spcPct val="125000"/>
+                <a:spcPct val="110000"/>
               </a:lnSpc>
               <a:spcBef>
                 <a:spcPts val="0"/>
@@ -31944,7 +31944,7 @@
           <a:p>
             <a:pPr algn="just">
               <a:lnSpc>
-                <a:spcPct val="125000"/>
+                <a:spcPct val="110000"/>
               </a:lnSpc>
               <a:spcBef>
                 <a:spcPts val="0"/>
@@ -31966,7 +31966,7 @@
           <a:p>
             <a:pPr algn="just">
               <a:lnSpc>
-                <a:spcPct val="125000"/>
+                <a:spcPct val="110000"/>
               </a:lnSpc>
               <a:spcBef>
                 <a:spcPts val="0"/>
@@ -31988,7 +31988,7 @@
           <a:p>
             <a:pPr algn="just">
               <a:lnSpc>
-                <a:spcPct val="125000"/>
+                <a:spcPct val="110000"/>
               </a:lnSpc>
               <a:spcBef>
                 <a:spcPts val="0"/>
@@ -32010,7 +32010,7 @@
           <a:p>
             <a:pPr algn="just">
               <a:lnSpc>
-                <a:spcPct val="125000"/>
+                <a:spcPct val="110000"/>
               </a:lnSpc>
               <a:spcBef>
                 <a:spcPts val="0"/>
@@ -32032,7 +32032,7 @@
           <a:p>
             <a:pPr algn="just">
               <a:lnSpc>
-                <a:spcPct val="125000"/>
+                <a:spcPct val="110000"/>
               </a:lnSpc>
               <a:spcBef>
                 <a:spcPts val="0"/>
@@ -32054,7 +32054,7 @@
           <a:p>
             <a:pPr algn="just">
               <a:lnSpc>
-                <a:spcPct val="125000"/>
+                <a:spcPct val="110000"/>
               </a:lnSpc>
               <a:spcBef>
                 <a:spcPts val="0"/>
@@ -32076,7 +32076,7 @@
           <a:p>
             <a:pPr algn="just">
               <a:lnSpc>
-                <a:spcPct val="125000"/>
+                <a:spcPct val="110000"/>
               </a:lnSpc>
               <a:spcBef>
                 <a:spcPts val="0"/>
@@ -32098,7 +32098,7 @@
           <a:p>
             <a:pPr algn="just">
               <a:lnSpc>
-                <a:spcPct val="125000"/>
+                <a:spcPct val="110000"/>
               </a:lnSpc>
               <a:spcBef>
                 <a:spcPts val="0"/>
@@ -32120,7 +32120,7 @@
           <a:p>
             <a:pPr algn="just">
               <a:lnSpc>
-                <a:spcPct val="125000"/>
+                <a:spcPct val="110000"/>
               </a:lnSpc>
               <a:spcBef>
                 <a:spcPts val="0"/>
@@ -32142,7 +32142,7 @@
           <a:p>
             <a:pPr algn="just">
               <a:lnSpc>
-                <a:spcPct val="125000"/>
+                <a:spcPct val="110000"/>
               </a:lnSpc>
               <a:spcBef>
                 <a:spcPts val="0"/>
@@ -32256,7 +32256,7 @@
           <a:p>
             <a:pPr algn="just">
               <a:lnSpc>
-                <a:spcPct val="125000"/>
+                <a:spcPct val="110000"/>
               </a:lnSpc>
               <a:spcBef>
                 <a:spcPts val="0"/>
@@ -32278,7 +32278,7 @@
           <a:p>
             <a:pPr algn="just">
               <a:lnSpc>
-                <a:spcPct val="125000"/>
+                <a:spcPct val="110000"/>
               </a:lnSpc>
               <a:spcBef>
                 <a:spcPts val="0"/>
@@ -32300,7 +32300,7 @@
           <a:p>
             <a:pPr algn="just">
               <a:lnSpc>
-                <a:spcPct val="125000"/>
+                <a:spcPct val="110000"/>
               </a:lnSpc>
               <a:spcBef>
                 <a:spcPts val="0"/>
@@ -32322,7 +32322,7 @@
           <a:p>
             <a:pPr algn="just">
               <a:lnSpc>
-                <a:spcPct val="125000"/>
+                <a:spcPct val="110000"/>
               </a:lnSpc>
               <a:spcBef>
                 <a:spcPts val="0"/>
@@ -32344,7 +32344,7 @@
           <a:p>
             <a:pPr algn="just">
               <a:lnSpc>
-                <a:spcPct val="125000"/>
+                <a:spcPct val="110000"/>
               </a:lnSpc>
               <a:spcBef>
                 <a:spcPts val="0"/>
@@ -32366,7 +32366,7 @@
           <a:p>
             <a:pPr algn="just">
               <a:lnSpc>
-                <a:spcPct val="125000"/>
+                <a:spcPct val="110000"/>
               </a:lnSpc>
               <a:spcBef>
                 <a:spcPts val="0"/>
@@ -32388,7 +32388,7 @@
           <a:p>
             <a:pPr algn="just">
               <a:lnSpc>
-                <a:spcPct val="125000"/>
+                <a:spcPct val="110000"/>
               </a:lnSpc>
               <a:spcBef>
                 <a:spcPts val="0"/>
@@ -32410,7 +32410,7 @@
           <a:p>
             <a:pPr algn="just">
               <a:lnSpc>
-                <a:spcPct val="125000"/>
+                <a:spcPct val="110000"/>
               </a:lnSpc>
               <a:spcBef>
                 <a:spcPts val="0"/>
@@ -32432,7 +32432,7 @@
           <a:p>
             <a:pPr algn="just">
               <a:lnSpc>
-                <a:spcPct val="125000"/>
+                <a:spcPct val="110000"/>
               </a:lnSpc>
               <a:spcBef>
                 <a:spcPts val="0"/>
@@ -32454,7 +32454,7 @@
           <a:p>
             <a:pPr algn="just">
               <a:lnSpc>
-                <a:spcPct val="125000"/>
+                <a:spcPct val="110000"/>
               </a:lnSpc>
               <a:spcBef>
                 <a:spcPts val="0"/>
@@ -32476,7 +32476,7 @@
           <a:p>
             <a:pPr algn="just">
               <a:lnSpc>
-                <a:spcPct val="125000"/>
+                <a:spcPct val="110000"/>
               </a:lnSpc>
               <a:spcBef>
                 <a:spcPts val="0"/>
@@ -32498,7 +32498,7 @@
           <a:p>
             <a:pPr algn="just">
               <a:lnSpc>
-                <a:spcPct val="125000"/>
+                <a:spcPct val="110000"/>
               </a:lnSpc>
               <a:spcBef>
                 <a:spcPts val="0"/>
@@ -32612,7 +32612,7 @@
           <a:p>
             <a:pPr algn="just">
               <a:lnSpc>
-                <a:spcPct val="125000"/>
+                <a:spcPct val="110000"/>
               </a:lnSpc>
               <a:spcBef>
                 <a:spcPts val="0"/>
@@ -32634,7 +32634,7 @@
           <a:p>
             <a:pPr algn="just">
               <a:lnSpc>
-                <a:spcPct val="125000"/>
+                <a:spcPct val="110000"/>
               </a:lnSpc>
               <a:spcBef>
                 <a:spcPts val="0"/>
@@ -32656,7 +32656,7 @@
           <a:p>
             <a:pPr algn="just">
               <a:lnSpc>
-                <a:spcPct val="125000"/>
+                <a:spcPct val="110000"/>
               </a:lnSpc>
               <a:spcBef>
                 <a:spcPts val="0"/>
@@ -32678,7 +32678,7 @@
           <a:p>
             <a:pPr algn="just">
               <a:lnSpc>
-                <a:spcPct val="125000"/>
+                <a:spcPct val="110000"/>
               </a:lnSpc>
               <a:spcBef>
                 <a:spcPts val="0"/>
@@ -32700,7 +32700,7 @@
           <a:p>
             <a:pPr algn="just">
               <a:lnSpc>
-                <a:spcPct val="125000"/>
+                <a:spcPct val="110000"/>
               </a:lnSpc>
               <a:spcBef>
                 <a:spcPts val="0"/>
@@ -32722,7 +32722,7 @@
           <a:p>
             <a:pPr algn="just">
               <a:lnSpc>
-                <a:spcPct val="125000"/>
+                <a:spcPct val="110000"/>
               </a:lnSpc>
               <a:spcBef>
                 <a:spcPts val="0"/>
@@ -32744,7 +32744,7 @@
           <a:p>
             <a:pPr algn="just">
               <a:lnSpc>
-                <a:spcPct val="125000"/>
+                <a:spcPct val="110000"/>
               </a:lnSpc>
               <a:spcBef>
                 <a:spcPts val="0"/>
@@ -32766,7 +32766,7 @@
           <a:p>
             <a:pPr algn="just">
               <a:lnSpc>
-                <a:spcPct val="125000"/>
+                <a:spcPct val="110000"/>
               </a:lnSpc>
               <a:spcBef>
                 <a:spcPts val="0"/>
@@ -32788,7 +32788,7 @@
           <a:p>
             <a:pPr algn="just">
               <a:lnSpc>
-                <a:spcPct val="125000"/>
+                <a:spcPct val="110000"/>
               </a:lnSpc>
               <a:spcBef>
                 <a:spcPts val="0"/>
@@ -32810,7 +32810,7 @@
           <a:p>
             <a:pPr algn="just">
               <a:lnSpc>
-                <a:spcPct val="125000"/>
+                <a:spcPct val="110000"/>
               </a:lnSpc>
               <a:spcBef>
                 <a:spcPts val="0"/>
@@ -32832,7 +32832,7 @@
           <a:p>
             <a:pPr algn="just">
               <a:lnSpc>
-                <a:spcPct val="125000"/>
+                <a:spcPct val="110000"/>
               </a:lnSpc>
               <a:spcBef>
                 <a:spcPts val="0"/>
@@ -32854,7 +32854,7 @@
           <a:p>
             <a:pPr algn="just">
               <a:lnSpc>
-                <a:spcPct val="125000"/>
+                <a:spcPct val="110000"/>
               </a:lnSpc>
               <a:spcBef>
                 <a:spcPts val="0"/>
@@ -32876,7 +32876,7 @@
           <a:p>
             <a:pPr algn="just">
               <a:lnSpc>
-                <a:spcPct val="125000"/>
+                <a:spcPct val="110000"/>
               </a:lnSpc>
               <a:spcBef>
                 <a:spcPts val="0"/>
@@ -32898,7 +32898,7 @@
           <a:p>
             <a:pPr algn="just">
               <a:lnSpc>
-                <a:spcPct val="125000"/>
+                <a:spcPct val="110000"/>
               </a:lnSpc>
               <a:spcBef>
                 <a:spcPts val="0"/>
@@ -32920,7 +32920,7 @@
           <a:p>
             <a:pPr algn="just">
               <a:lnSpc>
-                <a:spcPct val="125000"/>
+                <a:spcPct val="110000"/>
               </a:lnSpc>
               <a:spcBef>
                 <a:spcPts val="0"/>
@@ -32942,7 +32942,7 @@
           <a:p>
             <a:pPr algn="just">
               <a:lnSpc>
-                <a:spcPct val="125000"/>
+                <a:spcPct val="110000"/>
               </a:lnSpc>
               <a:spcBef>
                 <a:spcPts val="0"/>
@@ -32964,7 +32964,7 @@
           <a:p>
             <a:pPr algn="just">
               <a:lnSpc>
-                <a:spcPct val="125000"/>
+                <a:spcPct val="110000"/>
               </a:lnSpc>
               <a:spcBef>
                 <a:spcPts val="0"/>
@@ -32986,7 +32986,7 @@
           <a:p>
             <a:pPr algn="just">
               <a:lnSpc>
-                <a:spcPct val="125000"/>
+                <a:spcPct val="110000"/>
               </a:lnSpc>
               <a:spcBef>
                 <a:spcPts val="0"/>
@@ -33008,7 +33008,7 @@
           <a:p>
             <a:pPr algn="just">
               <a:lnSpc>
-                <a:spcPct val="125000"/>
+                <a:spcPct val="110000"/>
               </a:lnSpc>
               <a:spcBef>
                 <a:spcPts val="0"/>
@@ -33030,7 +33030,7 @@
           <a:p>
             <a:pPr algn="just">
               <a:lnSpc>
-                <a:spcPct val="125000"/>
+                <a:spcPct val="110000"/>
               </a:lnSpc>
               <a:spcBef>
                 <a:spcPts val="0"/>
@@ -33052,7 +33052,7 @@
           <a:p>
             <a:pPr algn="just">
               <a:lnSpc>
-                <a:spcPct val="125000"/>
+                <a:spcPct val="110000"/>
               </a:lnSpc>
               <a:spcBef>
                 <a:spcPts val="0"/>
@@ -33074,7 +33074,7 @@
           <a:p>
             <a:pPr algn="just">
               <a:lnSpc>
-                <a:spcPct val="125000"/>
+                <a:spcPct val="110000"/>
               </a:lnSpc>
               <a:spcBef>
                 <a:spcPts val="0"/>
@@ -33096,7 +33096,7 @@
           <a:p>
             <a:pPr algn="just">
               <a:lnSpc>
-                <a:spcPct val="125000"/>
+                <a:spcPct val="110000"/>
               </a:lnSpc>
               <a:spcBef>
                 <a:spcPts val="0"/>
@@ -33118,7 +33118,7 @@
           <a:p>
             <a:pPr algn="just">
               <a:lnSpc>
-                <a:spcPct val="125000"/>
+                <a:spcPct val="110000"/>
               </a:lnSpc>
               <a:spcBef>
                 <a:spcPts val="0"/>
@@ -33140,7 +33140,7 @@
           <a:p>
             <a:pPr algn="just">
               <a:lnSpc>
-                <a:spcPct val="125000"/>
+                <a:spcPct val="110000"/>
               </a:lnSpc>
               <a:spcBef>
                 <a:spcPts val="0"/>
@@ -33162,7 +33162,7 @@
           <a:p>
             <a:pPr algn="just">
               <a:lnSpc>
-                <a:spcPct val="125000"/>
+                <a:spcPct val="110000"/>
               </a:lnSpc>
               <a:spcBef>
                 <a:spcPts val="0"/>
@@ -33184,7 +33184,7 @@
           <a:p>
             <a:pPr algn="just">
               <a:lnSpc>
-                <a:spcPct val="125000"/>
+                <a:spcPct val="110000"/>
               </a:lnSpc>
               <a:spcBef>
                 <a:spcPts val="0"/>
@@ -33206,7 +33206,7 @@
           <a:p>
             <a:pPr algn="just">
               <a:lnSpc>
-                <a:spcPct val="125000"/>
+                <a:spcPct val="110000"/>
               </a:lnSpc>
               <a:spcBef>
                 <a:spcPts val="0"/>
@@ -33228,7 +33228,7 @@
           <a:p>
             <a:pPr algn="just">
               <a:lnSpc>
-                <a:spcPct val="125000"/>
+                <a:spcPct val="110000"/>
               </a:lnSpc>
               <a:spcBef>
                 <a:spcPts val="0"/>
@@ -33250,7 +33250,7 @@
           <a:p>
             <a:pPr algn="just">
               <a:lnSpc>
-                <a:spcPct val="125000"/>
+                <a:spcPct val="110000"/>
               </a:lnSpc>
               <a:spcBef>
                 <a:spcPts val="0"/>
@@ -33272,7 +33272,7 @@
           <a:p>
             <a:pPr algn="just">
               <a:lnSpc>
-                <a:spcPct val="125000"/>
+                <a:spcPct val="110000"/>
               </a:lnSpc>
               <a:spcBef>
                 <a:spcPts val="0"/>
@@ -33294,7 +33294,7 @@
           <a:p>
             <a:pPr algn="just">
               <a:lnSpc>
-                <a:spcPct val="125000"/>
+                <a:spcPct val="110000"/>
               </a:lnSpc>
               <a:spcBef>
                 <a:spcPts val="0"/>
@@ -33316,7 +33316,7 @@
           <a:p>
             <a:pPr algn="just">
               <a:lnSpc>
-                <a:spcPct val="125000"/>
+                <a:spcPct val="110000"/>
               </a:lnSpc>
               <a:spcBef>
                 <a:spcPts val="0"/>
@@ -33338,7 +33338,7 @@
           <a:p>
             <a:pPr algn="just">
               <a:lnSpc>
-                <a:spcPct val="125000"/>
+                <a:spcPct val="110000"/>
               </a:lnSpc>
               <a:spcBef>
                 <a:spcPts val="0"/>
@@ -33360,7 +33360,7 @@
           <a:p>
             <a:pPr algn="just">
               <a:lnSpc>
-                <a:spcPct val="125000"/>
+                <a:spcPct val="110000"/>
               </a:lnSpc>
               <a:spcBef>
                 <a:spcPts val="0"/>
@@ -33474,7 +33474,7 @@
           <a:p>
             <a:pPr algn="just">
               <a:lnSpc>
-                <a:spcPct val="125000"/>
+                <a:spcPct val="110000"/>
               </a:lnSpc>
               <a:spcBef>
                 <a:spcPts val="0"/>
@@ -33496,7 +33496,7 @@
           <a:p>
             <a:pPr algn="just">
               <a:lnSpc>
-                <a:spcPct val="125000"/>
+                <a:spcPct val="110000"/>
               </a:lnSpc>
               <a:spcBef>
                 <a:spcPts val="0"/>
@@ -33518,7 +33518,7 @@
           <a:p>
             <a:pPr algn="just">
               <a:lnSpc>
-                <a:spcPct val="125000"/>
+                <a:spcPct val="110000"/>
               </a:lnSpc>
               <a:spcBef>
                 <a:spcPts val="0"/>
@@ -33540,7 +33540,7 @@
           <a:p>
             <a:pPr algn="just">
               <a:lnSpc>
-                <a:spcPct val="125000"/>
+                <a:spcPct val="110000"/>
               </a:lnSpc>
               <a:spcBef>
                 <a:spcPts val="0"/>
@@ -33562,7 +33562,7 @@
           <a:p>
             <a:pPr algn="just">
               <a:lnSpc>
-                <a:spcPct val="125000"/>
+                <a:spcPct val="110000"/>
               </a:lnSpc>
               <a:spcBef>
                 <a:spcPts val="0"/>
@@ -33584,7 +33584,7 @@
           <a:p>
             <a:pPr algn="just">
               <a:lnSpc>
-                <a:spcPct val="125000"/>
+                <a:spcPct val="110000"/>
               </a:lnSpc>
               <a:spcBef>
                 <a:spcPts val="0"/>
@@ -33606,7 +33606,7 @@
           <a:p>
             <a:pPr algn="just">
               <a:lnSpc>
-                <a:spcPct val="125000"/>
+                <a:spcPct val="110000"/>
               </a:lnSpc>
               <a:spcBef>
                 <a:spcPts val="0"/>
@@ -33628,7 +33628,7 @@
           <a:p>
             <a:pPr algn="just">
               <a:lnSpc>
-                <a:spcPct val="125000"/>
+                <a:spcPct val="110000"/>
               </a:lnSpc>
               <a:spcBef>
                 <a:spcPts val="0"/>
@@ -33650,7 +33650,7 @@
           <a:p>
             <a:pPr algn="just">
               <a:lnSpc>
-                <a:spcPct val="125000"/>
+                <a:spcPct val="110000"/>
               </a:lnSpc>
               <a:spcBef>
                 <a:spcPts val="0"/>
@@ -33672,7 +33672,7 @@
           <a:p>
             <a:pPr algn="just">
               <a:lnSpc>
-                <a:spcPct val="125000"/>
+                <a:spcPct val="110000"/>
               </a:lnSpc>
               <a:spcBef>
                 <a:spcPts val="0"/>
@@ -33694,7 +33694,7 @@
           <a:p>
             <a:pPr algn="just">
               <a:lnSpc>
-                <a:spcPct val="125000"/>
+                <a:spcPct val="110000"/>
               </a:lnSpc>
               <a:spcBef>
                 <a:spcPts val="0"/>

--- a/ppts_output_v3/02_企业所得税风险指引.pptx
+++ b/ppts_output_v3/02_企业所得税风险指引.pptx
@@ -3172,7 +3172,7 @@
     <p:bg>
       <p:bgPr>
         <a:solidFill>
-          <a:srgbClr val="1B3A5C"/>
+          <a:srgbClr val="0D5E5E"/>
         </a:solidFill>
         <a:effectLst/>
       </p:bgPr>
@@ -3186,13 +3186,56 @@
       <p:grpSpPr/>
       <p:sp>
         <p:nvSpPr>
-          <p:cNvPr id="2" name="TextBox 1"/>
+          <p:cNvPr id="2" name="Oval 1"/>
+          <p:cNvSpPr/>
+          <p:nvPr/>
+        </p:nvSpPr>
+        <p:spPr>
+          <a:xfrm>
+            <a:off x="3353104" y="274320"/>
+            <a:ext cx="5486400" cy="5486400"/>
+          </a:xfrm>
+          <a:prstGeom prst="ellipse">
+            <a:avLst/>
+          </a:prstGeom>
+          <a:solidFill>
+            <a:srgbClr val="499A9A"/>
+          </a:solidFill>
+          <a:ln>
+            <a:noFill/>
+          </a:ln>
+        </p:spPr>
+        <p:style>
+          <a:lnRef idx="1">
+            <a:schemeClr val="accent1"/>
+          </a:lnRef>
+          <a:fillRef idx="3">
+            <a:schemeClr val="accent1"/>
+          </a:fillRef>
+          <a:effectRef idx="2">
+            <a:schemeClr val="accent1"/>
+          </a:effectRef>
+          <a:fontRef idx="minor">
+            <a:schemeClr val="lt1"/>
+          </a:fontRef>
+        </p:style>
+        <p:txBody>
+          <a:bodyPr rtlCol="0" anchor="ctr"/>
+          <a:lstStyle/>
+          <a:p>
+            <a:pPr algn="ctr"/>
+          </a:p>
+        </p:txBody>
+      </p:sp>
+      <p:sp>
+        <p:nvSpPr>
+          <p:cNvPr id="3" name="TextBox 2"/>
           <p:cNvSpPr txBox="1"/>
           <p:nvPr/>
         </p:nvSpPr>
         <p:spPr>
           <a:xfrm>
-            <a:off x="731520" y="1371600"/>
+            <a:off x="731520" y="1645920"/>
             <a:ext cx="10728655" cy="2286000"/>
           </a:xfrm>
           <a:prstGeom prst="rect">
@@ -3221,14 +3264,57 @@
       </p:sp>
       <p:sp>
         <p:nvSpPr>
-          <p:cNvPr id="3" name="TextBox 2"/>
+          <p:cNvPr id="4" name="Rectangle 3"/>
+          <p:cNvSpPr/>
+          <p:nvPr/>
+        </p:nvSpPr>
+        <p:spPr>
+          <a:xfrm>
+            <a:off x="4114800" y="3749039"/>
+            <a:ext cx="3962095" cy="18288"/>
+          </a:xfrm>
+          <a:prstGeom prst="rect">
+            <a:avLst/>
+          </a:prstGeom>
+          <a:solidFill>
+            <a:srgbClr val="FFFFFF"/>
+          </a:solidFill>
+          <a:ln>
+            <a:noFill/>
+          </a:ln>
+        </p:spPr>
+        <p:style>
+          <a:lnRef idx="1">
+            <a:schemeClr val="accent1"/>
+          </a:lnRef>
+          <a:fillRef idx="3">
+            <a:schemeClr val="accent1"/>
+          </a:fillRef>
+          <a:effectRef idx="2">
+            <a:schemeClr val="accent1"/>
+          </a:effectRef>
+          <a:fontRef idx="minor">
+            <a:schemeClr val="lt1"/>
+          </a:fontRef>
+        </p:style>
+        <p:txBody>
+          <a:bodyPr rtlCol="0" anchor="ctr"/>
+          <a:lstStyle/>
+          <a:p>
+            <a:pPr algn="ctr"/>
+          </a:p>
+        </p:txBody>
+      </p:sp>
+      <p:sp>
+        <p:nvSpPr>
+          <p:cNvPr id="5" name="TextBox 4"/>
           <p:cNvSpPr txBox="1"/>
           <p:nvPr/>
         </p:nvSpPr>
         <p:spPr>
           <a:xfrm>
-            <a:off x="731520" y="3840480"/>
-            <a:ext cx="10728655" cy="731520"/>
+            <a:off x="731520" y="3931920"/>
+            <a:ext cx="10728655" cy="548640"/>
           </a:xfrm>
           <a:prstGeom prst="rect">
             <a:avLst/>
@@ -3244,7 +3330,7 @@
             <a:pPr algn="ctr">
               <a:defRPr sz="2200">
                 <a:solidFill>
-                  <a:srgbClr val="AABBCC"/>
+                  <a:srgbClr val="CCCCCC"/>
                 </a:solidFill>
               </a:defRPr>
             </a:pPr>
@@ -3256,7 +3342,7 @@
       </p:sp>
       <p:sp>
         <p:nvSpPr>
-          <p:cNvPr id="4" name="TextBox 3"/>
+          <p:cNvPr id="6" name="TextBox 5"/>
           <p:cNvSpPr txBox="1"/>
           <p:nvPr/>
         </p:nvSpPr>
@@ -3279,7 +3365,7 @@
             <a:pPr algn="ctr">
               <a:defRPr sz="1600">
                 <a:solidFill>
-                  <a:srgbClr val="8899AA"/>
+                  <a:srgbClr val="AABBCC"/>
                 </a:solidFill>
               </a:defRPr>
             </a:pPr>
@@ -3322,7 +3408,7 @@
             <a:avLst/>
           </a:prstGeom>
           <a:solidFill>
-            <a:srgbClr val="1B3A5C"/>
+            <a:srgbClr val="0D5E5E"/>
           </a:solidFill>
           <a:ln>
             <a:noFill/>
@@ -3394,7 +3480,7 @@
             <a:r>
               <a:rPr sz="1600" b="1">
                 <a:solidFill>
-                  <a:srgbClr val="1B3A5C"/>
+                  <a:srgbClr val="0D5E5E"/>
                 </a:solidFill>
                 <a:latin typeface="Microsoft YaHei"/>
               </a:rPr>
@@ -3598,6 +3684,49 @@
               </a:rPr>
               <a:t>企业应当自行检查是否存在提供劳务或者服务取得的收入，若是存在上述业务，对其取得的收入是否已经及时完整入账，若未进行入账的，企业及时进行调整纠正。</a:t>
             </a:r>
+          </a:p>
+        </p:txBody>
+      </p:sp>
+      <p:sp>
+        <p:nvSpPr>
+          <p:cNvPr id="4" name="Rectangle 3"/>
+          <p:cNvSpPr/>
+          <p:nvPr/>
+        </p:nvSpPr>
+        <p:spPr>
+          <a:xfrm>
+            <a:off x="457200" y="6720840"/>
+            <a:ext cx="11277295" cy="27432"/>
+          </a:xfrm>
+          <a:prstGeom prst="rect">
+            <a:avLst/>
+          </a:prstGeom>
+          <a:solidFill>
+            <a:srgbClr val="0D5E5E"/>
+          </a:solidFill>
+          <a:ln>
+            <a:noFill/>
+          </a:ln>
+        </p:spPr>
+        <p:style>
+          <a:lnRef idx="1">
+            <a:schemeClr val="accent1"/>
+          </a:lnRef>
+          <a:fillRef idx="3">
+            <a:schemeClr val="accent1"/>
+          </a:fillRef>
+          <a:effectRef idx="2">
+            <a:schemeClr val="accent1"/>
+          </a:effectRef>
+          <a:fontRef idx="minor">
+            <a:schemeClr val="lt1"/>
+          </a:fontRef>
+        </p:style>
+        <p:txBody>
+          <a:bodyPr rtlCol="0" anchor="ctr"/>
+          <a:lstStyle/>
+          <a:p>
+            <a:pPr algn="ctr"/>
           </a:p>
         </p:txBody>
       </p:sp>
@@ -3634,7 +3763,7 @@
             <a:avLst/>
           </a:prstGeom>
           <a:solidFill>
-            <a:srgbClr val="1B3A5C"/>
+            <a:srgbClr val="0D5E5E"/>
           </a:solidFill>
           <a:ln>
             <a:noFill/>
@@ -3706,7 +3835,7 @@
             <a:r>
               <a:rPr sz="1600" b="1">
                 <a:solidFill>
-                  <a:srgbClr val="1B3A5C"/>
+                  <a:srgbClr val="0D5E5E"/>
                 </a:solidFill>
                 <a:latin typeface="Microsoft YaHei"/>
               </a:rPr>
@@ -3910,6 +4039,49 @@
               </a:rPr>
               <a:t>企业应核查其他应付款科目下的“其他”“手续费”等明细科目贷方发生额及余额，是否存在收到手续费挂往来不作收入。若未将返还个税手续费记入收入，应补记收入，并入应纳税所得额，上缴所得税。</a:t>
             </a:r>
+          </a:p>
+        </p:txBody>
+      </p:sp>
+      <p:sp>
+        <p:nvSpPr>
+          <p:cNvPr id="4" name="Rectangle 3"/>
+          <p:cNvSpPr/>
+          <p:nvPr/>
+        </p:nvSpPr>
+        <p:spPr>
+          <a:xfrm>
+            <a:off x="457200" y="6720840"/>
+            <a:ext cx="11277295" cy="27432"/>
+          </a:xfrm>
+          <a:prstGeom prst="rect">
+            <a:avLst/>
+          </a:prstGeom>
+          <a:solidFill>
+            <a:srgbClr val="0D5E5E"/>
+          </a:solidFill>
+          <a:ln>
+            <a:noFill/>
+          </a:ln>
+        </p:spPr>
+        <p:style>
+          <a:lnRef idx="1">
+            <a:schemeClr val="accent1"/>
+          </a:lnRef>
+          <a:fillRef idx="3">
+            <a:schemeClr val="accent1"/>
+          </a:fillRef>
+          <a:effectRef idx="2">
+            <a:schemeClr val="accent1"/>
+          </a:effectRef>
+          <a:fontRef idx="minor">
+            <a:schemeClr val="lt1"/>
+          </a:fontRef>
+        </p:style>
+        <p:txBody>
+          <a:bodyPr rtlCol="0" anchor="ctr"/>
+          <a:lstStyle/>
+          <a:p>
+            <a:pPr algn="ctr"/>
           </a:p>
         </p:txBody>
       </p:sp>
@@ -3946,7 +4118,7 @@
             <a:avLst/>
           </a:prstGeom>
           <a:solidFill>
-            <a:srgbClr val="1B3A5C"/>
+            <a:srgbClr val="0D5E5E"/>
           </a:solidFill>
           <a:ln>
             <a:noFill/>
@@ -4018,7 +4190,7 @@
             <a:r>
               <a:rPr sz="1600" b="1">
                 <a:solidFill>
-                  <a:srgbClr val="1B3A5C"/>
+                  <a:srgbClr val="0D5E5E"/>
                 </a:solidFill>
                 <a:latin typeface="Microsoft YaHei"/>
               </a:rPr>
@@ -4200,6 +4372,49 @@
               </a:rPr>
               <a:t>企业在确认销售额时应重点核实其实际采取的销售方式和收入确认的时点。根据税法规定，针对不同的销售方式确认其销售收入实现的时间。若存在延迟确认的情况，企业及时进行调整纠正。</a:t>
             </a:r>
+          </a:p>
+        </p:txBody>
+      </p:sp>
+      <p:sp>
+        <p:nvSpPr>
+          <p:cNvPr id="4" name="Rectangle 3"/>
+          <p:cNvSpPr/>
+          <p:nvPr/>
+        </p:nvSpPr>
+        <p:spPr>
+          <a:xfrm>
+            <a:off x="457200" y="6720840"/>
+            <a:ext cx="11277295" cy="27432"/>
+          </a:xfrm>
+          <a:prstGeom prst="rect">
+            <a:avLst/>
+          </a:prstGeom>
+          <a:solidFill>
+            <a:srgbClr val="0D5E5E"/>
+          </a:solidFill>
+          <a:ln>
+            <a:noFill/>
+          </a:ln>
+        </p:spPr>
+        <p:style>
+          <a:lnRef idx="1">
+            <a:schemeClr val="accent1"/>
+          </a:lnRef>
+          <a:fillRef idx="3">
+            <a:schemeClr val="accent1"/>
+          </a:fillRef>
+          <a:effectRef idx="2">
+            <a:schemeClr val="accent1"/>
+          </a:effectRef>
+          <a:fontRef idx="minor">
+            <a:schemeClr val="lt1"/>
+          </a:fontRef>
+        </p:style>
+        <p:txBody>
+          <a:bodyPr rtlCol="0" anchor="ctr"/>
+          <a:lstStyle/>
+          <a:p>
+            <a:pPr algn="ctr"/>
           </a:p>
         </p:txBody>
       </p:sp>
@@ -4236,7 +4451,7 @@
             <a:avLst/>
           </a:prstGeom>
           <a:solidFill>
-            <a:srgbClr val="1B3A5C"/>
+            <a:srgbClr val="0D5E5E"/>
           </a:solidFill>
           <a:ln>
             <a:noFill/>
@@ -4308,7 +4523,7 @@
             <a:r>
               <a:rPr sz="1600" b="1">
                 <a:solidFill>
-                  <a:srgbClr val="1B3A5C"/>
+                  <a:srgbClr val="0D5E5E"/>
                 </a:solidFill>
                 <a:latin typeface="Microsoft YaHei"/>
               </a:rPr>
@@ -4490,6 +4705,49 @@
               </a:rPr>
               <a:t>企业要严格按照权责发生制对当期收入及时完整入账，若存在上述问题，请及时进行调整纠正，平时要经常对会计账簿进行自查，尤其是应收预收等往来账户，杜绝此种不良情况的发生。</a:t>
             </a:r>
+          </a:p>
+        </p:txBody>
+      </p:sp>
+      <p:sp>
+        <p:nvSpPr>
+          <p:cNvPr id="4" name="Rectangle 3"/>
+          <p:cNvSpPr/>
+          <p:nvPr/>
+        </p:nvSpPr>
+        <p:spPr>
+          <a:xfrm>
+            <a:off x="457200" y="6720840"/>
+            <a:ext cx="11277295" cy="27432"/>
+          </a:xfrm>
+          <a:prstGeom prst="rect">
+            <a:avLst/>
+          </a:prstGeom>
+          <a:solidFill>
+            <a:srgbClr val="0D5E5E"/>
+          </a:solidFill>
+          <a:ln>
+            <a:noFill/>
+          </a:ln>
+        </p:spPr>
+        <p:style>
+          <a:lnRef idx="1">
+            <a:schemeClr val="accent1"/>
+          </a:lnRef>
+          <a:fillRef idx="3">
+            <a:schemeClr val="accent1"/>
+          </a:fillRef>
+          <a:effectRef idx="2">
+            <a:schemeClr val="accent1"/>
+          </a:effectRef>
+          <a:fontRef idx="minor">
+            <a:schemeClr val="lt1"/>
+          </a:fontRef>
+        </p:style>
+        <p:txBody>
+          <a:bodyPr rtlCol="0" anchor="ctr"/>
+          <a:lstStyle/>
+          <a:p>
+            <a:pPr algn="ctr"/>
           </a:p>
         </p:txBody>
       </p:sp>
@@ -4526,7 +4784,7 @@
             <a:avLst/>
           </a:prstGeom>
           <a:solidFill>
-            <a:srgbClr val="1B3A5C"/>
+            <a:srgbClr val="0D5E5E"/>
           </a:solidFill>
           <a:ln>
             <a:noFill/>
@@ -4598,7 +4856,7 @@
             <a:r>
               <a:rPr sz="1600" b="1">
                 <a:solidFill>
-                  <a:srgbClr val="1B3A5C"/>
+                  <a:srgbClr val="0D5E5E"/>
                 </a:solidFill>
                 <a:latin typeface="Microsoft YaHei"/>
               </a:rPr>
@@ -4802,6 +5060,49 @@
               </a:rPr>
               <a:t>同时需要注意：应付利息、应付股利的对方如果是自然人，还可能会涉及扣缴个人所得税。</a:t>
             </a:r>
+          </a:p>
+        </p:txBody>
+      </p:sp>
+      <p:sp>
+        <p:nvSpPr>
+          <p:cNvPr id="4" name="Rectangle 3"/>
+          <p:cNvSpPr/>
+          <p:nvPr/>
+        </p:nvSpPr>
+        <p:spPr>
+          <a:xfrm>
+            <a:off x="457200" y="6720840"/>
+            <a:ext cx="11277295" cy="27432"/>
+          </a:xfrm>
+          <a:prstGeom prst="rect">
+            <a:avLst/>
+          </a:prstGeom>
+          <a:solidFill>
+            <a:srgbClr val="0D5E5E"/>
+          </a:solidFill>
+          <a:ln>
+            <a:noFill/>
+          </a:ln>
+        </p:spPr>
+        <p:style>
+          <a:lnRef idx="1">
+            <a:schemeClr val="accent1"/>
+          </a:lnRef>
+          <a:fillRef idx="3">
+            <a:schemeClr val="accent1"/>
+          </a:fillRef>
+          <a:effectRef idx="2">
+            <a:schemeClr val="accent1"/>
+          </a:effectRef>
+          <a:fontRef idx="minor">
+            <a:schemeClr val="lt1"/>
+          </a:fontRef>
+        </p:style>
+        <p:txBody>
+          <a:bodyPr rtlCol="0" anchor="ctr"/>
+          <a:lstStyle/>
+          <a:p>
+            <a:pPr algn="ctr"/>
           </a:p>
         </p:txBody>
       </p:sp>
@@ -4838,7 +5139,7 @@
             <a:avLst/>
           </a:prstGeom>
           <a:solidFill>
-            <a:srgbClr val="1B3A5C"/>
+            <a:srgbClr val="0D5E5E"/>
           </a:solidFill>
           <a:ln>
             <a:noFill/>
@@ -4910,7 +5211,7 @@
             <a:r>
               <a:rPr sz="1600" b="1">
                 <a:solidFill>
-                  <a:srgbClr val="1B3A5C"/>
+                  <a:srgbClr val="0D5E5E"/>
                 </a:solidFill>
                 <a:latin typeface="Microsoft YaHei"/>
               </a:rPr>
@@ -5114,6 +5415,49 @@
               </a:rPr>
               <a:t>企业已经作为损失处理的资产，在以后纳税年度又全部收回或者部分收回时，应当计入当期收入，增加应纳税所得额。</a:t>
             </a:r>
+          </a:p>
+        </p:txBody>
+      </p:sp>
+      <p:sp>
+        <p:nvSpPr>
+          <p:cNvPr id="4" name="Rectangle 3"/>
+          <p:cNvSpPr/>
+          <p:nvPr/>
+        </p:nvSpPr>
+        <p:spPr>
+          <a:xfrm>
+            <a:off x="457200" y="6720840"/>
+            <a:ext cx="11277295" cy="27432"/>
+          </a:xfrm>
+          <a:prstGeom prst="rect">
+            <a:avLst/>
+          </a:prstGeom>
+          <a:solidFill>
+            <a:srgbClr val="0D5E5E"/>
+          </a:solidFill>
+          <a:ln>
+            <a:noFill/>
+          </a:ln>
+        </p:spPr>
+        <p:style>
+          <a:lnRef idx="1">
+            <a:schemeClr val="accent1"/>
+          </a:lnRef>
+          <a:fillRef idx="3">
+            <a:schemeClr val="accent1"/>
+          </a:fillRef>
+          <a:effectRef idx="2">
+            <a:schemeClr val="accent1"/>
+          </a:effectRef>
+          <a:fontRef idx="minor">
+            <a:schemeClr val="lt1"/>
+          </a:fontRef>
+        </p:style>
+        <p:txBody>
+          <a:bodyPr rtlCol="0" anchor="ctr"/>
+          <a:lstStyle/>
+          <a:p>
+            <a:pPr algn="ctr"/>
           </a:p>
         </p:txBody>
       </p:sp>
@@ -5150,7 +5494,7 @@
             <a:avLst/>
           </a:prstGeom>
           <a:solidFill>
-            <a:srgbClr val="1B3A5C"/>
+            <a:srgbClr val="0D5E5E"/>
           </a:solidFill>
           <a:ln>
             <a:noFill/>
@@ -5222,7 +5566,7 @@
             <a:r>
               <a:rPr sz="1600" b="1">
                 <a:solidFill>
-                  <a:srgbClr val="1B3A5C"/>
+                  <a:srgbClr val="0D5E5E"/>
                 </a:solidFill>
                 <a:latin typeface="Microsoft YaHei"/>
               </a:rPr>
@@ -5404,6 +5748,49 @@
               </a:rPr>
               <a:t>企业需核查应计收入而未计收入的项目，对于收回的资产损失，需在相应纳税年度增加应纳税所得额，补缴税款。</a:t>
             </a:r>
+          </a:p>
+        </p:txBody>
+      </p:sp>
+      <p:sp>
+        <p:nvSpPr>
+          <p:cNvPr id="4" name="Rectangle 3"/>
+          <p:cNvSpPr/>
+          <p:nvPr/>
+        </p:nvSpPr>
+        <p:spPr>
+          <a:xfrm>
+            <a:off x="457200" y="6720840"/>
+            <a:ext cx="11277295" cy="27432"/>
+          </a:xfrm>
+          <a:prstGeom prst="rect">
+            <a:avLst/>
+          </a:prstGeom>
+          <a:solidFill>
+            <a:srgbClr val="0D5E5E"/>
+          </a:solidFill>
+          <a:ln>
+            <a:noFill/>
+          </a:ln>
+        </p:spPr>
+        <p:style>
+          <a:lnRef idx="1">
+            <a:schemeClr val="accent1"/>
+          </a:lnRef>
+          <a:fillRef idx="3">
+            <a:schemeClr val="accent1"/>
+          </a:fillRef>
+          <a:effectRef idx="2">
+            <a:schemeClr val="accent1"/>
+          </a:effectRef>
+          <a:fontRef idx="minor">
+            <a:schemeClr val="lt1"/>
+          </a:fontRef>
+        </p:style>
+        <p:txBody>
+          <a:bodyPr rtlCol="0" anchor="ctr"/>
+          <a:lstStyle/>
+          <a:p>
+            <a:pPr algn="ctr"/>
           </a:p>
         </p:txBody>
       </p:sp>
@@ -5440,7 +5827,7 @@
             <a:avLst/>
           </a:prstGeom>
           <a:solidFill>
-            <a:srgbClr val="1B3A5C"/>
+            <a:srgbClr val="0D5E5E"/>
           </a:solidFill>
           <a:ln>
             <a:noFill/>
@@ -5512,7 +5899,7 @@
             <a:r>
               <a:rPr sz="1600" b="1">
                 <a:solidFill>
-                  <a:srgbClr val="1B3A5C"/>
+                  <a:srgbClr val="0D5E5E"/>
                 </a:solidFill>
                 <a:latin typeface="Microsoft YaHei"/>
               </a:rPr>
@@ -5694,6 +6081,49 @@
               </a:rPr>
               <a:t>企业应当自行判断是否存在逾期包装物押金，若存在上述情形，企业对取得的租金收入是否已在税法规定期间及时确认收入，若是未及时确认收入，企业及时进行调整纠正。</a:t>
             </a:r>
+          </a:p>
+        </p:txBody>
+      </p:sp>
+      <p:sp>
+        <p:nvSpPr>
+          <p:cNvPr id="4" name="Rectangle 3"/>
+          <p:cNvSpPr/>
+          <p:nvPr/>
+        </p:nvSpPr>
+        <p:spPr>
+          <a:xfrm>
+            <a:off x="457200" y="6720840"/>
+            <a:ext cx="11277295" cy="27432"/>
+          </a:xfrm>
+          <a:prstGeom prst="rect">
+            <a:avLst/>
+          </a:prstGeom>
+          <a:solidFill>
+            <a:srgbClr val="0D5E5E"/>
+          </a:solidFill>
+          <a:ln>
+            <a:noFill/>
+          </a:ln>
+        </p:spPr>
+        <p:style>
+          <a:lnRef idx="1">
+            <a:schemeClr val="accent1"/>
+          </a:lnRef>
+          <a:fillRef idx="3">
+            <a:schemeClr val="accent1"/>
+          </a:fillRef>
+          <a:effectRef idx="2">
+            <a:schemeClr val="accent1"/>
+          </a:effectRef>
+          <a:fontRef idx="minor">
+            <a:schemeClr val="lt1"/>
+          </a:fontRef>
+        </p:style>
+        <p:txBody>
+          <a:bodyPr rtlCol="0" anchor="ctr"/>
+          <a:lstStyle/>
+          <a:p>
+            <a:pPr algn="ctr"/>
           </a:p>
         </p:txBody>
       </p:sp>
@@ -5730,7 +6160,7 @@
             <a:avLst/>
           </a:prstGeom>
           <a:solidFill>
-            <a:srgbClr val="1B3A5C"/>
+            <a:srgbClr val="0D5E5E"/>
           </a:solidFill>
           <a:ln>
             <a:noFill/>
@@ -5802,7 +6232,7 @@
             <a:r>
               <a:rPr sz="1600" b="1">
                 <a:solidFill>
-                  <a:srgbClr val="1B3A5C"/>
+                  <a:srgbClr val="0D5E5E"/>
                 </a:solidFill>
                 <a:latin typeface="Microsoft YaHei"/>
               </a:rPr>
@@ -5984,6 +6414,49 @@
               </a:rPr>
               <a:t>企业应当自行检查是否有销售低值易耗品业务，若存在上述情形，判断对其取得的收入是否已经及时入账，即使收入数额相对较少，也要及时完整入账，及时检查有没有遗漏此部分收入的情形。</a:t>
             </a:r>
+          </a:p>
+        </p:txBody>
+      </p:sp>
+      <p:sp>
+        <p:nvSpPr>
+          <p:cNvPr id="4" name="Rectangle 3"/>
+          <p:cNvSpPr/>
+          <p:nvPr/>
+        </p:nvSpPr>
+        <p:spPr>
+          <a:xfrm>
+            <a:off x="457200" y="6720840"/>
+            <a:ext cx="11277295" cy="27432"/>
+          </a:xfrm>
+          <a:prstGeom prst="rect">
+            <a:avLst/>
+          </a:prstGeom>
+          <a:solidFill>
+            <a:srgbClr val="0D5E5E"/>
+          </a:solidFill>
+          <a:ln>
+            <a:noFill/>
+          </a:ln>
+        </p:spPr>
+        <p:style>
+          <a:lnRef idx="1">
+            <a:schemeClr val="accent1"/>
+          </a:lnRef>
+          <a:fillRef idx="3">
+            <a:schemeClr val="accent1"/>
+          </a:fillRef>
+          <a:effectRef idx="2">
+            <a:schemeClr val="accent1"/>
+          </a:effectRef>
+          <a:fontRef idx="minor">
+            <a:schemeClr val="lt1"/>
+          </a:fontRef>
+        </p:style>
+        <p:txBody>
+          <a:bodyPr rtlCol="0" anchor="ctr"/>
+          <a:lstStyle/>
+          <a:p>
+            <a:pPr algn="ctr"/>
           </a:p>
         </p:txBody>
       </p:sp>
@@ -6020,7 +6493,7 @@
             <a:avLst/>
           </a:prstGeom>
           <a:solidFill>
-            <a:srgbClr val="1B3A5C"/>
+            <a:srgbClr val="0D5E5E"/>
           </a:solidFill>
           <a:ln>
             <a:noFill/>
@@ -6092,7 +6565,7 @@
             <a:r>
               <a:rPr sz="1600" b="1">
                 <a:solidFill>
-                  <a:srgbClr val="1B3A5C"/>
+                  <a:srgbClr val="0D5E5E"/>
                 </a:solidFill>
                 <a:latin typeface="Microsoft YaHei"/>
               </a:rPr>
@@ -6450,6 +6923,49 @@
               </a:rPr>
               <a:t>企业应核实取得的各种政府财政性资金，如财政补贴、补助、补偿、等，如不符合财税〔2011〕70号规定的三项条件的，应当按照实际取得收入的时间确认收入，不得作为不征税收入核算。</a:t>
             </a:r>
+          </a:p>
+        </p:txBody>
+      </p:sp>
+      <p:sp>
+        <p:nvSpPr>
+          <p:cNvPr id="4" name="Rectangle 3"/>
+          <p:cNvSpPr/>
+          <p:nvPr/>
+        </p:nvSpPr>
+        <p:spPr>
+          <a:xfrm>
+            <a:off x="457200" y="6720840"/>
+            <a:ext cx="11277295" cy="27432"/>
+          </a:xfrm>
+          <a:prstGeom prst="rect">
+            <a:avLst/>
+          </a:prstGeom>
+          <a:solidFill>
+            <a:srgbClr val="0D5E5E"/>
+          </a:solidFill>
+          <a:ln>
+            <a:noFill/>
+          </a:ln>
+        </p:spPr>
+        <p:style>
+          <a:lnRef idx="1">
+            <a:schemeClr val="accent1"/>
+          </a:lnRef>
+          <a:fillRef idx="3">
+            <a:schemeClr val="accent1"/>
+          </a:fillRef>
+          <a:effectRef idx="2">
+            <a:schemeClr val="accent1"/>
+          </a:effectRef>
+          <a:fontRef idx="minor">
+            <a:schemeClr val="lt1"/>
+          </a:fontRef>
+        </p:style>
+        <p:txBody>
+          <a:bodyPr rtlCol="0" anchor="ctr"/>
+          <a:lstStyle/>
+          <a:p>
+            <a:pPr algn="ctr"/>
           </a:p>
         </p:txBody>
       </p:sp>
@@ -6486,7 +7002,7 @@
             <a:avLst/>
           </a:prstGeom>
           <a:solidFill>
-            <a:srgbClr val="1B3A5C"/>
+            <a:srgbClr val="0D5E5E"/>
           </a:solidFill>
           <a:ln>
             <a:noFill/>
@@ -6558,7 +7074,7 @@
             <a:r>
               <a:rPr sz="1600" b="1">
                 <a:solidFill>
-                  <a:srgbClr val="1B3A5C"/>
+                  <a:srgbClr val="0D5E5E"/>
                 </a:solidFill>
                 <a:latin typeface="Microsoft YaHei"/>
               </a:rPr>
@@ -6740,6 +7256,49 @@
               </a:rPr>
               <a:t>核查企业取得财产（包括各类资产、股权、债权等）转让收入，不论是以货币形式、还是非货币形式体现，除另有规定外，是否均应一次性计入确认收入的年度计算缴纳企业所得税。</a:t>
             </a:r>
+          </a:p>
+        </p:txBody>
+      </p:sp>
+      <p:sp>
+        <p:nvSpPr>
+          <p:cNvPr id="4" name="Rectangle 3"/>
+          <p:cNvSpPr/>
+          <p:nvPr/>
+        </p:nvSpPr>
+        <p:spPr>
+          <a:xfrm>
+            <a:off x="457200" y="6720840"/>
+            <a:ext cx="11277295" cy="27432"/>
+          </a:xfrm>
+          <a:prstGeom prst="rect">
+            <a:avLst/>
+          </a:prstGeom>
+          <a:solidFill>
+            <a:srgbClr val="0D5E5E"/>
+          </a:solidFill>
+          <a:ln>
+            <a:noFill/>
+          </a:ln>
+        </p:spPr>
+        <p:style>
+          <a:lnRef idx="1">
+            <a:schemeClr val="accent1"/>
+          </a:lnRef>
+          <a:fillRef idx="3">
+            <a:schemeClr val="accent1"/>
+          </a:fillRef>
+          <a:effectRef idx="2">
+            <a:schemeClr val="accent1"/>
+          </a:effectRef>
+          <a:fontRef idx="minor">
+            <a:schemeClr val="lt1"/>
+          </a:fontRef>
+        </p:style>
+        <p:txBody>
+          <a:bodyPr rtlCol="0" anchor="ctr"/>
+          <a:lstStyle/>
+          <a:p>
+            <a:pPr algn="ctr"/>
           </a:p>
         </p:txBody>
       </p:sp>
@@ -6776,7 +7335,7 @@
             <a:avLst/>
           </a:prstGeom>
           <a:solidFill>
-            <a:srgbClr val="1B3A5C"/>
+            <a:srgbClr val="0D5E5E"/>
           </a:solidFill>
           <a:ln>
             <a:noFill/>
@@ -6848,7 +7407,7 @@
             <a:r>
               <a:rPr sz="1600" b="1">
                 <a:solidFill>
-                  <a:srgbClr val="1B3A5C"/>
+                  <a:srgbClr val="0D5E5E"/>
                 </a:solidFill>
                 <a:latin typeface="Microsoft YaHei"/>
               </a:rPr>
@@ -7052,6 +7611,49 @@
               </a:rPr>
               <a:t>企业应当自行检查“主营业务收入”“其他业务收入”账户的明细金额，准确归类取得的收入类别，判断是否存在将不符合税收优惠的收入划为减免税类别，以此少缴税款，若是存在上述情形，企业及时进行调整纠正。</a:t>
             </a:r>
+          </a:p>
+        </p:txBody>
+      </p:sp>
+      <p:sp>
+        <p:nvSpPr>
+          <p:cNvPr id="4" name="Rectangle 3"/>
+          <p:cNvSpPr/>
+          <p:nvPr/>
+        </p:nvSpPr>
+        <p:spPr>
+          <a:xfrm>
+            <a:off x="457200" y="6720840"/>
+            <a:ext cx="11277295" cy="27432"/>
+          </a:xfrm>
+          <a:prstGeom prst="rect">
+            <a:avLst/>
+          </a:prstGeom>
+          <a:solidFill>
+            <a:srgbClr val="0D5E5E"/>
+          </a:solidFill>
+          <a:ln>
+            <a:noFill/>
+          </a:ln>
+        </p:spPr>
+        <p:style>
+          <a:lnRef idx="1">
+            <a:schemeClr val="accent1"/>
+          </a:lnRef>
+          <a:fillRef idx="3">
+            <a:schemeClr val="accent1"/>
+          </a:fillRef>
+          <a:effectRef idx="2">
+            <a:schemeClr val="accent1"/>
+          </a:effectRef>
+          <a:fontRef idx="minor">
+            <a:schemeClr val="lt1"/>
+          </a:fontRef>
+        </p:style>
+        <p:txBody>
+          <a:bodyPr rtlCol="0" anchor="ctr"/>
+          <a:lstStyle/>
+          <a:p>
+            <a:pPr algn="ctr"/>
           </a:p>
         </p:txBody>
       </p:sp>
@@ -7088,7 +7690,7 @@
             <a:avLst/>
           </a:prstGeom>
           <a:solidFill>
-            <a:srgbClr val="1B3A5C"/>
+            <a:srgbClr val="0D5E5E"/>
           </a:solidFill>
           <a:ln>
             <a:noFill/>
@@ -7160,7 +7762,7 @@
             <a:r>
               <a:rPr sz="1600" b="1">
                 <a:solidFill>
-                  <a:srgbClr val="1B3A5C"/>
+                  <a:srgbClr val="0D5E5E"/>
                 </a:solidFill>
                 <a:latin typeface="Microsoft YaHei"/>
               </a:rPr>
@@ -7364,6 +7966,49 @@
               </a:rPr>
               <a:t>企业应当自行检查“主营业务收入”“主营业务成本”科目的明细金额与总账金额，根据权责发生制原则判断相关收入的确认是否符合税法的规定，若是存在上述情形，企业及时进行调整纠正。</a:t>
             </a:r>
+          </a:p>
+        </p:txBody>
+      </p:sp>
+      <p:sp>
+        <p:nvSpPr>
+          <p:cNvPr id="4" name="Rectangle 3"/>
+          <p:cNvSpPr/>
+          <p:nvPr/>
+        </p:nvSpPr>
+        <p:spPr>
+          <a:xfrm>
+            <a:off x="457200" y="6720840"/>
+            <a:ext cx="11277295" cy="27432"/>
+          </a:xfrm>
+          <a:prstGeom prst="rect">
+            <a:avLst/>
+          </a:prstGeom>
+          <a:solidFill>
+            <a:srgbClr val="0D5E5E"/>
+          </a:solidFill>
+          <a:ln>
+            <a:noFill/>
+          </a:ln>
+        </p:spPr>
+        <p:style>
+          <a:lnRef idx="1">
+            <a:schemeClr val="accent1"/>
+          </a:lnRef>
+          <a:fillRef idx="3">
+            <a:schemeClr val="accent1"/>
+          </a:fillRef>
+          <a:effectRef idx="2">
+            <a:schemeClr val="accent1"/>
+          </a:effectRef>
+          <a:fontRef idx="minor">
+            <a:schemeClr val="lt1"/>
+          </a:fontRef>
+        </p:style>
+        <p:txBody>
+          <a:bodyPr rtlCol="0" anchor="ctr"/>
+          <a:lstStyle/>
+          <a:p>
+            <a:pPr algn="ctr"/>
           </a:p>
         </p:txBody>
       </p:sp>
@@ -7400,7 +8045,7 @@
             <a:avLst/>
           </a:prstGeom>
           <a:solidFill>
-            <a:srgbClr val="1B3A5C"/>
+            <a:srgbClr val="0D5E5E"/>
           </a:solidFill>
           <a:ln>
             <a:noFill/>
@@ -7472,7 +8117,7 @@
             <a:r>
               <a:rPr sz="1600" b="1">
                 <a:solidFill>
-                  <a:srgbClr val="1B3A5C"/>
+                  <a:srgbClr val="0D5E5E"/>
                 </a:solidFill>
                 <a:latin typeface="Microsoft YaHei"/>
               </a:rPr>
@@ -7654,6 +8299,49 @@
               </a:rPr>
               <a:t>企业应当自行核算是否同时存在税收优惠事项和应税项目，若同时存在，企业是否能够对该事项产生的成本分开核算，若是不能对其分开核算的，其是否已就全额享受税收优惠政策，若是未享受的，企业及时进行调整与纠正。</a:t>
             </a:r>
+          </a:p>
+        </p:txBody>
+      </p:sp>
+      <p:sp>
+        <p:nvSpPr>
+          <p:cNvPr id="4" name="Rectangle 3"/>
+          <p:cNvSpPr/>
+          <p:nvPr/>
+        </p:nvSpPr>
+        <p:spPr>
+          <a:xfrm>
+            <a:off x="457200" y="6720840"/>
+            <a:ext cx="11277295" cy="27432"/>
+          </a:xfrm>
+          <a:prstGeom prst="rect">
+            <a:avLst/>
+          </a:prstGeom>
+          <a:solidFill>
+            <a:srgbClr val="0D5E5E"/>
+          </a:solidFill>
+          <a:ln>
+            <a:noFill/>
+          </a:ln>
+        </p:spPr>
+        <p:style>
+          <a:lnRef idx="1">
+            <a:schemeClr val="accent1"/>
+          </a:lnRef>
+          <a:fillRef idx="3">
+            <a:schemeClr val="accent1"/>
+          </a:fillRef>
+          <a:effectRef idx="2">
+            <a:schemeClr val="accent1"/>
+          </a:effectRef>
+          <a:fontRef idx="minor">
+            <a:schemeClr val="lt1"/>
+          </a:fontRef>
+        </p:style>
+        <p:txBody>
+          <a:bodyPr rtlCol="0" anchor="ctr"/>
+          <a:lstStyle/>
+          <a:p>
+            <a:pPr algn="ctr"/>
           </a:p>
         </p:txBody>
       </p:sp>
@@ -7690,7 +8378,7 @@
             <a:avLst/>
           </a:prstGeom>
           <a:solidFill>
-            <a:srgbClr val="1B3A5C"/>
+            <a:srgbClr val="0D5E5E"/>
           </a:solidFill>
           <a:ln>
             <a:noFill/>
@@ -7762,7 +8450,7 @@
             <a:r>
               <a:rPr sz="1600" b="1">
                 <a:solidFill>
-                  <a:srgbClr val="1B3A5C"/>
+                  <a:srgbClr val="0D5E5E"/>
                 </a:solidFill>
                 <a:latin typeface="Microsoft YaHei"/>
               </a:rPr>
@@ -7944,6 +8632,49 @@
               </a:rPr>
               <a:t>核查其他应付款、专项应付款等科目贷方发生额，以及其相关拨付文件是否符合不征税财政性资金的相关规定。财政性资金作不征税收入处理后，在5年（60个月）内未发生支出且未缴回财政部门或其他拨付资金的政府部门的部分，应计入取得该资金第六年的应税收入总额；计入应税收入总额的财政性资金发生的支出，允许在计算应纳税所得额时扣除。</a:t>
             </a:r>
+          </a:p>
+        </p:txBody>
+      </p:sp>
+      <p:sp>
+        <p:nvSpPr>
+          <p:cNvPr id="4" name="Rectangle 3"/>
+          <p:cNvSpPr/>
+          <p:nvPr/>
+        </p:nvSpPr>
+        <p:spPr>
+          <a:xfrm>
+            <a:off x="457200" y="6720840"/>
+            <a:ext cx="11277295" cy="27432"/>
+          </a:xfrm>
+          <a:prstGeom prst="rect">
+            <a:avLst/>
+          </a:prstGeom>
+          <a:solidFill>
+            <a:srgbClr val="0D5E5E"/>
+          </a:solidFill>
+          <a:ln>
+            <a:noFill/>
+          </a:ln>
+        </p:spPr>
+        <p:style>
+          <a:lnRef idx="1">
+            <a:schemeClr val="accent1"/>
+          </a:lnRef>
+          <a:fillRef idx="3">
+            <a:schemeClr val="accent1"/>
+          </a:fillRef>
+          <a:effectRef idx="2">
+            <a:schemeClr val="accent1"/>
+          </a:effectRef>
+          <a:fontRef idx="minor">
+            <a:schemeClr val="lt1"/>
+          </a:fontRef>
+        </p:style>
+        <p:txBody>
+          <a:bodyPr rtlCol="0" anchor="ctr"/>
+          <a:lstStyle/>
+          <a:p>
+            <a:pPr algn="ctr"/>
           </a:p>
         </p:txBody>
       </p:sp>
@@ -7980,7 +8711,7 @@
             <a:avLst/>
           </a:prstGeom>
           <a:solidFill>
-            <a:srgbClr val="1B3A5C"/>
+            <a:srgbClr val="0D5E5E"/>
           </a:solidFill>
           <a:ln>
             <a:noFill/>
@@ -8052,7 +8783,7 @@
             <a:r>
               <a:rPr sz="1600" b="1">
                 <a:solidFill>
-                  <a:srgbClr val="1B3A5C"/>
+                  <a:srgbClr val="0D5E5E"/>
                 </a:solidFill>
                 <a:latin typeface="Microsoft YaHei"/>
               </a:rPr>
@@ -8234,6 +8965,49 @@
               </a:rPr>
               <a:t>企业自查是否存在随意更改存货计价方法的情况，若存在上述情形，请及时调整存货计价方法，前后保持一致并做相应纳税调整。</a:t>
             </a:r>
+          </a:p>
+        </p:txBody>
+      </p:sp>
+      <p:sp>
+        <p:nvSpPr>
+          <p:cNvPr id="4" name="Rectangle 3"/>
+          <p:cNvSpPr/>
+          <p:nvPr/>
+        </p:nvSpPr>
+        <p:spPr>
+          <a:xfrm>
+            <a:off x="457200" y="6720840"/>
+            <a:ext cx="11277295" cy="27432"/>
+          </a:xfrm>
+          <a:prstGeom prst="rect">
+            <a:avLst/>
+          </a:prstGeom>
+          <a:solidFill>
+            <a:srgbClr val="0D5E5E"/>
+          </a:solidFill>
+          <a:ln>
+            <a:noFill/>
+          </a:ln>
+        </p:spPr>
+        <p:style>
+          <a:lnRef idx="1">
+            <a:schemeClr val="accent1"/>
+          </a:lnRef>
+          <a:fillRef idx="3">
+            <a:schemeClr val="accent1"/>
+          </a:fillRef>
+          <a:effectRef idx="2">
+            <a:schemeClr val="accent1"/>
+          </a:effectRef>
+          <a:fontRef idx="minor">
+            <a:schemeClr val="lt1"/>
+          </a:fontRef>
+        </p:style>
+        <p:txBody>
+          <a:bodyPr rtlCol="0" anchor="ctr"/>
+          <a:lstStyle/>
+          <a:p>
+            <a:pPr algn="ctr"/>
           </a:p>
         </p:txBody>
       </p:sp>
@@ -8270,7 +9044,7 @@
             <a:avLst/>
           </a:prstGeom>
           <a:solidFill>
-            <a:srgbClr val="1B3A5C"/>
+            <a:srgbClr val="0D5E5E"/>
           </a:solidFill>
           <a:ln>
             <a:noFill/>
@@ -8342,7 +9116,7 @@
             <a:r>
               <a:rPr sz="1600" b="1">
                 <a:solidFill>
-                  <a:srgbClr val="1B3A5C"/>
+                  <a:srgbClr val="0D5E5E"/>
                 </a:solidFill>
                 <a:latin typeface="Microsoft YaHei"/>
               </a:rPr>
@@ -8524,6 +9298,49 @@
               </a:rPr>
               <a:t>企业应检查计算应纳税所得额时扣除的工资薪金，如果有超过限额的扣除额，应及时调整。</a:t>
             </a:r>
+          </a:p>
+        </p:txBody>
+      </p:sp>
+      <p:sp>
+        <p:nvSpPr>
+          <p:cNvPr id="4" name="Rectangle 3"/>
+          <p:cNvSpPr/>
+          <p:nvPr/>
+        </p:nvSpPr>
+        <p:spPr>
+          <a:xfrm>
+            <a:off x="457200" y="6720840"/>
+            <a:ext cx="11277295" cy="27432"/>
+          </a:xfrm>
+          <a:prstGeom prst="rect">
+            <a:avLst/>
+          </a:prstGeom>
+          <a:solidFill>
+            <a:srgbClr val="0D5E5E"/>
+          </a:solidFill>
+          <a:ln>
+            <a:noFill/>
+          </a:ln>
+        </p:spPr>
+        <p:style>
+          <a:lnRef idx="1">
+            <a:schemeClr val="accent1"/>
+          </a:lnRef>
+          <a:fillRef idx="3">
+            <a:schemeClr val="accent1"/>
+          </a:fillRef>
+          <a:effectRef idx="2">
+            <a:schemeClr val="accent1"/>
+          </a:effectRef>
+          <a:fontRef idx="minor">
+            <a:schemeClr val="lt1"/>
+          </a:fontRef>
+        </p:style>
+        <p:txBody>
+          <a:bodyPr rtlCol="0" anchor="ctr"/>
+          <a:lstStyle/>
+          <a:p>
+            <a:pPr algn="ctr"/>
           </a:p>
         </p:txBody>
       </p:sp>
@@ -8560,7 +9377,7 @@
             <a:avLst/>
           </a:prstGeom>
           <a:solidFill>
-            <a:srgbClr val="1B3A5C"/>
+            <a:srgbClr val="0D5E5E"/>
           </a:solidFill>
           <a:ln>
             <a:noFill/>
@@ -8632,7 +9449,7 @@
             <a:r>
               <a:rPr sz="1600" b="1">
                 <a:solidFill>
-                  <a:srgbClr val="1B3A5C"/>
+                  <a:srgbClr val="0D5E5E"/>
                 </a:solidFill>
                 <a:latin typeface="Microsoft YaHei"/>
               </a:rPr>
@@ -8858,6 +9675,49 @@
               </a:rPr>
               <a:t>企业应当自行检查“主营业务收入”、“存货”等账户的明细金额，判断是否存在有对该非货币资产交换错误确认交换成本的情形，若存在上述问题，企业及时进行调整与纠正。</a:t>
             </a:r>
+          </a:p>
+        </p:txBody>
+      </p:sp>
+      <p:sp>
+        <p:nvSpPr>
+          <p:cNvPr id="4" name="Rectangle 3"/>
+          <p:cNvSpPr/>
+          <p:nvPr/>
+        </p:nvSpPr>
+        <p:spPr>
+          <a:xfrm>
+            <a:off x="457200" y="6720840"/>
+            <a:ext cx="11277295" cy="27432"/>
+          </a:xfrm>
+          <a:prstGeom prst="rect">
+            <a:avLst/>
+          </a:prstGeom>
+          <a:solidFill>
+            <a:srgbClr val="0D5E5E"/>
+          </a:solidFill>
+          <a:ln>
+            <a:noFill/>
+          </a:ln>
+        </p:spPr>
+        <p:style>
+          <a:lnRef idx="1">
+            <a:schemeClr val="accent1"/>
+          </a:lnRef>
+          <a:fillRef idx="3">
+            <a:schemeClr val="accent1"/>
+          </a:fillRef>
+          <a:effectRef idx="2">
+            <a:schemeClr val="accent1"/>
+          </a:effectRef>
+          <a:fontRef idx="minor">
+            <a:schemeClr val="lt1"/>
+          </a:fontRef>
+        </p:style>
+        <p:txBody>
+          <a:bodyPr rtlCol="0" anchor="ctr"/>
+          <a:lstStyle/>
+          <a:p>
+            <a:pPr algn="ctr"/>
           </a:p>
         </p:txBody>
       </p:sp>
@@ -8894,7 +9754,7 @@
             <a:avLst/>
           </a:prstGeom>
           <a:solidFill>
-            <a:srgbClr val="1B3A5C"/>
+            <a:srgbClr val="0D5E5E"/>
           </a:solidFill>
           <a:ln>
             <a:noFill/>
@@ -8966,7 +9826,7 @@
             <a:r>
               <a:rPr sz="1600" b="1">
                 <a:solidFill>
-                  <a:srgbClr val="1B3A5C"/>
+                  <a:srgbClr val="0D5E5E"/>
                 </a:solidFill>
                 <a:latin typeface="Microsoft YaHei"/>
               </a:rPr>
@@ -9170,6 +10030,49 @@
               </a:rPr>
               <a:t>（国税函〔2009〕3号）文件关于福利费的规定为正列举，不在列举范围的不能作为福利费处理。根据企业所得税规定，企业支付的离退休职工统筹外退休津贴、统筹外费用，不属于与取得收入直接相关的支出，不能在企业所得税前直接扣除。企业向离退休、遗属、内退和下岗人员（简称三类人员费用）支付各种费用不得在税前扣除，应做纳税调整。</a:t>
             </a:r>
+          </a:p>
+        </p:txBody>
+      </p:sp>
+      <p:sp>
+        <p:nvSpPr>
+          <p:cNvPr id="4" name="Rectangle 3"/>
+          <p:cNvSpPr/>
+          <p:nvPr/>
+        </p:nvSpPr>
+        <p:spPr>
+          <a:xfrm>
+            <a:off x="457200" y="6720840"/>
+            <a:ext cx="11277295" cy="27432"/>
+          </a:xfrm>
+          <a:prstGeom prst="rect">
+            <a:avLst/>
+          </a:prstGeom>
+          <a:solidFill>
+            <a:srgbClr val="0D5E5E"/>
+          </a:solidFill>
+          <a:ln>
+            <a:noFill/>
+          </a:ln>
+        </p:spPr>
+        <p:style>
+          <a:lnRef idx="1">
+            <a:schemeClr val="accent1"/>
+          </a:lnRef>
+          <a:fillRef idx="3">
+            <a:schemeClr val="accent1"/>
+          </a:fillRef>
+          <a:effectRef idx="2">
+            <a:schemeClr val="accent1"/>
+          </a:effectRef>
+          <a:fontRef idx="minor">
+            <a:schemeClr val="lt1"/>
+          </a:fontRef>
+        </p:style>
+        <p:txBody>
+          <a:bodyPr rtlCol="0" anchor="ctr"/>
+          <a:lstStyle/>
+          <a:p>
+            <a:pPr algn="ctr"/>
           </a:p>
         </p:txBody>
       </p:sp>
@@ -9206,7 +10109,7 @@
             <a:avLst/>
           </a:prstGeom>
           <a:solidFill>
-            <a:srgbClr val="1B3A5C"/>
+            <a:srgbClr val="0D5E5E"/>
           </a:solidFill>
           <a:ln>
             <a:noFill/>
@@ -9278,7 +10181,7 @@
             <a:r>
               <a:rPr sz="1600" b="1">
                 <a:solidFill>
-                  <a:srgbClr val="1B3A5C"/>
+                  <a:srgbClr val="0D5E5E"/>
                 </a:solidFill>
                 <a:latin typeface="Microsoft YaHei"/>
               </a:rPr>
@@ -9460,6 +10363,49 @@
               </a:rPr>
               <a:t>企业自查是否有上述情况，存在的话及时调整。</a:t>
             </a:r>
+          </a:p>
+        </p:txBody>
+      </p:sp>
+      <p:sp>
+        <p:nvSpPr>
+          <p:cNvPr id="4" name="Rectangle 3"/>
+          <p:cNvSpPr/>
+          <p:nvPr/>
+        </p:nvSpPr>
+        <p:spPr>
+          <a:xfrm>
+            <a:off x="457200" y="6720840"/>
+            <a:ext cx="11277295" cy="27432"/>
+          </a:xfrm>
+          <a:prstGeom prst="rect">
+            <a:avLst/>
+          </a:prstGeom>
+          <a:solidFill>
+            <a:srgbClr val="0D5E5E"/>
+          </a:solidFill>
+          <a:ln>
+            <a:noFill/>
+          </a:ln>
+        </p:spPr>
+        <p:style>
+          <a:lnRef idx="1">
+            <a:schemeClr val="accent1"/>
+          </a:lnRef>
+          <a:fillRef idx="3">
+            <a:schemeClr val="accent1"/>
+          </a:fillRef>
+          <a:effectRef idx="2">
+            <a:schemeClr val="accent1"/>
+          </a:effectRef>
+          <a:fontRef idx="minor">
+            <a:schemeClr val="lt1"/>
+          </a:fontRef>
+        </p:style>
+        <p:txBody>
+          <a:bodyPr rtlCol="0" anchor="ctr"/>
+          <a:lstStyle/>
+          <a:p>
+            <a:pPr algn="ctr"/>
           </a:p>
         </p:txBody>
       </p:sp>
@@ -9496,7 +10442,7 @@
             <a:avLst/>
           </a:prstGeom>
           <a:solidFill>
-            <a:srgbClr val="1B3A5C"/>
+            <a:srgbClr val="0D5E5E"/>
           </a:solidFill>
           <a:ln>
             <a:noFill/>
@@ -9568,7 +10514,7 @@
             <a:r>
               <a:rPr sz="1600" b="1">
                 <a:solidFill>
-                  <a:srgbClr val="1B3A5C"/>
+                  <a:srgbClr val="0D5E5E"/>
                 </a:solidFill>
                 <a:latin typeface="Microsoft YaHei"/>
               </a:rPr>
@@ -9750,6 +10696,49 @@
               </a:rPr>
               <a:t>根据《劳动保护用品管理规定》（劳部发〔1996〕138号）规定，劳动保护用品是指劳动者在劳动过程中为免遭或减轻事故伤害或职业危害所配备的防护装备，凡以劳保为名向职工发放的现金、人人有份的生活用品和非防护装备等福利和劳动报酬支出，企业应作纳税调整。</a:t>
             </a:r>
+          </a:p>
+        </p:txBody>
+      </p:sp>
+      <p:sp>
+        <p:nvSpPr>
+          <p:cNvPr id="4" name="Rectangle 3"/>
+          <p:cNvSpPr/>
+          <p:nvPr/>
+        </p:nvSpPr>
+        <p:spPr>
+          <a:xfrm>
+            <a:off x="457200" y="6720840"/>
+            <a:ext cx="11277295" cy="27432"/>
+          </a:xfrm>
+          <a:prstGeom prst="rect">
+            <a:avLst/>
+          </a:prstGeom>
+          <a:solidFill>
+            <a:srgbClr val="0D5E5E"/>
+          </a:solidFill>
+          <a:ln>
+            <a:noFill/>
+          </a:ln>
+        </p:spPr>
+        <p:style>
+          <a:lnRef idx="1">
+            <a:schemeClr val="accent1"/>
+          </a:lnRef>
+          <a:fillRef idx="3">
+            <a:schemeClr val="accent1"/>
+          </a:fillRef>
+          <a:effectRef idx="2">
+            <a:schemeClr val="accent1"/>
+          </a:effectRef>
+          <a:fontRef idx="minor">
+            <a:schemeClr val="lt1"/>
+          </a:fontRef>
+        </p:style>
+        <p:txBody>
+          <a:bodyPr rtlCol="0" anchor="ctr"/>
+          <a:lstStyle/>
+          <a:p>
+            <a:pPr algn="ctr"/>
           </a:p>
         </p:txBody>
       </p:sp>
@@ -9786,7 +10775,7 @@
             <a:avLst/>
           </a:prstGeom>
           <a:solidFill>
-            <a:srgbClr val="1B3A5C"/>
+            <a:srgbClr val="0D5E5E"/>
           </a:solidFill>
           <a:ln>
             <a:noFill/>
@@ -9858,7 +10847,7 @@
             <a:r>
               <a:rPr sz="1600" b="1">
                 <a:solidFill>
-                  <a:srgbClr val="1B3A5C"/>
+                  <a:srgbClr val="0D5E5E"/>
                 </a:solidFill>
                 <a:latin typeface="Microsoft YaHei"/>
               </a:rPr>
@@ -10040,6 +11029,49 @@
               </a:rPr>
               <a:t>上述业务发生后，核查纳税申报时保证各事项正确完整，避免出现错误。</a:t>
             </a:r>
+          </a:p>
+        </p:txBody>
+      </p:sp>
+      <p:sp>
+        <p:nvSpPr>
+          <p:cNvPr id="4" name="Rectangle 3"/>
+          <p:cNvSpPr/>
+          <p:nvPr/>
+        </p:nvSpPr>
+        <p:spPr>
+          <a:xfrm>
+            <a:off x="457200" y="6720840"/>
+            <a:ext cx="11277295" cy="27432"/>
+          </a:xfrm>
+          <a:prstGeom prst="rect">
+            <a:avLst/>
+          </a:prstGeom>
+          <a:solidFill>
+            <a:srgbClr val="0D5E5E"/>
+          </a:solidFill>
+          <a:ln>
+            <a:noFill/>
+          </a:ln>
+        </p:spPr>
+        <p:style>
+          <a:lnRef idx="1">
+            <a:schemeClr val="accent1"/>
+          </a:lnRef>
+          <a:fillRef idx="3">
+            <a:schemeClr val="accent1"/>
+          </a:fillRef>
+          <a:effectRef idx="2">
+            <a:schemeClr val="accent1"/>
+          </a:effectRef>
+          <a:fontRef idx="minor">
+            <a:schemeClr val="lt1"/>
+          </a:fontRef>
+        </p:style>
+        <p:txBody>
+          <a:bodyPr rtlCol="0" anchor="ctr"/>
+          <a:lstStyle/>
+          <a:p>
+            <a:pPr algn="ctr"/>
           </a:p>
         </p:txBody>
       </p:sp>
@@ -10076,7 +11108,7 @@
             <a:avLst/>
           </a:prstGeom>
           <a:solidFill>
-            <a:srgbClr val="1B3A5C"/>
+            <a:srgbClr val="0D5E5E"/>
           </a:solidFill>
           <a:ln>
             <a:noFill/>
@@ -10148,7 +11180,7 @@
             <a:r>
               <a:rPr sz="1600" b="1">
                 <a:solidFill>
-                  <a:srgbClr val="1B3A5C"/>
+                  <a:srgbClr val="0D5E5E"/>
                 </a:solidFill>
                 <a:latin typeface="Microsoft YaHei"/>
               </a:rPr>
@@ -10330,6 +11362,49 @@
               </a:rPr>
               <a:t>企业应审查税前扣除的利息支出，超过按照金融企业同期同类贷款利率计算的数额的和不符合规定的利息支出不得扣除，如果有不符合规定的税前扣除，应及时调整。</a:t>
             </a:r>
+          </a:p>
+        </p:txBody>
+      </p:sp>
+      <p:sp>
+        <p:nvSpPr>
+          <p:cNvPr id="4" name="Rectangle 3"/>
+          <p:cNvSpPr/>
+          <p:nvPr/>
+        </p:nvSpPr>
+        <p:spPr>
+          <a:xfrm>
+            <a:off x="457200" y="6720840"/>
+            <a:ext cx="11277295" cy="27432"/>
+          </a:xfrm>
+          <a:prstGeom prst="rect">
+            <a:avLst/>
+          </a:prstGeom>
+          <a:solidFill>
+            <a:srgbClr val="0D5E5E"/>
+          </a:solidFill>
+          <a:ln>
+            <a:noFill/>
+          </a:ln>
+        </p:spPr>
+        <p:style>
+          <a:lnRef idx="1">
+            <a:schemeClr val="accent1"/>
+          </a:lnRef>
+          <a:fillRef idx="3">
+            <a:schemeClr val="accent1"/>
+          </a:fillRef>
+          <a:effectRef idx="2">
+            <a:schemeClr val="accent1"/>
+          </a:effectRef>
+          <a:fontRef idx="minor">
+            <a:schemeClr val="lt1"/>
+          </a:fontRef>
+        </p:style>
+        <p:txBody>
+          <a:bodyPr rtlCol="0" anchor="ctr"/>
+          <a:lstStyle/>
+          <a:p>
+            <a:pPr algn="ctr"/>
           </a:p>
         </p:txBody>
       </p:sp>
@@ -10366,7 +11441,7 @@
             <a:avLst/>
           </a:prstGeom>
           <a:solidFill>
-            <a:srgbClr val="1B3A5C"/>
+            <a:srgbClr val="0D5E5E"/>
           </a:solidFill>
           <a:ln>
             <a:noFill/>
@@ -10438,7 +11513,7 @@
             <a:r>
               <a:rPr sz="1600" b="1">
                 <a:solidFill>
-                  <a:srgbClr val="1B3A5C"/>
+                  <a:srgbClr val="0D5E5E"/>
                 </a:solidFill>
                 <a:latin typeface="Microsoft YaHei"/>
               </a:rPr>
@@ -10686,6 +11761,49 @@
               </a:rPr>
               <a:t>企业应当自行检查是否存在向非金融机构借款的业务，若是存在，其贷款总数是否满足债资比例的要求，其贷款利率是否有超过银行同期贷款利率，若是存在上述情形，企业及时进行调整与纠正。</a:t>
             </a:r>
+          </a:p>
+        </p:txBody>
+      </p:sp>
+      <p:sp>
+        <p:nvSpPr>
+          <p:cNvPr id="4" name="Rectangle 3"/>
+          <p:cNvSpPr/>
+          <p:nvPr/>
+        </p:nvSpPr>
+        <p:spPr>
+          <a:xfrm>
+            <a:off x="457200" y="6720840"/>
+            <a:ext cx="11277295" cy="27432"/>
+          </a:xfrm>
+          <a:prstGeom prst="rect">
+            <a:avLst/>
+          </a:prstGeom>
+          <a:solidFill>
+            <a:srgbClr val="0D5E5E"/>
+          </a:solidFill>
+          <a:ln>
+            <a:noFill/>
+          </a:ln>
+        </p:spPr>
+        <p:style>
+          <a:lnRef idx="1">
+            <a:schemeClr val="accent1"/>
+          </a:lnRef>
+          <a:fillRef idx="3">
+            <a:schemeClr val="accent1"/>
+          </a:fillRef>
+          <a:effectRef idx="2">
+            <a:schemeClr val="accent1"/>
+          </a:effectRef>
+          <a:fontRef idx="minor">
+            <a:schemeClr val="lt1"/>
+          </a:fontRef>
+        </p:style>
+        <p:txBody>
+          <a:bodyPr rtlCol="0" anchor="ctr"/>
+          <a:lstStyle/>
+          <a:p>
+            <a:pPr algn="ctr"/>
           </a:p>
         </p:txBody>
       </p:sp>
@@ -10722,7 +11840,7 @@
             <a:avLst/>
           </a:prstGeom>
           <a:solidFill>
-            <a:srgbClr val="1B3A5C"/>
+            <a:srgbClr val="0D5E5E"/>
           </a:solidFill>
           <a:ln>
             <a:noFill/>
@@ -10794,7 +11912,7 @@
             <a:r>
               <a:rPr sz="1600" b="1">
                 <a:solidFill>
-                  <a:srgbClr val="1B3A5C"/>
+                  <a:srgbClr val="0D5E5E"/>
                 </a:solidFill>
                 <a:latin typeface="Microsoft YaHei"/>
               </a:rPr>
@@ -11020,6 +12138,49 @@
               </a:rPr>
               <a:t>企业应当自行检查是否存在为员工缴纳商业保险的情况，若是存在，应核查有无将商业保险在税前予以扣除，若直接扣除则企业应将计税基础进行调整，将“五险一金”与商业保险费合理区分，分开记账。不得将商业保险费税前扣除。</a:t>
             </a:r>
+          </a:p>
+        </p:txBody>
+      </p:sp>
+      <p:sp>
+        <p:nvSpPr>
+          <p:cNvPr id="4" name="Rectangle 3"/>
+          <p:cNvSpPr/>
+          <p:nvPr/>
+        </p:nvSpPr>
+        <p:spPr>
+          <a:xfrm>
+            <a:off x="457200" y="6720840"/>
+            <a:ext cx="11277295" cy="27432"/>
+          </a:xfrm>
+          <a:prstGeom prst="rect">
+            <a:avLst/>
+          </a:prstGeom>
+          <a:solidFill>
+            <a:srgbClr val="0D5E5E"/>
+          </a:solidFill>
+          <a:ln>
+            <a:noFill/>
+          </a:ln>
+        </p:spPr>
+        <p:style>
+          <a:lnRef idx="1">
+            <a:schemeClr val="accent1"/>
+          </a:lnRef>
+          <a:fillRef idx="3">
+            <a:schemeClr val="accent1"/>
+          </a:fillRef>
+          <a:effectRef idx="2">
+            <a:schemeClr val="accent1"/>
+          </a:effectRef>
+          <a:fontRef idx="minor">
+            <a:schemeClr val="lt1"/>
+          </a:fontRef>
+        </p:style>
+        <p:txBody>
+          <a:bodyPr rtlCol="0" anchor="ctr"/>
+          <a:lstStyle/>
+          <a:p>
+            <a:pPr algn="ctr"/>
           </a:p>
         </p:txBody>
       </p:sp>
@@ -11056,7 +12217,7 @@
             <a:avLst/>
           </a:prstGeom>
           <a:solidFill>
-            <a:srgbClr val="1B3A5C"/>
+            <a:srgbClr val="0D5E5E"/>
           </a:solidFill>
           <a:ln>
             <a:noFill/>
@@ -11128,7 +12289,7 @@
             <a:r>
               <a:rPr sz="1600" b="1">
                 <a:solidFill>
-                  <a:srgbClr val="1B3A5C"/>
+                  <a:srgbClr val="0D5E5E"/>
                 </a:solidFill>
                 <a:latin typeface="Microsoft YaHei"/>
               </a:rPr>
@@ -11398,6 +12559,49 @@
               </a:rPr>
               <a:t>核查营业外支出、营业费用、管理费用、销售费用等科目，看已计入损益的前述八类项目是否进行纳税调整，重点核实各种准备金、赞助支出、与取得收入无关的其他支出。</a:t>
             </a:r>
+          </a:p>
+        </p:txBody>
+      </p:sp>
+      <p:sp>
+        <p:nvSpPr>
+          <p:cNvPr id="4" name="Rectangle 3"/>
+          <p:cNvSpPr/>
+          <p:nvPr/>
+        </p:nvSpPr>
+        <p:spPr>
+          <a:xfrm>
+            <a:off x="457200" y="6720840"/>
+            <a:ext cx="11277295" cy="27432"/>
+          </a:xfrm>
+          <a:prstGeom prst="rect">
+            <a:avLst/>
+          </a:prstGeom>
+          <a:solidFill>
+            <a:srgbClr val="0D5E5E"/>
+          </a:solidFill>
+          <a:ln>
+            <a:noFill/>
+          </a:ln>
+        </p:spPr>
+        <p:style>
+          <a:lnRef idx="1">
+            <a:schemeClr val="accent1"/>
+          </a:lnRef>
+          <a:fillRef idx="3">
+            <a:schemeClr val="accent1"/>
+          </a:fillRef>
+          <a:effectRef idx="2">
+            <a:schemeClr val="accent1"/>
+          </a:effectRef>
+          <a:fontRef idx="minor">
+            <a:schemeClr val="lt1"/>
+          </a:fontRef>
+        </p:style>
+        <p:txBody>
+          <a:bodyPr rtlCol="0" anchor="ctr"/>
+          <a:lstStyle/>
+          <a:p>
+            <a:pPr algn="ctr"/>
           </a:p>
         </p:txBody>
       </p:sp>
@@ -11434,7 +12638,7 @@
             <a:avLst/>
           </a:prstGeom>
           <a:solidFill>
-            <a:srgbClr val="1B3A5C"/>
+            <a:srgbClr val="0D5E5E"/>
           </a:solidFill>
           <a:ln>
             <a:noFill/>
@@ -11506,7 +12710,7 @@
             <a:r>
               <a:rPr sz="1600" b="1">
                 <a:solidFill>
-                  <a:srgbClr val="1B3A5C"/>
+                  <a:srgbClr val="0D5E5E"/>
                 </a:solidFill>
                 <a:latin typeface="Microsoft YaHei"/>
               </a:rPr>
@@ -11710,6 +12914,49 @@
               </a:rPr>
               <a:t>企业应该按照法律规定准确计算工资薪金支出，对于不符合工资薪金要求的福利性补贴，应作为国税函〔2009〕3号文件第三条规定的职工福利费，按规定计算限额税前扣除。建议自查企业发生的职工福利费发生额，职工福利费税前扣除应在税法规定的比例范围内。</a:t>
             </a:r>
+          </a:p>
+        </p:txBody>
+      </p:sp>
+      <p:sp>
+        <p:nvSpPr>
+          <p:cNvPr id="4" name="Rectangle 3"/>
+          <p:cNvSpPr/>
+          <p:nvPr/>
+        </p:nvSpPr>
+        <p:spPr>
+          <a:xfrm>
+            <a:off x="457200" y="6720840"/>
+            <a:ext cx="11277295" cy="27432"/>
+          </a:xfrm>
+          <a:prstGeom prst="rect">
+            <a:avLst/>
+          </a:prstGeom>
+          <a:solidFill>
+            <a:srgbClr val="0D5E5E"/>
+          </a:solidFill>
+          <a:ln>
+            <a:noFill/>
+          </a:ln>
+        </p:spPr>
+        <p:style>
+          <a:lnRef idx="1">
+            <a:schemeClr val="accent1"/>
+          </a:lnRef>
+          <a:fillRef idx="3">
+            <a:schemeClr val="accent1"/>
+          </a:fillRef>
+          <a:effectRef idx="2">
+            <a:schemeClr val="accent1"/>
+          </a:effectRef>
+          <a:fontRef idx="minor">
+            <a:schemeClr val="lt1"/>
+          </a:fontRef>
+        </p:style>
+        <p:txBody>
+          <a:bodyPr rtlCol="0" anchor="ctr"/>
+          <a:lstStyle/>
+          <a:p>
+            <a:pPr algn="ctr"/>
           </a:p>
         </p:txBody>
       </p:sp>
@@ -11746,7 +12993,7 @@
             <a:avLst/>
           </a:prstGeom>
           <a:solidFill>
-            <a:srgbClr val="1B3A5C"/>
+            <a:srgbClr val="0D5E5E"/>
           </a:solidFill>
           <a:ln>
             <a:noFill/>
@@ -11818,7 +13065,7 @@
             <a:r>
               <a:rPr sz="1600" b="1">
                 <a:solidFill>
-                  <a:srgbClr val="1B3A5C"/>
+                  <a:srgbClr val="0D5E5E"/>
                 </a:solidFill>
                 <a:latin typeface="Microsoft YaHei"/>
               </a:rPr>
@@ -12088,6 +13335,49 @@
               </a:rPr>
               <a:t>工资薪金的支付应以工资表按实列支，并按规定代扣代缴工资薪金类个人所得税；对支付劳务报酬的企业可到劳务地主管税务机关申请代开劳务服务发票，并扣缴相应的个人所得税等税费，据以入账，企业取得了代开的发票，涉及支付的劳务费用可在企业所得税前扣除。两种支出的计税方式完全不同，核算科目也不同，工资薪金的支付一般通过“应付职工薪酬”科目核算，劳务报酬则通过“主营业务成本—人工费或劳务费”科目核算。企业应将劳务费支出从工资薪金中调出，调增应纳税所得额，补缴所得税。</a:t>
             </a:r>
+          </a:p>
+        </p:txBody>
+      </p:sp>
+      <p:sp>
+        <p:nvSpPr>
+          <p:cNvPr id="4" name="Rectangle 3"/>
+          <p:cNvSpPr/>
+          <p:nvPr/>
+        </p:nvSpPr>
+        <p:spPr>
+          <a:xfrm>
+            <a:off x="457200" y="6720840"/>
+            <a:ext cx="11277295" cy="27432"/>
+          </a:xfrm>
+          <a:prstGeom prst="rect">
+            <a:avLst/>
+          </a:prstGeom>
+          <a:solidFill>
+            <a:srgbClr val="0D5E5E"/>
+          </a:solidFill>
+          <a:ln>
+            <a:noFill/>
+          </a:ln>
+        </p:spPr>
+        <p:style>
+          <a:lnRef idx="1">
+            <a:schemeClr val="accent1"/>
+          </a:lnRef>
+          <a:fillRef idx="3">
+            <a:schemeClr val="accent1"/>
+          </a:fillRef>
+          <a:effectRef idx="2">
+            <a:schemeClr val="accent1"/>
+          </a:effectRef>
+          <a:fontRef idx="minor">
+            <a:schemeClr val="lt1"/>
+          </a:fontRef>
+        </p:style>
+        <p:txBody>
+          <a:bodyPr rtlCol="0" anchor="ctr"/>
+          <a:lstStyle/>
+          <a:p>
+            <a:pPr algn="ctr"/>
           </a:p>
         </p:txBody>
       </p:sp>
@@ -12124,7 +13414,7 @@
             <a:avLst/>
           </a:prstGeom>
           <a:solidFill>
-            <a:srgbClr val="1B3A5C"/>
+            <a:srgbClr val="0D5E5E"/>
           </a:solidFill>
           <a:ln>
             <a:noFill/>
@@ -12196,7 +13486,7 @@
             <a:r>
               <a:rPr sz="1600" b="1">
                 <a:solidFill>
-                  <a:srgbClr val="1B3A5C"/>
+                  <a:srgbClr val="0D5E5E"/>
                 </a:solidFill>
                 <a:latin typeface="Microsoft YaHei"/>
               </a:rPr>
@@ -12510,6 +13800,49 @@
               </a:rPr>
               <a:t>企业自查企业发生的职工教育经费发生额，职工教育经费税前扣除应在税法规定的比例范围内。</a:t>
             </a:r>
+          </a:p>
+        </p:txBody>
+      </p:sp>
+      <p:sp>
+        <p:nvSpPr>
+          <p:cNvPr id="4" name="Rectangle 3"/>
+          <p:cNvSpPr/>
+          <p:nvPr/>
+        </p:nvSpPr>
+        <p:spPr>
+          <a:xfrm>
+            <a:off x="457200" y="6720840"/>
+            <a:ext cx="11277295" cy="27432"/>
+          </a:xfrm>
+          <a:prstGeom prst="rect">
+            <a:avLst/>
+          </a:prstGeom>
+          <a:solidFill>
+            <a:srgbClr val="0D5E5E"/>
+          </a:solidFill>
+          <a:ln>
+            <a:noFill/>
+          </a:ln>
+        </p:spPr>
+        <p:style>
+          <a:lnRef idx="1">
+            <a:schemeClr val="accent1"/>
+          </a:lnRef>
+          <a:fillRef idx="3">
+            <a:schemeClr val="accent1"/>
+          </a:fillRef>
+          <a:effectRef idx="2">
+            <a:schemeClr val="accent1"/>
+          </a:effectRef>
+          <a:fontRef idx="minor">
+            <a:schemeClr val="lt1"/>
+          </a:fontRef>
+        </p:style>
+        <p:txBody>
+          <a:bodyPr rtlCol="0" anchor="ctr"/>
+          <a:lstStyle/>
+          <a:p>
+            <a:pPr algn="ctr"/>
           </a:p>
         </p:txBody>
       </p:sp>
@@ -12546,7 +13879,7 @@
             <a:avLst/>
           </a:prstGeom>
           <a:solidFill>
-            <a:srgbClr val="1B3A5C"/>
+            <a:srgbClr val="0D5E5E"/>
           </a:solidFill>
           <a:ln>
             <a:noFill/>
@@ -12618,7 +13951,7 @@
             <a:r>
               <a:rPr sz="1600" b="1">
                 <a:solidFill>
-                  <a:srgbClr val="1B3A5C"/>
+                  <a:srgbClr val="0D5E5E"/>
                 </a:solidFill>
                 <a:latin typeface="Microsoft YaHei"/>
               </a:rPr>
@@ -12800,6 +14133,49 @@
               </a:rPr>
               <a:t>工会经费的税前扣除应满足以下条件：必须是实际缴纳数才能在税前扣除；税前扣除额不能超过税法规定的限额，超限额部分不能向以后年度结转扣除；必须凭规定的税前扣除凭据方可税前扣除。企业应将不符合税前扣除的工会经费按规定进行纳税调整。</a:t>
             </a:r>
+          </a:p>
+        </p:txBody>
+      </p:sp>
+      <p:sp>
+        <p:nvSpPr>
+          <p:cNvPr id="4" name="Rectangle 3"/>
+          <p:cNvSpPr/>
+          <p:nvPr/>
+        </p:nvSpPr>
+        <p:spPr>
+          <a:xfrm>
+            <a:off x="457200" y="6720840"/>
+            <a:ext cx="11277295" cy="27432"/>
+          </a:xfrm>
+          <a:prstGeom prst="rect">
+            <a:avLst/>
+          </a:prstGeom>
+          <a:solidFill>
+            <a:srgbClr val="0D5E5E"/>
+          </a:solidFill>
+          <a:ln>
+            <a:noFill/>
+          </a:ln>
+        </p:spPr>
+        <p:style>
+          <a:lnRef idx="1">
+            <a:schemeClr val="accent1"/>
+          </a:lnRef>
+          <a:fillRef idx="3">
+            <a:schemeClr val="accent1"/>
+          </a:fillRef>
+          <a:effectRef idx="2">
+            <a:schemeClr val="accent1"/>
+          </a:effectRef>
+          <a:fontRef idx="minor">
+            <a:schemeClr val="lt1"/>
+          </a:fontRef>
+        </p:style>
+        <p:txBody>
+          <a:bodyPr rtlCol="0" anchor="ctr"/>
+          <a:lstStyle/>
+          <a:p>
+            <a:pPr algn="ctr"/>
           </a:p>
         </p:txBody>
       </p:sp>
@@ -12836,7 +14212,7 @@
             <a:avLst/>
           </a:prstGeom>
           <a:solidFill>
-            <a:srgbClr val="1B3A5C"/>
+            <a:srgbClr val="0D5E5E"/>
           </a:solidFill>
           <a:ln>
             <a:noFill/>
@@ -12908,7 +14284,7 @@
             <a:r>
               <a:rPr sz="1600" b="1">
                 <a:solidFill>
-                  <a:srgbClr val="1B3A5C"/>
+                  <a:srgbClr val="0D5E5E"/>
                 </a:solidFill>
                 <a:latin typeface="Microsoft YaHei"/>
               </a:rPr>
@@ -13156,6 +14532,49 @@
               </a:rPr>
               <a:t>广告性质的交易具有以下特征：1.广告是有偿双务合同，即一方支付费用，一方提供广告服务。2.广告服务的内容是通过一定媒介和形式介绍广告主提供的产品或服务。3.广告服务者应具有合法经营资格。企业应核查广告费合同，以及发生的大额的业务宣传费的合同协议、与关联公司签订的广告费和业务宣传费分摊协议，结合“业务管理费-业务宣传费”“业务管理费-广告费”等科目审阅税前扣除凭证是否合规。对不符合广告性质的与生产经营活动无关的赞助支出不允许在所得税前扣除，应做纳税调整。</a:t>
             </a:r>
+          </a:p>
+        </p:txBody>
+      </p:sp>
+      <p:sp>
+        <p:nvSpPr>
+          <p:cNvPr id="4" name="Rectangle 3"/>
+          <p:cNvSpPr/>
+          <p:nvPr/>
+        </p:nvSpPr>
+        <p:spPr>
+          <a:xfrm>
+            <a:off x="457200" y="6720840"/>
+            <a:ext cx="11277295" cy="27432"/>
+          </a:xfrm>
+          <a:prstGeom prst="rect">
+            <a:avLst/>
+          </a:prstGeom>
+          <a:solidFill>
+            <a:srgbClr val="0D5E5E"/>
+          </a:solidFill>
+          <a:ln>
+            <a:noFill/>
+          </a:ln>
+        </p:spPr>
+        <p:style>
+          <a:lnRef idx="1">
+            <a:schemeClr val="accent1"/>
+          </a:lnRef>
+          <a:fillRef idx="3">
+            <a:schemeClr val="accent1"/>
+          </a:fillRef>
+          <a:effectRef idx="2">
+            <a:schemeClr val="accent1"/>
+          </a:effectRef>
+          <a:fontRef idx="minor">
+            <a:schemeClr val="lt1"/>
+          </a:fontRef>
+        </p:style>
+        <p:txBody>
+          <a:bodyPr rtlCol="0" anchor="ctr"/>
+          <a:lstStyle/>
+          <a:p>
+            <a:pPr algn="ctr"/>
           </a:p>
         </p:txBody>
       </p:sp>
@@ -13192,7 +14611,7 @@
             <a:avLst/>
           </a:prstGeom>
           <a:solidFill>
-            <a:srgbClr val="1B3A5C"/>
+            <a:srgbClr val="0D5E5E"/>
           </a:solidFill>
           <a:ln>
             <a:noFill/>
@@ -13264,7 +14683,7 @@
             <a:r>
               <a:rPr sz="1600" b="1">
                 <a:solidFill>
-                  <a:srgbClr val="1B3A5C"/>
+                  <a:srgbClr val="0D5E5E"/>
                 </a:solidFill>
                 <a:latin typeface="Microsoft YaHei"/>
               </a:rPr>
@@ -13446,6 +14865,49 @@
               </a:rPr>
               <a:t>自查是否存在将业务招待费列支业务宣传费的情况，如果存在则需要进行纳税调整。</a:t>
             </a:r>
+          </a:p>
+        </p:txBody>
+      </p:sp>
+      <p:sp>
+        <p:nvSpPr>
+          <p:cNvPr id="4" name="Rectangle 3"/>
+          <p:cNvSpPr/>
+          <p:nvPr/>
+        </p:nvSpPr>
+        <p:spPr>
+          <a:xfrm>
+            <a:off x="457200" y="6720840"/>
+            <a:ext cx="11277295" cy="27432"/>
+          </a:xfrm>
+          <a:prstGeom prst="rect">
+            <a:avLst/>
+          </a:prstGeom>
+          <a:solidFill>
+            <a:srgbClr val="0D5E5E"/>
+          </a:solidFill>
+          <a:ln>
+            <a:noFill/>
+          </a:ln>
+        </p:spPr>
+        <p:style>
+          <a:lnRef idx="1">
+            <a:schemeClr val="accent1"/>
+          </a:lnRef>
+          <a:fillRef idx="3">
+            <a:schemeClr val="accent1"/>
+          </a:fillRef>
+          <a:effectRef idx="2">
+            <a:schemeClr val="accent1"/>
+          </a:effectRef>
+          <a:fontRef idx="minor">
+            <a:schemeClr val="lt1"/>
+          </a:fontRef>
+        </p:style>
+        <p:txBody>
+          <a:bodyPr rtlCol="0" anchor="ctr"/>
+          <a:lstStyle/>
+          <a:p>
+            <a:pPr algn="ctr"/>
           </a:p>
         </p:txBody>
       </p:sp>
@@ -13482,7 +14944,7 @@
             <a:avLst/>
           </a:prstGeom>
           <a:solidFill>
-            <a:srgbClr val="1B3A5C"/>
+            <a:srgbClr val="0D5E5E"/>
           </a:solidFill>
           <a:ln>
             <a:noFill/>
@@ -13554,7 +15016,7 @@
             <a:r>
               <a:rPr sz="1600" b="1">
                 <a:solidFill>
-                  <a:srgbClr val="1B3A5C"/>
+                  <a:srgbClr val="0D5E5E"/>
                 </a:solidFill>
                 <a:latin typeface="Microsoft YaHei"/>
               </a:rPr>
@@ -13758,6 +15220,49 @@
               </a:rPr>
               <a:t>核查其他业务收入等科目，审核租赁合同，如果存在出租资产取得的跨年度租金收入未按收入与费用配比原则确认收入的情况，请及时确认收入，并调整应纳税所得额。</a:t>
             </a:r>
+          </a:p>
+        </p:txBody>
+      </p:sp>
+      <p:sp>
+        <p:nvSpPr>
+          <p:cNvPr id="4" name="Rectangle 3"/>
+          <p:cNvSpPr/>
+          <p:nvPr/>
+        </p:nvSpPr>
+        <p:spPr>
+          <a:xfrm>
+            <a:off x="457200" y="6720840"/>
+            <a:ext cx="11277295" cy="27432"/>
+          </a:xfrm>
+          <a:prstGeom prst="rect">
+            <a:avLst/>
+          </a:prstGeom>
+          <a:solidFill>
+            <a:srgbClr val="0D5E5E"/>
+          </a:solidFill>
+          <a:ln>
+            <a:noFill/>
+          </a:ln>
+        </p:spPr>
+        <p:style>
+          <a:lnRef idx="1">
+            <a:schemeClr val="accent1"/>
+          </a:lnRef>
+          <a:fillRef idx="3">
+            <a:schemeClr val="accent1"/>
+          </a:fillRef>
+          <a:effectRef idx="2">
+            <a:schemeClr val="accent1"/>
+          </a:effectRef>
+          <a:fontRef idx="minor">
+            <a:schemeClr val="lt1"/>
+          </a:fontRef>
+        </p:style>
+        <p:txBody>
+          <a:bodyPr rtlCol="0" anchor="ctr"/>
+          <a:lstStyle/>
+          <a:p>
+            <a:pPr algn="ctr"/>
           </a:p>
         </p:txBody>
       </p:sp>
@@ -13794,7 +15299,7 @@
             <a:avLst/>
           </a:prstGeom>
           <a:solidFill>
-            <a:srgbClr val="1B3A5C"/>
+            <a:srgbClr val="0D5E5E"/>
           </a:solidFill>
           <a:ln>
             <a:noFill/>
@@ -13866,7 +15371,7 @@
             <a:r>
               <a:rPr sz="1600" b="1">
                 <a:solidFill>
-                  <a:srgbClr val="1B3A5C"/>
+                  <a:srgbClr val="0D5E5E"/>
                 </a:solidFill>
                 <a:latin typeface="Microsoft YaHei"/>
               </a:rPr>
@@ -14048,6 +15553,49 @@
               </a:rPr>
               <a:t>企业应检查计算应纳税所得额时扣除的补充养老保险费、补充医疗保险费，如果存在对超过限额的扣除额仍在税前扣除的，企业应当及时调整纠正，对有关扣除项目是否合规进行自行审查。</a:t>
             </a:r>
+          </a:p>
+        </p:txBody>
+      </p:sp>
+      <p:sp>
+        <p:nvSpPr>
+          <p:cNvPr id="4" name="Rectangle 3"/>
+          <p:cNvSpPr/>
+          <p:nvPr/>
+        </p:nvSpPr>
+        <p:spPr>
+          <a:xfrm>
+            <a:off x="457200" y="6720840"/>
+            <a:ext cx="11277295" cy="27432"/>
+          </a:xfrm>
+          <a:prstGeom prst="rect">
+            <a:avLst/>
+          </a:prstGeom>
+          <a:solidFill>
+            <a:srgbClr val="0D5E5E"/>
+          </a:solidFill>
+          <a:ln>
+            <a:noFill/>
+          </a:ln>
+        </p:spPr>
+        <p:style>
+          <a:lnRef idx="1">
+            <a:schemeClr val="accent1"/>
+          </a:lnRef>
+          <a:fillRef idx="3">
+            <a:schemeClr val="accent1"/>
+          </a:fillRef>
+          <a:effectRef idx="2">
+            <a:schemeClr val="accent1"/>
+          </a:effectRef>
+          <a:fontRef idx="minor">
+            <a:schemeClr val="lt1"/>
+          </a:fontRef>
+        </p:style>
+        <p:txBody>
+          <a:bodyPr rtlCol="0" anchor="ctr"/>
+          <a:lstStyle/>
+          <a:p>
+            <a:pPr algn="ctr"/>
           </a:p>
         </p:txBody>
       </p:sp>
@@ -14084,7 +15632,7 @@
             <a:avLst/>
           </a:prstGeom>
           <a:solidFill>
-            <a:srgbClr val="1B3A5C"/>
+            <a:srgbClr val="0D5E5E"/>
           </a:solidFill>
           <a:ln>
             <a:noFill/>
@@ -14156,7 +15704,7 @@
             <a:r>
               <a:rPr sz="1600" b="1">
                 <a:solidFill>
-                  <a:srgbClr val="1B3A5C"/>
+                  <a:srgbClr val="0D5E5E"/>
                 </a:solidFill>
                 <a:latin typeface="Microsoft YaHei"/>
               </a:rPr>
@@ -14360,6 +15908,49 @@
               </a:rPr>
               <a:t>按税法规定一般企业发生与生产经营有关的手续费及佣金支出，按服务协议或合同确认的收入金额的5%算限额，除委托个人代理外，必须转账支付，否则不得扣除，如有现金支付业务，应做纳税调整。</a:t>
             </a:r>
+          </a:p>
+        </p:txBody>
+      </p:sp>
+      <p:sp>
+        <p:nvSpPr>
+          <p:cNvPr id="4" name="Rectangle 3"/>
+          <p:cNvSpPr/>
+          <p:nvPr/>
+        </p:nvSpPr>
+        <p:spPr>
+          <a:xfrm>
+            <a:off x="457200" y="6720840"/>
+            <a:ext cx="11277295" cy="27432"/>
+          </a:xfrm>
+          <a:prstGeom prst="rect">
+            <a:avLst/>
+          </a:prstGeom>
+          <a:solidFill>
+            <a:srgbClr val="0D5E5E"/>
+          </a:solidFill>
+          <a:ln>
+            <a:noFill/>
+          </a:ln>
+        </p:spPr>
+        <p:style>
+          <a:lnRef idx="1">
+            <a:schemeClr val="accent1"/>
+          </a:lnRef>
+          <a:fillRef idx="3">
+            <a:schemeClr val="accent1"/>
+          </a:fillRef>
+          <a:effectRef idx="2">
+            <a:schemeClr val="accent1"/>
+          </a:effectRef>
+          <a:fontRef idx="minor">
+            <a:schemeClr val="lt1"/>
+          </a:fontRef>
+        </p:style>
+        <p:txBody>
+          <a:bodyPr rtlCol="0" anchor="ctr"/>
+          <a:lstStyle/>
+          <a:p>
+            <a:pPr algn="ctr"/>
           </a:p>
         </p:txBody>
       </p:sp>
@@ -14396,7 +15987,7 @@
             <a:avLst/>
           </a:prstGeom>
           <a:solidFill>
-            <a:srgbClr val="1B3A5C"/>
+            <a:srgbClr val="0D5E5E"/>
           </a:solidFill>
           <a:ln>
             <a:noFill/>
@@ -14468,7 +16059,7 @@
             <a:r>
               <a:rPr sz="1600" b="1">
                 <a:solidFill>
-                  <a:srgbClr val="1B3A5C"/>
+                  <a:srgbClr val="0D5E5E"/>
                 </a:solidFill>
                 <a:latin typeface="Microsoft YaHei"/>
               </a:rPr>
@@ -14694,6 +16285,49 @@
               </a:rPr>
               <a:t>企业应该按照独立交易的原则确定、委托境外进行研发活动所发生的费用。在委托方与受托方存在关联关系时，受托方应向委托方提供研发项目费用支出明细情况。自行检查是否存在不符合规定的研发费用，并及时改正。</a:t>
             </a:r>
+          </a:p>
+        </p:txBody>
+      </p:sp>
+      <p:sp>
+        <p:nvSpPr>
+          <p:cNvPr id="4" name="Rectangle 3"/>
+          <p:cNvSpPr/>
+          <p:nvPr/>
+        </p:nvSpPr>
+        <p:spPr>
+          <a:xfrm>
+            <a:off x="457200" y="6720840"/>
+            <a:ext cx="11277295" cy="27432"/>
+          </a:xfrm>
+          <a:prstGeom prst="rect">
+            <a:avLst/>
+          </a:prstGeom>
+          <a:solidFill>
+            <a:srgbClr val="0D5E5E"/>
+          </a:solidFill>
+          <a:ln>
+            <a:noFill/>
+          </a:ln>
+        </p:spPr>
+        <p:style>
+          <a:lnRef idx="1">
+            <a:schemeClr val="accent1"/>
+          </a:lnRef>
+          <a:fillRef idx="3">
+            <a:schemeClr val="accent1"/>
+          </a:fillRef>
+          <a:effectRef idx="2">
+            <a:schemeClr val="accent1"/>
+          </a:effectRef>
+          <a:fontRef idx="minor">
+            <a:schemeClr val="lt1"/>
+          </a:fontRef>
+        </p:style>
+        <p:txBody>
+          <a:bodyPr rtlCol="0" anchor="ctr"/>
+          <a:lstStyle/>
+          <a:p>
+            <a:pPr algn="ctr"/>
           </a:p>
         </p:txBody>
       </p:sp>
@@ -14730,7 +16364,7 @@
             <a:avLst/>
           </a:prstGeom>
           <a:solidFill>
-            <a:srgbClr val="1B3A5C"/>
+            <a:srgbClr val="0D5E5E"/>
           </a:solidFill>
           <a:ln>
             <a:noFill/>
@@ -14802,7 +16436,7 @@
             <a:r>
               <a:rPr sz="1600" b="1">
                 <a:solidFill>
-                  <a:srgbClr val="1B3A5C"/>
+                  <a:srgbClr val="0D5E5E"/>
                 </a:solidFill>
                 <a:latin typeface="Microsoft YaHei"/>
               </a:rPr>
@@ -15050,6 +16684,49 @@
               </a:rPr>
               <a:t>企业应当自行检查成本费用类账户的总账金额与明细金额，并根据配比原则判断是否存在多计费用扣除和对不合规的费用适用加计扣除的情形，若是存在，请及时进行调整和纠正。</a:t>
             </a:r>
+          </a:p>
+        </p:txBody>
+      </p:sp>
+      <p:sp>
+        <p:nvSpPr>
+          <p:cNvPr id="4" name="Rectangle 3"/>
+          <p:cNvSpPr/>
+          <p:nvPr/>
+        </p:nvSpPr>
+        <p:spPr>
+          <a:xfrm>
+            <a:off x="457200" y="6720840"/>
+            <a:ext cx="11277295" cy="27432"/>
+          </a:xfrm>
+          <a:prstGeom prst="rect">
+            <a:avLst/>
+          </a:prstGeom>
+          <a:solidFill>
+            <a:srgbClr val="0D5E5E"/>
+          </a:solidFill>
+          <a:ln>
+            <a:noFill/>
+          </a:ln>
+        </p:spPr>
+        <p:style>
+          <a:lnRef idx="1">
+            <a:schemeClr val="accent1"/>
+          </a:lnRef>
+          <a:fillRef idx="3">
+            <a:schemeClr val="accent1"/>
+          </a:fillRef>
+          <a:effectRef idx="2">
+            <a:schemeClr val="accent1"/>
+          </a:effectRef>
+          <a:fontRef idx="minor">
+            <a:schemeClr val="lt1"/>
+          </a:fontRef>
+        </p:style>
+        <p:txBody>
+          <a:bodyPr rtlCol="0" anchor="ctr"/>
+          <a:lstStyle/>
+          <a:p>
+            <a:pPr algn="ctr"/>
           </a:p>
         </p:txBody>
       </p:sp>
@@ -15086,7 +16763,7 @@
             <a:avLst/>
           </a:prstGeom>
           <a:solidFill>
-            <a:srgbClr val="1B3A5C"/>
+            <a:srgbClr val="0D5E5E"/>
           </a:solidFill>
           <a:ln>
             <a:noFill/>
@@ -15158,7 +16835,7 @@
             <a:r>
               <a:rPr sz="1600" b="1">
                 <a:solidFill>
-                  <a:srgbClr val="1B3A5C"/>
+                  <a:srgbClr val="0D5E5E"/>
                 </a:solidFill>
                 <a:latin typeface="Microsoft YaHei"/>
               </a:rPr>
@@ -15406,6 +17083,49 @@
               </a:rPr>
               <a:t>企业自查是否存在将形成无形资产的研究开发费用费用化计入当期损益在当期加计一次扣除的情形，若存在，请及时做纳税调整。</a:t>
             </a:r>
+          </a:p>
+        </p:txBody>
+      </p:sp>
+      <p:sp>
+        <p:nvSpPr>
+          <p:cNvPr id="4" name="Rectangle 3"/>
+          <p:cNvSpPr/>
+          <p:nvPr/>
+        </p:nvSpPr>
+        <p:spPr>
+          <a:xfrm>
+            <a:off x="457200" y="6720840"/>
+            <a:ext cx="11277295" cy="27432"/>
+          </a:xfrm>
+          <a:prstGeom prst="rect">
+            <a:avLst/>
+          </a:prstGeom>
+          <a:solidFill>
+            <a:srgbClr val="0D5E5E"/>
+          </a:solidFill>
+          <a:ln>
+            <a:noFill/>
+          </a:ln>
+        </p:spPr>
+        <p:style>
+          <a:lnRef idx="1">
+            <a:schemeClr val="accent1"/>
+          </a:lnRef>
+          <a:fillRef idx="3">
+            <a:schemeClr val="accent1"/>
+          </a:fillRef>
+          <a:effectRef idx="2">
+            <a:schemeClr val="accent1"/>
+          </a:effectRef>
+          <a:fontRef idx="minor">
+            <a:schemeClr val="lt1"/>
+          </a:fontRef>
+        </p:style>
+        <p:txBody>
+          <a:bodyPr rtlCol="0" anchor="ctr"/>
+          <a:lstStyle/>
+          <a:p>
+            <a:pPr algn="ctr"/>
           </a:p>
         </p:txBody>
       </p:sp>
@@ -15442,7 +17162,7 @@
             <a:avLst/>
           </a:prstGeom>
           <a:solidFill>
-            <a:srgbClr val="1B3A5C"/>
+            <a:srgbClr val="0D5E5E"/>
           </a:solidFill>
           <a:ln>
             <a:noFill/>
@@ -15514,7 +17234,7 @@
             <a:r>
               <a:rPr sz="1600" b="1">
                 <a:solidFill>
-                  <a:srgbClr val="1B3A5C"/>
+                  <a:srgbClr val="0D5E5E"/>
                 </a:solidFill>
                 <a:latin typeface="Microsoft YaHei"/>
               </a:rPr>
@@ -15696,6 +17416,49 @@
               </a:rPr>
               <a:t>企业按照国家财务会计制度要求，对研发支出进行会计处理；同时，对享受加计扣除的研发费用按研发项目设置辅助账，准确归集核算当年可加计扣除的各项研发费用实际发生额。分别核算生产经营费用和研发费用，按照规定加计扣除。</a:t>
             </a:r>
+          </a:p>
+        </p:txBody>
+      </p:sp>
+      <p:sp>
+        <p:nvSpPr>
+          <p:cNvPr id="4" name="Rectangle 3"/>
+          <p:cNvSpPr/>
+          <p:nvPr/>
+        </p:nvSpPr>
+        <p:spPr>
+          <a:xfrm>
+            <a:off x="457200" y="6720840"/>
+            <a:ext cx="11277295" cy="27432"/>
+          </a:xfrm>
+          <a:prstGeom prst="rect">
+            <a:avLst/>
+          </a:prstGeom>
+          <a:solidFill>
+            <a:srgbClr val="0D5E5E"/>
+          </a:solidFill>
+          <a:ln>
+            <a:noFill/>
+          </a:ln>
+        </p:spPr>
+        <p:style>
+          <a:lnRef idx="1">
+            <a:schemeClr val="accent1"/>
+          </a:lnRef>
+          <a:fillRef idx="3">
+            <a:schemeClr val="accent1"/>
+          </a:fillRef>
+          <a:effectRef idx="2">
+            <a:schemeClr val="accent1"/>
+          </a:effectRef>
+          <a:fontRef idx="minor">
+            <a:schemeClr val="lt1"/>
+          </a:fontRef>
+        </p:style>
+        <p:txBody>
+          <a:bodyPr rtlCol="0" anchor="ctr"/>
+          <a:lstStyle/>
+          <a:p>
+            <a:pPr algn="ctr"/>
           </a:p>
         </p:txBody>
       </p:sp>
@@ -15732,7 +17495,7 @@
             <a:avLst/>
           </a:prstGeom>
           <a:solidFill>
-            <a:srgbClr val="1B3A5C"/>
+            <a:srgbClr val="0D5E5E"/>
           </a:solidFill>
           <a:ln>
             <a:noFill/>
@@ -15804,7 +17567,7 @@
             <a:r>
               <a:rPr sz="1600" b="1">
                 <a:solidFill>
-                  <a:srgbClr val="1B3A5C"/>
+                  <a:srgbClr val="0D5E5E"/>
                 </a:solidFill>
                 <a:latin typeface="Microsoft YaHei"/>
               </a:rPr>
@@ -15986,6 +17749,49 @@
               </a:rPr>
               <a:t>企业应正确划分收益性支出和资本性支出。收益性支出在发生当期直接扣除；资本性支出应当分期扣除或者计入有关资产成本，不得在发生当期直接扣除。</a:t>
             </a:r>
+          </a:p>
+        </p:txBody>
+      </p:sp>
+      <p:sp>
+        <p:nvSpPr>
+          <p:cNvPr id="4" name="Rectangle 3"/>
+          <p:cNvSpPr/>
+          <p:nvPr/>
+        </p:nvSpPr>
+        <p:spPr>
+          <a:xfrm>
+            <a:off x="457200" y="6720840"/>
+            <a:ext cx="11277295" cy="27432"/>
+          </a:xfrm>
+          <a:prstGeom prst="rect">
+            <a:avLst/>
+          </a:prstGeom>
+          <a:solidFill>
+            <a:srgbClr val="0D5E5E"/>
+          </a:solidFill>
+          <a:ln>
+            <a:noFill/>
+          </a:ln>
+        </p:spPr>
+        <p:style>
+          <a:lnRef idx="1">
+            <a:schemeClr val="accent1"/>
+          </a:lnRef>
+          <a:fillRef idx="3">
+            <a:schemeClr val="accent1"/>
+          </a:fillRef>
+          <a:effectRef idx="2">
+            <a:schemeClr val="accent1"/>
+          </a:effectRef>
+          <a:fontRef idx="minor">
+            <a:schemeClr val="lt1"/>
+          </a:fontRef>
+        </p:style>
+        <p:txBody>
+          <a:bodyPr rtlCol="0" anchor="ctr"/>
+          <a:lstStyle/>
+          <a:p>
+            <a:pPr algn="ctr"/>
           </a:p>
         </p:txBody>
       </p:sp>
@@ -16022,7 +17828,7 @@
             <a:avLst/>
           </a:prstGeom>
           <a:solidFill>
-            <a:srgbClr val="1B3A5C"/>
+            <a:srgbClr val="0D5E5E"/>
           </a:solidFill>
           <a:ln>
             <a:noFill/>
@@ -16094,7 +17900,7 @@
             <a:r>
               <a:rPr sz="1600" b="1">
                 <a:solidFill>
-                  <a:srgbClr val="1B3A5C"/>
+                  <a:srgbClr val="0D5E5E"/>
                 </a:solidFill>
                 <a:latin typeface="Microsoft YaHei"/>
               </a:rPr>
@@ -16342,6 +18148,49 @@
               </a:rPr>
               <a:t>企业应自查聘用非全日制用工的残疾人是否实际上岗工作，是否与其签订合法的劳务合同或服务协议，若不符合上述要求，是否已就全部残疾人适用税收优惠政策，若是存在的，企业及时进行调整纠正。</a:t>
             </a:r>
+          </a:p>
+        </p:txBody>
+      </p:sp>
+      <p:sp>
+        <p:nvSpPr>
+          <p:cNvPr id="4" name="Rectangle 3"/>
+          <p:cNvSpPr/>
+          <p:nvPr/>
+        </p:nvSpPr>
+        <p:spPr>
+          <a:xfrm>
+            <a:off x="457200" y="6720840"/>
+            <a:ext cx="11277295" cy="27432"/>
+          </a:xfrm>
+          <a:prstGeom prst="rect">
+            <a:avLst/>
+          </a:prstGeom>
+          <a:solidFill>
+            <a:srgbClr val="0D5E5E"/>
+          </a:solidFill>
+          <a:ln>
+            <a:noFill/>
+          </a:ln>
+        </p:spPr>
+        <p:style>
+          <a:lnRef idx="1">
+            <a:schemeClr val="accent1"/>
+          </a:lnRef>
+          <a:fillRef idx="3">
+            <a:schemeClr val="accent1"/>
+          </a:fillRef>
+          <a:effectRef idx="2">
+            <a:schemeClr val="accent1"/>
+          </a:effectRef>
+          <a:fontRef idx="minor">
+            <a:schemeClr val="lt1"/>
+          </a:fontRef>
+        </p:style>
+        <p:txBody>
+          <a:bodyPr rtlCol="0" anchor="ctr"/>
+          <a:lstStyle/>
+          <a:p>
+            <a:pPr algn="ctr"/>
           </a:p>
         </p:txBody>
       </p:sp>
@@ -16378,7 +18227,7 @@
             <a:avLst/>
           </a:prstGeom>
           <a:solidFill>
-            <a:srgbClr val="1B3A5C"/>
+            <a:srgbClr val="0D5E5E"/>
           </a:solidFill>
           <a:ln>
             <a:noFill/>
@@ -16450,7 +18299,7 @@
             <a:r>
               <a:rPr sz="1600" b="1">
                 <a:solidFill>
-                  <a:srgbClr val="1B3A5C"/>
+                  <a:srgbClr val="0D5E5E"/>
                 </a:solidFill>
                 <a:latin typeface="Microsoft YaHei"/>
               </a:rPr>
@@ -16632,6 +18481,49 @@
               </a:rPr>
               <a:t>企业自查是否存在固定资产大修理支出作为费用化支出在当期一次性扣除情况，若存在，请及时调整应纳税所得额。</a:t>
             </a:r>
+          </a:p>
+        </p:txBody>
+      </p:sp>
+      <p:sp>
+        <p:nvSpPr>
+          <p:cNvPr id="4" name="Rectangle 3"/>
+          <p:cNvSpPr/>
+          <p:nvPr/>
+        </p:nvSpPr>
+        <p:spPr>
+          <a:xfrm>
+            <a:off x="457200" y="6720840"/>
+            <a:ext cx="11277295" cy="27432"/>
+          </a:xfrm>
+          <a:prstGeom prst="rect">
+            <a:avLst/>
+          </a:prstGeom>
+          <a:solidFill>
+            <a:srgbClr val="0D5E5E"/>
+          </a:solidFill>
+          <a:ln>
+            <a:noFill/>
+          </a:ln>
+        </p:spPr>
+        <p:style>
+          <a:lnRef idx="1">
+            <a:schemeClr val="accent1"/>
+          </a:lnRef>
+          <a:fillRef idx="3">
+            <a:schemeClr val="accent1"/>
+          </a:fillRef>
+          <a:effectRef idx="2">
+            <a:schemeClr val="accent1"/>
+          </a:effectRef>
+          <a:fontRef idx="minor">
+            <a:schemeClr val="lt1"/>
+          </a:fontRef>
+        </p:style>
+        <p:txBody>
+          <a:bodyPr rtlCol="0" anchor="ctr"/>
+          <a:lstStyle/>
+          <a:p>
+            <a:pPr algn="ctr"/>
           </a:p>
         </p:txBody>
       </p:sp>
@@ -16668,7 +18560,7 @@
             <a:avLst/>
           </a:prstGeom>
           <a:solidFill>
-            <a:srgbClr val="1B3A5C"/>
+            <a:srgbClr val="0D5E5E"/>
           </a:solidFill>
           <a:ln>
             <a:noFill/>
@@ -16740,7 +18632,7 @@
             <a:r>
               <a:rPr sz="1600" b="1">
                 <a:solidFill>
-                  <a:srgbClr val="1B3A5C"/>
+                  <a:srgbClr val="0D5E5E"/>
                 </a:solidFill>
                 <a:latin typeface="Microsoft YaHei"/>
               </a:rPr>
@@ -16922,6 +18814,49 @@
               </a:rPr>
               <a:t>企业自查已足额提取折旧的固定资产的改建支出、租入固定资产的改建支出、固定资产的大修理支出以及其他应当作为长期待摊费用的支出摊销期限是否低于三年，若摊销期限低于三年则不符合税法规定，需要调整摊销期限。</a:t>
             </a:r>
+          </a:p>
+        </p:txBody>
+      </p:sp>
+      <p:sp>
+        <p:nvSpPr>
+          <p:cNvPr id="4" name="Rectangle 3"/>
+          <p:cNvSpPr/>
+          <p:nvPr/>
+        </p:nvSpPr>
+        <p:spPr>
+          <a:xfrm>
+            <a:off x="457200" y="6720840"/>
+            <a:ext cx="11277295" cy="27432"/>
+          </a:xfrm>
+          <a:prstGeom prst="rect">
+            <a:avLst/>
+          </a:prstGeom>
+          <a:solidFill>
+            <a:srgbClr val="0D5E5E"/>
+          </a:solidFill>
+          <a:ln>
+            <a:noFill/>
+          </a:ln>
+        </p:spPr>
+        <p:style>
+          <a:lnRef idx="1">
+            <a:schemeClr val="accent1"/>
+          </a:lnRef>
+          <a:fillRef idx="3">
+            <a:schemeClr val="accent1"/>
+          </a:fillRef>
+          <a:effectRef idx="2">
+            <a:schemeClr val="accent1"/>
+          </a:effectRef>
+          <a:fontRef idx="minor">
+            <a:schemeClr val="lt1"/>
+          </a:fontRef>
+        </p:style>
+        <p:txBody>
+          <a:bodyPr rtlCol="0" anchor="ctr"/>
+          <a:lstStyle/>
+          <a:p>
+            <a:pPr algn="ctr"/>
           </a:p>
         </p:txBody>
       </p:sp>
@@ -16958,7 +18893,7 @@
             <a:avLst/>
           </a:prstGeom>
           <a:solidFill>
-            <a:srgbClr val="1B3A5C"/>
+            <a:srgbClr val="0D5E5E"/>
           </a:solidFill>
           <a:ln>
             <a:noFill/>
@@ -17030,7 +18965,7 @@
             <a:r>
               <a:rPr sz="1600" b="1">
                 <a:solidFill>
-                  <a:srgbClr val="1B3A5C"/>
+                  <a:srgbClr val="0D5E5E"/>
                 </a:solidFill>
                 <a:latin typeface="Microsoft YaHei"/>
               </a:rPr>
@@ -17212,6 +19147,49 @@
               </a:rPr>
               <a:t>企业应当自行判断是否存在对外经营取得租金收入，若存在上述情形，企业对取得的租金收入是否已在税法规定期间及时确认收入，若是未及时确认收入，企业及时进行调整纠正。</a:t>
             </a:r>
+          </a:p>
+        </p:txBody>
+      </p:sp>
+      <p:sp>
+        <p:nvSpPr>
+          <p:cNvPr id="4" name="Rectangle 3"/>
+          <p:cNvSpPr/>
+          <p:nvPr/>
+        </p:nvSpPr>
+        <p:spPr>
+          <a:xfrm>
+            <a:off x="457200" y="6720840"/>
+            <a:ext cx="11277295" cy="27432"/>
+          </a:xfrm>
+          <a:prstGeom prst="rect">
+            <a:avLst/>
+          </a:prstGeom>
+          <a:solidFill>
+            <a:srgbClr val="0D5E5E"/>
+          </a:solidFill>
+          <a:ln>
+            <a:noFill/>
+          </a:ln>
+        </p:spPr>
+        <p:style>
+          <a:lnRef idx="1">
+            <a:schemeClr val="accent1"/>
+          </a:lnRef>
+          <a:fillRef idx="3">
+            <a:schemeClr val="accent1"/>
+          </a:fillRef>
+          <a:effectRef idx="2">
+            <a:schemeClr val="accent1"/>
+          </a:effectRef>
+          <a:fontRef idx="minor">
+            <a:schemeClr val="lt1"/>
+          </a:fontRef>
+        </p:style>
+        <p:txBody>
+          <a:bodyPr rtlCol="0" anchor="ctr"/>
+          <a:lstStyle/>
+          <a:p>
+            <a:pPr algn="ctr"/>
           </a:p>
         </p:txBody>
       </p:sp>
@@ -17248,7 +19226,7 @@
             <a:avLst/>
           </a:prstGeom>
           <a:solidFill>
-            <a:srgbClr val="1B3A5C"/>
+            <a:srgbClr val="0D5E5E"/>
           </a:solidFill>
           <a:ln>
             <a:noFill/>
@@ -17320,7 +19298,7 @@
             <a:r>
               <a:rPr sz="1600" b="1">
                 <a:solidFill>
-                  <a:srgbClr val="1B3A5C"/>
+                  <a:srgbClr val="0D5E5E"/>
                 </a:solidFill>
                 <a:latin typeface="Microsoft YaHei"/>
               </a:rPr>
@@ -17524,6 +19502,49 @@
               </a:rPr>
               <a:t>企业需要自查维检费支出的类别，预缴的维检费支出不得税前扣除。</a:t>
             </a:r>
+          </a:p>
+        </p:txBody>
+      </p:sp>
+      <p:sp>
+        <p:nvSpPr>
+          <p:cNvPr id="4" name="Rectangle 3"/>
+          <p:cNvSpPr/>
+          <p:nvPr/>
+        </p:nvSpPr>
+        <p:spPr>
+          <a:xfrm>
+            <a:off x="457200" y="6720840"/>
+            <a:ext cx="11277295" cy="27432"/>
+          </a:xfrm>
+          <a:prstGeom prst="rect">
+            <a:avLst/>
+          </a:prstGeom>
+          <a:solidFill>
+            <a:srgbClr val="0D5E5E"/>
+          </a:solidFill>
+          <a:ln>
+            <a:noFill/>
+          </a:ln>
+        </p:spPr>
+        <p:style>
+          <a:lnRef idx="1">
+            <a:schemeClr val="accent1"/>
+          </a:lnRef>
+          <a:fillRef idx="3">
+            <a:schemeClr val="accent1"/>
+          </a:fillRef>
+          <a:effectRef idx="2">
+            <a:schemeClr val="accent1"/>
+          </a:effectRef>
+          <a:fontRef idx="minor">
+            <a:schemeClr val="lt1"/>
+          </a:fontRef>
+        </p:style>
+        <p:txBody>
+          <a:bodyPr rtlCol="0" anchor="ctr"/>
+          <a:lstStyle/>
+          <a:p>
+            <a:pPr algn="ctr"/>
           </a:p>
         </p:txBody>
       </p:sp>
@@ -17560,7 +19581,7 @@
             <a:avLst/>
           </a:prstGeom>
           <a:solidFill>
-            <a:srgbClr val="1B3A5C"/>
+            <a:srgbClr val="0D5E5E"/>
           </a:solidFill>
           <a:ln>
             <a:noFill/>
@@ -17632,7 +19653,7 @@
             <a:r>
               <a:rPr sz="1600" b="1">
                 <a:solidFill>
-                  <a:srgbClr val="1B3A5C"/>
+                  <a:srgbClr val="0D5E5E"/>
                 </a:solidFill>
                 <a:latin typeface="Microsoft YaHei"/>
               </a:rPr>
@@ -17814,6 +19835,49 @@
               </a:rPr>
               <a:t>企业应核查长期停工费用科目，结合企业财务报告，审核停工项目费用明细，对还在计提折旧但已经停止使用的固定资产等不符合税法规定的项目进行纳税调整。</a:t>
             </a:r>
+          </a:p>
+        </p:txBody>
+      </p:sp>
+      <p:sp>
+        <p:nvSpPr>
+          <p:cNvPr id="4" name="Rectangle 3"/>
+          <p:cNvSpPr/>
+          <p:nvPr/>
+        </p:nvSpPr>
+        <p:spPr>
+          <a:xfrm>
+            <a:off x="457200" y="6720840"/>
+            <a:ext cx="11277295" cy="27432"/>
+          </a:xfrm>
+          <a:prstGeom prst="rect">
+            <a:avLst/>
+          </a:prstGeom>
+          <a:solidFill>
+            <a:srgbClr val="0D5E5E"/>
+          </a:solidFill>
+          <a:ln>
+            <a:noFill/>
+          </a:ln>
+        </p:spPr>
+        <p:style>
+          <a:lnRef idx="1">
+            <a:schemeClr val="accent1"/>
+          </a:lnRef>
+          <a:fillRef idx="3">
+            <a:schemeClr val="accent1"/>
+          </a:fillRef>
+          <a:effectRef idx="2">
+            <a:schemeClr val="accent1"/>
+          </a:effectRef>
+          <a:fontRef idx="minor">
+            <a:schemeClr val="lt1"/>
+          </a:fontRef>
+        </p:style>
+        <p:txBody>
+          <a:bodyPr rtlCol="0" anchor="ctr"/>
+          <a:lstStyle/>
+          <a:p>
+            <a:pPr algn="ctr"/>
           </a:p>
         </p:txBody>
       </p:sp>
@@ -17850,7 +19914,7 @@
             <a:avLst/>
           </a:prstGeom>
           <a:solidFill>
-            <a:srgbClr val="1B3A5C"/>
+            <a:srgbClr val="0D5E5E"/>
           </a:solidFill>
           <a:ln>
             <a:noFill/>
@@ -17922,7 +19986,7 @@
             <a:r>
               <a:rPr sz="1600" b="1">
                 <a:solidFill>
-                  <a:srgbClr val="1B3A5C"/>
+                  <a:srgbClr val="0D5E5E"/>
                 </a:solidFill>
                 <a:latin typeface="Microsoft YaHei"/>
               </a:rPr>
@@ -18104,6 +20168,49 @@
               </a:rPr>
               <a:t>企业应及时进行核查，对不符合税法规定的项目进行纳税调整。</a:t>
             </a:r>
+          </a:p>
+        </p:txBody>
+      </p:sp>
+      <p:sp>
+        <p:nvSpPr>
+          <p:cNvPr id="4" name="Rectangle 3"/>
+          <p:cNvSpPr/>
+          <p:nvPr/>
+        </p:nvSpPr>
+        <p:spPr>
+          <a:xfrm>
+            <a:off x="457200" y="6720840"/>
+            <a:ext cx="11277295" cy="27432"/>
+          </a:xfrm>
+          <a:prstGeom prst="rect">
+            <a:avLst/>
+          </a:prstGeom>
+          <a:solidFill>
+            <a:srgbClr val="0D5E5E"/>
+          </a:solidFill>
+          <a:ln>
+            <a:noFill/>
+          </a:ln>
+        </p:spPr>
+        <p:style>
+          <a:lnRef idx="1">
+            <a:schemeClr val="accent1"/>
+          </a:lnRef>
+          <a:fillRef idx="3">
+            <a:schemeClr val="accent1"/>
+          </a:fillRef>
+          <a:effectRef idx="2">
+            <a:schemeClr val="accent1"/>
+          </a:effectRef>
+          <a:fontRef idx="minor">
+            <a:schemeClr val="lt1"/>
+          </a:fontRef>
+        </p:style>
+        <p:txBody>
+          <a:bodyPr rtlCol="0" anchor="ctr"/>
+          <a:lstStyle/>
+          <a:p>
+            <a:pPr algn="ctr"/>
           </a:p>
         </p:txBody>
       </p:sp>
@@ -18140,7 +20247,7 @@
             <a:avLst/>
           </a:prstGeom>
           <a:solidFill>
-            <a:srgbClr val="1B3A5C"/>
+            <a:srgbClr val="0D5E5E"/>
           </a:solidFill>
           <a:ln>
             <a:noFill/>
@@ -18212,7 +20319,7 @@
             <a:r>
               <a:rPr sz="1600" b="1">
                 <a:solidFill>
-                  <a:srgbClr val="1B3A5C"/>
+                  <a:srgbClr val="0D5E5E"/>
                 </a:solidFill>
                 <a:latin typeface="Microsoft YaHei"/>
               </a:rPr>
@@ -18394,6 +20501,49 @@
               </a:rPr>
               <a:t>企业需核查取得来源于政府及其他有关部门的财政补助、补贴、贷款贴息和港建费分成收入等不征税财政专项资金，其支出所形成的费用，或其资产所形成的折旧、摊销是否在计算应纳税所得额时扣除。</a:t>
             </a:r>
+          </a:p>
+        </p:txBody>
+      </p:sp>
+      <p:sp>
+        <p:nvSpPr>
+          <p:cNvPr id="4" name="Rectangle 3"/>
+          <p:cNvSpPr/>
+          <p:nvPr/>
+        </p:nvSpPr>
+        <p:spPr>
+          <a:xfrm>
+            <a:off x="457200" y="6720840"/>
+            <a:ext cx="11277295" cy="27432"/>
+          </a:xfrm>
+          <a:prstGeom prst="rect">
+            <a:avLst/>
+          </a:prstGeom>
+          <a:solidFill>
+            <a:srgbClr val="0D5E5E"/>
+          </a:solidFill>
+          <a:ln>
+            <a:noFill/>
+          </a:ln>
+        </p:spPr>
+        <p:style>
+          <a:lnRef idx="1">
+            <a:schemeClr val="accent1"/>
+          </a:lnRef>
+          <a:fillRef idx="3">
+            <a:schemeClr val="accent1"/>
+          </a:fillRef>
+          <a:effectRef idx="2">
+            <a:schemeClr val="accent1"/>
+          </a:effectRef>
+          <a:fontRef idx="minor">
+            <a:schemeClr val="lt1"/>
+          </a:fontRef>
+        </p:style>
+        <p:txBody>
+          <a:bodyPr rtlCol="0" anchor="ctr"/>
+          <a:lstStyle/>
+          <a:p>
+            <a:pPr algn="ctr"/>
           </a:p>
         </p:txBody>
       </p:sp>
@@ -18430,7 +20580,7 @@
             <a:avLst/>
           </a:prstGeom>
           <a:solidFill>
-            <a:srgbClr val="1B3A5C"/>
+            <a:srgbClr val="0D5E5E"/>
           </a:solidFill>
           <a:ln>
             <a:noFill/>
@@ -18502,7 +20652,7 @@
             <a:r>
               <a:rPr sz="1600" b="1">
                 <a:solidFill>
-                  <a:srgbClr val="1B3A5C"/>
+                  <a:srgbClr val="0D5E5E"/>
                 </a:solidFill>
                 <a:latin typeface="Microsoft YaHei"/>
               </a:rPr>
@@ -18706,6 +20856,49 @@
               </a:rPr>
               <a:t>企业要查核是否按规定的程序和时点向主管税务机关申报，否则不得在税前扣除。税法规定企业发生的资产损失，应按规定的程序和要求向主管税务机关申报后方能在税前扣除。未经申报的损失，不得在税前扣除。</a:t>
             </a:r>
+          </a:p>
+        </p:txBody>
+      </p:sp>
+      <p:sp>
+        <p:nvSpPr>
+          <p:cNvPr id="4" name="Rectangle 3"/>
+          <p:cNvSpPr/>
+          <p:nvPr/>
+        </p:nvSpPr>
+        <p:spPr>
+          <a:xfrm>
+            <a:off x="457200" y="6720840"/>
+            <a:ext cx="11277295" cy="27432"/>
+          </a:xfrm>
+          <a:prstGeom prst="rect">
+            <a:avLst/>
+          </a:prstGeom>
+          <a:solidFill>
+            <a:srgbClr val="0D5E5E"/>
+          </a:solidFill>
+          <a:ln>
+            <a:noFill/>
+          </a:ln>
+        </p:spPr>
+        <p:style>
+          <a:lnRef idx="1">
+            <a:schemeClr val="accent1"/>
+          </a:lnRef>
+          <a:fillRef idx="3">
+            <a:schemeClr val="accent1"/>
+          </a:fillRef>
+          <a:effectRef idx="2">
+            <a:schemeClr val="accent1"/>
+          </a:effectRef>
+          <a:fontRef idx="minor">
+            <a:schemeClr val="lt1"/>
+          </a:fontRef>
+        </p:style>
+        <p:txBody>
+          <a:bodyPr rtlCol="0" anchor="ctr"/>
+          <a:lstStyle/>
+          <a:p>
+            <a:pPr algn="ctr"/>
           </a:p>
         </p:txBody>
       </p:sp>
@@ -18742,7 +20935,7 @@
             <a:avLst/>
           </a:prstGeom>
           <a:solidFill>
-            <a:srgbClr val="1B3A5C"/>
+            <a:srgbClr val="0D5E5E"/>
           </a:solidFill>
           <a:ln>
             <a:noFill/>
@@ -18814,7 +21007,7 @@
             <a:r>
               <a:rPr sz="1600" b="1">
                 <a:solidFill>
-                  <a:srgbClr val="1B3A5C"/>
+                  <a:srgbClr val="0D5E5E"/>
                 </a:solidFill>
                 <a:latin typeface="Microsoft YaHei"/>
               </a:rPr>
@@ -19062,6 +21255,49 @@
               </a:rPr>
               <a:t>企业在确认股权投资无法收回时需按规定进行扣除，若未减除可收回企业在确认股权投资无法收回时需按规定进行扣除，若未减除可收回报时，需要将可收回金额减除，避免在进行税前扣除中出现错误。</a:t>
             </a:r>
+          </a:p>
+        </p:txBody>
+      </p:sp>
+      <p:sp>
+        <p:nvSpPr>
+          <p:cNvPr id="4" name="Rectangle 3"/>
+          <p:cNvSpPr/>
+          <p:nvPr/>
+        </p:nvSpPr>
+        <p:spPr>
+          <a:xfrm>
+            <a:off x="457200" y="6720840"/>
+            <a:ext cx="11277295" cy="27432"/>
+          </a:xfrm>
+          <a:prstGeom prst="rect">
+            <a:avLst/>
+          </a:prstGeom>
+          <a:solidFill>
+            <a:srgbClr val="0D5E5E"/>
+          </a:solidFill>
+          <a:ln>
+            <a:noFill/>
+          </a:ln>
+        </p:spPr>
+        <p:style>
+          <a:lnRef idx="1">
+            <a:schemeClr val="accent1"/>
+          </a:lnRef>
+          <a:fillRef idx="3">
+            <a:schemeClr val="accent1"/>
+          </a:fillRef>
+          <a:effectRef idx="2">
+            <a:schemeClr val="accent1"/>
+          </a:effectRef>
+          <a:fontRef idx="minor">
+            <a:schemeClr val="lt1"/>
+          </a:fontRef>
+        </p:style>
+        <p:txBody>
+          <a:bodyPr rtlCol="0" anchor="ctr"/>
+          <a:lstStyle/>
+          <a:p>
+            <a:pPr algn="ctr"/>
           </a:p>
         </p:txBody>
       </p:sp>
@@ -19098,7 +21334,7 @@
             <a:avLst/>
           </a:prstGeom>
           <a:solidFill>
-            <a:srgbClr val="1B3A5C"/>
+            <a:srgbClr val="0D5E5E"/>
           </a:solidFill>
           <a:ln>
             <a:noFill/>
@@ -19170,7 +21406,7 @@
             <a:r>
               <a:rPr sz="1600" b="1">
                 <a:solidFill>
-                  <a:srgbClr val="1B3A5C"/>
+                  <a:srgbClr val="0D5E5E"/>
                 </a:solidFill>
                 <a:latin typeface="Microsoft YaHei"/>
               </a:rPr>
@@ -19352,6 +21588,49 @@
               </a:rPr>
               <a:t>企业应当自行检查“长期股权投资”等权益性投资账户明细金额，并结合权责发生制原则对其发生的资产损失进行审核，判断是否存在多抵扣资产损失的情形，若是存在，企业及时进行调整纠正。</a:t>
             </a:r>
+          </a:p>
+        </p:txBody>
+      </p:sp>
+      <p:sp>
+        <p:nvSpPr>
+          <p:cNvPr id="4" name="Rectangle 3"/>
+          <p:cNvSpPr/>
+          <p:nvPr/>
+        </p:nvSpPr>
+        <p:spPr>
+          <a:xfrm>
+            <a:off x="457200" y="6720840"/>
+            <a:ext cx="11277295" cy="27432"/>
+          </a:xfrm>
+          <a:prstGeom prst="rect">
+            <a:avLst/>
+          </a:prstGeom>
+          <a:solidFill>
+            <a:srgbClr val="0D5E5E"/>
+          </a:solidFill>
+          <a:ln>
+            <a:noFill/>
+          </a:ln>
+        </p:spPr>
+        <p:style>
+          <a:lnRef idx="1">
+            <a:schemeClr val="accent1"/>
+          </a:lnRef>
+          <a:fillRef idx="3">
+            <a:schemeClr val="accent1"/>
+          </a:fillRef>
+          <a:effectRef idx="2">
+            <a:schemeClr val="accent1"/>
+          </a:effectRef>
+          <a:fontRef idx="minor">
+            <a:schemeClr val="lt1"/>
+          </a:fontRef>
+        </p:style>
+        <p:txBody>
+          <a:bodyPr rtlCol="0" anchor="ctr"/>
+          <a:lstStyle/>
+          <a:p>
+            <a:pPr algn="ctr"/>
           </a:p>
         </p:txBody>
       </p:sp>
@@ -19388,7 +21667,7 @@
             <a:avLst/>
           </a:prstGeom>
           <a:solidFill>
-            <a:srgbClr val="1B3A5C"/>
+            <a:srgbClr val="0D5E5E"/>
           </a:solidFill>
           <a:ln>
             <a:noFill/>
@@ -19460,7 +21739,7 @@
             <a:r>
               <a:rPr sz="1600" b="1">
                 <a:solidFill>
-                  <a:srgbClr val="1B3A5C"/>
+                  <a:srgbClr val="0D5E5E"/>
                 </a:solidFill>
                 <a:latin typeface="Microsoft YaHei"/>
               </a:rPr>
@@ -19642,6 +21921,49 @@
               </a:rPr>
               <a:t>企业需要核查境外经营机构和境内企业的申报表，不得统一核算资产损失。</a:t>
             </a:r>
+          </a:p>
+        </p:txBody>
+      </p:sp>
+      <p:sp>
+        <p:nvSpPr>
+          <p:cNvPr id="4" name="Rectangle 3"/>
+          <p:cNvSpPr/>
+          <p:nvPr/>
+        </p:nvSpPr>
+        <p:spPr>
+          <a:xfrm>
+            <a:off x="457200" y="6720840"/>
+            <a:ext cx="11277295" cy="27432"/>
+          </a:xfrm>
+          <a:prstGeom prst="rect">
+            <a:avLst/>
+          </a:prstGeom>
+          <a:solidFill>
+            <a:srgbClr val="0D5E5E"/>
+          </a:solidFill>
+          <a:ln>
+            <a:noFill/>
+          </a:ln>
+        </p:spPr>
+        <p:style>
+          <a:lnRef idx="1">
+            <a:schemeClr val="accent1"/>
+          </a:lnRef>
+          <a:fillRef idx="3">
+            <a:schemeClr val="accent1"/>
+          </a:fillRef>
+          <a:effectRef idx="2">
+            <a:schemeClr val="accent1"/>
+          </a:effectRef>
+          <a:fontRef idx="minor">
+            <a:schemeClr val="lt1"/>
+          </a:fontRef>
+        </p:style>
+        <p:txBody>
+          <a:bodyPr rtlCol="0" anchor="ctr"/>
+          <a:lstStyle/>
+          <a:p>
+            <a:pPr algn="ctr"/>
           </a:p>
         </p:txBody>
       </p:sp>
@@ -19678,7 +22000,7 @@
             <a:avLst/>
           </a:prstGeom>
           <a:solidFill>
-            <a:srgbClr val="1B3A5C"/>
+            <a:srgbClr val="0D5E5E"/>
           </a:solidFill>
           <a:ln>
             <a:noFill/>
@@ -19750,7 +22072,7 @@
             <a:r>
               <a:rPr sz="1600" b="1">
                 <a:solidFill>
-                  <a:srgbClr val="1B3A5C"/>
+                  <a:srgbClr val="0D5E5E"/>
                 </a:solidFill>
                 <a:latin typeface="Microsoft YaHei"/>
               </a:rPr>
@@ -20020,6 +22342,49 @@
               </a:rPr>
               <a:t>企业需要查核应收账款和应付账款作为坏账损失进行税前扣除时是否符合条款中的规定，企业还需避免将已入账的款项纳入应收账款中。</a:t>
             </a:r>
+          </a:p>
+        </p:txBody>
+      </p:sp>
+      <p:sp>
+        <p:nvSpPr>
+          <p:cNvPr id="4" name="Rectangle 3"/>
+          <p:cNvSpPr/>
+          <p:nvPr/>
+        </p:nvSpPr>
+        <p:spPr>
+          <a:xfrm>
+            <a:off x="457200" y="6720840"/>
+            <a:ext cx="11277295" cy="27432"/>
+          </a:xfrm>
+          <a:prstGeom prst="rect">
+            <a:avLst/>
+          </a:prstGeom>
+          <a:solidFill>
+            <a:srgbClr val="0D5E5E"/>
+          </a:solidFill>
+          <a:ln>
+            <a:noFill/>
+          </a:ln>
+        </p:spPr>
+        <p:style>
+          <a:lnRef idx="1">
+            <a:schemeClr val="accent1"/>
+          </a:lnRef>
+          <a:fillRef idx="3">
+            <a:schemeClr val="accent1"/>
+          </a:fillRef>
+          <a:effectRef idx="2">
+            <a:schemeClr val="accent1"/>
+          </a:effectRef>
+          <a:fontRef idx="minor">
+            <a:schemeClr val="lt1"/>
+          </a:fontRef>
+        </p:style>
+        <p:txBody>
+          <a:bodyPr rtlCol="0" anchor="ctr"/>
+          <a:lstStyle/>
+          <a:p>
+            <a:pPr algn="ctr"/>
           </a:p>
         </p:txBody>
       </p:sp>
@@ -20056,7 +22421,7 @@
             <a:avLst/>
           </a:prstGeom>
           <a:solidFill>
-            <a:srgbClr val="1B3A5C"/>
+            <a:srgbClr val="0D5E5E"/>
           </a:solidFill>
           <a:ln>
             <a:noFill/>
@@ -20128,7 +22493,7 @@
             <a:r>
               <a:rPr sz="1600" b="1">
                 <a:solidFill>
-                  <a:srgbClr val="1B3A5C"/>
+                  <a:srgbClr val="0D5E5E"/>
                 </a:solidFill>
                 <a:latin typeface="Microsoft YaHei"/>
               </a:rPr>
@@ -20332,6 +22697,49 @@
               </a:rPr>
               <a:t>企业应检查是否存在未按照独立企业之间公平交易原则确定服务价格的情况，若是存在，其计税价格是否与关联交易之间的价格一致，若是一致，企业及时进行调整纠正。</a:t>
             </a:r>
+          </a:p>
+        </p:txBody>
+      </p:sp>
+      <p:sp>
+        <p:nvSpPr>
+          <p:cNvPr id="4" name="Rectangle 3"/>
+          <p:cNvSpPr/>
+          <p:nvPr/>
+        </p:nvSpPr>
+        <p:spPr>
+          <a:xfrm>
+            <a:off x="457200" y="6720840"/>
+            <a:ext cx="11277295" cy="27432"/>
+          </a:xfrm>
+          <a:prstGeom prst="rect">
+            <a:avLst/>
+          </a:prstGeom>
+          <a:solidFill>
+            <a:srgbClr val="0D5E5E"/>
+          </a:solidFill>
+          <a:ln>
+            <a:noFill/>
+          </a:ln>
+        </p:spPr>
+        <p:style>
+          <a:lnRef idx="1">
+            <a:schemeClr val="accent1"/>
+          </a:lnRef>
+          <a:fillRef idx="3">
+            <a:schemeClr val="accent1"/>
+          </a:fillRef>
+          <a:effectRef idx="2">
+            <a:schemeClr val="accent1"/>
+          </a:effectRef>
+          <a:fontRef idx="minor">
+            <a:schemeClr val="lt1"/>
+          </a:fontRef>
+        </p:style>
+        <p:txBody>
+          <a:bodyPr rtlCol="0" anchor="ctr"/>
+          <a:lstStyle/>
+          <a:p>
+            <a:pPr algn="ctr"/>
           </a:p>
         </p:txBody>
       </p:sp>
@@ -20368,7 +22776,7 @@
             <a:avLst/>
           </a:prstGeom>
           <a:solidFill>
-            <a:srgbClr val="1B3A5C"/>
+            <a:srgbClr val="0D5E5E"/>
           </a:solidFill>
           <a:ln>
             <a:noFill/>
@@ -20440,7 +22848,7 @@
             <a:r>
               <a:rPr sz="1600" b="1">
                 <a:solidFill>
-                  <a:srgbClr val="1B3A5C"/>
+                  <a:srgbClr val="0D5E5E"/>
                 </a:solidFill>
                 <a:latin typeface="Microsoft YaHei"/>
               </a:rPr>
@@ -20622,6 +23030,49 @@
               </a:rPr>
               <a:t>企业要核查存在的股权（包括转让股票或股份）买卖，及时确认收入。</a:t>
             </a:r>
+          </a:p>
+        </p:txBody>
+      </p:sp>
+      <p:sp>
+        <p:nvSpPr>
+          <p:cNvPr id="4" name="Rectangle 3"/>
+          <p:cNvSpPr/>
+          <p:nvPr/>
+        </p:nvSpPr>
+        <p:spPr>
+          <a:xfrm>
+            <a:off x="457200" y="6720840"/>
+            <a:ext cx="11277295" cy="27432"/>
+          </a:xfrm>
+          <a:prstGeom prst="rect">
+            <a:avLst/>
+          </a:prstGeom>
+          <a:solidFill>
+            <a:srgbClr val="0D5E5E"/>
+          </a:solidFill>
+          <a:ln>
+            <a:noFill/>
+          </a:ln>
+        </p:spPr>
+        <p:style>
+          <a:lnRef idx="1">
+            <a:schemeClr val="accent1"/>
+          </a:lnRef>
+          <a:fillRef idx="3">
+            <a:schemeClr val="accent1"/>
+          </a:fillRef>
+          <a:effectRef idx="2">
+            <a:schemeClr val="accent1"/>
+          </a:effectRef>
+          <a:fontRef idx="minor">
+            <a:schemeClr val="lt1"/>
+          </a:fontRef>
+        </p:style>
+        <p:txBody>
+          <a:bodyPr rtlCol="0" anchor="ctr"/>
+          <a:lstStyle/>
+          <a:p>
+            <a:pPr algn="ctr"/>
           </a:p>
         </p:txBody>
       </p:sp>
@@ -20658,7 +23109,7 @@
             <a:avLst/>
           </a:prstGeom>
           <a:solidFill>
-            <a:srgbClr val="1B3A5C"/>
+            <a:srgbClr val="0D5E5E"/>
           </a:solidFill>
           <a:ln>
             <a:noFill/>
@@ -20730,7 +23181,7 @@
             <a:r>
               <a:rPr sz="1600" b="1">
                 <a:solidFill>
-                  <a:srgbClr val="1B3A5C"/>
+                  <a:srgbClr val="0D5E5E"/>
                 </a:solidFill>
                 <a:latin typeface="Microsoft YaHei"/>
               </a:rPr>
@@ -20912,6 +23363,49 @@
               </a:rPr>
               <a:t>子公司在计算应纳税所得额，进行所得税税前扣除时，如果存在扣除支付给母公司管理费的情况，企业及时进行调整纠正。</a:t>
             </a:r>
+          </a:p>
+        </p:txBody>
+      </p:sp>
+      <p:sp>
+        <p:nvSpPr>
+          <p:cNvPr id="4" name="Rectangle 3"/>
+          <p:cNvSpPr/>
+          <p:nvPr/>
+        </p:nvSpPr>
+        <p:spPr>
+          <a:xfrm>
+            <a:off x="457200" y="6720840"/>
+            <a:ext cx="11277295" cy="27432"/>
+          </a:xfrm>
+          <a:prstGeom prst="rect">
+            <a:avLst/>
+          </a:prstGeom>
+          <a:solidFill>
+            <a:srgbClr val="0D5E5E"/>
+          </a:solidFill>
+          <a:ln>
+            <a:noFill/>
+          </a:ln>
+        </p:spPr>
+        <p:style>
+          <a:lnRef idx="1">
+            <a:schemeClr val="accent1"/>
+          </a:lnRef>
+          <a:fillRef idx="3">
+            <a:schemeClr val="accent1"/>
+          </a:fillRef>
+          <a:effectRef idx="2">
+            <a:schemeClr val="accent1"/>
+          </a:effectRef>
+          <a:fontRef idx="minor">
+            <a:schemeClr val="lt1"/>
+          </a:fontRef>
+        </p:style>
+        <p:txBody>
+          <a:bodyPr rtlCol="0" anchor="ctr"/>
+          <a:lstStyle/>
+          <a:p>
+            <a:pPr algn="ctr"/>
           </a:p>
         </p:txBody>
       </p:sp>
@@ -20948,7 +23442,7 @@
             <a:avLst/>
           </a:prstGeom>
           <a:solidFill>
-            <a:srgbClr val="1B3A5C"/>
+            <a:srgbClr val="0D5E5E"/>
           </a:solidFill>
           <a:ln>
             <a:noFill/>
@@ -21020,7 +23514,7 @@
             <a:r>
               <a:rPr sz="1600" b="1">
                 <a:solidFill>
-                  <a:srgbClr val="1B3A5C"/>
+                  <a:srgbClr val="0D5E5E"/>
                 </a:solidFill>
                 <a:latin typeface="Microsoft YaHei"/>
               </a:rPr>
@@ -21224,6 +23718,49 @@
               </a:rPr>
               <a:t>企业应检查支付给关联方的利息支出中，是否有超过规定比例扣除的部分，对该部分超过规定比例部分，企业是否在计算税款时做税前扣除处理，如果已经发生扣除，企业应当及时进行调整纠正。</a:t>
             </a:r>
+          </a:p>
+        </p:txBody>
+      </p:sp>
+      <p:sp>
+        <p:nvSpPr>
+          <p:cNvPr id="4" name="Rectangle 3"/>
+          <p:cNvSpPr/>
+          <p:nvPr/>
+        </p:nvSpPr>
+        <p:spPr>
+          <a:xfrm>
+            <a:off x="457200" y="6720840"/>
+            <a:ext cx="11277295" cy="27432"/>
+          </a:xfrm>
+          <a:prstGeom prst="rect">
+            <a:avLst/>
+          </a:prstGeom>
+          <a:solidFill>
+            <a:srgbClr val="0D5E5E"/>
+          </a:solidFill>
+          <a:ln>
+            <a:noFill/>
+          </a:ln>
+        </p:spPr>
+        <p:style>
+          <a:lnRef idx="1">
+            <a:schemeClr val="accent1"/>
+          </a:lnRef>
+          <a:fillRef idx="3">
+            <a:schemeClr val="accent1"/>
+          </a:fillRef>
+          <a:effectRef idx="2">
+            <a:schemeClr val="accent1"/>
+          </a:effectRef>
+          <a:fontRef idx="minor">
+            <a:schemeClr val="lt1"/>
+          </a:fontRef>
+        </p:style>
+        <p:txBody>
+          <a:bodyPr rtlCol="0" anchor="ctr"/>
+          <a:lstStyle/>
+          <a:p>
+            <a:pPr algn="ctr"/>
           </a:p>
         </p:txBody>
       </p:sp>
@@ -21260,7 +23797,7 @@
             <a:avLst/>
           </a:prstGeom>
           <a:solidFill>
-            <a:srgbClr val="1B3A5C"/>
+            <a:srgbClr val="0D5E5E"/>
           </a:solidFill>
           <a:ln>
             <a:noFill/>
@@ -21332,7 +23869,7 @@
             <a:r>
               <a:rPr sz="1600" b="1">
                 <a:solidFill>
-                  <a:srgbClr val="1B3A5C"/>
+                  <a:srgbClr val="0D5E5E"/>
                 </a:solidFill>
                 <a:latin typeface="Microsoft YaHei"/>
               </a:rPr>
@@ -21514,6 +24051,49 @@
               </a:rPr>
               <a:t>企业需核查共同负担的期间费用是否在不同税率的东、西部企业合理分摊。</a:t>
             </a:r>
+          </a:p>
+        </p:txBody>
+      </p:sp>
+      <p:sp>
+        <p:nvSpPr>
+          <p:cNvPr id="4" name="Rectangle 3"/>
+          <p:cNvSpPr/>
+          <p:nvPr/>
+        </p:nvSpPr>
+        <p:spPr>
+          <a:xfrm>
+            <a:off x="457200" y="6720840"/>
+            <a:ext cx="11277295" cy="27432"/>
+          </a:xfrm>
+          <a:prstGeom prst="rect">
+            <a:avLst/>
+          </a:prstGeom>
+          <a:solidFill>
+            <a:srgbClr val="0D5E5E"/>
+          </a:solidFill>
+          <a:ln>
+            <a:noFill/>
+          </a:ln>
+        </p:spPr>
+        <p:style>
+          <a:lnRef idx="1">
+            <a:schemeClr val="accent1"/>
+          </a:lnRef>
+          <a:fillRef idx="3">
+            <a:schemeClr val="accent1"/>
+          </a:fillRef>
+          <a:effectRef idx="2">
+            <a:schemeClr val="accent1"/>
+          </a:effectRef>
+          <a:fontRef idx="minor">
+            <a:schemeClr val="lt1"/>
+          </a:fontRef>
+        </p:style>
+        <p:txBody>
+          <a:bodyPr rtlCol="0" anchor="ctr"/>
+          <a:lstStyle/>
+          <a:p>
+            <a:pPr algn="ctr"/>
           </a:p>
         </p:txBody>
       </p:sp>
@@ -21550,7 +24130,7 @@
             <a:avLst/>
           </a:prstGeom>
           <a:solidFill>
-            <a:srgbClr val="1B3A5C"/>
+            <a:srgbClr val="0D5E5E"/>
           </a:solidFill>
           <a:ln>
             <a:noFill/>
@@ -21622,7 +24202,7 @@
             <a:r>
               <a:rPr sz="1600" b="1">
                 <a:solidFill>
-                  <a:srgbClr val="1B3A5C"/>
+                  <a:srgbClr val="0D5E5E"/>
                 </a:solidFill>
                 <a:latin typeface="Microsoft YaHei"/>
               </a:rPr>
@@ -21804,6 +24384,49 @@
               </a:rPr>
               <a:t>企业自查是否存在购置并实际使用的环境保护、节能节水、安全生产等专用设备在5年内转让、出租的，错误享受税额抵免政策的情况，若存在，立即停止享受企业所得税优惠，并补缴已经抵免的企业所得税税款。</a:t>
             </a:r>
+          </a:p>
+        </p:txBody>
+      </p:sp>
+      <p:sp>
+        <p:nvSpPr>
+          <p:cNvPr id="4" name="Rectangle 3"/>
+          <p:cNvSpPr/>
+          <p:nvPr/>
+        </p:nvSpPr>
+        <p:spPr>
+          <a:xfrm>
+            <a:off x="457200" y="6720840"/>
+            <a:ext cx="11277295" cy="27432"/>
+          </a:xfrm>
+          <a:prstGeom prst="rect">
+            <a:avLst/>
+          </a:prstGeom>
+          <a:solidFill>
+            <a:srgbClr val="0D5E5E"/>
+          </a:solidFill>
+          <a:ln>
+            <a:noFill/>
+          </a:ln>
+        </p:spPr>
+        <p:style>
+          <a:lnRef idx="1">
+            <a:schemeClr val="accent1"/>
+          </a:lnRef>
+          <a:fillRef idx="3">
+            <a:schemeClr val="accent1"/>
+          </a:fillRef>
+          <a:effectRef idx="2">
+            <a:schemeClr val="accent1"/>
+          </a:effectRef>
+          <a:fontRef idx="minor">
+            <a:schemeClr val="lt1"/>
+          </a:fontRef>
+        </p:style>
+        <p:txBody>
+          <a:bodyPr rtlCol="0" anchor="ctr"/>
+          <a:lstStyle/>
+          <a:p>
+            <a:pPr algn="ctr"/>
           </a:p>
         </p:txBody>
       </p:sp>
@@ -21840,7 +24463,7 @@
             <a:avLst/>
           </a:prstGeom>
           <a:solidFill>
-            <a:srgbClr val="1B3A5C"/>
+            <a:srgbClr val="0D5E5E"/>
           </a:solidFill>
           <a:ln>
             <a:noFill/>
@@ -21912,7 +24535,7 @@
             <a:r>
               <a:rPr sz="1600" b="1">
                 <a:solidFill>
-                  <a:srgbClr val="1B3A5C"/>
+                  <a:srgbClr val="0D5E5E"/>
                 </a:solidFill>
                 <a:latin typeface="Microsoft YaHei"/>
               </a:rPr>
@@ -22160,6 +24783,49 @@
               </a:rPr>
               <a:t>企业应当自行检查是否已经在税法规定的时间期限内办理预缴税款手续，若是不符合相关规定，企业及时进行调整纠正。</a:t>
             </a:r>
+          </a:p>
+        </p:txBody>
+      </p:sp>
+      <p:sp>
+        <p:nvSpPr>
+          <p:cNvPr id="4" name="Rectangle 3"/>
+          <p:cNvSpPr/>
+          <p:nvPr/>
+        </p:nvSpPr>
+        <p:spPr>
+          <a:xfrm>
+            <a:off x="457200" y="6720840"/>
+            <a:ext cx="11277295" cy="27432"/>
+          </a:xfrm>
+          <a:prstGeom prst="rect">
+            <a:avLst/>
+          </a:prstGeom>
+          <a:solidFill>
+            <a:srgbClr val="0D5E5E"/>
+          </a:solidFill>
+          <a:ln>
+            <a:noFill/>
+          </a:ln>
+        </p:spPr>
+        <p:style>
+          <a:lnRef idx="1">
+            <a:schemeClr val="accent1"/>
+          </a:lnRef>
+          <a:fillRef idx="3">
+            <a:schemeClr val="accent1"/>
+          </a:fillRef>
+          <a:effectRef idx="2">
+            <a:schemeClr val="accent1"/>
+          </a:effectRef>
+          <a:fontRef idx="minor">
+            <a:schemeClr val="lt1"/>
+          </a:fontRef>
+        </p:style>
+        <p:txBody>
+          <a:bodyPr rtlCol="0" anchor="ctr"/>
+          <a:lstStyle/>
+          <a:p>
+            <a:pPr algn="ctr"/>
           </a:p>
         </p:txBody>
       </p:sp>
@@ -22196,7 +24862,7 @@
             <a:avLst/>
           </a:prstGeom>
           <a:solidFill>
-            <a:srgbClr val="1B3A5C"/>
+            <a:srgbClr val="0D5E5E"/>
           </a:solidFill>
           <a:ln>
             <a:noFill/>
@@ -22268,7 +24934,7 @@
             <a:r>
               <a:rPr sz="1600" b="1">
                 <a:solidFill>
-                  <a:srgbClr val="1B3A5C"/>
+                  <a:srgbClr val="0D5E5E"/>
                 </a:solidFill>
                 <a:latin typeface="Microsoft YaHei"/>
               </a:rPr>
@@ -22450,6 +25116,49 @@
               </a:rPr>
               <a:t>查看“其他权益工具投资”“长期股权投资”“投资收益”等科目，核实投资合同协议、投资资产持有时间和持股比例、投资形式，对照被投资方作出利润分配决定的日期及金额，核实企业所得税申报表中享受免税税收优惠的股息红利金额、收入确认时间、申报免税收入时间是否准确。</a:t>
             </a:r>
+          </a:p>
+        </p:txBody>
+      </p:sp>
+      <p:sp>
+        <p:nvSpPr>
+          <p:cNvPr id="4" name="Rectangle 3"/>
+          <p:cNvSpPr/>
+          <p:nvPr/>
+        </p:nvSpPr>
+        <p:spPr>
+          <a:xfrm>
+            <a:off x="457200" y="6720840"/>
+            <a:ext cx="11277295" cy="27432"/>
+          </a:xfrm>
+          <a:prstGeom prst="rect">
+            <a:avLst/>
+          </a:prstGeom>
+          <a:solidFill>
+            <a:srgbClr val="0D5E5E"/>
+          </a:solidFill>
+          <a:ln>
+            <a:noFill/>
+          </a:ln>
+        </p:spPr>
+        <p:style>
+          <a:lnRef idx="1">
+            <a:schemeClr val="accent1"/>
+          </a:lnRef>
+          <a:fillRef idx="3">
+            <a:schemeClr val="accent1"/>
+          </a:fillRef>
+          <a:effectRef idx="2">
+            <a:schemeClr val="accent1"/>
+          </a:effectRef>
+          <a:fontRef idx="minor">
+            <a:schemeClr val="lt1"/>
+          </a:fontRef>
+        </p:style>
+        <p:txBody>
+          <a:bodyPr rtlCol="0" anchor="ctr"/>
+          <a:lstStyle/>
+          <a:p>
+            <a:pPr algn="ctr"/>
           </a:p>
         </p:txBody>
       </p:sp>
@@ -22486,7 +25195,7 @@
             <a:avLst/>
           </a:prstGeom>
           <a:solidFill>
-            <a:srgbClr val="1B3A5C"/>
+            <a:srgbClr val="0D5E5E"/>
           </a:solidFill>
           <a:ln>
             <a:noFill/>
@@ -22558,7 +25267,7 @@
             <a:r>
               <a:rPr sz="1600" b="1">
                 <a:solidFill>
-                  <a:srgbClr val="1B3A5C"/>
+                  <a:srgbClr val="0D5E5E"/>
                 </a:solidFill>
                 <a:latin typeface="Microsoft YaHei"/>
               </a:rPr>
@@ -22740,6 +25449,49 @@
               </a:rPr>
               <a:t>结合“其他债权投资”“其他权益工具投资”“债权投资”“交易性金融资产”“长期股权投资”“投资收益”等科目，核实投资合同协议、投资资产持有时间和持股比例，查看股权投资及投资收益转账凭证，判断投资收益是否属于免税收入。</a:t>
             </a:r>
+          </a:p>
+        </p:txBody>
+      </p:sp>
+      <p:sp>
+        <p:nvSpPr>
+          <p:cNvPr id="4" name="Rectangle 3"/>
+          <p:cNvSpPr/>
+          <p:nvPr/>
+        </p:nvSpPr>
+        <p:spPr>
+          <a:xfrm>
+            <a:off x="457200" y="6720840"/>
+            <a:ext cx="11277295" cy="27432"/>
+          </a:xfrm>
+          <a:prstGeom prst="rect">
+            <a:avLst/>
+          </a:prstGeom>
+          <a:solidFill>
+            <a:srgbClr val="0D5E5E"/>
+          </a:solidFill>
+          <a:ln>
+            <a:noFill/>
+          </a:ln>
+        </p:spPr>
+        <p:style>
+          <a:lnRef idx="1">
+            <a:schemeClr val="accent1"/>
+          </a:lnRef>
+          <a:fillRef idx="3">
+            <a:schemeClr val="accent1"/>
+          </a:fillRef>
+          <a:effectRef idx="2">
+            <a:schemeClr val="accent1"/>
+          </a:effectRef>
+          <a:fontRef idx="minor">
+            <a:schemeClr val="lt1"/>
+          </a:fontRef>
+        </p:style>
+        <p:txBody>
+          <a:bodyPr rtlCol="0" anchor="ctr"/>
+          <a:lstStyle/>
+          <a:p>
+            <a:pPr algn="ctr"/>
           </a:p>
         </p:txBody>
       </p:sp>
@@ -22776,7 +25528,7 @@
             <a:avLst/>
           </a:prstGeom>
           <a:solidFill>
-            <a:srgbClr val="1B3A5C"/>
+            <a:srgbClr val="0D5E5E"/>
           </a:solidFill>
           <a:ln>
             <a:noFill/>
@@ -22848,7 +25600,7 @@
             <a:r>
               <a:rPr sz="1600" b="1">
                 <a:solidFill>
-                  <a:srgbClr val="1B3A5C"/>
+                  <a:srgbClr val="0D5E5E"/>
                 </a:solidFill>
                 <a:latin typeface="Microsoft YaHei"/>
               </a:rPr>
@@ -23096,6 +25848,49 @@
               </a:rPr>
               <a:t>查看研发项目使用的资金中是否含有取得的作为不征税收入处理的政府补助。存在使用不征税收入的研发项目的，核对企业所得税纳税申报表，确认是否将不征税收入对应的费用、资产折旧在企业所得税税前扣除而未做纳税调整，是否将其作为研发费用并加计扣除。</a:t>
             </a:r>
+          </a:p>
+        </p:txBody>
+      </p:sp>
+      <p:sp>
+        <p:nvSpPr>
+          <p:cNvPr id="4" name="Rectangle 3"/>
+          <p:cNvSpPr/>
+          <p:nvPr/>
+        </p:nvSpPr>
+        <p:spPr>
+          <a:xfrm>
+            <a:off x="457200" y="6720840"/>
+            <a:ext cx="11277295" cy="27432"/>
+          </a:xfrm>
+          <a:prstGeom prst="rect">
+            <a:avLst/>
+          </a:prstGeom>
+          <a:solidFill>
+            <a:srgbClr val="0D5E5E"/>
+          </a:solidFill>
+          <a:ln>
+            <a:noFill/>
+          </a:ln>
+        </p:spPr>
+        <p:style>
+          <a:lnRef idx="1">
+            <a:schemeClr val="accent1"/>
+          </a:lnRef>
+          <a:fillRef idx="3">
+            <a:schemeClr val="accent1"/>
+          </a:fillRef>
+          <a:effectRef idx="2">
+            <a:schemeClr val="accent1"/>
+          </a:effectRef>
+          <a:fontRef idx="minor">
+            <a:schemeClr val="lt1"/>
+          </a:fontRef>
+        </p:style>
+        <p:txBody>
+          <a:bodyPr rtlCol="0" anchor="ctr"/>
+          <a:lstStyle/>
+          <a:p>
+            <a:pPr algn="ctr"/>
           </a:p>
         </p:txBody>
       </p:sp>
@@ -23132,7 +25927,7 @@
             <a:avLst/>
           </a:prstGeom>
           <a:solidFill>
-            <a:srgbClr val="1B3A5C"/>
+            <a:srgbClr val="0D5E5E"/>
           </a:solidFill>
           <a:ln>
             <a:noFill/>
@@ -23204,7 +25999,7 @@
             <a:r>
               <a:rPr sz="1600" b="1">
                 <a:solidFill>
-                  <a:srgbClr val="1B3A5C"/>
+                  <a:srgbClr val="0D5E5E"/>
                 </a:solidFill>
                 <a:latin typeface="Microsoft YaHei"/>
               </a:rPr>
@@ -23452,6 +26247,49 @@
               </a:rPr>
               <a:t>查看“固定资产”“固定资产清理”“其他业务收入”“营业外收入”等科目明细及固定资产卡片，核实是否有在购置5年内将专用设备转让、出租的情况；查看专用设备购置的合同、清单、发票、《税额抵免优惠明细表》等材料，核实享受税收抵免的环境保护、节能节水、安全生产专用设备的明细，在购置5年内转让、出租的，是否已停止享受优惠并补缴已抵免企业所得税税款。</a:t>
             </a:r>
+          </a:p>
+        </p:txBody>
+      </p:sp>
+      <p:sp>
+        <p:nvSpPr>
+          <p:cNvPr id="4" name="Rectangle 3"/>
+          <p:cNvSpPr/>
+          <p:nvPr/>
+        </p:nvSpPr>
+        <p:spPr>
+          <a:xfrm>
+            <a:off x="457200" y="6720840"/>
+            <a:ext cx="11277295" cy="27432"/>
+          </a:xfrm>
+          <a:prstGeom prst="rect">
+            <a:avLst/>
+          </a:prstGeom>
+          <a:solidFill>
+            <a:srgbClr val="0D5E5E"/>
+          </a:solidFill>
+          <a:ln>
+            <a:noFill/>
+          </a:ln>
+        </p:spPr>
+        <p:style>
+          <a:lnRef idx="1">
+            <a:schemeClr val="accent1"/>
+          </a:lnRef>
+          <a:fillRef idx="3">
+            <a:schemeClr val="accent1"/>
+          </a:fillRef>
+          <a:effectRef idx="2">
+            <a:schemeClr val="accent1"/>
+          </a:effectRef>
+          <a:fontRef idx="minor">
+            <a:schemeClr val="lt1"/>
+          </a:fontRef>
+        </p:style>
+        <p:txBody>
+          <a:bodyPr rtlCol="0" anchor="ctr"/>
+          <a:lstStyle/>
+          <a:p>
+            <a:pPr algn="ctr"/>
           </a:p>
         </p:txBody>
       </p:sp>
@@ -23488,7 +26326,7 @@
             <a:avLst/>
           </a:prstGeom>
           <a:solidFill>
-            <a:srgbClr val="1B3A5C"/>
+            <a:srgbClr val="0D5E5E"/>
           </a:solidFill>
           <a:ln>
             <a:noFill/>
@@ -23560,7 +26398,7 @@
             <a:r>
               <a:rPr sz="1600" b="1">
                 <a:solidFill>
-                  <a:srgbClr val="1B3A5C"/>
+                  <a:srgbClr val="0D5E5E"/>
                 </a:solidFill>
                 <a:latin typeface="Microsoft YaHei"/>
               </a:rPr>
@@ -23940,6 +26778,49 @@
               </a:rPr>
               <a:t>查看销售合同、房屋销售明细、竣工材料、签收（收楼）花名册及交房通知书等，确认开发产品交付或入住情况、是否实际投入使用，对照税法规定的完工条件，确认是否及时结算开发产品收入及成本，并计算当年度应纳税所得额。</a:t>
             </a:r>
+          </a:p>
+        </p:txBody>
+      </p:sp>
+      <p:sp>
+        <p:nvSpPr>
+          <p:cNvPr id="4" name="Rectangle 3"/>
+          <p:cNvSpPr/>
+          <p:nvPr/>
+        </p:nvSpPr>
+        <p:spPr>
+          <a:xfrm>
+            <a:off x="457200" y="6720840"/>
+            <a:ext cx="11277295" cy="27432"/>
+          </a:xfrm>
+          <a:prstGeom prst="rect">
+            <a:avLst/>
+          </a:prstGeom>
+          <a:solidFill>
+            <a:srgbClr val="0D5E5E"/>
+          </a:solidFill>
+          <a:ln>
+            <a:noFill/>
+          </a:ln>
+        </p:spPr>
+        <p:style>
+          <a:lnRef idx="1">
+            <a:schemeClr val="accent1"/>
+          </a:lnRef>
+          <a:fillRef idx="3">
+            <a:schemeClr val="accent1"/>
+          </a:fillRef>
+          <a:effectRef idx="2">
+            <a:schemeClr val="accent1"/>
+          </a:effectRef>
+          <a:fontRef idx="minor">
+            <a:schemeClr val="lt1"/>
+          </a:fontRef>
+        </p:style>
+        <p:txBody>
+          <a:bodyPr rtlCol="0" anchor="ctr"/>
+          <a:lstStyle/>
+          <a:p>
+            <a:pPr algn="ctr"/>
           </a:p>
         </p:txBody>
       </p:sp>
@@ -23976,7 +26857,7 @@
             <a:avLst/>
           </a:prstGeom>
           <a:solidFill>
-            <a:srgbClr val="1B3A5C"/>
+            <a:srgbClr val="0D5E5E"/>
           </a:solidFill>
           <a:ln>
             <a:noFill/>
@@ -24048,7 +26929,7 @@
             <a:r>
               <a:rPr sz="1600" b="1">
                 <a:solidFill>
-                  <a:srgbClr val="1B3A5C"/>
+                  <a:srgbClr val="0D5E5E"/>
                 </a:solidFill>
                 <a:latin typeface="Microsoft YaHei"/>
               </a:rPr>
@@ -24230,6 +27111,49 @@
               </a:rPr>
               <a:t>企业对企业处置资产的销售收入进行核对，对于没有按照要求按资产公允价值确定销售收入的要及时改正。</a:t>
             </a:r>
+          </a:p>
+        </p:txBody>
+      </p:sp>
+      <p:sp>
+        <p:nvSpPr>
+          <p:cNvPr id="4" name="Rectangle 3"/>
+          <p:cNvSpPr/>
+          <p:nvPr/>
+        </p:nvSpPr>
+        <p:spPr>
+          <a:xfrm>
+            <a:off x="457200" y="6720840"/>
+            <a:ext cx="11277295" cy="27432"/>
+          </a:xfrm>
+          <a:prstGeom prst="rect">
+            <a:avLst/>
+          </a:prstGeom>
+          <a:solidFill>
+            <a:srgbClr val="0D5E5E"/>
+          </a:solidFill>
+          <a:ln>
+            <a:noFill/>
+          </a:ln>
+        </p:spPr>
+        <p:style>
+          <a:lnRef idx="1">
+            <a:schemeClr val="accent1"/>
+          </a:lnRef>
+          <a:fillRef idx="3">
+            <a:schemeClr val="accent1"/>
+          </a:fillRef>
+          <a:effectRef idx="2">
+            <a:schemeClr val="accent1"/>
+          </a:effectRef>
+          <a:fontRef idx="minor">
+            <a:schemeClr val="lt1"/>
+          </a:fontRef>
+        </p:style>
+        <p:txBody>
+          <a:bodyPr rtlCol="0" anchor="ctr"/>
+          <a:lstStyle/>
+          <a:p>
+            <a:pPr algn="ctr"/>
           </a:p>
         </p:txBody>
       </p:sp>
@@ -24266,7 +27190,7 @@
             <a:avLst/>
           </a:prstGeom>
           <a:solidFill>
-            <a:srgbClr val="1B3A5C"/>
+            <a:srgbClr val="0D5E5E"/>
           </a:solidFill>
           <a:ln>
             <a:noFill/>
@@ -24338,7 +27262,7 @@
             <a:r>
               <a:rPr sz="1600" b="1">
                 <a:solidFill>
-                  <a:srgbClr val="1B3A5C"/>
+                  <a:srgbClr val="0D5E5E"/>
                 </a:solidFill>
                 <a:latin typeface="Microsoft YaHei"/>
               </a:rPr>
@@ -24652,6 +27576,49 @@
               </a:rPr>
               <a:t>查看配套设施的性质、归属，无偿赠与的接收单位、移交手续，确认是否存在将配套设施无偿赠与地方政府、公用事业单位以外其他单位的情况，是否已按照规定以视同销售业务申报处理。</a:t>
             </a:r>
+          </a:p>
+        </p:txBody>
+      </p:sp>
+      <p:sp>
+        <p:nvSpPr>
+          <p:cNvPr id="4" name="Rectangle 3"/>
+          <p:cNvSpPr/>
+          <p:nvPr/>
+        </p:nvSpPr>
+        <p:spPr>
+          <a:xfrm>
+            <a:off x="457200" y="6720840"/>
+            <a:ext cx="11277295" cy="27432"/>
+          </a:xfrm>
+          <a:prstGeom prst="rect">
+            <a:avLst/>
+          </a:prstGeom>
+          <a:solidFill>
+            <a:srgbClr val="0D5E5E"/>
+          </a:solidFill>
+          <a:ln>
+            <a:noFill/>
+          </a:ln>
+        </p:spPr>
+        <p:style>
+          <a:lnRef idx="1">
+            <a:schemeClr val="accent1"/>
+          </a:lnRef>
+          <a:fillRef idx="3">
+            <a:schemeClr val="accent1"/>
+          </a:fillRef>
+          <a:effectRef idx="2">
+            <a:schemeClr val="accent1"/>
+          </a:effectRef>
+          <a:fontRef idx="minor">
+            <a:schemeClr val="lt1"/>
+          </a:fontRef>
+        </p:style>
+        <p:txBody>
+          <a:bodyPr rtlCol="0" anchor="ctr"/>
+          <a:lstStyle/>
+          <a:p>
+            <a:pPr algn="ctr"/>
           </a:p>
         </p:txBody>
       </p:sp>
@@ -24688,7 +27655,7 @@
             <a:avLst/>
           </a:prstGeom>
           <a:solidFill>
-            <a:srgbClr val="1B3A5C"/>
+            <a:srgbClr val="0D5E5E"/>
           </a:solidFill>
           <a:ln>
             <a:noFill/>
@@ -24760,7 +27727,7 @@
             <a:r>
               <a:rPr sz="1600" b="1">
                 <a:solidFill>
-                  <a:srgbClr val="1B3A5C"/>
+                  <a:srgbClr val="0D5E5E"/>
                 </a:solidFill>
                 <a:latin typeface="Microsoft YaHei"/>
               </a:rPr>
@@ -24986,6 +27953,49 @@
               </a:rPr>
               <a:t>查看取得土地使用权时签订的协议，是否有向原居民无偿转让回迁安置房，根据回迁安置协议和交房手续，结合已做账务处理，确认是否存在少缴税款的情形。</a:t>
             </a:r>
+          </a:p>
+        </p:txBody>
+      </p:sp>
+      <p:sp>
+        <p:nvSpPr>
+          <p:cNvPr id="4" name="Rectangle 3"/>
+          <p:cNvSpPr/>
+          <p:nvPr/>
+        </p:nvSpPr>
+        <p:spPr>
+          <a:xfrm>
+            <a:off x="457200" y="6720840"/>
+            <a:ext cx="11277295" cy="27432"/>
+          </a:xfrm>
+          <a:prstGeom prst="rect">
+            <a:avLst/>
+          </a:prstGeom>
+          <a:solidFill>
+            <a:srgbClr val="0D5E5E"/>
+          </a:solidFill>
+          <a:ln>
+            <a:noFill/>
+          </a:ln>
+        </p:spPr>
+        <p:style>
+          <a:lnRef idx="1">
+            <a:schemeClr val="accent1"/>
+          </a:lnRef>
+          <a:fillRef idx="3">
+            <a:schemeClr val="accent1"/>
+          </a:fillRef>
+          <a:effectRef idx="2">
+            <a:schemeClr val="accent1"/>
+          </a:effectRef>
+          <a:fontRef idx="minor">
+            <a:schemeClr val="lt1"/>
+          </a:fontRef>
+        </p:style>
+        <p:txBody>
+          <a:bodyPr rtlCol="0" anchor="ctr"/>
+          <a:lstStyle/>
+          <a:p>
+            <a:pPr algn="ctr"/>
           </a:p>
         </p:txBody>
       </p:sp>
@@ -25022,7 +28032,7 @@
             <a:avLst/>
           </a:prstGeom>
           <a:solidFill>
-            <a:srgbClr val="1B3A5C"/>
+            <a:srgbClr val="0D5E5E"/>
           </a:solidFill>
           <a:ln>
             <a:noFill/>
@@ -25094,7 +28104,7 @@
             <a:r>
               <a:rPr sz="1600" b="1">
                 <a:solidFill>
-                  <a:srgbClr val="1B3A5C"/>
+                  <a:srgbClr val="0D5E5E"/>
                 </a:solidFill>
                 <a:latin typeface="Microsoft YaHei"/>
               </a:rPr>
@@ -25518,6 +28528,49 @@
               </a:rPr>
               <a:t>查看土地出让合同，核实土地使用权金额与出让合同是否一致，是否存在返还部分土地出让金的条款；查看“递延收益”“营业外收入”“专项应付款”“资本公积”“其他应付款”“长期应收款”等科目，核实是否存在政府拨入的大额资金入账记录，确认是否存在收到返还款后未做收入处理，少缴企业所得税的情形。</a:t>
             </a:r>
+          </a:p>
+        </p:txBody>
+      </p:sp>
+      <p:sp>
+        <p:nvSpPr>
+          <p:cNvPr id="4" name="Rectangle 3"/>
+          <p:cNvSpPr/>
+          <p:nvPr/>
+        </p:nvSpPr>
+        <p:spPr>
+          <a:xfrm>
+            <a:off x="457200" y="6720840"/>
+            <a:ext cx="11277295" cy="27432"/>
+          </a:xfrm>
+          <a:prstGeom prst="rect">
+            <a:avLst/>
+          </a:prstGeom>
+          <a:solidFill>
+            <a:srgbClr val="0D5E5E"/>
+          </a:solidFill>
+          <a:ln>
+            <a:noFill/>
+          </a:ln>
+        </p:spPr>
+        <p:style>
+          <a:lnRef idx="1">
+            <a:schemeClr val="accent1"/>
+          </a:lnRef>
+          <a:fillRef idx="3">
+            <a:schemeClr val="accent1"/>
+          </a:fillRef>
+          <a:effectRef idx="2">
+            <a:schemeClr val="accent1"/>
+          </a:effectRef>
+          <a:fontRef idx="minor">
+            <a:schemeClr val="lt1"/>
+          </a:fontRef>
+        </p:style>
+        <p:txBody>
+          <a:bodyPr rtlCol="0" anchor="ctr"/>
+          <a:lstStyle/>
+          <a:p>
+            <a:pPr algn="ctr"/>
           </a:p>
         </p:txBody>
       </p:sp>
@@ -25554,7 +28607,7 @@
             <a:avLst/>
           </a:prstGeom>
           <a:solidFill>
-            <a:srgbClr val="1B3A5C"/>
+            <a:srgbClr val="0D5E5E"/>
           </a:solidFill>
           <a:ln>
             <a:noFill/>
@@ -25626,7 +28679,7 @@
             <a:r>
               <a:rPr sz="1600" b="1">
                 <a:solidFill>
-                  <a:srgbClr val="1B3A5C"/>
+                  <a:srgbClr val="0D5E5E"/>
                 </a:solidFill>
                 <a:latin typeface="Microsoft YaHei"/>
               </a:rPr>
@@ -25896,6 +28949,49 @@
               </a:rPr>
               <a:t>查看建筑合同、工程进度等资料，对照分析预提费用科目和企业所得税年度申报纳税调整情况，核实预提费用是否准确，预提的比例是否恰当。</a:t>
             </a:r>
+          </a:p>
+        </p:txBody>
+      </p:sp>
+      <p:sp>
+        <p:nvSpPr>
+          <p:cNvPr id="4" name="Rectangle 3"/>
+          <p:cNvSpPr/>
+          <p:nvPr/>
+        </p:nvSpPr>
+        <p:spPr>
+          <a:xfrm>
+            <a:off x="457200" y="6720840"/>
+            <a:ext cx="11277295" cy="27432"/>
+          </a:xfrm>
+          <a:prstGeom prst="rect">
+            <a:avLst/>
+          </a:prstGeom>
+          <a:solidFill>
+            <a:srgbClr val="0D5E5E"/>
+          </a:solidFill>
+          <a:ln>
+            <a:noFill/>
+          </a:ln>
+        </p:spPr>
+        <p:style>
+          <a:lnRef idx="1">
+            <a:schemeClr val="accent1"/>
+          </a:lnRef>
+          <a:fillRef idx="3">
+            <a:schemeClr val="accent1"/>
+          </a:fillRef>
+          <a:effectRef idx="2">
+            <a:schemeClr val="accent1"/>
+          </a:effectRef>
+          <a:fontRef idx="minor">
+            <a:schemeClr val="lt1"/>
+          </a:fontRef>
+        </p:style>
+        <p:txBody>
+          <a:bodyPr rtlCol="0" anchor="ctr"/>
+          <a:lstStyle/>
+          <a:p>
+            <a:pPr algn="ctr"/>
           </a:p>
         </p:txBody>
       </p:sp>
@@ -25932,7 +29028,7 @@
             <a:avLst/>
           </a:prstGeom>
           <a:solidFill>
-            <a:srgbClr val="1B3A5C"/>
+            <a:srgbClr val="0D5E5E"/>
           </a:solidFill>
           <a:ln>
             <a:noFill/>
@@ -26004,7 +29100,7 @@
             <a:r>
               <a:rPr sz="1600" b="1">
                 <a:solidFill>
-                  <a:srgbClr val="1B3A5C"/>
+                  <a:srgbClr val="0D5E5E"/>
                 </a:solidFill>
                 <a:latin typeface="Microsoft YaHei"/>
               </a:rPr>
@@ -26428,6 +29524,49 @@
               </a:rPr>
               <a:t>查看贷款损失准备金台账、年度各类贷款余额、内控制度及财务核算办法，明确对于涉农贷款和中小企业贷款计提贷款损失准备金的具体比例，比对计提准备金的数额与企业所得税前扣除准备金数额，核实是否叠加享受涉农贷款和中小企业贷款损失准备金税前扣除政策与一般贷款损失准备金税前扣除政策。</a:t>
             </a:r>
+          </a:p>
+        </p:txBody>
+      </p:sp>
+      <p:sp>
+        <p:nvSpPr>
+          <p:cNvPr id="4" name="Rectangle 3"/>
+          <p:cNvSpPr/>
+          <p:nvPr/>
+        </p:nvSpPr>
+        <p:spPr>
+          <a:xfrm>
+            <a:off x="457200" y="6720840"/>
+            <a:ext cx="11277295" cy="27432"/>
+          </a:xfrm>
+          <a:prstGeom prst="rect">
+            <a:avLst/>
+          </a:prstGeom>
+          <a:solidFill>
+            <a:srgbClr val="0D5E5E"/>
+          </a:solidFill>
+          <a:ln>
+            <a:noFill/>
+          </a:ln>
+        </p:spPr>
+        <p:style>
+          <a:lnRef idx="1">
+            <a:schemeClr val="accent1"/>
+          </a:lnRef>
+          <a:fillRef idx="3">
+            <a:schemeClr val="accent1"/>
+          </a:fillRef>
+          <a:effectRef idx="2">
+            <a:schemeClr val="accent1"/>
+          </a:effectRef>
+          <a:fontRef idx="minor">
+            <a:schemeClr val="lt1"/>
+          </a:fontRef>
+        </p:style>
+        <p:txBody>
+          <a:bodyPr rtlCol="0" anchor="ctr"/>
+          <a:lstStyle/>
+          <a:p>
+            <a:pPr algn="ctr"/>
           </a:p>
         </p:txBody>
       </p:sp>
@@ -26464,7 +29603,7 @@
             <a:avLst/>
           </a:prstGeom>
           <a:solidFill>
-            <a:srgbClr val="1B3A5C"/>
+            <a:srgbClr val="0D5E5E"/>
           </a:solidFill>
           <a:ln>
             <a:noFill/>
@@ -26536,7 +29675,7 @@
             <a:r>
               <a:rPr sz="1600" b="1">
                 <a:solidFill>
-                  <a:srgbClr val="1B3A5C"/>
+                  <a:srgbClr val="0D5E5E"/>
                 </a:solidFill>
                 <a:latin typeface="Microsoft YaHei"/>
               </a:rPr>
@@ -26982,6 +30121,49 @@
               </a:rPr>
               <a:t>查看取得专项资金拨付文件，判断是否符合不征税收入条件；自查“其他应付款”“资本公积”“营业外收入-补贴收入”“其他收益”“递延收益”等科目，判断是否存在未按规定确认当期收入的情况。</a:t>
             </a:r>
+          </a:p>
+        </p:txBody>
+      </p:sp>
+      <p:sp>
+        <p:nvSpPr>
+          <p:cNvPr id="4" name="Rectangle 3"/>
+          <p:cNvSpPr/>
+          <p:nvPr/>
+        </p:nvSpPr>
+        <p:spPr>
+          <a:xfrm>
+            <a:off x="457200" y="6720840"/>
+            <a:ext cx="11277295" cy="27432"/>
+          </a:xfrm>
+          <a:prstGeom prst="rect">
+            <a:avLst/>
+          </a:prstGeom>
+          <a:solidFill>
+            <a:srgbClr val="0D5E5E"/>
+          </a:solidFill>
+          <a:ln>
+            <a:noFill/>
+          </a:ln>
+        </p:spPr>
+        <p:style>
+          <a:lnRef idx="1">
+            <a:schemeClr val="accent1"/>
+          </a:lnRef>
+          <a:fillRef idx="3">
+            <a:schemeClr val="accent1"/>
+          </a:fillRef>
+          <a:effectRef idx="2">
+            <a:schemeClr val="accent1"/>
+          </a:effectRef>
+          <a:fontRef idx="minor">
+            <a:schemeClr val="lt1"/>
+          </a:fontRef>
+        </p:style>
+        <p:txBody>
+          <a:bodyPr rtlCol="0" anchor="ctr"/>
+          <a:lstStyle/>
+          <a:p>
+            <a:pPr algn="ctr"/>
           </a:p>
         </p:txBody>
       </p:sp>
@@ -27018,7 +30200,7 @@
             <a:avLst/>
           </a:prstGeom>
           <a:solidFill>
-            <a:srgbClr val="1B3A5C"/>
+            <a:srgbClr val="0D5E5E"/>
           </a:solidFill>
           <a:ln>
             <a:noFill/>
@@ -27090,7 +30272,7 @@
             <a:r>
               <a:rPr sz="1600" b="1">
                 <a:solidFill>
-                  <a:srgbClr val="1B3A5C"/>
+                  <a:srgbClr val="0D5E5E"/>
                 </a:solidFill>
                 <a:latin typeface="Microsoft YaHei"/>
               </a:rPr>
@@ -27470,6 +30652,49 @@
               </a:rPr>
               <a:t>查看“固定资产清理”“待处理财产损益”“营业外收入”“资产处置损益”等科目，结合资产损失（专项或清单申报）等申报数据，核实是否存在处置存货、使用过的固定资产等事项未按规定计算缴纳税款。</a:t>
             </a:r>
+          </a:p>
+        </p:txBody>
+      </p:sp>
+      <p:sp>
+        <p:nvSpPr>
+          <p:cNvPr id="4" name="Rectangle 3"/>
+          <p:cNvSpPr/>
+          <p:nvPr/>
+        </p:nvSpPr>
+        <p:spPr>
+          <a:xfrm>
+            <a:off x="457200" y="6720840"/>
+            <a:ext cx="11277295" cy="27432"/>
+          </a:xfrm>
+          <a:prstGeom prst="rect">
+            <a:avLst/>
+          </a:prstGeom>
+          <a:solidFill>
+            <a:srgbClr val="0D5E5E"/>
+          </a:solidFill>
+          <a:ln>
+            <a:noFill/>
+          </a:ln>
+        </p:spPr>
+        <p:style>
+          <a:lnRef idx="1">
+            <a:schemeClr val="accent1"/>
+          </a:lnRef>
+          <a:fillRef idx="3">
+            <a:schemeClr val="accent1"/>
+          </a:fillRef>
+          <a:effectRef idx="2">
+            <a:schemeClr val="accent1"/>
+          </a:effectRef>
+          <a:fontRef idx="minor">
+            <a:schemeClr val="lt1"/>
+          </a:fontRef>
+        </p:style>
+        <p:txBody>
+          <a:bodyPr rtlCol="0" anchor="ctr"/>
+          <a:lstStyle/>
+          <a:p>
+            <a:pPr algn="ctr"/>
           </a:p>
         </p:txBody>
       </p:sp>
@@ -27506,7 +30731,7 @@
             <a:avLst/>
           </a:prstGeom>
           <a:solidFill>
-            <a:srgbClr val="1B3A5C"/>
+            <a:srgbClr val="0D5E5E"/>
           </a:solidFill>
           <a:ln>
             <a:noFill/>
@@ -27578,7 +30803,7 @@
             <a:r>
               <a:rPr sz="1600" b="1">
                 <a:solidFill>
-                  <a:srgbClr val="1B3A5C"/>
+                  <a:srgbClr val="0D5E5E"/>
                 </a:solidFill>
                 <a:latin typeface="Microsoft YaHei"/>
               </a:rPr>
@@ -27980,6 +31205,49 @@
               </a:rPr>
               <a:t>企业自查相关合同条款，分析“应付账款”“其他应付款”“预收账款”等往来科目明细，核实是否存在收取质保金、消费保证金、工程质保金等超过合同约定还款期确实无法偿还的部分未确认收入的情况。</a:t>
             </a:r>
+          </a:p>
+        </p:txBody>
+      </p:sp>
+      <p:sp>
+        <p:nvSpPr>
+          <p:cNvPr id="4" name="Rectangle 3"/>
+          <p:cNvSpPr/>
+          <p:nvPr/>
+        </p:nvSpPr>
+        <p:spPr>
+          <a:xfrm>
+            <a:off x="457200" y="6720840"/>
+            <a:ext cx="11277295" cy="27432"/>
+          </a:xfrm>
+          <a:prstGeom prst="rect">
+            <a:avLst/>
+          </a:prstGeom>
+          <a:solidFill>
+            <a:srgbClr val="0D5E5E"/>
+          </a:solidFill>
+          <a:ln>
+            <a:noFill/>
+          </a:ln>
+        </p:spPr>
+        <p:style>
+          <a:lnRef idx="1">
+            <a:schemeClr val="accent1"/>
+          </a:lnRef>
+          <a:fillRef idx="3">
+            <a:schemeClr val="accent1"/>
+          </a:fillRef>
+          <a:effectRef idx="2">
+            <a:schemeClr val="accent1"/>
+          </a:effectRef>
+          <a:fontRef idx="minor">
+            <a:schemeClr val="lt1"/>
+          </a:fontRef>
+        </p:style>
+        <p:txBody>
+          <a:bodyPr rtlCol="0" anchor="ctr"/>
+          <a:lstStyle/>
+          <a:p>
+            <a:pPr algn="ctr"/>
           </a:p>
         </p:txBody>
       </p:sp>
@@ -28016,7 +31284,7 @@
             <a:avLst/>
           </a:prstGeom>
           <a:solidFill>
-            <a:srgbClr val="1B3A5C"/>
+            <a:srgbClr val="0D5E5E"/>
           </a:solidFill>
           <a:ln>
             <a:noFill/>
@@ -28088,7 +31356,7 @@
             <a:r>
               <a:rPr sz="1600" b="1">
                 <a:solidFill>
-                  <a:srgbClr val="1B3A5C"/>
+                  <a:srgbClr val="0D5E5E"/>
                 </a:solidFill>
                 <a:latin typeface="Microsoft YaHei"/>
               </a:rPr>
@@ -28556,6 +31824,49 @@
               </a:rPr>
               <a:t>公允价值变动之后，其账面价值和公允价值之间形成应纳税暂时性差异或可抵扣暂时性差异，应确认为递延所得税负债或者递延所得税资产。查看“公允价值变动损益”等相关科目金额在企业所得税年度汇算清缴时是否进行纳税调增或调减。</a:t>
             </a:r>
+          </a:p>
+        </p:txBody>
+      </p:sp>
+      <p:sp>
+        <p:nvSpPr>
+          <p:cNvPr id="4" name="Rectangle 3"/>
+          <p:cNvSpPr/>
+          <p:nvPr/>
+        </p:nvSpPr>
+        <p:spPr>
+          <a:xfrm>
+            <a:off x="457200" y="6720840"/>
+            <a:ext cx="11277295" cy="27432"/>
+          </a:xfrm>
+          <a:prstGeom prst="rect">
+            <a:avLst/>
+          </a:prstGeom>
+          <a:solidFill>
+            <a:srgbClr val="0D5E5E"/>
+          </a:solidFill>
+          <a:ln>
+            <a:noFill/>
+          </a:ln>
+        </p:spPr>
+        <p:style>
+          <a:lnRef idx="1">
+            <a:schemeClr val="accent1"/>
+          </a:lnRef>
+          <a:fillRef idx="3">
+            <a:schemeClr val="accent1"/>
+          </a:fillRef>
+          <a:effectRef idx="2">
+            <a:schemeClr val="accent1"/>
+          </a:effectRef>
+          <a:fontRef idx="minor">
+            <a:schemeClr val="lt1"/>
+          </a:fontRef>
+        </p:style>
+        <p:txBody>
+          <a:bodyPr rtlCol="0" anchor="ctr"/>
+          <a:lstStyle/>
+          <a:p>
+            <a:pPr algn="ctr"/>
           </a:p>
         </p:txBody>
       </p:sp>
@@ -28592,7 +31903,7 @@
             <a:avLst/>
           </a:prstGeom>
           <a:solidFill>
-            <a:srgbClr val="1B3A5C"/>
+            <a:srgbClr val="0D5E5E"/>
           </a:solidFill>
           <a:ln>
             <a:noFill/>
@@ -28664,7 +31975,7 @@
             <a:r>
               <a:rPr sz="1600" b="1">
                 <a:solidFill>
-                  <a:srgbClr val="1B3A5C"/>
+                  <a:srgbClr val="0D5E5E"/>
                 </a:solidFill>
                 <a:latin typeface="Microsoft YaHei"/>
               </a:rPr>
@@ -28934,6 +32245,49 @@
               </a:rPr>
               <a:t>查看投资协议、被投资合伙企业财务报表，合伙企业经营所得分配协议等资料，分析“长期股权投资”，“投资收益”等情形，结合企业所得税纳税申报情况，确认是否存在应申报投资收益未申报的情况。</a:t>
             </a:r>
+          </a:p>
+        </p:txBody>
+      </p:sp>
+      <p:sp>
+        <p:nvSpPr>
+          <p:cNvPr id="4" name="Rectangle 3"/>
+          <p:cNvSpPr/>
+          <p:nvPr/>
+        </p:nvSpPr>
+        <p:spPr>
+          <a:xfrm>
+            <a:off x="457200" y="6720840"/>
+            <a:ext cx="11277295" cy="27432"/>
+          </a:xfrm>
+          <a:prstGeom prst="rect">
+            <a:avLst/>
+          </a:prstGeom>
+          <a:solidFill>
+            <a:srgbClr val="0D5E5E"/>
+          </a:solidFill>
+          <a:ln>
+            <a:noFill/>
+          </a:ln>
+        </p:spPr>
+        <p:style>
+          <a:lnRef idx="1">
+            <a:schemeClr val="accent1"/>
+          </a:lnRef>
+          <a:fillRef idx="3">
+            <a:schemeClr val="accent1"/>
+          </a:fillRef>
+          <a:effectRef idx="2">
+            <a:schemeClr val="accent1"/>
+          </a:effectRef>
+          <a:fontRef idx="minor">
+            <a:schemeClr val="lt1"/>
+          </a:fontRef>
+        </p:style>
+        <p:txBody>
+          <a:bodyPr rtlCol="0" anchor="ctr"/>
+          <a:lstStyle/>
+          <a:p>
+            <a:pPr algn="ctr"/>
           </a:p>
         </p:txBody>
       </p:sp>
@@ -28970,7 +32324,7 @@
             <a:avLst/>
           </a:prstGeom>
           <a:solidFill>
-            <a:srgbClr val="1B3A5C"/>
+            <a:srgbClr val="0D5E5E"/>
           </a:solidFill>
           <a:ln>
             <a:noFill/>
@@ -29042,7 +32396,7 @@
             <a:r>
               <a:rPr sz="1600" b="1">
                 <a:solidFill>
-                  <a:srgbClr val="1B3A5C"/>
+                  <a:srgbClr val="0D5E5E"/>
                 </a:solidFill>
                 <a:latin typeface="Microsoft YaHei"/>
               </a:rPr>
@@ -29224,6 +32578,49 @@
               </a:rPr>
               <a:t>企业应当判断销售产品、视同销售货物、转让财产或者提供劳务取得的所得是否已经及时确认收入，若是未及时确认，企业及时进行调整。在分得产品的日期及时确认产品分成收入。</a:t>
             </a:r>
+          </a:p>
+        </p:txBody>
+      </p:sp>
+      <p:sp>
+        <p:nvSpPr>
+          <p:cNvPr id="4" name="Rectangle 3"/>
+          <p:cNvSpPr/>
+          <p:nvPr/>
+        </p:nvSpPr>
+        <p:spPr>
+          <a:xfrm>
+            <a:off x="457200" y="6720840"/>
+            <a:ext cx="11277295" cy="27432"/>
+          </a:xfrm>
+          <a:prstGeom prst="rect">
+            <a:avLst/>
+          </a:prstGeom>
+          <a:solidFill>
+            <a:srgbClr val="0D5E5E"/>
+          </a:solidFill>
+          <a:ln>
+            <a:noFill/>
+          </a:ln>
+        </p:spPr>
+        <p:style>
+          <a:lnRef idx="1">
+            <a:schemeClr val="accent1"/>
+          </a:lnRef>
+          <a:fillRef idx="3">
+            <a:schemeClr val="accent1"/>
+          </a:fillRef>
+          <a:effectRef idx="2">
+            <a:schemeClr val="accent1"/>
+          </a:effectRef>
+          <a:fontRef idx="minor">
+            <a:schemeClr val="lt1"/>
+          </a:fontRef>
+        </p:style>
+        <p:txBody>
+          <a:bodyPr rtlCol="0" anchor="ctr"/>
+          <a:lstStyle/>
+          <a:p>
+            <a:pPr algn="ctr"/>
           </a:p>
         </p:txBody>
       </p:sp>
@@ -29260,7 +32657,7 @@
             <a:avLst/>
           </a:prstGeom>
           <a:solidFill>
-            <a:srgbClr val="1B3A5C"/>
+            <a:srgbClr val="0D5E5E"/>
           </a:solidFill>
           <a:ln>
             <a:noFill/>
@@ -29332,7 +32729,7 @@
             <a:r>
               <a:rPr sz="1600" b="1">
                 <a:solidFill>
-                  <a:srgbClr val="1B3A5C"/>
+                  <a:srgbClr val="0D5E5E"/>
                 </a:solidFill>
                 <a:latin typeface="Microsoft YaHei"/>
               </a:rPr>
@@ -29734,6 +33131,49 @@
               </a:rPr>
               <a:t>查看债权性投资相关的合同文件及相关会计科目，如“投资收益”“财务费用”“持有至到期投资”“交易性金融资产”“可供出售金融资产”“其他业务收入”等明细账，核实有无其他单位和个人借款而形成的利息收入未计入收入总额，确认该项债权性投资的业务利息收入确认收入日期是否符合税收相关规定。</a:t>
             </a:r>
+          </a:p>
+        </p:txBody>
+      </p:sp>
+      <p:sp>
+        <p:nvSpPr>
+          <p:cNvPr id="4" name="Rectangle 3"/>
+          <p:cNvSpPr/>
+          <p:nvPr/>
+        </p:nvSpPr>
+        <p:spPr>
+          <a:xfrm>
+            <a:off x="457200" y="6720840"/>
+            <a:ext cx="11277295" cy="27432"/>
+          </a:xfrm>
+          <a:prstGeom prst="rect">
+            <a:avLst/>
+          </a:prstGeom>
+          <a:solidFill>
+            <a:srgbClr val="0D5E5E"/>
+          </a:solidFill>
+          <a:ln>
+            <a:noFill/>
+          </a:ln>
+        </p:spPr>
+        <p:style>
+          <a:lnRef idx="1">
+            <a:schemeClr val="accent1"/>
+          </a:lnRef>
+          <a:fillRef idx="3">
+            <a:schemeClr val="accent1"/>
+          </a:fillRef>
+          <a:effectRef idx="2">
+            <a:schemeClr val="accent1"/>
+          </a:effectRef>
+          <a:fontRef idx="minor">
+            <a:schemeClr val="lt1"/>
+          </a:fontRef>
+        </p:style>
+        <p:txBody>
+          <a:bodyPr rtlCol="0" anchor="ctr"/>
+          <a:lstStyle/>
+          <a:p>
+            <a:pPr algn="ctr"/>
           </a:p>
         </p:txBody>
       </p:sp>
@@ -29770,7 +33210,7 @@
             <a:avLst/>
           </a:prstGeom>
           <a:solidFill>
-            <a:srgbClr val="1B3A5C"/>
+            <a:srgbClr val="0D5E5E"/>
           </a:solidFill>
           <a:ln>
             <a:noFill/>
@@ -29842,7 +33282,7 @@
             <a:r>
               <a:rPr sz="1600" b="1">
                 <a:solidFill>
-                  <a:srgbClr val="1B3A5C"/>
+                  <a:srgbClr val="0D5E5E"/>
                 </a:solidFill>
                 <a:latin typeface="Microsoft YaHei"/>
               </a:rPr>
@@ -30244,6 +33684,49 @@
               </a:rPr>
               <a:t>查看租赁合同中收取租金的方式和日期，对照“应收账款”“其他业务收入-租金收入”“银行存款”等科目明细，自查租金收入的会计处理，核实取得的租金是否按规定确认收入；如果交易合同或协议中规定租赁期限跨年度，且租金提前一次性支付的，是否按收入与费用配比原则，在租赁期内分期均匀计入相关年度收入。</a:t>
             </a:r>
+          </a:p>
+        </p:txBody>
+      </p:sp>
+      <p:sp>
+        <p:nvSpPr>
+          <p:cNvPr id="4" name="Rectangle 3"/>
+          <p:cNvSpPr/>
+          <p:nvPr/>
+        </p:nvSpPr>
+        <p:spPr>
+          <a:xfrm>
+            <a:off x="457200" y="6720840"/>
+            <a:ext cx="11277295" cy="27432"/>
+          </a:xfrm>
+          <a:prstGeom prst="rect">
+            <a:avLst/>
+          </a:prstGeom>
+          <a:solidFill>
+            <a:srgbClr val="0D5E5E"/>
+          </a:solidFill>
+          <a:ln>
+            <a:noFill/>
+          </a:ln>
+        </p:spPr>
+        <p:style>
+          <a:lnRef idx="1">
+            <a:schemeClr val="accent1"/>
+          </a:lnRef>
+          <a:fillRef idx="3">
+            <a:schemeClr val="accent1"/>
+          </a:fillRef>
+          <a:effectRef idx="2">
+            <a:schemeClr val="accent1"/>
+          </a:effectRef>
+          <a:fontRef idx="minor">
+            <a:schemeClr val="lt1"/>
+          </a:fontRef>
+        </p:style>
+        <p:txBody>
+          <a:bodyPr rtlCol="0" anchor="ctr"/>
+          <a:lstStyle/>
+          <a:p>
+            <a:pPr algn="ctr"/>
           </a:p>
         </p:txBody>
       </p:sp>
@@ -30280,7 +33763,7 @@
             <a:avLst/>
           </a:prstGeom>
           <a:solidFill>
-            <a:srgbClr val="1B3A5C"/>
+            <a:srgbClr val="0D5E5E"/>
           </a:solidFill>
           <a:ln>
             <a:noFill/>
@@ -30352,7 +33835,7 @@
             <a:r>
               <a:rPr sz="1600" b="1">
                 <a:solidFill>
-                  <a:srgbClr val="1B3A5C"/>
+                  <a:srgbClr val="0D5E5E"/>
                 </a:solidFill>
                 <a:latin typeface="Microsoft YaHei"/>
               </a:rPr>
@@ -30556,6 +34039,49 @@
               </a:rPr>
               <a:t>查看施工合同中关于工程总量、施工进度、款项支付等相关条款以及施工台账关于完工进度的数据，对照“主营业务收入”“其他业务收入”“营业外收入”等，核实相关收入的计算是否正确。</a:t>
             </a:r>
+          </a:p>
+        </p:txBody>
+      </p:sp>
+      <p:sp>
+        <p:nvSpPr>
+          <p:cNvPr id="4" name="Rectangle 3"/>
+          <p:cNvSpPr/>
+          <p:nvPr/>
+        </p:nvSpPr>
+        <p:spPr>
+          <a:xfrm>
+            <a:off x="457200" y="6720840"/>
+            <a:ext cx="11277295" cy="27432"/>
+          </a:xfrm>
+          <a:prstGeom prst="rect">
+            <a:avLst/>
+          </a:prstGeom>
+          <a:solidFill>
+            <a:srgbClr val="0D5E5E"/>
+          </a:solidFill>
+          <a:ln>
+            <a:noFill/>
+          </a:ln>
+        </p:spPr>
+        <p:style>
+          <a:lnRef idx="1">
+            <a:schemeClr val="accent1"/>
+          </a:lnRef>
+          <a:fillRef idx="3">
+            <a:schemeClr val="accent1"/>
+          </a:fillRef>
+          <a:effectRef idx="2">
+            <a:schemeClr val="accent1"/>
+          </a:effectRef>
+          <a:fontRef idx="minor">
+            <a:schemeClr val="lt1"/>
+          </a:fontRef>
+        </p:style>
+        <p:txBody>
+          <a:bodyPr rtlCol="0" anchor="ctr"/>
+          <a:lstStyle/>
+          <a:p>
+            <a:pPr algn="ctr"/>
           </a:p>
         </p:txBody>
       </p:sp>
@@ -30592,7 +34118,7 @@
             <a:avLst/>
           </a:prstGeom>
           <a:solidFill>
-            <a:srgbClr val="1B3A5C"/>
+            <a:srgbClr val="0D5E5E"/>
           </a:solidFill>
           <a:ln>
             <a:noFill/>
@@ -30664,7 +34190,7 @@
             <a:r>
               <a:rPr sz="1600" b="1">
                 <a:solidFill>
-                  <a:srgbClr val="1B3A5C"/>
+                  <a:srgbClr val="0D5E5E"/>
                 </a:solidFill>
                 <a:latin typeface="Microsoft YaHei"/>
               </a:rPr>
@@ -30846,6 +34372,49 @@
               </a:rPr>
               <a:t>查看相关合同以及“主营业务收入”“其他业务收入”“营业外收入”“银行存款”“预收账款”“应付账款”科目，对比开具发票金额及时间与签订的销售合同约定的产品、服务提供时间，核实提供产品或服务时是否按照规定确认收入的实现。</a:t>
             </a:r>
+          </a:p>
+        </p:txBody>
+      </p:sp>
+      <p:sp>
+        <p:nvSpPr>
+          <p:cNvPr id="4" name="Rectangle 3"/>
+          <p:cNvSpPr/>
+          <p:nvPr/>
+        </p:nvSpPr>
+        <p:spPr>
+          <a:xfrm>
+            <a:off x="457200" y="6720840"/>
+            <a:ext cx="11277295" cy="27432"/>
+          </a:xfrm>
+          <a:prstGeom prst="rect">
+            <a:avLst/>
+          </a:prstGeom>
+          <a:solidFill>
+            <a:srgbClr val="0D5E5E"/>
+          </a:solidFill>
+          <a:ln>
+            <a:noFill/>
+          </a:ln>
+        </p:spPr>
+        <p:style>
+          <a:lnRef idx="1">
+            <a:schemeClr val="accent1"/>
+          </a:lnRef>
+          <a:fillRef idx="3">
+            <a:schemeClr val="accent1"/>
+          </a:fillRef>
+          <a:effectRef idx="2">
+            <a:schemeClr val="accent1"/>
+          </a:effectRef>
+          <a:fontRef idx="minor">
+            <a:schemeClr val="lt1"/>
+          </a:fontRef>
+        </p:style>
+        <p:txBody>
+          <a:bodyPr rtlCol="0" anchor="ctr"/>
+          <a:lstStyle/>
+          <a:p>
+            <a:pPr algn="ctr"/>
           </a:p>
         </p:txBody>
       </p:sp>
@@ -30882,7 +34451,7 @@
             <a:avLst/>
           </a:prstGeom>
           <a:solidFill>
-            <a:srgbClr val="1B3A5C"/>
+            <a:srgbClr val="0D5E5E"/>
           </a:solidFill>
           <a:ln>
             <a:noFill/>
@@ -30954,7 +34523,7 @@
             <a:r>
               <a:rPr sz="1600" b="1">
                 <a:solidFill>
-                  <a:srgbClr val="1B3A5C"/>
+                  <a:srgbClr val="0D5E5E"/>
                 </a:solidFill>
                 <a:latin typeface="Microsoft YaHei"/>
               </a:rPr>
@@ -31158,6 +34727,49 @@
               </a:rPr>
               <a:t>查看“生产成本”“营业费用”“管理费用”“销售费用”等科目明细账及有关的记账凭证和原始凭证，核实是否存在重复列支成本费用的情况。</a:t>
             </a:r>
+          </a:p>
+        </p:txBody>
+      </p:sp>
+      <p:sp>
+        <p:nvSpPr>
+          <p:cNvPr id="4" name="Rectangle 3"/>
+          <p:cNvSpPr/>
+          <p:nvPr/>
+        </p:nvSpPr>
+        <p:spPr>
+          <a:xfrm>
+            <a:off x="457200" y="6720840"/>
+            <a:ext cx="11277295" cy="27432"/>
+          </a:xfrm>
+          <a:prstGeom prst="rect">
+            <a:avLst/>
+          </a:prstGeom>
+          <a:solidFill>
+            <a:srgbClr val="0D5E5E"/>
+          </a:solidFill>
+          <a:ln>
+            <a:noFill/>
+          </a:ln>
+        </p:spPr>
+        <p:style>
+          <a:lnRef idx="1">
+            <a:schemeClr val="accent1"/>
+          </a:lnRef>
+          <a:fillRef idx="3">
+            <a:schemeClr val="accent1"/>
+          </a:fillRef>
+          <a:effectRef idx="2">
+            <a:schemeClr val="accent1"/>
+          </a:effectRef>
+          <a:fontRef idx="minor">
+            <a:schemeClr val="lt1"/>
+          </a:fontRef>
+        </p:style>
+        <p:txBody>
+          <a:bodyPr rtlCol="0" anchor="ctr"/>
+          <a:lstStyle/>
+          <a:p>
+            <a:pPr algn="ctr"/>
           </a:p>
         </p:txBody>
       </p:sp>
@@ -31194,7 +34806,7 @@
             <a:avLst/>
           </a:prstGeom>
           <a:solidFill>
-            <a:srgbClr val="1B3A5C"/>
+            <a:srgbClr val="0D5E5E"/>
           </a:solidFill>
           <a:ln>
             <a:noFill/>
@@ -31266,7 +34878,7 @@
             <a:r>
               <a:rPr sz="1600" b="1">
                 <a:solidFill>
-                  <a:srgbClr val="1B3A5C"/>
+                  <a:srgbClr val="0D5E5E"/>
                 </a:solidFill>
                 <a:latin typeface="Microsoft YaHei"/>
               </a:rPr>
@@ -31470,6 +35082,49 @@
               </a:rPr>
               <a:t>查看“应付职工薪酬”“预提费用”“应交税费--土地增值税”等科目是否有年末余额，对汇算清缴内未取得有效凭证的费用是否进行了纳税调整，上年计提的工资，在汇算清缴期结束前未能发放是否进行了纳税调增处理。</a:t>
             </a:r>
+          </a:p>
+        </p:txBody>
+      </p:sp>
+      <p:sp>
+        <p:nvSpPr>
+          <p:cNvPr id="4" name="Rectangle 3"/>
+          <p:cNvSpPr/>
+          <p:nvPr/>
+        </p:nvSpPr>
+        <p:spPr>
+          <a:xfrm>
+            <a:off x="457200" y="6720840"/>
+            <a:ext cx="11277295" cy="27432"/>
+          </a:xfrm>
+          <a:prstGeom prst="rect">
+            <a:avLst/>
+          </a:prstGeom>
+          <a:solidFill>
+            <a:srgbClr val="0D5E5E"/>
+          </a:solidFill>
+          <a:ln>
+            <a:noFill/>
+          </a:ln>
+        </p:spPr>
+        <p:style>
+          <a:lnRef idx="1">
+            <a:schemeClr val="accent1"/>
+          </a:lnRef>
+          <a:fillRef idx="3">
+            <a:schemeClr val="accent1"/>
+          </a:fillRef>
+          <a:effectRef idx="2">
+            <a:schemeClr val="accent1"/>
+          </a:effectRef>
+          <a:fontRef idx="minor">
+            <a:schemeClr val="lt1"/>
+          </a:fontRef>
+        </p:style>
+        <p:txBody>
+          <a:bodyPr rtlCol="0" anchor="ctr"/>
+          <a:lstStyle/>
+          <a:p>
+            <a:pPr algn="ctr"/>
           </a:p>
         </p:txBody>
       </p:sp>
@@ -31506,7 +35161,7 @@
             <a:avLst/>
           </a:prstGeom>
           <a:solidFill>
-            <a:srgbClr val="1B3A5C"/>
+            <a:srgbClr val="0D5E5E"/>
           </a:solidFill>
           <a:ln>
             <a:noFill/>
@@ -31578,7 +35233,7 @@
             <a:r>
               <a:rPr sz="1600" b="1">
                 <a:solidFill>
-                  <a:srgbClr val="1B3A5C"/>
+                  <a:srgbClr val="0D5E5E"/>
                 </a:solidFill>
                 <a:latin typeface="Microsoft YaHei"/>
               </a:rPr>
@@ -31848,6 +35503,49 @@
               </a:rPr>
               <a:t>查看“长期待摊费用”“管理费用”“固定资产-融资租入固定资产”“累计折旧”等科目，核实是否将经营性租赁的固定资产按合同约定租赁期限计入“长期待摊费用”均匀摊销，是否将融资租入固定资产计入“固定资产-融资租入固定资产”按照规定期限计提折旧；核实是否将由出租方承担的车辆保险费、车船使用税等计入“管理费用”列支。</a:t>
             </a:r>
+          </a:p>
+        </p:txBody>
+      </p:sp>
+      <p:sp>
+        <p:nvSpPr>
+          <p:cNvPr id="4" name="Rectangle 3"/>
+          <p:cNvSpPr/>
+          <p:nvPr/>
+        </p:nvSpPr>
+        <p:spPr>
+          <a:xfrm>
+            <a:off x="457200" y="6720840"/>
+            <a:ext cx="11277295" cy="27432"/>
+          </a:xfrm>
+          <a:prstGeom prst="rect">
+            <a:avLst/>
+          </a:prstGeom>
+          <a:solidFill>
+            <a:srgbClr val="0D5E5E"/>
+          </a:solidFill>
+          <a:ln>
+            <a:noFill/>
+          </a:ln>
+        </p:spPr>
+        <p:style>
+          <a:lnRef idx="1">
+            <a:schemeClr val="accent1"/>
+          </a:lnRef>
+          <a:fillRef idx="3">
+            <a:schemeClr val="accent1"/>
+          </a:fillRef>
+          <a:effectRef idx="2">
+            <a:schemeClr val="accent1"/>
+          </a:effectRef>
+          <a:fontRef idx="minor">
+            <a:schemeClr val="lt1"/>
+          </a:fontRef>
+        </p:style>
+        <p:txBody>
+          <a:bodyPr rtlCol="0" anchor="ctr"/>
+          <a:lstStyle/>
+          <a:p>
+            <a:pPr algn="ctr"/>
           </a:p>
         </p:txBody>
       </p:sp>
@@ -31884,7 +35582,7 @@
             <a:avLst/>
           </a:prstGeom>
           <a:solidFill>
-            <a:srgbClr val="1B3A5C"/>
+            <a:srgbClr val="0D5E5E"/>
           </a:solidFill>
           <a:ln>
             <a:noFill/>
@@ -31956,7 +35654,7 @@
             <a:r>
               <a:rPr sz="1600" b="1">
                 <a:solidFill>
-                  <a:srgbClr val="1B3A5C"/>
+                  <a:srgbClr val="0D5E5E"/>
                 </a:solidFill>
                 <a:latin typeface="Microsoft YaHei"/>
               </a:rPr>
@@ -32160,6 +35858,49 @@
               </a:rPr>
               <a:t>查看“资产减值准备”科目，对当年计提的减值准备进行梳理，对不符合税前扣除的减值准备进行纳税调整。</a:t>
             </a:r>
+          </a:p>
+        </p:txBody>
+      </p:sp>
+      <p:sp>
+        <p:nvSpPr>
+          <p:cNvPr id="4" name="Rectangle 3"/>
+          <p:cNvSpPr/>
+          <p:nvPr/>
+        </p:nvSpPr>
+        <p:spPr>
+          <a:xfrm>
+            <a:off x="457200" y="6720840"/>
+            <a:ext cx="11277295" cy="27432"/>
+          </a:xfrm>
+          <a:prstGeom prst="rect">
+            <a:avLst/>
+          </a:prstGeom>
+          <a:solidFill>
+            <a:srgbClr val="0D5E5E"/>
+          </a:solidFill>
+          <a:ln>
+            <a:noFill/>
+          </a:ln>
+        </p:spPr>
+        <p:style>
+          <a:lnRef idx="1">
+            <a:schemeClr val="accent1"/>
+          </a:lnRef>
+          <a:fillRef idx="3">
+            <a:schemeClr val="accent1"/>
+          </a:fillRef>
+          <a:effectRef idx="2">
+            <a:schemeClr val="accent1"/>
+          </a:effectRef>
+          <a:fontRef idx="minor">
+            <a:schemeClr val="lt1"/>
+          </a:fontRef>
+        </p:style>
+        <p:txBody>
+          <a:bodyPr rtlCol="0" anchor="ctr"/>
+          <a:lstStyle/>
+          <a:p>
+            <a:pPr algn="ctr"/>
           </a:p>
         </p:txBody>
       </p:sp>
@@ -32196,7 +35937,7 @@
             <a:avLst/>
           </a:prstGeom>
           <a:solidFill>
-            <a:srgbClr val="1B3A5C"/>
+            <a:srgbClr val="0D5E5E"/>
           </a:solidFill>
           <a:ln>
             <a:noFill/>
@@ -32268,7 +36009,7 @@
             <a:r>
               <a:rPr sz="1600" b="1">
                 <a:solidFill>
-                  <a:srgbClr val="1B3A5C"/>
+                  <a:srgbClr val="0D5E5E"/>
                 </a:solidFill>
                 <a:latin typeface="Microsoft YaHei"/>
               </a:rPr>
@@ -32516,6 +36257,49 @@
               </a:rPr>
               <a:t>查看“交易性金融资产--成本”“投资收益--交易性金融资产-手续费支出”等明细科目及相应的记账凭证，核实是否存在交易费用，该项费用是否计入交易性金融资产初始成本。</a:t>
             </a:r>
+          </a:p>
+        </p:txBody>
+      </p:sp>
+      <p:sp>
+        <p:nvSpPr>
+          <p:cNvPr id="4" name="Rectangle 3"/>
+          <p:cNvSpPr/>
+          <p:nvPr/>
+        </p:nvSpPr>
+        <p:spPr>
+          <a:xfrm>
+            <a:off x="457200" y="6720840"/>
+            <a:ext cx="11277295" cy="27432"/>
+          </a:xfrm>
+          <a:prstGeom prst="rect">
+            <a:avLst/>
+          </a:prstGeom>
+          <a:solidFill>
+            <a:srgbClr val="0D5E5E"/>
+          </a:solidFill>
+          <a:ln>
+            <a:noFill/>
+          </a:ln>
+        </p:spPr>
+        <p:style>
+          <a:lnRef idx="1">
+            <a:schemeClr val="accent1"/>
+          </a:lnRef>
+          <a:fillRef idx="3">
+            <a:schemeClr val="accent1"/>
+          </a:fillRef>
+          <a:effectRef idx="2">
+            <a:schemeClr val="accent1"/>
+          </a:effectRef>
+          <a:fontRef idx="minor">
+            <a:schemeClr val="lt1"/>
+          </a:fontRef>
+        </p:style>
+        <p:txBody>
+          <a:bodyPr rtlCol="0" anchor="ctr"/>
+          <a:lstStyle/>
+          <a:p>
+            <a:pPr algn="ctr"/>
           </a:p>
         </p:txBody>
       </p:sp>
@@ -32552,7 +36336,7 @@
             <a:avLst/>
           </a:prstGeom>
           <a:solidFill>
-            <a:srgbClr val="1B3A5C"/>
+            <a:srgbClr val="0D5E5E"/>
           </a:solidFill>
           <a:ln>
             <a:noFill/>
@@ -32624,7 +36408,7 @@
             <a:r>
               <a:rPr sz="1600" b="1">
                 <a:solidFill>
-                  <a:srgbClr val="1B3A5C"/>
+                  <a:srgbClr val="0D5E5E"/>
                 </a:solidFill>
                 <a:latin typeface="Microsoft YaHei"/>
               </a:rPr>
@@ -33378,6 +37162,49 @@
               </a:rPr>
               <a:t>查看“固定资产清理”“营业外支出”“资产处置损益”“投资收益”等科目明细，核实是否发生资产损失以及资产损失的时间、类型、金额和会计处理。自查留存的资产损失资料是否完整，分析申报扣除的政策依据、理由是否充分，申报扣除金额是否真实准确，数据之间逻辑关系是否相符。</a:t>
             </a:r>
+          </a:p>
+        </p:txBody>
+      </p:sp>
+      <p:sp>
+        <p:nvSpPr>
+          <p:cNvPr id="4" name="Rectangle 3"/>
+          <p:cNvSpPr/>
+          <p:nvPr/>
+        </p:nvSpPr>
+        <p:spPr>
+          <a:xfrm>
+            <a:off x="457200" y="6720840"/>
+            <a:ext cx="11277295" cy="27432"/>
+          </a:xfrm>
+          <a:prstGeom prst="rect">
+            <a:avLst/>
+          </a:prstGeom>
+          <a:solidFill>
+            <a:srgbClr val="0D5E5E"/>
+          </a:solidFill>
+          <a:ln>
+            <a:noFill/>
+          </a:ln>
+        </p:spPr>
+        <p:style>
+          <a:lnRef idx="1">
+            <a:schemeClr val="accent1"/>
+          </a:lnRef>
+          <a:fillRef idx="3">
+            <a:schemeClr val="accent1"/>
+          </a:fillRef>
+          <a:effectRef idx="2">
+            <a:schemeClr val="accent1"/>
+          </a:effectRef>
+          <a:fontRef idx="minor">
+            <a:schemeClr val="lt1"/>
+          </a:fontRef>
+        </p:style>
+        <p:txBody>
+          <a:bodyPr rtlCol="0" anchor="ctr"/>
+          <a:lstStyle/>
+          <a:p>
+            <a:pPr algn="ctr"/>
           </a:p>
         </p:txBody>
       </p:sp>
@@ -33414,7 +37241,7 @@
             <a:avLst/>
           </a:prstGeom>
           <a:solidFill>
-            <a:srgbClr val="1B3A5C"/>
+            <a:srgbClr val="0D5E5E"/>
           </a:solidFill>
           <a:ln>
             <a:noFill/>
@@ -33486,7 +37313,7 @@
             <a:r>
               <a:rPr sz="1600" b="1">
                 <a:solidFill>
-                  <a:srgbClr val="1B3A5C"/>
+                  <a:srgbClr val="0D5E5E"/>
                 </a:solidFill>
                 <a:latin typeface="Microsoft YaHei"/>
               </a:rPr>
@@ -33712,6 +37539,49 @@
               </a:rPr>
               <a:t>核查其他业务支出或专项应付款等科目，审核搬迁合同、立项合同等搬迁过程中相关文书，对收入扣除支出后的余额进行纳税调整。</a:t>
             </a:r>
+          </a:p>
+        </p:txBody>
+      </p:sp>
+      <p:sp>
+        <p:nvSpPr>
+          <p:cNvPr id="4" name="Rectangle 3"/>
+          <p:cNvSpPr/>
+          <p:nvPr/>
+        </p:nvSpPr>
+        <p:spPr>
+          <a:xfrm>
+            <a:off x="457200" y="6720840"/>
+            <a:ext cx="11277295" cy="27432"/>
+          </a:xfrm>
+          <a:prstGeom prst="rect">
+            <a:avLst/>
+          </a:prstGeom>
+          <a:solidFill>
+            <a:srgbClr val="0D5E5E"/>
+          </a:solidFill>
+          <a:ln>
+            <a:noFill/>
+          </a:ln>
+        </p:spPr>
+        <p:style>
+          <a:lnRef idx="1">
+            <a:schemeClr val="accent1"/>
+          </a:lnRef>
+          <a:fillRef idx="3">
+            <a:schemeClr val="accent1"/>
+          </a:fillRef>
+          <a:effectRef idx="2">
+            <a:schemeClr val="accent1"/>
+          </a:effectRef>
+          <a:fontRef idx="minor">
+            <a:schemeClr val="lt1"/>
+          </a:fontRef>
+        </p:style>
+        <p:txBody>
+          <a:bodyPr rtlCol="0" anchor="ctr"/>
+          <a:lstStyle/>
+          <a:p>
+            <a:pPr algn="ctr"/>
           </a:p>
         </p:txBody>
       </p:sp>

--- a/ppts_output_v3/02_企业所得税风险指引.pptx
+++ b/ppts_output_v3/02_企业所得税风险指引.pptx
@@ -3254,6 +3254,7 @@
                 <a:solidFill>
                   <a:srgbClr val="FFFFFF"/>
                 </a:solidFill>
+                <a:latin typeface="Microsoft YaHei"/>
               </a:defRPr>
             </a:pPr>
             <a:r>
@@ -3332,6 +3333,7 @@
                 <a:solidFill>
                   <a:srgbClr val="CCCCCC"/>
                 </a:solidFill>
+                <a:latin typeface="Microsoft YaHei"/>
               </a:defRPr>
             </a:pPr>
             <a:r>
@@ -3367,6 +3369,7 @@
                 <a:solidFill>
                   <a:srgbClr val="AABBCC"/>
                 </a:solidFill>
+                <a:latin typeface="Microsoft YaHei"/>
               </a:defRPr>
             </a:pPr>
             <a:r>
@@ -3438,6 +3441,7 @@
                 <a:solidFill>
                   <a:srgbClr val="FFFFFF"/>
                 </a:solidFill>
+                <a:latin typeface="Microsoft YaHei"/>
               </a:rPr>
               <a:t>企业所得税风险指引  |  风险点 9</a:t>
             </a:r>
@@ -3793,6 +3797,7 @@
                 <a:solidFill>
                   <a:srgbClr val="FFFFFF"/>
                 </a:solidFill>
+                <a:latin typeface="Microsoft YaHei"/>
               </a:rPr>
               <a:t>企业所得税风险指引  |  风险点 10</a:t>
             </a:r>
@@ -4148,6 +4153,7 @@
                 <a:solidFill>
                   <a:srgbClr val="FFFFFF"/>
                 </a:solidFill>
+                <a:latin typeface="Microsoft YaHei"/>
               </a:rPr>
               <a:t>企业所得税风险指引  |  风险点 11</a:t>
             </a:r>
@@ -4481,6 +4487,7 @@
                 <a:solidFill>
                   <a:srgbClr val="FFFFFF"/>
                 </a:solidFill>
+                <a:latin typeface="Microsoft YaHei"/>
               </a:rPr>
               <a:t>企业所得税风险指引  |  风险点 12</a:t>
             </a:r>
@@ -4814,6 +4821,7 @@
                 <a:solidFill>
                   <a:srgbClr val="FFFFFF"/>
                 </a:solidFill>
+                <a:latin typeface="Microsoft YaHei"/>
               </a:rPr>
               <a:t>企业所得税风险指引  |  风险点 13</a:t>
             </a:r>
@@ -5169,6 +5177,7 @@
                 <a:solidFill>
                   <a:srgbClr val="FFFFFF"/>
                 </a:solidFill>
+                <a:latin typeface="Microsoft YaHei"/>
               </a:rPr>
               <a:t>企业所得税风险指引  |  风险点 14</a:t>
             </a:r>
@@ -5524,6 +5533,7 @@
                 <a:solidFill>
                   <a:srgbClr val="FFFFFF"/>
                 </a:solidFill>
+                <a:latin typeface="Microsoft YaHei"/>
               </a:rPr>
               <a:t>企业所得税风险指引  |  风险点 15</a:t>
             </a:r>
@@ -5857,6 +5867,7 @@
                 <a:solidFill>
                   <a:srgbClr val="FFFFFF"/>
                 </a:solidFill>
+                <a:latin typeface="Microsoft YaHei"/>
               </a:rPr>
               <a:t>企业所得税风险指引  |  风险点 16</a:t>
             </a:r>
@@ -6190,6 +6201,7 @@
                 <a:solidFill>
                   <a:srgbClr val="FFFFFF"/>
                 </a:solidFill>
+                <a:latin typeface="Microsoft YaHei"/>
               </a:rPr>
               <a:t>企业所得税风险指引  |  风险点 17</a:t>
             </a:r>
@@ -6523,6 +6535,7 @@
                 <a:solidFill>
                   <a:srgbClr val="FFFFFF"/>
                 </a:solidFill>
+                <a:latin typeface="Microsoft YaHei"/>
               </a:rPr>
               <a:t>企业所得税风险指引  |  风险点 18</a:t>
             </a:r>
@@ -7032,6 +7045,7 @@
                 <a:solidFill>
                   <a:srgbClr val="FFFFFF"/>
                 </a:solidFill>
+                <a:latin typeface="Microsoft YaHei"/>
               </a:rPr>
               <a:t>企业所得税风险指引  |  风险点 1</a:t>
             </a:r>
@@ -7365,6 +7379,7 @@
                 <a:solidFill>
                   <a:srgbClr val="FFFFFF"/>
                 </a:solidFill>
+                <a:latin typeface="Microsoft YaHei"/>
               </a:rPr>
               <a:t>企业所得税风险指引  |  风险点 19</a:t>
             </a:r>
@@ -7720,6 +7735,7 @@
                 <a:solidFill>
                   <a:srgbClr val="FFFFFF"/>
                 </a:solidFill>
+                <a:latin typeface="Microsoft YaHei"/>
               </a:rPr>
               <a:t>企业所得税风险指引  |  风险点 20</a:t>
             </a:r>
@@ -8075,6 +8091,7 @@
                 <a:solidFill>
                   <a:srgbClr val="FFFFFF"/>
                 </a:solidFill>
+                <a:latin typeface="Microsoft YaHei"/>
               </a:rPr>
               <a:t>企业所得税风险指引  |  风险点 21</a:t>
             </a:r>
@@ -8408,6 +8425,7 @@
                 <a:solidFill>
                   <a:srgbClr val="FFFFFF"/>
                 </a:solidFill>
+                <a:latin typeface="Microsoft YaHei"/>
               </a:rPr>
               <a:t>企业所得税风险指引  |  风险点 22</a:t>
             </a:r>
@@ -8741,6 +8759,7 @@
                 <a:solidFill>
                   <a:srgbClr val="FFFFFF"/>
                 </a:solidFill>
+                <a:latin typeface="Microsoft YaHei"/>
               </a:rPr>
               <a:t>企业所得税风险指引  |  风险点 23</a:t>
             </a:r>
@@ -9074,6 +9093,7 @@
                 <a:solidFill>
                   <a:srgbClr val="FFFFFF"/>
                 </a:solidFill>
+                <a:latin typeface="Microsoft YaHei"/>
               </a:rPr>
               <a:t>企业所得税风险指引  |  风险点 24</a:t>
             </a:r>
@@ -9407,6 +9427,7 @@
                 <a:solidFill>
                   <a:srgbClr val="FFFFFF"/>
                 </a:solidFill>
+                <a:latin typeface="Microsoft YaHei"/>
               </a:rPr>
               <a:t>企业所得税风险指引  |  风险点 25</a:t>
             </a:r>
@@ -9784,6 +9805,7 @@
                 <a:solidFill>
                   <a:srgbClr val="FFFFFF"/>
                 </a:solidFill>
+                <a:latin typeface="Microsoft YaHei"/>
               </a:rPr>
               <a:t>企业所得税风险指引  |  风险点 26</a:t>
             </a:r>
@@ -10139,6 +10161,7 @@
                 <a:solidFill>
                   <a:srgbClr val="FFFFFF"/>
                 </a:solidFill>
+                <a:latin typeface="Microsoft YaHei"/>
               </a:rPr>
               <a:t>企业所得税风险指引  |  风险点 27</a:t>
             </a:r>
@@ -10472,6 +10495,7 @@
                 <a:solidFill>
                   <a:srgbClr val="FFFFFF"/>
                 </a:solidFill>
+                <a:latin typeface="Microsoft YaHei"/>
               </a:rPr>
               <a:t>企业所得税风险指引  |  风险点 28</a:t>
             </a:r>
@@ -10805,6 +10829,7 @@
                 <a:solidFill>
                   <a:srgbClr val="FFFFFF"/>
                 </a:solidFill>
+                <a:latin typeface="Microsoft YaHei"/>
               </a:rPr>
               <a:t>企业所得税风险指引  |  风险点 2</a:t>
             </a:r>
@@ -11138,6 +11163,7 @@
                 <a:solidFill>
                   <a:srgbClr val="FFFFFF"/>
                 </a:solidFill>
+                <a:latin typeface="Microsoft YaHei"/>
               </a:rPr>
               <a:t>企业所得税风险指引  |  风险点 29</a:t>
             </a:r>
@@ -11471,6 +11497,7 @@
                 <a:solidFill>
                   <a:srgbClr val="FFFFFF"/>
                 </a:solidFill>
+                <a:latin typeface="Microsoft YaHei"/>
               </a:rPr>
               <a:t>企业所得税风险指引  |  风险点 30</a:t>
             </a:r>
@@ -11870,6 +11897,7 @@
                 <a:solidFill>
                   <a:srgbClr val="FFFFFF"/>
                 </a:solidFill>
+                <a:latin typeface="Microsoft YaHei"/>
               </a:rPr>
               <a:t>企业所得税风险指引  |  风险点 31</a:t>
             </a:r>
@@ -12247,6 +12275,7 @@
                 <a:solidFill>
                   <a:srgbClr val="FFFFFF"/>
                 </a:solidFill>
+                <a:latin typeface="Microsoft YaHei"/>
               </a:rPr>
               <a:t>企业所得税风险指引  |  风险点 32</a:t>
             </a:r>
@@ -12668,6 +12697,7 @@
                 <a:solidFill>
                   <a:srgbClr val="FFFFFF"/>
                 </a:solidFill>
+                <a:latin typeface="Microsoft YaHei"/>
               </a:rPr>
               <a:t>企业所得税风险指引  |  风险点 33</a:t>
             </a:r>
@@ -13023,6 +13053,7 @@
                 <a:solidFill>
                   <a:srgbClr val="FFFFFF"/>
                 </a:solidFill>
+                <a:latin typeface="Microsoft YaHei"/>
               </a:rPr>
               <a:t>企业所得税风险指引  |  风险点 34</a:t>
             </a:r>
@@ -13444,6 +13475,7 @@
                 <a:solidFill>
                   <a:srgbClr val="FFFFFF"/>
                 </a:solidFill>
+                <a:latin typeface="Microsoft YaHei"/>
               </a:rPr>
               <a:t>企业所得税风险指引  |  风险点 35</a:t>
             </a:r>
@@ -13909,6 +13941,7 @@
                 <a:solidFill>
                   <a:srgbClr val="FFFFFF"/>
                 </a:solidFill>
+                <a:latin typeface="Microsoft YaHei"/>
               </a:rPr>
               <a:t>企业所得税风险指引  |  风险点 36</a:t>
             </a:r>
@@ -14242,6 +14275,7 @@
                 <a:solidFill>
                   <a:srgbClr val="FFFFFF"/>
                 </a:solidFill>
+                <a:latin typeface="Microsoft YaHei"/>
               </a:rPr>
               <a:t>企业所得税风险指引  |  风险点 37</a:t>
             </a:r>
@@ -14641,6 +14675,7 @@
                 <a:solidFill>
                   <a:srgbClr val="FFFFFF"/>
                 </a:solidFill>
+                <a:latin typeface="Microsoft YaHei"/>
               </a:rPr>
               <a:t>企业所得税风险指引  |  风险点 38</a:t>
             </a:r>
@@ -14974,6 +15009,7 @@
                 <a:solidFill>
                   <a:srgbClr val="FFFFFF"/>
                 </a:solidFill>
+                <a:latin typeface="Microsoft YaHei"/>
               </a:rPr>
               <a:t>企业所得税风险指引  |  风险点 3</a:t>
             </a:r>
@@ -15329,6 +15365,7 @@
                 <a:solidFill>
                   <a:srgbClr val="FFFFFF"/>
                 </a:solidFill>
+                <a:latin typeface="Microsoft YaHei"/>
               </a:rPr>
               <a:t>企业所得税风险指引  |  风险点 39</a:t>
             </a:r>
@@ -15662,6 +15699,7 @@
                 <a:solidFill>
                   <a:srgbClr val="FFFFFF"/>
                 </a:solidFill>
+                <a:latin typeface="Microsoft YaHei"/>
               </a:rPr>
               <a:t>企业所得税风险指引  |  风险点 40</a:t>
             </a:r>
@@ -16017,6 +16055,7 @@
                 <a:solidFill>
                   <a:srgbClr val="FFFFFF"/>
                 </a:solidFill>
+                <a:latin typeface="Microsoft YaHei"/>
               </a:rPr>
               <a:t>企业所得税风险指引  |  风险点 41</a:t>
             </a:r>
@@ -16394,6 +16433,7 @@
                 <a:solidFill>
                   <a:srgbClr val="FFFFFF"/>
                 </a:solidFill>
+                <a:latin typeface="Microsoft YaHei"/>
               </a:rPr>
               <a:t>企业所得税风险指引  |  风险点 42</a:t>
             </a:r>
@@ -16793,6 +16833,7 @@
                 <a:solidFill>
                   <a:srgbClr val="FFFFFF"/>
                 </a:solidFill>
+                <a:latin typeface="Microsoft YaHei"/>
               </a:rPr>
               <a:t>企业所得税风险指引  |  风险点 43</a:t>
             </a:r>
@@ -17192,6 +17233,7 @@
                 <a:solidFill>
                   <a:srgbClr val="FFFFFF"/>
                 </a:solidFill>
+                <a:latin typeface="Microsoft YaHei"/>
               </a:rPr>
               <a:t>企业所得税风险指引  |  风险点 44</a:t>
             </a:r>
@@ -17525,6 +17567,7 @@
                 <a:solidFill>
                   <a:srgbClr val="FFFFFF"/>
                 </a:solidFill>
+                <a:latin typeface="Microsoft YaHei"/>
               </a:rPr>
               <a:t>企业所得税风险指引  |  风险点 45</a:t>
             </a:r>
@@ -17858,6 +17901,7 @@
                 <a:solidFill>
                   <a:srgbClr val="FFFFFF"/>
                 </a:solidFill>
+                <a:latin typeface="Microsoft YaHei"/>
               </a:rPr>
               <a:t>企业所得税风险指引  |  风险点 46</a:t>
             </a:r>
@@ -18257,6 +18301,7 @@
                 <a:solidFill>
                   <a:srgbClr val="FFFFFF"/>
                 </a:solidFill>
+                <a:latin typeface="Microsoft YaHei"/>
               </a:rPr>
               <a:t>企业所得税风险指引  |  风险点 47</a:t>
             </a:r>
@@ -18590,6 +18635,7 @@
                 <a:solidFill>
                   <a:srgbClr val="FFFFFF"/>
                 </a:solidFill>
+                <a:latin typeface="Microsoft YaHei"/>
               </a:rPr>
               <a:t>企业所得税风险指引  |  风险点 48</a:t>
             </a:r>
@@ -18923,6 +18969,7 @@
                 <a:solidFill>
                   <a:srgbClr val="FFFFFF"/>
                 </a:solidFill>
+                <a:latin typeface="Microsoft YaHei"/>
               </a:rPr>
               <a:t>企业所得税风险指引  |  风险点 4</a:t>
             </a:r>
@@ -19256,6 +19303,7 @@
                 <a:solidFill>
                   <a:srgbClr val="FFFFFF"/>
                 </a:solidFill>
+                <a:latin typeface="Microsoft YaHei"/>
               </a:rPr>
               <a:t>企业所得税风险指引  |  风险点 49</a:t>
             </a:r>
@@ -19611,6 +19659,7 @@
                 <a:solidFill>
                   <a:srgbClr val="FFFFFF"/>
                 </a:solidFill>
+                <a:latin typeface="Microsoft YaHei"/>
               </a:rPr>
               <a:t>企业所得税风险指引  |  风险点 50</a:t>
             </a:r>
@@ -19944,6 +19993,7 @@
                 <a:solidFill>
                   <a:srgbClr val="FFFFFF"/>
                 </a:solidFill>
+                <a:latin typeface="Microsoft YaHei"/>
               </a:rPr>
               <a:t>企业所得税风险指引  |  风险点 51</a:t>
             </a:r>
@@ -20277,6 +20327,7 @@
                 <a:solidFill>
                   <a:srgbClr val="FFFFFF"/>
                 </a:solidFill>
+                <a:latin typeface="Microsoft YaHei"/>
               </a:rPr>
               <a:t>企业所得税风险指引  |  风险点 52</a:t>
             </a:r>
@@ -20610,6 +20661,7 @@
                 <a:solidFill>
                   <a:srgbClr val="FFFFFF"/>
                 </a:solidFill>
+                <a:latin typeface="Microsoft YaHei"/>
               </a:rPr>
               <a:t>企业所得税风险指引  |  风险点 53</a:t>
             </a:r>
@@ -20965,6 +21017,7 @@
                 <a:solidFill>
                   <a:srgbClr val="FFFFFF"/>
                 </a:solidFill>
+                <a:latin typeface="Microsoft YaHei"/>
               </a:rPr>
               <a:t>企业所得税风险指引  |  风险点 54</a:t>
             </a:r>
@@ -21364,6 +21417,7 @@
                 <a:solidFill>
                   <a:srgbClr val="FFFFFF"/>
                 </a:solidFill>
+                <a:latin typeface="Microsoft YaHei"/>
               </a:rPr>
               <a:t>企业所得税风险指引  |  风险点 55</a:t>
             </a:r>
@@ -21697,6 +21751,7 @@
                 <a:solidFill>
                   <a:srgbClr val="FFFFFF"/>
                 </a:solidFill>
+                <a:latin typeface="Microsoft YaHei"/>
               </a:rPr>
               <a:t>企业所得税风险指引  |  风险点 56</a:t>
             </a:r>
@@ -22030,6 +22085,7 @@
                 <a:solidFill>
                   <a:srgbClr val="FFFFFF"/>
                 </a:solidFill>
+                <a:latin typeface="Microsoft YaHei"/>
               </a:rPr>
               <a:t>企业所得税风险指引  |  风险点 57</a:t>
             </a:r>
@@ -22451,6 +22507,7 @@
                 <a:solidFill>
                   <a:srgbClr val="FFFFFF"/>
                 </a:solidFill>
+                <a:latin typeface="Microsoft YaHei"/>
               </a:rPr>
               <a:t>企业所得税风险指引  |  风险点 58</a:t>
             </a:r>
@@ -22806,6 +22863,7 @@
                 <a:solidFill>
                   <a:srgbClr val="FFFFFF"/>
                 </a:solidFill>
+                <a:latin typeface="Microsoft YaHei"/>
               </a:rPr>
               <a:t>企业所得税风险指引  |  风险点 5</a:t>
             </a:r>
@@ -23139,6 +23197,7 @@
                 <a:solidFill>
                   <a:srgbClr val="FFFFFF"/>
                 </a:solidFill>
+                <a:latin typeface="Microsoft YaHei"/>
               </a:rPr>
               <a:t>企业所得税风险指引  |  风险点 59</a:t>
             </a:r>
@@ -23472,6 +23531,7 @@
                 <a:solidFill>
                   <a:srgbClr val="FFFFFF"/>
                 </a:solidFill>
+                <a:latin typeface="Microsoft YaHei"/>
               </a:rPr>
               <a:t>企业所得税风险指引  |  风险点 60</a:t>
             </a:r>
@@ -23827,6 +23887,7 @@
                 <a:solidFill>
                   <a:srgbClr val="FFFFFF"/>
                 </a:solidFill>
+                <a:latin typeface="Microsoft YaHei"/>
               </a:rPr>
               <a:t>企业所得税风险指引  |  风险点 61</a:t>
             </a:r>
@@ -24160,6 +24221,7 @@
                 <a:solidFill>
                   <a:srgbClr val="FFFFFF"/>
                 </a:solidFill>
+                <a:latin typeface="Microsoft YaHei"/>
               </a:rPr>
               <a:t>企业所得税风险指引  |  风险点 62</a:t>
             </a:r>
@@ -24493,6 +24555,7 @@
                 <a:solidFill>
                   <a:srgbClr val="FFFFFF"/>
                 </a:solidFill>
+                <a:latin typeface="Microsoft YaHei"/>
               </a:rPr>
               <a:t>企业所得税风险指引  |  风险点 63</a:t>
             </a:r>
@@ -24892,6 +24955,7 @@
                 <a:solidFill>
                   <a:srgbClr val="FFFFFF"/>
                 </a:solidFill>
+                <a:latin typeface="Microsoft YaHei"/>
               </a:rPr>
               <a:t>企业所得税风险指引  |  风险点 64</a:t>
             </a:r>
@@ -25225,6 +25289,7 @@
                 <a:solidFill>
                   <a:srgbClr val="FFFFFF"/>
                 </a:solidFill>
+                <a:latin typeface="Microsoft YaHei"/>
               </a:rPr>
               <a:t>企业所得税风险指引  |  风险点 65</a:t>
             </a:r>
@@ -25558,6 +25623,7 @@
                 <a:solidFill>
                   <a:srgbClr val="FFFFFF"/>
                 </a:solidFill>
+                <a:latin typeface="Microsoft YaHei"/>
               </a:rPr>
               <a:t>企业所得税风险指引  |  风险点 66</a:t>
             </a:r>
@@ -25957,6 +26023,7 @@
                 <a:solidFill>
                   <a:srgbClr val="FFFFFF"/>
                 </a:solidFill>
+                <a:latin typeface="Microsoft YaHei"/>
               </a:rPr>
               <a:t>企业所得税风险指引  |  风险点 67</a:t>
             </a:r>
@@ -26356,6 +26423,7 @@
                 <a:solidFill>
                   <a:srgbClr val="FFFFFF"/>
                 </a:solidFill>
+                <a:latin typeface="Microsoft YaHei"/>
               </a:rPr>
               <a:t>企业所得税风险指引  |  风险点 68</a:t>
             </a:r>
@@ -26887,6 +26955,7 @@
                 <a:solidFill>
                   <a:srgbClr val="FFFFFF"/>
                 </a:solidFill>
+                <a:latin typeface="Microsoft YaHei"/>
               </a:rPr>
               <a:t>企业所得税风险指引  |  风险点 6</a:t>
             </a:r>
@@ -27220,6 +27289,7 @@
                 <a:solidFill>
                   <a:srgbClr val="FFFFFF"/>
                 </a:solidFill>
+                <a:latin typeface="Microsoft YaHei"/>
               </a:rPr>
               <a:t>企业所得税风险指引  |  风险点 69</a:t>
             </a:r>
@@ -27685,6 +27755,7 @@
                 <a:solidFill>
                   <a:srgbClr val="FFFFFF"/>
                 </a:solidFill>
+                <a:latin typeface="Microsoft YaHei"/>
               </a:rPr>
               <a:t>企业所得税风险指引  |  风险点 70</a:t>
             </a:r>
@@ -28062,6 +28133,7 @@
                 <a:solidFill>
                   <a:srgbClr val="FFFFFF"/>
                 </a:solidFill>
+                <a:latin typeface="Microsoft YaHei"/>
               </a:rPr>
               <a:t>企业所得税风险指引  |  风险点 71</a:t>
             </a:r>
@@ -28637,6 +28709,7 @@
                 <a:solidFill>
                   <a:srgbClr val="FFFFFF"/>
                 </a:solidFill>
+                <a:latin typeface="Microsoft YaHei"/>
               </a:rPr>
               <a:t>企业所得税风险指引  |  风险点 72</a:t>
             </a:r>
@@ -29058,6 +29131,7 @@
                 <a:solidFill>
                   <a:srgbClr val="FFFFFF"/>
                 </a:solidFill>
+                <a:latin typeface="Microsoft YaHei"/>
               </a:rPr>
               <a:t>企业所得税风险指引  |  风险点 73</a:t>
             </a:r>
@@ -29633,6 +29707,7 @@
                 <a:solidFill>
                   <a:srgbClr val="FFFFFF"/>
                 </a:solidFill>
+                <a:latin typeface="Microsoft YaHei"/>
               </a:rPr>
               <a:t>企业所得税风险指引  |  风险点 74</a:t>
             </a:r>
@@ -30230,6 +30305,7 @@
                 <a:solidFill>
                   <a:srgbClr val="FFFFFF"/>
                 </a:solidFill>
+                <a:latin typeface="Microsoft YaHei"/>
               </a:rPr>
               <a:t>企业所得税风险指引  |  风险点 75</a:t>
             </a:r>
@@ -30761,6 +30837,7 @@
                 <a:solidFill>
                   <a:srgbClr val="FFFFFF"/>
                 </a:solidFill>
+                <a:latin typeface="Microsoft YaHei"/>
               </a:rPr>
               <a:t>企业所得税风险指引  |  风险点 76</a:t>
             </a:r>
@@ -31314,6 +31391,7 @@
                 <a:solidFill>
                   <a:srgbClr val="FFFFFF"/>
                 </a:solidFill>
+                <a:latin typeface="Microsoft YaHei"/>
               </a:rPr>
               <a:t>企业所得税风险指引  |  风险点 77</a:t>
             </a:r>
@@ -31933,6 +32011,7 @@
                 <a:solidFill>
                   <a:srgbClr val="FFFFFF"/>
                 </a:solidFill>
+                <a:latin typeface="Microsoft YaHei"/>
               </a:rPr>
               <a:t>企业所得税风险指引  |  风险点 78</a:t>
             </a:r>
@@ -32354,6 +32433,7 @@
                 <a:solidFill>
                   <a:srgbClr val="FFFFFF"/>
                 </a:solidFill>
+                <a:latin typeface="Microsoft YaHei"/>
               </a:rPr>
               <a:t>企业所得税风险指引  |  风险点 7</a:t>
             </a:r>
@@ -32687,6 +32767,7 @@
                 <a:solidFill>
                   <a:srgbClr val="FFFFFF"/>
                 </a:solidFill>
+                <a:latin typeface="Microsoft YaHei"/>
               </a:rPr>
               <a:t>企业所得税风险指引  |  风险点 79</a:t>
             </a:r>
@@ -33240,6 +33321,7 @@
                 <a:solidFill>
                   <a:srgbClr val="FFFFFF"/>
                 </a:solidFill>
+                <a:latin typeface="Microsoft YaHei"/>
               </a:rPr>
               <a:t>企业所得税风险指引  |  风险点 80</a:t>
             </a:r>
@@ -33793,6 +33875,7 @@
                 <a:solidFill>
                   <a:srgbClr val="FFFFFF"/>
                 </a:solidFill>
+                <a:latin typeface="Microsoft YaHei"/>
               </a:rPr>
               <a:t>企业所得税风险指引  |  风险点 81</a:t>
             </a:r>
@@ -34148,6 +34231,7 @@
                 <a:solidFill>
                   <a:srgbClr val="FFFFFF"/>
                 </a:solidFill>
+                <a:latin typeface="Microsoft YaHei"/>
               </a:rPr>
               <a:t>企业所得税风险指引  |  风险点 82</a:t>
             </a:r>
@@ -34481,6 +34565,7 @@
                 <a:solidFill>
                   <a:srgbClr val="FFFFFF"/>
                 </a:solidFill>
+                <a:latin typeface="Microsoft YaHei"/>
               </a:rPr>
               <a:t>企业所得税风险指引  |  风险点 83</a:t>
             </a:r>
@@ -34836,6 +34921,7 @@
                 <a:solidFill>
                   <a:srgbClr val="FFFFFF"/>
                 </a:solidFill>
+                <a:latin typeface="Microsoft YaHei"/>
               </a:rPr>
               <a:t>企业所得税风险指引  |  风险点 84</a:t>
             </a:r>
@@ -35191,6 +35277,7 @@
                 <a:solidFill>
                   <a:srgbClr val="FFFFFF"/>
                 </a:solidFill>
+                <a:latin typeface="Microsoft YaHei"/>
               </a:rPr>
               <a:t>企业所得税风险指引  |  风险点 85</a:t>
             </a:r>
@@ -35612,6 +35699,7 @@
                 <a:solidFill>
                   <a:srgbClr val="FFFFFF"/>
                 </a:solidFill>
+                <a:latin typeface="Microsoft YaHei"/>
               </a:rPr>
               <a:t>企业所得税风险指引  |  风险点 86</a:t>
             </a:r>
@@ -35967,6 +36055,7 @@
                 <a:solidFill>
                   <a:srgbClr val="FFFFFF"/>
                 </a:solidFill>
+                <a:latin typeface="Microsoft YaHei"/>
               </a:rPr>
               <a:t>企业所得税风险指引  |  风险点 87</a:t>
             </a:r>
@@ -36366,6 +36455,7 @@
                 <a:solidFill>
                   <a:srgbClr val="FFFFFF"/>
                 </a:solidFill>
+                <a:latin typeface="Microsoft YaHei"/>
               </a:rPr>
               <a:t>企业所得税风险指引  |  风险点 88</a:t>
             </a:r>
@@ -37271,6 +37361,7 @@
                 <a:solidFill>
                   <a:srgbClr val="FFFFFF"/>
                 </a:solidFill>
+                <a:latin typeface="Microsoft YaHei"/>
               </a:rPr>
               <a:t>企业所得税风险指引  |  风险点 8</a:t>
             </a:r>
